--- a/Seminario de Sistemas/Clases/Clase 9 - Casos de uso/Presentacion.pptx
+++ b/Seminario de Sistemas/Clases/Clase 9 - Casos de uso/Presentacion.pptx
@@ -19,6 +19,13 @@
     <p:sldId id="267" r:id="rId18"/>
     <p:sldId id="268" r:id="rId19"/>
     <p:sldId id="269" r:id="rId20"/>
+    <p:sldId id="270" r:id="rId21"/>
+    <p:sldId id="271" r:id="rId22"/>
+    <p:sldId id="272" r:id="rId23"/>
+    <p:sldId id="273" r:id="rId24"/>
+    <p:sldId id="274" r:id="rId25"/>
+    <p:sldId id="275" r:id="rId26"/>
+    <p:sldId id="276" r:id="rId27"/>
   </p:sldIdLst>
   <p:sldSz cx="12191695" cy="6858000" type="screen4x3"/>
   <p:notesSz cx="6858000" cy="9144000"/>
@@ -3619,111 +3626,21 @@
                 </a:solidFill>
                 <a:latin typeface="Calibri"/>
               </a:rPr>
-              <a:t>Taller PI — pasos guiados</a:t>
-            </a:r>
-          </a:p>
-        </p:txBody>
-      </p:sp>
-      <p:sp>
-        <p:nvSpPr>
-          <p:cNvPr id="5" name="Rounded Rectangle 4"/>
-          <p:cNvSpPr/>
-          <p:nvPr/>
-        </p:nvSpPr>
-        <p:spPr>
-          <a:xfrm>
-            <a:off x="457200" y="1234440"/>
-            <a:ext cx="11277295" cy="950976"/>
-          </a:xfrm>
-          <a:prstGeom prst="roundRect">
-            <a:avLst>
-              <a:gd name="adj" fmla="val 12000"/>
-            </a:avLst>
-          </a:prstGeom>
-          <a:solidFill>
-            <a:srgbClr val="F2F2F2"/>
-          </a:solidFill>
-          <a:ln>
-            <a:noFill/>
-          </a:ln>
-        </p:spPr>
-        <p:style>
-          <a:lnRef idx="1">
-            <a:schemeClr val="accent1"/>
-          </a:lnRef>
-          <a:fillRef idx="3">
-            <a:schemeClr val="accent1"/>
-          </a:fillRef>
-          <a:effectRef idx="2">
-            <a:schemeClr val="accent1"/>
-          </a:effectRef>
-          <a:fontRef idx="minor">
-            <a:schemeClr val="lt1"/>
-          </a:fontRef>
-        </p:style>
-        <p:txBody>
-          <a:bodyPr rtlCol="0" anchor="ctr"/>
-          <a:lstStyle/>
-          <a:p>
-            <a:pPr algn="ctr"/>
-          </a:p>
-        </p:txBody>
-      </p:sp>
-      <p:sp>
-        <p:nvSpPr>
-          <p:cNvPr id="6" name="Rounded Rectangle 5"/>
-          <p:cNvSpPr/>
-          <p:nvPr/>
-        </p:nvSpPr>
-        <p:spPr>
-          <a:xfrm>
-            <a:off x="594360" y="1490472"/>
-            <a:ext cx="438912" cy="438912"/>
-          </a:xfrm>
-          <a:prstGeom prst="roundRect">
-            <a:avLst>
-              <a:gd name="adj" fmla="val 12000"/>
-            </a:avLst>
-          </a:prstGeom>
-          <a:solidFill>
-            <a:srgbClr val="095292"/>
-          </a:solidFill>
-          <a:ln>
-            <a:noFill/>
-          </a:ln>
-        </p:spPr>
-        <p:style>
-          <a:lnRef idx="1">
-            <a:schemeClr val="accent1"/>
-          </a:lnRef>
-          <a:fillRef idx="3">
-            <a:schemeClr val="accent1"/>
-          </a:fillRef>
-          <a:effectRef idx="2">
-            <a:schemeClr val="accent1"/>
-          </a:effectRef>
-          <a:fontRef idx="minor">
-            <a:schemeClr val="lt1"/>
-          </a:fontRef>
-        </p:style>
-        <p:txBody>
-          <a:bodyPr rtlCol="0" anchor="ctr"/>
-          <a:lstStyle/>
-          <a:p>
-            <a:pPr algn="ctr"/>
-          </a:p>
-        </p:txBody>
-      </p:sp>
-      <p:sp>
-        <p:nvSpPr>
-          <p:cNvPr id="7" name="TextBox 6"/>
+              <a:t>Precondiciones y postcondiciones son un contrato, no un adorno (1/2)</a:t>
+            </a:r>
+          </a:p>
+        </p:txBody>
+      </p:sp>
+      <p:sp>
+        <p:nvSpPr>
+          <p:cNvPr id="5" name="TextBox 4"/>
           <p:cNvSpPr txBox="1"/>
           <p:nvPr/>
         </p:nvSpPr>
         <p:spPr>
           <a:xfrm>
-            <a:off x="594360" y="1490472"/>
-            <a:ext cx="438912" cy="438912"/>
+            <a:off x="457200" y="1170432"/>
+            <a:ext cx="11277295" cy="5230368"/>
           </a:xfrm>
           <a:prstGeom prst="rect">
             <a:avLst/>
@@ -3731,677 +3648,79 @@
           <a:noFill/>
         </p:spPr>
         <p:txBody>
-          <a:bodyPr wrap="square" anchor="ctr"/>
-          <a:lstStyle/>
-          <a:p>
-            <a:pPr algn="ctr"/>
-            <a:r>
-              <a:rPr sz="1600" b="1" i="0">
-                <a:solidFill>
-                  <a:srgbClr val="FFFFFF"/>
-                </a:solidFill>
-                <a:latin typeface="Calibri"/>
-              </a:rPr>
-              <a:t>1</a:t>
-            </a:r>
-          </a:p>
-        </p:txBody>
-      </p:sp>
-      <p:sp>
-        <p:nvSpPr>
-          <p:cNvPr id="8" name="TextBox 7"/>
-          <p:cNvSpPr txBox="1"/>
-          <p:nvPr/>
-        </p:nvSpPr>
-        <p:spPr>
-          <a:xfrm>
-            <a:off x="1188720" y="1325880"/>
-            <a:ext cx="10271455" cy="786384"/>
-          </a:xfrm>
-          <a:prstGeom prst="rect">
-            <a:avLst/>
-          </a:prstGeom>
-          <a:noFill/>
-        </p:spPr>
-        <p:txBody>
-          <a:bodyPr wrap="square" anchor="ctr"/>
-          <a:lstStyle/>
-          <a:p>
-            <a:r>
-              <a:rPr sz="1400" b="1" i="0">
-                <a:solidFill>
-                  <a:srgbClr val="095292"/>
-                </a:solidFill>
-                <a:latin typeface="Calibri"/>
-              </a:rPr>
-              <a:t>En draw.io, dibujar el limite del sistema rotulado VetCare y ubicar afuera los actores como roles (Recepcionista, Veterinario, Administrador y el servicio externo de mensajeria como actor secundario candidato, que hoy todavia no se conecta a ningun caso de uso); ningun actor puede llamarse con nombre propio ni con cargo inventado.</a:t>
-            </a:r>
-          </a:p>
-        </p:txBody>
-      </p:sp>
-      <p:sp>
-        <p:nvSpPr>
-          <p:cNvPr id="9" name="Rounded Rectangle 8"/>
-          <p:cNvSpPr/>
-          <p:nvPr/>
-        </p:nvSpPr>
-        <p:spPr>
-          <a:xfrm>
-            <a:off x="457200" y="2276856"/>
-            <a:ext cx="11277295" cy="950976"/>
-          </a:xfrm>
-          <a:prstGeom prst="roundRect">
-            <a:avLst>
-              <a:gd name="adj" fmla="val 12000"/>
-            </a:avLst>
-          </a:prstGeom>
-          <a:solidFill>
-            <a:srgbClr val="E8F4FA"/>
-          </a:solidFill>
-          <a:ln>
-            <a:noFill/>
-          </a:ln>
-        </p:spPr>
-        <p:style>
-          <a:lnRef idx="1">
-            <a:schemeClr val="accent1"/>
-          </a:lnRef>
-          <a:fillRef idx="3">
-            <a:schemeClr val="accent1"/>
-          </a:fillRef>
-          <a:effectRef idx="2">
-            <a:schemeClr val="accent1"/>
-          </a:effectRef>
-          <a:fontRef idx="minor">
-            <a:schemeClr val="lt1"/>
-          </a:fontRef>
-        </p:style>
-        <p:txBody>
-          <a:bodyPr rtlCol="0" anchor="ctr"/>
-          <a:lstStyle/>
-          <a:p>
-            <a:pPr algn="ctr"/>
-          </a:p>
-        </p:txBody>
-      </p:sp>
-      <p:sp>
-        <p:nvSpPr>
-          <p:cNvPr id="10" name="Rounded Rectangle 9"/>
-          <p:cNvSpPr/>
-          <p:nvPr/>
-        </p:nvSpPr>
-        <p:spPr>
-          <a:xfrm>
-            <a:off x="594360" y="2532888"/>
-            <a:ext cx="438912" cy="438912"/>
-          </a:xfrm>
-          <a:prstGeom prst="roundRect">
-            <a:avLst>
-              <a:gd name="adj" fmla="val 12000"/>
-            </a:avLst>
-          </a:prstGeom>
-          <a:solidFill>
-            <a:srgbClr val="095292"/>
-          </a:solidFill>
-          <a:ln>
-            <a:noFill/>
-          </a:ln>
-        </p:spPr>
-        <p:style>
-          <a:lnRef idx="1">
-            <a:schemeClr val="accent1"/>
-          </a:lnRef>
-          <a:fillRef idx="3">
-            <a:schemeClr val="accent1"/>
-          </a:fillRef>
-          <a:effectRef idx="2">
-            <a:schemeClr val="accent1"/>
-          </a:effectRef>
-          <a:fontRef idx="minor">
-            <a:schemeClr val="lt1"/>
-          </a:fontRef>
-        </p:style>
-        <p:txBody>
-          <a:bodyPr rtlCol="0" anchor="ctr"/>
-          <a:lstStyle/>
-          <a:p>
-            <a:pPr algn="ctr"/>
-          </a:p>
-        </p:txBody>
-      </p:sp>
-      <p:sp>
-        <p:nvSpPr>
-          <p:cNvPr id="11" name="TextBox 10"/>
-          <p:cNvSpPr txBox="1"/>
-          <p:nvPr/>
-        </p:nvSpPr>
-        <p:spPr>
-          <a:xfrm>
-            <a:off x="594360" y="2532888"/>
-            <a:ext cx="438912" cy="438912"/>
-          </a:xfrm>
-          <a:prstGeom prst="rect">
-            <a:avLst/>
-          </a:prstGeom>
-          <a:noFill/>
-        </p:spPr>
-        <p:txBody>
-          <a:bodyPr wrap="square" anchor="ctr"/>
-          <a:lstStyle/>
-          <a:p>
-            <a:pPr algn="ctr"/>
-            <a:r>
-              <a:rPr sz="1600" b="1" i="0">
-                <a:solidFill>
-                  <a:srgbClr val="FFFFFF"/>
-                </a:solidFill>
-                <a:latin typeface="Calibri"/>
-              </a:rPr>
-              <a:t>2</a:t>
-            </a:r>
-          </a:p>
-        </p:txBody>
-      </p:sp>
-      <p:sp>
-        <p:nvSpPr>
-          <p:cNvPr id="12" name="TextBox 11"/>
-          <p:cNvSpPr txBox="1"/>
-          <p:nvPr/>
-        </p:nvSpPr>
-        <p:spPr>
-          <a:xfrm>
-            <a:off x="1188720" y="2368296"/>
-            <a:ext cx="10271455" cy="786384"/>
-          </a:xfrm>
-          <a:prstGeom prst="rect">
-            <a:avLst/>
-          </a:prstGeom>
-          <a:noFill/>
-        </p:spPr>
-        <p:txBody>
-          <a:bodyPr wrap="square" anchor="ctr"/>
-          <a:lstStyle/>
-          <a:p>
-            <a:r>
-              <a:rPr sz="1400" b="1" i="0">
-                <a:solidFill>
-                  <a:srgbClr val="095292"/>
-                </a:solidFill>
-                <a:latin typeface="Calibri"/>
-              </a:rPr>
-              <a:t>Colocar dentro del limite entre seis y ocho casos de uso derivados del catalogo de RF ya construido, todos redactados como verbo en infinitivo mas objeto del dominio, y borrar de inmediato cualquier elipse que se llame Guardar, Validar, Mostrar o Iniciar pantalla.</a:t>
-            </a:r>
-          </a:p>
-        </p:txBody>
-      </p:sp>
-      <p:sp>
-        <p:nvSpPr>
-          <p:cNvPr id="13" name="Rounded Rectangle 12"/>
-          <p:cNvSpPr/>
-          <p:nvPr/>
-        </p:nvSpPr>
-        <p:spPr>
-          <a:xfrm>
-            <a:off x="457200" y="3319272"/>
-            <a:ext cx="11277295" cy="950976"/>
-          </a:xfrm>
-          <a:prstGeom prst="roundRect">
-            <a:avLst>
-              <a:gd name="adj" fmla="val 12000"/>
-            </a:avLst>
-          </a:prstGeom>
-          <a:solidFill>
-            <a:srgbClr val="F2F2F2"/>
-          </a:solidFill>
-          <a:ln>
-            <a:noFill/>
-          </a:ln>
-        </p:spPr>
-        <p:style>
-          <a:lnRef idx="1">
-            <a:schemeClr val="accent1"/>
-          </a:lnRef>
-          <a:fillRef idx="3">
-            <a:schemeClr val="accent1"/>
-          </a:fillRef>
-          <a:effectRef idx="2">
-            <a:schemeClr val="accent1"/>
-          </a:effectRef>
-          <a:fontRef idx="minor">
-            <a:schemeClr val="lt1"/>
-          </a:fontRef>
-        </p:style>
-        <p:txBody>
-          <a:bodyPr rtlCol="0" anchor="ctr"/>
-          <a:lstStyle/>
-          <a:p>
-            <a:pPr algn="ctr"/>
-          </a:p>
-        </p:txBody>
-      </p:sp>
-      <p:sp>
-        <p:nvSpPr>
-          <p:cNvPr id="14" name="Rounded Rectangle 13"/>
-          <p:cNvSpPr/>
-          <p:nvPr/>
-        </p:nvSpPr>
-        <p:spPr>
-          <a:xfrm>
-            <a:off x="594360" y="3575304"/>
-            <a:ext cx="438912" cy="438912"/>
-          </a:xfrm>
-          <a:prstGeom prst="roundRect">
-            <a:avLst>
-              <a:gd name="adj" fmla="val 12000"/>
-            </a:avLst>
-          </a:prstGeom>
-          <a:solidFill>
-            <a:srgbClr val="095292"/>
-          </a:solidFill>
-          <a:ln>
-            <a:noFill/>
-          </a:ln>
-        </p:spPr>
-        <p:style>
-          <a:lnRef idx="1">
-            <a:schemeClr val="accent1"/>
-          </a:lnRef>
-          <a:fillRef idx="3">
-            <a:schemeClr val="accent1"/>
-          </a:fillRef>
-          <a:effectRef idx="2">
-            <a:schemeClr val="accent1"/>
-          </a:effectRef>
-          <a:fontRef idx="minor">
-            <a:schemeClr val="lt1"/>
-          </a:fontRef>
-        </p:style>
-        <p:txBody>
-          <a:bodyPr rtlCol="0" anchor="ctr"/>
-          <a:lstStyle/>
-          <a:p>
-            <a:pPr algn="ctr"/>
-          </a:p>
-        </p:txBody>
-      </p:sp>
-      <p:sp>
-        <p:nvSpPr>
-          <p:cNvPr id="15" name="TextBox 14"/>
-          <p:cNvSpPr txBox="1"/>
-          <p:nvPr/>
-        </p:nvSpPr>
-        <p:spPr>
-          <a:xfrm>
-            <a:off x="594360" y="3575304"/>
-            <a:ext cx="438912" cy="438912"/>
-          </a:xfrm>
-          <a:prstGeom prst="rect">
-            <a:avLst/>
-          </a:prstGeom>
-          <a:noFill/>
-        </p:spPr>
-        <p:txBody>
-          <a:bodyPr wrap="square" anchor="ctr"/>
-          <a:lstStyle/>
-          <a:p>
-            <a:pPr algn="ctr"/>
-            <a:r>
-              <a:rPr sz="1600" b="1" i="0">
-                <a:solidFill>
-                  <a:srgbClr val="FFFFFF"/>
-                </a:solidFill>
-                <a:latin typeface="Calibri"/>
-              </a:rPr>
-              <a:t>3</a:t>
-            </a:r>
-          </a:p>
-        </p:txBody>
-      </p:sp>
-      <p:sp>
-        <p:nvSpPr>
-          <p:cNvPr id="16" name="TextBox 15"/>
-          <p:cNvSpPr txBox="1"/>
-          <p:nvPr/>
-        </p:nvSpPr>
-        <p:spPr>
-          <a:xfrm>
-            <a:off x="1188720" y="3410712"/>
-            <a:ext cx="10271455" cy="786384"/>
-          </a:xfrm>
-          <a:prstGeom prst="rect">
-            <a:avLst/>
-          </a:prstGeom>
-          <a:noFill/>
-        </p:spPr>
-        <p:txBody>
-          <a:bodyPr wrap="square" anchor="ctr"/>
-          <a:lstStyle/>
-          <a:p>
-            <a:r>
-              <a:rPr sz="1400" b="1" i="0">
-                <a:solidFill>
-                  <a:srgbClr val="095292"/>
-                </a:solidFill>
-                <a:latin typeface="Calibri"/>
-              </a:rPr>
-              <a:t>Construir en Google Docs la matriz de trazabilidad RF a CU: cada requisito funcional debe apuntar al menos a un caso de uso y cada caso de uso debe nacer de al menos un requisito; marcar en rojo los huerfanos que aparezcan y anotar por escrito la decision que se tomara con cada uno.</a:t>
-            </a:r>
-          </a:p>
-        </p:txBody>
-      </p:sp>
-      <p:sp>
-        <p:nvSpPr>
-          <p:cNvPr id="17" name="Rounded Rectangle 16"/>
-          <p:cNvSpPr/>
-          <p:nvPr/>
-        </p:nvSpPr>
-        <p:spPr>
-          <a:xfrm>
-            <a:off x="457200" y="4361688"/>
-            <a:ext cx="11277295" cy="950976"/>
-          </a:xfrm>
-          <a:prstGeom prst="roundRect">
-            <a:avLst>
-              <a:gd name="adj" fmla="val 12000"/>
-            </a:avLst>
-          </a:prstGeom>
-          <a:solidFill>
-            <a:srgbClr val="E8F4FA"/>
-          </a:solidFill>
-          <a:ln>
-            <a:noFill/>
-          </a:ln>
-        </p:spPr>
-        <p:style>
-          <a:lnRef idx="1">
-            <a:schemeClr val="accent1"/>
-          </a:lnRef>
-          <a:fillRef idx="3">
-            <a:schemeClr val="accent1"/>
-          </a:fillRef>
-          <a:effectRef idx="2">
-            <a:schemeClr val="accent1"/>
-          </a:effectRef>
-          <a:fontRef idx="minor">
-            <a:schemeClr val="lt1"/>
-          </a:fontRef>
-        </p:style>
-        <p:txBody>
-          <a:bodyPr rtlCol="0" anchor="ctr"/>
-          <a:lstStyle/>
-          <a:p>
-            <a:pPr algn="ctr"/>
-          </a:p>
-        </p:txBody>
-      </p:sp>
-      <p:sp>
-        <p:nvSpPr>
-          <p:cNvPr id="18" name="Rounded Rectangle 17"/>
-          <p:cNvSpPr/>
-          <p:nvPr/>
-        </p:nvSpPr>
-        <p:spPr>
-          <a:xfrm>
-            <a:off x="594360" y="4617720"/>
-            <a:ext cx="438912" cy="438912"/>
-          </a:xfrm>
-          <a:prstGeom prst="roundRect">
-            <a:avLst>
-              <a:gd name="adj" fmla="val 12000"/>
-            </a:avLst>
-          </a:prstGeom>
-          <a:solidFill>
-            <a:srgbClr val="095292"/>
-          </a:solidFill>
-          <a:ln>
-            <a:noFill/>
-          </a:ln>
-        </p:spPr>
-        <p:style>
-          <a:lnRef idx="1">
-            <a:schemeClr val="accent1"/>
-          </a:lnRef>
-          <a:fillRef idx="3">
-            <a:schemeClr val="accent1"/>
-          </a:fillRef>
-          <a:effectRef idx="2">
-            <a:schemeClr val="accent1"/>
-          </a:effectRef>
-          <a:fontRef idx="minor">
-            <a:schemeClr val="lt1"/>
-          </a:fontRef>
-        </p:style>
-        <p:txBody>
-          <a:bodyPr rtlCol="0" anchor="ctr"/>
-          <a:lstStyle/>
-          <a:p>
-            <a:pPr algn="ctr"/>
-          </a:p>
-        </p:txBody>
-      </p:sp>
-      <p:sp>
-        <p:nvSpPr>
-          <p:cNvPr id="19" name="TextBox 18"/>
-          <p:cNvSpPr txBox="1"/>
-          <p:nvPr/>
-        </p:nvSpPr>
-        <p:spPr>
-          <a:xfrm>
-            <a:off x="594360" y="4617720"/>
-            <a:ext cx="438912" cy="438912"/>
-          </a:xfrm>
-          <a:prstGeom prst="rect">
-            <a:avLst/>
-          </a:prstGeom>
-          <a:noFill/>
-        </p:spPr>
-        <p:txBody>
-          <a:bodyPr wrap="square" anchor="ctr"/>
-          <a:lstStyle/>
-          <a:p>
-            <a:pPr algn="ctr"/>
-            <a:r>
-              <a:rPr sz="1600" b="1" i="0">
-                <a:solidFill>
-                  <a:srgbClr val="FFFFFF"/>
-                </a:solidFill>
-                <a:latin typeface="Calibri"/>
-              </a:rPr>
-              <a:t>4</a:t>
-            </a:r>
-          </a:p>
-        </p:txBody>
-      </p:sp>
-      <p:sp>
-        <p:nvSpPr>
-          <p:cNvPr id="20" name="TextBox 19"/>
-          <p:cNvSpPr txBox="1"/>
-          <p:nvPr/>
-        </p:nvSpPr>
-        <p:spPr>
-          <a:xfrm>
-            <a:off x="1188720" y="4453128"/>
-            <a:ext cx="10271455" cy="786384"/>
-          </a:xfrm>
-          <a:prstGeom prst="rect">
-            <a:avLst/>
-          </a:prstGeom>
-          <a:noFill/>
-        </p:spPr>
-        <p:txBody>
-          <a:bodyPr wrap="square" anchor="ctr"/>
-          <a:lstStyle/>
-          <a:p>
-            <a:r>
-              <a:rPr sz="1500" b="1" i="0">
-                <a:solidFill>
-                  <a:srgbClr val="095292"/>
-                </a:solidFill>
-                <a:latin typeface="Calibri"/>
-              </a:rPr>
-              <a:t>Modelar exactamente una relacion include y una relacion extend en el diagrama, y escribir al lado, en una nota de draw.io, una frase que justifique por que una es obligatoria y la otra condicional; si no se puede justificar, se elimina la flecha.</a:t>
-            </a:r>
-          </a:p>
-        </p:txBody>
-      </p:sp>
-      <p:sp>
-        <p:nvSpPr>
-          <p:cNvPr id="21" name="Rounded Rectangle 20"/>
-          <p:cNvSpPr/>
-          <p:nvPr/>
-        </p:nvSpPr>
-        <p:spPr>
-          <a:xfrm>
-            <a:off x="457200" y="5404104"/>
-            <a:ext cx="11277295" cy="950976"/>
-          </a:xfrm>
-          <a:prstGeom prst="roundRect">
-            <a:avLst>
-              <a:gd name="adj" fmla="val 12000"/>
-            </a:avLst>
-          </a:prstGeom>
-          <a:solidFill>
-            <a:srgbClr val="F2F2F2"/>
-          </a:solidFill>
-          <a:ln>
-            <a:noFill/>
-          </a:ln>
-        </p:spPr>
-        <p:style>
-          <a:lnRef idx="1">
-            <a:schemeClr val="accent1"/>
-          </a:lnRef>
-          <a:fillRef idx="3">
-            <a:schemeClr val="accent1"/>
-          </a:fillRef>
-          <a:effectRef idx="2">
-            <a:schemeClr val="accent1"/>
-          </a:effectRef>
-          <a:fontRef idx="minor">
-            <a:schemeClr val="lt1"/>
-          </a:fontRef>
-        </p:style>
-        <p:txBody>
-          <a:bodyPr rtlCol="0" anchor="ctr"/>
-          <a:lstStyle/>
-          <a:p>
-            <a:pPr algn="ctr"/>
-          </a:p>
-        </p:txBody>
-      </p:sp>
-      <p:sp>
-        <p:nvSpPr>
-          <p:cNvPr id="22" name="Rounded Rectangle 21"/>
-          <p:cNvSpPr/>
-          <p:nvPr/>
-        </p:nvSpPr>
-        <p:spPr>
-          <a:xfrm>
-            <a:off x="594360" y="5660136"/>
-            <a:ext cx="438912" cy="438912"/>
-          </a:xfrm>
-          <a:prstGeom prst="roundRect">
-            <a:avLst>
-              <a:gd name="adj" fmla="val 12000"/>
-            </a:avLst>
-          </a:prstGeom>
-          <a:solidFill>
-            <a:srgbClr val="095292"/>
-          </a:solidFill>
-          <a:ln>
-            <a:noFill/>
-          </a:ln>
-        </p:spPr>
-        <p:style>
-          <a:lnRef idx="1">
-            <a:schemeClr val="accent1"/>
-          </a:lnRef>
-          <a:fillRef idx="3">
-            <a:schemeClr val="accent1"/>
-          </a:fillRef>
-          <a:effectRef idx="2">
-            <a:schemeClr val="accent1"/>
-          </a:effectRef>
-          <a:fontRef idx="minor">
-            <a:schemeClr val="lt1"/>
-          </a:fontRef>
-        </p:style>
-        <p:txBody>
-          <a:bodyPr rtlCol="0" anchor="ctr"/>
-          <a:lstStyle/>
-          <a:p>
-            <a:pPr algn="ctr"/>
-          </a:p>
-        </p:txBody>
-      </p:sp>
-      <p:sp>
-        <p:nvSpPr>
-          <p:cNvPr id="23" name="TextBox 22"/>
-          <p:cNvSpPr txBox="1"/>
-          <p:nvPr/>
-        </p:nvSpPr>
-        <p:spPr>
-          <a:xfrm>
-            <a:off x="594360" y="5660136"/>
-            <a:ext cx="438912" cy="438912"/>
-          </a:xfrm>
-          <a:prstGeom prst="rect">
-            <a:avLst/>
-          </a:prstGeom>
-          <a:noFill/>
-        </p:spPr>
-        <p:txBody>
-          <a:bodyPr wrap="square" anchor="ctr"/>
-          <a:lstStyle/>
-          <a:p>
-            <a:pPr algn="ctr"/>
-            <a:r>
-              <a:rPr sz="1600" b="1" i="0">
-                <a:solidFill>
-                  <a:srgbClr val="FFFFFF"/>
-                </a:solidFill>
-                <a:latin typeface="Calibri"/>
-              </a:rPr>
-              <a:t>5</a:t>
-            </a:r>
-          </a:p>
-        </p:txBody>
-      </p:sp>
-      <p:sp>
-        <p:nvSpPr>
-          <p:cNvPr id="24" name="TextBox 23"/>
-          <p:cNvSpPr txBox="1"/>
-          <p:nvPr/>
-        </p:nvSpPr>
-        <p:spPr>
-          <a:xfrm>
-            <a:off x="1188720" y="5495544"/>
-            <a:ext cx="10271455" cy="786384"/>
-          </a:xfrm>
-          <a:prstGeom prst="rect">
-            <a:avLst/>
-          </a:prstGeom>
-          <a:noFill/>
-        </p:spPr>
-        <p:txBody>
-          <a:bodyPr wrap="square" anchor="ctr"/>
-          <a:lstStyle/>
-          <a:p>
-            <a:r>
-              <a:rPr sz="1400" b="1" i="0">
-                <a:solidFill>
-                  <a:srgbClr val="095292"/>
-                </a:solidFill>
-                <a:latin typeface="Calibri"/>
-              </a:rPr>
-              <a:t>Diligenciar la plantilla completa de especificacion para CU-01 Registrar mascota y CU-02 Buscar expediente, con precondiciones, postcondiciones de exito y de fracaso, flujo principal en pares actor-sistema y minimo dos flujos alternos cada uno; exportar todo a PDF y subirlo a la plataforma del curso.</a:t>
-            </a:r>
-          </a:p>
-        </p:txBody>
-      </p:sp>
-      <p:sp>
-        <p:nvSpPr>
-          <p:cNvPr id="25" name="TextBox 24"/>
+          <a:bodyPr wrap="square">
+            <a:spAutoFit/>
+          </a:bodyPr>
+          <a:lstStyle/>
+          <a:p>
+            <a:pPr>
+              <a:spcAft>
+                <a:spcPts val="800"/>
+              </a:spcAft>
+            </a:pPr>
+            <a:r>
+              <a:rPr sz="2000" b="0" i="0">
+                <a:solidFill>
+                  <a:srgbClr val="333333"/>
+                </a:solidFill>
+                <a:latin typeface="Calibri"/>
+              </a:rPr>
+              <a:t>–   Precondiciones y postcondiciones son un contrato, no un adorno.</a:t>
+            </a:r>
+          </a:p>
+          <a:p>
+            <a:pPr>
+              <a:spcAft>
+                <a:spcPts val="800"/>
+              </a:spcAft>
+            </a:pPr>
+            <a:r>
+              <a:rPr sz="2000" b="0" i="0">
+                <a:solidFill>
+                  <a:srgbClr val="333333"/>
+                </a:solidFill>
+                <a:latin typeface="Calibri"/>
+              </a:rPr>
+              <a:t>–   La precondicion es aquello que debe ser verdadero antes de empezar y que el caso de uso no vuelve a verificar dentro del flujo: si escribimos que el usuario esta autenticado como precondicion de Registrar mascota</a:t>
+            </a:r>
+          </a:p>
+          <a:p>
+            <a:pPr>
+              <a:spcAft>
+                <a:spcPts val="800"/>
+              </a:spcAft>
+            </a:pPr>
+            <a:r>
+              <a:rPr sz="2000" b="0" i="0">
+                <a:solidFill>
+                  <a:srgbClr val="333333"/>
+                </a:solidFill>
+                <a:latin typeface="Calibri"/>
+              </a:rPr>
+              <a:t>–   Entonces el flujo principal no puede tener un paso que diga el sistema pide usuario y contraseña, porque eso ya ocurrio.</a:t>
+            </a:r>
+          </a:p>
+          <a:p>
+            <a:pPr>
+              <a:spcAft>
+                <a:spcPts val="800"/>
+              </a:spcAft>
+            </a:pPr>
+            <a:r>
+              <a:rPr sz="2000" b="0" i="0">
+                <a:solidFill>
+                  <a:srgbClr val="333333"/>
+                </a:solidFill>
+                <a:latin typeface="Calibri"/>
+              </a:rPr>
+              <a:t>–   La postcondicion describe el estado en que queda el sistema cuando el caso termina, y debe ser verificable mirando los datos: en VetCare la postcondicion de exito de Registrar mascota es que existe una ficha con codigo unico asociada a un propietario y que quedo bitacora de quien la creo y cuando; la postcondicion de fracaso es que no queda ningun registro a medias.</a:t>
+            </a:r>
+          </a:p>
+        </p:txBody>
+      </p:sp>
+      <p:sp>
+        <p:nvSpPr>
+          <p:cNvPr id="6" name="TextBox 5"/>
           <p:cNvSpPr txBox="1"/>
           <p:nvPr/>
         </p:nvSpPr>
@@ -4575,154 +3894,21 @@
                 </a:solidFill>
                 <a:latin typeface="Calibri"/>
               </a:rPr>
-              <a:t>Antes de entregar — autochequeo</a:t>
-            </a:r>
-          </a:p>
-        </p:txBody>
-      </p:sp>
-      <p:sp>
-        <p:nvSpPr>
-          <p:cNvPr id="5" name="Rounded Rectangle 4"/>
-          <p:cNvSpPr/>
-          <p:nvPr/>
-        </p:nvSpPr>
-        <p:spPr>
-          <a:xfrm>
-            <a:off x="457200" y="1261872"/>
-            <a:ext cx="11277295" cy="566928"/>
-          </a:xfrm>
-          <a:prstGeom prst="roundRect">
-            <a:avLst>
-              <a:gd name="adj" fmla="val 12000"/>
-            </a:avLst>
-          </a:prstGeom>
-          <a:solidFill>
-            <a:srgbClr val="F2F2F2"/>
-          </a:solidFill>
-          <a:ln>
-            <a:noFill/>
-          </a:ln>
-        </p:spPr>
-        <p:style>
-          <a:lnRef idx="1">
-            <a:schemeClr val="accent1"/>
-          </a:lnRef>
-          <a:fillRef idx="3">
-            <a:schemeClr val="accent1"/>
-          </a:fillRef>
-          <a:effectRef idx="2">
-            <a:schemeClr val="accent1"/>
-          </a:effectRef>
-          <a:fontRef idx="minor">
-            <a:schemeClr val="lt1"/>
-          </a:fontRef>
-        </p:style>
-        <p:txBody>
-          <a:bodyPr rtlCol="0" anchor="ctr"/>
-          <a:lstStyle/>
-          <a:p>
-            <a:pPr algn="ctr"/>
-          </a:p>
-        </p:txBody>
-      </p:sp>
-      <p:sp>
-        <p:nvSpPr>
-          <p:cNvPr id="6" name="Rectangle 5"/>
-          <p:cNvSpPr/>
-          <p:nvPr/>
-        </p:nvSpPr>
-        <p:spPr>
-          <a:xfrm>
-            <a:off x="640080" y="1408175"/>
-            <a:ext cx="274320" cy="274320"/>
-          </a:xfrm>
-          <a:prstGeom prst="rect">
-            <a:avLst/>
-          </a:prstGeom>
-          <a:solidFill>
-            <a:srgbClr val="FFFFFF"/>
-          </a:solidFill>
-          <a:ln>
-            <a:solidFill>
-              <a:srgbClr val="333333"/>
-            </a:solidFill>
-          </a:ln>
-        </p:spPr>
-        <p:style>
-          <a:lnRef idx="1">
-            <a:schemeClr val="accent1"/>
-          </a:lnRef>
-          <a:fillRef idx="3">
-            <a:schemeClr val="accent1"/>
-          </a:fillRef>
-          <a:effectRef idx="2">
-            <a:schemeClr val="accent1"/>
-          </a:effectRef>
-          <a:fontRef idx="minor">
-            <a:schemeClr val="lt1"/>
-          </a:fontRef>
-        </p:style>
-        <p:txBody>
-          <a:bodyPr rtlCol="0" anchor="ctr"/>
-          <a:lstStyle/>
-          <a:p>
-            <a:pPr algn="ctr"/>
-          </a:p>
-        </p:txBody>
-      </p:sp>
-      <p:sp>
-        <p:nvSpPr>
-          <p:cNvPr id="7" name="Rectangle 6"/>
-          <p:cNvSpPr/>
-          <p:nvPr/>
-        </p:nvSpPr>
-        <p:spPr>
-          <a:xfrm>
-            <a:off x="640080" y="1408175"/>
-            <a:ext cx="73152" cy="274320"/>
-          </a:xfrm>
-          <a:prstGeom prst="rect">
-            <a:avLst/>
-          </a:prstGeom>
-          <a:solidFill>
-            <a:srgbClr val="269CCB"/>
-          </a:solidFill>
-          <a:ln>
-            <a:noFill/>
-          </a:ln>
-        </p:spPr>
-        <p:style>
-          <a:lnRef idx="1">
-            <a:schemeClr val="accent1"/>
-          </a:lnRef>
-          <a:fillRef idx="3">
-            <a:schemeClr val="accent1"/>
-          </a:fillRef>
-          <a:effectRef idx="2">
-            <a:schemeClr val="accent1"/>
-          </a:effectRef>
-          <a:fontRef idx="minor">
-            <a:schemeClr val="lt1"/>
-          </a:fontRef>
-        </p:style>
-        <p:txBody>
-          <a:bodyPr rtlCol="0" anchor="ctr"/>
-          <a:lstStyle/>
-          <a:p>
-            <a:pPr algn="ctr"/>
-          </a:p>
-        </p:txBody>
-      </p:sp>
-      <p:sp>
-        <p:nvSpPr>
-          <p:cNvPr id="8" name="TextBox 7"/>
+              <a:t>Precondiciones y postcondiciones son un contrato, no un adorno (2/2)</a:t>
+            </a:r>
+          </a:p>
+        </p:txBody>
+      </p:sp>
+      <p:sp>
+        <p:nvSpPr>
+          <p:cNvPr id="5" name="TextBox 4"/>
           <p:cNvSpPr txBox="1"/>
           <p:nvPr/>
         </p:nvSpPr>
         <p:spPr>
           <a:xfrm>
-            <a:off x="1097280" y="1353312"/>
-            <a:ext cx="10362895" cy="402336"/>
+            <a:off x="457200" y="1170432"/>
+            <a:ext cx="11277295" cy="5230368"/>
           </a:xfrm>
           <a:prstGeom prst="rect">
             <a:avLst/>
@@ -4730,354 +3916,79 @@
           <a:noFill/>
         </p:spPr>
         <p:txBody>
-          <a:bodyPr wrap="square" anchor="ctr"/>
-          <a:lstStyle/>
-          <a:p>
-            <a:r>
-              <a:rPr sz="1500" b="0" i="0">
+          <a:bodyPr wrap="square">
+            <a:spAutoFit/>
+          </a:bodyPr>
+          <a:lstStyle/>
+          <a:p>
+            <a:pPr>
+              <a:spcAft>
+                <a:spcPts val="800"/>
+              </a:spcAft>
+            </a:pPr>
+            <a:r>
+              <a:rPr sz="2000" b="0" i="0">
                 <a:solidFill>
                   <a:srgbClr val="333333"/>
                 </a:solidFill>
                 <a:latin typeface="Calibri"/>
               </a:rPr>
-              <a:t>Si un actor se fuera a almorzar justo despues de ejecutar su caso de uso, quedaria satisfecho o le faltaria algo por hacer?</a:t>
-            </a:r>
-          </a:p>
-        </p:txBody>
-      </p:sp>
-      <p:sp>
-        <p:nvSpPr>
-          <p:cNvPr id="9" name="Rounded Rectangle 8"/>
-          <p:cNvSpPr/>
-          <p:nvPr/>
-        </p:nvSpPr>
-        <p:spPr>
-          <a:xfrm>
-            <a:off x="457200" y="1938528"/>
-            <a:ext cx="11277295" cy="566928"/>
-          </a:xfrm>
-          <a:prstGeom prst="roundRect">
-            <a:avLst>
-              <a:gd name="adj" fmla="val 12000"/>
-            </a:avLst>
-          </a:prstGeom>
-          <a:solidFill>
-            <a:srgbClr val="F2F2F2"/>
-          </a:solidFill>
-          <a:ln>
-            <a:noFill/>
-          </a:ln>
-        </p:spPr>
-        <p:style>
-          <a:lnRef idx="1">
-            <a:schemeClr val="accent1"/>
-          </a:lnRef>
-          <a:fillRef idx="3">
-            <a:schemeClr val="accent1"/>
-          </a:fillRef>
-          <a:effectRef idx="2">
-            <a:schemeClr val="accent1"/>
-          </a:effectRef>
-          <a:fontRef idx="minor">
-            <a:schemeClr val="lt1"/>
-          </a:fontRef>
-        </p:style>
-        <p:txBody>
-          <a:bodyPr rtlCol="0" anchor="ctr"/>
-          <a:lstStyle/>
-          <a:p>
-            <a:pPr algn="ctr"/>
-          </a:p>
-        </p:txBody>
-      </p:sp>
-      <p:sp>
-        <p:nvSpPr>
-          <p:cNvPr id="10" name="Rectangle 9"/>
-          <p:cNvSpPr/>
-          <p:nvPr/>
-        </p:nvSpPr>
-        <p:spPr>
-          <a:xfrm>
-            <a:off x="640080" y="2084832"/>
-            <a:ext cx="274320" cy="274320"/>
-          </a:xfrm>
-          <a:prstGeom prst="rect">
-            <a:avLst/>
-          </a:prstGeom>
-          <a:solidFill>
-            <a:srgbClr val="FFFFFF"/>
-          </a:solidFill>
-          <a:ln>
-            <a:solidFill>
-              <a:srgbClr val="333333"/>
-            </a:solidFill>
-          </a:ln>
-        </p:spPr>
-        <p:style>
-          <a:lnRef idx="1">
-            <a:schemeClr val="accent1"/>
-          </a:lnRef>
-          <a:fillRef idx="3">
-            <a:schemeClr val="accent1"/>
-          </a:fillRef>
-          <a:effectRef idx="2">
-            <a:schemeClr val="accent1"/>
-          </a:effectRef>
-          <a:fontRef idx="minor">
-            <a:schemeClr val="lt1"/>
-          </a:fontRef>
-        </p:style>
-        <p:txBody>
-          <a:bodyPr rtlCol="0" anchor="ctr"/>
-          <a:lstStyle/>
-          <a:p>
-            <a:pPr algn="ctr"/>
-          </a:p>
-        </p:txBody>
-      </p:sp>
-      <p:sp>
-        <p:nvSpPr>
-          <p:cNvPr id="11" name="Rectangle 10"/>
-          <p:cNvSpPr/>
-          <p:nvPr/>
-        </p:nvSpPr>
-        <p:spPr>
-          <a:xfrm>
-            <a:off x="640080" y="2084832"/>
-            <a:ext cx="73152" cy="274320"/>
-          </a:xfrm>
-          <a:prstGeom prst="rect">
-            <a:avLst/>
-          </a:prstGeom>
-          <a:solidFill>
-            <a:srgbClr val="269CCB"/>
-          </a:solidFill>
-          <a:ln>
-            <a:noFill/>
-          </a:ln>
-        </p:spPr>
-        <p:style>
-          <a:lnRef idx="1">
-            <a:schemeClr val="accent1"/>
-          </a:lnRef>
-          <a:fillRef idx="3">
-            <a:schemeClr val="accent1"/>
-          </a:fillRef>
-          <a:effectRef idx="2">
-            <a:schemeClr val="accent1"/>
-          </a:effectRef>
-          <a:fontRef idx="minor">
-            <a:schemeClr val="lt1"/>
-          </a:fontRef>
-        </p:style>
-        <p:txBody>
-          <a:bodyPr rtlCol="0" anchor="ctr"/>
-          <a:lstStyle/>
-          <a:p>
-            <a:pPr algn="ctr"/>
-          </a:p>
-        </p:txBody>
-      </p:sp>
-      <p:sp>
-        <p:nvSpPr>
-          <p:cNvPr id="12" name="TextBox 11"/>
-          <p:cNvSpPr txBox="1"/>
-          <p:nvPr/>
-        </p:nvSpPr>
-        <p:spPr>
-          <a:xfrm>
-            <a:off x="1097280" y="2029968"/>
-            <a:ext cx="10362895" cy="402336"/>
-          </a:xfrm>
-          <a:prstGeom prst="rect">
-            <a:avLst/>
-          </a:prstGeom>
-          <a:noFill/>
-        </p:spPr>
-        <p:txBody>
-          <a:bodyPr wrap="square" anchor="ctr"/>
-          <a:lstStyle/>
-          <a:p>
-            <a:r>
-              <a:rPr sz="1500" b="0" i="0">
+              <a:t>–   Escribirlas asi tiene dos consecuencias practicas enormes.</a:t>
+            </a:r>
+          </a:p>
+          <a:p>
+            <a:pPr>
+              <a:spcAft>
+                <a:spcPts val="800"/>
+              </a:spcAft>
+            </a:pPr>
+            <a:r>
+              <a:rPr sz="2000" b="0" i="0">
                 <a:solidFill>
                   <a:srgbClr val="333333"/>
                 </a:solidFill>
                 <a:latin typeface="Calibri"/>
               </a:rPr>
-              <a:t>Su flujo principal describe pasos del negocio o describe clics sobre una interfaz que todavia no existe?</a:t>
-            </a:r>
-          </a:p>
-        </p:txBody>
-      </p:sp>
-      <p:sp>
-        <p:nvSpPr>
-          <p:cNvPr id="13" name="Rounded Rectangle 12"/>
-          <p:cNvSpPr/>
-          <p:nvPr/>
-        </p:nvSpPr>
-        <p:spPr>
-          <a:xfrm>
-            <a:off x="457200" y="2615184"/>
-            <a:ext cx="11277295" cy="566928"/>
-          </a:xfrm>
-          <a:prstGeom prst="roundRect">
-            <a:avLst>
-              <a:gd name="adj" fmla="val 12000"/>
-            </a:avLst>
-          </a:prstGeom>
-          <a:solidFill>
-            <a:srgbClr val="F2F2F2"/>
-          </a:solidFill>
-          <a:ln>
-            <a:noFill/>
-          </a:ln>
-        </p:spPr>
-        <p:style>
-          <a:lnRef idx="1">
-            <a:schemeClr val="accent1"/>
-          </a:lnRef>
-          <a:fillRef idx="3">
-            <a:schemeClr val="accent1"/>
-          </a:fillRef>
-          <a:effectRef idx="2">
-            <a:schemeClr val="accent1"/>
-          </a:effectRef>
-          <a:fontRef idx="minor">
-            <a:schemeClr val="lt1"/>
-          </a:fontRef>
-        </p:style>
-        <p:txBody>
-          <a:bodyPr rtlCol="0" anchor="ctr"/>
-          <a:lstStyle/>
-          <a:p>
-            <a:pPr algn="ctr"/>
-          </a:p>
-        </p:txBody>
-      </p:sp>
-      <p:sp>
-        <p:nvSpPr>
-          <p:cNvPr id="14" name="Rectangle 13"/>
-          <p:cNvSpPr/>
-          <p:nvPr/>
-        </p:nvSpPr>
-        <p:spPr>
-          <a:xfrm>
-            <a:off x="640080" y="2761488"/>
-            <a:ext cx="274320" cy="274320"/>
-          </a:xfrm>
-          <a:prstGeom prst="rect">
-            <a:avLst/>
-          </a:prstGeom>
-          <a:solidFill>
-            <a:srgbClr val="FFFFFF"/>
-          </a:solidFill>
-          <a:ln>
-            <a:solidFill>
-              <a:srgbClr val="333333"/>
-            </a:solidFill>
-          </a:ln>
-        </p:spPr>
-        <p:style>
-          <a:lnRef idx="1">
-            <a:schemeClr val="accent1"/>
-          </a:lnRef>
-          <a:fillRef idx="3">
-            <a:schemeClr val="accent1"/>
-          </a:fillRef>
-          <a:effectRef idx="2">
-            <a:schemeClr val="accent1"/>
-          </a:effectRef>
-          <a:fontRef idx="minor">
-            <a:schemeClr val="lt1"/>
-          </a:fontRef>
-        </p:style>
-        <p:txBody>
-          <a:bodyPr rtlCol="0" anchor="ctr"/>
-          <a:lstStyle/>
-          <a:p>
-            <a:pPr algn="ctr"/>
-          </a:p>
-        </p:txBody>
-      </p:sp>
-      <p:sp>
-        <p:nvSpPr>
-          <p:cNvPr id="15" name="Rectangle 14"/>
-          <p:cNvSpPr/>
-          <p:nvPr/>
-        </p:nvSpPr>
-        <p:spPr>
-          <a:xfrm>
-            <a:off x="640080" y="2761488"/>
-            <a:ext cx="73152" cy="274320"/>
-          </a:xfrm>
-          <a:prstGeom prst="rect">
-            <a:avLst/>
-          </a:prstGeom>
-          <a:solidFill>
-            <a:srgbClr val="269CCB"/>
-          </a:solidFill>
-          <a:ln>
-            <a:noFill/>
-          </a:ln>
-        </p:spPr>
-        <p:style>
-          <a:lnRef idx="1">
-            <a:schemeClr val="accent1"/>
-          </a:lnRef>
-          <a:fillRef idx="3">
-            <a:schemeClr val="accent1"/>
-          </a:fillRef>
-          <a:effectRef idx="2">
-            <a:schemeClr val="accent1"/>
-          </a:effectRef>
-          <a:fontRef idx="minor">
-            <a:schemeClr val="lt1"/>
-          </a:fontRef>
-        </p:style>
-        <p:txBody>
-          <a:bodyPr rtlCol="0" anchor="ctr"/>
-          <a:lstStyle/>
-          <a:p>
-            <a:pPr algn="ctr"/>
-          </a:p>
-        </p:txBody>
-      </p:sp>
-      <p:sp>
-        <p:nvSpPr>
-          <p:cNvPr id="16" name="TextBox 15"/>
-          <p:cNvSpPr txBox="1"/>
-          <p:nvPr/>
-        </p:nvSpPr>
-        <p:spPr>
-          <a:xfrm>
-            <a:off x="1097280" y="2706624"/>
-            <a:ext cx="10362895" cy="402336"/>
-          </a:xfrm>
-          <a:prstGeom prst="rect">
-            <a:avLst/>
-          </a:prstGeom>
-          <a:noFill/>
-        </p:spPr>
-        <p:txBody>
-          <a:bodyPr wrap="square" anchor="ctr"/>
-          <a:lstStyle/>
-          <a:p>
-            <a:r>
-              <a:rPr sz="1500" b="0" i="0">
+              <a:t>–   Primero, cada postcondicion se convierte casi automaticamente en un caso de prueba, porque describe algo que se puede ir a comprobar.</a:t>
+            </a:r>
+          </a:p>
+          <a:p>
+            <a:pPr>
+              <a:spcAft>
+                <a:spcPts val="800"/>
+              </a:spcAft>
+            </a:pPr>
+            <a:r>
+              <a:rPr sz="2000" b="0" i="0">
                 <a:solidFill>
                   <a:srgbClr val="333333"/>
                 </a:solidFill>
                 <a:latin typeface="Calibri"/>
               </a:rPr>
-              <a:t>Que pasa en Huellitas cuando el propietario no esta registrado, cuando la busqueda no devuelve nada y cuando hay dos mascotas con el mismo nombre? Aparece eso escrito en algun flujo alterno?</a:t>
-            </a:r>
-          </a:p>
-        </p:txBody>
-      </p:sp>
-      <p:sp>
-        <p:nvSpPr>
-          <p:cNvPr id="17" name="TextBox 16"/>
+              <a:t>–   Segundo, resuelve la discusion entre los tres casos de matricula: el estudiante que solo cursa Seminario cierra con este documento y su prototipo navegable y ya entrego un producto completo</a:t>
+            </a:r>
+          </a:p>
+          <a:p>
+            <a:pPr>
+              <a:spcAft>
+                <a:spcPts val="800"/>
+              </a:spcAft>
+            </a:pPr>
+            <a:r>
+              <a:rPr sz="2000" b="0" i="0">
+                <a:solidFill>
+                  <a:srgbClr val="333333"/>
+                </a:solidFill>
+                <a:latin typeface="Calibri"/>
+              </a:rPr>
+              <a:t>–   Mientras que el que solo cursa Programacion II recibe estas postcondiciones y sabe exactamente que debe dejar guardado su codigo, sin tener que adivinar ni volver a entrevistar a la clinica.</a:t>
+            </a:r>
+          </a:p>
+        </p:txBody>
+      </p:sp>
+      <p:sp>
+        <p:nvSpPr>
+          <p:cNvPr id="6" name="TextBox 5"/>
           <p:cNvSpPr txBox="1"/>
           <p:nvPr/>
         </p:nvSpPr>
@@ -5251,21 +4162,141 @@
                 </a:solidFill>
                 <a:latin typeface="Calibri"/>
               </a:rPr>
-              <a:t>Criterios de exito / entregable</a:t>
-            </a:r>
-          </a:p>
-        </p:txBody>
-      </p:sp>
-      <p:sp>
-        <p:nvSpPr>
-          <p:cNvPr id="5" name="TextBox 4"/>
+              <a:t>CU-02 Buscar expediente: la especificacion que el diagrama no muestra</a:t>
+            </a:r>
+          </a:p>
+        </p:txBody>
+      </p:sp>
+      <p:sp>
+        <p:nvSpPr>
+          <p:cNvPr id="5" name="Rounded Rectangle 4"/>
+          <p:cNvSpPr/>
+          <p:nvPr/>
+        </p:nvSpPr>
+        <p:spPr>
+          <a:xfrm>
+            <a:off x="457200" y="1261872"/>
+            <a:ext cx="11277295" cy="4773168"/>
+          </a:xfrm>
+          <a:prstGeom prst="roundRect">
+            <a:avLst>
+              <a:gd name="adj" fmla="val 12000"/>
+            </a:avLst>
+          </a:prstGeom>
+          <a:solidFill>
+            <a:srgbClr val="1E2A38"/>
+          </a:solidFill>
+          <a:ln>
+            <a:noFill/>
+          </a:ln>
+        </p:spPr>
+        <p:style>
+          <a:lnRef idx="1">
+            <a:schemeClr val="accent1"/>
+          </a:lnRef>
+          <a:fillRef idx="3">
+            <a:schemeClr val="accent1"/>
+          </a:fillRef>
+          <a:effectRef idx="2">
+            <a:schemeClr val="accent1"/>
+          </a:effectRef>
+          <a:fontRef idx="minor">
+            <a:schemeClr val="lt1"/>
+          </a:fontRef>
+        </p:style>
+        <p:txBody>
+          <a:bodyPr rtlCol="0" anchor="ctr"/>
+          <a:lstStyle/>
+          <a:p>
+            <a:pPr algn="ctr"/>
+          </a:p>
+        </p:txBody>
+      </p:sp>
+      <p:sp>
+        <p:nvSpPr>
+          <p:cNvPr id="6" name="Rectangle 5"/>
+          <p:cNvSpPr/>
+          <p:nvPr/>
+        </p:nvSpPr>
+        <p:spPr>
+          <a:xfrm>
+            <a:off x="457200" y="1261872"/>
+            <a:ext cx="11277295" cy="320040"/>
+          </a:xfrm>
+          <a:prstGeom prst="rect">
+            <a:avLst/>
+          </a:prstGeom>
+          <a:solidFill>
+            <a:srgbClr val="095292"/>
+          </a:solidFill>
+          <a:ln>
+            <a:noFill/>
+          </a:ln>
+        </p:spPr>
+        <p:style>
+          <a:lnRef idx="1">
+            <a:schemeClr val="accent1"/>
+          </a:lnRef>
+          <a:fillRef idx="3">
+            <a:schemeClr val="accent1"/>
+          </a:fillRef>
+          <a:effectRef idx="2">
+            <a:schemeClr val="accent1"/>
+          </a:effectRef>
+          <a:fontRef idx="minor">
+            <a:schemeClr val="lt1"/>
+          </a:fontRef>
+        </p:style>
+        <p:txBody>
+          <a:bodyPr rtlCol="0" anchor="ctr"/>
+          <a:lstStyle/>
+          <a:p>
+            <a:pPr algn="ctr"/>
+          </a:p>
+        </p:txBody>
+      </p:sp>
+      <p:sp>
+        <p:nvSpPr>
+          <p:cNvPr id="7" name="TextBox 6"/>
           <p:cNvSpPr txBox="1"/>
           <p:nvPr/>
         </p:nvSpPr>
         <p:spPr>
           <a:xfrm>
-            <a:off x="457200" y="1170432"/>
-            <a:ext cx="11277295" cy="5230368"/>
+            <a:off x="685800" y="1307592"/>
+            <a:ext cx="10820095" cy="256032"/>
+          </a:xfrm>
+          <a:prstGeom prst="rect">
+            <a:avLst/>
+          </a:prstGeom>
+          <a:noFill/>
+        </p:spPr>
+        <p:txBody>
+          <a:bodyPr wrap="square" anchor="ctr"/>
+          <a:lstStyle/>
+          <a:p>
+            <a:r>
+              <a:rPr sz="1000" b="1" i="0">
+                <a:solidFill>
+                  <a:srgbClr val="269CCB"/>
+                </a:solidFill>
+                <a:latin typeface="Calibri"/>
+              </a:rPr>
+              <a:t>● ● ●</a:t>
+            </a:r>
+          </a:p>
+        </p:txBody>
+      </p:sp>
+      <p:sp>
+        <p:nvSpPr>
+          <p:cNvPr id="8" name="TextBox 7"/>
+          <p:cNvSpPr txBox="1"/>
+          <p:nvPr/>
+        </p:nvSpPr>
+        <p:spPr>
+          <a:xfrm>
+            <a:off x="777240" y="1719072"/>
+            <a:ext cx="10637215" cy="4133087"/>
           </a:xfrm>
           <a:prstGeom prst="rect">
             <a:avLst/>
@@ -5280,212 +4311,267 @@
           <a:p>
             <a:pPr>
               <a:spcAft>
-                <a:spcPts val="800"/>
+                <a:spcPts val="400"/>
               </a:spcAft>
             </a:pPr>
             <a:r>
-              <a:rPr sz="2000" b="0" i="0">
-                <a:solidFill>
-                  <a:srgbClr val="333333"/>
-                </a:solidFill>
-                <a:latin typeface="Calibri"/>
-              </a:rPr>
-              <a:t>–   </a:t>
-            </a:r>
-            <a:r>
-              <a:rPr sz="2000" b="1" i="0">
-                <a:solidFill>
-                  <a:srgbClr val="333333"/>
-                </a:solidFill>
-                <a:latin typeface="Calibri"/>
-              </a:rPr>
-              <a:t>Entregable:</a:t>
-            </a:r>
-            <a:r>
-              <a:rPr sz="2000" b="0" i="0">
-                <a:solidFill>
-                  <a:srgbClr val="333333"/>
-                </a:solidFill>
-                <a:latin typeface="Calibri"/>
-              </a:rPr>
-              <a:t> Un PDF con el diagrama de casos de uso, la matriz de trazabilidad RF a CU y las dos especificaciones textuales completas (precondiciones, postcondiciones, flujo principal y minimo dos flujos alternos cada una), subido a la plataforma del curso.</a:t>
+              <a:rPr sz="1400" b="0" i="0">
+                <a:solidFill>
+                  <a:srgbClr val="FFFFFF"/>
+                </a:solidFill>
+                <a:latin typeface="Calibri"/>
+              </a:rPr>
+              <a:t>CU-02  Buscar expediente</a:t>
             </a:r>
           </a:p>
           <a:p>
             <a:pPr>
               <a:spcAft>
-                <a:spcPts val="800"/>
+                <a:spcPts val="400"/>
               </a:spcAft>
             </a:pPr>
             <a:r>
-              <a:rPr sz="2000" b="0" i="0">
-                <a:solidFill>
-                  <a:srgbClr val="333333"/>
-                </a:solidFill>
-                <a:latin typeface="Calibri"/>
-              </a:rPr>
-              <a:t>–   </a:t>
-            </a:r>
-            <a:r>
-              <a:rPr sz="2000" b="1" i="0">
-                <a:solidFill>
-                  <a:srgbClr val="333333"/>
-                </a:solidFill>
-                <a:latin typeface="Calibri"/>
-              </a:rPr>
-              <a:t>Exito:</a:t>
-            </a:r>
-            <a:r>
-              <a:rPr sz="2000" b="0" i="0">
-                <a:solidFill>
-                  <a:srgbClr val="333333"/>
-                </a:solidFill>
-                <a:latin typeface="Calibri"/>
-              </a:rPr>
-              <a:t> El diagrama tiene limite de sistema rotulado, actores como roles y ningun caso de uso con nombre de boton, pantalla u operacion tecnica.</a:t>
+              <a:rPr sz="1400" b="0" i="0">
+                <a:solidFill>
+                  <a:srgbClr val="FFFFFF"/>
+                </a:solidFill>
+                <a:latin typeface="Calibri"/>
+              </a:rPr>
+              <a:t>Actor primario: Veterinario  |  Prioridad: Alta  |  Cubre: RF-05, RNF-02</a:t>
             </a:r>
           </a:p>
           <a:p>
             <a:pPr>
               <a:spcAft>
-                <a:spcPts val="800"/>
+                <a:spcPts val="400"/>
               </a:spcAft>
             </a:pPr>
             <a:r>
-              <a:rPr sz="2000" b="0" i="0">
-                <a:solidFill>
-                  <a:srgbClr val="333333"/>
-                </a:solidFill>
-                <a:latin typeface="Calibri"/>
-              </a:rPr>
-              <a:t>–   </a:t>
-            </a:r>
-            <a:r>
-              <a:rPr sz="2000" b="1" i="0">
-                <a:solidFill>
-                  <a:srgbClr val="333333"/>
-                </a:solidFill>
-                <a:latin typeface="Calibri"/>
-              </a:rPr>
-              <a:t>Exito:</a:t>
-            </a:r>
-            <a:r>
-              <a:rPr sz="2000" b="0" i="0">
-                <a:solidFill>
-                  <a:srgbClr val="333333"/>
-                </a:solidFill>
-                <a:latin typeface="Calibri"/>
-              </a:rPr>
-              <a:t> La matriz de trazabilidad no tiene huerfanos sin decision escrita: todo RF llega al menos a un CU o queda documentado como pendiente, y todo CU nace al menos de un RF.</a:t>
+              <a:rPr sz="1400" b="0" i="0">
+                <a:solidFill>
+                  <a:srgbClr val="FFFFFF"/>
+                </a:solidFill>
+                <a:latin typeface="Calibri"/>
+              </a:rPr>
+              <a:t>Precondicion: el veterinario esta autenticado y la mascota existe en el sistema.</a:t>
             </a:r>
           </a:p>
           <a:p>
             <a:pPr>
               <a:spcAft>
-                <a:spcPts val="800"/>
+                <a:spcPts val="400"/>
               </a:spcAft>
             </a:pPr>
             <a:r>
-              <a:rPr sz="2000" b="0" i="0">
-                <a:solidFill>
-                  <a:srgbClr val="333333"/>
-                </a:solidFill>
-                <a:latin typeface="Calibri"/>
-              </a:rPr>
-              <a:t>–   </a:t>
-            </a:r>
-            <a:r>
-              <a:rPr sz="2000" b="1" i="0">
-                <a:solidFill>
-                  <a:srgbClr val="333333"/>
-                </a:solidFill>
-                <a:latin typeface="Calibri"/>
-              </a:rPr>
-              <a:t>Exito:</a:t>
-            </a:r>
-            <a:r>
-              <a:rPr sz="2000" b="0" i="0">
-                <a:solidFill>
-                  <a:srgbClr val="333333"/>
-                </a:solidFill>
-                <a:latin typeface="Calibri"/>
-              </a:rPr>
-              <a:t> Las dos especificaciones tienen precondicion, postcondicion de exito, postcondicion de fracaso y flujo principal numerado en pares actor-sistema.</a:t>
+              <a:rPr sz="1400" b="0" i="0">
+                <a:solidFill>
+                  <a:srgbClr val="FFFFFF"/>
+                </a:solidFill>
+                <a:latin typeface="Calibri"/>
+              </a:rPr>
+              <a:t>Postcondicion (exito): el expediente queda desplegado y la consulta queda en bitacora; no se modifica ningun dato clinico.</a:t>
             </a:r>
           </a:p>
           <a:p>
             <a:pPr>
               <a:spcAft>
-                <a:spcPts val="800"/>
+                <a:spcPts val="400"/>
               </a:spcAft>
             </a:pPr>
             <a:r>
-              <a:rPr sz="2000" b="0" i="0">
-                <a:solidFill>
-                  <a:srgbClr val="333333"/>
-                </a:solidFill>
-                <a:latin typeface="Calibri"/>
-              </a:rPr>
-              <a:t>–   </a:t>
-            </a:r>
-            <a:r>
-              <a:rPr sz="2000" b="1" i="0">
-                <a:solidFill>
-                  <a:srgbClr val="333333"/>
-                </a:solidFill>
-                <a:latin typeface="Calibri"/>
-              </a:rPr>
-              <a:t>Exito:</a:t>
-            </a:r>
-            <a:r>
-              <a:rPr sz="2000" b="0" i="0">
-                <a:solidFill>
-                  <a:srgbClr val="333333"/>
-                </a:solidFill>
-                <a:latin typeface="Calibri"/>
-              </a:rPr>
-              <a:t> Cada especificacion incluye minimo dos flujos alternos numerados respecto al paso del flujo principal donde se desvian.</a:t>
+              <a:rPr sz="1400" b="0" i="0">
+                <a:solidFill>
+                  <a:srgbClr val="FFFFFF"/>
+                </a:solidFill>
+                <a:latin typeface="Calibri"/>
+              </a:rPr>
+              <a:t>Flujo principal:</a:t>
             </a:r>
           </a:p>
           <a:p>
             <a:pPr>
               <a:spcAft>
-                <a:spcPts val="800"/>
+                <a:spcPts val="400"/>
               </a:spcAft>
             </a:pPr>
             <a:r>
-              <a:rPr sz="2000" b="0" i="0">
-                <a:solidFill>
-                  <a:srgbClr val="333333"/>
-                </a:solidFill>
-                <a:latin typeface="Calibri"/>
-              </a:rPr>
-              <a:t>–   </a:t>
-            </a:r>
-            <a:r>
-              <a:rPr sz="2000" b="1" i="0">
-                <a:solidFill>
-                  <a:srgbClr val="333333"/>
-                </a:solidFill>
-                <a:latin typeface="Calibri"/>
-              </a:rPr>
-              <a:t>Entrega en la plataforma del curso</a:t>
-            </a:r>
-            <a:r>
-              <a:rPr sz="2000" b="0" i="0">
-                <a:solidFill>
-                  <a:srgbClr val="333333"/>
-                </a:solidFill>
-                <a:latin typeface="Calibri"/>
-              </a:rPr>
-              <a:t> — en la fecha que indique el docente.</a:t>
-            </a:r>
-          </a:p>
-        </p:txBody>
-      </p:sp>
-      <p:sp>
-        <p:nvSpPr>
-          <p:cNvPr id="6" name="TextBox 5"/>
+              <a:rPr sz="1400" b="0" i="0">
+                <a:solidFill>
+                  <a:srgbClr val="FFFFFF"/>
+                </a:solidFill>
+                <a:latin typeface="Calibri"/>
+              </a:rPr>
+              <a:t>  1. El veterinario digita codigo, nombre de mascota o documento del propietario.</a:t>
+            </a:r>
+          </a:p>
+          <a:p>
+            <a:pPr>
+              <a:spcAft>
+                <a:spcPts val="400"/>
+              </a:spcAft>
+            </a:pPr>
+            <a:r>
+              <a:rPr sz="1400" b="0" i="0">
+                <a:solidFill>
+                  <a:srgbClr val="FFFFFF"/>
+                </a:solidFill>
+                <a:latin typeface="Calibri"/>
+              </a:rPr>
+              <a:t>  2. El sistema devuelve la lista de coincidencias en menos de 3 segundos (RNF-02).</a:t>
+            </a:r>
+          </a:p>
+          <a:p>
+            <a:pPr>
+              <a:spcAft>
+                <a:spcPts val="400"/>
+              </a:spcAft>
+            </a:pPr>
+            <a:r>
+              <a:rPr sz="1400" b="0" i="0">
+                <a:solidFill>
+                  <a:srgbClr val="FFFFFF"/>
+                </a:solidFill>
+                <a:latin typeface="Calibri"/>
+              </a:rPr>
+              <a:t>  3. El veterinario selecciona una mascota de la lista.</a:t>
+            </a:r>
+          </a:p>
+          <a:p>
+            <a:pPr>
+              <a:spcAft>
+                <a:spcPts val="400"/>
+              </a:spcAft>
+            </a:pPr>
+            <a:r>
+              <a:rPr sz="1400" b="0" i="0">
+                <a:solidFill>
+                  <a:srgbClr val="FFFFFF"/>
+                </a:solidFill>
+                <a:latin typeface="Calibri"/>
+              </a:rPr>
+              <a:t>  4. El sistema muestra ficha, historial de consultas y vacunas en orden cronologico.</a:t>
+            </a:r>
+          </a:p>
+          <a:p>
+            <a:pPr>
+              <a:spcAft>
+                <a:spcPts val="400"/>
+              </a:spcAft>
+            </a:pPr>
+            <a:r>
+              <a:rPr sz="1400" b="0" i="0">
+                <a:solidFill>
+                  <a:srgbClr val="FFFFFF"/>
+                </a:solidFill>
+                <a:latin typeface="Calibri"/>
+              </a:rPr>
+              <a:t>Flujos alternos:</a:t>
+            </a:r>
+          </a:p>
+          <a:p>
+            <a:pPr>
+              <a:spcAft>
+                <a:spcPts val="400"/>
+              </a:spcAft>
+            </a:pPr>
+            <a:r>
+              <a:rPr sz="1400" b="0" i="0">
+                <a:solidFill>
+                  <a:srgbClr val="FFFFFF"/>
+                </a:solidFill>
+                <a:latin typeface="Calibri"/>
+              </a:rPr>
+              <a:t>  2a. Sin coincidencias: el sistema informa y ofrece registrar la mascota (pasa a CU-01).</a:t>
+            </a:r>
+          </a:p>
+          <a:p>
+            <a:pPr>
+              <a:spcAft>
+                <a:spcPts val="400"/>
+              </a:spcAft>
+            </a:pPr>
+            <a:r>
+              <a:rPr sz="1400" b="0" i="0">
+                <a:solidFill>
+                  <a:srgbClr val="FFFFFF"/>
+                </a:solidFill>
+                <a:latin typeface="Calibri"/>
+              </a:rPr>
+              <a:t>  2b. Mas de 50 coincidencias: el sistema pagina el resultado y sugiere afinar el filtro.</a:t>
+            </a:r>
+          </a:p>
+          <a:p>
+            <a:pPr>
+              <a:spcAft>
+                <a:spcPts val="400"/>
+              </a:spcAft>
+            </a:pPr>
+            <a:r>
+              <a:rPr sz="1400" b="0" i="0">
+                <a:solidFill>
+                  <a:srgbClr val="FFFFFF"/>
+                </a:solidFill>
+                <a:latin typeface="Calibri"/>
+              </a:rPr>
+              <a:t>  4a. La mascota esta inactiva: el sistema muestra el expediente en modo solo lectura.</a:t>
+            </a:r>
+          </a:p>
+          <a:p>
+            <a:pPr>
+              <a:spcAft>
+                <a:spcPts val="400"/>
+              </a:spcAft>
+            </a:pPr>
+            <a:r>
+              <a:rPr sz="1400" b="0" i="0">
+                <a:solidFill>
+                  <a:srgbClr val="FFFFFF"/>
+                </a:solidFill>
+                <a:latin typeface="Calibri"/>
+              </a:rPr>
+              <a:t>Punto de extension: despues del paso 4 puede ejecutarse CU-06 Exportar expediente a PDF.</a:t>
+            </a:r>
+          </a:p>
+        </p:txBody>
+      </p:sp>
+      <p:sp>
+        <p:nvSpPr>
+          <p:cNvPr id="9" name="TextBox 8"/>
+          <p:cNvSpPr txBox="1"/>
+          <p:nvPr/>
+        </p:nvSpPr>
+        <p:spPr>
+          <a:xfrm>
+            <a:off x="457200" y="6080760"/>
+            <a:ext cx="11277295" cy="320040"/>
+          </a:xfrm>
+          <a:prstGeom prst="rect">
+            <a:avLst/>
+          </a:prstGeom>
+          <a:noFill/>
+        </p:spPr>
+        <p:txBody>
+          <a:bodyPr wrap="square">
+            <a:spAutoFit/>
+          </a:bodyPr>
+          <a:lstStyle/>
+          <a:p>
+            <a:pPr algn="ctr"/>
+            <a:r>
+              <a:rPr sz="1200" b="0" i="1">
+                <a:solidFill>
+                  <a:srgbClr val="666666"/>
+                </a:solidFill>
+                <a:latin typeface="Calibri"/>
+              </a:rPr>
+              <a:t>El diagrama solo dice que existe Buscar expediente; unicamente la especificacion dice que hace el sistema cuando no hay coincidencias.</a:t>
+            </a:r>
+          </a:p>
+        </p:txBody>
+      </p:sp>
+      <p:sp>
+        <p:nvSpPr>
+          <p:cNvPr id="10" name="TextBox 9"/>
           <p:cNvSpPr txBox="1"/>
           <p:nvPr/>
         </p:nvSpPr>
@@ -5659,109 +4745,21 @@
                 </a:solidFill>
                 <a:latin typeface="Calibri"/>
               </a:rPr>
-              <a:t>Para el PI esta semana</a:t>
-            </a:r>
-          </a:p>
-        </p:txBody>
-      </p:sp>
-      <p:sp>
-        <p:nvSpPr>
-          <p:cNvPr id="5" name="Rounded Rectangle 4"/>
-          <p:cNvSpPr/>
-          <p:nvPr/>
-        </p:nvSpPr>
-        <p:spPr>
-          <a:xfrm>
-            <a:off x="457200" y="1261872"/>
-            <a:ext cx="11277295" cy="1051560"/>
-          </a:xfrm>
-          <a:prstGeom prst="roundRect">
-            <a:avLst>
-              <a:gd name="adj" fmla="val 12000"/>
-            </a:avLst>
-          </a:prstGeom>
-          <a:solidFill>
-            <a:srgbClr val="E8F4FA"/>
-          </a:solidFill>
-          <a:ln>
-            <a:noFill/>
-          </a:ln>
-        </p:spPr>
-        <p:style>
-          <a:lnRef idx="1">
-            <a:schemeClr val="accent1"/>
-          </a:lnRef>
-          <a:fillRef idx="3">
-            <a:schemeClr val="accent1"/>
-          </a:fillRef>
-          <a:effectRef idx="2">
-            <a:schemeClr val="accent1"/>
-          </a:effectRef>
-          <a:fontRef idx="minor">
-            <a:schemeClr val="lt1"/>
-          </a:fontRef>
-        </p:style>
-        <p:txBody>
-          <a:bodyPr rtlCol="0" anchor="ctr"/>
-          <a:lstStyle/>
-          <a:p>
-            <a:pPr algn="ctr"/>
-          </a:p>
-        </p:txBody>
-      </p:sp>
-      <p:sp>
-        <p:nvSpPr>
-          <p:cNvPr id="6" name="Rectangle 5"/>
-          <p:cNvSpPr/>
-          <p:nvPr/>
-        </p:nvSpPr>
-        <p:spPr>
-          <a:xfrm>
-            <a:off x="457200" y="1261872"/>
-            <a:ext cx="128016" cy="1051560"/>
-          </a:xfrm>
-          <a:prstGeom prst="rect">
-            <a:avLst/>
-          </a:prstGeom>
-          <a:solidFill>
-            <a:srgbClr val="269CCB"/>
-          </a:solidFill>
-          <a:ln>
-            <a:noFill/>
-          </a:ln>
-        </p:spPr>
-        <p:style>
-          <a:lnRef idx="1">
-            <a:schemeClr val="accent1"/>
-          </a:lnRef>
-          <a:fillRef idx="3">
-            <a:schemeClr val="accent1"/>
-          </a:fillRef>
-          <a:effectRef idx="2">
-            <a:schemeClr val="accent1"/>
-          </a:effectRef>
-          <a:fontRef idx="minor">
-            <a:schemeClr val="lt1"/>
-          </a:fontRef>
-        </p:style>
-        <p:txBody>
-          <a:bodyPr rtlCol="0" anchor="ctr"/>
-          <a:lstStyle/>
-          <a:p>
-            <a:pPr algn="ctr"/>
-          </a:p>
-        </p:txBody>
-      </p:sp>
-      <p:sp>
-        <p:nvSpPr>
-          <p:cNvPr id="7" name="TextBox 6"/>
+              <a:t>Demo del dia</a:t>
+            </a:r>
+          </a:p>
+        </p:txBody>
+      </p:sp>
+      <p:sp>
+        <p:nvSpPr>
+          <p:cNvPr id="5" name="TextBox 4"/>
           <p:cNvSpPr txBox="1"/>
           <p:nvPr/>
         </p:nvSpPr>
         <p:spPr>
           <a:xfrm>
-            <a:off x="777240" y="1399031"/>
-            <a:ext cx="10774375" cy="822959"/>
+            <a:off x="457200" y="1170432"/>
+            <a:ext cx="11277295" cy="5230368"/>
           </a:xfrm>
           <a:prstGeom prst="rect">
             <a:avLst/>
@@ -5774,313 +4772,94 @@
           </a:bodyPr>
           <a:lstStyle/>
           <a:p>
-            <a:r>
-              <a:rPr sz="1200" b="1" i="0">
-                <a:solidFill>
-                  <a:srgbClr val="269CCB"/>
-                </a:solidFill>
-                <a:latin typeface="Calibri"/>
-              </a:rPr>
-              <a:t>Info</a:t>
-            </a:r>
-          </a:p>
-          <a:p>
             <a:pPr>
-              <a:spcBef>
-                <a:spcPts val="400"/>
-              </a:spcBef>
+              <a:spcAft>
+                <a:spcPts val="800"/>
+              </a:spcAft>
             </a:pPr>
             <a:r>
-              <a:rPr sz="1400" b="0" i="0">
+              <a:rPr sz="2000" b="0" i="0">
                 <a:solidFill>
                   <a:srgbClr val="333333"/>
                 </a:solidFill>
                 <a:latin typeface="Calibri"/>
               </a:rPr>
-              <a:t>Hito: Queda listo el diagrama de casos de uso de VetCare con su limite de sistema y la especificacion textual completa de Registrar mascota y Buscar expediente.</a:t>
-            </a:r>
-          </a:p>
-        </p:txBody>
-      </p:sp>
-      <p:sp>
-        <p:nvSpPr>
-          <p:cNvPr id="8" name="Rounded Rectangle 7"/>
-          <p:cNvSpPr/>
-          <p:nvPr/>
-        </p:nvSpPr>
-        <p:spPr>
-          <a:xfrm>
-            <a:off x="457200" y="2478024"/>
-            <a:ext cx="11277295" cy="1051560"/>
-          </a:xfrm>
-          <a:prstGeom prst="roundRect">
-            <a:avLst>
-              <a:gd name="adj" fmla="val 12000"/>
-            </a:avLst>
-          </a:prstGeom>
-          <a:solidFill>
-            <a:srgbClr val="FFF8E1"/>
-          </a:solidFill>
-          <a:ln>
-            <a:noFill/>
-          </a:ln>
-        </p:spPr>
-        <p:style>
-          <a:lnRef idx="1">
-            <a:schemeClr val="accent1"/>
-          </a:lnRef>
-          <a:fillRef idx="3">
-            <a:schemeClr val="accent1"/>
-          </a:fillRef>
-          <a:effectRef idx="2">
-            <a:schemeClr val="accent1"/>
-          </a:effectRef>
-          <a:fontRef idx="minor">
-            <a:schemeClr val="lt1"/>
-          </a:fontRef>
-        </p:style>
-        <p:txBody>
-          <a:bodyPr rtlCol="0" anchor="ctr"/>
-          <a:lstStyle/>
-          <a:p>
-            <a:pPr algn="ctr"/>
-          </a:p>
-        </p:txBody>
-      </p:sp>
-      <p:sp>
-        <p:nvSpPr>
-          <p:cNvPr id="9" name="Rectangle 8"/>
-          <p:cNvSpPr/>
-          <p:nvPr/>
-        </p:nvSpPr>
-        <p:spPr>
-          <a:xfrm>
-            <a:off x="457200" y="2478024"/>
-            <a:ext cx="128016" cy="1051560"/>
-          </a:xfrm>
-          <a:prstGeom prst="rect">
-            <a:avLst/>
-          </a:prstGeom>
-          <a:solidFill>
-            <a:srgbClr val="FFD000"/>
-          </a:solidFill>
-          <a:ln>
-            <a:noFill/>
-          </a:ln>
-        </p:spPr>
-        <p:style>
-          <a:lnRef idx="1">
-            <a:schemeClr val="accent1"/>
-          </a:lnRef>
-          <a:fillRef idx="3">
-            <a:schemeClr val="accent1"/>
-          </a:fillRef>
-          <a:effectRef idx="2">
-            <a:schemeClr val="accent1"/>
-          </a:effectRef>
-          <a:fontRef idx="minor">
-            <a:schemeClr val="lt1"/>
-          </a:fontRef>
-        </p:style>
-        <p:txBody>
-          <a:bodyPr rtlCol="0" anchor="ctr"/>
-          <a:lstStyle/>
-          <a:p>
-            <a:pPr algn="ctr"/>
-          </a:p>
-        </p:txBody>
-      </p:sp>
-      <p:sp>
-        <p:nvSpPr>
-          <p:cNvPr id="10" name="TextBox 9"/>
-          <p:cNvSpPr txBox="1"/>
-          <p:nvPr/>
-        </p:nvSpPr>
-        <p:spPr>
-          <a:xfrm>
-            <a:off x="777240" y="2615184"/>
-            <a:ext cx="10774375" cy="822959"/>
-          </a:xfrm>
-          <a:prstGeom prst="rect">
-            <a:avLst/>
-          </a:prstGeom>
-          <a:noFill/>
-        </p:spPr>
-        <p:txBody>
-          <a:bodyPr wrap="square">
-            <a:spAutoFit/>
-          </a:bodyPr>
-          <a:lstStyle/>
-          <a:p>
-            <a:r>
-              <a:rPr sz="1200" b="1" i="0">
-                <a:solidFill>
-                  <a:srgbClr val="FFD000"/>
-                </a:solidFill>
-                <a:latin typeface="Calibri"/>
-              </a:rPr>
-              <a:t>Aclaración</a:t>
+              <a:t>–   </a:t>
+            </a:r>
+            <a:r>
+              <a:rPr sz="2000" b="1" i="0">
+                <a:solidFill>
+                  <a:srgbClr val="333333"/>
+                </a:solidFill>
+                <a:latin typeface="Calibri"/>
+              </a:rPr>
+              <a:t>Herramienta:</a:t>
+            </a:r>
+            <a:r>
+              <a:rPr sz="2000" b="0" i="0">
+                <a:solidFill>
+                  <a:srgbClr val="333333"/>
+                </a:solidFill>
+                <a:latin typeface="Calibri"/>
+              </a:rPr>
+              <a:t> draw.io · Google Docs</a:t>
             </a:r>
           </a:p>
           <a:p>
             <a:pPr>
-              <a:spcBef>
-                <a:spcPts val="400"/>
-              </a:spcBef>
+              <a:spcAft>
+                <a:spcPts val="800"/>
+              </a:spcAft>
             </a:pPr>
             <a:r>
-              <a:rPr sz="1400" b="0" i="0">
+              <a:rPr sz="2000" b="0" i="0">
                 <a:solidFill>
                   <a:srgbClr val="333333"/>
                 </a:solidFill>
                 <a:latin typeface="Calibri"/>
               </a:rPr>
-              <a:t>Enunciado completo: Clases/Proyecto Integrador/ (VetCare).</a:t>
-            </a:r>
-          </a:p>
-        </p:txBody>
-      </p:sp>
-      <p:sp>
-        <p:nvSpPr>
-          <p:cNvPr id="11" name="Rounded Rectangle 10"/>
-          <p:cNvSpPr/>
-          <p:nvPr/>
-        </p:nvSpPr>
-        <p:spPr>
-          <a:xfrm>
-            <a:off x="457200" y="3694176"/>
-            <a:ext cx="11277295" cy="1051560"/>
-          </a:xfrm>
-          <a:prstGeom prst="roundRect">
-            <a:avLst>
-              <a:gd name="adj" fmla="val 12000"/>
-            </a:avLst>
-          </a:prstGeom>
-          <a:solidFill>
-            <a:srgbClr val="FBE4E4"/>
-          </a:solidFill>
-          <a:ln>
-            <a:noFill/>
-          </a:ln>
-        </p:spPr>
-        <p:style>
-          <a:lnRef idx="1">
-            <a:schemeClr val="accent1"/>
-          </a:lnRef>
-          <a:fillRef idx="3">
-            <a:schemeClr val="accent1"/>
-          </a:fillRef>
-          <a:effectRef idx="2">
-            <a:schemeClr val="accent1"/>
-          </a:effectRef>
-          <a:fontRef idx="minor">
-            <a:schemeClr val="lt1"/>
-          </a:fontRef>
-        </p:style>
-        <p:txBody>
-          <a:bodyPr rtlCol="0" anchor="ctr"/>
-          <a:lstStyle/>
-          <a:p>
-            <a:pPr algn="ctr"/>
-          </a:p>
-        </p:txBody>
-      </p:sp>
-      <p:sp>
-        <p:nvSpPr>
-          <p:cNvPr id="12" name="Rectangle 11"/>
-          <p:cNvSpPr/>
-          <p:nvPr/>
-        </p:nvSpPr>
-        <p:spPr>
-          <a:xfrm>
-            <a:off x="457200" y="3694176"/>
-            <a:ext cx="128016" cy="1051560"/>
-          </a:xfrm>
-          <a:prstGeom prst="rect">
-            <a:avLst/>
-          </a:prstGeom>
-          <a:solidFill>
-            <a:srgbClr val="A02030"/>
-          </a:solidFill>
-          <a:ln>
-            <a:noFill/>
-          </a:ln>
-        </p:spPr>
-        <p:style>
-          <a:lnRef idx="1">
-            <a:schemeClr val="accent1"/>
-          </a:lnRef>
-          <a:fillRef idx="3">
-            <a:schemeClr val="accent1"/>
-          </a:fillRef>
-          <a:effectRef idx="2">
-            <a:schemeClr val="accent1"/>
-          </a:effectRef>
-          <a:fontRef idx="minor">
-            <a:schemeClr val="lt1"/>
-          </a:fontRef>
-        </p:style>
-        <p:txBody>
-          <a:bodyPr rtlCol="0" anchor="ctr"/>
-          <a:lstStyle/>
-          <a:p>
-            <a:pPr algn="ctr"/>
-          </a:p>
-        </p:txBody>
-      </p:sp>
-      <p:sp>
-        <p:nvSpPr>
-          <p:cNvPr id="13" name="TextBox 12"/>
-          <p:cNvSpPr txBox="1"/>
-          <p:nvPr/>
-        </p:nvSpPr>
-        <p:spPr>
-          <a:xfrm>
-            <a:off x="777240" y="3831336"/>
-            <a:ext cx="10774375" cy="822959"/>
-          </a:xfrm>
-          <a:prstGeom prst="rect">
-            <a:avLst/>
-          </a:prstGeom>
-          <a:noFill/>
-        </p:spPr>
-        <p:txBody>
-          <a:bodyPr wrap="square">
-            <a:spAutoFit/>
-          </a:bodyPr>
-          <a:lstStyle/>
-          <a:p>
-            <a:r>
-              <a:rPr sz="1200" b="1" i="0">
-                <a:solidFill>
-                  <a:srgbClr val="A02030"/>
-                </a:solidFill>
-                <a:latin typeface="Calibri"/>
-              </a:rPr>
-              <a:t>Atención</a:t>
+              <a:t>–   </a:t>
+            </a:r>
+            <a:r>
+              <a:rPr sz="2000" b="1" i="0">
+                <a:solidFill>
+                  <a:srgbClr val="333333"/>
+                </a:solidFill>
+                <a:latin typeface="Calibri"/>
+              </a:rPr>
+              <a:t>Demo:</a:t>
+            </a:r>
+            <a:r>
+              <a:rPr sz="2000" b="0" i="0">
+                <a:solidFill>
+                  <a:srgbClr val="333333"/>
+                </a:solidFill>
+                <a:latin typeface="Calibri"/>
+              </a:rPr>
+              <a:t> El docente proyecta como un caso de uso mal escrito (Dar clic en guardar) se transforma en uno correcto (Registrar mascota) y luego llena en vivo, delante del grupo, la plantilla de especificacion de Buscar expediente.</a:t>
             </a:r>
           </a:p>
           <a:p>
             <a:pPr>
-              <a:spcBef>
-                <a:spcPts val="400"/>
-              </a:spcBef>
+              <a:spcAft>
+                <a:spcPts val="800"/>
+              </a:spcAft>
             </a:pPr>
             <a:r>
-              <a:rPr sz="1400" b="0" i="0">
+              <a:rPr sz="2000" b="0" i="0">
                 <a:solidFill>
                   <a:srgbClr val="333333"/>
                 </a:solidFill>
                 <a:latin typeface="Calibri"/>
               </a:rPr>
-              <a:t>Entrega del taller, si el docente lo asigna · en la fecha que indique el docente.</a:t>
-            </a:r>
-          </a:p>
-        </p:txBody>
-      </p:sp>
-      <p:sp>
-        <p:nvSpPr>
-          <p:cNvPr id="14" name="TextBox 13"/>
+              <a:t>–   Mismo dominio VetCare — no otro ejemplo. Aqui se diseña, no se programa.</a:t>
+            </a:r>
+          </a:p>
+        </p:txBody>
+      </p:sp>
+      <p:sp>
+        <p:nvSpPr>
+          <p:cNvPr id="6" name="TextBox 5"/>
           <p:cNvSpPr txBox="1"/>
           <p:nvPr/>
         </p:nvSpPr>
@@ -6148,13 +4927,13 @@
         <p:spPr>
           <a:xfrm>
             <a:off x="0" y="0"/>
-            <a:ext cx="12191695" cy="164592"/>
+            <a:ext cx="12191695" cy="1170432"/>
           </a:xfrm>
           <a:prstGeom prst="rect">
             <a:avLst/>
           </a:prstGeom>
           <a:solidFill>
-            <a:srgbClr val="269CCB"/>
+            <a:srgbClr val="095292"/>
           </a:solidFill>
           <a:ln>
             <a:noFill/>
@@ -6182,9 +4961,251 @@
           </a:p>
         </p:txBody>
       </p:sp>
+      <p:sp>
+        <p:nvSpPr>
+          <p:cNvPr id="3" name="Rectangle 2"/>
+          <p:cNvSpPr/>
+          <p:nvPr/>
+        </p:nvSpPr>
+        <p:spPr>
+          <a:xfrm>
+            <a:off x="0" y="1170432"/>
+            <a:ext cx="12191695" cy="41148"/>
+          </a:xfrm>
+          <a:prstGeom prst="rect">
+            <a:avLst/>
+          </a:prstGeom>
+          <a:solidFill>
+            <a:srgbClr val="FFD000"/>
+          </a:solidFill>
+          <a:ln>
+            <a:noFill/>
+          </a:ln>
+        </p:spPr>
+        <p:style>
+          <a:lnRef idx="1">
+            <a:schemeClr val="accent1"/>
+          </a:lnRef>
+          <a:fillRef idx="3">
+            <a:schemeClr val="accent1"/>
+          </a:fillRef>
+          <a:effectRef idx="2">
+            <a:schemeClr val="accent1"/>
+          </a:effectRef>
+          <a:fontRef idx="minor">
+            <a:schemeClr val="lt1"/>
+          </a:fontRef>
+        </p:style>
+        <p:txBody>
+          <a:bodyPr rtlCol="0" anchor="ctr"/>
+          <a:lstStyle/>
+          <a:p>
+            <a:pPr algn="ctr"/>
+          </a:p>
+        </p:txBody>
+      </p:sp>
+      <p:sp>
+        <p:nvSpPr>
+          <p:cNvPr id="4" name="TextBox 3"/>
+          <p:cNvSpPr txBox="1"/>
+          <p:nvPr/>
+        </p:nvSpPr>
+        <p:spPr>
+          <a:xfrm>
+            <a:off x="457200" y="164592"/>
+            <a:ext cx="11277295" cy="384048"/>
+          </a:xfrm>
+          <a:prstGeom prst="rect">
+            <a:avLst/>
+          </a:prstGeom>
+          <a:noFill/>
+        </p:spPr>
+        <p:txBody>
+          <a:bodyPr wrap="square">
+            <a:spAutoFit/>
+          </a:bodyPr>
+          <a:lstStyle/>
+          <a:p>
+            <a:r>
+              <a:rPr sz="2600" b="1" i="0">
+                <a:solidFill>
+                  <a:srgbClr val="FFFFFF"/>
+                </a:solidFill>
+                <a:latin typeface="Calibri"/>
+              </a:rPr>
+              <a:t>Herramientas de hoy</a:t>
+            </a:r>
+          </a:p>
+        </p:txBody>
+      </p:sp>
+      <p:sp>
+        <p:nvSpPr>
+          <p:cNvPr id="5" name="TextBox 4"/>
+          <p:cNvSpPr txBox="1"/>
+          <p:nvPr/>
+        </p:nvSpPr>
+        <p:spPr>
+          <a:xfrm>
+            <a:off x="457200" y="566928"/>
+            <a:ext cx="11277295" cy="411480"/>
+          </a:xfrm>
+          <a:prstGeom prst="rect">
+            <a:avLst/>
+          </a:prstGeom>
+          <a:noFill/>
+        </p:spPr>
+        <p:txBody>
+          <a:bodyPr wrap="square">
+            <a:spAutoFit/>
+          </a:bodyPr>
+          <a:lstStyle/>
+          <a:p>
+            <a:r>
+              <a:rPr sz="1400" b="0" i="0">
+                <a:solidFill>
+                  <a:srgbClr val="B8D8EE"/>
+                </a:solidFill>
+                <a:latin typeface="Calibri"/>
+              </a:rPr>
+              <a:t>Gratis · funcionan en el navegador</a:t>
+            </a:r>
+          </a:p>
+        </p:txBody>
+      </p:sp>
+      <p:sp>
+        <p:nvSpPr>
+          <p:cNvPr id="6" name="Rounded Rectangle 5"/>
+          <p:cNvSpPr/>
+          <p:nvPr/>
+        </p:nvSpPr>
+        <p:spPr>
+          <a:xfrm>
+            <a:off x="457200" y="1591056"/>
+            <a:ext cx="3624986" cy="2331720"/>
+          </a:xfrm>
+          <a:prstGeom prst="roundRect">
+            <a:avLst>
+              <a:gd name="adj" fmla="val 12000"/>
+            </a:avLst>
+          </a:prstGeom>
+          <a:solidFill>
+            <a:srgbClr val="F2F2F2"/>
+          </a:solidFill>
+          <a:ln>
+            <a:noFill/>
+          </a:ln>
+        </p:spPr>
+        <p:style>
+          <a:lnRef idx="1">
+            <a:schemeClr val="accent1"/>
+          </a:lnRef>
+          <a:fillRef idx="3">
+            <a:schemeClr val="accent1"/>
+          </a:fillRef>
+          <a:effectRef idx="2">
+            <a:schemeClr val="accent1"/>
+          </a:effectRef>
+          <a:fontRef idx="minor">
+            <a:schemeClr val="lt1"/>
+          </a:fontRef>
+        </p:style>
+        <p:txBody>
+          <a:bodyPr rtlCol="0" anchor="ctr"/>
+          <a:lstStyle/>
+          <a:p>
+            <a:pPr algn="ctr"/>
+          </a:p>
+        </p:txBody>
+      </p:sp>
+      <p:sp>
+        <p:nvSpPr>
+          <p:cNvPr id="7" name="Rectangle 6"/>
+          <p:cNvSpPr/>
+          <p:nvPr/>
+        </p:nvSpPr>
+        <p:spPr>
+          <a:xfrm>
+            <a:off x="457200" y="1591056"/>
+            <a:ext cx="3624986" cy="64008"/>
+          </a:xfrm>
+          <a:prstGeom prst="rect">
+            <a:avLst/>
+          </a:prstGeom>
+          <a:solidFill>
+            <a:srgbClr val="095292"/>
+          </a:solidFill>
+          <a:ln>
+            <a:noFill/>
+          </a:ln>
+        </p:spPr>
+        <p:style>
+          <a:lnRef idx="1">
+            <a:schemeClr val="accent1"/>
+          </a:lnRef>
+          <a:fillRef idx="3">
+            <a:schemeClr val="accent1"/>
+          </a:fillRef>
+          <a:effectRef idx="2">
+            <a:schemeClr val="accent1"/>
+          </a:effectRef>
+          <a:fontRef idx="minor">
+            <a:schemeClr val="lt1"/>
+          </a:fontRef>
+        </p:style>
+        <p:txBody>
+          <a:bodyPr rtlCol="0" anchor="ctr"/>
+          <a:lstStyle/>
+          <a:p>
+            <a:pPr algn="ctr"/>
+          </a:p>
+        </p:txBody>
+      </p:sp>
+      <p:sp>
+        <p:nvSpPr>
+          <p:cNvPr id="8" name="Rectangle 7"/>
+          <p:cNvSpPr/>
+          <p:nvPr/>
+        </p:nvSpPr>
+        <p:spPr>
+          <a:xfrm>
+            <a:off x="457200" y="1655064"/>
+            <a:ext cx="3624986" cy="27432"/>
+          </a:xfrm>
+          <a:prstGeom prst="rect">
+            <a:avLst/>
+          </a:prstGeom>
+          <a:solidFill>
+            <a:srgbClr val="FFD000"/>
+          </a:solidFill>
+          <a:ln>
+            <a:noFill/>
+          </a:ln>
+        </p:spPr>
+        <p:style>
+          <a:lnRef idx="1">
+            <a:schemeClr val="accent1"/>
+          </a:lnRef>
+          <a:fillRef idx="3">
+            <a:schemeClr val="accent1"/>
+          </a:fillRef>
+          <a:effectRef idx="2">
+            <a:schemeClr val="accent1"/>
+          </a:effectRef>
+          <a:fontRef idx="minor">
+            <a:schemeClr val="lt1"/>
+          </a:fontRef>
+        </p:style>
+        <p:txBody>
+          <a:bodyPr rtlCol="0" anchor="ctr"/>
+          <a:lstStyle/>
+          <a:p>
+            <a:pPr algn="ctr"/>
+          </a:p>
+        </p:txBody>
+      </p:sp>
       <p:pic>
         <p:nvPicPr>
-          <p:cNvPr id="3" name="Picture 2" descr="logo_uniajc_color.png"/>
+          <p:cNvPr id="9" name="Picture 8" descr="drawio.png"/>
           <p:cNvPicPr>
             <a:picLocks noChangeAspect="1"/>
           </p:cNvPicPr>
@@ -6198,8 +5219,8 @@
         </p:blipFill>
         <p:spPr>
           <a:xfrm>
-            <a:off x="10271455" y="5998464"/>
-            <a:ext cx="1463040" cy="643233"/>
+            <a:off x="1643329" y="1847087"/>
+            <a:ext cx="1252728" cy="1252728"/>
           </a:xfrm>
           <a:prstGeom prst="rect">
             <a:avLst/>
@@ -6208,14 +5229,14 @@
       </p:pic>
       <p:sp>
         <p:nvSpPr>
-          <p:cNvPr id="4" name="TextBox 3"/>
+          <p:cNvPr id="10" name="TextBox 9"/>
           <p:cNvSpPr txBox="1"/>
           <p:nvPr/>
         </p:nvSpPr>
         <p:spPr>
           <a:xfrm>
-            <a:off x="457200" y="1737360"/>
-            <a:ext cx="11277295" cy="1097280"/>
+            <a:off x="530352" y="3191256"/>
+            <a:ext cx="3478682" cy="621792"/>
           </a:xfrm>
           <a:prstGeom prst="rect">
             <a:avLst/>
@@ -6223,32 +5244,456 @@
           <a:noFill/>
         </p:spPr>
         <p:txBody>
-          <a:bodyPr wrap="square" anchor="ctr"/>
+          <a:bodyPr wrap="square" anchor="t"/>
           <a:lstStyle/>
           <a:p>
             <a:pPr algn="ctr"/>
             <a:r>
-              <a:rPr sz="3400" b="1" i="0">
+              <a:rPr sz="1300" b="1" i="0">
                 <a:solidFill>
                   <a:srgbClr val="095292"/>
                 </a:solidFill>
                 <a:latin typeface="Calibri"/>
               </a:rPr>
-              <a:t>Clase 9 · VetCare avanza</a:t>
-            </a:r>
-          </a:p>
-        </p:txBody>
-      </p:sp>
-      <p:sp>
-        <p:nvSpPr>
-          <p:cNvPr id="5" name="TextBox 4"/>
+              <a:t>Draw.Io</a:t>
+            </a:r>
+          </a:p>
+          <a:p>
+            <a:pPr algn="ctr">
+              <a:spcBef>
+                <a:spcPts val="200"/>
+              </a:spcBef>
+            </a:pPr>
+            <a:r>
+              <a:rPr sz="1000" b="0" i="0">
+                <a:solidFill>
+                  <a:srgbClr val="666666"/>
+                </a:solidFill>
+                <a:latin typeface="Calibri"/>
+              </a:rPr>
+              <a:t>Diagramas UML y de contexto</a:t>
+            </a:r>
+          </a:p>
+        </p:txBody>
+      </p:sp>
+      <p:sp>
+        <p:nvSpPr>
+          <p:cNvPr id="11" name="Rounded Rectangle 10"/>
+          <p:cNvSpPr/>
+          <p:nvPr/>
+        </p:nvSpPr>
+        <p:spPr>
+          <a:xfrm>
+            <a:off x="4283354" y="1591056"/>
+            <a:ext cx="3624986" cy="2331720"/>
+          </a:xfrm>
+          <a:prstGeom prst="roundRect">
+            <a:avLst>
+              <a:gd name="adj" fmla="val 12000"/>
+            </a:avLst>
+          </a:prstGeom>
+          <a:solidFill>
+            <a:srgbClr val="F2F2F2"/>
+          </a:solidFill>
+          <a:ln>
+            <a:noFill/>
+          </a:ln>
+        </p:spPr>
+        <p:style>
+          <a:lnRef idx="1">
+            <a:schemeClr val="accent1"/>
+          </a:lnRef>
+          <a:fillRef idx="3">
+            <a:schemeClr val="accent1"/>
+          </a:fillRef>
+          <a:effectRef idx="2">
+            <a:schemeClr val="accent1"/>
+          </a:effectRef>
+          <a:fontRef idx="minor">
+            <a:schemeClr val="lt1"/>
+          </a:fontRef>
+        </p:style>
+        <p:txBody>
+          <a:bodyPr rtlCol="0" anchor="ctr"/>
+          <a:lstStyle/>
+          <a:p>
+            <a:pPr algn="ctr"/>
+          </a:p>
+        </p:txBody>
+      </p:sp>
+      <p:sp>
+        <p:nvSpPr>
+          <p:cNvPr id="12" name="Rectangle 11"/>
+          <p:cNvSpPr/>
+          <p:nvPr/>
+        </p:nvSpPr>
+        <p:spPr>
+          <a:xfrm>
+            <a:off x="4283354" y="1591056"/>
+            <a:ext cx="3624986" cy="64008"/>
+          </a:xfrm>
+          <a:prstGeom prst="rect">
+            <a:avLst/>
+          </a:prstGeom>
+          <a:solidFill>
+            <a:srgbClr val="095292"/>
+          </a:solidFill>
+          <a:ln>
+            <a:noFill/>
+          </a:ln>
+        </p:spPr>
+        <p:style>
+          <a:lnRef idx="1">
+            <a:schemeClr val="accent1"/>
+          </a:lnRef>
+          <a:fillRef idx="3">
+            <a:schemeClr val="accent1"/>
+          </a:fillRef>
+          <a:effectRef idx="2">
+            <a:schemeClr val="accent1"/>
+          </a:effectRef>
+          <a:fontRef idx="minor">
+            <a:schemeClr val="lt1"/>
+          </a:fontRef>
+        </p:style>
+        <p:txBody>
+          <a:bodyPr rtlCol="0" anchor="ctr"/>
+          <a:lstStyle/>
+          <a:p>
+            <a:pPr algn="ctr"/>
+          </a:p>
+        </p:txBody>
+      </p:sp>
+      <p:sp>
+        <p:nvSpPr>
+          <p:cNvPr id="13" name="Rectangle 12"/>
+          <p:cNvSpPr/>
+          <p:nvPr/>
+        </p:nvSpPr>
+        <p:spPr>
+          <a:xfrm>
+            <a:off x="4283354" y="1655064"/>
+            <a:ext cx="3624986" cy="27432"/>
+          </a:xfrm>
+          <a:prstGeom prst="rect">
+            <a:avLst/>
+          </a:prstGeom>
+          <a:solidFill>
+            <a:srgbClr val="FFD000"/>
+          </a:solidFill>
+          <a:ln>
+            <a:noFill/>
+          </a:ln>
+        </p:spPr>
+        <p:style>
+          <a:lnRef idx="1">
+            <a:schemeClr val="accent1"/>
+          </a:lnRef>
+          <a:fillRef idx="3">
+            <a:schemeClr val="accent1"/>
+          </a:fillRef>
+          <a:effectRef idx="2">
+            <a:schemeClr val="accent1"/>
+          </a:effectRef>
+          <a:fontRef idx="minor">
+            <a:schemeClr val="lt1"/>
+          </a:fontRef>
+        </p:style>
+        <p:txBody>
+          <a:bodyPr rtlCol="0" anchor="ctr"/>
+          <a:lstStyle/>
+          <a:p>
+            <a:pPr algn="ctr"/>
+          </a:p>
+        </p:txBody>
+      </p:sp>
+      <p:pic>
+        <p:nvPicPr>
+          <p:cNvPr id="14" name="Picture 13" descr="google_docs.png"/>
+          <p:cNvPicPr>
+            <a:picLocks noChangeAspect="1"/>
+          </p:cNvPicPr>
+          <p:nvPr/>
+        </p:nvPicPr>
+        <p:blipFill>
+          <a:blip r:embed="rId3"/>
+          <a:stretch>
+            <a:fillRect/>
+          </a:stretch>
+        </p:blipFill>
+        <p:spPr>
+          <a:xfrm>
+            <a:off x="5469483" y="1847087"/>
+            <a:ext cx="1252728" cy="1252728"/>
+          </a:xfrm>
+          <a:prstGeom prst="rect">
+            <a:avLst/>
+          </a:prstGeom>
+        </p:spPr>
+      </p:pic>
+      <p:sp>
+        <p:nvSpPr>
+          <p:cNvPr id="15" name="TextBox 14"/>
           <p:cNvSpPr txBox="1"/>
           <p:nvPr/>
         </p:nvSpPr>
         <p:spPr>
           <a:xfrm>
-            <a:off x="457200" y="3017520"/>
-            <a:ext cx="11277295" cy="1645920"/>
+            <a:off x="4356506" y="3191256"/>
+            <a:ext cx="3478682" cy="621792"/>
+          </a:xfrm>
+          <a:prstGeom prst="rect">
+            <a:avLst/>
+          </a:prstGeom>
+          <a:noFill/>
+        </p:spPr>
+        <p:txBody>
+          <a:bodyPr wrap="square" anchor="t"/>
+          <a:lstStyle/>
+          <a:p>
+            <a:pPr algn="ctr"/>
+            <a:r>
+              <a:rPr sz="1300" b="1" i="0">
+                <a:solidFill>
+                  <a:srgbClr val="095292"/>
+                </a:solidFill>
+                <a:latin typeface="Calibri"/>
+              </a:rPr>
+              <a:t>google docs</a:t>
+            </a:r>
+          </a:p>
+          <a:p>
+            <a:pPr algn="ctr">
+              <a:spcBef>
+                <a:spcPts val="200"/>
+              </a:spcBef>
+            </a:pPr>
+            <a:r>
+              <a:rPr sz="1000" b="0" i="0">
+                <a:solidFill>
+                  <a:srgbClr val="666666"/>
+                </a:solidFill>
+                <a:latin typeface="Calibri"/>
+              </a:rPr>
+              <a:t>Documentos del paquete de diseño</a:t>
+            </a:r>
+          </a:p>
+        </p:txBody>
+      </p:sp>
+      <p:sp>
+        <p:nvSpPr>
+          <p:cNvPr id="16" name="Rounded Rectangle 15"/>
+          <p:cNvSpPr/>
+          <p:nvPr/>
+        </p:nvSpPr>
+        <p:spPr>
+          <a:xfrm>
+            <a:off x="8109508" y="1591056"/>
+            <a:ext cx="3624986" cy="2331720"/>
+          </a:xfrm>
+          <a:prstGeom prst="roundRect">
+            <a:avLst>
+              <a:gd name="adj" fmla="val 12000"/>
+            </a:avLst>
+          </a:prstGeom>
+          <a:solidFill>
+            <a:srgbClr val="F2F2F2"/>
+          </a:solidFill>
+          <a:ln>
+            <a:noFill/>
+          </a:ln>
+        </p:spPr>
+        <p:style>
+          <a:lnRef idx="1">
+            <a:schemeClr val="accent1"/>
+          </a:lnRef>
+          <a:fillRef idx="3">
+            <a:schemeClr val="accent1"/>
+          </a:fillRef>
+          <a:effectRef idx="2">
+            <a:schemeClr val="accent1"/>
+          </a:effectRef>
+          <a:fontRef idx="minor">
+            <a:schemeClr val="lt1"/>
+          </a:fontRef>
+        </p:style>
+        <p:txBody>
+          <a:bodyPr rtlCol="0" anchor="ctr"/>
+          <a:lstStyle/>
+          <a:p>
+            <a:pPr algn="ctr"/>
+          </a:p>
+        </p:txBody>
+      </p:sp>
+      <p:sp>
+        <p:nvSpPr>
+          <p:cNvPr id="17" name="Rectangle 16"/>
+          <p:cNvSpPr/>
+          <p:nvPr/>
+        </p:nvSpPr>
+        <p:spPr>
+          <a:xfrm>
+            <a:off x="8109508" y="1591056"/>
+            <a:ext cx="3624986" cy="64008"/>
+          </a:xfrm>
+          <a:prstGeom prst="rect">
+            <a:avLst/>
+          </a:prstGeom>
+          <a:solidFill>
+            <a:srgbClr val="095292"/>
+          </a:solidFill>
+          <a:ln>
+            <a:noFill/>
+          </a:ln>
+        </p:spPr>
+        <p:style>
+          <a:lnRef idx="1">
+            <a:schemeClr val="accent1"/>
+          </a:lnRef>
+          <a:fillRef idx="3">
+            <a:schemeClr val="accent1"/>
+          </a:fillRef>
+          <a:effectRef idx="2">
+            <a:schemeClr val="accent1"/>
+          </a:effectRef>
+          <a:fontRef idx="minor">
+            <a:schemeClr val="lt1"/>
+          </a:fontRef>
+        </p:style>
+        <p:txBody>
+          <a:bodyPr rtlCol="0" anchor="ctr"/>
+          <a:lstStyle/>
+          <a:p>
+            <a:pPr algn="ctr"/>
+          </a:p>
+        </p:txBody>
+      </p:sp>
+      <p:sp>
+        <p:nvSpPr>
+          <p:cNvPr id="18" name="Rectangle 17"/>
+          <p:cNvSpPr/>
+          <p:nvPr/>
+        </p:nvSpPr>
+        <p:spPr>
+          <a:xfrm>
+            <a:off x="8109508" y="1655064"/>
+            <a:ext cx="3624986" cy="27432"/>
+          </a:xfrm>
+          <a:prstGeom prst="rect">
+            <a:avLst/>
+          </a:prstGeom>
+          <a:solidFill>
+            <a:srgbClr val="FFD000"/>
+          </a:solidFill>
+          <a:ln>
+            <a:noFill/>
+          </a:ln>
+        </p:spPr>
+        <p:style>
+          <a:lnRef idx="1">
+            <a:schemeClr val="accent1"/>
+          </a:lnRef>
+          <a:fillRef idx="3">
+            <a:schemeClr val="accent1"/>
+          </a:fillRef>
+          <a:effectRef idx="2">
+            <a:schemeClr val="accent1"/>
+          </a:effectRef>
+          <a:fontRef idx="minor">
+            <a:schemeClr val="lt1"/>
+          </a:fontRef>
+        </p:style>
+        <p:txBody>
+          <a:bodyPr rtlCol="0" anchor="ctr"/>
+          <a:lstStyle/>
+          <a:p>
+            <a:pPr algn="ctr"/>
+          </a:p>
+        </p:txBody>
+      </p:sp>
+      <p:pic>
+        <p:nvPicPr>
+          <p:cNvPr id="19" name="Picture 18" descr="examlab.png"/>
+          <p:cNvPicPr>
+            <a:picLocks noChangeAspect="1"/>
+          </p:cNvPicPr>
+          <p:nvPr/>
+        </p:nvPicPr>
+        <p:blipFill>
+          <a:blip r:embed="rId4"/>
+          <a:stretch>
+            <a:fillRect/>
+          </a:stretch>
+        </p:blipFill>
+        <p:spPr>
+          <a:xfrm>
+            <a:off x="9295638" y="1847087"/>
+            <a:ext cx="1252728" cy="1252728"/>
+          </a:xfrm>
+          <a:prstGeom prst="rect">
+            <a:avLst/>
+          </a:prstGeom>
+        </p:spPr>
+      </p:pic>
+      <p:sp>
+        <p:nvSpPr>
+          <p:cNvPr id="20" name="TextBox 19"/>
+          <p:cNvSpPr txBox="1"/>
+          <p:nvPr/>
+        </p:nvSpPr>
+        <p:spPr>
+          <a:xfrm>
+            <a:off x="8182660" y="3191256"/>
+            <a:ext cx="3478682" cy="621792"/>
+          </a:xfrm>
+          <a:prstGeom prst="rect">
+            <a:avLst/>
+          </a:prstGeom>
+          <a:noFill/>
+        </p:spPr>
+        <p:txBody>
+          <a:bodyPr wrap="square" anchor="t"/>
+          <a:lstStyle/>
+          <a:p>
+            <a:pPr algn="ctr"/>
+            <a:r>
+              <a:rPr sz="1300" b="1" i="0">
+                <a:solidFill>
+                  <a:srgbClr val="095292"/>
+                </a:solidFill>
+                <a:latin typeface="Calibri"/>
+              </a:rPr>
+              <a:t>la plataforma del curso</a:t>
+            </a:r>
+          </a:p>
+          <a:p>
+            <a:pPr algn="ctr">
+              <a:spcBef>
+                <a:spcPts val="200"/>
+              </a:spcBef>
+            </a:pPr>
+            <a:r>
+              <a:rPr sz="1000" b="0" i="0">
+                <a:solidFill>
+                  <a:srgbClr val="666666"/>
+                </a:solidFill>
+                <a:latin typeface="Calibri"/>
+              </a:rPr>
+              <a:t>Entrega del taller · en la fecha que indique el docente</a:t>
+            </a:r>
+          </a:p>
+        </p:txBody>
+      </p:sp>
+      <p:sp>
+        <p:nvSpPr>
+          <p:cNvPr id="21" name="TextBox 20"/>
+          <p:cNvSpPr txBox="1"/>
+          <p:nvPr/>
+        </p:nvSpPr>
+        <p:spPr>
+          <a:xfrm>
+            <a:off x="11185855" y="6473952"/>
+            <a:ext cx="640080" cy="274320"/>
           </a:xfrm>
           <a:prstGeom prst="rect">
             <a:avLst/>
@@ -6261,65 +5706,141 @@
           </a:bodyPr>
           <a:lstStyle/>
           <a:p>
-            <a:pPr algn="ctr">
-              <a:spcAft>
-                <a:spcPts val="600"/>
-              </a:spcAft>
-            </a:pPr>
-            <a:r>
-              <a:rPr sz="1600" b="0" i="0">
-                <a:solidFill>
-                  <a:srgbClr val="333333"/>
-                </a:solidFill>
-                <a:latin typeface="Calibri"/>
-              </a:rPr>
-              <a:t>Queda listo el diagrama de casos de uso de VetCare con su limite de sistema y la especificacion textual completa de Registrar mascota y Buscar expediente.</a:t>
-            </a:r>
-          </a:p>
-          <a:p>
-            <a:pPr algn="ctr">
-              <a:spcAft>
-                <a:spcPts val="600"/>
-              </a:spcAft>
-            </a:pPr>
-            <a:r>
-              <a:rPr sz="1600" b="0" i="0">
-                <a:solidFill>
-                  <a:srgbClr val="333333"/>
-                </a:solidFill>
-                <a:latin typeface="Calibri"/>
-              </a:rPr>
-              <a:t>Entregable: Un PDF con el diagrama de casos de uso, la matriz de trazabilidad RF a CU y las dos especificaciones textuales completas (precondiciones, postcondiciones, flujo principal y minimo dos flujos alternos cada una), subido a la plataforma del curso.</a:t>
-            </a:r>
-          </a:p>
-          <a:p>
-            <a:pPr algn="ctr">
-              <a:spcAft>
-                <a:spcPts val="600"/>
-              </a:spcAft>
-            </a:pPr>
-            <a:r>
-              <a:rPr sz="1600" b="0" i="0">
-                <a:solidFill>
-                  <a:srgbClr val="333333"/>
-                </a:solidFill>
-                <a:latin typeface="Calibri"/>
-              </a:rPr>
-              <a:t>Siguiente clase: continuamos el hilo del PI</a:t>
-            </a:r>
-          </a:p>
-        </p:txBody>
-      </p:sp>
-      <p:sp>
-        <p:nvSpPr>
-          <p:cNvPr id="6" name="TextBox 5"/>
+            <a:pPr algn="r"/>
+            <a:r>
+              <a:rPr sz="1100" b="0" i="0">
+                <a:solidFill>
+                  <a:srgbClr val="666666"/>
+                </a:solidFill>
+                <a:latin typeface="Calibri"/>
+              </a:rPr>
+              <a:t>14</a:t>
+            </a:r>
+          </a:p>
+        </p:txBody>
+      </p:sp>
+    </p:spTree>
+  </p:cSld>
+  <p:clrMapOvr>
+    <a:masterClrMapping/>
+  </p:clrMapOvr>
+</p:sld>
+</file>
+
+<file path=ppt/slides/slide15.xml><?xml version="1.0" encoding="utf-8"?>
+<p:sld xmlns:a="http://schemas.openxmlformats.org/drawingml/2006/main" xmlns:p="http://schemas.openxmlformats.org/presentationml/2006/main" xmlns:r="http://schemas.openxmlformats.org/officeDocument/2006/relationships">
+  <p:cSld>
+    <p:bg>
+      <p:bgPr>
+        <a:solidFill>
+          <a:srgbClr val="FFFFFF"/>
+        </a:solidFill>
+        <a:effectLst/>
+      </p:bgPr>
+    </p:bg>
+    <p:spTree>
+      <p:nvGrpSpPr>
+        <p:cNvPr id="1" name=""/>
+        <p:cNvGrpSpPr/>
+        <p:nvPr/>
+      </p:nvGrpSpPr>
+      <p:grpSpPr/>
+      <p:sp>
+        <p:nvSpPr>
+          <p:cNvPr id="2" name="Rectangle 1"/>
+          <p:cNvSpPr/>
+          <p:nvPr/>
+        </p:nvSpPr>
+        <p:spPr>
+          <a:xfrm>
+            <a:off x="0" y="0"/>
+            <a:ext cx="12191695" cy="960120"/>
+          </a:xfrm>
+          <a:prstGeom prst="rect">
+            <a:avLst/>
+          </a:prstGeom>
+          <a:solidFill>
+            <a:srgbClr val="095292"/>
+          </a:solidFill>
+          <a:ln>
+            <a:noFill/>
+          </a:ln>
+        </p:spPr>
+        <p:style>
+          <a:lnRef idx="1">
+            <a:schemeClr val="accent1"/>
+          </a:lnRef>
+          <a:fillRef idx="3">
+            <a:schemeClr val="accent1"/>
+          </a:fillRef>
+          <a:effectRef idx="2">
+            <a:schemeClr val="accent1"/>
+          </a:effectRef>
+          <a:fontRef idx="minor">
+            <a:schemeClr val="lt1"/>
+          </a:fontRef>
+        </p:style>
+        <p:txBody>
+          <a:bodyPr rtlCol="0" anchor="ctr"/>
+          <a:lstStyle/>
+          <a:p>
+            <a:pPr algn="ctr"/>
+          </a:p>
+        </p:txBody>
+      </p:sp>
+      <p:sp>
+        <p:nvSpPr>
+          <p:cNvPr id="3" name="Rectangle 2"/>
+          <p:cNvSpPr/>
+          <p:nvPr/>
+        </p:nvSpPr>
+        <p:spPr>
+          <a:xfrm>
+            <a:off x="0" y="960120"/>
+            <a:ext cx="12191695" cy="41148"/>
+          </a:xfrm>
+          <a:prstGeom prst="rect">
+            <a:avLst/>
+          </a:prstGeom>
+          <a:solidFill>
+            <a:srgbClr val="FFD000"/>
+          </a:solidFill>
+          <a:ln>
+            <a:noFill/>
+          </a:ln>
+        </p:spPr>
+        <p:style>
+          <a:lnRef idx="1">
+            <a:schemeClr val="accent1"/>
+          </a:lnRef>
+          <a:fillRef idx="3">
+            <a:schemeClr val="accent1"/>
+          </a:fillRef>
+          <a:effectRef idx="2">
+            <a:schemeClr val="accent1"/>
+          </a:effectRef>
+          <a:fontRef idx="minor">
+            <a:schemeClr val="lt1"/>
+          </a:fontRef>
+        </p:style>
+        <p:txBody>
+          <a:bodyPr rtlCol="0" anchor="ctr"/>
+          <a:lstStyle/>
+          <a:p>
+            <a:pPr algn="ctr"/>
+          </a:p>
+        </p:txBody>
+      </p:sp>
+      <p:sp>
+        <p:nvSpPr>
+          <p:cNvPr id="4" name="TextBox 3"/>
           <p:cNvSpPr txBox="1"/>
           <p:nvPr/>
         </p:nvSpPr>
         <p:spPr>
           <a:xfrm>
-            <a:off x="457200" y="4754880"/>
-            <a:ext cx="11277295" cy="640080"/>
+            <a:off x="457200" y="164592"/>
+            <a:ext cx="11277295" cy="502920"/>
           </a:xfrm>
           <a:prstGeom prst="rect">
             <a:avLst/>
@@ -6332,15 +5853,2430 @@
           </a:bodyPr>
           <a:lstStyle/>
           <a:p>
+            <a:r>
+              <a:rPr sz="2600" b="1" i="0">
+                <a:solidFill>
+                  <a:srgbClr val="FFFFFF"/>
+                </a:solidFill>
+                <a:latin typeface="Calibri"/>
+              </a:rPr>
+              <a:t>Taller PI — por que importa</a:t>
+            </a:r>
+          </a:p>
+        </p:txBody>
+      </p:sp>
+      <p:sp>
+        <p:nvSpPr>
+          <p:cNvPr id="5" name="TextBox 4"/>
+          <p:cNvSpPr txBox="1"/>
+          <p:nvPr/>
+        </p:nvSpPr>
+        <p:spPr>
+          <a:xfrm>
+            <a:off x="457200" y="1170432"/>
+            <a:ext cx="11277295" cy="5230368"/>
+          </a:xfrm>
+          <a:prstGeom prst="rect">
+            <a:avLst/>
+          </a:prstGeom>
+          <a:noFill/>
+        </p:spPr>
+        <p:txBody>
+          <a:bodyPr wrap="square">
+            <a:spAutoFit/>
+          </a:bodyPr>
+          <a:lstStyle/>
+          <a:p>
+            <a:pPr>
+              <a:spcAft>
+                <a:spcPts val="800"/>
+              </a:spcAft>
+            </a:pPr>
+            <a:r>
+              <a:rPr sz="2000" b="0" i="0">
+                <a:solidFill>
+                  <a:srgbClr val="333333"/>
+                </a:solidFill>
+                <a:latin typeface="Calibri"/>
+              </a:rPr>
+              <a:t>–   </a:t>
+            </a:r>
+            <a:r>
+              <a:rPr sz="2000" b="1" i="0">
+                <a:solidFill>
+                  <a:srgbClr val="333333"/>
+                </a:solidFill>
+                <a:latin typeface="Calibri"/>
+              </a:rPr>
+              <a:t>Por que importa al PI:</a:t>
+            </a:r>
+            <a:r>
+              <a:rPr sz="2000" b="0" i="0">
+                <a:solidFill>
+                  <a:srgbClr val="333333"/>
+                </a:solidFill>
+                <a:latin typeface="Calibri"/>
+              </a:rPr>
+              <a:t> los casos de uso son el puente entre lo que pidio la clinica Huellitas y lo que despues alguien va a programar; sin ellos, el equipo de Programacion II tiene que adivinar el comportamiento del sistema y siempre adivina distinto.</a:t>
+            </a:r>
+          </a:p>
+          <a:p>
+            <a:pPr>
+              <a:spcAft>
+                <a:spcPts val="800"/>
+              </a:spcAft>
+            </a:pPr>
+            <a:r>
+              <a:rPr sz="2000" b="0" i="0">
+                <a:solidFill>
+                  <a:srgbClr val="333333"/>
+                </a:solidFill>
+                <a:latin typeface="Calibri"/>
+              </a:rPr>
+              <a:t>–   El estudiante que solo cursa Seminario cierra el semestre con este paquete de especificaciones como pieza central de su documento de diseño, y por eso hoy se califica la escritura y no el dibujo.</a:t>
+            </a:r>
+          </a:p>
+          <a:p>
+            <a:pPr>
+              <a:spcAft>
+                <a:spcPts val="800"/>
+              </a:spcAft>
+            </a:pPr>
+            <a:r>
+              <a:rPr sz="2000" b="0" i="0">
+                <a:solidFill>
+                  <a:srgbClr val="333333"/>
+                </a:solidFill>
+                <a:latin typeface="Calibri"/>
+              </a:rPr>
+              <a:t>–   Toda especificacion escrita hoy se convierte mañana en un caso de prueba: si una postcondicion no se puede ir a verificar en los datos, esta mal redactada.</a:t>
+            </a:r>
+          </a:p>
+        </p:txBody>
+      </p:sp>
+      <p:sp>
+        <p:nvSpPr>
+          <p:cNvPr id="6" name="TextBox 5"/>
+          <p:cNvSpPr txBox="1"/>
+          <p:nvPr/>
+        </p:nvSpPr>
+        <p:spPr>
+          <a:xfrm>
+            <a:off x="11185855" y="6473952"/>
+            <a:ext cx="640080" cy="274320"/>
+          </a:xfrm>
+          <a:prstGeom prst="rect">
+            <a:avLst/>
+          </a:prstGeom>
+          <a:noFill/>
+        </p:spPr>
+        <p:txBody>
+          <a:bodyPr wrap="square">
+            <a:spAutoFit/>
+          </a:bodyPr>
+          <a:lstStyle/>
+          <a:p>
+            <a:pPr algn="r"/>
+            <a:r>
+              <a:rPr sz="1100" b="0" i="0">
+                <a:solidFill>
+                  <a:srgbClr val="666666"/>
+                </a:solidFill>
+                <a:latin typeface="Calibri"/>
+              </a:rPr>
+              <a:t>15</a:t>
+            </a:r>
+          </a:p>
+        </p:txBody>
+      </p:sp>
+    </p:spTree>
+  </p:cSld>
+  <p:clrMapOvr>
+    <a:masterClrMapping/>
+  </p:clrMapOvr>
+</p:sld>
+</file>
+
+<file path=ppt/slides/slide16.xml><?xml version="1.0" encoding="utf-8"?>
+<p:sld xmlns:a="http://schemas.openxmlformats.org/drawingml/2006/main" xmlns:p="http://schemas.openxmlformats.org/presentationml/2006/main" xmlns:r="http://schemas.openxmlformats.org/officeDocument/2006/relationships">
+  <p:cSld>
+    <p:bg>
+      <p:bgPr>
+        <a:solidFill>
+          <a:srgbClr val="FFFFFF"/>
+        </a:solidFill>
+        <a:effectLst/>
+      </p:bgPr>
+    </p:bg>
+    <p:spTree>
+      <p:nvGrpSpPr>
+        <p:cNvPr id="1" name=""/>
+        <p:cNvGrpSpPr/>
+        <p:nvPr/>
+      </p:nvGrpSpPr>
+      <p:grpSpPr/>
+      <p:sp>
+        <p:nvSpPr>
+          <p:cNvPr id="2" name="Rectangle 1"/>
+          <p:cNvSpPr/>
+          <p:nvPr/>
+        </p:nvSpPr>
+        <p:spPr>
+          <a:xfrm>
+            <a:off x="0" y="0"/>
+            <a:ext cx="12191695" cy="960120"/>
+          </a:xfrm>
+          <a:prstGeom prst="rect">
+            <a:avLst/>
+          </a:prstGeom>
+          <a:solidFill>
+            <a:srgbClr val="095292"/>
+          </a:solidFill>
+          <a:ln>
+            <a:noFill/>
+          </a:ln>
+        </p:spPr>
+        <p:style>
+          <a:lnRef idx="1">
+            <a:schemeClr val="accent1"/>
+          </a:lnRef>
+          <a:fillRef idx="3">
+            <a:schemeClr val="accent1"/>
+          </a:fillRef>
+          <a:effectRef idx="2">
+            <a:schemeClr val="accent1"/>
+          </a:effectRef>
+          <a:fontRef idx="minor">
+            <a:schemeClr val="lt1"/>
+          </a:fontRef>
+        </p:style>
+        <p:txBody>
+          <a:bodyPr rtlCol="0" anchor="ctr"/>
+          <a:lstStyle/>
+          <a:p>
             <a:pPr algn="ctr"/>
+          </a:p>
+        </p:txBody>
+      </p:sp>
+      <p:sp>
+        <p:nvSpPr>
+          <p:cNvPr id="3" name="Rectangle 2"/>
+          <p:cNvSpPr/>
+          <p:nvPr/>
+        </p:nvSpPr>
+        <p:spPr>
+          <a:xfrm>
+            <a:off x="0" y="960120"/>
+            <a:ext cx="12191695" cy="41148"/>
+          </a:xfrm>
+          <a:prstGeom prst="rect">
+            <a:avLst/>
+          </a:prstGeom>
+          <a:solidFill>
+            <a:srgbClr val="FFD000"/>
+          </a:solidFill>
+          <a:ln>
+            <a:noFill/>
+          </a:ln>
+        </p:spPr>
+        <p:style>
+          <a:lnRef idx="1">
+            <a:schemeClr val="accent1"/>
+          </a:lnRef>
+          <a:fillRef idx="3">
+            <a:schemeClr val="accent1"/>
+          </a:fillRef>
+          <a:effectRef idx="2">
+            <a:schemeClr val="accent1"/>
+          </a:effectRef>
+          <a:fontRef idx="minor">
+            <a:schemeClr val="lt1"/>
+          </a:fontRef>
+        </p:style>
+        <p:txBody>
+          <a:bodyPr rtlCol="0" anchor="ctr"/>
+          <a:lstStyle/>
+          <a:p>
+            <a:pPr algn="ctr"/>
+          </a:p>
+        </p:txBody>
+      </p:sp>
+      <p:sp>
+        <p:nvSpPr>
+          <p:cNvPr id="4" name="TextBox 3"/>
+          <p:cNvSpPr txBox="1"/>
+          <p:nvPr/>
+        </p:nvSpPr>
+        <p:spPr>
+          <a:xfrm>
+            <a:off x="457200" y="164592"/>
+            <a:ext cx="11277295" cy="502920"/>
+          </a:xfrm>
+          <a:prstGeom prst="rect">
+            <a:avLst/>
+          </a:prstGeom>
+          <a:noFill/>
+        </p:spPr>
+        <p:txBody>
+          <a:bodyPr wrap="square">
+            <a:spAutoFit/>
+          </a:bodyPr>
+          <a:lstStyle/>
+          <a:p>
+            <a:r>
+              <a:rPr sz="2600" b="1" i="0">
+                <a:solidFill>
+                  <a:srgbClr val="FFFFFF"/>
+                </a:solidFill>
+                <a:latin typeface="Calibri"/>
+              </a:rPr>
+              <a:t>Taller PI — punto de partida</a:t>
+            </a:r>
+          </a:p>
+        </p:txBody>
+      </p:sp>
+      <p:sp>
+        <p:nvSpPr>
+          <p:cNvPr id="5" name="TextBox 4"/>
+          <p:cNvSpPr txBox="1"/>
+          <p:nvPr/>
+        </p:nvSpPr>
+        <p:spPr>
+          <a:xfrm>
+            <a:off x="457200" y="1170432"/>
+            <a:ext cx="11277295" cy="5230368"/>
+          </a:xfrm>
+          <a:prstGeom prst="rect">
+            <a:avLst/>
+          </a:prstGeom>
+          <a:noFill/>
+        </p:spPr>
+        <p:txBody>
+          <a:bodyPr wrap="square">
+            <a:spAutoFit/>
+          </a:bodyPr>
+          <a:lstStyle/>
+          <a:p>
+            <a:pPr>
+              <a:spcAft>
+                <a:spcPts val="800"/>
+              </a:spcAft>
+            </a:pPr>
+            <a:r>
+              <a:rPr sz="2000" b="0" i="0">
+                <a:solidFill>
+                  <a:srgbClr val="333333"/>
+                </a:solidFill>
+                <a:latin typeface="Calibri"/>
+              </a:rPr>
+              <a:t>–   Ya existe el catalogo de RF y RNF de VetCare, pero esta redactado como lista de deseos y nadie sabe en que orden ocurren las cosas ni que pasa cuando algo sale mal.</a:t>
+            </a:r>
+          </a:p>
+          <a:p>
+            <a:pPr>
+              <a:spcAft>
+                <a:spcPts val="800"/>
+              </a:spcAft>
+            </a:pPr>
+            <a:r>
+              <a:rPr sz="2000" b="0" i="0">
+                <a:solidFill>
+                  <a:srgbClr val="333333"/>
+                </a:solidFill>
+                <a:latin typeface="Calibri"/>
+              </a:rPr>
+              <a:t>–   La recepcionista de Huellitas describe su trabajo con frases sueltas: busco la carpeta, si no aparece le pregunto al veterinario, si el propietario es nuevo lleno una hoja aparte y la engrapo.</a:t>
+            </a:r>
+          </a:p>
+          <a:p>
+            <a:pPr>
+              <a:spcAft>
+                <a:spcPts val="800"/>
+              </a:spcAft>
+            </a:pPr>
+            <a:r>
+              <a:rPr sz="2000" b="0" i="0">
+                <a:solidFill>
+                  <a:srgbClr val="333333"/>
+                </a:solidFill>
+                <a:latin typeface="Calibri"/>
+              </a:rPr>
+              <a:t>–   El equipo tiene draw.io abierto y la tentacion de dibujar veinte monigotes antes de escribir una sola linea de comportamiento.</a:t>
+            </a:r>
+          </a:p>
+        </p:txBody>
+      </p:sp>
+      <p:sp>
+        <p:nvSpPr>
+          <p:cNvPr id="6" name="TextBox 5"/>
+          <p:cNvSpPr txBox="1"/>
+          <p:nvPr/>
+        </p:nvSpPr>
+        <p:spPr>
+          <a:xfrm>
+            <a:off x="11185855" y="6473952"/>
+            <a:ext cx="640080" cy="274320"/>
+          </a:xfrm>
+          <a:prstGeom prst="rect">
+            <a:avLst/>
+          </a:prstGeom>
+          <a:noFill/>
+        </p:spPr>
+        <p:txBody>
+          <a:bodyPr wrap="square">
+            <a:spAutoFit/>
+          </a:bodyPr>
+          <a:lstStyle/>
+          <a:p>
+            <a:pPr algn="r"/>
+            <a:r>
+              <a:rPr sz="1100" b="0" i="0">
+                <a:solidFill>
+                  <a:srgbClr val="666666"/>
+                </a:solidFill>
+                <a:latin typeface="Calibri"/>
+              </a:rPr>
+              <a:t>16</a:t>
+            </a:r>
+          </a:p>
+        </p:txBody>
+      </p:sp>
+    </p:spTree>
+  </p:cSld>
+  <p:clrMapOvr>
+    <a:masterClrMapping/>
+  </p:clrMapOvr>
+</p:sld>
+</file>
+
+<file path=ppt/slides/slide17.xml><?xml version="1.0" encoding="utf-8"?>
+<p:sld xmlns:a="http://schemas.openxmlformats.org/drawingml/2006/main" xmlns:p="http://schemas.openxmlformats.org/presentationml/2006/main" xmlns:r="http://schemas.openxmlformats.org/officeDocument/2006/relationships">
+  <p:cSld>
+    <p:bg>
+      <p:bgPr>
+        <a:solidFill>
+          <a:srgbClr val="FFFFFF"/>
+        </a:solidFill>
+        <a:effectLst/>
+      </p:bgPr>
+    </p:bg>
+    <p:spTree>
+      <p:nvGrpSpPr>
+        <p:cNvPr id="1" name=""/>
+        <p:cNvGrpSpPr/>
+        <p:nvPr/>
+      </p:nvGrpSpPr>
+      <p:grpSpPr/>
+      <p:sp>
+        <p:nvSpPr>
+          <p:cNvPr id="2" name="Rectangle 1"/>
+          <p:cNvSpPr/>
+          <p:nvPr/>
+        </p:nvSpPr>
+        <p:spPr>
+          <a:xfrm>
+            <a:off x="0" y="0"/>
+            <a:ext cx="12191695" cy="960120"/>
+          </a:xfrm>
+          <a:prstGeom prst="rect">
+            <a:avLst/>
+          </a:prstGeom>
+          <a:solidFill>
+            <a:srgbClr val="095292"/>
+          </a:solidFill>
+          <a:ln>
+            <a:noFill/>
+          </a:ln>
+        </p:spPr>
+        <p:style>
+          <a:lnRef idx="1">
+            <a:schemeClr val="accent1"/>
+          </a:lnRef>
+          <a:fillRef idx="3">
+            <a:schemeClr val="accent1"/>
+          </a:fillRef>
+          <a:effectRef idx="2">
+            <a:schemeClr val="accent1"/>
+          </a:effectRef>
+          <a:fontRef idx="minor">
+            <a:schemeClr val="lt1"/>
+          </a:fontRef>
+        </p:style>
+        <p:txBody>
+          <a:bodyPr rtlCol="0" anchor="ctr"/>
+          <a:lstStyle/>
+          <a:p>
+            <a:pPr algn="ctr"/>
+          </a:p>
+        </p:txBody>
+      </p:sp>
+      <p:sp>
+        <p:nvSpPr>
+          <p:cNvPr id="3" name="Rectangle 2"/>
+          <p:cNvSpPr/>
+          <p:nvPr/>
+        </p:nvSpPr>
+        <p:spPr>
+          <a:xfrm>
+            <a:off x="0" y="960120"/>
+            <a:ext cx="12191695" cy="41148"/>
+          </a:xfrm>
+          <a:prstGeom prst="rect">
+            <a:avLst/>
+          </a:prstGeom>
+          <a:solidFill>
+            <a:srgbClr val="FFD000"/>
+          </a:solidFill>
+          <a:ln>
+            <a:noFill/>
+          </a:ln>
+        </p:spPr>
+        <p:style>
+          <a:lnRef idx="1">
+            <a:schemeClr val="accent1"/>
+          </a:lnRef>
+          <a:fillRef idx="3">
+            <a:schemeClr val="accent1"/>
+          </a:fillRef>
+          <a:effectRef idx="2">
+            <a:schemeClr val="accent1"/>
+          </a:effectRef>
+          <a:fontRef idx="minor">
+            <a:schemeClr val="lt1"/>
+          </a:fontRef>
+        </p:style>
+        <p:txBody>
+          <a:bodyPr rtlCol="0" anchor="ctr"/>
+          <a:lstStyle/>
+          <a:p>
+            <a:pPr algn="ctr"/>
+          </a:p>
+        </p:txBody>
+      </p:sp>
+      <p:sp>
+        <p:nvSpPr>
+          <p:cNvPr id="4" name="TextBox 3"/>
+          <p:cNvSpPr txBox="1"/>
+          <p:nvPr/>
+        </p:nvSpPr>
+        <p:spPr>
+          <a:xfrm>
+            <a:off x="457200" y="164592"/>
+            <a:ext cx="11277295" cy="502920"/>
+          </a:xfrm>
+          <a:prstGeom prst="rect">
+            <a:avLst/>
+          </a:prstGeom>
+          <a:noFill/>
+        </p:spPr>
+        <p:txBody>
+          <a:bodyPr wrap="square">
+            <a:spAutoFit/>
+          </a:bodyPr>
+          <a:lstStyle/>
+          <a:p>
+            <a:r>
+              <a:rPr sz="2600" b="1" i="0">
+                <a:solidFill>
+                  <a:srgbClr val="FFFFFF"/>
+                </a:solidFill>
+                <a:latin typeface="Calibri"/>
+              </a:rPr>
+              <a:t>Taller PI — pasos guiados</a:t>
+            </a:r>
+          </a:p>
+        </p:txBody>
+      </p:sp>
+      <p:sp>
+        <p:nvSpPr>
+          <p:cNvPr id="5" name="Rounded Rectangle 4"/>
+          <p:cNvSpPr/>
+          <p:nvPr/>
+        </p:nvSpPr>
+        <p:spPr>
+          <a:xfrm>
+            <a:off x="457200" y="1234440"/>
+            <a:ext cx="11277295" cy="950976"/>
+          </a:xfrm>
+          <a:prstGeom prst="roundRect">
+            <a:avLst>
+              <a:gd name="adj" fmla="val 12000"/>
+            </a:avLst>
+          </a:prstGeom>
+          <a:solidFill>
+            <a:srgbClr val="F2F2F2"/>
+          </a:solidFill>
+          <a:ln>
+            <a:noFill/>
+          </a:ln>
+        </p:spPr>
+        <p:style>
+          <a:lnRef idx="1">
+            <a:schemeClr val="accent1"/>
+          </a:lnRef>
+          <a:fillRef idx="3">
+            <a:schemeClr val="accent1"/>
+          </a:fillRef>
+          <a:effectRef idx="2">
+            <a:schemeClr val="accent1"/>
+          </a:effectRef>
+          <a:fontRef idx="minor">
+            <a:schemeClr val="lt1"/>
+          </a:fontRef>
+        </p:style>
+        <p:txBody>
+          <a:bodyPr rtlCol="0" anchor="ctr"/>
+          <a:lstStyle/>
+          <a:p>
+            <a:pPr algn="ctr"/>
+          </a:p>
+        </p:txBody>
+      </p:sp>
+      <p:sp>
+        <p:nvSpPr>
+          <p:cNvPr id="6" name="Rounded Rectangle 5"/>
+          <p:cNvSpPr/>
+          <p:nvPr/>
+        </p:nvSpPr>
+        <p:spPr>
+          <a:xfrm>
+            <a:off x="594360" y="1490472"/>
+            <a:ext cx="438912" cy="438912"/>
+          </a:xfrm>
+          <a:prstGeom prst="roundRect">
+            <a:avLst>
+              <a:gd name="adj" fmla="val 12000"/>
+            </a:avLst>
+          </a:prstGeom>
+          <a:solidFill>
+            <a:srgbClr val="095292"/>
+          </a:solidFill>
+          <a:ln>
+            <a:noFill/>
+          </a:ln>
+        </p:spPr>
+        <p:style>
+          <a:lnRef idx="1">
+            <a:schemeClr val="accent1"/>
+          </a:lnRef>
+          <a:fillRef idx="3">
+            <a:schemeClr val="accent1"/>
+          </a:fillRef>
+          <a:effectRef idx="2">
+            <a:schemeClr val="accent1"/>
+          </a:effectRef>
+          <a:fontRef idx="minor">
+            <a:schemeClr val="lt1"/>
+          </a:fontRef>
+        </p:style>
+        <p:txBody>
+          <a:bodyPr rtlCol="0" anchor="ctr"/>
+          <a:lstStyle/>
+          <a:p>
+            <a:pPr algn="ctr"/>
+          </a:p>
+        </p:txBody>
+      </p:sp>
+      <p:sp>
+        <p:nvSpPr>
+          <p:cNvPr id="7" name="TextBox 6"/>
+          <p:cNvSpPr txBox="1"/>
+          <p:nvPr/>
+        </p:nvSpPr>
+        <p:spPr>
+          <a:xfrm>
+            <a:off x="594360" y="1490472"/>
+            <a:ext cx="438912" cy="438912"/>
+          </a:xfrm>
+          <a:prstGeom prst="rect">
+            <a:avLst/>
+          </a:prstGeom>
+          <a:noFill/>
+        </p:spPr>
+        <p:txBody>
+          <a:bodyPr wrap="square" anchor="ctr"/>
+          <a:lstStyle/>
+          <a:p>
+            <a:pPr algn="ctr"/>
+            <a:r>
+              <a:rPr sz="1600" b="1" i="0">
+                <a:solidFill>
+                  <a:srgbClr val="FFFFFF"/>
+                </a:solidFill>
+                <a:latin typeface="Calibri"/>
+              </a:rPr>
+              <a:t>1</a:t>
+            </a:r>
+          </a:p>
+        </p:txBody>
+      </p:sp>
+      <p:sp>
+        <p:nvSpPr>
+          <p:cNvPr id="8" name="TextBox 7"/>
+          <p:cNvSpPr txBox="1"/>
+          <p:nvPr/>
+        </p:nvSpPr>
+        <p:spPr>
+          <a:xfrm>
+            <a:off x="1188720" y="1325880"/>
+            <a:ext cx="10271455" cy="786384"/>
+          </a:xfrm>
+          <a:prstGeom prst="rect">
+            <a:avLst/>
+          </a:prstGeom>
+          <a:noFill/>
+        </p:spPr>
+        <p:txBody>
+          <a:bodyPr wrap="square" anchor="ctr"/>
+          <a:lstStyle/>
+          <a:p>
+            <a:r>
+              <a:rPr sz="1400" b="1" i="0">
+                <a:solidFill>
+                  <a:srgbClr val="095292"/>
+                </a:solidFill>
+                <a:latin typeface="Calibri"/>
+              </a:rPr>
+              <a:t>En draw.io, dibujar el limite del sistema rotulado VetCare y ubicar afuera los actores como roles (Recepcionista, Veterinario, Administrador y el servicio externo de mensajeria como actor secundario candidato, que hoy todavia no se conecta a ningun caso de uso); ningun actor puede llamarse con nombre propio ni con cargo inventado.</a:t>
+            </a:r>
+          </a:p>
+        </p:txBody>
+      </p:sp>
+      <p:sp>
+        <p:nvSpPr>
+          <p:cNvPr id="9" name="Rounded Rectangle 8"/>
+          <p:cNvSpPr/>
+          <p:nvPr/>
+        </p:nvSpPr>
+        <p:spPr>
+          <a:xfrm>
+            <a:off x="457200" y="2276856"/>
+            <a:ext cx="11277295" cy="950976"/>
+          </a:xfrm>
+          <a:prstGeom prst="roundRect">
+            <a:avLst>
+              <a:gd name="adj" fmla="val 12000"/>
+            </a:avLst>
+          </a:prstGeom>
+          <a:solidFill>
+            <a:srgbClr val="E8F4FA"/>
+          </a:solidFill>
+          <a:ln>
+            <a:noFill/>
+          </a:ln>
+        </p:spPr>
+        <p:style>
+          <a:lnRef idx="1">
+            <a:schemeClr val="accent1"/>
+          </a:lnRef>
+          <a:fillRef idx="3">
+            <a:schemeClr val="accent1"/>
+          </a:fillRef>
+          <a:effectRef idx="2">
+            <a:schemeClr val="accent1"/>
+          </a:effectRef>
+          <a:fontRef idx="minor">
+            <a:schemeClr val="lt1"/>
+          </a:fontRef>
+        </p:style>
+        <p:txBody>
+          <a:bodyPr rtlCol="0" anchor="ctr"/>
+          <a:lstStyle/>
+          <a:p>
+            <a:pPr algn="ctr"/>
+          </a:p>
+        </p:txBody>
+      </p:sp>
+      <p:sp>
+        <p:nvSpPr>
+          <p:cNvPr id="10" name="Rounded Rectangle 9"/>
+          <p:cNvSpPr/>
+          <p:nvPr/>
+        </p:nvSpPr>
+        <p:spPr>
+          <a:xfrm>
+            <a:off x="594360" y="2532888"/>
+            <a:ext cx="438912" cy="438912"/>
+          </a:xfrm>
+          <a:prstGeom prst="roundRect">
+            <a:avLst>
+              <a:gd name="adj" fmla="val 12000"/>
+            </a:avLst>
+          </a:prstGeom>
+          <a:solidFill>
+            <a:srgbClr val="095292"/>
+          </a:solidFill>
+          <a:ln>
+            <a:noFill/>
+          </a:ln>
+        </p:spPr>
+        <p:style>
+          <a:lnRef idx="1">
+            <a:schemeClr val="accent1"/>
+          </a:lnRef>
+          <a:fillRef idx="3">
+            <a:schemeClr val="accent1"/>
+          </a:fillRef>
+          <a:effectRef idx="2">
+            <a:schemeClr val="accent1"/>
+          </a:effectRef>
+          <a:fontRef idx="minor">
+            <a:schemeClr val="lt1"/>
+          </a:fontRef>
+        </p:style>
+        <p:txBody>
+          <a:bodyPr rtlCol="0" anchor="ctr"/>
+          <a:lstStyle/>
+          <a:p>
+            <a:pPr algn="ctr"/>
+          </a:p>
+        </p:txBody>
+      </p:sp>
+      <p:sp>
+        <p:nvSpPr>
+          <p:cNvPr id="11" name="TextBox 10"/>
+          <p:cNvSpPr txBox="1"/>
+          <p:nvPr/>
+        </p:nvSpPr>
+        <p:spPr>
+          <a:xfrm>
+            <a:off x="594360" y="2532888"/>
+            <a:ext cx="438912" cy="438912"/>
+          </a:xfrm>
+          <a:prstGeom prst="rect">
+            <a:avLst/>
+          </a:prstGeom>
+          <a:noFill/>
+        </p:spPr>
+        <p:txBody>
+          <a:bodyPr wrap="square" anchor="ctr"/>
+          <a:lstStyle/>
+          <a:p>
+            <a:pPr algn="ctr"/>
+            <a:r>
+              <a:rPr sz="1600" b="1" i="0">
+                <a:solidFill>
+                  <a:srgbClr val="FFFFFF"/>
+                </a:solidFill>
+                <a:latin typeface="Calibri"/>
+              </a:rPr>
+              <a:t>2</a:t>
+            </a:r>
+          </a:p>
+        </p:txBody>
+      </p:sp>
+      <p:sp>
+        <p:nvSpPr>
+          <p:cNvPr id="12" name="TextBox 11"/>
+          <p:cNvSpPr txBox="1"/>
+          <p:nvPr/>
+        </p:nvSpPr>
+        <p:spPr>
+          <a:xfrm>
+            <a:off x="1188720" y="2368296"/>
+            <a:ext cx="10271455" cy="786384"/>
+          </a:xfrm>
+          <a:prstGeom prst="rect">
+            <a:avLst/>
+          </a:prstGeom>
+          <a:noFill/>
+        </p:spPr>
+        <p:txBody>
+          <a:bodyPr wrap="square" anchor="ctr"/>
+          <a:lstStyle/>
+          <a:p>
+            <a:r>
+              <a:rPr sz="1400" b="1" i="0">
+                <a:solidFill>
+                  <a:srgbClr val="095292"/>
+                </a:solidFill>
+                <a:latin typeface="Calibri"/>
+              </a:rPr>
+              <a:t>Colocar dentro del limite entre seis y ocho casos de uso derivados del catalogo de RF ya construido, todos redactados como verbo en infinitivo mas objeto del dominio, y borrar de inmediato cualquier elipse que se llame Guardar, Validar, Mostrar o Iniciar pantalla.</a:t>
+            </a:r>
+          </a:p>
+        </p:txBody>
+      </p:sp>
+      <p:sp>
+        <p:nvSpPr>
+          <p:cNvPr id="13" name="Rounded Rectangle 12"/>
+          <p:cNvSpPr/>
+          <p:nvPr/>
+        </p:nvSpPr>
+        <p:spPr>
+          <a:xfrm>
+            <a:off x="457200" y="3319272"/>
+            <a:ext cx="11277295" cy="950976"/>
+          </a:xfrm>
+          <a:prstGeom prst="roundRect">
+            <a:avLst>
+              <a:gd name="adj" fmla="val 12000"/>
+            </a:avLst>
+          </a:prstGeom>
+          <a:solidFill>
+            <a:srgbClr val="F2F2F2"/>
+          </a:solidFill>
+          <a:ln>
+            <a:noFill/>
+          </a:ln>
+        </p:spPr>
+        <p:style>
+          <a:lnRef idx="1">
+            <a:schemeClr val="accent1"/>
+          </a:lnRef>
+          <a:fillRef idx="3">
+            <a:schemeClr val="accent1"/>
+          </a:fillRef>
+          <a:effectRef idx="2">
+            <a:schemeClr val="accent1"/>
+          </a:effectRef>
+          <a:fontRef idx="minor">
+            <a:schemeClr val="lt1"/>
+          </a:fontRef>
+        </p:style>
+        <p:txBody>
+          <a:bodyPr rtlCol="0" anchor="ctr"/>
+          <a:lstStyle/>
+          <a:p>
+            <a:pPr algn="ctr"/>
+          </a:p>
+        </p:txBody>
+      </p:sp>
+      <p:sp>
+        <p:nvSpPr>
+          <p:cNvPr id="14" name="Rounded Rectangle 13"/>
+          <p:cNvSpPr/>
+          <p:nvPr/>
+        </p:nvSpPr>
+        <p:spPr>
+          <a:xfrm>
+            <a:off x="594360" y="3575304"/>
+            <a:ext cx="438912" cy="438912"/>
+          </a:xfrm>
+          <a:prstGeom prst="roundRect">
+            <a:avLst>
+              <a:gd name="adj" fmla="val 12000"/>
+            </a:avLst>
+          </a:prstGeom>
+          <a:solidFill>
+            <a:srgbClr val="095292"/>
+          </a:solidFill>
+          <a:ln>
+            <a:noFill/>
+          </a:ln>
+        </p:spPr>
+        <p:style>
+          <a:lnRef idx="1">
+            <a:schemeClr val="accent1"/>
+          </a:lnRef>
+          <a:fillRef idx="3">
+            <a:schemeClr val="accent1"/>
+          </a:fillRef>
+          <a:effectRef idx="2">
+            <a:schemeClr val="accent1"/>
+          </a:effectRef>
+          <a:fontRef idx="minor">
+            <a:schemeClr val="lt1"/>
+          </a:fontRef>
+        </p:style>
+        <p:txBody>
+          <a:bodyPr rtlCol="0" anchor="ctr"/>
+          <a:lstStyle/>
+          <a:p>
+            <a:pPr algn="ctr"/>
+          </a:p>
+        </p:txBody>
+      </p:sp>
+      <p:sp>
+        <p:nvSpPr>
+          <p:cNvPr id="15" name="TextBox 14"/>
+          <p:cNvSpPr txBox="1"/>
+          <p:nvPr/>
+        </p:nvSpPr>
+        <p:spPr>
+          <a:xfrm>
+            <a:off x="594360" y="3575304"/>
+            <a:ext cx="438912" cy="438912"/>
+          </a:xfrm>
+          <a:prstGeom prst="rect">
+            <a:avLst/>
+          </a:prstGeom>
+          <a:noFill/>
+        </p:spPr>
+        <p:txBody>
+          <a:bodyPr wrap="square" anchor="ctr"/>
+          <a:lstStyle/>
+          <a:p>
+            <a:pPr algn="ctr"/>
+            <a:r>
+              <a:rPr sz="1600" b="1" i="0">
+                <a:solidFill>
+                  <a:srgbClr val="FFFFFF"/>
+                </a:solidFill>
+                <a:latin typeface="Calibri"/>
+              </a:rPr>
+              <a:t>3</a:t>
+            </a:r>
+          </a:p>
+        </p:txBody>
+      </p:sp>
+      <p:sp>
+        <p:nvSpPr>
+          <p:cNvPr id="16" name="TextBox 15"/>
+          <p:cNvSpPr txBox="1"/>
+          <p:nvPr/>
+        </p:nvSpPr>
+        <p:spPr>
+          <a:xfrm>
+            <a:off x="1188720" y="3410712"/>
+            <a:ext cx="10271455" cy="786384"/>
+          </a:xfrm>
+          <a:prstGeom prst="rect">
+            <a:avLst/>
+          </a:prstGeom>
+          <a:noFill/>
+        </p:spPr>
+        <p:txBody>
+          <a:bodyPr wrap="square" anchor="ctr"/>
+          <a:lstStyle/>
+          <a:p>
+            <a:r>
+              <a:rPr sz="1400" b="1" i="0">
+                <a:solidFill>
+                  <a:srgbClr val="095292"/>
+                </a:solidFill>
+                <a:latin typeface="Calibri"/>
+              </a:rPr>
+              <a:t>Construir en Google Docs la matriz de trazabilidad RF a CU: cada requisito funcional debe apuntar al menos a un caso de uso y cada caso de uso debe nacer de al menos un requisito; marcar en rojo los huerfanos que aparezcan y anotar por escrito la decision que se tomara con cada uno.</a:t>
+            </a:r>
+          </a:p>
+        </p:txBody>
+      </p:sp>
+      <p:sp>
+        <p:nvSpPr>
+          <p:cNvPr id="17" name="Rounded Rectangle 16"/>
+          <p:cNvSpPr/>
+          <p:nvPr/>
+        </p:nvSpPr>
+        <p:spPr>
+          <a:xfrm>
+            <a:off x="457200" y="4361688"/>
+            <a:ext cx="11277295" cy="950976"/>
+          </a:xfrm>
+          <a:prstGeom prst="roundRect">
+            <a:avLst>
+              <a:gd name="adj" fmla="val 12000"/>
+            </a:avLst>
+          </a:prstGeom>
+          <a:solidFill>
+            <a:srgbClr val="E8F4FA"/>
+          </a:solidFill>
+          <a:ln>
+            <a:noFill/>
+          </a:ln>
+        </p:spPr>
+        <p:style>
+          <a:lnRef idx="1">
+            <a:schemeClr val="accent1"/>
+          </a:lnRef>
+          <a:fillRef idx="3">
+            <a:schemeClr val="accent1"/>
+          </a:fillRef>
+          <a:effectRef idx="2">
+            <a:schemeClr val="accent1"/>
+          </a:effectRef>
+          <a:fontRef idx="minor">
+            <a:schemeClr val="lt1"/>
+          </a:fontRef>
+        </p:style>
+        <p:txBody>
+          <a:bodyPr rtlCol="0" anchor="ctr"/>
+          <a:lstStyle/>
+          <a:p>
+            <a:pPr algn="ctr"/>
+          </a:p>
+        </p:txBody>
+      </p:sp>
+      <p:sp>
+        <p:nvSpPr>
+          <p:cNvPr id="18" name="Rounded Rectangle 17"/>
+          <p:cNvSpPr/>
+          <p:nvPr/>
+        </p:nvSpPr>
+        <p:spPr>
+          <a:xfrm>
+            <a:off x="594360" y="4617720"/>
+            <a:ext cx="438912" cy="438912"/>
+          </a:xfrm>
+          <a:prstGeom prst="roundRect">
+            <a:avLst>
+              <a:gd name="adj" fmla="val 12000"/>
+            </a:avLst>
+          </a:prstGeom>
+          <a:solidFill>
+            <a:srgbClr val="095292"/>
+          </a:solidFill>
+          <a:ln>
+            <a:noFill/>
+          </a:ln>
+        </p:spPr>
+        <p:style>
+          <a:lnRef idx="1">
+            <a:schemeClr val="accent1"/>
+          </a:lnRef>
+          <a:fillRef idx="3">
+            <a:schemeClr val="accent1"/>
+          </a:fillRef>
+          <a:effectRef idx="2">
+            <a:schemeClr val="accent1"/>
+          </a:effectRef>
+          <a:fontRef idx="minor">
+            <a:schemeClr val="lt1"/>
+          </a:fontRef>
+        </p:style>
+        <p:txBody>
+          <a:bodyPr rtlCol="0" anchor="ctr"/>
+          <a:lstStyle/>
+          <a:p>
+            <a:pPr algn="ctr"/>
+          </a:p>
+        </p:txBody>
+      </p:sp>
+      <p:sp>
+        <p:nvSpPr>
+          <p:cNvPr id="19" name="TextBox 18"/>
+          <p:cNvSpPr txBox="1"/>
+          <p:nvPr/>
+        </p:nvSpPr>
+        <p:spPr>
+          <a:xfrm>
+            <a:off x="594360" y="4617720"/>
+            <a:ext cx="438912" cy="438912"/>
+          </a:xfrm>
+          <a:prstGeom prst="rect">
+            <a:avLst/>
+          </a:prstGeom>
+          <a:noFill/>
+        </p:spPr>
+        <p:txBody>
+          <a:bodyPr wrap="square" anchor="ctr"/>
+          <a:lstStyle/>
+          <a:p>
+            <a:pPr algn="ctr"/>
+            <a:r>
+              <a:rPr sz="1600" b="1" i="0">
+                <a:solidFill>
+                  <a:srgbClr val="FFFFFF"/>
+                </a:solidFill>
+                <a:latin typeface="Calibri"/>
+              </a:rPr>
+              <a:t>4</a:t>
+            </a:r>
+          </a:p>
+        </p:txBody>
+      </p:sp>
+      <p:sp>
+        <p:nvSpPr>
+          <p:cNvPr id="20" name="TextBox 19"/>
+          <p:cNvSpPr txBox="1"/>
+          <p:nvPr/>
+        </p:nvSpPr>
+        <p:spPr>
+          <a:xfrm>
+            <a:off x="1188720" y="4453128"/>
+            <a:ext cx="10271455" cy="786384"/>
+          </a:xfrm>
+          <a:prstGeom prst="rect">
+            <a:avLst/>
+          </a:prstGeom>
+          <a:noFill/>
+        </p:spPr>
+        <p:txBody>
+          <a:bodyPr wrap="square" anchor="ctr"/>
+          <a:lstStyle/>
+          <a:p>
+            <a:r>
+              <a:rPr sz="1500" b="1" i="0">
+                <a:solidFill>
+                  <a:srgbClr val="095292"/>
+                </a:solidFill>
+                <a:latin typeface="Calibri"/>
+              </a:rPr>
+              <a:t>Modelar exactamente una relacion include y una relacion extend en el diagrama, y escribir al lado, en una nota de draw.io, una frase que justifique por que una es obligatoria y la otra condicional; si no se puede justificar, se elimina la flecha.</a:t>
+            </a:r>
+          </a:p>
+        </p:txBody>
+      </p:sp>
+      <p:sp>
+        <p:nvSpPr>
+          <p:cNvPr id="21" name="Rounded Rectangle 20"/>
+          <p:cNvSpPr/>
+          <p:nvPr/>
+        </p:nvSpPr>
+        <p:spPr>
+          <a:xfrm>
+            <a:off x="457200" y="5404104"/>
+            <a:ext cx="11277295" cy="950976"/>
+          </a:xfrm>
+          <a:prstGeom prst="roundRect">
+            <a:avLst>
+              <a:gd name="adj" fmla="val 12000"/>
+            </a:avLst>
+          </a:prstGeom>
+          <a:solidFill>
+            <a:srgbClr val="F2F2F2"/>
+          </a:solidFill>
+          <a:ln>
+            <a:noFill/>
+          </a:ln>
+        </p:spPr>
+        <p:style>
+          <a:lnRef idx="1">
+            <a:schemeClr val="accent1"/>
+          </a:lnRef>
+          <a:fillRef idx="3">
+            <a:schemeClr val="accent1"/>
+          </a:fillRef>
+          <a:effectRef idx="2">
+            <a:schemeClr val="accent1"/>
+          </a:effectRef>
+          <a:fontRef idx="minor">
+            <a:schemeClr val="lt1"/>
+          </a:fontRef>
+        </p:style>
+        <p:txBody>
+          <a:bodyPr rtlCol="0" anchor="ctr"/>
+          <a:lstStyle/>
+          <a:p>
+            <a:pPr algn="ctr"/>
+          </a:p>
+        </p:txBody>
+      </p:sp>
+      <p:sp>
+        <p:nvSpPr>
+          <p:cNvPr id="22" name="Rounded Rectangle 21"/>
+          <p:cNvSpPr/>
+          <p:nvPr/>
+        </p:nvSpPr>
+        <p:spPr>
+          <a:xfrm>
+            <a:off x="594360" y="5660136"/>
+            <a:ext cx="438912" cy="438912"/>
+          </a:xfrm>
+          <a:prstGeom prst="roundRect">
+            <a:avLst>
+              <a:gd name="adj" fmla="val 12000"/>
+            </a:avLst>
+          </a:prstGeom>
+          <a:solidFill>
+            <a:srgbClr val="095292"/>
+          </a:solidFill>
+          <a:ln>
+            <a:noFill/>
+          </a:ln>
+        </p:spPr>
+        <p:style>
+          <a:lnRef idx="1">
+            <a:schemeClr val="accent1"/>
+          </a:lnRef>
+          <a:fillRef idx="3">
+            <a:schemeClr val="accent1"/>
+          </a:fillRef>
+          <a:effectRef idx="2">
+            <a:schemeClr val="accent1"/>
+          </a:effectRef>
+          <a:fontRef idx="minor">
+            <a:schemeClr val="lt1"/>
+          </a:fontRef>
+        </p:style>
+        <p:txBody>
+          <a:bodyPr rtlCol="0" anchor="ctr"/>
+          <a:lstStyle/>
+          <a:p>
+            <a:pPr algn="ctr"/>
+          </a:p>
+        </p:txBody>
+      </p:sp>
+      <p:sp>
+        <p:nvSpPr>
+          <p:cNvPr id="23" name="TextBox 22"/>
+          <p:cNvSpPr txBox="1"/>
+          <p:nvPr/>
+        </p:nvSpPr>
+        <p:spPr>
+          <a:xfrm>
+            <a:off x="594360" y="5660136"/>
+            <a:ext cx="438912" cy="438912"/>
+          </a:xfrm>
+          <a:prstGeom prst="rect">
+            <a:avLst/>
+          </a:prstGeom>
+          <a:noFill/>
+        </p:spPr>
+        <p:txBody>
+          <a:bodyPr wrap="square" anchor="ctr"/>
+          <a:lstStyle/>
+          <a:p>
+            <a:pPr algn="ctr"/>
+            <a:r>
+              <a:rPr sz="1600" b="1" i="0">
+                <a:solidFill>
+                  <a:srgbClr val="FFFFFF"/>
+                </a:solidFill>
+                <a:latin typeface="Calibri"/>
+              </a:rPr>
+              <a:t>5</a:t>
+            </a:r>
+          </a:p>
+        </p:txBody>
+      </p:sp>
+      <p:sp>
+        <p:nvSpPr>
+          <p:cNvPr id="24" name="TextBox 23"/>
+          <p:cNvSpPr txBox="1"/>
+          <p:nvPr/>
+        </p:nvSpPr>
+        <p:spPr>
+          <a:xfrm>
+            <a:off x="1188720" y="5495544"/>
+            <a:ext cx="10271455" cy="786384"/>
+          </a:xfrm>
+          <a:prstGeom prst="rect">
+            <a:avLst/>
+          </a:prstGeom>
+          <a:noFill/>
+        </p:spPr>
+        <p:txBody>
+          <a:bodyPr wrap="square" anchor="ctr"/>
+          <a:lstStyle/>
+          <a:p>
+            <a:r>
+              <a:rPr sz="1400" b="1" i="0">
+                <a:solidFill>
+                  <a:srgbClr val="095292"/>
+                </a:solidFill>
+                <a:latin typeface="Calibri"/>
+              </a:rPr>
+              <a:t>Diligenciar la plantilla completa de especificacion para CU-01 Registrar mascota y CU-02 Buscar expediente, con precondiciones, postcondiciones de exito y de fracaso, flujo principal en pares actor-sistema y minimo dos flujos alternos cada uno; exportar todo a PDF y subirlo a la plataforma del curso.</a:t>
+            </a:r>
+          </a:p>
+        </p:txBody>
+      </p:sp>
+      <p:sp>
+        <p:nvSpPr>
+          <p:cNvPr id="25" name="TextBox 24"/>
+          <p:cNvSpPr txBox="1"/>
+          <p:nvPr/>
+        </p:nvSpPr>
+        <p:spPr>
+          <a:xfrm>
+            <a:off x="11185855" y="6473952"/>
+            <a:ext cx="640080" cy="274320"/>
+          </a:xfrm>
+          <a:prstGeom prst="rect">
+            <a:avLst/>
+          </a:prstGeom>
+          <a:noFill/>
+        </p:spPr>
+        <p:txBody>
+          <a:bodyPr wrap="square">
+            <a:spAutoFit/>
+          </a:bodyPr>
+          <a:lstStyle/>
+          <a:p>
+            <a:pPr algn="r"/>
+            <a:r>
+              <a:rPr sz="1100" b="0" i="0">
+                <a:solidFill>
+                  <a:srgbClr val="666666"/>
+                </a:solidFill>
+                <a:latin typeface="Calibri"/>
+              </a:rPr>
+              <a:t>17</a:t>
+            </a:r>
+          </a:p>
+        </p:txBody>
+      </p:sp>
+    </p:spTree>
+  </p:cSld>
+  <p:clrMapOvr>
+    <a:masterClrMapping/>
+  </p:clrMapOvr>
+</p:sld>
+</file>
+
+<file path=ppt/slides/slide18.xml><?xml version="1.0" encoding="utf-8"?>
+<p:sld xmlns:a="http://schemas.openxmlformats.org/drawingml/2006/main" xmlns:p="http://schemas.openxmlformats.org/presentationml/2006/main" xmlns:r="http://schemas.openxmlformats.org/officeDocument/2006/relationships">
+  <p:cSld>
+    <p:bg>
+      <p:bgPr>
+        <a:solidFill>
+          <a:srgbClr val="FFFFFF"/>
+        </a:solidFill>
+        <a:effectLst/>
+      </p:bgPr>
+    </p:bg>
+    <p:spTree>
+      <p:nvGrpSpPr>
+        <p:cNvPr id="1" name=""/>
+        <p:cNvGrpSpPr/>
+        <p:nvPr/>
+      </p:nvGrpSpPr>
+      <p:grpSpPr/>
+      <p:sp>
+        <p:nvSpPr>
+          <p:cNvPr id="2" name="Rectangle 1"/>
+          <p:cNvSpPr/>
+          <p:nvPr/>
+        </p:nvSpPr>
+        <p:spPr>
+          <a:xfrm>
+            <a:off x="0" y="0"/>
+            <a:ext cx="12191695" cy="960120"/>
+          </a:xfrm>
+          <a:prstGeom prst="rect">
+            <a:avLst/>
+          </a:prstGeom>
+          <a:solidFill>
+            <a:srgbClr val="095292"/>
+          </a:solidFill>
+          <a:ln>
+            <a:noFill/>
+          </a:ln>
+        </p:spPr>
+        <p:style>
+          <a:lnRef idx="1">
+            <a:schemeClr val="accent1"/>
+          </a:lnRef>
+          <a:fillRef idx="3">
+            <a:schemeClr val="accent1"/>
+          </a:fillRef>
+          <a:effectRef idx="2">
+            <a:schemeClr val="accent1"/>
+          </a:effectRef>
+          <a:fontRef idx="minor">
+            <a:schemeClr val="lt1"/>
+          </a:fontRef>
+        </p:style>
+        <p:txBody>
+          <a:bodyPr rtlCol="0" anchor="ctr"/>
+          <a:lstStyle/>
+          <a:p>
+            <a:pPr algn="ctr"/>
+          </a:p>
+        </p:txBody>
+      </p:sp>
+      <p:sp>
+        <p:nvSpPr>
+          <p:cNvPr id="3" name="Rectangle 2"/>
+          <p:cNvSpPr/>
+          <p:nvPr/>
+        </p:nvSpPr>
+        <p:spPr>
+          <a:xfrm>
+            <a:off x="0" y="960120"/>
+            <a:ext cx="12191695" cy="41148"/>
+          </a:xfrm>
+          <a:prstGeom prst="rect">
+            <a:avLst/>
+          </a:prstGeom>
+          <a:solidFill>
+            <a:srgbClr val="FFD000"/>
+          </a:solidFill>
+          <a:ln>
+            <a:noFill/>
+          </a:ln>
+        </p:spPr>
+        <p:style>
+          <a:lnRef idx="1">
+            <a:schemeClr val="accent1"/>
+          </a:lnRef>
+          <a:fillRef idx="3">
+            <a:schemeClr val="accent1"/>
+          </a:fillRef>
+          <a:effectRef idx="2">
+            <a:schemeClr val="accent1"/>
+          </a:effectRef>
+          <a:fontRef idx="minor">
+            <a:schemeClr val="lt1"/>
+          </a:fontRef>
+        </p:style>
+        <p:txBody>
+          <a:bodyPr rtlCol="0" anchor="ctr"/>
+          <a:lstStyle/>
+          <a:p>
+            <a:pPr algn="ctr"/>
+          </a:p>
+        </p:txBody>
+      </p:sp>
+      <p:sp>
+        <p:nvSpPr>
+          <p:cNvPr id="4" name="TextBox 3"/>
+          <p:cNvSpPr txBox="1"/>
+          <p:nvPr/>
+        </p:nvSpPr>
+        <p:spPr>
+          <a:xfrm>
+            <a:off x="457200" y="164592"/>
+            <a:ext cx="11277295" cy="502920"/>
+          </a:xfrm>
+          <a:prstGeom prst="rect">
+            <a:avLst/>
+          </a:prstGeom>
+          <a:noFill/>
+        </p:spPr>
+        <p:txBody>
+          <a:bodyPr wrap="square">
+            <a:spAutoFit/>
+          </a:bodyPr>
+          <a:lstStyle/>
+          <a:p>
+            <a:r>
+              <a:rPr sz="2600" b="1" i="0">
+                <a:solidFill>
+                  <a:srgbClr val="FFFFFF"/>
+                </a:solidFill>
+                <a:latin typeface="Calibri"/>
+              </a:rPr>
+              <a:t>Antes de entregar — autochequeo</a:t>
+            </a:r>
+          </a:p>
+        </p:txBody>
+      </p:sp>
+      <p:sp>
+        <p:nvSpPr>
+          <p:cNvPr id="5" name="Rounded Rectangle 4"/>
+          <p:cNvSpPr/>
+          <p:nvPr/>
+        </p:nvSpPr>
+        <p:spPr>
+          <a:xfrm>
+            <a:off x="457200" y="1261872"/>
+            <a:ext cx="11277295" cy="566928"/>
+          </a:xfrm>
+          <a:prstGeom prst="roundRect">
+            <a:avLst>
+              <a:gd name="adj" fmla="val 12000"/>
+            </a:avLst>
+          </a:prstGeom>
+          <a:solidFill>
+            <a:srgbClr val="F2F2F2"/>
+          </a:solidFill>
+          <a:ln>
+            <a:noFill/>
+          </a:ln>
+        </p:spPr>
+        <p:style>
+          <a:lnRef idx="1">
+            <a:schemeClr val="accent1"/>
+          </a:lnRef>
+          <a:fillRef idx="3">
+            <a:schemeClr val="accent1"/>
+          </a:fillRef>
+          <a:effectRef idx="2">
+            <a:schemeClr val="accent1"/>
+          </a:effectRef>
+          <a:fontRef idx="minor">
+            <a:schemeClr val="lt1"/>
+          </a:fontRef>
+        </p:style>
+        <p:txBody>
+          <a:bodyPr rtlCol="0" anchor="ctr"/>
+          <a:lstStyle/>
+          <a:p>
+            <a:pPr algn="ctr"/>
+          </a:p>
+        </p:txBody>
+      </p:sp>
+      <p:sp>
+        <p:nvSpPr>
+          <p:cNvPr id="6" name="Rectangle 5"/>
+          <p:cNvSpPr/>
+          <p:nvPr/>
+        </p:nvSpPr>
+        <p:spPr>
+          <a:xfrm>
+            <a:off x="640080" y="1408175"/>
+            <a:ext cx="274320" cy="274320"/>
+          </a:xfrm>
+          <a:prstGeom prst="rect">
+            <a:avLst/>
+          </a:prstGeom>
+          <a:solidFill>
+            <a:srgbClr val="FFFFFF"/>
+          </a:solidFill>
+          <a:ln>
+            <a:solidFill>
+              <a:srgbClr val="333333"/>
+            </a:solidFill>
+          </a:ln>
+        </p:spPr>
+        <p:style>
+          <a:lnRef idx="1">
+            <a:schemeClr val="accent1"/>
+          </a:lnRef>
+          <a:fillRef idx="3">
+            <a:schemeClr val="accent1"/>
+          </a:fillRef>
+          <a:effectRef idx="2">
+            <a:schemeClr val="accent1"/>
+          </a:effectRef>
+          <a:fontRef idx="minor">
+            <a:schemeClr val="lt1"/>
+          </a:fontRef>
+        </p:style>
+        <p:txBody>
+          <a:bodyPr rtlCol="0" anchor="ctr"/>
+          <a:lstStyle/>
+          <a:p>
+            <a:pPr algn="ctr"/>
+          </a:p>
+        </p:txBody>
+      </p:sp>
+      <p:sp>
+        <p:nvSpPr>
+          <p:cNvPr id="7" name="Rectangle 6"/>
+          <p:cNvSpPr/>
+          <p:nvPr/>
+        </p:nvSpPr>
+        <p:spPr>
+          <a:xfrm>
+            <a:off x="640080" y="1408175"/>
+            <a:ext cx="73152" cy="274320"/>
+          </a:xfrm>
+          <a:prstGeom prst="rect">
+            <a:avLst/>
+          </a:prstGeom>
+          <a:solidFill>
+            <a:srgbClr val="269CCB"/>
+          </a:solidFill>
+          <a:ln>
+            <a:noFill/>
+          </a:ln>
+        </p:spPr>
+        <p:style>
+          <a:lnRef idx="1">
+            <a:schemeClr val="accent1"/>
+          </a:lnRef>
+          <a:fillRef idx="3">
+            <a:schemeClr val="accent1"/>
+          </a:fillRef>
+          <a:effectRef idx="2">
+            <a:schemeClr val="accent1"/>
+          </a:effectRef>
+          <a:fontRef idx="minor">
+            <a:schemeClr val="lt1"/>
+          </a:fontRef>
+        </p:style>
+        <p:txBody>
+          <a:bodyPr rtlCol="0" anchor="ctr"/>
+          <a:lstStyle/>
+          <a:p>
+            <a:pPr algn="ctr"/>
+          </a:p>
+        </p:txBody>
+      </p:sp>
+      <p:sp>
+        <p:nvSpPr>
+          <p:cNvPr id="8" name="TextBox 7"/>
+          <p:cNvSpPr txBox="1"/>
+          <p:nvPr/>
+        </p:nvSpPr>
+        <p:spPr>
+          <a:xfrm>
+            <a:off x="1097280" y="1353312"/>
+            <a:ext cx="10362895" cy="402336"/>
+          </a:xfrm>
+          <a:prstGeom prst="rect">
+            <a:avLst/>
+          </a:prstGeom>
+          <a:noFill/>
+        </p:spPr>
+        <p:txBody>
+          <a:bodyPr wrap="square" anchor="ctr"/>
+          <a:lstStyle/>
+          <a:p>
+            <a:r>
+              <a:rPr sz="1500" b="0" i="0">
+                <a:solidFill>
+                  <a:srgbClr val="333333"/>
+                </a:solidFill>
+                <a:latin typeface="Calibri"/>
+              </a:rPr>
+              <a:t>Si un actor se fuera a almorzar justo despues de ejecutar su caso de uso, quedaria satisfecho o le faltaria algo por hacer?</a:t>
+            </a:r>
+          </a:p>
+        </p:txBody>
+      </p:sp>
+      <p:sp>
+        <p:nvSpPr>
+          <p:cNvPr id="9" name="Rounded Rectangle 8"/>
+          <p:cNvSpPr/>
+          <p:nvPr/>
+        </p:nvSpPr>
+        <p:spPr>
+          <a:xfrm>
+            <a:off x="457200" y="1938528"/>
+            <a:ext cx="11277295" cy="566928"/>
+          </a:xfrm>
+          <a:prstGeom prst="roundRect">
+            <a:avLst>
+              <a:gd name="adj" fmla="val 12000"/>
+            </a:avLst>
+          </a:prstGeom>
+          <a:solidFill>
+            <a:srgbClr val="F2F2F2"/>
+          </a:solidFill>
+          <a:ln>
+            <a:noFill/>
+          </a:ln>
+        </p:spPr>
+        <p:style>
+          <a:lnRef idx="1">
+            <a:schemeClr val="accent1"/>
+          </a:lnRef>
+          <a:fillRef idx="3">
+            <a:schemeClr val="accent1"/>
+          </a:fillRef>
+          <a:effectRef idx="2">
+            <a:schemeClr val="accent1"/>
+          </a:effectRef>
+          <a:fontRef idx="minor">
+            <a:schemeClr val="lt1"/>
+          </a:fontRef>
+        </p:style>
+        <p:txBody>
+          <a:bodyPr rtlCol="0" anchor="ctr"/>
+          <a:lstStyle/>
+          <a:p>
+            <a:pPr algn="ctr"/>
+          </a:p>
+        </p:txBody>
+      </p:sp>
+      <p:sp>
+        <p:nvSpPr>
+          <p:cNvPr id="10" name="Rectangle 9"/>
+          <p:cNvSpPr/>
+          <p:nvPr/>
+        </p:nvSpPr>
+        <p:spPr>
+          <a:xfrm>
+            <a:off x="640080" y="2084832"/>
+            <a:ext cx="274320" cy="274320"/>
+          </a:xfrm>
+          <a:prstGeom prst="rect">
+            <a:avLst/>
+          </a:prstGeom>
+          <a:solidFill>
+            <a:srgbClr val="FFFFFF"/>
+          </a:solidFill>
+          <a:ln>
+            <a:solidFill>
+              <a:srgbClr val="333333"/>
+            </a:solidFill>
+          </a:ln>
+        </p:spPr>
+        <p:style>
+          <a:lnRef idx="1">
+            <a:schemeClr val="accent1"/>
+          </a:lnRef>
+          <a:fillRef idx="3">
+            <a:schemeClr val="accent1"/>
+          </a:fillRef>
+          <a:effectRef idx="2">
+            <a:schemeClr val="accent1"/>
+          </a:effectRef>
+          <a:fontRef idx="minor">
+            <a:schemeClr val="lt1"/>
+          </a:fontRef>
+        </p:style>
+        <p:txBody>
+          <a:bodyPr rtlCol="0" anchor="ctr"/>
+          <a:lstStyle/>
+          <a:p>
+            <a:pPr algn="ctr"/>
+          </a:p>
+        </p:txBody>
+      </p:sp>
+      <p:sp>
+        <p:nvSpPr>
+          <p:cNvPr id="11" name="Rectangle 10"/>
+          <p:cNvSpPr/>
+          <p:nvPr/>
+        </p:nvSpPr>
+        <p:spPr>
+          <a:xfrm>
+            <a:off x="640080" y="2084832"/>
+            <a:ext cx="73152" cy="274320"/>
+          </a:xfrm>
+          <a:prstGeom prst="rect">
+            <a:avLst/>
+          </a:prstGeom>
+          <a:solidFill>
+            <a:srgbClr val="269CCB"/>
+          </a:solidFill>
+          <a:ln>
+            <a:noFill/>
+          </a:ln>
+        </p:spPr>
+        <p:style>
+          <a:lnRef idx="1">
+            <a:schemeClr val="accent1"/>
+          </a:lnRef>
+          <a:fillRef idx="3">
+            <a:schemeClr val="accent1"/>
+          </a:fillRef>
+          <a:effectRef idx="2">
+            <a:schemeClr val="accent1"/>
+          </a:effectRef>
+          <a:fontRef idx="minor">
+            <a:schemeClr val="lt1"/>
+          </a:fontRef>
+        </p:style>
+        <p:txBody>
+          <a:bodyPr rtlCol="0" anchor="ctr"/>
+          <a:lstStyle/>
+          <a:p>
+            <a:pPr algn="ctr"/>
+          </a:p>
+        </p:txBody>
+      </p:sp>
+      <p:sp>
+        <p:nvSpPr>
+          <p:cNvPr id="12" name="TextBox 11"/>
+          <p:cNvSpPr txBox="1"/>
+          <p:nvPr/>
+        </p:nvSpPr>
+        <p:spPr>
+          <a:xfrm>
+            <a:off x="1097280" y="2029968"/>
+            <a:ext cx="10362895" cy="402336"/>
+          </a:xfrm>
+          <a:prstGeom prst="rect">
+            <a:avLst/>
+          </a:prstGeom>
+          <a:noFill/>
+        </p:spPr>
+        <p:txBody>
+          <a:bodyPr wrap="square" anchor="ctr"/>
+          <a:lstStyle/>
+          <a:p>
+            <a:r>
+              <a:rPr sz="1500" b="0" i="0">
+                <a:solidFill>
+                  <a:srgbClr val="333333"/>
+                </a:solidFill>
+                <a:latin typeface="Calibri"/>
+              </a:rPr>
+              <a:t>Su flujo principal describe pasos del negocio o describe clics sobre una interfaz que todavia no existe?</a:t>
+            </a:r>
+          </a:p>
+        </p:txBody>
+      </p:sp>
+      <p:sp>
+        <p:nvSpPr>
+          <p:cNvPr id="13" name="Rounded Rectangle 12"/>
+          <p:cNvSpPr/>
+          <p:nvPr/>
+        </p:nvSpPr>
+        <p:spPr>
+          <a:xfrm>
+            <a:off x="457200" y="2615184"/>
+            <a:ext cx="11277295" cy="566928"/>
+          </a:xfrm>
+          <a:prstGeom prst="roundRect">
+            <a:avLst>
+              <a:gd name="adj" fmla="val 12000"/>
+            </a:avLst>
+          </a:prstGeom>
+          <a:solidFill>
+            <a:srgbClr val="F2F2F2"/>
+          </a:solidFill>
+          <a:ln>
+            <a:noFill/>
+          </a:ln>
+        </p:spPr>
+        <p:style>
+          <a:lnRef idx="1">
+            <a:schemeClr val="accent1"/>
+          </a:lnRef>
+          <a:fillRef idx="3">
+            <a:schemeClr val="accent1"/>
+          </a:fillRef>
+          <a:effectRef idx="2">
+            <a:schemeClr val="accent1"/>
+          </a:effectRef>
+          <a:fontRef idx="minor">
+            <a:schemeClr val="lt1"/>
+          </a:fontRef>
+        </p:style>
+        <p:txBody>
+          <a:bodyPr rtlCol="0" anchor="ctr"/>
+          <a:lstStyle/>
+          <a:p>
+            <a:pPr algn="ctr"/>
+          </a:p>
+        </p:txBody>
+      </p:sp>
+      <p:sp>
+        <p:nvSpPr>
+          <p:cNvPr id="14" name="Rectangle 13"/>
+          <p:cNvSpPr/>
+          <p:nvPr/>
+        </p:nvSpPr>
+        <p:spPr>
+          <a:xfrm>
+            <a:off x="640080" y="2761488"/>
+            <a:ext cx="274320" cy="274320"/>
+          </a:xfrm>
+          <a:prstGeom prst="rect">
+            <a:avLst/>
+          </a:prstGeom>
+          <a:solidFill>
+            <a:srgbClr val="FFFFFF"/>
+          </a:solidFill>
+          <a:ln>
+            <a:solidFill>
+              <a:srgbClr val="333333"/>
+            </a:solidFill>
+          </a:ln>
+        </p:spPr>
+        <p:style>
+          <a:lnRef idx="1">
+            <a:schemeClr val="accent1"/>
+          </a:lnRef>
+          <a:fillRef idx="3">
+            <a:schemeClr val="accent1"/>
+          </a:fillRef>
+          <a:effectRef idx="2">
+            <a:schemeClr val="accent1"/>
+          </a:effectRef>
+          <a:fontRef idx="minor">
+            <a:schemeClr val="lt1"/>
+          </a:fontRef>
+        </p:style>
+        <p:txBody>
+          <a:bodyPr rtlCol="0" anchor="ctr"/>
+          <a:lstStyle/>
+          <a:p>
+            <a:pPr algn="ctr"/>
+          </a:p>
+        </p:txBody>
+      </p:sp>
+      <p:sp>
+        <p:nvSpPr>
+          <p:cNvPr id="15" name="Rectangle 14"/>
+          <p:cNvSpPr/>
+          <p:nvPr/>
+        </p:nvSpPr>
+        <p:spPr>
+          <a:xfrm>
+            <a:off x="640080" y="2761488"/>
+            <a:ext cx="73152" cy="274320"/>
+          </a:xfrm>
+          <a:prstGeom prst="rect">
+            <a:avLst/>
+          </a:prstGeom>
+          <a:solidFill>
+            <a:srgbClr val="269CCB"/>
+          </a:solidFill>
+          <a:ln>
+            <a:noFill/>
+          </a:ln>
+        </p:spPr>
+        <p:style>
+          <a:lnRef idx="1">
+            <a:schemeClr val="accent1"/>
+          </a:lnRef>
+          <a:fillRef idx="3">
+            <a:schemeClr val="accent1"/>
+          </a:fillRef>
+          <a:effectRef idx="2">
+            <a:schemeClr val="accent1"/>
+          </a:effectRef>
+          <a:fontRef idx="minor">
+            <a:schemeClr val="lt1"/>
+          </a:fontRef>
+        </p:style>
+        <p:txBody>
+          <a:bodyPr rtlCol="0" anchor="ctr"/>
+          <a:lstStyle/>
+          <a:p>
+            <a:pPr algn="ctr"/>
+          </a:p>
+        </p:txBody>
+      </p:sp>
+      <p:sp>
+        <p:nvSpPr>
+          <p:cNvPr id="16" name="TextBox 15"/>
+          <p:cNvSpPr txBox="1"/>
+          <p:nvPr/>
+        </p:nvSpPr>
+        <p:spPr>
+          <a:xfrm>
+            <a:off x="1097280" y="2706624"/>
+            <a:ext cx="10362895" cy="402336"/>
+          </a:xfrm>
+          <a:prstGeom prst="rect">
+            <a:avLst/>
+          </a:prstGeom>
+          <a:noFill/>
+        </p:spPr>
+        <p:txBody>
+          <a:bodyPr wrap="square" anchor="ctr"/>
+          <a:lstStyle/>
+          <a:p>
+            <a:r>
+              <a:rPr sz="1500" b="0" i="0">
+                <a:solidFill>
+                  <a:srgbClr val="333333"/>
+                </a:solidFill>
+                <a:latin typeface="Calibri"/>
+              </a:rPr>
+              <a:t>Que pasa en Huellitas cuando el propietario no esta registrado, cuando la busqueda no devuelve nada y cuando hay dos mascotas con el mismo nombre? Aparece eso escrito en algun flujo alterno?</a:t>
+            </a:r>
+          </a:p>
+        </p:txBody>
+      </p:sp>
+      <p:sp>
+        <p:nvSpPr>
+          <p:cNvPr id="17" name="TextBox 16"/>
+          <p:cNvSpPr txBox="1"/>
+          <p:nvPr/>
+        </p:nvSpPr>
+        <p:spPr>
+          <a:xfrm>
+            <a:off x="11185855" y="6473952"/>
+            <a:ext cx="640080" cy="274320"/>
+          </a:xfrm>
+          <a:prstGeom prst="rect">
+            <a:avLst/>
+          </a:prstGeom>
+          <a:noFill/>
+        </p:spPr>
+        <p:txBody>
+          <a:bodyPr wrap="square">
+            <a:spAutoFit/>
+          </a:bodyPr>
+          <a:lstStyle/>
+          <a:p>
+            <a:pPr algn="r"/>
+            <a:r>
+              <a:rPr sz="1100" b="0" i="0">
+                <a:solidFill>
+                  <a:srgbClr val="666666"/>
+                </a:solidFill>
+                <a:latin typeface="Calibri"/>
+              </a:rPr>
+              <a:t>18</a:t>
+            </a:r>
+          </a:p>
+        </p:txBody>
+      </p:sp>
+    </p:spTree>
+  </p:cSld>
+  <p:clrMapOvr>
+    <a:masterClrMapping/>
+  </p:clrMapOvr>
+</p:sld>
+</file>
+
+<file path=ppt/slides/slide19.xml><?xml version="1.0" encoding="utf-8"?>
+<p:sld xmlns:a="http://schemas.openxmlformats.org/drawingml/2006/main" xmlns:p="http://schemas.openxmlformats.org/presentationml/2006/main" xmlns:r="http://schemas.openxmlformats.org/officeDocument/2006/relationships">
+  <p:cSld>
+    <p:bg>
+      <p:bgPr>
+        <a:solidFill>
+          <a:srgbClr val="FFFFFF"/>
+        </a:solidFill>
+        <a:effectLst/>
+      </p:bgPr>
+    </p:bg>
+    <p:spTree>
+      <p:nvGrpSpPr>
+        <p:cNvPr id="1" name=""/>
+        <p:cNvGrpSpPr/>
+        <p:nvPr/>
+      </p:nvGrpSpPr>
+      <p:grpSpPr/>
+      <p:sp>
+        <p:nvSpPr>
+          <p:cNvPr id="2" name="Rectangle 1"/>
+          <p:cNvSpPr/>
+          <p:nvPr/>
+        </p:nvSpPr>
+        <p:spPr>
+          <a:xfrm>
+            <a:off x="0" y="0"/>
+            <a:ext cx="12191695" cy="960120"/>
+          </a:xfrm>
+          <a:prstGeom prst="rect">
+            <a:avLst/>
+          </a:prstGeom>
+          <a:solidFill>
+            <a:srgbClr val="095292"/>
+          </a:solidFill>
+          <a:ln>
+            <a:noFill/>
+          </a:ln>
+        </p:spPr>
+        <p:style>
+          <a:lnRef idx="1">
+            <a:schemeClr val="accent1"/>
+          </a:lnRef>
+          <a:fillRef idx="3">
+            <a:schemeClr val="accent1"/>
+          </a:fillRef>
+          <a:effectRef idx="2">
+            <a:schemeClr val="accent1"/>
+          </a:effectRef>
+          <a:fontRef idx="minor">
+            <a:schemeClr val="lt1"/>
+          </a:fontRef>
+        </p:style>
+        <p:txBody>
+          <a:bodyPr rtlCol="0" anchor="ctr"/>
+          <a:lstStyle/>
+          <a:p>
+            <a:pPr algn="ctr"/>
+          </a:p>
+        </p:txBody>
+      </p:sp>
+      <p:sp>
+        <p:nvSpPr>
+          <p:cNvPr id="3" name="Rectangle 2"/>
+          <p:cNvSpPr/>
+          <p:nvPr/>
+        </p:nvSpPr>
+        <p:spPr>
+          <a:xfrm>
+            <a:off x="0" y="960120"/>
+            <a:ext cx="12191695" cy="41148"/>
+          </a:xfrm>
+          <a:prstGeom prst="rect">
+            <a:avLst/>
+          </a:prstGeom>
+          <a:solidFill>
+            <a:srgbClr val="FFD000"/>
+          </a:solidFill>
+          <a:ln>
+            <a:noFill/>
+          </a:ln>
+        </p:spPr>
+        <p:style>
+          <a:lnRef idx="1">
+            <a:schemeClr val="accent1"/>
+          </a:lnRef>
+          <a:fillRef idx="3">
+            <a:schemeClr val="accent1"/>
+          </a:fillRef>
+          <a:effectRef idx="2">
+            <a:schemeClr val="accent1"/>
+          </a:effectRef>
+          <a:fontRef idx="minor">
+            <a:schemeClr val="lt1"/>
+          </a:fontRef>
+        </p:style>
+        <p:txBody>
+          <a:bodyPr rtlCol="0" anchor="ctr"/>
+          <a:lstStyle/>
+          <a:p>
+            <a:pPr algn="ctr"/>
+          </a:p>
+        </p:txBody>
+      </p:sp>
+      <p:sp>
+        <p:nvSpPr>
+          <p:cNvPr id="4" name="TextBox 3"/>
+          <p:cNvSpPr txBox="1"/>
+          <p:nvPr/>
+        </p:nvSpPr>
+        <p:spPr>
+          <a:xfrm>
+            <a:off x="457200" y="164592"/>
+            <a:ext cx="11277295" cy="502920"/>
+          </a:xfrm>
+          <a:prstGeom prst="rect">
+            <a:avLst/>
+          </a:prstGeom>
+          <a:noFill/>
+        </p:spPr>
+        <p:txBody>
+          <a:bodyPr wrap="square">
+            <a:spAutoFit/>
+          </a:bodyPr>
+          <a:lstStyle/>
+          <a:p>
+            <a:r>
+              <a:rPr sz="2600" b="1" i="0">
+                <a:solidFill>
+                  <a:srgbClr val="FFFFFF"/>
+                </a:solidFill>
+                <a:latin typeface="Calibri"/>
+              </a:rPr>
+              <a:t>Criterios de exito / entregable</a:t>
+            </a:r>
+          </a:p>
+        </p:txBody>
+      </p:sp>
+      <p:sp>
+        <p:nvSpPr>
+          <p:cNvPr id="5" name="TextBox 4"/>
+          <p:cNvSpPr txBox="1"/>
+          <p:nvPr/>
+        </p:nvSpPr>
+        <p:spPr>
+          <a:xfrm>
+            <a:off x="457200" y="1170432"/>
+            <a:ext cx="11277295" cy="5230368"/>
+          </a:xfrm>
+          <a:prstGeom prst="rect">
+            <a:avLst/>
+          </a:prstGeom>
+          <a:noFill/>
+        </p:spPr>
+        <p:txBody>
+          <a:bodyPr wrap="square">
+            <a:spAutoFit/>
+          </a:bodyPr>
+          <a:lstStyle/>
+          <a:p>
+            <a:pPr>
+              <a:spcAft>
+                <a:spcPts val="800"/>
+              </a:spcAft>
+            </a:pPr>
+            <a:r>
+              <a:rPr sz="2000" b="0" i="0">
+                <a:solidFill>
+                  <a:srgbClr val="333333"/>
+                </a:solidFill>
+                <a:latin typeface="Calibri"/>
+              </a:rPr>
+              <a:t>–   </a:t>
+            </a:r>
             <a:r>
               <a:rPr sz="2000" b="1" i="0">
                 <a:solidFill>
-                  <a:srgbClr val="269CCB"/>
-                </a:solidFill>
-                <a:latin typeface="Calibri"/>
-              </a:rPr>
-              <a:t>Teoria al servicio del proyecto</a:t>
+                  <a:srgbClr val="333333"/>
+                </a:solidFill>
+                <a:latin typeface="Calibri"/>
+              </a:rPr>
+              <a:t>Entregable:</a:t>
+            </a:r>
+            <a:r>
+              <a:rPr sz="2000" b="0" i="0">
+                <a:solidFill>
+                  <a:srgbClr val="333333"/>
+                </a:solidFill>
+                <a:latin typeface="Calibri"/>
+              </a:rPr>
+              <a:t> Un PDF con el diagrama de casos de uso, la matriz de trazabilidad RF a CU y las dos especificaciones textuales completas (precondiciones, postcondiciones, flujo principal y minimo dos flujos alternos cada una), subido a la plataforma del curso.</a:t>
+            </a:r>
+          </a:p>
+          <a:p>
+            <a:pPr>
+              <a:spcAft>
+                <a:spcPts val="800"/>
+              </a:spcAft>
+            </a:pPr>
+            <a:r>
+              <a:rPr sz="2000" b="0" i="0">
+                <a:solidFill>
+                  <a:srgbClr val="333333"/>
+                </a:solidFill>
+                <a:latin typeface="Calibri"/>
+              </a:rPr>
+              <a:t>–   </a:t>
+            </a:r>
+            <a:r>
+              <a:rPr sz="2000" b="1" i="0">
+                <a:solidFill>
+                  <a:srgbClr val="333333"/>
+                </a:solidFill>
+                <a:latin typeface="Calibri"/>
+              </a:rPr>
+              <a:t>Exito:</a:t>
+            </a:r>
+            <a:r>
+              <a:rPr sz="2000" b="0" i="0">
+                <a:solidFill>
+                  <a:srgbClr val="333333"/>
+                </a:solidFill>
+                <a:latin typeface="Calibri"/>
+              </a:rPr>
+              <a:t> El diagrama tiene limite de sistema rotulado, actores como roles y ningun caso de uso con nombre de boton, pantalla u operacion tecnica.</a:t>
+            </a:r>
+          </a:p>
+          <a:p>
+            <a:pPr>
+              <a:spcAft>
+                <a:spcPts val="800"/>
+              </a:spcAft>
+            </a:pPr>
+            <a:r>
+              <a:rPr sz="2000" b="0" i="0">
+                <a:solidFill>
+                  <a:srgbClr val="333333"/>
+                </a:solidFill>
+                <a:latin typeface="Calibri"/>
+              </a:rPr>
+              <a:t>–   </a:t>
+            </a:r>
+            <a:r>
+              <a:rPr sz="2000" b="1" i="0">
+                <a:solidFill>
+                  <a:srgbClr val="333333"/>
+                </a:solidFill>
+                <a:latin typeface="Calibri"/>
+              </a:rPr>
+              <a:t>Exito:</a:t>
+            </a:r>
+            <a:r>
+              <a:rPr sz="2000" b="0" i="0">
+                <a:solidFill>
+                  <a:srgbClr val="333333"/>
+                </a:solidFill>
+                <a:latin typeface="Calibri"/>
+              </a:rPr>
+              <a:t> La matriz de trazabilidad no tiene huerfanos sin decision escrita: todo RF llega al menos a un CU o queda documentado como pendiente, y todo CU nace al menos de un RF.</a:t>
+            </a:r>
+          </a:p>
+          <a:p>
+            <a:pPr>
+              <a:spcAft>
+                <a:spcPts val="800"/>
+              </a:spcAft>
+            </a:pPr>
+            <a:r>
+              <a:rPr sz="2000" b="0" i="0">
+                <a:solidFill>
+                  <a:srgbClr val="333333"/>
+                </a:solidFill>
+                <a:latin typeface="Calibri"/>
+              </a:rPr>
+              <a:t>–   </a:t>
+            </a:r>
+            <a:r>
+              <a:rPr sz="2000" b="1" i="0">
+                <a:solidFill>
+                  <a:srgbClr val="333333"/>
+                </a:solidFill>
+                <a:latin typeface="Calibri"/>
+              </a:rPr>
+              <a:t>Exito:</a:t>
+            </a:r>
+            <a:r>
+              <a:rPr sz="2000" b="0" i="0">
+                <a:solidFill>
+                  <a:srgbClr val="333333"/>
+                </a:solidFill>
+                <a:latin typeface="Calibri"/>
+              </a:rPr>
+              <a:t> Las dos especificaciones tienen precondicion, postcondicion de exito, postcondicion de fracaso y flujo principal numerado en pares actor-sistema.</a:t>
+            </a:r>
+          </a:p>
+          <a:p>
+            <a:pPr>
+              <a:spcAft>
+                <a:spcPts val="800"/>
+              </a:spcAft>
+            </a:pPr>
+            <a:r>
+              <a:rPr sz="2000" b="0" i="0">
+                <a:solidFill>
+                  <a:srgbClr val="333333"/>
+                </a:solidFill>
+                <a:latin typeface="Calibri"/>
+              </a:rPr>
+              <a:t>–   </a:t>
+            </a:r>
+            <a:r>
+              <a:rPr sz="2000" b="1" i="0">
+                <a:solidFill>
+                  <a:srgbClr val="333333"/>
+                </a:solidFill>
+                <a:latin typeface="Calibri"/>
+              </a:rPr>
+              <a:t>Exito:</a:t>
+            </a:r>
+            <a:r>
+              <a:rPr sz="2000" b="0" i="0">
+                <a:solidFill>
+                  <a:srgbClr val="333333"/>
+                </a:solidFill>
+                <a:latin typeface="Calibri"/>
+              </a:rPr>
+              <a:t> Cada especificacion incluye minimo dos flujos alternos numerados respecto al paso del flujo principal donde se desvian.</a:t>
+            </a:r>
+          </a:p>
+          <a:p>
+            <a:pPr>
+              <a:spcAft>
+                <a:spcPts val="800"/>
+              </a:spcAft>
+            </a:pPr>
+            <a:r>
+              <a:rPr sz="2000" b="0" i="0">
+                <a:solidFill>
+                  <a:srgbClr val="333333"/>
+                </a:solidFill>
+                <a:latin typeface="Calibri"/>
+              </a:rPr>
+              <a:t>–   </a:t>
+            </a:r>
+            <a:r>
+              <a:rPr sz="2000" b="1" i="0">
+                <a:solidFill>
+                  <a:srgbClr val="333333"/>
+                </a:solidFill>
+                <a:latin typeface="Calibri"/>
+              </a:rPr>
+              <a:t>Entrega en la plataforma del curso</a:t>
+            </a:r>
+            <a:r>
+              <a:rPr sz="2000" b="0" i="0">
+                <a:solidFill>
+                  <a:srgbClr val="333333"/>
+                </a:solidFill>
+                <a:latin typeface="Calibri"/>
+              </a:rPr>
+              <a:t> — en la fecha que indique el docente.</a:t>
+            </a:r>
+          </a:p>
+        </p:txBody>
+      </p:sp>
+      <p:sp>
+        <p:nvSpPr>
+          <p:cNvPr id="6" name="TextBox 5"/>
+          <p:cNvSpPr txBox="1"/>
+          <p:nvPr/>
+        </p:nvSpPr>
+        <p:spPr>
+          <a:xfrm>
+            <a:off x="11185855" y="6473952"/>
+            <a:ext cx="640080" cy="274320"/>
+          </a:xfrm>
+          <a:prstGeom prst="rect">
+            <a:avLst/>
+          </a:prstGeom>
+          <a:noFill/>
+        </p:spPr>
+        <p:txBody>
+          <a:bodyPr wrap="square">
+            <a:spAutoFit/>
+          </a:bodyPr>
+          <a:lstStyle/>
+          <a:p>
+            <a:pPr algn="r"/>
+            <a:r>
+              <a:rPr sz="1100" b="0" i="0">
+                <a:solidFill>
+                  <a:srgbClr val="666666"/>
+                </a:solidFill>
+                <a:latin typeface="Calibri"/>
+              </a:rPr>
+              <a:t>19</a:t>
             </a:r>
           </a:p>
         </p:txBody>
@@ -6684,6 +8620,833 @@
 </p:sld>
 </file>
 
+<file path=ppt/slides/slide20.xml><?xml version="1.0" encoding="utf-8"?>
+<p:sld xmlns:a="http://schemas.openxmlformats.org/drawingml/2006/main" xmlns:p="http://schemas.openxmlformats.org/presentationml/2006/main" xmlns:r="http://schemas.openxmlformats.org/officeDocument/2006/relationships">
+  <p:cSld>
+    <p:bg>
+      <p:bgPr>
+        <a:solidFill>
+          <a:srgbClr val="FFFFFF"/>
+        </a:solidFill>
+        <a:effectLst/>
+      </p:bgPr>
+    </p:bg>
+    <p:spTree>
+      <p:nvGrpSpPr>
+        <p:cNvPr id="1" name=""/>
+        <p:cNvGrpSpPr/>
+        <p:nvPr/>
+      </p:nvGrpSpPr>
+      <p:grpSpPr/>
+      <p:sp>
+        <p:nvSpPr>
+          <p:cNvPr id="2" name="Rectangle 1"/>
+          <p:cNvSpPr/>
+          <p:nvPr/>
+        </p:nvSpPr>
+        <p:spPr>
+          <a:xfrm>
+            <a:off x="0" y="0"/>
+            <a:ext cx="12191695" cy="960120"/>
+          </a:xfrm>
+          <a:prstGeom prst="rect">
+            <a:avLst/>
+          </a:prstGeom>
+          <a:solidFill>
+            <a:srgbClr val="095292"/>
+          </a:solidFill>
+          <a:ln>
+            <a:noFill/>
+          </a:ln>
+        </p:spPr>
+        <p:style>
+          <a:lnRef idx="1">
+            <a:schemeClr val="accent1"/>
+          </a:lnRef>
+          <a:fillRef idx="3">
+            <a:schemeClr val="accent1"/>
+          </a:fillRef>
+          <a:effectRef idx="2">
+            <a:schemeClr val="accent1"/>
+          </a:effectRef>
+          <a:fontRef idx="minor">
+            <a:schemeClr val="lt1"/>
+          </a:fontRef>
+        </p:style>
+        <p:txBody>
+          <a:bodyPr rtlCol="0" anchor="ctr"/>
+          <a:lstStyle/>
+          <a:p>
+            <a:pPr algn="ctr"/>
+          </a:p>
+        </p:txBody>
+      </p:sp>
+      <p:sp>
+        <p:nvSpPr>
+          <p:cNvPr id="3" name="Rectangle 2"/>
+          <p:cNvSpPr/>
+          <p:nvPr/>
+        </p:nvSpPr>
+        <p:spPr>
+          <a:xfrm>
+            <a:off x="0" y="960120"/>
+            <a:ext cx="12191695" cy="41148"/>
+          </a:xfrm>
+          <a:prstGeom prst="rect">
+            <a:avLst/>
+          </a:prstGeom>
+          <a:solidFill>
+            <a:srgbClr val="FFD000"/>
+          </a:solidFill>
+          <a:ln>
+            <a:noFill/>
+          </a:ln>
+        </p:spPr>
+        <p:style>
+          <a:lnRef idx="1">
+            <a:schemeClr val="accent1"/>
+          </a:lnRef>
+          <a:fillRef idx="3">
+            <a:schemeClr val="accent1"/>
+          </a:fillRef>
+          <a:effectRef idx="2">
+            <a:schemeClr val="accent1"/>
+          </a:effectRef>
+          <a:fontRef idx="minor">
+            <a:schemeClr val="lt1"/>
+          </a:fontRef>
+        </p:style>
+        <p:txBody>
+          <a:bodyPr rtlCol="0" anchor="ctr"/>
+          <a:lstStyle/>
+          <a:p>
+            <a:pPr algn="ctr"/>
+          </a:p>
+        </p:txBody>
+      </p:sp>
+      <p:sp>
+        <p:nvSpPr>
+          <p:cNvPr id="4" name="TextBox 3"/>
+          <p:cNvSpPr txBox="1"/>
+          <p:nvPr/>
+        </p:nvSpPr>
+        <p:spPr>
+          <a:xfrm>
+            <a:off x="457200" y="164592"/>
+            <a:ext cx="11277295" cy="502920"/>
+          </a:xfrm>
+          <a:prstGeom prst="rect">
+            <a:avLst/>
+          </a:prstGeom>
+          <a:noFill/>
+        </p:spPr>
+        <p:txBody>
+          <a:bodyPr wrap="square">
+            <a:spAutoFit/>
+          </a:bodyPr>
+          <a:lstStyle/>
+          <a:p>
+            <a:r>
+              <a:rPr sz="2600" b="1" i="0">
+                <a:solidFill>
+                  <a:srgbClr val="FFFFFF"/>
+                </a:solidFill>
+                <a:latin typeface="Calibri"/>
+              </a:rPr>
+              <a:t>Para el PI esta semana</a:t>
+            </a:r>
+          </a:p>
+        </p:txBody>
+      </p:sp>
+      <p:sp>
+        <p:nvSpPr>
+          <p:cNvPr id="5" name="Rounded Rectangle 4"/>
+          <p:cNvSpPr/>
+          <p:nvPr/>
+        </p:nvSpPr>
+        <p:spPr>
+          <a:xfrm>
+            <a:off x="457200" y="1261872"/>
+            <a:ext cx="11277295" cy="1051560"/>
+          </a:xfrm>
+          <a:prstGeom prst="roundRect">
+            <a:avLst>
+              <a:gd name="adj" fmla="val 12000"/>
+            </a:avLst>
+          </a:prstGeom>
+          <a:solidFill>
+            <a:srgbClr val="E8F4FA"/>
+          </a:solidFill>
+          <a:ln>
+            <a:noFill/>
+          </a:ln>
+        </p:spPr>
+        <p:style>
+          <a:lnRef idx="1">
+            <a:schemeClr val="accent1"/>
+          </a:lnRef>
+          <a:fillRef idx="3">
+            <a:schemeClr val="accent1"/>
+          </a:fillRef>
+          <a:effectRef idx="2">
+            <a:schemeClr val="accent1"/>
+          </a:effectRef>
+          <a:fontRef idx="minor">
+            <a:schemeClr val="lt1"/>
+          </a:fontRef>
+        </p:style>
+        <p:txBody>
+          <a:bodyPr rtlCol="0" anchor="ctr"/>
+          <a:lstStyle/>
+          <a:p>
+            <a:pPr algn="ctr"/>
+          </a:p>
+        </p:txBody>
+      </p:sp>
+      <p:sp>
+        <p:nvSpPr>
+          <p:cNvPr id="6" name="Rectangle 5"/>
+          <p:cNvSpPr/>
+          <p:nvPr/>
+        </p:nvSpPr>
+        <p:spPr>
+          <a:xfrm>
+            <a:off x="457200" y="1261872"/>
+            <a:ext cx="128016" cy="1051560"/>
+          </a:xfrm>
+          <a:prstGeom prst="rect">
+            <a:avLst/>
+          </a:prstGeom>
+          <a:solidFill>
+            <a:srgbClr val="269CCB"/>
+          </a:solidFill>
+          <a:ln>
+            <a:noFill/>
+          </a:ln>
+        </p:spPr>
+        <p:style>
+          <a:lnRef idx="1">
+            <a:schemeClr val="accent1"/>
+          </a:lnRef>
+          <a:fillRef idx="3">
+            <a:schemeClr val="accent1"/>
+          </a:fillRef>
+          <a:effectRef idx="2">
+            <a:schemeClr val="accent1"/>
+          </a:effectRef>
+          <a:fontRef idx="minor">
+            <a:schemeClr val="lt1"/>
+          </a:fontRef>
+        </p:style>
+        <p:txBody>
+          <a:bodyPr rtlCol="0" anchor="ctr"/>
+          <a:lstStyle/>
+          <a:p>
+            <a:pPr algn="ctr"/>
+          </a:p>
+        </p:txBody>
+      </p:sp>
+      <p:sp>
+        <p:nvSpPr>
+          <p:cNvPr id="7" name="TextBox 6"/>
+          <p:cNvSpPr txBox="1"/>
+          <p:nvPr/>
+        </p:nvSpPr>
+        <p:spPr>
+          <a:xfrm>
+            <a:off x="777240" y="1399031"/>
+            <a:ext cx="10774375" cy="822959"/>
+          </a:xfrm>
+          <a:prstGeom prst="rect">
+            <a:avLst/>
+          </a:prstGeom>
+          <a:noFill/>
+        </p:spPr>
+        <p:txBody>
+          <a:bodyPr wrap="square">
+            <a:spAutoFit/>
+          </a:bodyPr>
+          <a:lstStyle/>
+          <a:p>
+            <a:r>
+              <a:rPr sz="1200" b="1" i="0">
+                <a:solidFill>
+                  <a:srgbClr val="269CCB"/>
+                </a:solidFill>
+                <a:latin typeface="Calibri"/>
+              </a:rPr>
+              <a:t>Info</a:t>
+            </a:r>
+          </a:p>
+          <a:p>
+            <a:pPr>
+              <a:spcBef>
+                <a:spcPts val="400"/>
+              </a:spcBef>
+            </a:pPr>
+            <a:r>
+              <a:rPr sz="1400" b="0" i="0">
+                <a:solidFill>
+                  <a:srgbClr val="333333"/>
+                </a:solidFill>
+                <a:latin typeface="Calibri"/>
+              </a:rPr>
+              <a:t>Hito: Queda listo el diagrama de casos de uso de VetCare con su limite de sistema y la especificacion textual completa de Registrar mascota y Buscar expediente.</a:t>
+            </a:r>
+          </a:p>
+        </p:txBody>
+      </p:sp>
+      <p:sp>
+        <p:nvSpPr>
+          <p:cNvPr id="8" name="Rounded Rectangle 7"/>
+          <p:cNvSpPr/>
+          <p:nvPr/>
+        </p:nvSpPr>
+        <p:spPr>
+          <a:xfrm>
+            <a:off x="457200" y="2478024"/>
+            <a:ext cx="11277295" cy="1051560"/>
+          </a:xfrm>
+          <a:prstGeom prst="roundRect">
+            <a:avLst>
+              <a:gd name="adj" fmla="val 12000"/>
+            </a:avLst>
+          </a:prstGeom>
+          <a:solidFill>
+            <a:srgbClr val="FFF8E1"/>
+          </a:solidFill>
+          <a:ln>
+            <a:noFill/>
+          </a:ln>
+        </p:spPr>
+        <p:style>
+          <a:lnRef idx="1">
+            <a:schemeClr val="accent1"/>
+          </a:lnRef>
+          <a:fillRef idx="3">
+            <a:schemeClr val="accent1"/>
+          </a:fillRef>
+          <a:effectRef idx="2">
+            <a:schemeClr val="accent1"/>
+          </a:effectRef>
+          <a:fontRef idx="minor">
+            <a:schemeClr val="lt1"/>
+          </a:fontRef>
+        </p:style>
+        <p:txBody>
+          <a:bodyPr rtlCol="0" anchor="ctr"/>
+          <a:lstStyle/>
+          <a:p>
+            <a:pPr algn="ctr"/>
+          </a:p>
+        </p:txBody>
+      </p:sp>
+      <p:sp>
+        <p:nvSpPr>
+          <p:cNvPr id="9" name="Rectangle 8"/>
+          <p:cNvSpPr/>
+          <p:nvPr/>
+        </p:nvSpPr>
+        <p:spPr>
+          <a:xfrm>
+            <a:off x="457200" y="2478024"/>
+            <a:ext cx="128016" cy="1051560"/>
+          </a:xfrm>
+          <a:prstGeom prst="rect">
+            <a:avLst/>
+          </a:prstGeom>
+          <a:solidFill>
+            <a:srgbClr val="FFD000"/>
+          </a:solidFill>
+          <a:ln>
+            <a:noFill/>
+          </a:ln>
+        </p:spPr>
+        <p:style>
+          <a:lnRef idx="1">
+            <a:schemeClr val="accent1"/>
+          </a:lnRef>
+          <a:fillRef idx="3">
+            <a:schemeClr val="accent1"/>
+          </a:fillRef>
+          <a:effectRef idx="2">
+            <a:schemeClr val="accent1"/>
+          </a:effectRef>
+          <a:fontRef idx="minor">
+            <a:schemeClr val="lt1"/>
+          </a:fontRef>
+        </p:style>
+        <p:txBody>
+          <a:bodyPr rtlCol="0" anchor="ctr"/>
+          <a:lstStyle/>
+          <a:p>
+            <a:pPr algn="ctr"/>
+          </a:p>
+        </p:txBody>
+      </p:sp>
+      <p:sp>
+        <p:nvSpPr>
+          <p:cNvPr id="10" name="TextBox 9"/>
+          <p:cNvSpPr txBox="1"/>
+          <p:nvPr/>
+        </p:nvSpPr>
+        <p:spPr>
+          <a:xfrm>
+            <a:off x="777240" y="2615184"/>
+            <a:ext cx="10774375" cy="822959"/>
+          </a:xfrm>
+          <a:prstGeom prst="rect">
+            <a:avLst/>
+          </a:prstGeom>
+          <a:noFill/>
+        </p:spPr>
+        <p:txBody>
+          <a:bodyPr wrap="square">
+            <a:spAutoFit/>
+          </a:bodyPr>
+          <a:lstStyle/>
+          <a:p>
+            <a:r>
+              <a:rPr sz="1200" b="1" i="0">
+                <a:solidFill>
+                  <a:srgbClr val="FFD000"/>
+                </a:solidFill>
+                <a:latin typeface="Calibri"/>
+              </a:rPr>
+              <a:t>Aclaración</a:t>
+            </a:r>
+          </a:p>
+          <a:p>
+            <a:pPr>
+              <a:spcBef>
+                <a:spcPts val="400"/>
+              </a:spcBef>
+            </a:pPr>
+            <a:r>
+              <a:rPr sz="1400" b="0" i="0">
+                <a:solidFill>
+                  <a:srgbClr val="333333"/>
+                </a:solidFill>
+                <a:latin typeface="Calibri"/>
+              </a:rPr>
+              <a:t>Enunciado completo: Clases/Proyecto Integrador/ (VetCare).</a:t>
+            </a:r>
+          </a:p>
+        </p:txBody>
+      </p:sp>
+      <p:sp>
+        <p:nvSpPr>
+          <p:cNvPr id="11" name="Rounded Rectangle 10"/>
+          <p:cNvSpPr/>
+          <p:nvPr/>
+        </p:nvSpPr>
+        <p:spPr>
+          <a:xfrm>
+            <a:off x="457200" y="3694176"/>
+            <a:ext cx="11277295" cy="1051560"/>
+          </a:xfrm>
+          <a:prstGeom prst="roundRect">
+            <a:avLst>
+              <a:gd name="adj" fmla="val 12000"/>
+            </a:avLst>
+          </a:prstGeom>
+          <a:solidFill>
+            <a:srgbClr val="FBE4E4"/>
+          </a:solidFill>
+          <a:ln>
+            <a:noFill/>
+          </a:ln>
+        </p:spPr>
+        <p:style>
+          <a:lnRef idx="1">
+            <a:schemeClr val="accent1"/>
+          </a:lnRef>
+          <a:fillRef idx="3">
+            <a:schemeClr val="accent1"/>
+          </a:fillRef>
+          <a:effectRef idx="2">
+            <a:schemeClr val="accent1"/>
+          </a:effectRef>
+          <a:fontRef idx="minor">
+            <a:schemeClr val="lt1"/>
+          </a:fontRef>
+        </p:style>
+        <p:txBody>
+          <a:bodyPr rtlCol="0" anchor="ctr"/>
+          <a:lstStyle/>
+          <a:p>
+            <a:pPr algn="ctr"/>
+          </a:p>
+        </p:txBody>
+      </p:sp>
+      <p:sp>
+        <p:nvSpPr>
+          <p:cNvPr id="12" name="Rectangle 11"/>
+          <p:cNvSpPr/>
+          <p:nvPr/>
+        </p:nvSpPr>
+        <p:spPr>
+          <a:xfrm>
+            <a:off x="457200" y="3694176"/>
+            <a:ext cx="128016" cy="1051560"/>
+          </a:xfrm>
+          <a:prstGeom prst="rect">
+            <a:avLst/>
+          </a:prstGeom>
+          <a:solidFill>
+            <a:srgbClr val="A02030"/>
+          </a:solidFill>
+          <a:ln>
+            <a:noFill/>
+          </a:ln>
+        </p:spPr>
+        <p:style>
+          <a:lnRef idx="1">
+            <a:schemeClr val="accent1"/>
+          </a:lnRef>
+          <a:fillRef idx="3">
+            <a:schemeClr val="accent1"/>
+          </a:fillRef>
+          <a:effectRef idx="2">
+            <a:schemeClr val="accent1"/>
+          </a:effectRef>
+          <a:fontRef idx="minor">
+            <a:schemeClr val="lt1"/>
+          </a:fontRef>
+        </p:style>
+        <p:txBody>
+          <a:bodyPr rtlCol="0" anchor="ctr"/>
+          <a:lstStyle/>
+          <a:p>
+            <a:pPr algn="ctr"/>
+          </a:p>
+        </p:txBody>
+      </p:sp>
+      <p:sp>
+        <p:nvSpPr>
+          <p:cNvPr id="13" name="TextBox 12"/>
+          <p:cNvSpPr txBox="1"/>
+          <p:nvPr/>
+        </p:nvSpPr>
+        <p:spPr>
+          <a:xfrm>
+            <a:off x="777240" y="3831336"/>
+            <a:ext cx="10774375" cy="822959"/>
+          </a:xfrm>
+          <a:prstGeom prst="rect">
+            <a:avLst/>
+          </a:prstGeom>
+          <a:noFill/>
+        </p:spPr>
+        <p:txBody>
+          <a:bodyPr wrap="square">
+            <a:spAutoFit/>
+          </a:bodyPr>
+          <a:lstStyle/>
+          <a:p>
+            <a:r>
+              <a:rPr sz="1200" b="1" i="0">
+                <a:solidFill>
+                  <a:srgbClr val="A02030"/>
+                </a:solidFill>
+                <a:latin typeface="Calibri"/>
+              </a:rPr>
+              <a:t>Atención</a:t>
+            </a:r>
+          </a:p>
+          <a:p>
+            <a:pPr>
+              <a:spcBef>
+                <a:spcPts val="400"/>
+              </a:spcBef>
+            </a:pPr>
+            <a:r>
+              <a:rPr sz="1400" b="0" i="0">
+                <a:solidFill>
+                  <a:srgbClr val="333333"/>
+                </a:solidFill>
+                <a:latin typeface="Calibri"/>
+              </a:rPr>
+              <a:t>Entrega del taller, si el docente lo asigna · en la fecha que indique el docente.</a:t>
+            </a:r>
+          </a:p>
+        </p:txBody>
+      </p:sp>
+      <p:sp>
+        <p:nvSpPr>
+          <p:cNvPr id="14" name="TextBox 13"/>
+          <p:cNvSpPr txBox="1"/>
+          <p:nvPr/>
+        </p:nvSpPr>
+        <p:spPr>
+          <a:xfrm>
+            <a:off x="11185855" y="6473952"/>
+            <a:ext cx="640080" cy="274320"/>
+          </a:xfrm>
+          <a:prstGeom prst="rect">
+            <a:avLst/>
+          </a:prstGeom>
+          <a:noFill/>
+        </p:spPr>
+        <p:txBody>
+          <a:bodyPr wrap="square">
+            <a:spAutoFit/>
+          </a:bodyPr>
+          <a:lstStyle/>
+          <a:p>
+            <a:pPr algn="r"/>
+            <a:r>
+              <a:rPr sz="1100" b="0" i="0">
+                <a:solidFill>
+                  <a:srgbClr val="666666"/>
+                </a:solidFill>
+                <a:latin typeface="Calibri"/>
+              </a:rPr>
+              <a:t>20</a:t>
+            </a:r>
+          </a:p>
+        </p:txBody>
+      </p:sp>
+    </p:spTree>
+  </p:cSld>
+  <p:clrMapOvr>
+    <a:masterClrMapping/>
+  </p:clrMapOvr>
+</p:sld>
+</file>
+
+<file path=ppt/slides/slide21.xml><?xml version="1.0" encoding="utf-8"?>
+<p:sld xmlns:a="http://schemas.openxmlformats.org/drawingml/2006/main" xmlns:p="http://schemas.openxmlformats.org/presentationml/2006/main" xmlns:r="http://schemas.openxmlformats.org/officeDocument/2006/relationships">
+  <p:cSld>
+    <p:bg>
+      <p:bgPr>
+        <a:solidFill>
+          <a:srgbClr val="FFFFFF"/>
+        </a:solidFill>
+        <a:effectLst/>
+      </p:bgPr>
+    </p:bg>
+    <p:spTree>
+      <p:nvGrpSpPr>
+        <p:cNvPr id="1" name=""/>
+        <p:cNvGrpSpPr/>
+        <p:nvPr/>
+      </p:nvGrpSpPr>
+      <p:grpSpPr/>
+      <p:sp>
+        <p:nvSpPr>
+          <p:cNvPr id="2" name="Rectangle 1"/>
+          <p:cNvSpPr/>
+          <p:nvPr/>
+        </p:nvSpPr>
+        <p:spPr>
+          <a:xfrm>
+            <a:off x="0" y="0"/>
+            <a:ext cx="12191695" cy="164592"/>
+          </a:xfrm>
+          <a:prstGeom prst="rect">
+            <a:avLst/>
+          </a:prstGeom>
+          <a:solidFill>
+            <a:srgbClr val="269CCB"/>
+          </a:solidFill>
+          <a:ln>
+            <a:noFill/>
+          </a:ln>
+        </p:spPr>
+        <p:style>
+          <a:lnRef idx="1">
+            <a:schemeClr val="accent1"/>
+          </a:lnRef>
+          <a:fillRef idx="3">
+            <a:schemeClr val="accent1"/>
+          </a:fillRef>
+          <a:effectRef idx="2">
+            <a:schemeClr val="accent1"/>
+          </a:effectRef>
+          <a:fontRef idx="minor">
+            <a:schemeClr val="lt1"/>
+          </a:fontRef>
+        </p:style>
+        <p:txBody>
+          <a:bodyPr rtlCol="0" anchor="ctr"/>
+          <a:lstStyle/>
+          <a:p>
+            <a:pPr algn="ctr"/>
+          </a:p>
+        </p:txBody>
+      </p:sp>
+      <p:pic>
+        <p:nvPicPr>
+          <p:cNvPr id="3" name="Picture 2" descr="logo_uniajc_color.png"/>
+          <p:cNvPicPr>
+            <a:picLocks noChangeAspect="1"/>
+          </p:cNvPicPr>
+          <p:nvPr/>
+        </p:nvPicPr>
+        <p:blipFill>
+          <a:blip r:embed="rId2"/>
+          <a:stretch>
+            <a:fillRect/>
+          </a:stretch>
+        </p:blipFill>
+        <p:spPr>
+          <a:xfrm>
+            <a:off x="10271455" y="5998464"/>
+            <a:ext cx="1463040" cy="643233"/>
+          </a:xfrm>
+          <a:prstGeom prst="rect">
+            <a:avLst/>
+          </a:prstGeom>
+        </p:spPr>
+      </p:pic>
+      <p:sp>
+        <p:nvSpPr>
+          <p:cNvPr id="4" name="TextBox 3"/>
+          <p:cNvSpPr txBox="1"/>
+          <p:nvPr/>
+        </p:nvSpPr>
+        <p:spPr>
+          <a:xfrm>
+            <a:off x="457200" y="1737360"/>
+            <a:ext cx="11277295" cy="1097280"/>
+          </a:xfrm>
+          <a:prstGeom prst="rect">
+            <a:avLst/>
+          </a:prstGeom>
+          <a:noFill/>
+        </p:spPr>
+        <p:txBody>
+          <a:bodyPr wrap="square" anchor="ctr"/>
+          <a:lstStyle/>
+          <a:p>
+            <a:pPr algn="ctr"/>
+            <a:r>
+              <a:rPr sz="3400" b="1" i="0">
+                <a:solidFill>
+                  <a:srgbClr val="095292"/>
+                </a:solidFill>
+                <a:latin typeface="Calibri"/>
+              </a:rPr>
+              <a:t>Clase 9 · VetCare avanza</a:t>
+            </a:r>
+          </a:p>
+        </p:txBody>
+      </p:sp>
+      <p:sp>
+        <p:nvSpPr>
+          <p:cNvPr id="5" name="TextBox 4"/>
+          <p:cNvSpPr txBox="1"/>
+          <p:nvPr/>
+        </p:nvSpPr>
+        <p:spPr>
+          <a:xfrm>
+            <a:off x="457200" y="3017520"/>
+            <a:ext cx="11277295" cy="1645920"/>
+          </a:xfrm>
+          <a:prstGeom prst="rect">
+            <a:avLst/>
+          </a:prstGeom>
+          <a:noFill/>
+        </p:spPr>
+        <p:txBody>
+          <a:bodyPr wrap="square">
+            <a:spAutoFit/>
+          </a:bodyPr>
+          <a:lstStyle/>
+          <a:p>
+            <a:pPr algn="ctr">
+              <a:spcAft>
+                <a:spcPts val="600"/>
+              </a:spcAft>
+            </a:pPr>
+            <a:r>
+              <a:rPr sz="1600" b="0" i="0">
+                <a:solidFill>
+                  <a:srgbClr val="333333"/>
+                </a:solidFill>
+                <a:latin typeface="Calibri"/>
+              </a:rPr>
+              <a:t>Queda listo el diagrama de casos de uso de VetCare con su limite de sistema y la especificacion textual completa de Registrar mascota y Buscar expediente.</a:t>
+            </a:r>
+          </a:p>
+          <a:p>
+            <a:pPr algn="ctr">
+              <a:spcAft>
+                <a:spcPts val="600"/>
+              </a:spcAft>
+            </a:pPr>
+            <a:r>
+              <a:rPr sz="1600" b="0" i="0">
+                <a:solidFill>
+                  <a:srgbClr val="333333"/>
+                </a:solidFill>
+                <a:latin typeface="Calibri"/>
+              </a:rPr>
+              <a:t>Entregable: Un PDF con el diagrama de casos de uso, la matriz de trazabilidad RF a CU y las dos especificaciones textuales completas (precondiciones, postcondiciones, flujo principal y minimo dos flujos alternos cada una), subido a la plataforma del curso.</a:t>
+            </a:r>
+          </a:p>
+          <a:p>
+            <a:pPr algn="ctr">
+              <a:spcAft>
+                <a:spcPts val="600"/>
+              </a:spcAft>
+            </a:pPr>
+            <a:r>
+              <a:rPr sz="1600" b="0" i="0">
+                <a:solidFill>
+                  <a:srgbClr val="333333"/>
+                </a:solidFill>
+                <a:latin typeface="Calibri"/>
+              </a:rPr>
+              <a:t>Siguiente clase: continuamos el hilo del PI</a:t>
+            </a:r>
+          </a:p>
+        </p:txBody>
+      </p:sp>
+      <p:sp>
+        <p:nvSpPr>
+          <p:cNvPr id="6" name="TextBox 5"/>
+          <p:cNvSpPr txBox="1"/>
+          <p:nvPr/>
+        </p:nvSpPr>
+        <p:spPr>
+          <a:xfrm>
+            <a:off x="457200" y="4754880"/>
+            <a:ext cx="11277295" cy="640080"/>
+          </a:xfrm>
+          <a:prstGeom prst="rect">
+            <a:avLst/>
+          </a:prstGeom>
+          <a:noFill/>
+        </p:spPr>
+        <p:txBody>
+          <a:bodyPr wrap="square">
+            <a:spAutoFit/>
+          </a:bodyPr>
+          <a:lstStyle/>
+          <a:p>
+            <a:pPr algn="ctr"/>
+            <a:r>
+              <a:rPr sz="2000" b="1" i="0">
+                <a:solidFill>
+                  <a:srgbClr val="269CCB"/>
+                </a:solidFill>
+                <a:latin typeface="Calibri"/>
+              </a:rPr>
+              <a:t>Teoria al servicio del proyecto</a:t>
+            </a:r>
+          </a:p>
+        </p:txBody>
+      </p:sp>
+    </p:spTree>
+  </p:cSld>
+  <p:clrMapOvr>
+    <a:masterClrMapping/>
+  </p:clrMapOvr>
+</p:sld>
+</file>
+
 <file path=ppt/slides/slide3.xml><?xml version="1.0" encoding="utf-8"?>
 <p:sld xmlns:a="http://schemas.openxmlformats.org/drawingml/2006/main" xmlns:p="http://schemas.openxmlformats.org/presentationml/2006/main" xmlns:r="http://schemas.openxmlformats.org/officeDocument/2006/relationships">
   <p:cSld>
@@ -7669,7 +10432,7 @@
                 </a:solidFill>
                 <a:latin typeface="Calibri"/>
               </a:rPr>
-              <a:t>Teoria Core</a:t>
+              <a:t>Un caso de uso es la descripcion de una interaccion completa entre un...</a:t>
             </a:r>
           </a:p>
         </p:txBody>
@@ -7708,7 +10471,7 @@
                 </a:solidFill>
                 <a:latin typeface="Calibri"/>
               </a:rPr>
-              <a:t>–   Un caso de uso es la descripcion de una interaccion completa entre un actor y el sistema que termina entregando un…</a:t>
+              <a:t>–   Un caso de uso es la descripcion de una interaccion completa entre un actor y el sistema que termina entregando un resultado con valor observable para ese actor.</a:t>
             </a:r>
           </a:p>
           <a:p>
@@ -7724,7 +10487,7 @@
                 </a:solidFill>
                 <a:latin typeface="Calibri"/>
               </a:rPr>
-              <a:t>–   El actor es un rol, no una persona ni un cargo del organigrama</a:t>
+              <a:t>–   La palabra clave es completa: no es una pantalla, no es un boton, no es una tabla de la base de datos y no es un paso intermedio.</a:t>
             </a:r>
           </a:p>
           <a:p>
@@ -7740,7 +10503,7 @@
                 </a:solidFill>
                 <a:latin typeface="Calibri"/>
               </a:rPr>
-              <a:t>–   Las relaciones entre casos de uso son tres y se abusa de ellas</a:t>
+              <a:t>–   La prueba practica que usamos en clase es la del almuerzo: si el actor puede levantarse de la silla e irse a almorzar satisfecho porque ya logro lo que queria, entonces eso es un caso de uso.</a:t>
             </a:r>
           </a:p>
           <a:p>
@@ -7756,7 +10519,7 @@
                 </a:solidFill>
                 <a:latin typeface="Calibri"/>
               </a:rPr>
-              <a:t>–   La especificacion textual es donde vive el noventa por ciento del valor y donde casi nadie invierte tiempo</a:t>
+              <a:t>–   En VetCare, Registrar mascota pasa la prueba, porque la recepcionista de Huellitas termina con la ficha creada y el codigo asignado; en cambio Validar la fecha de nacimiento no la pasa, porque nadie llega a la clinica con el objetivo de validar una fecha.</a:t>
             </a:r>
           </a:p>
           <a:p>
@@ -7772,7 +10535,23 @@
                 </a:solidFill>
                 <a:latin typeface="Calibri"/>
               </a:rPr>
-              <a:t>–   Precondiciones y postcondiciones son un contrato, no un adorno</a:t>
+              <a:t>–   Esa distincion parece un detalle de nombres, pero define el tamaño de todo el modelo: si se confunde, un sistema pequeño como VetCare termina con cuarenta casos de uso inutiles en vez de seis u ocho casos de uso reales.</a:t>
+            </a:r>
+          </a:p>
+          <a:p>
+            <a:pPr>
+              <a:spcAft>
+                <a:spcPts val="800"/>
+              </a:spcAft>
+            </a:pPr>
+            <a:r>
+              <a:rPr sz="2000" b="0" i="0">
+                <a:solidFill>
+                  <a:srgbClr val="333333"/>
+                </a:solidFill>
+                <a:latin typeface="Calibri"/>
+              </a:rPr>
+              <a:t>–   La regla de redaccion es simple y no se negocia: verbo en infinitivo mas objeto del dominio, escrito con las palabras de la clinica y no con palabras de programador.</a:t>
             </a:r>
           </a:p>
         </p:txBody>
@@ -7953,141 +10732,21 @@
                 </a:solidFill>
                 <a:latin typeface="Calibri"/>
               </a:rPr>
-              <a:t>CU-02 Buscar expediente: la especificacion que el diagrama no muestra</a:t>
-            </a:r>
-          </a:p>
-        </p:txBody>
-      </p:sp>
-      <p:sp>
-        <p:nvSpPr>
-          <p:cNvPr id="5" name="Rounded Rectangle 4"/>
-          <p:cNvSpPr/>
-          <p:nvPr/>
-        </p:nvSpPr>
-        <p:spPr>
-          <a:xfrm>
-            <a:off x="457200" y="1261872"/>
-            <a:ext cx="11277295" cy="4773168"/>
-          </a:xfrm>
-          <a:prstGeom prst="roundRect">
-            <a:avLst>
-              <a:gd name="adj" fmla="val 12000"/>
-            </a:avLst>
-          </a:prstGeom>
-          <a:solidFill>
-            <a:srgbClr val="1E2A38"/>
-          </a:solidFill>
-          <a:ln>
-            <a:noFill/>
-          </a:ln>
-        </p:spPr>
-        <p:style>
-          <a:lnRef idx="1">
-            <a:schemeClr val="accent1"/>
-          </a:lnRef>
-          <a:fillRef idx="3">
-            <a:schemeClr val="accent1"/>
-          </a:fillRef>
-          <a:effectRef idx="2">
-            <a:schemeClr val="accent1"/>
-          </a:effectRef>
-          <a:fontRef idx="minor">
-            <a:schemeClr val="lt1"/>
-          </a:fontRef>
-        </p:style>
-        <p:txBody>
-          <a:bodyPr rtlCol="0" anchor="ctr"/>
-          <a:lstStyle/>
-          <a:p>
-            <a:pPr algn="ctr"/>
-          </a:p>
-        </p:txBody>
-      </p:sp>
-      <p:sp>
-        <p:nvSpPr>
-          <p:cNvPr id="6" name="Rectangle 5"/>
-          <p:cNvSpPr/>
-          <p:nvPr/>
-        </p:nvSpPr>
-        <p:spPr>
-          <a:xfrm>
-            <a:off x="457200" y="1261872"/>
-            <a:ext cx="11277295" cy="320040"/>
-          </a:xfrm>
-          <a:prstGeom prst="rect">
-            <a:avLst/>
-          </a:prstGeom>
-          <a:solidFill>
-            <a:srgbClr val="095292"/>
-          </a:solidFill>
-          <a:ln>
-            <a:noFill/>
-          </a:ln>
-        </p:spPr>
-        <p:style>
-          <a:lnRef idx="1">
-            <a:schemeClr val="accent1"/>
-          </a:lnRef>
-          <a:fillRef idx="3">
-            <a:schemeClr val="accent1"/>
-          </a:fillRef>
-          <a:effectRef idx="2">
-            <a:schemeClr val="accent1"/>
-          </a:effectRef>
-          <a:fontRef idx="minor">
-            <a:schemeClr val="lt1"/>
-          </a:fontRef>
-        </p:style>
-        <p:txBody>
-          <a:bodyPr rtlCol="0" anchor="ctr"/>
-          <a:lstStyle/>
-          <a:p>
-            <a:pPr algn="ctr"/>
-          </a:p>
-        </p:txBody>
-      </p:sp>
-      <p:sp>
-        <p:nvSpPr>
-          <p:cNvPr id="7" name="TextBox 6"/>
+              <a:t>El actor es un rol, no una persona ni un cargo del organigrama</a:t>
+            </a:r>
+          </a:p>
+        </p:txBody>
+      </p:sp>
+      <p:sp>
+        <p:nvSpPr>
+          <p:cNvPr id="5" name="TextBox 4"/>
           <p:cNvSpPr txBox="1"/>
           <p:nvPr/>
         </p:nvSpPr>
         <p:spPr>
           <a:xfrm>
-            <a:off x="685800" y="1307592"/>
-            <a:ext cx="10820095" cy="256032"/>
-          </a:xfrm>
-          <a:prstGeom prst="rect">
-            <a:avLst/>
-          </a:prstGeom>
-          <a:noFill/>
-        </p:spPr>
-        <p:txBody>
-          <a:bodyPr wrap="square" anchor="ctr"/>
-          <a:lstStyle/>
-          <a:p>
-            <a:r>
-              <a:rPr sz="1000" b="1" i="0">
-                <a:solidFill>
-                  <a:srgbClr val="269CCB"/>
-                </a:solidFill>
-                <a:latin typeface="Calibri"/>
-              </a:rPr>
-              <a:t>● ● ●</a:t>
-            </a:r>
-          </a:p>
-        </p:txBody>
-      </p:sp>
-      <p:sp>
-        <p:nvSpPr>
-          <p:cNvPr id="8" name="TextBox 7"/>
-          <p:cNvSpPr txBox="1"/>
-          <p:nvPr/>
-        </p:nvSpPr>
-        <p:spPr>
-          <a:xfrm>
-            <a:off x="777240" y="1719072"/>
-            <a:ext cx="10637215" cy="4133087"/>
+            <a:off x="457200" y="1170432"/>
+            <a:ext cx="11277295" cy="5230368"/>
           </a:xfrm>
           <a:prstGeom prst="rect">
             <a:avLst/>
@@ -8102,267 +10761,104 @@
           <a:p>
             <a:pPr>
               <a:spcAft>
-                <a:spcPts val="400"/>
+                <a:spcPts val="800"/>
               </a:spcAft>
             </a:pPr>
             <a:r>
-              <a:rPr sz="1400" b="0" i="0">
-                <a:solidFill>
-                  <a:srgbClr val="FFFFFF"/>
-                </a:solidFill>
-                <a:latin typeface="Calibri"/>
-              </a:rPr>
-              <a:t>CU-02  Buscar expediente</a:t>
+              <a:rPr sz="1900" b="0" i="0">
+                <a:solidFill>
+                  <a:srgbClr val="333333"/>
+                </a:solidFill>
+                <a:latin typeface="Calibri"/>
+              </a:rPr>
+              <a:t>–   El actor es un rol, no una persona ni un cargo del organigrama.</a:t>
             </a:r>
           </a:p>
           <a:p>
             <a:pPr>
               <a:spcAft>
-                <a:spcPts val="400"/>
+                <a:spcPts val="800"/>
               </a:spcAft>
             </a:pPr>
             <a:r>
-              <a:rPr sz="1400" b="0" i="0">
-                <a:solidFill>
-                  <a:srgbClr val="FFFFFF"/>
-                </a:solidFill>
-                <a:latin typeface="Calibri"/>
-              </a:rPr>
-              <a:t>Actor primario: Veterinario  |  Prioridad: Alta  |  Cubre: RF-05, RNF-02</a:t>
+              <a:rPr sz="1900" b="0" i="0">
+                <a:solidFill>
+                  <a:srgbClr val="333333"/>
+                </a:solidFill>
+                <a:latin typeface="Calibri"/>
+              </a:rPr>
+              <a:t>–   Doña Marta, la recepcionista de Huellitas, no es un actor: el actor es Recepcionista, y si mañana la reemplazan el modelo no cambia.</a:t>
             </a:r>
           </a:p>
           <a:p>
             <a:pPr>
               <a:spcAft>
-                <a:spcPts val="400"/>
+                <a:spcPts val="800"/>
               </a:spcAft>
             </a:pPr>
             <a:r>
-              <a:rPr sz="1400" b="0" i="0">
-                <a:solidFill>
-                  <a:srgbClr val="FFFFFF"/>
-                </a:solidFill>
-                <a:latin typeface="Calibri"/>
-              </a:rPr>
-              <a:t>Precondicion: el veterinario esta autenticado y la mascota existe en el sistema.</a:t>
+              <a:rPr sz="1900" b="0" i="0">
+                <a:solidFill>
+                  <a:srgbClr val="333333"/>
+                </a:solidFill>
+                <a:latin typeface="Calibri"/>
+              </a:rPr>
+              <a:t>–   Una misma persona puede encarnar dos actores, por ejemplo el veterinario dueño de la clinica que a veces atiende y a veces revisa las metricas: alli actua como Veterinario y como Administrador, y por eso aparecen dos monigotes.</a:t>
             </a:r>
           </a:p>
           <a:p>
             <a:pPr>
               <a:spcAft>
-                <a:spcPts val="400"/>
+                <a:spcPts val="800"/>
               </a:spcAft>
             </a:pPr>
             <a:r>
-              <a:rPr sz="1400" b="0" i="0">
-                <a:solidFill>
-                  <a:srgbClr val="FFFFFF"/>
-                </a:solidFill>
-                <a:latin typeface="Calibri"/>
-              </a:rPr>
-              <a:t>Postcondicion (exito): el expediente queda desplegado y la consulta queda en bitacora; no se modifica ningun dato clinico.</a:t>
+              <a:rPr sz="1900" b="0" i="0">
+                <a:solidFill>
+                  <a:srgbClr val="333333"/>
+                </a:solidFill>
+                <a:latin typeface="Calibri"/>
+              </a:rPr>
+              <a:t>–   Ademas existen actores que no son humanos: un sistema externo que enviaria los recordatorios por mensajeria seria un actor secundario de VetCare, porque participaria en el caso de uso pero no es quien lo inicia.</a:t>
             </a:r>
           </a:p>
           <a:p>
             <a:pPr>
               <a:spcAft>
-                <a:spcPts val="400"/>
+                <a:spcPts val="800"/>
               </a:spcAft>
             </a:pPr>
             <a:r>
-              <a:rPr sz="1400" b="0" i="0">
-                <a:solidFill>
-                  <a:srgbClr val="FFFFFF"/>
-                </a:solidFill>
-                <a:latin typeface="Calibri"/>
-              </a:rPr>
-              <a:t>Flujo principal:</a:t>
+              <a:rPr sz="1900" b="0" i="0">
+                <a:solidFill>
+                  <a:srgbClr val="333333"/>
+                </a:solidFill>
+                <a:latin typeface="Calibri"/>
+              </a:rPr>
+              <a:t>–   Todo esto se ordena con el limite del sistema, ese rectangulo que muchos omiten y que en realidad es la decision de arquitectura mas importante del diagrama: adentro va lo que nosotros vamos a construir y por lo tanto especificar, y afuera queda lo que solo vamos a consumir o a recibir.</a:t>
             </a:r>
           </a:p>
           <a:p>
             <a:pPr>
               <a:spcAft>
-                <a:spcPts val="400"/>
+                <a:spcPts val="800"/>
               </a:spcAft>
             </a:pPr>
             <a:r>
-              <a:rPr sz="1400" b="0" i="0">
-                <a:solidFill>
-                  <a:srgbClr val="FFFFFF"/>
-                </a:solidFill>
-                <a:latin typeface="Calibri"/>
-              </a:rPr>
-              <a:t>  1. El veterinario digita codigo, nombre de mascota o documento del propietario.</a:t>
-            </a:r>
-          </a:p>
-          <a:p>
-            <a:pPr>
-              <a:spcAft>
-                <a:spcPts val="400"/>
-              </a:spcAft>
-            </a:pPr>
-            <a:r>
-              <a:rPr sz="1400" b="0" i="0">
-                <a:solidFill>
-                  <a:srgbClr val="FFFFFF"/>
-                </a:solidFill>
-                <a:latin typeface="Calibri"/>
-              </a:rPr>
-              <a:t>  2. El sistema devuelve la lista de coincidencias en menos de 3 segundos (RNF-02).</a:t>
-            </a:r>
-          </a:p>
-          <a:p>
-            <a:pPr>
-              <a:spcAft>
-                <a:spcPts val="400"/>
-              </a:spcAft>
-            </a:pPr>
-            <a:r>
-              <a:rPr sz="1400" b="0" i="0">
-                <a:solidFill>
-                  <a:srgbClr val="FFFFFF"/>
-                </a:solidFill>
-                <a:latin typeface="Calibri"/>
-              </a:rPr>
-              <a:t>  3. El veterinario selecciona una mascota de la lista.</a:t>
-            </a:r>
-          </a:p>
-          <a:p>
-            <a:pPr>
-              <a:spcAft>
-                <a:spcPts val="400"/>
-              </a:spcAft>
-            </a:pPr>
-            <a:r>
-              <a:rPr sz="1400" b="0" i="0">
-                <a:solidFill>
-                  <a:srgbClr val="FFFFFF"/>
-                </a:solidFill>
-                <a:latin typeface="Calibri"/>
-              </a:rPr>
-              <a:t>  4. El sistema muestra ficha, historial de consultas y vacunas en orden cronologico.</a:t>
-            </a:r>
-          </a:p>
-          <a:p>
-            <a:pPr>
-              <a:spcAft>
-                <a:spcPts val="400"/>
-              </a:spcAft>
-            </a:pPr>
-            <a:r>
-              <a:rPr sz="1400" b="0" i="0">
-                <a:solidFill>
-                  <a:srgbClr val="FFFFFF"/>
-                </a:solidFill>
-                <a:latin typeface="Calibri"/>
-              </a:rPr>
-              <a:t>Flujos alternos:</a:t>
-            </a:r>
-          </a:p>
-          <a:p>
-            <a:pPr>
-              <a:spcAft>
-                <a:spcPts val="400"/>
-              </a:spcAft>
-            </a:pPr>
-            <a:r>
-              <a:rPr sz="1400" b="0" i="0">
-                <a:solidFill>
-                  <a:srgbClr val="FFFFFF"/>
-                </a:solidFill>
-                <a:latin typeface="Calibri"/>
-              </a:rPr>
-              <a:t>  2a. Sin coincidencias: el sistema informa y ofrece registrar la mascota (pasa a CU-01).</a:t>
-            </a:r>
-          </a:p>
-          <a:p>
-            <a:pPr>
-              <a:spcAft>
-                <a:spcPts val="400"/>
-              </a:spcAft>
-            </a:pPr>
-            <a:r>
-              <a:rPr sz="1400" b="0" i="0">
-                <a:solidFill>
-                  <a:srgbClr val="FFFFFF"/>
-                </a:solidFill>
-                <a:latin typeface="Calibri"/>
-              </a:rPr>
-              <a:t>  2b. Mas de 50 coincidencias: el sistema pagina el resultado y sugiere afinar el filtro.</a:t>
-            </a:r>
-          </a:p>
-          <a:p>
-            <a:pPr>
-              <a:spcAft>
-                <a:spcPts val="400"/>
-              </a:spcAft>
-            </a:pPr>
-            <a:r>
-              <a:rPr sz="1400" b="0" i="0">
-                <a:solidFill>
-                  <a:srgbClr val="FFFFFF"/>
-                </a:solidFill>
-                <a:latin typeface="Calibri"/>
-              </a:rPr>
-              <a:t>  4a. La mascota esta inactiva: el sistema muestra el expediente en modo solo lectura.</a:t>
-            </a:r>
-          </a:p>
-          <a:p>
-            <a:pPr>
-              <a:spcAft>
-                <a:spcPts val="400"/>
-              </a:spcAft>
-            </a:pPr>
-            <a:r>
-              <a:rPr sz="1400" b="0" i="0">
-                <a:solidFill>
-                  <a:srgbClr val="FFFFFF"/>
-                </a:solidFill>
-                <a:latin typeface="Calibri"/>
-              </a:rPr>
-              <a:t>Punto de extension: despues del paso 4 puede ejecutarse CU-06 Exportar expediente a PDF.</a:t>
-            </a:r>
-          </a:p>
-        </p:txBody>
-      </p:sp>
-      <p:sp>
-        <p:nvSpPr>
-          <p:cNvPr id="9" name="TextBox 8"/>
-          <p:cNvSpPr txBox="1"/>
-          <p:nvPr/>
-        </p:nvSpPr>
-        <p:spPr>
-          <a:xfrm>
-            <a:off x="457200" y="6080760"/>
-            <a:ext cx="11277295" cy="320040"/>
-          </a:xfrm>
-          <a:prstGeom prst="rect">
-            <a:avLst/>
-          </a:prstGeom>
-          <a:noFill/>
-        </p:spPr>
-        <p:txBody>
-          <a:bodyPr wrap="square">
-            <a:spAutoFit/>
-          </a:bodyPr>
-          <a:lstStyle/>
-          <a:p>
-            <a:pPr algn="ctr"/>
-            <a:r>
-              <a:rPr sz="1200" b="0" i="1">
-                <a:solidFill>
-                  <a:srgbClr val="666666"/>
-                </a:solidFill>
-                <a:latin typeface="Calibri"/>
-              </a:rPr>
-              <a:t>El diagrama solo dice que existe Buscar expediente; unicamente la especificacion dice que hace el sistema cuando no hay coincidencias.</a:t>
-            </a:r>
-          </a:p>
-        </p:txBody>
-      </p:sp>
-      <p:sp>
-        <p:nvSpPr>
-          <p:cNvPr id="10" name="TextBox 9"/>
+              <a:rPr sz="1900" b="0" i="0">
+                <a:solidFill>
+                  <a:srgbClr val="333333"/>
+                </a:solidFill>
+                <a:latin typeface="Calibri"/>
+              </a:rPr>
+              <a:t>–   Si en VetCare dibujamos adentro del rectangulo un caso de uso llamado Enviar mensaje de WhatsApp, estamos diciendo que nosotros construimos la mensajeria, y eso probablemente sea falso y encarezca el proyecto por escrito.</a:t>
+            </a:r>
+          </a:p>
+        </p:txBody>
+      </p:sp>
+      <p:sp>
+        <p:nvSpPr>
+          <p:cNvPr id="6" name="TextBox 5"/>
           <p:cNvSpPr txBox="1"/>
           <p:nvPr/>
         </p:nvSpPr>
@@ -8536,7 +11032,7 @@
                 </a:solidFill>
                 <a:latin typeface="Calibri"/>
               </a:rPr>
-              <a:t>Demo del dia</a:t>
+              <a:t>Las relaciones entre casos de uso son tres y se abusa de ellas (1/2)</a:t>
             </a:r>
           </a:p>
         </p:txBody>
@@ -8575,25 +11071,7 @@
                 </a:solidFill>
                 <a:latin typeface="Calibri"/>
               </a:rPr>
-              <a:t>–   </a:t>
-            </a:r>
-            <a:r>
-              <a:rPr sz="2000" b="1" i="0">
-                <a:solidFill>
-                  <a:srgbClr val="333333"/>
-                </a:solidFill>
-                <a:latin typeface="Calibri"/>
-              </a:rPr>
-              <a:t>Herramienta:</a:t>
-            </a:r>
-            <a:r>
-              <a:rPr sz="2000" b="0" i="0">
-                <a:solidFill>
-                  <a:srgbClr val="333333"/>
-                </a:solidFill>
-                <a:latin typeface="Calibri"/>
-              </a:rPr>
-              <a:t> draw.io · Google Docs</a:t>
+              <a:t>–   Las relaciones entre casos de uso son tres y se abusa de ellas.</a:t>
             </a:r>
           </a:p>
           <a:p>
@@ -8609,25 +11087,7 @@
                 </a:solidFill>
                 <a:latin typeface="Calibri"/>
               </a:rPr>
-              <a:t>–   </a:t>
-            </a:r>
-            <a:r>
-              <a:rPr sz="2000" b="1" i="0">
-                <a:solidFill>
-                  <a:srgbClr val="333333"/>
-                </a:solidFill>
-                <a:latin typeface="Calibri"/>
-              </a:rPr>
-              <a:t>Demo:</a:t>
-            </a:r>
-            <a:r>
-              <a:rPr sz="2000" b="0" i="0">
-                <a:solidFill>
-                  <a:srgbClr val="333333"/>
-                </a:solidFill>
-                <a:latin typeface="Calibri"/>
-              </a:rPr>
-              <a:t> El docente proyecta como un caso de uso mal escrito (Dar clic en guardar) se transforma en uno correcto (Registrar mascota) y luego llena en vivo, delante del grupo, la plantilla de especificacion de Buscar expediente.</a:t>
+              <a:t>–   Include significa que el caso base siempre ejecuta el caso incluido, y se usa cuando un comportamiento se repite en varios casos y vale la pena escribirlo una sola vez: en VetCare</a:t>
             </a:r>
           </a:p>
           <a:p>
@@ -8643,7 +11103,39 @@
                 </a:solidFill>
                 <a:latin typeface="Calibri"/>
               </a:rPr>
-              <a:t>–   Mismo dominio VetCare — no otro ejemplo. Aqui se diseña, no se programa.</a:t>
+              <a:t>–   CU-03 Registrar consulta medica y CU-04 Agendar cita incluyen ambos a Verificar existencia de la mascota, siempre, sin condicion.</a:t>
+            </a:r>
+          </a:p>
+          <a:p>
+            <a:pPr>
+              <a:spcAft>
+                <a:spcPts val="800"/>
+              </a:spcAft>
+            </a:pPr>
+            <a:r>
+              <a:rPr sz="2000" b="0" i="0">
+                <a:solidFill>
+                  <a:srgbClr val="333333"/>
+                </a:solidFill>
+                <a:latin typeface="Calibri"/>
+              </a:rPr>
+              <a:t>–   Extend es lo contrario: comportamiento opcional que se dispara solo si se cumple una condicion en un punto de extension del caso base</a:t>
+            </a:r>
+          </a:p>
+          <a:p>
+            <a:pPr>
+              <a:spcAft>
+                <a:spcPts val="800"/>
+              </a:spcAft>
+            </a:pPr>
+            <a:r>
+              <a:rPr sz="2000" b="0" i="0">
+                <a:solidFill>
+                  <a:srgbClr val="333333"/>
+                </a:solidFill>
+                <a:latin typeface="Calibri"/>
+              </a:rPr>
+              <a:t>–   En VetCare, CU-02 Buscar expediente puede extenderse con CU-06 Exportar expediente a PDF, que ocurre unicamente cuando el veterinario lo pide.</a:t>
             </a:r>
           </a:p>
         </p:txBody>
@@ -8718,7 +11210,7 @@
         <p:spPr>
           <a:xfrm>
             <a:off x="0" y="0"/>
-            <a:ext cx="12191695" cy="1170432"/>
+            <a:ext cx="12191695" cy="960120"/>
           </a:xfrm>
           <a:prstGeom prst="rect">
             <a:avLst/>
@@ -8760,7 +11252,7 @@
         </p:nvSpPr>
         <p:spPr>
           <a:xfrm>
-            <a:off x="0" y="1170432"/>
+            <a:off x="0" y="960120"/>
             <a:ext cx="12191695" cy="41148"/>
           </a:xfrm>
           <a:prstGeom prst="rect">
@@ -8804,7 +11296,7 @@
         <p:spPr>
           <a:xfrm>
             <a:off x="457200" y="164592"/>
-            <a:ext cx="11277295" cy="384048"/>
+            <a:ext cx="11277295" cy="502920"/>
           </a:xfrm>
           <a:prstGeom prst="rect">
             <a:avLst/>
@@ -8824,7 +11316,7 @@
                 </a:solidFill>
                 <a:latin typeface="Calibri"/>
               </a:rPr>
-              <a:t>Herramientas de hoy</a:t>
+              <a:t>Las relaciones entre casos de uso son tres y se abusa de ellas (2/2)</a:t>
             </a:r>
           </a:p>
         </p:txBody>
@@ -8837,8 +11329,8 @@
         </p:nvSpPr>
         <p:spPr>
           <a:xfrm>
-            <a:off x="457200" y="566928"/>
-            <a:ext cx="11277295" cy="411480"/>
+            <a:off x="457200" y="1170432"/>
+            <a:ext cx="11277295" cy="5230368"/>
           </a:xfrm>
           <a:prstGeom prst="rect">
             <a:avLst/>
@@ -8851,633 +11343,58 @@
           </a:bodyPr>
           <a:lstStyle/>
           <a:p>
-            <a:r>
-              <a:rPr sz="1400" b="0" i="0">
-                <a:solidFill>
-                  <a:srgbClr val="B8D8EE"/>
-                </a:solidFill>
-                <a:latin typeface="Calibri"/>
-              </a:rPr>
-              <a:t>Gratis · funcionan en el navegador</a:t>
-            </a:r>
-          </a:p>
-        </p:txBody>
-      </p:sp>
-      <p:sp>
-        <p:nvSpPr>
-          <p:cNvPr id="6" name="Rounded Rectangle 5"/>
-          <p:cNvSpPr/>
-          <p:nvPr/>
-        </p:nvSpPr>
-        <p:spPr>
-          <a:xfrm>
-            <a:off x="457200" y="1591056"/>
-            <a:ext cx="3624986" cy="2331720"/>
-          </a:xfrm>
-          <a:prstGeom prst="roundRect">
-            <a:avLst>
-              <a:gd name="adj" fmla="val 12000"/>
-            </a:avLst>
-          </a:prstGeom>
-          <a:solidFill>
-            <a:srgbClr val="F2F2F2"/>
-          </a:solidFill>
-          <a:ln>
-            <a:noFill/>
-          </a:ln>
-        </p:spPr>
-        <p:style>
-          <a:lnRef idx="1">
-            <a:schemeClr val="accent1"/>
-          </a:lnRef>
-          <a:fillRef idx="3">
-            <a:schemeClr val="accent1"/>
-          </a:fillRef>
-          <a:effectRef idx="2">
-            <a:schemeClr val="accent1"/>
-          </a:effectRef>
-          <a:fontRef idx="minor">
-            <a:schemeClr val="lt1"/>
-          </a:fontRef>
-        </p:style>
-        <p:txBody>
-          <a:bodyPr rtlCol="0" anchor="ctr"/>
-          <a:lstStyle/>
-          <a:p>
-            <a:pPr algn="ctr"/>
-          </a:p>
-        </p:txBody>
-      </p:sp>
-      <p:sp>
-        <p:nvSpPr>
-          <p:cNvPr id="7" name="Rectangle 6"/>
-          <p:cNvSpPr/>
-          <p:nvPr/>
-        </p:nvSpPr>
-        <p:spPr>
-          <a:xfrm>
-            <a:off x="457200" y="1591056"/>
-            <a:ext cx="3624986" cy="64008"/>
-          </a:xfrm>
-          <a:prstGeom prst="rect">
-            <a:avLst/>
-          </a:prstGeom>
-          <a:solidFill>
-            <a:srgbClr val="095292"/>
-          </a:solidFill>
-          <a:ln>
-            <a:noFill/>
-          </a:ln>
-        </p:spPr>
-        <p:style>
-          <a:lnRef idx="1">
-            <a:schemeClr val="accent1"/>
-          </a:lnRef>
-          <a:fillRef idx="3">
-            <a:schemeClr val="accent1"/>
-          </a:fillRef>
-          <a:effectRef idx="2">
-            <a:schemeClr val="accent1"/>
-          </a:effectRef>
-          <a:fontRef idx="minor">
-            <a:schemeClr val="lt1"/>
-          </a:fontRef>
-        </p:style>
-        <p:txBody>
-          <a:bodyPr rtlCol="0" anchor="ctr"/>
-          <a:lstStyle/>
-          <a:p>
-            <a:pPr algn="ctr"/>
-          </a:p>
-        </p:txBody>
-      </p:sp>
-      <p:sp>
-        <p:nvSpPr>
-          <p:cNvPr id="8" name="Rectangle 7"/>
-          <p:cNvSpPr/>
-          <p:nvPr/>
-        </p:nvSpPr>
-        <p:spPr>
-          <a:xfrm>
-            <a:off x="457200" y="1655064"/>
-            <a:ext cx="3624986" cy="27432"/>
-          </a:xfrm>
-          <a:prstGeom prst="rect">
-            <a:avLst/>
-          </a:prstGeom>
-          <a:solidFill>
-            <a:srgbClr val="FFD000"/>
-          </a:solidFill>
-          <a:ln>
-            <a:noFill/>
-          </a:ln>
-        </p:spPr>
-        <p:style>
-          <a:lnRef idx="1">
-            <a:schemeClr val="accent1"/>
-          </a:lnRef>
-          <a:fillRef idx="3">
-            <a:schemeClr val="accent1"/>
-          </a:fillRef>
-          <a:effectRef idx="2">
-            <a:schemeClr val="accent1"/>
-          </a:effectRef>
-          <a:fontRef idx="minor">
-            <a:schemeClr val="lt1"/>
-          </a:fontRef>
-        </p:style>
-        <p:txBody>
-          <a:bodyPr rtlCol="0" anchor="ctr"/>
-          <a:lstStyle/>
-          <a:p>
-            <a:pPr algn="ctr"/>
-          </a:p>
-        </p:txBody>
-      </p:sp>
-      <p:pic>
-        <p:nvPicPr>
-          <p:cNvPr id="9" name="Picture 8" descr="drawio.png"/>
-          <p:cNvPicPr>
-            <a:picLocks noChangeAspect="1"/>
-          </p:cNvPicPr>
-          <p:nvPr/>
-        </p:nvPicPr>
-        <p:blipFill>
-          <a:blip r:embed="rId2"/>
-          <a:stretch>
-            <a:fillRect/>
-          </a:stretch>
-        </p:blipFill>
-        <p:spPr>
-          <a:xfrm>
-            <a:off x="1643329" y="1847087"/>
-            <a:ext cx="1252728" cy="1252728"/>
-          </a:xfrm>
-          <a:prstGeom prst="rect">
-            <a:avLst/>
-          </a:prstGeom>
-        </p:spPr>
-      </p:pic>
-      <p:sp>
-        <p:nvSpPr>
-          <p:cNvPr id="10" name="TextBox 9"/>
-          <p:cNvSpPr txBox="1"/>
-          <p:nvPr/>
-        </p:nvSpPr>
-        <p:spPr>
-          <a:xfrm>
-            <a:off x="530352" y="3191256"/>
-            <a:ext cx="3478682" cy="621792"/>
-          </a:xfrm>
-          <a:prstGeom prst="rect">
-            <a:avLst/>
-          </a:prstGeom>
-          <a:noFill/>
-        </p:spPr>
-        <p:txBody>
-          <a:bodyPr wrap="square" anchor="t"/>
-          <a:lstStyle/>
-          <a:p>
-            <a:pPr algn="ctr"/>
-            <a:r>
-              <a:rPr sz="1300" b="1" i="0">
-                <a:solidFill>
-                  <a:srgbClr val="095292"/>
-                </a:solidFill>
-                <a:latin typeface="Calibri"/>
-              </a:rPr>
-              <a:t>Draw.Io</a:t>
-            </a:r>
-          </a:p>
-          <a:p>
-            <a:pPr algn="ctr">
-              <a:spcBef>
-                <a:spcPts val="200"/>
-              </a:spcBef>
+            <a:pPr>
+              <a:spcAft>
+                <a:spcPts val="800"/>
+              </a:spcAft>
             </a:pPr>
             <a:r>
-              <a:rPr sz="1000" b="0" i="0">
-                <a:solidFill>
-                  <a:srgbClr val="666666"/>
-                </a:solidFill>
-                <a:latin typeface="Calibri"/>
-              </a:rPr>
-              <a:t>Diagramas UML y de contexto</a:t>
-            </a:r>
-          </a:p>
-        </p:txBody>
-      </p:sp>
-      <p:sp>
-        <p:nvSpPr>
-          <p:cNvPr id="11" name="Rounded Rectangle 10"/>
-          <p:cNvSpPr/>
-          <p:nvPr/>
-        </p:nvSpPr>
-        <p:spPr>
-          <a:xfrm>
-            <a:off x="4283354" y="1591056"/>
-            <a:ext cx="3624986" cy="2331720"/>
-          </a:xfrm>
-          <a:prstGeom prst="roundRect">
-            <a:avLst>
-              <a:gd name="adj" fmla="val 12000"/>
-            </a:avLst>
-          </a:prstGeom>
-          <a:solidFill>
-            <a:srgbClr val="F2F2F2"/>
-          </a:solidFill>
-          <a:ln>
-            <a:noFill/>
-          </a:ln>
-        </p:spPr>
-        <p:style>
-          <a:lnRef idx="1">
-            <a:schemeClr val="accent1"/>
-          </a:lnRef>
-          <a:fillRef idx="3">
-            <a:schemeClr val="accent1"/>
-          </a:fillRef>
-          <a:effectRef idx="2">
-            <a:schemeClr val="accent1"/>
-          </a:effectRef>
-          <a:fontRef idx="minor">
-            <a:schemeClr val="lt1"/>
-          </a:fontRef>
-        </p:style>
-        <p:txBody>
-          <a:bodyPr rtlCol="0" anchor="ctr"/>
-          <a:lstStyle/>
-          <a:p>
-            <a:pPr algn="ctr"/>
-          </a:p>
-        </p:txBody>
-      </p:sp>
-      <p:sp>
-        <p:nvSpPr>
-          <p:cNvPr id="12" name="Rectangle 11"/>
-          <p:cNvSpPr/>
-          <p:nvPr/>
-        </p:nvSpPr>
-        <p:spPr>
-          <a:xfrm>
-            <a:off x="4283354" y="1591056"/>
-            <a:ext cx="3624986" cy="64008"/>
-          </a:xfrm>
-          <a:prstGeom prst="rect">
-            <a:avLst/>
-          </a:prstGeom>
-          <a:solidFill>
-            <a:srgbClr val="095292"/>
-          </a:solidFill>
-          <a:ln>
-            <a:noFill/>
-          </a:ln>
-        </p:spPr>
-        <p:style>
-          <a:lnRef idx="1">
-            <a:schemeClr val="accent1"/>
-          </a:lnRef>
-          <a:fillRef idx="3">
-            <a:schemeClr val="accent1"/>
-          </a:fillRef>
-          <a:effectRef idx="2">
-            <a:schemeClr val="accent1"/>
-          </a:effectRef>
-          <a:fontRef idx="minor">
-            <a:schemeClr val="lt1"/>
-          </a:fontRef>
-        </p:style>
-        <p:txBody>
-          <a:bodyPr rtlCol="0" anchor="ctr"/>
-          <a:lstStyle/>
-          <a:p>
-            <a:pPr algn="ctr"/>
-          </a:p>
-        </p:txBody>
-      </p:sp>
-      <p:sp>
-        <p:nvSpPr>
-          <p:cNvPr id="13" name="Rectangle 12"/>
-          <p:cNvSpPr/>
-          <p:nvPr/>
-        </p:nvSpPr>
-        <p:spPr>
-          <a:xfrm>
-            <a:off x="4283354" y="1655064"/>
-            <a:ext cx="3624986" cy="27432"/>
-          </a:xfrm>
-          <a:prstGeom prst="rect">
-            <a:avLst/>
-          </a:prstGeom>
-          <a:solidFill>
-            <a:srgbClr val="FFD000"/>
-          </a:solidFill>
-          <a:ln>
-            <a:noFill/>
-          </a:ln>
-        </p:spPr>
-        <p:style>
-          <a:lnRef idx="1">
-            <a:schemeClr val="accent1"/>
-          </a:lnRef>
-          <a:fillRef idx="3">
-            <a:schemeClr val="accent1"/>
-          </a:fillRef>
-          <a:effectRef idx="2">
-            <a:schemeClr val="accent1"/>
-          </a:effectRef>
-          <a:fontRef idx="minor">
-            <a:schemeClr val="lt1"/>
-          </a:fontRef>
-        </p:style>
-        <p:txBody>
-          <a:bodyPr rtlCol="0" anchor="ctr"/>
-          <a:lstStyle/>
-          <a:p>
-            <a:pPr algn="ctr"/>
-          </a:p>
-        </p:txBody>
-      </p:sp>
-      <p:pic>
-        <p:nvPicPr>
-          <p:cNvPr id="14" name="Picture 13" descr="google_docs.png"/>
-          <p:cNvPicPr>
-            <a:picLocks noChangeAspect="1"/>
-          </p:cNvPicPr>
-          <p:nvPr/>
-        </p:nvPicPr>
-        <p:blipFill>
-          <a:blip r:embed="rId3"/>
-          <a:stretch>
-            <a:fillRect/>
-          </a:stretch>
-        </p:blipFill>
-        <p:spPr>
-          <a:xfrm>
-            <a:off x="5469483" y="1847087"/>
-            <a:ext cx="1252728" cy="1252728"/>
-          </a:xfrm>
-          <a:prstGeom prst="rect">
-            <a:avLst/>
-          </a:prstGeom>
-        </p:spPr>
-      </p:pic>
-      <p:sp>
-        <p:nvSpPr>
-          <p:cNvPr id="15" name="TextBox 14"/>
-          <p:cNvSpPr txBox="1"/>
-          <p:nvPr/>
-        </p:nvSpPr>
-        <p:spPr>
-          <a:xfrm>
-            <a:off x="4356506" y="3191256"/>
-            <a:ext cx="3478682" cy="621792"/>
-          </a:xfrm>
-          <a:prstGeom prst="rect">
-            <a:avLst/>
-          </a:prstGeom>
-          <a:noFill/>
-        </p:spPr>
-        <p:txBody>
-          <a:bodyPr wrap="square" anchor="t"/>
-          <a:lstStyle/>
-          <a:p>
-            <a:pPr algn="ctr"/>
-            <a:r>
-              <a:rPr sz="1300" b="1" i="0">
-                <a:solidFill>
-                  <a:srgbClr val="095292"/>
-                </a:solidFill>
-                <a:latin typeface="Calibri"/>
-              </a:rPr>
-              <a:t>google docs</a:t>
-            </a:r>
-          </a:p>
-          <a:p>
-            <a:pPr algn="ctr">
-              <a:spcBef>
-                <a:spcPts val="200"/>
-              </a:spcBef>
+              <a:rPr sz="2000" b="0" i="0">
+                <a:solidFill>
+                  <a:srgbClr val="333333"/>
+                </a:solidFill>
+                <a:latin typeface="Calibri"/>
+              </a:rPr>
+              <a:t>–   La generalizacion, mucho menos frecuente, sirve cuando un actor especializa a otro, por ejemplo Veterinario especialista como especializacion de Veterinario.</a:t>
+            </a:r>
+          </a:p>
+          <a:p>
+            <a:pPr>
+              <a:spcAft>
+                <a:spcPts val="800"/>
+              </a:spcAft>
             </a:pPr>
             <a:r>
-              <a:rPr sz="1000" b="0" i="0">
-                <a:solidFill>
-                  <a:srgbClr val="666666"/>
-                </a:solidFill>
-                <a:latin typeface="Calibri"/>
-              </a:rPr>
-              <a:t>Documentos del paquete de diseño</a:t>
-            </a:r>
-          </a:p>
-        </p:txBody>
-      </p:sp>
-      <p:sp>
-        <p:nvSpPr>
-          <p:cNvPr id="16" name="Rounded Rectangle 15"/>
-          <p:cNvSpPr/>
-          <p:nvPr/>
-        </p:nvSpPr>
-        <p:spPr>
-          <a:xfrm>
-            <a:off x="8109508" y="1591056"/>
-            <a:ext cx="3624986" cy="2331720"/>
-          </a:xfrm>
-          <a:prstGeom prst="roundRect">
-            <a:avLst>
-              <a:gd name="adj" fmla="val 12000"/>
-            </a:avLst>
-          </a:prstGeom>
-          <a:solidFill>
-            <a:srgbClr val="F2F2F2"/>
-          </a:solidFill>
-          <a:ln>
-            <a:noFill/>
-          </a:ln>
-        </p:spPr>
-        <p:style>
-          <a:lnRef idx="1">
-            <a:schemeClr val="accent1"/>
-          </a:lnRef>
-          <a:fillRef idx="3">
-            <a:schemeClr val="accent1"/>
-          </a:fillRef>
-          <a:effectRef idx="2">
-            <a:schemeClr val="accent1"/>
-          </a:effectRef>
-          <a:fontRef idx="minor">
-            <a:schemeClr val="lt1"/>
-          </a:fontRef>
-        </p:style>
-        <p:txBody>
-          <a:bodyPr rtlCol="0" anchor="ctr"/>
-          <a:lstStyle/>
-          <a:p>
-            <a:pPr algn="ctr"/>
-          </a:p>
-        </p:txBody>
-      </p:sp>
-      <p:sp>
-        <p:nvSpPr>
-          <p:cNvPr id="17" name="Rectangle 16"/>
-          <p:cNvSpPr/>
-          <p:nvPr/>
-        </p:nvSpPr>
-        <p:spPr>
-          <a:xfrm>
-            <a:off x="8109508" y="1591056"/>
-            <a:ext cx="3624986" cy="64008"/>
-          </a:xfrm>
-          <a:prstGeom prst="rect">
-            <a:avLst/>
-          </a:prstGeom>
-          <a:solidFill>
-            <a:srgbClr val="095292"/>
-          </a:solidFill>
-          <a:ln>
-            <a:noFill/>
-          </a:ln>
-        </p:spPr>
-        <p:style>
-          <a:lnRef idx="1">
-            <a:schemeClr val="accent1"/>
-          </a:lnRef>
-          <a:fillRef idx="3">
-            <a:schemeClr val="accent1"/>
-          </a:fillRef>
-          <a:effectRef idx="2">
-            <a:schemeClr val="accent1"/>
-          </a:effectRef>
-          <a:fontRef idx="minor">
-            <a:schemeClr val="lt1"/>
-          </a:fontRef>
-        </p:style>
-        <p:txBody>
-          <a:bodyPr rtlCol="0" anchor="ctr"/>
-          <a:lstStyle/>
-          <a:p>
-            <a:pPr algn="ctr"/>
-          </a:p>
-        </p:txBody>
-      </p:sp>
-      <p:sp>
-        <p:nvSpPr>
-          <p:cNvPr id="18" name="Rectangle 17"/>
-          <p:cNvSpPr/>
-          <p:nvPr/>
-        </p:nvSpPr>
-        <p:spPr>
-          <a:xfrm>
-            <a:off x="8109508" y="1655064"/>
-            <a:ext cx="3624986" cy="27432"/>
-          </a:xfrm>
-          <a:prstGeom prst="rect">
-            <a:avLst/>
-          </a:prstGeom>
-          <a:solidFill>
-            <a:srgbClr val="FFD000"/>
-          </a:solidFill>
-          <a:ln>
-            <a:noFill/>
-          </a:ln>
-        </p:spPr>
-        <p:style>
-          <a:lnRef idx="1">
-            <a:schemeClr val="accent1"/>
-          </a:lnRef>
-          <a:fillRef idx="3">
-            <a:schemeClr val="accent1"/>
-          </a:fillRef>
-          <a:effectRef idx="2">
-            <a:schemeClr val="accent1"/>
-          </a:effectRef>
-          <a:fontRef idx="minor">
-            <a:schemeClr val="lt1"/>
-          </a:fontRef>
-        </p:style>
-        <p:txBody>
-          <a:bodyPr rtlCol="0" anchor="ctr"/>
-          <a:lstStyle/>
-          <a:p>
-            <a:pPr algn="ctr"/>
-          </a:p>
-        </p:txBody>
-      </p:sp>
-      <p:pic>
-        <p:nvPicPr>
-          <p:cNvPr id="19" name="Picture 18" descr="examlab.png"/>
-          <p:cNvPicPr>
-            <a:picLocks noChangeAspect="1"/>
-          </p:cNvPicPr>
-          <p:nvPr/>
-        </p:nvPicPr>
-        <p:blipFill>
-          <a:blip r:embed="rId4"/>
-          <a:stretch>
-            <a:fillRect/>
-          </a:stretch>
-        </p:blipFill>
-        <p:spPr>
-          <a:xfrm>
-            <a:off x="9295638" y="1847087"/>
-            <a:ext cx="1252728" cy="1252728"/>
-          </a:xfrm>
-          <a:prstGeom prst="rect">
-            <a:avLst/>
-          </a:prstGeom>
-        </p:spPr>
-      </p:pic>
-      <p:sp>
-        <p:nvSpPr>
-          <p:cNvPr id="20" name="TextBox 19"/>
-          <p:cNvSpPr txBox="1"/>
-          <p:nvPr/>
-        </p:nvSpPr>
-        <p:spPr>
-          <a:xfrm>
-            <a:off x="8182660" y="3191256"/>
-            <a:ext cx="3478682" cy="621792"/>
-          </a:xfrm>
-          <a:prstGeom prst="rect">
-            <a:avLst/>
-          </a:prstGeom>
-          <a:noFill/>
-        </p:spPr>
-        <p:txBody>
-          <a:bodyPr wrap="square" anchor="t"/>
-          <a:lstStyle/>
-          <a:p>
-            <a:pPr algn="ctr"/>
-            <a:r>
-              <a:rPr sz="1300" b="1" i="0">
-                <a:solidFill>
-                  <a:srgbClr val="095292"/>
-                </a:solidFill>
-                <a:latin typeface="Calibri"/>
-              </a:rPr>
-              <a:t>la plataforma del curso</a:t>
-            </a:r>
-          </a:p>
-          <a:p>
-            <a:pPr algn="ctr">
-              <a:spcBef>
-                <a:spcPts val="200"/>
-              </a:spcBef>
+              <a:rPr sz="2000" b="0" i="0">
+                <a:solidFill>
+                  <a:srgbClr val="333333"/>
+                </a:solidFill>
+                <a:latin typeface="Calibri"/>
+              </a:rPr>
+              <a:t>–   El peligro real no es equivocarse en la flecha sino usar include para descomponer funcionalmente: si el diagrama muestra Registrar mascota incluyendo Abrir formulario</a:t>
+            </a:r>
+          </a:p>
+          <a:p>
+            <a:pPr>
+              <a:spcAft>
+                <a:spcPts val="800"/>
+              </a:spcAft>
             </a:pPr>
             <a:r>
-              <a:rPr sz="1000" b="0" i="0">
-                <a:solidFill>
-                  <a:srgbClr val="666666"/>
-                </a:solidFill>
-                <a:latin typeface="Calibri"/>
-              </a:rPr>
-              <a:t>Entrega del taller · en la fecha que indique el docente</a:t>
-            </a:r>
-          </a:p>
-        </p:txBody>
-      </p:sp>
-      <p:sp>
-        <p:nvSpPr>
-          <p:cNvPr id="21" name="TextBox 20"/>
+              <a:rPr sz="2000" b="0" i="0">
+                <a:solidFill>
+                  <a:srgbClr val="333333"/>
+                </a:solidFill>
+                <a:latin typeface="Calibri"/>
+              </a:rPr>
+              <a:t>–   Incluyendo Digitar datos, incluyendo Guardar en base de datos, ya no es un modelo de casos de uso sino un diagrama de flujo disfrazado, y ese error contagia despues al diagrama de clases.</a:t>
+            </a:r>
+          </a:p>
+        </p:txBody>
+      </p:sp>
+      <p:sp>
+        <p:nvSpPr>
+          <p:cNvPr id="6" name="TextBox 5"/>
           <p:cNvSpPr txBox="1"/>
           <p:nvPr/>
         </p:nvSpPr>
@@ -9651,7 +11568,7 @@
                 </a:solidFill>
                 <a:latin typeface="Calibri"/>
               </a:rPr>
-              <a:t>Taller PI — por que importa</a:t>
+              <a:t>La especificacion textual es donde vive el noventa por ciento del valor... (1/2)</a:t>
             </a:r>
           </a:p>
         </p:txBody>
@@ -9690,25 +11607,7 @@
                 </a:solidFill>
                 <a:latin typeface="Calibri"/>
               </a:rPr>
-              <a:t>–   </a:t>
-            </a:r>
-            <a:r>
-              <a:rPr sz="2000" b="1" i="0">
-                <a:solidFill>
-                  <a:srgbClr val="333333"/>
-                </a:solidFill>
-                <a:latin typeface="Calibri"/>
-              </a:rPr>
-              <a:t>Por que importa al PI:</a:t>
-            </a:r>
-            <a:r>
-              <a:rPr sz="2000" b="0" i="0">
-                <a:solidFill>
-                  <a:srgbClr val="333333"/>
-                </a:solidFill>
-                <a:latin typeface="Calibri"/>
-              </a:rPr>
-              <a:t> los casos de uso son el puente entre lo que pidio la clinica Huellitas y lo que despues alguien va a programar; sin ellos, el equipo de Programacion II tiene que adivinar el comportamiento del sistema y siempre adivina distinto.</a:t>
+              <a:t>–   La especificacion textual es donde vive el noventa por ciento del valor y donde casi nadie invierte tiempo.</a:t>
             </a:r>
           </a:p>
           <a:p>
@@ -9724,7 +11623,7 @@
                 </a:solidFill>
                 <a:latin typeface="Calibri"/>
               </a:rPr>
-              <a:t>–   El estudiante que solo cursa Seminario cierra el semestre con este paquete de especificaciones como pieza central de su documento de diseño, y por eso hoy se califica la escritura y no el dibujo.</a:t>
+              <a:t>–   Un caso de uso especificado tiene ficha de identificacion (ID, nombre, actor primario, requisitos que cubre, prioridad y frecuencia), precondiciones, postcondiciones, flujo principal y flujos alternos, y las reglas de negocio asociadas.</a:t>
             </a:r>
           </a:p>
           <a:p>
@@ -9740,7 +11639,23 @@
                 </a:solidFill>
                 <a:latin typeface="Calibri"/>
               </a:rPr>
-              <a:t>–   Toda especificacion escrita hoy se convierte mañana en un caso de prueba: si una postcondicion no se puede ir a verificar en los datos, esta mal redactada.</a:t>
+              <a:t>–   El flujo principal se escribe en pares de responsabilidad: una columna dice que hace el actor y la otra que hace el sistema, alternandose, en pasos numerados y sin adjetivos.</a:t>
+            </a:r>
+          </a:p>
+          <a:p>
+            <a:pPr>
+              <a:spcAft>
+                <a:spcPts val="800"/>
+              </a:spcAft>
+            </a:pPr>
+            <a:r>
+              <a:rPr sz="2000" b="0" i="0">
+                <a:solidFill>
+                  <a:srgbClr val="333333"/>
+                </a:solidFill>
+                <a:latin typeface="Calibri"/>
+              </a:rPr>
+              <a:t>–   Por ejemplo, en Buscar expediente el paso 1 es que el veterinario digita el codigo o el nombre de la mascota y el paso 2 es que el sistema devuelve la lista de coincidencias; nunca se escribe el sistema es rapido y amigable</a:t>
             </a:r>
           </a:p>
         </p:txBody>
@@ -9921,7 +11836,7 @@
                 </a:solidFill>
                 <a:latin typeface="Calibri"/>
               </a:rPr>
-              <a:t>Taller PI — punto de partida</a:t>
+              <a:t>La especificacion textual es donde vive el noventa por ciento del valor... (2/2)</a:t>
             </a:r>
           </a:p>
         </p:txBody>
@@ -9960,7 +11875,7 @@
                 </a:solidFill>
                 <a:latin typeface="Calibri"/>
               </a:rPr>
-              <a:t>–   Ya existe el catalogo de RF y RNF de VetCare, pero esta redactado como lista de deseos y nadie sabe en que orden ocurren las cosas ni que pasa cuando algo sale mal.</a:t>
+              <a:t>–   Porque eso no es un paso sino un requisito no funcional que ya vive en otro documento, el RNF-02, que exige mostrar el resultado en menos de tres segundos.</a:t>
             </a:r>
           </a:p>
           <a:p>
@@ -9976,7 +11891,7 @@
                 </a:solidFill>
                 <a:latin typeface="Calibri"/>
               </a:rPr>
-              <a:t>–   La recepcionista de Huellitas describe su trabajo con frases sueltas: busco la carpeta, si no aparece le pregunto al veterinario, si el propietario es nuevo lleno una hoja aparte y la engrapo.</a:t>
+              <a:t>–   Los flujos alternos se numeran respecto al paso donde se desvian: 2a cuando no hay coincidencias, 2b cuando hay demasiadas, 4a cuando la mascota esta inactiva.</a:t>
             </a:r>
           </a:p>
           <a:p>
@@ -9992,7 +11907,7 @@
                 </a:solidFill>
                 <a:latin typeface="Calibri"/>
               </a:rPr>
-              <a:t>–   El equipo tiene draw.io abierto y la tentacion de dibujar veinte monigotes antes de escribir una sola linea de comportamiento.</a:t>
+              <a:t>–   Ese numerito es lo que permite que el compañero de Programacion II sepa exactamente en que punto del comportamiento hay que preguntar algo, y es tambien la razon por la cual la clinica Huellitas deja de perder tiempo buscando historiales.</a:t>
             </a:r>
           </a:p>
         </p:txBody>

--- a/Seminario de Sistemas/Clases/Clase 9 - Casos de uso/Presentacion.pptx
+++ b/Seminario de Sistemas/Clases/Clase 9 - Casos de uso/Presentacion.pptx
@@ -3933,38 +3933,6 @@
                 </a:solidFill>
                 <a:latin typeface="Calibri"/>
               </a:rPr>
-              <a:t>–   Escribirlas asi tiene dos consecuencias practicas enormes.</a:t>
-            </a:r>
-          </a:p>
-          <a:p>
-            <a:pPr>
-              <a:spcAft>
-                <a:spcPts val="800"/>
-              </a:spcAft>
-            </a:pPr>
-            <a:r>
-              <a:rPr sz="2000" b="0" i="0">
-                <a:solidFill>
-                  <a:srgbClr val="333333"/>
-                </a:solidFill>
-                <a:latin typeface="Calibri"/>
-              </a:rPr>
-              <a:t>–   Primero, cada postcondicion se convierte casi automaticamente en un caso de prueba, porque describe algo que se puede ir a comprobar.</a:t>
-            </a:r>
-          </a:p>
-          <a:p>
-            <a:pPr>
-              <a:spcAft>
-                <a:spcPts val="800"/>
-              </a:spcAft>
-            </a:pPr>
-            <a:r>
-              <a:rPr sz="2000" b="0" i="0">
-                <a:solidFill>
-                  <a:srgbClr val="333333"/>
-                </a:solidFill>
-                <a:latin typeface="Calibri"/>
-              </a:rPr>
               <a:t>–   Segundo, resuelve la discusion entre los tres casos de matricula: el estudiante que solo cursa Seminario cierra con este documento y su prototipo navegable y ya entrego un producto completo</a:t>
             </a:r>
           </a:p>
@@ -10519,38 +10487,6 @@
                 </a:solidFill>
                 <a:latin typeface="Calibri"/>
               </a:rPr>
-              <a:t>–   En VetCare, Registrar mascota pasa la prueba, porque la recepcionista de Huellitas termina con la ficha creada y el codigo asignado; en cambio Validar la fecha de nacimiento no la pasa, porque nadie llega a la clinica con el objetivo de validar una fecha.</a:t>
-            </a:r>
-          </a:p>
-          <a:p>
-            <a:pPr>
-              <a:spcAft>
-                <a:spcPts val="800"/>
-              </a:spcAft>
-            </a:pPr>
-            <a:r>
-              <a:rPr sz="2000" b="0" i="0">
-                <a:solidFill>
-                  <a:srgbClr val="333333"/>
-                </a:solidFill>
-                <a:latin typeface="Calibri"/>
-              </a:rPr>
-              <a:t>–   Esa distincion parece un detalle de nombres, pero define el tamaño de todo el modelo: si se confunde, un sistema pequeño como VetCare termina con cuarenta casos de uso inutiles en vez de seis u ocho casos de uso reales.</a:t>
-            </a:r>
-          </a:p>
-          <a:p>
-            <a:pPr>
-              <a:spcAft>
-                <a:spcPts val="800"/>
-              </a:spcAft>
-            </a:pPr>
-            <a:r>
-              <a:rPr sz="2000" b="0" i="0">
-                <a:solidFill>
-                  <a:srgbClr val="333333"/>
-                </a:solidFill>
-                <a:latin typeface="Calibri"/>
-              </a:rPr>
               <a:t>–   La regla de redaccion es simple y no se negocia: verbo en infinitivo mas objeto del dominio, escrito con las palabras de la clinica y no con palabras de programador.</a:t>
             </a:r>
           </a:p>
@@ -10765,7 +10701,7 @@
               </a:spcAft>
             </a:pPr>
             <a:r>
-              <a:rPr sz="1900" b="0" i="0">
+              <a:rPr sz="2000" b="0" i="0">
                 <a:solidFill>
                   <a:srgbClr val="333333"/>
                 </a:solidFill>
@@ -10781,7 +10717,7 @@
               </a:spcAft>
             </a:pPr>
             <a:r>
-              <a:rPr sz="1900" b="0" i="0">
+              <a:rPr sz="2000" b="0" i="0">
                 <a:solidFill>
                   <a:srgbClr val="333333"/>
                 </a:solidFill>
@@ -10797,7 +10733,7 @@
               </a:spcAft>
             </a:pPr>
             <a:r>
-              <a:rPr sz="1900" b="0" i="0">
+              <a:rPr sz="2000" b="0" i="0">
                 <a:solidFill>
                   <a:srgbClr val="333333"/>
                 </a:solidFill>
@@ -10813,7 +10749,7 @@
               </a:spcAft>
             </a:pPr>
             <a:r>
-              <a:rPr sz="1900" b="0" i="0">
+              <a:rPr sz="2000" b="0" i="0">
                 <a:solidFill>
                   <a:srgbClr val="333333"/>
                 </a:solidFill>
@@ -10829,29 +10765,13 @@
               </a:spcAft>
             </a:pPr>
             <a:r>
-              <a:rPr sz="1900" b="0" i="0">
+              <a:rPr sz="2000" b="0" i="0">
                 <a:solidFill>
                   <a:srgbClr val="333333"/>
                 </a:solidFill>
                 <a:latin typeface="Calibri"/>
               </a:rPr>
               <a:t>–   Todo esto se ordena con el limite del sistema, ese rectangulo que muchos omiten y que en realidad es la decision de arquitectura mas importante del diagrama: adentro va lo que nosotros vamos a construir y por lo tanto especificar, y afuera queda lo que solo vamos a consumir o a recibir.</a:t>
-            </a:r>
-          </a:p>
-          <a:p>
-            <a:pPr>
-              <a:spcAft>
-                <a:spcPts val="800"/>
-              </a:spcAft>
-            </a:pPr>
-            <a:r>
-              <a:rPr sz="1900" b="0" i="0">
-                <a:solidFill>
-                  <a:srgbClr val="333333"/>
-                </a:solidFill>
-                <a:latin typeface="Calibri"/>
-              </a:rPr>
-              <a:t>–   Si en VetCare dibujamos adentro del rectangulo un caso de uso llamado Enviar mensaje de WhatsApp, estamos diciendo que nosotros construimos la mensajeria, y eso probablemente sea falso y encarezca el proyecto por escrito.</a:t>
             </a:r>
           </a:p>
         </p:txBody>
@@ -11623,7 +11543,7 @@
                 </a:solidFill>
                 <a:latin typeface="Calibri"/>
               </a:rPr>
-              <a:t>–   Un caso de uso especificado tiene ficha de identificacion (ID, nombre, actor primario, requisitos que cubre, prioridad y frecuencia), precondiciones, postcondiciones, flujo principal y flujos alternos, y las reglas de negocio asociadas.</a:t>
+              <a:t>–   El flujo principal se escribe en pares de responsabilidad: una columna dice que hace el actor y la otra que hace el sistema, alternandose, en pasos numerados y sin adjetivos.</a:t>
             </a:r>
           </a:p>
           <a:p>
@@ -11639,7 +11559,7 @@
                 </a:solidFill>
                 <a:latin typeface="Calibri"/>
               </a:rPr>
-              <a:t>–   El flujo principal se escribe en pares de responsabilidad: una columna dice que hace el actor y la otra que hace el sistema, alternandose, en pasos numerados y sin adjetivos.</a:t>
+              <a:t>–   Por ejemplo, en Buscar expediente el paso 1 es que el veterinario digita el codigo o el nombre de la mascota y el paso 2 es que el sistema devuelve la lista de coincidencias; nunca se escribe el sistema es rapido y amigable</a:t>
             </a:r>
           </a:p>
           <a:p>
@@ -11655,7 +11575,7 @@
                 </a:solidFill>
                 <a:latin typeface="Calibri"/>
               </a:rPr>
-              <a:t>–   Por ejemplo, en Buscar expediente el paso 1 es que el veterinario digita el codigo o el nombre de la mascota y el paso 2 es que el sistema devuelve la lista de coincidencias; nunca se escribe el sistema es rapido y amigable</a:t>
+              <a:t>–   Porque eso no es un paso sino un requisito no funcional que ya vive en otro documento, el RNF-02, que exige mostrar el resultado en menos de tres segundos.</a:t>
             </a:r>
           </a:p>
         </p:txBody>
@@ -11862,22 +11782,6 @@
             <a:spAutoFit/>
           </a:bodyPr>
           <a:lstStyle/>
-          <a:p>
-            <a:pPr>
-              <a:spcAft>
-                <a:spcPts val="800"/>
-              </a:spcAft>
-            </a:pPr>
-            <a:r>
-              <a:rPr sz="2000" b="0" i="0">
-                <a:solidFill>
-                  <a:srgbClr val="333333"/>
-                </a:solidFill>
-                <a:latin typeface="Calibri"/>
-              </a:rPr>
-              <a:t>–   Porque eso no es un paso sino un requisito no funcional que ya vive en otro documento, el RNF-02, que exige mostrar el resultado en menos de tres segundos.</a:t>
-            </a:r>
-          </a:p>
           <a:p>
             <a:pPr>
               <a:spcAft>

--- a/Seminario de Sistemas/Clases/Clase 9 - Casos de uso/Presentacion.pptx
+++ b/Seminario de Sistemas/Clases/Clase 9 - Casos de uso/Presentacion.pptx
@@ -26,6 +26,8 @@
     <p:sldId id="274" r:id="rId25"/>
     <p:sldId id="275" r:id="rId26"/>
     <p:sldId id="276" r:id="rId27"/>
+    <p:sldId id="277" r:id="rId28"/>
+    <p:sldId id="278" r:id="rId29"/>
   </p:sldIdLst>
   <p:sldSz cx="12191695" cy="6858000" type="screen4x3"/>
   <p:notesSz cx="6858000" cy="9144000"/>
@@ -4130,7 +4132,7 @@
                 </a:solidFill>
                 <a:latin typeface="Calibri"/>
               </a:rPr>
-              <a:t>CU-02 Buscar expediente: la especificacion que el diagrama no muestra</a:t>
+              <a:t>El diagrama de casos de uso en Mermaid</a:t>
             </a:r>
           </a:p>
         </p:txBody>
@@ -4144,7 +4146,7 @@
         <p:spPr>
           <a:xfrm>
             <a:off x="457200" y="1261872"/>
-            <a:ext cx="11277295" cy="4773168"/>
+            <a:ext cx="11277295" cy="5093208"/>
           </a:xfrm>
           <a:prstGeom prst="roundRect">
             <a:avLst>
@@ -4264,7 +4266,7 @@
         <p:spPr>
           <a:xfrm>
             <a:off x="777240" y="1719072"/>
-            <a:ext cx="10637215" cy="4133087"/>
+            <a:ext cx="10637215" cy="4453128"/>
           </a:xfrm>
           <a:prstGeom prst="rect">
             <a:avLst/>
@@ -4279,225 +4281,289 @@
           <a:p>
             <a:pPr>
               <a:spcAft>
-                <a:spcPts val="400"/>
+                <a:spcPts val="342"/>
               </a:spcAft>
             </a:pPr>
             <a:r>
-              <a:rPr sz="1400" b="0" i="0">
+              <a:rPr sz="1200" b="0" i="0">
                 <a:solidFill>
                   <a:srgbClr val="FFFFFF"/>
                 </a:solidFill>
                 <a:latin typeface="Calibri"/>
               </a:rPr>
-              <a:t>CU-02  Buscar expediente</a:t>
+              <a:t>flowchart LR</a:t>
             </a:r>
           </a:p>
           <a:p>
             <a:pPr>
               <a:spcAft>
-                <a:spcPts val="400"/>
+                <a:spcPts val="342"/>
               </a:spcAft>
             </a:pPr>
             <a:r>
-              <a:rPr sz="1400" b="0" i="0">
+              <a:rPr sz="1200" b="0" i="0">
                 <a:solidFill>
                   <a:srgbClr val="FFFFFF"/>
                 </a:solidFill>
                 <a:latin typeface="Calibri"/>
               </a:rPr>
-              <a:t>Actor primario: Veterinario  |  Prioridad: Alta  |  Cubre: RF-05, RNF-02</a:t>
+              <a:t>  rec([Recepcionista])</a:t>
             </a:r>
           </a:p>
           <a:p>
             <a:pPr>
               <a:spcAft>
-                <a:spcPts val="400"/>
+                <a:spcPts val="342"/>
               </a:spcAft>
             </a:pPr>
             <a:r>
-              <a:rPr sz="1400" b="0" i="0">
+              <a:rPr sz="1200" b="0" i="0">
                 <a:solidFill>
                   <a:srgbClr val="FFFFFF"/>
                 </a:solidFill>
                 <a:latin typeface="Calibri"/>
               </a:rPr>
-              <a:t>Precondicion: el veterinario esta autenticado y la mascota existe en el sistema.</a:t>
+              <a:t>  vet([Veterinario])</a:t>
             </a:r>
           </a:p>
           <a:p>
             <a:pPr>
               <a:spcAft>
-                <a:spcPts val="400"/>
+                <a:spcPts val="342"/>
               </a:spcAft>
             </a:pPr>
             <a:r>
-              <a:rPr sz="1400" b="0" i="0">
+              <a:rPr sz="1200" b="0" i="0">
                 <a:solidFill>
                   <a:srgbClr val="FFFFFF"/>
                 </a:solidFill>
                 <a:latin typeface="Calibri"/>
               </a:rPr>
-              <a:t>Postcondicion (exito): el expediente queda desplegado y la consulta queda en bitacora; no se modifica ningun dato clinico.</a:t>
+              <a:t/>
             </a:r>
           </a:p>
           <a:p>
             <a:pPr>
               <a:spcAft>
-                <a:spcPts val="400"/>
+                <a:spcPts val="342"/>
               </a:spcAft>
             </a:pPr>
             <a:r>
-              <a:rPr sz="1400" b="0" i="0">
+              <a:rPr sz="1200" b="0" i="0">
                 <a:solidFill>
                   <a:srgbClr val="FFFFFF"/>
                 </a:solidFill>
                 <a:latin typeface="Calibri"/>
               </a:rPr>
-              <a:t>Flujo principal:</a:t>
+              <a:t>  subgraph sistema[VetCare]</a:t>
             </a:r>
           </a:p>
           <a:p>
             <a:pPr>
               <a:spcAft>
-                <a:spcPts val="400"/>
+                <a:spcPts val="342"/>
               </a:spcAft>
             </a:pPr>
             <a:r>
-              <a:rPr sz="1400" b="0" i="0">
+              <a:rPr sz="1200" b="0" i="0">
                 <a:solidFill>
                   <a:srgbClr val="FFFFFF"/>
                 </a:solidFill>
                 <a:latin typeface="Calibri"/>
               </a:rPr>
-              <a:t>  1. El veterinario digita codigo, nombre de mascota o documento del propietario.</a:t>
+              <a:t>    cu1((CU-01&lt;br/&gt;Registrar mascota))</a:t>
             </a:r>
           </a:p>
           <a:p>
             <a:pPr>
               <a:spcAft>
-                <a:spcPts val="400"/>
+                <a:spcPts val="342"/>
               </a:spcAft>
             </a:pPr>
             <a:r>
-              <a:rPr sz="1400" b="0" i="0">
+              <a:rPr sz="1200" b="0" i="0">
                 <a:solidFill>
                   <a:srgbClr val="FFFFFF"/>
                 </a:solidFill>
                 <a:latin typeface="Calibri"/>
               </a:rPr>
-              <a:t>  2. El sistema devuelve la lista de coincidencias en menos de 3 segundos (RNF-02).</a:t>
+              <a:t>    cu2((CU-02&lt;br/&gt;Buscar expediente))</a:t>
             </a:r>
           </a:p>
           <a:p>
             <a:pPr>
               <a:spcAft>
-                <a:spcPts val="400"/>
+                <a:spcPts val="342"/>
               </a:spcAft>
             </a:pPr>
             <a:r>
-              <a:rPr sz="1400" b="0" i="0">
+              <a:rPr sz="1200" b="0" i="0">
                 <a:solidFill>
                   <a:srgbClr val="FFFFFF"/>
                 </a:solidFill>
                 <a:latin typeface="Calibri"/>
               </a:rPr>
-              <a:t>  3. El veterinario selecciona una mascota de la lista.</a:t>
+              <a:t>    cu3((CU-04&lt;br/&gt;Agendar cita))</a:t>
             </a:r>
           </a:p>
           <a:p>
             <a:pPr>
               <a:spcAft>
-                <a:spcPts val="400"/>
+                <a:spcPts val="342"/>
               </a:spcAft>
             </a:pPr>
             <a:r>
-              <a:rPr sz="1400" b="0" i="0">
+              <a:rPr sz="1200" b="0" i="0">
                 <a:solidFill>
                   <a:srgbClr val="FFFFFF"/>
                 </a:solidFill>
                 <a:latin typeface="Calibri"/>
               </a:rPr>
-              <a:t>  4. El sistema muestra ficha, historial de consultas y vacunas en orden cronologico.</a:t>
+              <a:t>    cu4((Validar&lt;br/&gt;disponibilidad))</a:t>
             </a:r>
           </a:p>
           <a:p>
             <a:pPr>
               <a:spcAft>
-                <a:spcPts val="400"/>
+                <a:spcPts val="342"/>
               </a:spcAft>
             </a:pPr>
             <a:r>
-              <a:rPr sz="1400" b="0" i="0">
+              <a:rPr sz="1200" b="0" i="0">
                 <a:solidFill>
                   <a:srgbClr val="FFFFFF"/>
                 </a:solidFill>
                 <a:latin typeface="Calibri"/>
               </a:rPr>
-              <a:t>Flujos alternos:</a:t>
+              <a:t>  end</a:t>
             </a:r>
           </a:p>
           <a:p>
             <a:pPr>
               <a:spcAft>
-                <a:spcPts val="400"/>
+                <a:spcPts val="342"/>
               </a:spcAft>
             </a:pPr>
             <a:r>
-              <a:rPr sz="1400" b="0" i="0">
+              <a:rPr sz="1200" b="0" i="0">
                 <a:solidFill>
                   <a:srgbClr val="FFFFFF"/>
                 </a:solidFill>
                 <a:latin typeface="Calibri"/>
               </a:rPr>
-              <a:t>  2a. Sin coincidencias: el sistema informa y ofrece registrar la mascota (pasa a CU-01).</a:t>
+              <a:t/>
             </a:r>
           </a:p>
           <a:p>
             <a:pPr>
               <a:spcAft>
-                <a:spcPts val="400"/>
+                <a:spcPts val="342"/>
               </a:spcAft>
             </a:pPr>
             <a:r>
-              <a:rPr sz="1400" b="0" i="0">
+              <a:rPr sz="1200" b="0" i="0">
                 <a:solidFill>
                   <a:srgbClr val="FFFFFF"/>
                 </a:solidFill>
                 <a:latin typeface="Calibri"/>
               </a:rPr>
-              <a:t>  2b. Mas de 50 coincidencias: el sistema pagina el resultado y sugiere afinar el filtro.</a:t>
+              <a:t>  rec --&gt; cu1</a:t>
             </a:r>
           </a:p>
           <a:p>
             <a:pPr>
               <a:spcAft>
-                <a:spcPts val="400"/>
+                <a:spcPts val="342"/>
               </a:spcAft>
             </a:pPr>
             <a:r>
-              <a:rPr sz="1400" b="0" i="0">
+              <a:rPr sz="1200" b="0" i="0">
                 <a:solidFill>
                   <a:srgbClr val="FFFFFF"/>
                 </a:solidFill>
                 <a:latin typeface="Calibri"/>
               </a:rPr>
-              <a:t>  4a. La mascota esta inactiva: el sistema muestra el expediente en modo solo lectura.</a:t>
+              <a:t>  rec --&gt; cu3</a:t>
             </a:r>
           </a:p>
           <a:p>
             <a:pPr>
               <a:spcAft>
-                <a:spcPts val="400"/>
+                <a:spcPts val="342"/>
               </a:spcAft>
             </a:pPr>
             <a:r>
-              <a:rPr sz="1400" b="0" i="0">
+              <a:rPr sz="1200" b="0" i="0">
                 <a:solidFill>
                   <a:srgbClr val="FFFFFF"/>
                 </a:solidFill>
                 <a:latin typeface="Calibri"/>
               </a:rPr>
-              <a:t>Punto de extension: despues del paso 4 puede ejecutarse CU-06 Exportar expediente a PDF.</a:t>
+              <a:t>  vet --&gt; cu2</a:t>
+            </a:r>
+          </a:p>
+          <a:p>
+            <a:pPr>
+              <a:spcAft>
+                <a:spcPts val="342"/>
+              </a:spcAft>
+            </a:pPr>
+            <a:r>
+              <a:rPr sz="1200" b="0" i="0">
+                <a:solidFill>
+                  <a:srgbClr val="FFFFFF"/>
+                </a:solidFill>
+                <a:latin typeface="Calibri"/>
+              </a:rPr>
+              <a:t>  cu3 -.include.-&gt; cu4</a:t>
+            </a:r>
+          </a:p>
+          <a:p>
+            <a:pPr>
+              <a:spcAft>
+                <a:spcPts val="342"/>
+              </a:spcAft>
+            </a:pPr>
+            <a:r>
+              <a:rPr sz="1200" b="0" i="0">
+                <a:solidFill>
+                  <a:srgbClr val="FFFFFF"/>
+                </a:solidFill>
+                <a:latin typeface="Calibri"/>
+              </a:rPr>
+              <a:t/>
+            </a:r>
+          </a:p>
+          <a:p>
+            <a:pPr>
+              <a:spcAft>
+                <a:spcPts val="342"/>
+              </a:spcAft>
+            </a:pPr>
+            <a:r>
+              <a:rPr sz="1200" b="0" i="0">
+                <a:solidFill>
+                  <a:srgbClr val="FFFFFF"/>
+                </a:solidFill>
+                <a:latin typeface="Calibri"/>
+              </a:rPr>
+              <a:t>%% include: el caso base SIEMPRE lo ejecuta (agendar siempre valida).</a:t>
+            </a:r>
+          </a:p>
+          <a:p>
+            <a:pPr>
+              <a:spcAft>
+                <a:spcPts val="342"/>
+              </a:spcAft>
+            </a:pPr>
+            <a:r>
+              <a:rPr sz="1200" b="0" i="0">
+                <a:solidFill>
+                  <a:srgbClr val="FFFFFF"/>
+                </a:solidFill>
+                <a:latin typeface="Calibri"/>
+              </a:rPr>
+              <a:t>%% extend:  solo en ciertas condiciones (agendar + notificar por WhatsApp).</a:t>
             </a:r>
           </a:p>
         </p:txBody>
@@ -4505,41 +4571,6 @@
       <p:sp>
         <p:nvSpPr>
           <p:cNvPr id="9" name="TextBox 8"/>
-          <p:cNvSpPr txBox="1"/>
-          <p:nvPr/>
-        </p:nvSpPr>
-        <p:spPr>
-          <a:xfrm>
-            <a:off x="457200" y="6080760"/>
-            <a:ext cx="11277295" cy="320040"/>
-          </a:xfrm>
-          <a:prstGeom prst="rect">
-            <a:avLst/>
-          </a:prstGeom>
-          <a:noFill/>
-        </p:spPr>
-        <p:txBody>
-          <a:bodyPr wrap="square">
-            <a:spAutoFit/>
-          </a:bodyPr>
-          <a:lstStyle/>
-          <a:p>
-            <a:pPr algn="ctr"/>
-            <a:r>
-              <a:rPr sz="1200" b="0" i="1">
-                <a:solidFill>
-                  <a:srgbClr val="666666"/>
-                </a:solidFill>
-                <a:latin typeface="Calibri"/>
-              </a:rPr>
-              <a:t>El diagrama solo dice que existe Buscar expediente; unicamente la especificacion dice que hace el sistema cuando no hay coincidencias.</a:t>
-            </a:r>
-          </a:p>
-        </p:txBody>
-      </p:sp>
-      <p:sp>
-        <p:nvSpPr>
-          <p:cNvPr id="10" name="TextBox 9"/>
           <p:cNvSpPr txBox="1"/>
           <p:nvPr/>
         </p:nvSpPr>
@@ -4713,21 +4744,141 @@
                 </a:solidFill>
                 <a:latin typeface="Calibri"/>
               </a:rPr>
-              <a:t>Demo del dia</a:t>
-            </a:r>
-          </a:p>
-        </p:txBody>
-      </p:sp>
-      <p:sp>
-        <p:nvSpPr>
-          <p:cNvPr id="5" name="TextBox 4"/>
+              <a:t>La especificacion textual del caso de uso</a:t>
+            </a:r>
+          </a:p>
+        </p:txBody>
+      </p:sp>
+      <p:sp>
+        <p:nvSpPr>
+          <p:cNvPr id="5" name="Rounded Rectangle 4"/>
+          <p:cNvSpPr/>
+          <p:nvPr/>
+        </p:nvSpPr>
+        <p:spPr>
+          <a:xfrm>
+            <a:off x="457200" y="1261872"/>
+            <a:ext cx="11277295" cy="5093208"/>
+          </a:xfrm>
+          <a:prstGeom prst="roundRect">
+            <a:avLst>
+              <a:gd name="adj" fmla="val 12000"/>
+            </a:avLst>
+          </a:prstGeom>
+          <a:solidFill>
+            <a:srgbClr val="1E2A38"/>
+          </a:solidFill>
+          <a:ln>
+            <a:noFill/>
+          </a:ln>
+        </p:spPr>
+        <p:style>
+          <a:lnRef idx="1">
+            <a:schemeClr val="accent1"/>
+          </a:lnRef>
+          <a:fillRef idx="3">
+            <a:schemeClr val="accent1"/>
+          </a:fillRef>
+          <a:effectRef idx="2">
+            <a:schemeClr val="accent1"/>
+          </a:effectRef>
+          <a:fontRef idx="minor">
+            <a:schemeClr val="lt1"/>
+          </a:fontRef>
+        </p:style>
+        <p:txBody>
+          <a:bodyPr rtlCol="0" anchor="ctr"/>
+          <a:lstStyle/>
+          <a:p>
+            <a:pPr algn="ctr"/>
+          </a:p>
+        </p:txBody>
+      </p:sp>
+      <p:sp>
+        <p:nvSpPr>
+          <p:cNvPr id="6" name="Rectangle 5"/>
+          <p:cNvSpPr/>
+          <p:nvPr/>
+        </p:nvSpPr>
+        <p:spPr>
+          <a:xfrm>
+            <a:off x="457200" y="1261872"/>
+            <a:ext cx="11277295" cy="320040"/>
+          </a:xfrm>
+          <a:prstGeom prst="rect">
+            <a:avLst/>
+          </a:prstGeom>
+          <a:solidFill>
+            <a:srgbClr val="095292"/>
+          </a:solidFill>
+          <a:ln>
+            <a:noFill/>
+          </a:ln>
+        </p:spPr>
+        <p:style>
+          <a:lnRef idx="1">
+            <a:schemeClr val="accent1"/>
+          </a:lnRef>
+          <a:fillRef idx="3">
+            <a:schemeClr val="accent1"/>
+          </a:fillRef>
+          <a:effectRef idx="2">
+            <a:schemeClr val="accent1"/>
+          </a:effectRef>
+          <a:fontRef idx="minor">
+            <a:schemeClr val="lt1"/>
+          </a:fontRef>
+        </p:style>
+        <p:txBody>
+          <a:bodyPr rtlCol="0" anchor="ctr"/>
+          <a:lstStyle/>
+          <a:p>
+            <a:pPr algn="ctr"/>
+          </a:p>
+        </p:txBody>
+      </p:sp>
+      <p:sp>
+        <p:nvSpPr>
+          <p:cNvPr id="7" name="TextBox 6"/>
           <p:cNvSpPr txBox="1"/>
           <p:nvPr/>
         </p:nvSpPr>
         <p:spPr>
           <a:xfrm>
-            <a:off x="457200" y="1170432"/>
-            <a:ext cx="11277295" cy="5230368"/>
+            <a:off x="685800" y="1307592"/>
+            <a:ext cx="10820095" cy="256032"/>
+          </a:xfrm>
+          <a:prstGeom prst="rect">
+            <a:avLst/>
+          </a:prstGeom>
+          <a:noFill/>
+        </p:spPr>
+        <p:txBody>
+          <a:bodyPr wrap="square" anchor="ctr"/>
+          <a:lstStyle/>
+          <a:p>
+            <a:r>
+              <a:rPr sz="1000" b="1" i="0">
+                <a:solidFill>
+                  <a:srgbClr val="269CCB"/>
+                </a:solidFill>
+                <a:latin typeface="Calibri"/>
+              </a:rPr>
+              <a:t>● ● ●</a:t>
+            </a:r>
+          </a:p>
+        </p:txBody>
+      </p:sp>
+      <p:sp>
+        <p:nvSpPr>
+          <p:cNvPr id="8" name="TextBox 7"/>
+          <p:cNvSpPr txBox="1"/>
+          <p:nvPr/>
+        </p:nvSpPr>
+        <p:spPr>
+          <a:xfrm>
+            <a:off x="777240" y="1719072"/>
+            <a:ext cx="5181447" cy="4453128"/>
           </a:xfrm>
           <a:prstGeom prst="rect">
             <a:avLst/>
@@ -4742,92 +4893,351 @@
           <a:p>
             <a:pPr>
               <a:spcAft>
-                <a:spcPts val="800"/>
+                <a:spcPts val="400"/>
               </a:spcAft>
             </a:pPr>
             <a:r>
-              <a:rPr sz="2000" b="0" i="0">
-                <a:solidFill>
-                  <a:srgbClr val="333333"/>
-                </a:solidFill>
-                <a:latin typeface="Calibri"/>
-              </a:rPr>
-              <a:t>–   </a:t>
-            </a:r>
-            <a:r>
-              <a:rPr sz="2000" b="1" i="0">
-                <a:solidFill>
-                  <a:srgbClr val="333333"/>
-                </a:solidFill>
-                <a:latin typeface="Calibri"/>
-              </a:rPr>
-              <a:t>Herramienta:</a:t>
-            </a:r>
-            <a:r>
-              <a:rPr sz="2000" b="0" i="0">
-                <a:solidFill>
-                  <a:srgbClr val="333333"/>
-                </a:solidFill>
-                <a:latin typeface="Calibri"/>
-              </a:rPr>
-              <a:t> draw.io · Google Docs</a:t>
+              <a:rPr sz="1400" b="0" i="0">
+                <a:solidFill>
+                  <a:srgbClr val="FFFFFF"/>
+                </a:solidFill>
+                <a:latin typeface="Calibri"/>
+              </a:rPr>
+              <a:t>CU-01  Registrar mascota</a:t>
             </a:r>
           </a:p>
           <a:p>
             <a:pPr>
               <a:spcAft>
-                <a:spcPts val="800"/>
+                <a:spcPts val="400"/>
               </a:spcAft>
             </a:pPr>
             <a:r>
-              <a:rPr sz="2000" b="0" i="0">
-                <a:solidFill>
-                  <a:srgbClr val="333333"/>
-                </a:solidFill>
-                <a:latin typeface="Calibri"/>
-              </a:rPr>
-              <a:t>–   </a:t>
-            </a:r>
-            <a:r>
-              <a:rPr sz="2000" b="1" i="0">
-                <a:solidFill>
-                  <a:srgbClr val="333333"/>
-                </a:solidFill>
-                <a:latin typeface="Calibri"/>
-              </a:rPr>
-              <a:t>Demo:</a:t>
-            </a:r>
-            <a:r>
-              <a:rPr sz="2000" b="0" i="0">
-                <a:solidFill>
-                  <a:srgbClr val="333333"/>
-                </a:solidFill>
-                <a:latin typeface="Calibri"/>
-              </a:rPr>
-              <a:t> El docente proyecta como un caso de uso mal escrito (Dar clic en guardar) se transforma en uno correcto (Registrar mascota) y luego llena en vivo, delante del grupo, la plantilla de especificacion de Buscar expediente.</a:t>
+              <a:rPr sz="1400" b="0" i="0">
+                <a:solidFill>
+                  <a:srgbClr val="FFFFFF"/>
+                </a:solidFill>
+                <a:latin typeface="Calibri"/>
+              </a:rPr>
+              <a:t/>
             </a:r>
           </a:p>
           <a:p>
             <a:pPr>
               <a:spcAft>
-                <a:spcPts val="800"/>
+                <a:spcPts val="400"/>
               </a:spcAft>
             </a:pPr>
             <a:r>
-              <a:rPr sz="2000" b="0" i="0">
-                <a:solidFill>
-                  <a:srgbClr val="333333"/>
-                </a:solidFill>
-                <a:latin typeface="Calibri"/>
-              </a:rPr>
-              <a:t>–   Mismo dominio VetCare — no otro ejemplo. Aqui se diseña, no se programa.</a:t>
-            </a:r>
-          </a:p>
-        </p:txBody>
-      </p:sp>
-      <p:sp>
-        <p:nvSpPr>
-          <p:cNvPr id="6" name="TextBox 5"/>
+              <a:rPr sz="1400" b="0" i="0">
+                <a:solidFill>
+                  <a:srgbClr val="FFFFFF"/>
+                </a:solidFill>
+                <a:latin typeface="Calibri"/>
+              </a:rPr>
+              <a:t>Actor principal:  Recepcionista</a:t>
+            </a:r>
+          </a:p>
+          <a:p>
+            <a:pPr>
+              <a:spcAft>
+                <a:spcPts val="400"/>
+              </a:spcAft>
+            </a:pPr>
+            <a:r>
+              <a:rPr sz="1400" b="0" i="0">
+                <a:solidFill>
+                  <a:srgbClr val="FFFFFF"/>
+                </a:solidFill>
+                <a:latin typeface="Calibri"/>
+              </a:rPr>
+              <a:t>Trazabilidad:     RF-01, RF-02</a:t>
+            </a:r>
+          </a:p>
+          <a:p>
+            <a:pPr>
+              <a:spcAft>
+                <a:spcPts val="400"/>
+              </a:spcAft>
+            </a:pPr>
+            <a:r>
+              <a:rPr sz="1400" b="0" i="0">
+                <a:solidFill>
+                  <a:srgbClr val="FFFFFF"/>
+                </a:solidFill>
+                <a:latin typeface="Calibri"/>
+              </a:rPr>
+              <a:t>Precondicion:     el dueno existe y esta activo</a:t>
+            </a:r>
+          </a:p>
+          <a:p>
+            <a:pPr>
+              <a:spcAft>
+                <a:spcPts val="400"/>
+              </a:spcAft>
+            </a:pPr>
+            <a:r>
+              <a:rPr sz="1400" b="0" i="0">
+                <a:solidFill>
+                  <a:srgbClr val="FFFFFF"/>
+                </a:solidFill>
+                <a:latin typeface="Calibri"/>
+              </a:rPr>
+              <a:t>Postcondicion:    la mascota queda activa con expediente abierto</a:t>
+            </a:r>
+          </a:p>
+          <a:p>
+            <a:pPr>
+              <a:spcAft>
+                <a:spcPts val="400"/>
+              </a:spcAft>
+            </a:pPr>
+            <a:r>
+              <a:rPr sz="1400" b="0" i="0">
+                <a:solidFill>
+                  <a:srgbClr val="FFFFFF"/>
+                </a:solidFill>
+                <a:latin typeface="Calibri"/>
+              </a:rPr>
+              <a:t/>
+            </a:r>
+          </a:p>
+          <a:p>
+            <a:pPr>
+              <a:spcAft>
+                <a:spcPts val="400"/>
+              </a:spcAft>
+            </a:pPr>
+            <a:r>
+              <a:rPr sz="1400" b="0" i="0">
+                <a:solidFill>
+                  <a:srgbClr val="FFFFFF"/>
+                </a:solidFill>
+                <a:latin typeface="Calibri"/>
+              </a:rPr>
+              <a:t>Flujo principal</a:t>
+            </a:r>
+          </a:p>
+          <a:p>
+            <a:pPr>
+              <a:spcAft>
+                <a:spcPts val="400"/>
+              </a:spcAft>
+            </a:pPr>
+            <a:r>
+              <a:rPr sz="1400" b="0" i="0">
+                <a:solidFill>
+                  <a:srgbClr val="FFFFFF"/>
+                </a:solidFill>
+                <a:latin typeface="Calibri"/>
+              </a:rPr>
+              <a:t>  1. La recepcionista solicita registrar una mascota.</a:t>
+            </a:r>
+          </a:p>
+          <a:p>
+            <a:pPr>
+              <a:spcAft>
+                <a:spcPts val="400"/>
+              </a:spcAft>
+            </a:pPr>
+            <a:r>
+              <a:rPr sz="1400" b="0" i="0">
+                <a:solidFill>
+                  <a:srgbClr val="FFFFFF"/>
+                </a:solidFill>
+                <a:latin typeface="Calibri"/>
+              </a:rPr>
+              <a:t>  2. El sistema pide nombre, especie, fecha de nacimiento y dueno.</a:t>
+            </a:r>
+          </a:p>
+        </p:txBody>
+      </p:sp>
+      <p:sp>
+        <p:nvSpPr>
+          <p:cNvPr id="9" name="TextBox 8"/>
+          <p:cNvSpPr txBox="1"/>
+          <p:nvPr/>
+        </p:nvSpPr>
+        <p:spPr>
+          <a:xfrm>
+            <a:off x="6233007" y="1719072"/>
+            <a:ext cx="5181447" cy="4453128"/>
+          </a:xfrm>
+          <a:prstGeom prst="rect">
+            <a:avLst/>
+          </a:prstGeom>
+          <a:noFill/>
+        </p:spPr>
+        <p:txBody>
+          <a:bodyPr wrap="square">
+            <a:spAutoFit/>
+          </a:bodyPr>
+          <a:lstStyle/>
+          <a:p>
+            <a:pPr>
+              <a:spcAft>
+                <a:spcPts val="400"/>
+              </a:spcAft>
+            </a:pPr>
+            <a:r>
+              <a:rPr sz="1400" b="0" i="0">
+                <a:solidFill>
+                  <a:srgbClr val="FFFFFF"/>
+                </a:solidFill>
+                <a:latin typeface="Calibri"/>
+              </a:rPr>
+              <a:t>  3. La recepcionista ingresa los datos.</a:t>
+            </a:r>
+          </a:p>
+          <a:p>
+            <a:pPr>
+              <a:spcAft>
+                <a:spcPts val="400"/>
+              </a:spcAft>
+            </a:pPr>
+            <a:r>
+              <a:rPr sz="1400" b="0" i="0">
+                <a:solidFill>
+                  <a:srgbClr val="FFFFFF"/>
+                </a:solidFill>
+                <a:latin typeface="Calibri"/>
+              </a:rPr>
+              <a:t>  4. El sistema valida que el dueno exista y este activo.</a:t>
+            </a:r>
+          </a:p>
+          <a:p>
+            <a:pPr>
+              <a:spcAft>
+                <a:spcPts val="400"/>
+              </a:spcAft>
+            </a:pPr>
+            <a:r>
+              <a:rPr sz="1400" b="0" i="0">
+                <a:solidFill>
+                  <a:srgbClr val="FFFFFF"/>
+                </a:solidFill>
+                <a:latin typeface="Calibri"/>
+              </a:rPr>
+              <a:t>  5. El sistema guarda la mascota y confirma.</a:t>
+            </a:r>
+          </a:p>
+          <a:p>
+            <a:pPr>
+              <a:spcAft>
+                <a:spcPts val="400"/>
+              </a:spcAft>
+            </a:pPr>
+            <a:r>
+              <a:rPr sz="1400" b="0" i="0">
+                <a:solidFill>
+                  <a:srgbClr val="FFFFFF"/>
+                </a:solidFill>
+                <a:latin typeface="Calibri"/>
+              </a:rPr>
+              <a:t/>
+            </a:r>
+          </a:p>
+          <a:p>
+            <a:pPr>
+              <a:spcAft>
+                <a:spcPts val="400"/>
+              </a:spcAft>
+            </a:pPr>
+            <a:r>
+              <a:rPr sz="1400" b="0" i="0">
+                <a:solidFill>
+                  <a:srgbClr val="FFFFFF"/>
+                </a:solidFill>
+                <a:latin typeface="Calibri"/>
+              </a:rPr>
+              <a:t>Flujos alternos</a:t>
+            </a:r>
+          </a:p>
+          <a:p>
+            <a:pPr>
+              <a:spcAft>
+                <a:spcPts val="400"/>
+              </a:spcAft>
+            </a:pPr>
+            <a:r>
+              <a:rPr sz="1400" b="0" i="0">
+                <a:solidFill>
+                  <a:srgbClr val="FFFFFF"/>
+                </a:solidFill>
+                <a:latin typeface="Calibri"/>
+              </a:rPr>
+              <a:t>  4a. El dueno no existe -&gt; el sistema ofrece registrarlo primero.</a:t>
+            </a:r>
+          </a:p>
+          <a:p>
+            <a:pPr>
+              <a:spcAft>
+                <a:spcPts val="400"/>
+              </a:spcAft>
+            </a:pPr>
+            <a:r>
+              <a:rPr sz="1400" b="0" i="0">
+                <a:solidFill>
+                  <a:srgbClr val="FFFFFF"/>
+                </a:solidFill>
+                <a:latin typeface="Calibri"/>
+              </a:rPr>
+              <a:t>  4b. Falta un dato obligatorio -&gt; el sistema lo senala y no guarda.</a:t>
+            </a:r>
+          </a:p>
+          <a:p>
+            <a:pPr>
+              <a:spcAft>
+                <a:spcPts val="400"/>
+              </a:spcAft>
+            </a:pPr>
+            <a:r>
+              <a:rPr sz="1400" b="0" i="0">
+                <a:solidFill>
+                  <a:srgbClr val="FFFFFF"/>
+                </a:solidFill>
+                <a:latin typeface="Calibri"/>
+              </a:rPr>
+              <a:t/>
+            </a:r>
+          </a:p>
+          <a:p>
+            <a:pPr>
+              <a:spcAft>
+                <a:spcPts val="400"/>
+              </a:spcAft>
+            </a:pPr>
+            <a:r>
+              <a:rPr sz="1400" b="0" i="0">
+                <a:solidFill>
+                  <a:srgbClr val="FFFFFF"/>
+                </a:solidFill>
+                <a:latin typeface="Calibri"/>
+              </a:rPr>
+              <a:t>-- Sin flujos alternos la especificacion esta a medias: el 4a y el 4b</a:t>
+            </a:r>
+          </a:p>
+          <a:p>
+            <a:pPr>
+              <a:spcAft>
+                <a:spcPts val="400"/>
+              </a:spcAft>
+            </a:pPr>
+            <a:r>
+              <a:rPr sz="1400" b="0" i="0">
+                <a:solidFill>
+                  <a:srgbClr val="FFFFFF"/>
+                </a:solidFill>
+                <a:latin typeface="Calibri"/>
+              </a:rPr>
+              <a:t>-- son las dos terceras partes del trabajo real del programador.</a:t>
+            </a:r>
+          </a:p>
+        </p:txBody>
+      </p:sp>
+      <p:sp>
+        <p:nvSpPr>
+          <p:cNvPr id="10" name="TextBox 9"/>
           <p:cNvSpPr txBox="1"/>
           <p:nvPr/>
         </p:nvSpPr>
@@ -4895,7 +5305,7 @@
         <p:spPr>
           <a:xfrm>
             <a:off x="0" y="0"/>
-            <a:ext cx="12191695" cy="1170432"/>
+            <a:ext cx="12191695" cy="960120"/>
           </a:xfrm>
           <a:prstGeom prst="rect">
             <a:avLst/>
@@ -4937,7 +5347,7 @@
         </p:nvSpPr>
         <p:spPr>
           <a:xfrm>
-            <a:off x="0" y="1170432"/>
+            <a:off x="0" y="960120"/>
             <a:ext cx="12191695" cy="41148"/>
           </a:xfrm>
           <a:prstGeom prst="rect">
@@ -4981,7 +5391,7 @@
         <p:spPr>
           <a:xfrm>
             <a:off x="457200" y="164592"/>
-            <a:ext cx="11277295" cy="384048"/>
+            <a:ext cx="11277295" cy="502920"/>
           </a:xfrm>
           <a:prstGeom prst="rect">
             <a:avLst/>
@@ -5001,55 +5411,21 @@
                 </a:solidFill>
                 <a:latin typeface="Calibri"/>
               </a:rPr>
-              <a:t>Herramientas de hoy</a:t>
-            </a:r>
-          </a:p>
-        </p:txBody>
-      </p:sp>
-      <p:sp>
-        <p:nvSpPr>
-          <p:cNvPr id="5" name="TextBox 4"/>
-          <p:cNvSpPr txBox="1"/>
-          <p:nvPr/>
-        </p:nvSpPr>
-        <p:spPr>
-          <a:xfrm>
-            <a:off x="457200" y="566928"/>
-            <a:ext cx="11277295" cy="411480"/>
-          </a:xfrm>
-          <a:prstGeom prst="rect">
-            <a:avLst/>
-          </a:prstGeom>
-          <a:noFill/>
-        </p:spPr>
-        <p:txBody>
-          <a:bodyPr wrap="square">
-            <a:spAutoFit/>
-          </a:bodyPr>
-          <a:lstStyle/>
-          <a:p>
-            <a:r>
-              <a:rPr sz="1400" b="0" i="0">
-                <a:solidFill>
-                  <a:srgbClr val="B8D8EE"/>
-                </a:solidFill>
-                <a:latin typeface="Calibri"/>
-              </a:rPr>
-              <a:t>Gratis · funcionan en el navegador</a:t>
-            </a:r>
-          </a:p>
-        </p:txBody>
-      </p:sp>
-      <p:sp>
-        <p:nvSpPr>
-          <p:cNvPr id="6" name="Rounded Rectangle 5"/>
+              <a:t>CU-02 Buscar expediente: la especificacion que el diagrama no muestra</a:t>
+            </a:r>
+          </a:p>
+        </p:txBody>
+      </p:sp>
+      <p:sp>
+        <p:nvSpPr>
+          <p:cNvPr id="5" name="Rounded Rectangle 4"/>
           <p:cNvSpPr/>
           <p:nvPr/>
         </p:nvSpPr>
         <p:spPr>
           <a:xfrm>
-            <a:off x="457200" y="1591056"/>
-            <a:ext cx="3624986" cy="2331720"/>
+            <a:off x="457200" y="1261872"/>
+            <a:ext cx="11277295" cy="4773168"/>
           </a:xfrm>
           <a:prstGeom prst="roundRect">
             <a:avLst>
@@ -5057,7 +5433,7 @@
             </a:avLst>
           </a:prstGeom>
           <a:solidFill>
-            <a:srgbClr val="F2F2F2"/>
+            <a:srgbClr val="1E2A38"/>
           </a:solidFill>
           <a:ln>
             <a:noFill/>
@@ -5087,14 +5463,14 @@
       </p:sp>
       <p:sp>
         <p:nvSpPr>
-          <p:cNvPr id="7" name="Rectangle 6"/>
+          <p:cNvPr id="6" name="Rectangle 5"/>
           <p:cNvSpPr/>
           <p:nvPr/>
         </p:nvSpPr>
         <p:spPr>
           <a:xfrm>
-            <a:off x="457200" y="1591056"/>
-            <a:ext cx="3624986" cy="64008"/>
+            <a:off x="457200" y="1261872"/>
+            <a:ext cx="11277295" cy="320040"/>
           </a:xfrm>
           <a:prstGeom prst="rect">
             <a:avLst/>
@@ -5130,531 +5506,321 @@
       </p:sp>
       <p:sp>
         <p:nvSpPr>
-          <p:cNvPr id="8" name="Rectangle 7"/>
-          <p:cNvSpPr/>
-          <p:nvPr/>
-        </p:nvSpPr>
-        <p:spPr>
-          <a:xfrm>
-            <a:off x="457200" y="1655064"/>
-            <a:ext cx="3624986" cy="27432"/>
-          </a:xfrm>
-          <a:prstGeom prst="rect">
-            <a:avLst/>
-          </a:prstGeom>
-          <a:solidFill>
-            <a:srgbClr val="FFD000"/>
-          </a:solidFill>
-          <a:ln>
-            <a:noFill/>
-          </a:ln>
-        </p:spPr>
-        <p:style>
-          <a:lnRef idx="1">
-            <a:schemeClr val="accent1"/>
-          </a:lnRef>
-          <a:fillRef idx="3">
-            <a:schemeClr val="accent1"/>
-          </a:fillRef>
-          <a:effectRef idx="2">
-            <a:schemeClr val="accent1"/>
-          </a:effectRef>
-          <a:fontRef idx="minor">
-            <a:schemeClr val="lt1"/>
-          </a:fontRef>
-        </p:style>
-        <p:txBody>
-          <a:bodyPr rtlCol="0" anchor="ctr"/>
+          <p:cNvPr id="7" name="TextBox 6"/>
+          <p:cNvSpPr txBox="1"/>
+          <p:nvPr/>
+        </p:nvSpPr>
+        <p:spPr>
+          <a:xfrm>
+            <a:off x="685800" y="1307592"/>
+            <a:ext cx="10820095" cy="256032"/>
+          </a:xfrm>
+          <a:prstGeom prst="rect">
+            <a:avLst/>
+          </a:prstGeom>
+          <a:noFill/>
+        </p:spPr>
+        <p:txBody>
+          <a:bodyPr wrap="square" anchor="ctr"/>
+          <a:lstStyle/>
+          <a:p>
+            <a:r>
+              <a:rPr sz="1000" b="1" i="0">
+                <a:solidFill>
+                  <a:srgbClr val="269CCB"/>
+                </a:solidFill>
+                <a:latin typeface="Calibri"/>
+              </a:rPr>
+              <a:t>● ● ●</a:t>
+            </a:r>
+          </a:p>
+        </p:txBody>
+      </p:sp>
+      <p:sp>
+        <p:nvSpPr>
+          <p:cNvPr id="8" name="TextBox 7"/>
+          <p:cNvSpPr txBox="1"/>
+          <p:nvPr/>
+        </p:nvSpPr>
+        <p:spPr>
+          <a:xfrm>
+            <a:off x="777240" y="1719072"/>
+            <a:ext cx="10637215" cy="4133087"/>
+          </a:xfrm>
+          <a:prstGeom prst="rect">
+            <a:avLst/>
+          </a:prstGeom>
+          <a:noFill/>
+        </p:spPr>
+        <p:txBody>
+          <a:bodyPr wrap="square">
+            <a:spAutoFit/>
+          </a:bodyPr>
+          <a:lstStyle/>
+          <a:p>
+            <a:pPr>
+              <a:spcAft>
+                <a:spcPts val="400"/>
+              </a:spcAft>
+            </a:pPr>
+            <a:r>
+              <a:rPr sz="1400" b="0" i="0">
+                <a:solidFill>
+                  <a:srgbClr val="FFFFFF"/>
+                </a:solidFill>
+                <a:latin typeface="Calibri"/>
+              </a:rPr>
+              <a:t>CU-02  Buscar expediente</a:t>
+            </a:r>
+          </a:p>
+          <a:p>
+            <a:pPr>
+              <a:spcAft>
+                <a:spcPts val="400"/>
+              </a:spcAft>
+            </a:pPr>
+            <a:r>
+              <a:rPr sz="1400" b="0" i="0">
+                <a:solidFill>
+                  <a:srgbClr val="FFFFFF"/>
+                </a:solidFill>
+                <a:latin typeface="Calibri"/>
+              </a:rPr>
+              <a:t>Actor primario: Veterinario  |  Prioridad: Alta  |  Cubre: RF-05, RNF-02</a:t>
+            </a:r>
+          </a:p>
+          <a:p>
+            <a:pPr>
+              <a:spcAft>
+                <a:spcPts val="400"/>
+              </a:spcAft>
+            </a:pPr>
+            <a:r>
+              <a:rPr sz="1400" b="0" i="0">
+                <a:solidFill>
+                  <a:srgbClr val="FFFFFF"/>
+                </a:solidFill>
+                <a:latin typeface="Calibri"/>
+              </a:rPr>
+              <a:t>Precondicion: el veterinario esta autenticado y la mascota existe en el sistema.</a:t>
+            </a:r>
+          </a:p>
+          <a:p>
+            <a:pPr>
+              <a:spcAft>
+                <a:spcPts val="400"/>
+              </a:spcAft>
+            </a:pPr>
+            <a:r>
+              <a:rPr sz="1400" b="0" i="0">
+                <a:solidFill>
+                  <a:srgbClr val="FFFFFF"/>
+                </a:solidFill>
+                <a:latin typeface="Calibri"/>
+              </a:rPr>
+              <a:t>Postcondicion (exito): el expediente queda desplegado y la consulta queda en bitacora; no se modifica ningun dato clinico.</a:t>
+            </a:r>
+          </a:p>
+          <a:p>
+            <a:pPr>
+              <a:spcAft>
+                <a:spcPts val="400"/>
+              </a:spcAft>
+            </a:pPr>
+            <a:r>
+              <a:rPr sz="1400" b="0" i="0">
+                <a:solidFill>
+                  <a:srgbClr val="FFFFFF"/>
+                </a:solidFill>
+                <a:latin typeface="Calibri"/>
+              </a:rPr>
+              <a:t>Flujo principal:</a:t>
+            </a:r>
+          </a:p>
+          <a:p>
+            <a:pPr>
+              <a:spcAft>
+                <a:spcPts val="400"/>
+              </a:spcAft>
+            </a:pPr>
+            <a:r>
+              <a:rPr sz="1400" b="0" i="0">
+                <a:solidFill>
+                  <a:srgbClr val="FFFFFF"/>
+                </a:solidFill>
+                <a:latin typeface="Calibri"/>
+              </a:rPr>
+              <a:t>  1. El veterinario digita codigo, nombre de mascota o documento del propietario.</a:t>
+            </a:r>
+          </a:p>
+          <a:p>
+            <a:pPr>
+              <a:spcAft>
+                <a:spcPts val="400"/>
+              </a:spcAft>
+            </a:pPr>
+            <a:r>
+              <a:rPr sz="1400" b="0" i="0">
+                <a:solidFill>
+                  <a:srgbClr val="FFFFFF"/>
+                </a:solidFill>
+                <a:latin typeface="Calibri"/>
+              </a:rPr>
+              <a:t>  2. El sistema devuelve la lista de coincidencias en menos de 3 segundos (RNF-02).</a:t>
+            </a:r>
+          </a:p>
+          <a:p>
+            <a:pPr>
+              <a:spcAft>
+                <a:spcPts val="400"/>
+              </a:spcAft>
+            </a:pPr>
+            <a:r>
+              <a:rPr sz="1400" b="0" i="0">
+                <a:solidFill>
+                  <a:srgbClr val="FFFFFF"/>
+                </a:solidFill>
+                <a:latin typeface="Calibri"/>
+              </a:rPr>
+              <a:t>  3. El veterinario selecciona una mascota de la lista.</a:t>
+            </a:r>
+          </a:p>
+          <a:p>
+            <a:pPr>
+              <a:spcAft>
+                <a:spcPts val="400"/>
+              </a:spcAft>
+            </a:pPr>
+            <a:r>
+              <a:rPr sz="1400" b="0" i="0">
+                <a:solidFill>
+                  <a:srgbClr val="FFFFFF"/>
+                </a:solidFill>
+                <a:latin typeface="Calibri"/>
+              </a:rPr>
+              <a:t>  4. El sistema muestra ficha, historial de consultas y vacunas en orden cronologico.</a:t>
+            </a:r>
+          </a:p>
+          <a:p>
+            <a:pPr>
+              <a:spcAft>
+                <a:spcPts val="400"/>
+              </a:spcAft>
+            </a:pPr>
+            <a:r>
+              <a:rPr sz="1400" b="0" i="0">
+                <a:solidFill>
+                  <a:srgbClr val="FFFFFF"/>
+                </a:solidFill>
+                <a:latin typeface="Calibri"/>
+              </a:rPr>
+              <a:t>Flujos alternos:</a:t>
+            </a:r>
+          </a:p>
+          <a:p>
+            <a:pPr>
+              <a:spcAft>
+                <a:spcPts val="400"/>
+              </a:spcAft>
+            </a:pPr>
+            <a:r>
+              <a:rPr sz="1400" b="0" i="0">
+                <a:solidFill>
+                  <a:srgbClr val="FFFFFF"/>
+                </a:solidFill>
+                <a:latin typeface="Calibri"/>
+              </a:rPr>
+              <a:t>  2a. Sin coincidencias: el sistema informa y ofrece registrar la mascota (pasa a CU-01).</a:t>
+            </a:r>
+          </a:p>
+          <a:p>
+            <a:pPr>
+              <a:spcAft>
+                <a:spcPts val="400"/>
+              </a:spcAft>
+            </a:pPr>
+            <a:r>
+              <a:rPr sz="1400" b="0" i="0">
+                <a:solidFill>
+                  <a:srgbClr val="FFFFFF"/>
+                </a:solidFill>
+                <a:latin typeface="Calibri"/>
+              </a:rPr>
+              <a:t>  2b. Mas de 50 coincidencias: el sistema pagina el resultado y sugiere afinar el filtro.</a:t>
+            </a:r>
+          </a:p>
+          <a:p>
+            <a:pPr>
+              <a:spcAft>
+                <a:spcPts val="400"/>
+              </a:spcAft>
+            </a:pPr>
+            <a:r>
+              <a:rPr sz="1400" b="0" i="0">
+                <a:solidFill>
+                  <a:srgbClr val="FFFFFF"/>
+                </a:solidFill>
+                <a:latin typeface="Calibri"/>
+              </a:rPr>
+              <a:t>  4a. La mascota esta inactiva: el sistema muestra el expediente en modo solo lectura.</a:t>
+            </a:r>
+          </a:p>
+          <a:p>
+            <a:pPr>
+              <a:spcAft>
+                <a:spcPts val="400"/>
+              </a:spcAft>
+            </a:pPr>
+            <a:r>
+              <a:rPr sz="1400" b="0" i="0">
+                <a:solidFill>
+                  <a:srgbClr val="FFFFFF"/>
+                </a:solidFill>
+                <a:latin typeface="Calibri"/>
+              </a:rPr>
+              <a:t>Punto de extension: despues del paso 4 puede ejecutarse CU-06 Exportar expediente a PDF.</a:t>
+            </a:r>
+          </a:p>
+        </p:txBody>
+      </p:sp>
+      <p:sp>
+        <p:nvSpPr>
+          <p:cNvPr id="9" name="TextBox 8"/>
+          <p:cNvSpPr txBox="1"/>
+          <p:nvPr/>
+        </p:nvSpPr>
+        <p:spPr>
+          <a:xfrm>
+            <a:off x="457200" y="6080760"/>
+            <a:ext cx="11277295" cy="320040"/>
+          </a:xfrm>
+          <a:prstGeom prst="rect">
+            <a:avLst/>
+          </a:prstGeom>
+          <a:noFill/>
+        </p:spPr>
+        <p:txBody>
+          <a:bodyPr wrap="square">
+            <a:spAutoFit/>
+          </a:bodyPr>
           <a:lstStyle/>
           <a:p>
             <a:pPr algn="ctr"/>
-          </a:p>
-        </p:txBody>
-      </p:sp>
-      <p:pic>
-        <p:nvPicPr>
-          <p:cNvPr id="9" name="Picture 8" descr="drawio.png"/>
-          <p:cNvPicPr>
-            <a:picLocks noChangeAspect="1"/>
-          </p:cNvPicPr>
-          <p:nvPr/>
-        </p:nvPicPr>
-        <p:blipFill>
-          <a:blip r:embed="rId2"/>
-          <a:stretch>
-            <a:fillRect/>
-          </a:stretch>
-        </p:blipFill>
-        <p:spPr>
-          <a:xfrm>
-            <a:off x="1643329" y="1847087"/>
-            <a:ext cx="1252728" cy="1252728"/>
-          </a:xfrm>
-          <a:prstGeom prst="rect">
-            <a:avLst/>
-          </a:prstGeom>
-        </p:spPr>
-      </p:pic>
+            <a:r>
+              <a:rPr sz="1200" b="0" i="1">
+                <a:solidFill>
+                  <a:srgbClr val="666666"/>
+                </a:solidFill>
+                <a:latin typeface="Calibri"/>
+              </a:rPr>
+              <a:t>El diagrama solo dice que existe Buscar expediente; unicamente la especificacion dice que hace el sistema cuando no hay coincidencias.</a:t>
+            </a:r>
+          </a:p>
+        </p:txBody>
+      </p:sp>
       <p:sp>
         <p:nvSpPr>
           <p:cNvPr id="10" name="TextBox 9"/>
-          <p:cNvSpPr txBox="1"/>
-          <p:nvPr/>
-        </p:nvSpPr>
-        <p:spPr>
-          <a:xfrm>
-            <a:off x="530352" y="3191256"/>
-            <a:ext cx="3478682" cy="621792"/>
-          </a:xfrm>
-          <a:prstGeom prst="rect">
-            <a:avLst/>
-          </a:prstGeom>
-          <a:noFill/>
-        </p:spPr>
-        <p:txBody>
-          <a:bodyPr wrap="square" anchor="t"/>
-          <a:lstStyle/>
-          <a:p>
-            <a:pPr algn="ctr"/>
-            <a:r>
-              <a:rPr sz="1300" b="1" i="0">
-                <a:solidFill>
-                  <a:srgbClr val="095292"/>
-                </a:solidFill>
-                <a:latin typeface="Calibri"/>
-              </a:rPr>
-              <a:t>Draw.Io</a:t>
-            </a:r>
-          </a:p>
-          <a:p>
-            <a:pPr algn="ctr">
-              <a:spcBef>
-                <a:spcPts val="200"/>
-              </a:spcBef>
-            </a:pPr>
-            <a:r>
-              <a:rPr sz="1000" b="0" i="0">
-                <a:solidFill>
-                  <a:srgbClr val="666666"/>
-                </a:solidFill>
-                <a:latin typeface="Calibri"/>
-              </a:rPr>
-              <a:t>Diagramas UML y de contexto</a:t>
-            </a:r>
-          </a:p>
-        </p:txBody>
-      </p:sp>
-      <p:sp>
-        <p:nvSpPr>
-          <p:cNvPr id="11" name="Rounded Rectangle 10"/>
-          <p:cNvSpPr/>
-          <p:nvPr/>
-        </p:nvSpPr>
-        <p:spPr>
-          <a:xfrm>
-            <a:off x="4283354" y="1591056"/>
-            <a:ext cx="3624986" cy="2331720"/>
-          </a:xfrm>
-          <a:prstGeom prst="roundRect">
-            <a:avLst>
-              <a:gd name="adj" fmla="val 12000"/>
-            </a:avLst>
-          </a:prstGeom>
-          <a:solidFill>
-            <a:srgbClr val="F2F2F2"/>
-          </a:solidFill>
-          <a:ln>
-            <a:noFill/>
-          </a:ln>
-        </p:spPr>
-        <p:style>
-          <a:lnRef idx="1">
-            <a:schemeClr val="accent1"/>
-          </a:lnRef>
-          <a:fillRef idx="3">
-            <a:schemeClr val="accent1"/>
-          </a:fillRef>
-          <a:effectRef idx="2">
-            <a:schemeClr val="accent1"/>
-          </a:effectRef>
-          <a:fontRef idx="minor">
-            <a:schemeClr val="lt1"/>
-          </a:fontRef>
-        </p:style>
-        <p:txBody>
-          <a:bodyPr rtlCol="0" anchor="ctr"/>
-          <a:lstStyle/>
-          <a:p>
-            <a:pPr algn="ctr"/>
-          </a:p>
-        </p:txBody>
-      </p:sp>
-      <p:sp>
-        <p:nvSpPr>
-          <p:cNvPr id="12" name="Rectangle 11"/>
-          <p:cNvSpPr/>
-          <p:nvPr/>
-        </p:nvSpPr>
-        <p:spPr>
-          <a:xfrm>
-            <a:off x="4283354" y="1591056"/>
-            <a:ext cx="3624986" cy="64008"/>
-          </a:xfrm>
-          <a:prstGeom prst="rect">
-            <a:avLst/>
-          </a:prstGeom>
-          <a:solidFill>
-            <a:srgbClr val="095292"/>
-          </a:solidFill>
-          <a:ln>
-            <a:noFill/>
-          </a:ln>
-        </p:spPr>
-        <p:style>
-          <a:lnRef idx="1">
-            <a:schemeClr val="accent1"/>
-          </a:lnRef>
-          <a:fillRef idx="3">
-            <a:schemeClr val="accent1"/>
-          </a:fillRef>
-          <a:effectRef idx="2">
-            <a:schemeClr val="accent1"/>
-          </a:effectRef>
-          <a:fontRef idx="minor">
-            <a:schemeClr val="lt1"/>
-          </a:fontRef>
-        </p:style>
-        <p:txBody>
-          <a:bodyPr rtlCol="0" anchor="ctr"/>
-          <a:lstStyle/>
-          <a:p>
-            <a:pPr algn="ctr"/>
-          </a:p>
-        </p:txBody>
-      </p:sp>
-      <p:sp>
-        <p:nvSpPr>
-          <p:cNvPr id="13" name="Rectangle 12"/>
-          <p:cNvSpPr/>
-          <p:nvPr/>
-        </p:nvSpPr>
-        <p:spPr>
-          <a:xfrm>
-            <a:off x="4283354" y="1655064"/>
-            <a:ext cx="3624986" cy="27432"/>
-          </a:xfrm>
-          <a:prstGeom prst="rect">
-            <a:avLst/>
-          </a:prstGeom>
-          <a:solidFill>
-            <a:srgbClr val="FFD000"/>
-          </a:solidFill>
-          <a:ln>
-            <a:noFill/>
-          </a:ln>
-        </p:spPr>
-        <p:style>
-          <a:lnRef idx="1">
-            <a:schemeClr val="accent1"/>
-          </a:lnRef>
-          <a:fillRef idx="3">
-            <a:schemeClr val="accent1"/>
-          </a:fillRef>
-          <a:effectRef idx="2">
-            <a:schemeClr val="accent1"/>
-          </a:effectRef>
-          <a:fontRef idx="minor">
-            <a:schemeClr val="lt1"/>
-          </a:fontRef>
-        </p:style>
-        <p:txBody>
-          <a:bodyPr rtlCol="0" anchor="ctr"/>
-          <a:lstStyle/>
-          <a:p>
-            <a:pPr algn="ctr"/>
-          </a:p>
-        </p:txBody>
-      </p:sp>
-      <p:pic>
-        <p:nvPicPr>
-          <p:cNvPr id="14" name="Picture 13" descr="google_docs.png"/>
-          <p:cNvPicPr>
-            <a:picLocks noChangeAspect="1"/>
-          </p:cNvPicPr>
-          <p:nvPr/>
-        </p:nvPicPr>
-        <p:blipFill>
-          <a:blip r:embed="rId3"/>
-          <a:stretch>
-            <a:fillRect/>
-          </a:stretch>
-        </p:blipFill>
-        <p:spPr>
-          <a:xfrm>
-            <a:off x="5469483" y="1847087"/>
-            <a:ext cx="1252728" cy="1252728"/>
-          </a:xfrm>
-          <a:prstGeom prst="rect">
-            <a:avLst/>
-          </a:prstGeom>
-        </p:spPr>
-      </p:pic>
-      <p:sp>
-        <p:nvSpPr>
-          <p:cNvPr id="15" name="TextBox 14"/>
-          <p:cNvSpPr txBox="1"/>
-          <p:nvPr/>
-        </p:nvSpPr>
-        <p:spPr>
-          <a:xfrm>
-            <a:off x="4356506" y="3191256"/>
-            <a:ext cx="3478682" cy="621792"/>
-          </a:xfrm>
-          <a:prstGeom prst="rect">
-            <a:avLst/>
-          </a:prstGeom>
-          <a:noFill/>
-        </p:spPr>
-        <p:txBody>
-          <a:bodyPr wrap="square" anchor="t"/>
-          <a:lstStyle/>
-          <a:p>
-            <a:pPr algn="ctr"/>
-            <a:r>
-              <a:rPr sz="1300" b="1" i="0">
-                <a:solidFill>
-                  <a:srgbClr val="095292"/>
-                </a:solidFill>
-                <a:latin typeface="Calibri"/>
-              </a:rPr>
-              <a:t>google docs</a:t>
-            </a:r>
-          </a:p>
-          <a:p>
-            <a:pPr algn="ctr">
-              <a:spcBef>
-                <a:spcPts val="200"/>
-              </a:spcBef>
-            </a:pPr>
-            <a:r>
-              <a:rPr sz="1000" b="0" i="0">
-                <a:solidFill>
-                  <a:srgbClr val="666666"/>
-                </a:solidFill>
-                <a:latin typeface="Calibri"/>
-              </a:rPr>
-              <a:t>Documentos del paquete de diseño</a:t>
-            </a:r>
-          </a:p>
-        </p:txBody>
-      </p:sp>
-      <p:sp>
-        <p:nvSpPr>
-          <p:cNvPr id="16" name="Rounded Rectangle 15"/>
-          <p:cNvSpPr/>
-          <p:nvPr/>
-        </p:nvSpPr>
-        <p:spPr>
-          <a:xfrm>
-            <a:off x="8109508" y="1591056"/>
-            <a:ext cx="3624986" cy="2331720"/>
-          </a:xfrm>
-          <a:prstGeom prst="roundRect">
-            <a:avLst>
-              <a:gd name="adj" fmla="val 12000"/>
-            </a:avLst>
-          </a:prstGeom>
-          <a:solidFill>
-            <a:srgbClr val="F2F2F2"/>
-          </a:solidFill>
-          <a:ln>
-            <a:noFill/>
-          </a:ln>
-        </p:spPr>
-        <p:style>
-          <a:lnRef idx="1">
-            <a:schemeClr val="accent1"/>
-          </a:lnRef>
-          <a:fillRef idx="3">
-            <a:schemeClr val="accent1"/>
-          </a:fillRef>
-          <a:effectRef idx="2">
-            <a:schemeClr val="accent1"/>
-          </a:effectRef>
-          <a:fontRef idx="minor">
-            <a:schemeClr val="lt1"/>
-          </a:fontRef>
-        </p:style>
-        <p:txBody>
-          <a:bodyPr rtlCol="0" anchor="ctr"/>
-          <a:lstStyle/>
-          <a:p>
-            <a:pPr algn="ctr"/>
-          </a:p>
-        </p:txBody>
-      </p:sp>
-      <p:sp>
-        <p:nvSpPr>
-          <p:cNvPr id="17" name="Rectangle 16"/>
-          <p:cNvSpPr/>
-          <p:nvPr/>
-        </p:nvSpPr>
-        <p:spPr>
-          <a:xfrm>
-            <a:off x="8109508" y="1591056"/>
-            <a:ext cx="3624986" cy="64008"/>
-          </a:xfrm>
-          <a:prstGeom prst="rect">
-            <a:avLst/>
-          </a:prstGeom>
-          <a:solidFill>
-            <a:srgbClr val="095292"/>
-          </a:solidFill>
-          <a:ln>
-            <a:noFill/>
-          </a:ln>
-        </p:spPr>
-        <p:style>
-          <a:lnRef idx="1">
-            <a:schemeClr val="accent1"/>
-          </a:lnRef>
-          <a:fillRef idx="3">
-            <a:schemeClr val="accent1"/>
-          </a:fillRef>
-          <a:effectRef idx="2">
-            <a:schemeClr val="accent1"/>
-          </a:effectRef>
-          <a:fontRef idx="minor">
-            <a:schemeClr val="lt1"/>
-          </a:fontRef>
-        </p:style>
-        <p:txBody>
-          <a:bodyPr rtlCol="0" anchor="ctr"/>
-          <a:lstStyle/>
-          <a:p>
-            <a:pPr algn="ctr"/>
-          </a:p>
-        </p:txBody>
-      </p:sp>
-      <p:sp>
-        <p:nvSpPr>
-          <p:cNvPr id="18" name="Rectangle 17"/>
-          <p:cNvSpPr/>
-          <p:nvPr/>
-        </p:nvSpPr>
-        <p:spPr>
-          <a:xfrm>
-            <a:off x="8109508" y="1655064"/>
-            <a:ext cx="3624986" cy="27432"/>
-          </a:xfrm>
-          <a:prstGeom prst="rect">
-            <a:avLst/>
-          </a:prstGeom>
-          <a:solidFill>
-            <a:srgbClr val="FFD000"/>
-          </a:solidFill>
-          <a:ln>
-            <a:noFill/>
-          </a:ln>
-        </p:spPr>
-        <p:style>
-          <a:lnRef idx="1">
-            <a:schemeClr val="accent1"/>
-          </a:lnRef>
-          <a:fillRef idx="3">
-            <a:schemeClr val="accent1"/>
-          </a:fillRef>
-          <a:effectRef idx="2">
-            <a:schemeClr val="accent1"/>
-          </a:effectRef>
-          <a:fontRef idx="minor">
-            <a:schemeClr val="lt1"/>
-          </a:fontRef>
-        </p:style>
-        <p:txBody>
-          <a:bodyPr rtlCol="0" anchor="ctr"/>
-          <a:lstStyle/>
-          <a:p>
-            <a:pPr algn="ctr"/>
-          </a:p>
-        </p:txBody>
-      </p:sp>
-      <p:pic>
-        <p:nvPicPr>
-          <p:cNvPr id="19" name="Picture 18" descr="examlab.png"/>
-          <p:cNvPicPr>
-            <a:picLocks noChangeAspect="1"/>
-          </p:cNvPicPr>
-          <p:nvPr/>
-        </p:nvPicPr>
-        <p:blipFill>
-          <a:blip r:embed="rId4"/>
-          <a:stretch>
-            <a:fillRect/>
-          </a:stretch>
-        </p:blipFill>
-        <p:spPr>
-          <a:xfrm>
-            <a:off x="9295638" y="1847087"/>
-            <a:ext cx="1252728" cy="1252728"/>
-          </a:xfrm>
-          <a:prstGeom prst="rect">
-            <a:avLst/>
-          </a:prstGeom>
-        </p:spPr>
-      </p:pic>
-      <p:sp>
-        <p:nvSpPr>
-          <p:cNvPr id="20" name="TextBox 19"/>
-          <p:cNvSpPr txBox="1"/>
-          <p:nvPr/>
-        </p:nvSpPr>
-        <p:spPr>
-          <a:xfrm>
-            <a:off x="8182660" y="3191256"/>
-            <a:ext cx="3478682" cy="621792"/>
-          </a:xfrm>
-          <a:prstGeom prst="rect">
-            <a:avLst/>
-          </a:prstGeom>
-          <a:noFill/>
-        </p:spPr>
-        <p:txBody>
-          <a:bodyPr wrap="square" anchor="t"/>
-          <a:lstStyle/>
-          <a:p>
-            <a:pPr algn="ctr"/>
-            <a:r>
-              <a:rPr sz="1300" b="1" i="0">
-                <a:solidFill>
-                  <a:srgbClr val="095292"/>
-                </a:solidFill>
-                <a:latin typeface="Calibri"/>
-              </a:rPr>
-              <a:t>la plataforma del curso</a:t>
-            </a:r>
-          </a:p>
-          <a:p>
-            <a:pPr algn="ctr">
-              <a:spcBef>
-                <a:spcPts val="200"/>
-              </a:spcBef>
-            </a:pPr>
-            <a:r>
-              <a:rPr sz="1000" b="0" i="0">
-                <a:solidFill>
-                  <a:srgbClr val="666666"/>
-                </a:solidFill>
-                <a:latin typeface="Calibri"/>
-              </a:rPr>
-              <a:t>Entrega del taller · en la fecha que indique el docente</a:t>
-            </a:r>
-          </a:p>
-        </p:txBody>
-      </p:sp>
-      <p:sp>
-        <p:nvSpPr>
-          <p:cNvPr id="21" name="TextBox 20"/>
           <p:cNvSpPr txBox="1"/>
           <p:nvPr/>
         </p:nvSpPr>
@@ -5828,7 +5994,7 @@
                 </a:solidFill>
                 <a:latin typeface="Calibri"/>
               </a:rPr>
-              <a:t>Taller PI — por que importa</a:t>
+              <a:t>Demo del dia</a:t>
             </a:r>
           </a:p>
         </p:txBody>
@@ -5876,7 +6042,7 @@
                 </a:solidFill>
                 <a:latin typeface="Calibri"/>
               </a:rPr>
-              <a:t>Por que importa al PI:</a:t>
+              <a:t>Herramienta:</a:t>
             </a:r>
             <a:r>
               <a:rPr sz="2000" b="0" i="0">
@@ -5885,7 +6051,7 @@
                 </a:solidFill>
                 <a:latin typeface="Calibri"/>
               </a:rPr>
-              <a:t> los casos de uso son el puente entre lo que pidio la clinica Huellitas y lo que despues alguien va a programar; sin ellos, el equipo de Programacion II tiene que adivinar el comportamiento del sistema y siempre adivina distinto.</a:t>
+              <a:t> draw.io · Google Docs</a:t>
             </a:r>
           </a:p>
           <a:p>
@@ -5901,7 +6067,25 @@
                 </a:solidFill>
                 <a:latin typeface="Calibri"/>
               </a:rPr>
-              <a:t>–   El estudiante que solo cursa Seminario cierra el semestre con este paquete de especificaciones como pieza central de su documento de diseño, y por eso hoy se califica la escritura y no el dibujo.</a:t>
+              <a:t>–   </a:t>
+            </a:r>
+            <a:r>
+              <a:rPr sz="2000" b="1" i="0">
+                <a:solidFill>
+                  <a:srgbClr val="333333"/>
+                </a:solidFill>
+                <a:latin typeface="Calibri"/>
+              </a:rPr>
+              <a:t>Demo:</a:t>
+            </a:r>
+            <a:r>
+              <a:rPr sz="2000" b="0" i="0">
+                <a:solidFill>
+                  <a:srgbClr val="333333"/>
+                </a:solidFill>
+                <a:latin typeface="Calibri"/>
+              </a:rPr>
+              <a:t> El docente proyecta como un caso de uso mal escrito (Dar clic en guardar) se transforma en uno correcto (Registrar mascota) y luego llena en vivo, delante del grupo, la plantilla de especificacion de Buscar expediente.</a:t>
             </a:r>
           </a:p>
           <a:p>
@@ -5917,7 +6101,7 @@
                 </a:solidFill>
                 <a:latin typeface="Calibri"/>
               </a:rPr>
-              <a:t>–   Toda especificacion escrita hoy se convierte mañana en un caso de prueba: si una postcondicion no se puede ir a verificar en los datos, esta mal redactada.</a:t>
+              <a:t>–   Mismo dominio VetCare — no otro ejemplo. Aqui se diseña, no se programa.</a:t>
             </a:r>
           </a:p>
         </p:txBody>
@@ -5992,7 +6176,7 @@
         <p:spPr>
           <a:xfrm>
             <a:off x="0" y="0"/>
-            <a:ext cx="12191695" cy="960120"/>
+            <a:ext cx="12191695" cy="1170432"/>
           </a:xfrm>
           <a:prstGeom prst="rect">
             <a:avLst/>
@@ -6034,7 +6218,7 @@
         </p:nvSpPr>
         <p:spPr>
           <a:xfrm>
-            <a:off x="0" y="960120"/>
+            <a:off x="0" y="1170432"/>
             <a:ext cx="12191695" cy="41148"/>
           </a:xfrm>
           <a:prstGeom prst="rect">
@@ -6078,7 +6262,7 @@
         <p:spPr>
           <a:xfrm>
             <a:off x="457200" y="164592"/>
-            <a:ext cx="11277295" cy="502920"/>
+            <a:ext cx="11277295" cy="384048"/>
           </a:xfrm>
           <a:prstGeom prst="rect">
             <a:avLst/>
@@ -6098,7 +6282,7 @@
                 </a:solidFill>
                 <a:latin typeface="Calibri"/>
               </a:rPr>
-              <a:t>Taller PI — punto de partida</a:t>
+              <a:t>Herramientas de hoy</a:t>
             </a:r>
           </a:p>
         </p:txBody>
@@ -6111,8 +6295,8 @@
         </p:nvSpPr>
         <p:spPr>
           <a:xfrm>
-            <a:off x="457200" y="1170432"/>
-            <a:ext cx="11277295" cy="5230368"/>
+            <a:off x="457200" y="566928"/>
+            <a:ext cx="11277295" cy="411480"/>
           </a:xfrm>
           <a:prstGeom prst="rect">
             <a:avLst/>
@@ -6125,58 +6309,633 @@
           </a:bodyPr>
           <a:lstStyle/>
           <a:p>
-            <a:pPr>
-              <a:spcAft>
-                <a:spcPts val="800"/>
-              </a:spcAft>
+            <a:r>
+              <a:rPr sz="1400" b="0" i="0">
+                <a:solidFill>
+                  <a:srgbClr val="B8D8EE"/>
+                </a:solidFill>
+                <a:latin typeface="Calibri"/>
+              </a:rPr>
+              <a:t>Gratis · funcionan en el navegador</a:t>
+            </a:r>
+          </a:p>
+        </p:txBody>
+      </p:sp>
+      <p:sp>
+        <p:nvSpPr>
+          <p:cNvPr id="6" name="Rounded Rectangle 5"/>
+          <p:cNvSpPr/>
+          <p:nvPr/>
+        </p:nvSpPr>
+        <p:spPr>
+          <a:xfrm>
+            <a:off x="457200" y="1591056"/>
+            <a:ext cx="3624986" cy="2331720"/>
+          </a:xfrm>
+          <a:prstGeom prst="roundRect">
+            <a:avLst>
+              <a:gd name="adj" fmla="val 12000"/>
+            </a:avLst>
+          </a:prstGeom>
+          <a:solidFill>
+            <a:srgbClr val="F2F2F2"/>
+          </a:solidFill>
+          <a:ln>
+            <a:noFill/>
+          </a:ln>
+        </p:spPr>
+        <p:style>
+          <a:lnRef idx="1">
+            <a:schemeClr val="accent1"/>
+          </a:lnRef>
+          <a:fillRef idx="3">
+            <a:schemeClr val="accent1"/>
+          </a:fillRef>
+          <a:effectRef idx="2">
+            <a:schemeClr val="accent1"/>
+          </a:effectRef>
+          <a:fontRef idx="minor">
+            <a:schemeClr val="lt1"/>
+          </a:fontRef>
+        </p:style>
+        <p:txBody>
+          <a:bodyPr rtlCol="0" anchor="ctr"/>
+          <a:lstStyle/>
+          <a:p>
+            <a:pPr algn="ctr"/>
+          </a:p>
+        </p:txBody>
+      </p:sp>
+      <p:sp>
+        <p:nvSpPr>
+          <p:cNvPr id="7" name="Rectangle 6"/>
+          <p:cNvSpPr/>
+          <p:nvPr/>
+        </p:nvSpPr>
+        <p:spPr>
+          <a:xfrm>
+            <a:off x="457200" y="1591056"/>
+            <a:ext cx="3624986" cy="64008"/>
+          </a:xfrm>
+          <a:prstGeom prst="rect">
+            <a:avLst/>
+          </a:prstGeom>
+          <a:solidFill>
+            <a:srgbClr val="095292"/>
+          </a:solidFill>
+          <a:ln>
+            <a:noFill/>
+          </a:ln>
+        </p:spPr>
+        <p:style>
+          <a:lnRef idx="1">
+            <a:schemeClr val="accent1"/>
+          </a:lnRef>
+          <a:fillRef idx="3">
+            <a:schemeClr val="accent1"/>
+          </a:fillRef>
+          <a:effectRef idx="2">
+            <a:schemeClr val="accent1"/>
+          </a:effectRef>
+          <a:fontRef idx="minor">
+            <a:schemeClr val="lt1"/>
+          </a:fontRef>
+        </p:style>
+        <p:txBody>
+          <a:bodyPr rtlCol="0" anchor="ctr"/>
+          <a:lstStyle/>
+          <a:p>
+            <a:pPr algn="ctr"/>
+          </a:p>
+        </p:txBody>
+      </p:sp>
+      <p:sp>
+        <p:nvSpPr>
+          <p:cNvPr id="8" name="Rectangle 7"/>
+          <p:cNvSpPr/>
+          <p:nvPr/>
+        </p:nvSpPr>
+        <p:spPr>
+          <a:xfrm>
+            <a:off x="457200" y="1655064"/>
+            <a:ext cx="3624986" cy="27432"/>
+          </a:xfrm>
+          <a:prstGeom prst="rect">
+            <a:avLst/>
+          </a:prstGeom>
+          <a:solidFill>
+            <a:srgbClr val="FFD000"/>
+          </a:solidFill>
+          <a:ln>
+            <a:noFill/>
+          </a:ln>
+        </p:spPr>
+        <p:style>
+          <a:lnRef idx="1">
+            <a:schemeClr val="accent1"/>
+          </a:lnRef>
+          <a:fillRef idx="3">
+            <a:schemeClr val="accent1"/>
+          </a:fillRef>
+          <a:effectRef idx="2">
+            <a:schemeClr val="accent1"/>
+          </a:effectRef>
+          <a:fontRef idx="minor">
+            <a:schemeClr val="lt1"/>
+          </a:fontRef>
+        </p:style>
+        <p:txBody>
+          <a:bodyPr rtlCol="0" anchor="ctr"/>
+          <a:lstStyle/>
+          <a:p>
+            <a:pPr algn="ctr"/>
+          </a:p>
+        </p:txBody>
+      </p:sp>
+      <p:pic>
+        <p:nvPicPr>
+          <p:cNvPr id="9" name="Picture 8" descr="drawio.png"/>
+          <p:cNvPicPr>
+            <a:picLocks noChangeAspect="1"/>
+          </p:cNvPicPr>
+          <p:nvPr/>
+        </p:nvPicPr>
+        <p:blipFill>
+          <a:blip r:embed="rId2"/>
+          <a:stretch>
+            <a:fillRect/>
+          </a:stretch>
+        </p:blipFill>
+        <p:spPr>
+          <a:xfrm>
+            <a:off x="1643329" y="1847087"/>
+            <a:ext cx="1252728" cy="1252728"/>
+          </a:xfrm>
+          <a:prstGeom prst="rect">
+            <a:avLst/>
+          </a:prstGeom>
+        </p:spPr>
+      </p:pic>
+      <p:sp>
+        <p:nvSpPr>
+          <p:cNvPr id="10" name="TextBox 9"/>
+          <p:cNvSpPr txBox="1"/>
+          <p:nvPr/>
+        </p:nvSpPr>
+        <p:spPr>
+          <a:xfrm>
+            <a:off x="530352" y="3191256"/>
+            <a:ext cx="3478682" cy="621792"/>
+          </a:xfrm>
+          <a:prstGeom prst="rect">
+            <a:avLst/>
+          </a:prstGeom>
+          <a:noFill/>
+        </p:spPr>
+        <p:txBody>
+          <a:bodyPr wrap="square" anchor="t"/>
+          <a:lstStyle/>
+          <a:p>
+            <a:pPr algn="ctr"/>
+            <a:r>
+              <a:rPr sz="1300" b="1" i="0">
+                <a:solidFill>
+                  <a:srgbClr val="095292"/>
+                </a:solidFill>
+                <a:latin typeface="Calibri"/>
+              </a:rPr>
+              <a:t>Draw.Io</a:t>
+            </a:r>
+          </a:p>
+          <a:p>
+            <a:pPr algn="ctr">
+              <a:spcBef>
+                <a:spcPts val="200"/>
+              </a:spcBef>
             </a:pPr>
             <a:r>
-              <a:rPr sz="2000" b="0" i="0">
-                <a:solidFill>
-                  <a:srgbClr val="333333"/>
-                </a:solidFill>
-                <a:latin typeface="Calibri"/>
-              </a:rPr>
-              <a:t>–   Ya existe el catalogo de RF y RNF de VetCare, pero esta redactado como lista de deseos y nadie sabe en que orden ocurren las cosas ni que pasa cuando algo sale mal.</a:t>
-            </a:r>
-          </a:p>
-          <a:p>
-            <a:pPr>
-              <a:spcAft>
-                <a:spcPts val="800"/>
-              </a:spcAft>
+              <a:rPr sz="1000" b="0" i="0">
+                <a:solidFill>
+                  <a:srgbClr val="666666"/>
+                </a:solidFill>
+                <a:latin typeface="Calibri"/>
+              </a:rPr>
+              <a:t>Diagramas UML y de contexto</a:t>
+            </a:r>
+          </a:p>
+        </p:txBody>
+      </p:sp>
+      <p:sp>
+        <p:nvSpPr>
+          <p:cNvPr id="11" name="Rounded Rectangle 10"/>
+          <p:cNvSpPr/>
+          <p:nvPr/>
+        </p:nvSpPr>
+        <p:spPr>
+          <a:xfrm>
+            <a:off x="4283354" y="1591056"/>
+            <a:ext cx="3624986" cy="2331720"/>
+          </a:xfrm>
+          <a:prstGeom prst="roundRect">
+            <a:avLst>
+              <a:gd name="adj" fmla="val 12000"/>
+            </a:avLst>
+          </a:prstGeom>
+          <a:solidFill>
+            <a:srgbClr val="F2F2F2"/>
+          </a:solidFill>
+          <a:ln>
+            <a:noFill/>
+          </a:ln>
+        </p:spPr>
+        <p:style>
+          <a:lnRef idx="1">
+            <a:schemeClr val="accent1"/>
+          </a:lnRef>
+          <a:fillRef idx="3">
+            <a:schemeClr val="accent1"/>
+          </a:fillRef>
+          <a:effectRef idx="2">
+            <a:schemeClr val="accent1"/>
+          </a:effectRef>
+          <a:fontRef idx="minor">
+            <a:schemeClr val="lt1"/>
+          </a:fontRef>
+        </p:style>
+        <p:txBody>
+          <a:bodyPr rtlCol="0" anchor="ctr"/>
+          <a:lstStyle/>
+          <a:p>
+            <a:pPr algn="ctr"/>
+          </a:p>
+        </p:txBody>
+      </p:sp>
+      <p:sp>
+        <p:nvSpPr>
+          <p:cNvPr id="12" name="Rectangle 11"/>
+          <p:cNvSpPr/>
+          <p:nvPr/>
+        </p:nvSpPr>
+        <p:spPr>
+          <a:xfrm>
+            <a:off x="4283354" y="1591056"/>
+            <a:ext cx="3624986" cy="64008"/>
+          </a:xfrm>
+          <a:prstGeom prst="rect">
+            <a:avLst/>
+          </a:prstGeom>
+          <a:solidFill>
+            <a:srgbClr val="095292"/>
+          </a:solidFill>
+          <a:ln>
+            <a:noFill/>
+          </a:ln>
+        </p:spPr>
+        <p:style>
+          <a:lnRef idx="1">
+            <a:schemeClr val="accent1"/>
+          </a:lnRef>
+          <a:fillRef idx="3">
+            <a:schemeClr val="accent1"/>
+          </a:fillRef>
+          <a:effectRef idx="2">
+            <a:schemeClr val="accent1"/>
+          </a:effectRef>
+          <a:fontRef idx="minor">
+            <a:schemeClr val="lt1"/>
+          </a:fontRef>
+        </p:style>
+        <p:txBody>
+          <a:bodyPr rtlCol="0" anchor="ctr"/>
+          <a:lstStyle/>
+          <a:p>
+            <a:pPr algn="ctr"/>
+          </a:p>
+        </p:txBody>
+      </p:sp>
+      <p:sp>
+        <p:nvSpPr>
+          <p:cNvPr id="13" name="Rectangle 12"/>
+          <p:cNvSpPr/>
+          <p:nvPr/>
+        </p:nvSpPr>
+        <p:spPr>
+          <a:xfrm>
+            <a:off x="4283354" y="1655064"/>
+            <a:ext cx="3624986" cy="27432"/>
+          </a:xfrm>
+          <a:prstGeom prst="rect">
+            <a:avLst/>
+          </a:prstGeom>
+          <a:solidFill>
+            <a:srgbClr val="FFD000"/>
+          </a:solidFill>
+          <a:ln>
+            <a:noFill/>
+          </a:ln>
+        </p:spPr>
+        <p:style>
+          <a:lnRef idx="1">
+            <a:schemeClr val="accent1"/>
+          </a:lnRef>
+          <a:fillRef idx="3">
+            <a:schemeClr val="accent1"/>
+          </a:fillRef>
+          <a:effectRef idx="2">
+            <a:schemeClr val="accent1"/>
+          </a:effectRef>
+          <a:fontRef idx="minor">
+            <a:schemeClr val="lt1"/>
+          </a:fontRef>
+        </p:style>
+        <p:txBody>
+          <a:bodyPr rtlCol="0" anchor="ctr"/>
+          <a:lstStyle/>
+          <a:p>
+            <a:pPr algn="ctr"/>
+          </a:p>
+        </p:txBody>
+      </p:sp>
+      <p:pic>
+        <p:nvPicPr>
+          <p:cNvPr id="14" name="Picture 13" descr="google_docs.png"/>
+          <p:cNvPicPr>
+            <a:picLocks noChangeAspect="1"/>
+          </p:cNvPicPr>
+          <p:nvPr/>
+        </p:nvPicPr>
+        <p:blipFill>
+          <a:blip r:embed="rId3"/>
+          <a:stretch>
+            <a:fillRect/>
+          </a:stretch>
+        </p:blipFill>
+        <p:spPr>
+          <a:xfrm>
+            <a:off x="5469483" y="1847087"/>
+            <a:ext cx="1252728" cy="1252728"/>
+          </a:xfrm>
+          <a:prstGeom prst="rect">
+            <a:avLst/>
+          </a:prstGeom>
+        </p:spPr>
+      </p:pic>
+      <p:sp>
+        <p:nvSpPr>
+          <p:cNvPr id="15" name="TextBox 14"/>
+          <p:cNvSpPr txBox="1"/>
+          <p:nvPr/>
+        </p:nvSpPr>
+        <p:spPr>
+          <a:xfrm>
+            <a:off x="4356506" y="3191256"/>
+            <a:ext cx="3478682" cy="621792"/>
+          </a:xfrm>
+          <a:prstGeom prst="rect">
+            <a:avLst/>
+          </a:prstGeom>
+          <a:noFill/>
+        </p:spPr>
+        <p:txBody>
+          <a:bodyPr wrap="square" anchor="t"/>
+          <a:lstStyle/>
+          <a:p>
+            <a:pPr algn="ctr"/>
+            <a:r>
+              <a:rPr sz="1300" b="1" i="0">
+                <a:solidFill>
+                  <a:srgbClr val="095292"/>
+                </a:solidFill>
+                <a:latin typeface="Calibri"/>
+              </a:rPr>
+              <a:t>google docs</a:t>
+            </a:r>
+          </a:p>
+          <a:p>
+            <a:pPr algn="ctr">
+              <a:spcBef>
+                <a:spcPts val="200"/>
+              </a:spcBef>
             </a:pPr>
             <a:r>
-              <a:rPr sz="2000" b="0" i="0">
-                <a:solidFill>
-                  <a:srgbClr val="333333"/>
-                </a:solidFill>
-                <a:latin typeface="Calibri"/>
-              </a:rPr>
-              <a:t>–   La recepcionista de Huellitas describe su trabajo con frases sueltas: busco la carpeta, si no aparece le pregunto al veterinario, si el propietario es nuevo lleno una hoja aparte y la engrapo.</a:t>
-            </a:r>
-          </a:p>
-          <a:p>
-            <a:pPr>
-              <a:spcAft>
-                <a:spcPts val="800"/>
-              </a:spcAft>
+              <a:rPr sz="1000" b="0" i="0">
+                <a:solidFill>
+                  <a:srgbClr val="666666"/>
+                </a:solidFill>
+                <a:latin typeface="Calibri"/>
+              </a:rPr>
+              <a:t>Documentos del paquete de diseño</a:t>
+            </a:r>
+          </a:p>
+        </p:txBody>
+      </p:sp>
+      <p:sp>
+        <p:nvSpPr>
+          <p:cNvPr id="16" name="Rounded Rectangle 15"/>
+          <p:cNvSpPr/>
+          <p:nvPr/>
+        </p:nvSpPr>
+        <p:spPr>
+          <a:xfrm>
+            <a:off x="8109508" y="1591056"/>
+            <a:ext cx="3624986" cy="2331720"/>
+          </a:xfrm>
+          <a:prstGeom prst="roundRect">
+            <a:avLst>
+              <a:gd name="adj" fmla="val 12000"/>
+            </a:avLst>
+          </a:prstGeom>
+          <a:solidFill>
+            <a:srgbClr val="F2F2F2"/>
+          </a:solidFill>
+          <a:ln>
+            <a:noFill/>
+          </a:ln>
+        </p:spPr>
+        <p:style>
+          <a:lnRef idx="1">
+            <a:schemeClr val="accent1"/>
+          </a:lnRef>
+          <a:fillRef idx="3">
+            <a:schemeClr val="accent1"/>
+          </a:fillRef>
+          <a:effectRef idx="2">
+            <a:schemeClr val="accent1"/>
+          </a:effectRef>
+          <a:fontRef idx="minor">
+            <a:schemeClr val="lt1"/>
+          </a:fontRef>
+        </p:style>
+        <p:txBody>
+          <a:bodyPr rtlCol="0" anchor="ctr"/>
+          <a:lstStyle/>
+          <a:p>
+            <a:pPr algn="ctr"/>
+          </a:p>
+        </p:txBody>
+      </p:sp>
+      <p:sp>
+        <p:nvSpPr>
+          <p:cNvPr id="17" name="Rectangle 16"/>
+          <p:cNvSpPr/>
+          <p:nvPr/>
+        </p:nvSpPr>
+        <p:spPr>
+          <a:xfrm>
+            <a:off x="8109508" y="1591056"/>
+            <a:ext cx="3624986" cy="64008"/>
+          </a:xfrm>
+          <a:prstGeom prst="rect">
+            <a:avLst/>
+          </a:prstGeom>
+          <a:solidFill>
+            <a:srgbClr val="095292"/>
+          </a:solidFill>
+          <a:ln>
+            <a:noFill/>
+          </a:ln>
+        </p:spPr>
+        <p:style>
+          <a:lnRef idx="1">
+            <a:schemeClr val="accent1"/>
+          </a:lnRef>
+          <a:fillRef idx="3">
+            <a:schemeClr val="accent1"/>
+          </a:fillRef>
+          <a:effectRef idx="2">
+            <a:schemeClr val="accent1"/>
+          </a:effectRef>
+          <a:fontRef idx="minor">
+            <a:schemeClr val="lt1"/>
+          </a:fontRef>
+        </p:style>
+        <p:txBody>
+          <a:bodyPr rtlCol="0" anchor="ctr"/>
+          <a:lstStyle/>
+          <a:p>
+            <a:pPr algn="ctr"/>
+          </a:p>
+        </p:txBody>
+      </p:sp>
+      <p:sp>
+        <p:nvSpPr>
+          <p:cNvPr id="18" name="Rectangle 17"/>
+          <p:cNvSpPr/>
+          <p:nvPr/>
+        </p:nvSpPr>
+        <p:spPr>
+          <a:xfrm>
+            <a:off x="8109508" y="1655064"/>
+            <a:ext cx="3624986" cy="27432"/>
+          </a:xfrm>
+          <a:prstGeom prst="rect">
+            <a:avLst/>
+          </a:prstGeom>
+          <a:solidFill>
+            <a:srgbClr val="FFD000"/>
+          </a:solidFill>
+          <a:ln>
+            <a:noFill/>
+          </a:ln>
+        </p:spPr>
+        <p:style>
+          <a:lnRef idx="1">
+            <a:schemeClr val="accent1"/>
+          </a:lnRef>
+          <a:fillRef idx="3">
+            <a:schemeClr val="accent1"/>
+          </a:fillRef>
+          <a:effectRef idx="2">
+            <a:schemeClr val="accent1"/>
+          </a:effectRef>
+          <a:fontRef idx="minor">
+            <a:schemeClr val="lt1"/>
+          </a:fontRef>
+        </p:style>
+        <p:txBody>
+          <a:bodyPr rtlCol="0" anchor="ctr"/>
+          <a:lstStyle/>
+          <a:p>
+            <a:pPr algn="ctr"/>
+          </a:p>
+        </p:txBody>
+      </p:sp>
+      <p:pic>
+        <p:nvPicPr>
+          <p:cNvPr id="19" name="Picture 18" descr="examlab.png"/>
+          <p:cNvPicPr>
+            <a:picLocks noChangeAspect="1"/>
+          </p:cNvPicPr>
+          <p:nvPr/>
+        </p:nvPicPr>
+        <p:blipFill>
+          <a:blip r:embed="rId4"/>
+          <a:stretch>
+            <a:fillRect/>
+          </a:stretch>
+        </p:blipFill>
+        <p:spPr>
+          <a:xfrm>
+            <a:off x="9295638" y="1847087"/>
+            <a:ext cx="1252728" cy="1252728"/>
+          </a:xfrm>
+          <a:prstGeom prst="rect">
+            <a:avLst/>
+          </a:prstGeom>
+        </p:spPr>
+      </p:pic>
+      <p:sp>
+        <p:nvSpPr>
+          <p:cNvPr id="20" name="TextBox 19"/>
+          <p:cNvSpPr txBox="1"/>
+          <p:nvPr/>
+        </p:nvSpPr>
+        <p:spPr>
+          <a:xfrm>
+            <a:off x="8182660" y="3191256"/>
+            <a:ext cx="3478682" cy="621792"/>
+          </a:xfrm>
+          <a:prstGeom prst="rect">
+            <a:avLst/>
+          </a:prstGeom>
+          <a:noFill/>
+        </p:spPr>
+        <p:txBody>
+          <a:bodyPr wrap="square" anchor="t"/>
+          <a:lstStyle/>
+          <a:p>
+            <a:pPr algn="ctr"/>
+            <a:r>
+              <a:rPr sz="1300" b="1" i="0">
+                <a:solidFill>
+                  <a:srgbClr val="095292"/>
+                </a:solidFill>
+                <a:latin typeface="Calibri"/>
+              </a:rPr>
+              <a:t>la plataforma del curso</a:t>
+            </a:r>
+          </a:p>
+          <a:p>
+            <a:pPr algn="ctr">
+              <a:spcBef>
+                <a:spcPts val="200"/>
+              </a:spcBef>
             </a:pPr>
             <a:r>
-              <a:rPr sz="2000" b="0" i="0">
-                <a:solidFill>
-                  <a:srgbClr val="333333"/>
-                </a:solidFill>
-                <a:latin typeface="Calibri"/>
-              </a:rPr>
-              <a:t>–   El equipo tiene draw.io abierto y la tentacion de dibujar veinte monigotes antes de escribir una sola linea de comportamiento.</a:t>
-            </a:r>
-          </a:p>
-        </p:txBody>
-      </p:sp>
-      <p:sp>
-        <p:nvSpPr>
-          <p:cNvPr id="6" name="TextBox 5"/>
+              <a:rPr sz="1000" b="0" i="0">
+                <a:solidFill>
+                  <a:srgbClr val="666666"/>
+                </a:solidFill>
+                <a:latin typeface="Calibri"/>
+              </a:rPr>
+              <a:t>Entrega del taller · en la fecha que indique el docente</a:t>
+            </a:r>
+          </a:p>
+        </p:txBody>
+      </p:sp>
+      <p:sp>
+        <p:nvSpPr>
+          <p:cNvPr id="21" name="TextBox 20"/>
           <p:cNvSpPr txBox="1"/>
           <p:nvPr/>
         </p:nvSpPr>
@@ -6350,111 +7109,21 @@
                 </a:solidFill>
                 <a:latin typeface="Calibri"/>
               </a:rPr>
-              <a:t>Taller PI — pasos guiados</a:t>
-            </a:r>
-          </a:p>
-        </p:txBody>
-      </p:sp>
-      <p:sp>
-        <p:nvSpPr>
-          <p:cNvPr id="5" name="Rounded Rectangle 4"/>
-          <p:cNvSpPr/>
-          <p:nvPr/>
-        </p:nvSpPr>
-        <p:spPr>
-          <a:xfrm>
-            <a:off x="457200" y="1234440"/>
-            <a:ext cx="11277295" cy="950976"/>
-          </a:xfrm>
-          <a:prstGeom prst="roundRect">
-            <a:avLst>
-              <a:gd name="adj" fmla="val 12000"/>
-            </a:avLst>
-          </a:prstGeom>
-          <a:solidFill>
-            <a:srgbClr val="F2F2F2"/>
-          </a:solidFill>
-          <a:ln>
-            <a:noFill/>
-          </a:ln>
-        </p:spPr>
-        <p:style>
-          <a:lnRef idx="1">
-            <a:schemeClr val="accent1"/>
-          </a:lnRef>
-          <a:fillRef idx="3">
-            <a:schemeClr val="accent1"/>
-          </a:fillRef>
-          <a:effectRef idx="2">
-            <a:schemeClr val="accent1"/>
-          </a:effectRef>
-          <a:fontRef idx="minor">
-            <a:schemeClr val="lt1"/>
-          </a:fontRef>
-        </p:style>
-        <p:txBody>
-          <a:bodyPr rtlCol="0" anchor="ctr"/>
-          <a:lstStyle/>
-          <a:p>
-            <a:pPr algn="ctr"/>
-          </a:p>
-        </p:txBody>
-      </p:sp>
-      <p:sp>
-        <p:nvSpPr>
-          <p:cNvPr id="6" name="Rounded Rectangle 5"/>
-          <p:cNvSpPr/>
-          <p:nvPr/>
-        </p:nvSpPr>
-        <p:spPr>
-          <a:xfrm>
-            <a:off x="594360" y="1490472"/>
-            <a:ext cx="438912" cy="438912"/>
-          </a:xfrm>
-          <a:prstGeom prst="roundRect">
-            <a:avLst>
-              <a:gd name="adj" fmla="val 12000"/>
-            </a:avLst>
-          </a:prstGeom>
-          <a:solidFill>
-            <a:srgbClr val="095292"/>
-          </a:solidFill>
-          <a:ln>
-            <a:noFill/>
-          </a:ln>
-        </p:spPr>
-        <p:style>
-          <a:lnRef idx="1">
-            <a:schemeClr val="accent1"/>
-          </a:lnRef>
-          <a:fillRef idx="3">
-            <a:schemeClr val="accent1"/>
-          </a:fillRef>
-          <a:effectRef idx="2">
-            <a:schemeClr val="accent1"/>
-          </a:effectRef>
-          <a:fontRef idx="minor">
-            <a:schemeClr val="lt1"/>
-          </a:fontRef>
-        </p:style>
-        <p:txBody>
-          <a:bodyPr rtlCol="0" anchor="ctr"/>
-          <a:lstStyle/>
-          <a:p>
-            <a:pPr algn="ctr"/>
-          </a:p>
-        </p:txBody>
-      </p:sp>
-      <p:sp>
-        <p:nvSpPr>
-          <p:cNvPr id="7" name="TextBox 6"/>
+              <a:t>Taller PI — por que importa</a:t>
+            </a:r>
+          </a:p>
+        </p:txBody>
+      </p:sp>
+      <p:sp>
+        <p:nvSpPr>
+          <p:cNvPr id="5" name="TextBox 4"/>
           <p:cNvSpPr txBox="1"/>
           <p:nvPr/>
         </p:nvSpPr>
         <p:spPr>
           <a:xfrm>
-            <a:off x="594360" y="1490472"/>
-            <a:ext cx="438912" cy="438912"/>
+            <a:off x="457200" y="1170432"/>
+            <a:ext cx="11277295" cy="5230368"/>
           </a:xfrm>
           <a:prstGeom prst="rect">
             <a:avLst/>
@@ -6462,677 +7131,81 @@
           <a:noFill/>
         </p:spPr>
         <p:txBody>
-          <a:bodyPr wrap="square" anchor="ctr"/>
-          <a:lstStyle/>
-          <a:p>
-            <a:pPr algn="ctr"/>
-            <a:r>
-              <a:rPr sz="1600" b="1" i="0">
-                <a:solidFill>
-                  <a:srgbClr val="FFFFFF"/>
-                </a:solidFill>
-                <a:latin typeface="Calibri"/>
-              </a:rPr>
-              <a:t>1</a:t>
-            </a:r>
-          </a:p>
-        </p:txBody>
-      </p:sp>
-      <p:sp>
-        <p:nvSpPr>
-          <p:cNvPr id="8" name="TextBox 7"/>
-          <p:cNvSpPr txBox="1"/>
-          <p:nvPr/>
-        </p:nvSpPr>
-        <p:spPr>
-          <a:xfrm>
-            <a:off x="1188720" y="1325880"/>
-            <a:ext cx="10271455" cy="786384"/>
-          </a:xfrm>
-          <a:prstGeom prst="rect">
-            <a:avLst/>
-          </a:prstGeom>
-          <a:noFill/>
-        </p:spPr>
-        <p:txBody>
-          <a:bodyPr wrap="square" anchor="ctr"/>
-          <a:lstStyle/>
-          <a:p>
-            <a:r>
-              <a:rPr sz="1400" b="1" i="0">
-                <a:solidFill>
-                  <a:srgbClr val="095292"/>
-                </a:solidFill>
-                <a:latin typeface="Calibri"/>
-              </a:rPr>
-              <a:t>En draw.io, dibujar el limite del sistema rotulado VetCare y ubicar afuera los actores como roles (Recepcionista, Veterinario, Administrador y el servicio externo de mensajeria como actor secundario candidato, que hoy todavia no se conecta a ningun caso de uso); ningun actor puede llamarse con nombre propio ni con cargo inventado.</a:t>
-            </a:r>
-          </a:p>
-        </p:txBody>
-      </p:sp>
-      <p:sp>
-        <p:nvSpPr>
-          <p:cNvPr id="9" name="Rounded Rectangle 8"/>
-          <p:cNvSpPr/>
-          <p:nvPr/>
-        </p:nvSpPr>
-        <p:spPr>
-          <a:xfrm>
-            <a:off x="457200" y="2276856"/>
-            <a:ext cx="11277295" cy="950976"/>
-          </a:xfrm>
-          <a:prstGeom prst="roundRect">
-            <a:avLst>
-              <a:gd name="adj" fmla="val 12000"/>
-            </a:avLst>
-          </a:prstGeom>
-          <a:solidFill>
-            <a:srgbClr val="E8F4FA"/>
-          </a:solidFill>
-          <a:ln>
-            <a:noFill/>
-          </a:ln>
-        </p:spPr>
-        <p:style>
-          <a:lnRef idx="1">
-            <a:schemeClr val="accent1"/>
-          </a:lnRef>
-          <a:fillRef idx="3">
-            <a:schemeClr val="accent1"/>
-          </a:fillRef>
-          <a:effectRef idx="2">
-            <a:schemeClr val="accent1"/>
-          </a:effectRef>
-          <a:fontRef idx="minor">
-            <a:schemeClr val="lt1"/>
-          </a:fontRef>
-        </p:style>
-        <p:txBody>
-          <a:bodyPr rtlCol="0" anchor="ctr"/>
-          <a:lstStyle/>
-          <a:p>
-            <a:pPr algn="ctr"/>
-          </a:p>
-        </p:txBody>
-      </p:sp>
-      <p:sp>
-        <p:nvSpPr>
-          <p:cNvPr id="10" name="Rounded Rectangle 9"/>
-          <p:cNvSpPr/>
-          <p:nvPr/>
-        </p:nvSpPr>
-        <p:spPr>
-          <a:xfrm>
-            <a:off x="594360" y="2532888"/>
-            <a:ext cx="438912" cy="438912"/>
-          </a:xfrm>
-          <a:prstGeom prst="roundRect">
-            <a:avLst>
-              <a:gd name="adj" fmla="val 12000"/>
-            </a:avLst>
-          </a:prstGeom>
-          <a:solidFill>
-            <a:srgbClr val="095292"/>
-          </a:solidFill>
-          <a:ln>
-            <a:noFill/>
-          </a:ln>
-        </p:spPr>
-        <p:style>
-          <a:lnRef idx="1">
-            <a:schemeClr val="accent1"/>
-          </a:lnRef>
-          <a:fillRef idx="3">
-            <a:schemeClr val="accent1"/>
-          </a:fillRef>
-          <a:effectRef idx="2">
-            <a:schemeClr val="accent1"/>
-          </a:effectRef>
-          <a:fontRef idx="minor">
-            <a:schemeClr val="lt1"/>
-          </a:fontRef>
-        </p:style>
-        <p:txBody>
-          <a:bodyPr rtlCol="0" anchor="ctr"/>
-          <a:lstStyle/>
-          <a:p>
-            <a:pPr algn="ctr"/>
-          </a:p>
-        </p:txBody>
-      </p:sp>
-      <p:sp>
-        <p:nvSpPr>
-          <p:cNvPr id="11" name="TextBox 10"/>
-          <p:cNvSpPr txBox="1"/>
-          <p:nvPr/>
-        </p:nvSpPr>
-        <p:spPr>
-          <a:xfrm>
-            <a:off x="594360" y="2532888"/>
-            <a:ext cx="438912" cy="438912"/>
-          </a:xfrm>
-          <a:prstGeom prst="rect">
-            <a:avLst/>
-          </a:prstGeom>
-          <a:noFill/>
-        </p:spPr>
-        <p:txBody>
-          <a:bodyPr wrap="square" anchor="ctr"/>
-          <a:lstStyle/>
-          <a:p>
-            <a:pPr algn="ctr"/>
-            <a:r>
-              <a:rPr sz="1600" b="1" i="0">
-                <a:solidFill>
-                  <a:srgbClr val="FFFFFF"/>
-                </a:solidFill>
-                <a:latin typeface="Calibri"/>
-              </a:rPr>
-              <a:t>2</a:t>
-            </a:r>
-          </a:p>
-        </p:txBody>
-      </p:sp>
-      <p:sp>
-        <p:nvSpPr>
-          <p:cNvPr id="12" name="TextBox 11"/>
-          <p:cNvSpPr txBox="1"/>
-          <p:nvPr/>
-        </p:nvSpPr>
-        <p:spPr>
-          <a:xfrm>
-            <a:off x="1188720" y="2368296"/>
-            <a:ext cx="10271455" cy="786384"/>
-          </a:xfrm>
-          <a:prstGeom prst="rect">
-            <a:avLst/>
-          </a:prstGeom>
-          <a:noFill/>
-        </p:spPr>
-        <p:txBody>
-          <a:bodyPr wrap="square" anchor="ctr"/>
-          <a:lstStyle/>
-          <a:p>
-            <a:r>
-              <a:rPr sz="1400" b="1" i="0">
-                <a:solidFill>
-                  <a:srgbClr val="095292"/>
-                </a:solidFill>
-                <a:latin typeface="Calibri"/>
-              </a:rPr>
-              <a:t>Colocar dentro del limite entre seis y ocho casos de uso derivados del catalogo de RF ya construido, todos redactados como verbo en infinitivo mas objeto del dominio, y borrar de inmediato cualquier elipse que se llame Guardar, Validar, Mostrar o Iniciar pantalla.</a:t>
-            </a:r>
-          </a:p>
-        </p:txBody>
-      </p:sp>
-      <p:sp>
-        <p:nvSpPr>
-          <p:cNvPr id="13" name="Rounded Rectangle 12"/>
-          <p:cNvSpPr/>
-          <p:nvPr/>
-        </p:nvSpPr>
-        <p:spPr>
-          <a:xfrm>
-            <a:off x="457200" y="3319272"/>
-            <a:ext cx="11277295" cy="950976"/>
-          </a:xfrm>
-          <a:prstGeom prst="roundRect">
-            <a:avLst>
-              <a:gd name="adj" fmla="val 12000"/>
-            </a:avLst>
-          </a:prstGeom>
-          <a:solidFill>
-            <a:srgbClr val="F2F2F2"/>
-          </a:solidFill>
-          <a:ln>
-            <a:noFill/>
-          </a:ln>
-        </p:spPr>
-        <p:style>
-          <a:lnRef idx="1">
-            <a:schemeClr val="accent1"/>
-          </a:lnRef>
-          <a:fillRef idx="3">
-            <a:schemeClr val="accent1"/>
-          </a:fillRef>
-          <a:effectRef idx="2">
-            <a:schemeClr val="accent1"/>
-          </a:effectRef>
-          <a:fontRef idx="minor">
-            <a:schemeClr val="lt1"/>
-          </a:fontRef>
-        </p:style>
-        <p:txBody>
-          <a:bodyPr rtlCol="0" anchor="ctr"/>
-          <a:lstStyle/>
-          <a:p>
-            <a:pPr algn="ctr"/>
-          </a:p>
-        </p:txBody>
-      </p:sp>
-      <p:sp>
-        <p:nvSpPr>
-          <p:cNvPr id="14" name="Rounded Rectangle 13"/>
-          <p:cNvSpPr/>
-          <p:nvPr/>
-        </p:nvSpPr>
-        <p:spPr>
-          <a:xfrm>
-            <a:off x="594360" y="3575304"/>
-            <a:ext cx="438912" cy="438912"/>
-          </a:xfrm>
-          <a:prstGeom prst="roundRect">
-            <a:avLst>
-              <a:gd name="adj" fmla="val 12000"/>
-            </a:avLst>
-          </a:prstGeom>
-          <a:solidFill>
-            <a:srgbClr val="095292"/>
-          </a:solidFill>
-          <a:ln>
-            <a:noFill/>
-          </a:ln>
-        </p:spPr>
-        <p:style>
-          <a:lnRef idx="1">
-            <a:schemeClr val="accent1"/>
-          </a:lnRef>
-          <a:fillRef idx="3">
-            <a:schemeClr val="accent1"/>
-          </a:fillRef>
-          <a:effectRef idx="2">
-            <a:schemeClr val="accent1"/>
-          </a:effectRef>
-          <a:fontRef idx="minor">
-            <a:schemeClr val="lt1"/>
-          </a:fontRef>
-        </p:style>
-        <p:txBody>
-          <a:bodyPr rtlCol="0" anchor="ctr"/>
-          <a:lstStyle/>
-          <a:p>
-            <a:pPr algn="ctr"/>
-          </a:p>
-        </p:txBody>
-      </p:sp>
-      <p:sp>
-        <p:nvSpPr>
-          <p:cNvPr id="15" name="TextBox 14"/>
-          <p:cNvSpPr txBox="1"/>
-          <p:nvPr/>
-        </p:nvSpPr>
-        <p:spPr>
-          <a:xfrm>
-            <a:off x="594360" y="3575304"/>
-            <a:ext cx="438912" cy="438912"/>
-          </a:xfrm>
-          <a:prstGeom prst="rect">
-            <a:avLst/>
-          </a:prstGeom>
-          <a:noFill/>
-        </p:spPr>
-        <p:txBody>
-          <a:bodyPr wrap="square" anchor="ctr"/>
-          <a:lstStyle/>
-          <a:p>
-            <a:pPr algn="ctr"/>
-            <a:r>
-              <a:rPr sz="1600" b="1" i="0">
-                <a:solidFill>
-                  <a:srgbClr val="FFFFFF"/>
-                </a:solidFill>
-                <a:latin typeface="Calibri"/>
-              </a:rPr>
-              <a:t>3</a:t>
-            </a:r>
-          </a:p>
-        </p:txBody>
-      </p:sp>
-      <p:sp>
-        <p:nvSpPr>
-          <p:cNvPr id="16" name="TextBox 15"/>
-          <p:cNvSpPr txBox="1"/>
-          <p:nvPr/>
-        </p:nvSpPr>
-        <p:spPr>
-          <a:xfrm>
-            <a:off x="1188720" y="3410712"/>
-            <a:ext cx="10271455" cy="786384"/>
-          </a:xfrm>
-          <a:prstGeom prst="rect">
-            <a:avLst/>
-          </a:prstGeom>
-          <a:noFill/>
-        </p:spPr>
-        <p:txBody>
-          <a:bodyPr wrap="square" anchor="ctr"/>
-          <a:lstStyle/>
-          <a:p>
-            <a:r>
-              <a:rPr sz="1400" b="1" i="0">
-                <a:solidFill>
-                  <a:srgbClr val="095292"/>
-                </a:solidFill>
-                <a:latin typeface="Calibri"/>
-              </a:rPr>
-              <a:t>Construir en Google Docs la matriz de trazabilidad RF a CU: cada requisito funcional debe apuntar al menos a un caso de uso y cada caso de uso debe nacer de al menos un requisito; marcar en rojo los huerfanos que aparezcan y anotar por escrito la decision que se tomara con cada uno.</a:t>
-            </a:r>
-          </a:p>
-        </p:txBody>
-      </p:sp>
-      <p:sp>
-        <p:nvSpPr>
-          <p:cNvPr id="17" name="Rounded Rectangle 16"/>
-          <p:cNvSpPr/>
-          <p:nvPr/>
-        </p:nvSpPr>
-        <p:spPr>
-          <a:xfrm>
-            <a:off x="457200" y="4361688"/>
-            <a:ext cx="11277295" cy="950976"/>
-          </a:xfrm>
-          <a:prstGeom prst="roundRect">
-            <a:avLst>
-              <a:gd name="adj" fmla="val 12000"/>
-            </a:avLst>
-          </a:prstGeom>
-          <a:solidFill>
-            <a:srgbClr val="E8F4FA"/>
-          </a:solidFill>
-          <a:ln>
-            <a:noFill/>
-          </a:ln>
-        </p:spPr>
-        <p:style>
-          <a:lnRef idx="1">
-            <a:schemeClr val="accent1"/>
-          </a:lnRef>
-          <a:fillRef idx="3">
-            <a:schemeClr val="accent1"/>
-          </a:fillRef>
-          <a:effectRef idx="2">
-            <a:schemeClr val="accent1"/>
-          </a:effectRef>
-          <a:fontRef idx="minor">
-            <a:schemeClr val="lt1"/>
-          </a:fontRef>
-        </p:style>
-        <p:txBody>
-          <a:bodyPr rtlCol="0" anchor="ctr"/>
-          <a:lstStyle/>
-          <a:p>
-            <a:pPr algn="ctr"/>
-          </a:p>
-        </p:txBody>
-      </p:sp>
-      <p:sp>
-        <p:nvSpPr>
-          <p:cNvPr id="18" name="Rounded Rectangle 17"/>
-          <p:cNvSpPr/>
-          <p:nvPr/>
-        </p:nvSpPr>
-        <p:spPr>
-          <a:xfrm>
-            <a:off x="594360" y="4617720"/>
-            <a:ext cx="438912" cy="438912"/>
-          </a:xfrm>
-          <a:prstGeom prst="roundRect">
-            <a:avLst>
-              <a:gd name="adj" fmla="val 12000"/>
-            </a:avLst>
-          </a:prstGeom>
-          <a:solidFill>
-            <a:srgbClr val="095292"/>
-          </a:solidFill>
-          <a:ln>
-            <a:noFill/>
-          </a:ln>
-        </p:spPr>
-        <p:style>
-          <a:lnRef idx="1">
-            <a:schemeClr val="accent1"/>
-          </a:lnRef>
-          <a:fillRef idx="3">
-            <a:schemeClr val="accent1"/>
-          </a:fillRef>
-          <a:effectRef idx="2">
-            <a:schemeClr val="accent1"/>
-          </a:effectRef>
-          <a:fontRef idx="minor">
-            <a:schemeClr val="lt1"/>
-          </a:fontRef>
-        </p:style>
-        <p:txBody>
-          <a:bodyPr rtlCol="0" anchor="ctr"/>
-          <a:lstStyle/>
-          <a:p>
-            <a:pPr algn="ctr"/>
-          </a:p>
-        </p:txBody>
-      </p:sp>
-      <p:sp>
-        <p:nvSpPr>
-          <p:cNvPr id="19" name="TextBox 18"/>
-          <p:cNvSpPr txBox="1"/>
-          <p:nvPr/>
-        </p:nvSpPr>
-        <p:spPr>
-          <a:xfrm>
-            <a:off x="594360" y="4617720"/>
-            <a:ext cx="438912" cy="438912"/>
-          </a:xfrm>
-          <a:prstGeom prst="rect">
-            <a:avLst/>
-          </a:prstGeom>
-          <a:noFill/>
-        </p:spPr>
-        <p:txBody>
-          <a:bodyPr wrap="square" anchor="ctr"/>
-          <a:lstStyle/>
-          <a:p>
-            <a:pPr algn="ctr"/>
-            <a:r>
-              <a:rPr sz="1600" b="1" i="0">
-                <a:solidFill>
-                  <a:srgbClr val="FFFFFF"/>
-                </a:solidFill>
-                <a:latin typeface="Calibri"/>
-              </a:rPr>
-              <a:t>4</a:t>
-            </a:r>
-          </a:p>
-        </p:txBody>
-      </p:sp>
-      <p:sp>
-        <p:nvSpPr>
-          <p:cNvPr id="20" name="TextBox 19"/>
-          <p:cNvSpPr txBox="1"/>
-          <p:nvPr/>
-        </p:nvSpPr>
-        <p:spPr>
-          <a:xfrm>
-            <a:off x="1188720" y="4453128"/>
-            <a:ext cx="10271455" cy="786384"/>
-          </a:xfrm>
-          <a:prstGeom prst="rect">
-            <a:avLst/>
-          </a:prstGeom>
-          <a:noFill/>
-        </p:spPr>
-        <p:txBody>
-          <a:bodyPr wrap="square" anchor="ctr"/>
-          <a:lstStyle/>
-          <a:p>
-            <a:r>
-              <a:rPr sz="1500" b="1" i="0">
-                <a:solidFill>
-                  <a:srgbClr val="095292"/>
-                </a:solidFill>
-                <a:latin typeface="Calibri"/>
-              </a:rPr>
-              <a:t>Modelar exactamente una relacion include y una relacion extend en el diagrama, y escribir al lado, en una nota de draw.io, una frase que justifique por que una es obligatoria y la otra condicional; si no se puede justificar, se elimina la flecha.</a:t>
-            </a:r>
-          </a:p>
-        </p:txBody>
-      </p:sp>
-      <p:sp>
-        <p:nvSpPr>
-          <p:cNvPr id="21" name="Rounded Rectangle 20"/>
-          <p:cNvSpPr/>
-          <p:nvPr/>
-        </p:nvSpPr>
-        <p:spPr>
-          <a:xfrm>
-            <a:off x="457200" y="5404104"/>
-            <a:ext cx="11277295" cy="950976"/>
-          </a:xfrm>
-          <a:prstGeom prst="roundRect">
-            <a:avLst>
-              <a:gd name="adj" fmla="val 12000"/>
-            </a:avLst>
-          </a:prstGeom>
-          <a:solidFill>
-            <a:srgbClr val="F2F2F2"/>
-          </a:solidFill>
-          <a:ln>
-            <a:noFill/>
-          </a:ln>
-        </p:spPr>
-        <p:style>
-          <a:lnRef idx="1">
-            <a:schemeClr val="accent1"/>
-          </a:lnRef>
-          <a:fillRef idx="3">
-            <a:schemeClr val="accent1"/>
-          </a:fillRef>
-          <a:effectRef idx="2">
-            <a:schemeClr val="accent1"/>
-          </a:effectRef>
-          <a:fontRef idx="minor">
-            <a:schemeClr val="lt1"/>
-          </a:fontRef>
-        </p:style>
-        <p:txBody>
-          <a:bodyPr rtlCol="0" anchor="ctr"/>
-          <a:lstStyle/>
-          <a:p>
-            <a:pPr algn="ctr"/>
-          </a:p>
-        </p:txBody>
-      </p:sp>
-      <p:sp>
-        <p:nvSpPr>
-          <p:cNvPr id="22" name="Rounded Rectangle 21"/>
-          <p:cNvSpPr/>
-          <p:nvPr/>
-        </p:nvSpPr>
-        <p:spPr>
-          <a:xfrm>
-            <a:off x="594360" y="5660136"/>
-            <a:ext cx="438912" cy="438912"/>
-          </a:xfrm>
-          <a:prstGeom prst="roundRect">
-            <a:avLst>
-              <a:gd name="adj" fmla="val 12000"/>
-            </a:avLst>
-          </a:prstGeom>
-          <a:solidFill>
-            <a:srgbClr val="095292"/>
-          </a:solidFill>
-          <a:ln>
-            <a:noFill/>
-          </a:ln>
-        </p:spPr>
-        <p:style>
-          <a:lnRef idx="1">
-            <a:schemeClr val="accent1"/>
-          </a:lnRef>
-          <a:fillRef idx="3">
-            <a:schemeClr val="accent1"/>
-          </a:fillRef>
-          <a:effectRef idx="2">
-            <a:schemeClr val="accent1"/>
-          </a:effectRef>
-          <a:fontRef idx="minor">
-            <a:schemeClr val="lt1"/>
-          </a:fontRef>
-        </p:style>
-        <p:txBody>
-          <a:bodyPr rtlCol="0" anchor="ctr"/>
-          <a:lstStyle/>
-          <a:p>
-            <a:pPr algn="ctr"/>
-          </a:p>
-        </p:txBody>
-      </p:sp>
-      <p:sp>
-        <p:nvSpPr>
-          <p:cNvPr id="23" name="TextBox 22"/>
-          <p:cNvSpPr txBox="1"/>
-          <p:nvPr/>
-        </p:nvSpPr>
-        <p:spPr>
-          <a:xfrm>
-            <a:off x="594360" y="5660136"/>
-            <a:ext cx="438912" cy="438912"/>
-          </a:xfrm>
-          <a:prstGeom prst="rect">
-            <a:avLst/>
-          </a:prstGeom>
-          <a:noFill/>
-        </p:spPr>
-        <p:txBody>
-          <a:bodyPr wrap="square" anchor="ctr"/>
-          <a:lstStyle/>
-          <a:p>
-            <a:pPr algn="ctr"/>
-            <a:r>
-              <a:rPr sz="1600" b="1" i="0">
-                <a:solidFill>
-                  <a:srgbClr val="FFFFFF"/>
-                </a:solidFill>
-                <a:latin typeface="Calibri"/>
-              </a:rPr>
-              <a:t>5</a:t>
-            </a:r>
-          </a:p>
-        </p:txBody>
-      </p:sp>
-      <p:sp>
-        <p:nvSpPr>
-          <p:cNvPr id="24" name="TextBox 23"/>
-          <p:cNvSpPr txBox="1"/>
-          <p:nvPr/>
-        </p:nvSpPr>
-        <p:spPr>
-          <a:xfrm>
-            <a:off x="1188720" y="5495544"/>
-            <a:ext cx="10271455" cy="786384"/>
-          </a:xfrm>
-          <a:prstGeom prst="rect">
-            <a:avLst/>
-          </a:prstGeom>
-          <a:noFill/>
-        </p:spPr>
-        <p:txBody>
-          <a:bodyPr wrap="square" anchor="ctr"/>
-          <a:lstStyle/>
-          <a:p>
-            <a:r>
-              <a:rPr sz="1400" b="1" i="0">
-                <a:solidFill>
-                  <a:srgbClr val="095292"/>
-                </a:solidFill>
-                <a:latin typeface="Calibri"/>
-              </a:rPr>
-              <a:t>Diligenciar la plantilla completa de especificacion para CU-01 Registrar mascota y CU-02 Buscar expediente, con precondiciones, postcondiciones de exito y de fracaso, flujo principal en pares actor-sistema y minimo dos flujos alternos cada uno; exportar todo a PDF y subirlo a la plataforma del curso.</a:t>
-            </a:r>
-          </a:p>
-        </p:txBody>
-      </p:sp>
-      <p:sp>
-        <p:nvSpPr>
-          <p:cNvPr id="25" name="TextBox 24"/>
+          <a:bodyPr wrap="square">
+            <a:spAutoFit/>
+          </a:bodyPr>
+          <a:lstStyle/>
+          <a:p>
+            <a:pPr>
+              <a:spcAft>
+                <a:spcPts val="800"/>
+              </a:spcAft>
+            </a:pPr>
+            <a:r>
+              <a:rPr sz="2000" b="0" i="0">
+                <a:solidFill>
+                  <a:srgbClr val="333333"/>
+                </a:solidFill>
+                <a:latin typeface="Calibri"/>
+              </a:rPr>
+              <a:t>–   </a:t>
+            </a:r>
+            <a:r>
+              <a:rPr sz="2000" b="1" i="0">
+                <a:solidFill>
+                  <a:srgbClr val="333333"/>
+                </a:solidFill>
+                <a:latin typeface="Calibri"/>
+              </a:rPr>
+              <a:t>Por que importa al PI:</a:t>
+            </a:r>
+            <a:r>
+              <a:rPr sz="2000" b="0" i="0">
+                <a:solidFill>
+                  <a:srgbClr val="333333"/>
+                </a:solidFill>
+                <a:latin typeface="Calibri"/>
+              </a:rPr>
+              <a:t> los casos de uso son el puente entre lo que pidio la clinica Huellitas y lo que despues alguien va a programar; sin ellos, el equipo de Programacion II tiene que adivinar el comportamiento del sistema y siempre adivina distinto.</a:t>
+            </a:r>
+          </a:p>
+          <a:p>
+            <a:pPr>
+              <a:spcAft>
+                <a:spcPts val="800"/>
+              </a:spcAft>
+            </a:pPr>
+            <a:r>
+              <a:rPr sz="2000" b="0" i="0">
+                <a:solidFill>
+                  <a:srgbClr val="333333"/>
+                </a:solidFill>
+                <a:latin typeface="Calibri"/>
+              </a:rPr>
+              <a:t>–   El estudiante que solo cursa Seminario cierra el semestre con este paquete de especificaciones como pieza central de su documento de diseño, y por eso hoy se califica la escritura y no el dibujo.</a:t>
+            </a:r>
+          </a:p>
+          <a:p>
+            <a:pPr>
+              <a:spcAft>
+                <a:spcPts val="800"/>
+              </a:spcAft>
+            </a:pPr>
+            <a:r>
+              <a:rPr sz="2000" b="0" i="0">
+                <a:solidFill>
+                  <a:srgbClr val="333333"/>
+                </a:solidFill>
+                <a:latin typeface="Calibri"/>
+              </a:rPr>
+              <a:t>–   Toda especificacion escrita hoy se convierte mañana en un caso de prueba: si una postcondicion no se puede ir a verificar en los datos, esta mal redactada.</a:t>
+            </a:r>
+          </a:p>
+        </p:txBody>
+      </p:sp>
+      <p:sp>
+        <p:nvSpPr>
+          <p:cNvPr id="6" name="TextBox 5"/>
           <p:cNvSpPr txBox="1"/>
           <p:nvPr/>
         </p:nvSpPr>
@@ -7306,154 +7379,21 @@
                 </a:solidFill>
                 <a:latin typeface="Calibri"/>
               </a:rPr>
-              <a:t>Antes de entregar — autochequeo</a:t>
-            </a:r>
-          </a:p>
-        </p:txBody>
-      </p:sp>
-      <p:sp>
-        <p:nvSpPr>
-          <p:cNvPr id="5" name="Rounded Rectangle 4"/>
-          <p:cNvSpPr/>
-          <p:nvPr/>
-        </p:nvSpPr>
-        <p:spPr>
-          <a:xfrm>
-            <a:off x="457200" y="1261872"/>
-            <a:ext cx="11277295" cy="566928"/>
-          </a:xfrm>
-          <a:prstGeom prst="roundRect">
-            <a:avLst>
-              <a:gd name="adj" fmla="val 12000"/>
-            </a:avLst>
-          </a:prstGeom>
-          <a:solidFill>
-            <a:srgbClr val="F2F2F2"/>
-          </a:solidFill>
-          <a:ln>
-            <a:noFill/>
-          </a:ln>
-        </p:spPr>
-        <p:style>
-          <a:lnRef idx="1">
-            <a:schemeClr val="accent1"/>
-          </a:lnRef>
-          <a:fillRef idx="3">
-            <a:schemeClr val="accent1"/>
-          </a:fillRef>
-          <a:effectRef idx="2">
-            <a:schemeClr val="accent1"/>
-          </a:effectRef>
-          <a:fontRef idx="minor">
-            <a:schemeClr val="lt1"/>
-          </a:fontRef>
-        </p:style>
-        <p:txBody>
-          <a:bodyPr rtlCol="0" anchor="ctr"/>
-          <a:lstStyle/>
-          <a:p>
-            <a:pPr algn="ctr"/>
-          </a:p>
-        </p:txBody>
-      </p:sp>
-      <p:sp>
-        <p:nvSpPr>
-          <p:cNvPr id="6" name="Rectangle 5"/>
-          <p:cNvSpPr/>
-          <p:nvPr/>
-        </p:nvSpPr>
-        <p:spPr>
-          <a:xfrm>
-            <a:off x="640080" y="1408175"/>
-            <a:ext cx="274320" cy="274320"/>
-          </a:xfrm>
-          <a:prstGeom prst="rect">
-            <a:avLst/>
-          </a:prstGeom>
-          <a:solidFill>
-            <a:srgbClr val="FFFFFF"/>
-          </a:solidFill>
-          <a:ln>
-            <a:solidFill>
-              <a:srgbClr val="333333"/>
-            </a:solidFill>
-          </a:ln>
-        </p:spPr>
-        <p:style>
-          <a:lnRef idx="1">
-            <a:schemeClr val="accent1"/>
-          </a:lnRef>
-          <a:fillRef idx="3">
-            <a:schemeClr val="accent1"/>
-          </a:fillRef>
-          <a:effectRef idx="2">
-            <a:schemeClr val="accent1"/>
-          </a:effectRef>
-          <a:fontRef idx="minor">
-            <a:schemeClr val="lt1"/>
-          </a:fontRef>
-        </p:style>
-        <p:txBody>
-          <a:bodyPr rtlCol="0" anchor="ctr"/>
-          <a:lstStyle/>
-          <a:p>
-            <a:pPr algn="ctr"/>
-          </a:p>
-        </p:txBody>
-      </p:sp>
-      <p:sp>
-        <p:nvSpPr>
-          <p:cNvPr id="7" name="Rectangle 6"/>
-          <p:cNvSpPr/>
-          <p:nvPr/>
-        </p:nvSpPr>
-        <p:spPr>
-          <a:xfrm>
-            <a:off x="640080" y="1408175"/>
-            <a:ext cx="73152" cy="274320"/>
-          </a:xfrm>
-          <a:prstGeom prst="rect">
-            <a:avLst/>
-          </a:prstGeom>
-          <a:solidFill>
-            <a:srgbClr val="269CCB"/>
-          </a:solidFill>
-          <a:ln>
-            <a:noFill/>
-          </a:ln>
-        </p:spPr>
-        <p:style>
-          <a:lnRef idx="1">
-            <a:schemeClr val="accent1"/>
-          </a:lnRef>
-          <a:fillRef idx="3">
-            <a:schemeClr val="accent1"/>
-          </a:fillRef>
-          <a:effectRef idx="2">
-            <a:schemeClr val="accent1"/>
-          </a:effectRef>
-          <a:fontRef idx="minor">
-            <a:schemeClr val="lt1"/>
-          </a:fontRef>
-        </p:style>
-        <p:txBody>
-          <a:bodyPr rtlCol="0" anchor="ctr"/>
-          <a:lstStyle/>
-          <a:p>
-            <a:pPr algn="ctr"/>
-          </a:p>
-        </p:txBody>
-      </p:sp>
-      <p:sp>
-        <p:nvSpPr>
-          <p:cNvPr id="8" name="TextBox 7"/>
+              <a:t>Taller PI — punto de partida</a:t>
+            </a:r>
+          </a:p>
+        </p:txBody>
+      </p:sp>
+      <p:sp>
+        <p:nvSpPr>
+          <p:cNvPr id="5" name="TextBox 4"/>
           <p:cNvSpPr txBox="1"/>
           <p:nvPr/>
         </p:nvSpPr>
         <p:spPr>
           <a:xfrm>
-            <a:off x="1097280" y="1353312"/>
-            <a:ext cx="10362895" cy="402336"/>
+            <a:off x="457200" y="1170432"/>
+            <a:ext cx="11277295" cy="5230368"/>
           </a:xfrm>
           <a:prstGeom prst="rect">
             <a:avLst/>
@@ -7461,354 +7401,63 @@
           <a:noFill/>
         </p:spPr>
         <p:txBody>
-          <a:bodyPr wrap="square" anchor="ctr"/>
-          <a:lstStyle/>
-          <a:p>
-            <a:r>
-              <a:rPr sz="1500" b="0" i="0">
+          <a:bodyPr wrap="square">
+            <a:spAutoFit/>
+          </a:bodyPr>
+          <a:lstStyle/>
+          <a:p>
+            <a:pPr>
+              <a:spcAft>
+                <a:spcPts val="800"/>
+              </a:spcAft>
+            </a:pPr>
+            <a:r>
+              <a:rPr sz="2000" b="0" i="0">
                 <a:solidFill>
                   <a:srgbClr val="333333"/>
                 </a:solidFill>
                 <a:latin typeface="Calibri"/>
               </a:rPr>
-              <a:t>Si un actor se fuera a almorzar justo despues de ejecutar su caso de uso, quedaria satisfecho o le faltaria algo por hacer?</a:t>
-            </a:r>
-          </a:p>
-        </p:txBody>
-      </p:sp>
-      <p:sp>
-        <p:nvSpPr>
-          <p:cNvPr id="9" name="Rounded Rectangle 8"/>
-          <p:cNvSpPr/>
-          <p:nvPr/>
-        </p:nvSpPr>
-        <p:spPr>
-          <a:xfrm>
-            <a:off x="457200" y="1938528"/>
-            <a:ext cx="11277295" cy="566928"/>
-          </a:xfrm>
-          <a:prstGeom prst="roundRect">
-            <a:avLst>
-              <a:gd name="adj" fmla="val 12000"/>
-            </a:avLst>
-          </a:prstGeom>
-          <a:solidFill>
-            <a:srgbClr val="F2F2F2"/>
-          </a:solidFill>
-          <a:ln>
-            <a:noFill/>
-          </a:ln>
-        </p:spPr>
-        <p:style>
-          <a:lnRef idx="1">
-            <a:schemeClr val="accent1"/>
-          </a:lnRef>
-          <a:fillRef idx="3">
-            <a:schemeClr val="accent1"/>
-          </a:fillRef>
-          <a:effectRef idx="2">
-            <a:schemeClr val="accent1"/>
-          </a:effectRef>
-          <a:fontRef idx="minor">
-            <a:schemeClr val="lt1"/>
-          </a:fontRef>
-        </p:style>
-        <p:txBody>
-          <a:bodyPr rtlCol="0" anchor="ctr"/>
-          <a:lstStyle/>
-          <a:p>
-            <a:pPr algn="ctr"/>
-          </a:p>
-        </p:txBody>
-      </p:sp>
-      <p:sp>
-        <p:nvSpPr>
-          <p:cNvPr id="10" name="Rectangle 9"/>
-          <p:cNvSpPr/>
-          <p:nvPr/>
-        </p:nvSpPr>
-        <p:spPr>
-          <a:xfrm>
-            <a:off x="640080" y="2084832"/>
-            <a:ext cx="274320" cy="274320"/>
-          </a:xfrm>
-          <a:prstGeom prst="rect">
-            <a:avLst/>
-          </a:prstGeom>
-          <a:solidFill>
-            <a:srgbClr val="FFFFFF"/>
-          </a:solidFill>
-          <a:ln>
-            <a:solidFill>
-              <a:srgbClr val="333333"/>
-            </a:solidFill>
-          </a:ln>
-        </p:spPr>
-        <p:style>
-          <a:lnRef idx="1">
-            <a:schemeClr val="accent1"/>
-          </a:lnRef>
-          <a:fillRef idx="3">
-            <a:schemeClr val="accent1"/>
-          </a:fillRef>
-          <a:effectRef idx="2">
-            <a:schemeClr val="accent1"/>
-          </a:effectRef>
-          <a:fontRef idx="minor">
-            <a:schemeClr val="lt1"/>
-          </a:fontRef>
-        </p:style>
-        <p:txBody>
-          <a:bodyPr rtlCol="0" anchor="ctr"/>
-          <a:lstStyle/>
-          <a:p>
-            <a:pPr algn="ctr"/>
-          </a:p>
-        </p:txBody>
-      </p:sp>
-      <p:sp>
-        <p:nvSpPr>
-          <p:cNvPr id="11" name="Rectangle 10"/>
-          <p:cNvSpPr/>
-          <p:nvPr/>
-        </p:nvSpPr>
-        <p:spPr>
-          <a:xfrm>
-            <a:off x="640080" y="2084832"/>
-            <a:ext cx="73152" cy="274320"/>
-          </a:xfrm>
-          <a:prstGeom prst="rect">
-            <a:avLst/>
-          </a:prstGeom>
-          <a:solidFill>
-            <a:srgbClr val="269CCB"/>
-          </a:solidFill>
-          <a:ln>
-            <a:noFill/>
-          </a:ln>
-        </p:spPr>
-        <p:style>
-          <a:lnRef idx="1">
-            <a:schemeClr val="accent1"/>
-          </a:lnRef>
-          <a:fillRef idx="3">
-            <a:schemeClr val="accent1"/>
-          </a:fillRef>
-          <a:effectRef idx="2">
-            <a:schemeClr val="accent1"/>
-          </a:effectRef>
-          <a:fontRef idx="minor">
-            <a:schemeClr val="lt1"/>
-          </a:fontRef>
-        </p:style>
-        <p:txBody>
-          <a:bodyPr rtlCol="0" anchor="ctr"/>
-          <a:lstStyle/>
-          <a:p>
-            <a:pPr algn="ctr"/>
-          </a:p>
-        </p:txBody>
-      </p:sp>
-      <p:sp>
-        <p:nvSpPr>
-          <p:cNvPr id="12" name="TextBox 11"/>
-          <p:cNvSpPr txBox="1"/>
-          <p:nvPr/>
-        </p:nvSpPr>
-        <p:spPr>
-          <a:xfrm>
-            <a:off x="1097280" y="2029968"/>
-            <a:ext cx="10362895" cy="402336"/>
-          </a:xfrm>
-          <a:prstGeom prst="rect">
-            <a:avLst/>
-          </a:prstGeom>
-          <a:noFill/>
-        </p:spPr>
-        <p:txBody>
-          <a:bodyPr wrap="square" anchor="ctr"/>
-          <a:lstStyle/>
-          <a:p>
-            <a:r>
-              <a:rPr sz="1500" b="0" i="0">
+              <a:t>–   Ya existe el catalogo de RF y RNF de VetCare, pero esta redactado como lista de deseos y nadie sabe en que orden ocurren las cosas ni que pasa cuando algo sale mal.</a:t>
+            </a:r>
+          </a:p>
+          <a:p>
+            <a:pPr>
+              <a:spcAft>
+                <a:spcPts val="800"/>
+              </a:spcAft>
+            </a:pPr>
+            <a:r>
+              <a:rPr sz="2000" b="0" i="0">
                 <a:solidFill>
                   <a:srgbClr val="333333"/>
                 </a:solidFill>
                 <a:latin typeface="Calibri"/>
               </a:rPr>
-              <a:t>Su flujo principal describe pasos del negocio o describe clics sobre una interfaz que todavia no existe?</a:t>
-            </a:r>
-          </a:p>
-        </p:txBody>
-      </p:sp>
-      <p:sp>
-        <p:nvSpPr>
-          <p:cNvPr id="13" name="Rounded Rectangle 12"/>
-          <p:cNvSpPr/>
-          <p:nvPr/>
-        </p:nvSpPr>
-        <p:spPr>
-          <a:xfrm>
-            <a:off x="457200" y="2615184"/>
-            <a:ext cx="11277295" cy="566928"/>
-          </a:xfrm>
-          <a:prstGeom prst="roundRect">
-            <a:avLst>
-              <a:gd name="adj" fmla="val 12000"/>
-            </a:avLst>
-          </a:prstGeom>
-          <a:solidFill>
-            <a:srgbClr val="F2F2F2"/>
-          </a:solidFill>
-          <a:ln>
-            <a:noFill/>
-          </a:ln>
-        </p:spPr>
-        <p:style>
-          <a:lnRef idx="1">
-            <a:schemeClr val="accent1"/>
-          </a:lnRef>
-          <a:fillRef idx="3">
-            <a:schemeClr val="accent1"/>
-          </a:fillRef>
-          <a:effectRef idx="2">
-            <a:schemeClr val="accent1"/>
-          </a:effectRef>
-          <a:fontRef idx="minor">
-            <a:schemeClr val="lt1"/>
-          </a:fontRef>
-        </p:style>
-        <p:txBody>
-          <a:bodyPr rtlCol="0" anchor="ctr"/>
-          <a:lstStyle/>
-          <a:p>
-            <a:pPr algn="ctr"/>
-          </a:p>
-        </p:txBody>
-      </p:sp>
-      <p:sp>
-        <p:nvSpPr>
-          <p:cNvPr id="14" name="Rectangle 13"/>
-          <p:cNvSpPr/>
-          <p:nvPr/>
-        </p:nvSpPr>
-        <p:spPr>
-          <a:xfrm>
-            <a:off x="640080" y="2761488"/>
-            <a:ext cx="274320" cy="274320"/>
-          </a:xfrm>
-          <a:prstGeom prst="rect">
-            <a:avLst/>
-          </a:prstGeom>
-          <a:solidFill>
-            <a:srgbClr val="FFFFFF"/>
-          </a:solidFill>
-          <a:ln>
-            <a:solidFill>
-              <a:srgbClr val="333333"/>
-            </a:solidFill>
-          </a:ln>
-        </p:spPr>
-        <p:style>
-          <a:lnRef idx="1">
-            <a:schemeClr val="accent1"/>
-          </a:lnRef>
-          <a:fillRef idx="3">
-            <a:schemeClr val="accent1"/>
-          </a:fillRef>
-          <a:effectRef idx="2">
-            <a:schemeClr val="accent1"/>
-          </a:effectRef>
-          <a:fontRef idx="minor">
-            <a:schemeClr val="lt1"/>
-          </a:fontRef>
-        </p:style>
-        <p:txBody>
-          <a:bodyPr rtlCol="0" anchor="ctr"/>
-          <a:lstStyle/>
-          <a:p>
-            <a:pPr algn="ctr"/>
-          </a:p>
-        </p:txBody>
-      </p:sp>
-      <p:sp>
-        <p:nvSpPr>
-          <p:cNvPr id="15" name="Rectangle 14"/>
-          <p:cNvSpPr/>
-          <p:nvPr/>
-        </p:nvSpPr>
-        <p:spPr>
-          <a:xfrm>
-            <a:off x="640080" y="2761488"/>
-            <a:ext cx="73152" cy="274320"/>
-          </a:xfrm>
-          <a:prstGeom prst="rect">
-            <a:avLst/>
-          </a:prstGeom>
-          <a:solidFill>
-            <a:srgbClr val="269CCB"/>
-          </a:solidFill>
-          <a:ln>
-            <a:noFill/>
-          </a:ln>
-        </p:spPr>
-        <p:style>
-          <a:lnRef idx="1">
-            <a:schemeClr val="accent1"/>
-          </a:lnRef>
-          <a:fillRef idx="3">
-            <a:schemeClr val="accent1"/>
-          </a:fillRef>
-          <a:effectRef idx="2">
-            <a:schemeClr val="accent1"/>
-          </a:effectRef>
-          <a:fontRef idx="minor">
-            <a:schemeClr val="lt1"/>
-          </a:fontRef>
-        </p:style>
-        <p:txBody>
-          <a:bodyPr rtlCol="0" anchor="ctr"/>
-          <a:lstStyle/>
-          <a:p>
-            <a:pPr algn="ctr"/>
-          </a:p>
-        </p:txBody>
-      </p:sp>
-      <p:sp>
-        <p:nvSpPr>
-          <p:cNvPr id="16" name="TextBox 15"/>
-          <p:cNvSpPr txBox="1"/>
-          <p:nvPr/>
-        </p:nvSpPr>
-        <p:spPr>
-          <a:xfrm>
-            <a:off x="1097280" y="2706624"/>
-            <a:ext cx="10362895" cy="402336"/>
-          </a:xfrm>
-          <a:prstGeom prst="rect">
-            <a:avLst/>
-          </a:prstGeom>
-          <a:noFill/>
-        </p:spPr>
-        <p:txBody>
-          <a:bodyPr wrap="square" anchor="ctr"/>
-          <a:lstStyle/>
-          <a:p>
-            <a:r>
-              <a:rPr sz="1500" b="0" i="0">
+              <a:t>–   La recepcionista de Huellitas describe su trabajo con frases sueltas: busco la carpeta, si no aparece le pregunto al veterinario, si el propietario es nuevo lleno una hoja aparte y la engrapo.</a:t>
+            </a:r>
+          </a:p>
+          <a:p>
+            <a:pPr>
+              <a:spcAft>
+                <a:spcPts val="800"/>
+              </a:spcAft>
+            </a:pPr>
+            <a:r>
+              <a:rPr sz="2000" b="0" i="0">
                 <a:solidFill>
                   <a:srgbClr val="333333"/>
                 </a:solidFill>
                 <a:latin typeface="Calibri"/>
               </a:rPr>
-              <a:t>Que pasa en Huellitas cuando el propietario no esta registrado, cuando la busqueda no devuelve nada y cuando hay dos mascotas con el mismo nombre? Aparece eso escrito en algun flujo alterno?</a:t>
-            </a:r>
-          </a:p>
-        </p:txBody>
-      </p:sp>
-      <p:sp>
-        <p:nvSpPr>
-          <p:cNvPr id="17" name="TextBox 16"/>
+              <a:t>–   El equipo tiene draw.io abierto y la tentacion de dibujar veinte monigotes antes de escribir una sola linea de comportamiento.</a:t>
+            </a:r>
+          </a:p>
+        </p:txBody>
+      </p:sp>
+      <p:sp>
+        <p:nvSpPr>
+          <p:cNvPr id="6" name="TextBox 5"/>
           <p:cNvSpPr txBox="1"/>
           <p:nvPr/>
         </p:nvSpPr>
@@ -7982,21 +7631,111 @@
                 </a:solidFill>
                 <a:latin typeface="Calibri"/>
               </a:rPr>
-              <a:t>Criterios de exito / entregable</a:t>
-            </a:r>
-          </a:p>
-        </p:txBody>
-      </p:sp>
-      <p:sp>
-        <p:nvSpPr>
-          <p:cNvPr id="5" name="TextBox 4"/>
+              <a:t>Taller PI — pasos guiados</a:t>
+            </a:r>
+          </a:p>
+        </p:txBody>
+      </p:sp>
+      <p:sp>
+        <p:nvSpPr>
+          <p:cNvPr id="5" name="Rounded Rectangle 4"/>
+          <p:cNvSpPr/>
+          <p:nvPr/>
+        </p:nvSpPr>
+        <p:spPr>
+          <a:xfrm>
+            <a:off x="457200" y="1234440"/>
+            <a:ext cx="11277295" cy="950976"/>
+          </a:xfrm>
+          <a:prstGeom prst="roundRect">
+            <a:avLst>
+              <a:gd name="adj" fmla="val 12000"/>
+            </a:avLst>
+          </a:prstGeom>
+          <a:solidFill>
+            <a:srgbClr val="F2F2F2"/>
+          </a:solidFill>
+          <a:ln>
+            <a:noFill/>
+          </a:ln>
+        </p:spPr>
+        <p:style>
+          <a:lnRef idx="1">
+            <a:schemeClr val="accent1"/>
+          </a:lnRef>
+          <a:fillRef idx="3">
+            <a:schemeClr val="accent1"/>
+          </a:fillRef>
+          <a:effectRef idx="2">
+            <a:schemeClr val="accent1"/>
+          </a:effectRef>
+          <a:fontRef idx="minor">
+            <a:schemeClr val="lt1"/>
+          </a:fontRef>
+        </p:style>
+        <p:txBody>
+          <a:bodyPr rtlCol="0" anchor="ctr"/>
+          <a:lstStyle/>
+          <a:p>
+            <a:pPr algn="ctr"/>
+          </a:p>
+        </p:txBody>
+      </p:sp>
+      <p:sp>
+        <p:nvSpPr>
+          <p:cNvPr id="6" name="Rounded Rectangle 5"/>
+          <p:cNvSpPr/>
+          <p:nvPr/>
+        </p:nvSpPr>
+        <p:spPr>
+          <a:xfrm>
+            <a:off x="594360" y="1490472"/>
+            <a:ext cx="438912" cy="438912"/>
+          </a:xfrm>
+          <a:prstGeom prst="roundRect">
+            <a:avLst>
+              <a:gd name="adj" fmla="val 12000"/>
+            </a:avLst>
+          </a:prstGeom>
+          <a:solidFill>
+            <a:srgbClr val="095292"/>
+          </a:solidFill>
+          <a:ln>
+            <a:noFill/>
+          </a:ln>
+        </p:spPr>
+        <p:style>
+          <a:lnRef idx="1">
+            <a:schemeClr val="accent1"/>
+          </a:lnRef>
+          <a:fillRef idx="3">
+            <a:schemeClr val="accent1"/>
+          </a:fillRef>
+          <a:effectRef idx="2">
+            <a:schemeClr val="accent1"/>
+          </a:effectRef>
+          <a:fontRef idx="minor">
+            <a:schemeClr val="lt1"/>
+          </a:fontRef>
+        </p:style>
+        <p:txBody>
+          <a:bodyPr rtlCol="0" anchor="ctr"/>
+          <a:lstStyle/>
+          <a:p>
+            <a:pPr algn="ctr"/>
+          </a:p>
+        </p:txBody>
+      </p:sp>
+      <p:sp>
+        <p:nvSpPr>
+          <p:cNvPr id="7" name="TextBox 6"/>
           <p:cNvSpPr txBox="1"/>
           <p:nvPr/>
         </p:nvSpPr>
         <p:spPr>
           <a:xfrm>
-            <a:off x="457200" y="1170432"/>
-            <a:ext cx="11277295" cy="5230368"/>
+            <a:off x="594360" y="1490472"/>
+            <a:ext cx="438912" cy="438912"/>
           </a:xfrm>
           <a:prstGeom prst="rect">
             <a:avLst/>
@@ -8004,219 +7743,677 @@
           <a:noFill/>
         </p:spPr>
         <p:txBody>
-          <a:bodyPr wrap="square">
-            <a:spAutoFit/>
-          </a:bodyPr>
-          <a:lstStyle/>
-          <a:p>
-            <a:pPr>
-              <a:spcAft>
-                <a:spcPts val="800"/>
-              </a:spcAft>
-            </a:pPr>
-            <a:r>
-              <a:rPr sz="2000" b="0" i="0">
-                <a:solidFill>
-                  <a:srgbClr val="333333"/>
-                </a:solidFill>
-                <a:latin typeface="Calibri"/>
-              </a:rPr>
-              <a:t>–   </a:t>
-            </a:r>
-            <a:r>
-              <a:rPr sz="2000" b="1" i="0">
-                <a:solidFill>
-                  <a:srgbClr val="333333"/>
-                </a:solidFill>
-                <a:latin typeface="Calibri"/>
-              </a:rPr>
-              <a:t>Entregable:</a:t>
-            </a:r>
-            <a:r>
-              <a:rPr sz="2000" b="0" i="0">
-                <a:solidFill>
-                  <a:srgbClr val="333333"/>
-                </a:solidFill>
-                <a:latin typeface="Calibri"/>
-              </a:rPr>
-              <a:t> Un PDF con el diagrama de casos de uso, la matriz de trazabilidad RF a CU y las dos especificaciones textuales completas (precondiciones, postcondiciones, flujo principal y minimo dos flujos alternos cada una), subido a la plataforma del curso.</a:t>
-            </a:r>
-          </a:p>
-          <a:p>
-            <a:pPr>
-              <a:spcAft>
-                <a:spcPts val="800"/>
-              </a:spcAft>
-            </a:pPr>
-            <a:r>
-              <a:rPr sz="2000" b="0" i="0">
-                <a:solidFill>
-                  <a:srgbClr val="333333"/>
-                </a:solidFill>
-                <a:latin typeface="Calibri"/>
-              </a:rPr>
-              <a:t>–   </a:t>
-            </a:r>
-            <a:r>
-              <a:rPr sz="2000" b="1" i="0">
-                <a:solidFill>
-                  <a:srgbClr val="333333"/>
-                </a:solidFill>
-                <a:latin typeface="Calibri"/>
-              </a:rPr>
-              <a:t>Exito:</a:t>
-            </a:r>
-            <a:r>
-              <a:rPr sz="2000" b="0" i="0">
-                <a:solidFill>
-                  <a:srgbClr val="333333"/>
-                </a:solidFill>
-                <a:latin typeface="Calibri"/>
-              </a:rPr>
-              <a:t> El diagrama tiene limite de sistema rotulado, actores como roles y ningun caso de uso con nombre de boton, pantalla u operacion tecnica.</a:t>
-            </a:r>
-          </a:p>
-          <a:p>
-            <a:pPr>
-              <a:spcAft>
-                <a:spcPts val="800"/>
-              </a:spcAft>
-            </a:pPr>
-            <a:r>
-              <a:rPr sz="2000" b="0" i="0">
-                <a:solidFill>
-                  <a:srgbClr val="333333"/>
-                </a:solidFill>
-                <a:latin typeface="Calibri"/>
-              </a:rPr>
-              <a:t>–   </a:t>
-            </a:r>
-            <a:r>
-              <a:rPr sz="2000" b="1" i="0">
-                <a:solidFill>
-                  <a:srgbClr val="333333"/>
-                </a:solidFill>
-                <a:latin typeface="Calibri"/>
-              </a:rPr>
-              <a:t>Exito:</a:t>
-            </a:r>
-            <a:r>
-              <a:rPr sz="2000" b="0" i="0">
-                <a:solidFill>
-                  <a:srgbClr val="333333"/>
-                </a:solidFill>
-                <a:latin typeface="Calibri"/>
-              </a:rPr>
-              <a:t> La matriz de trazabilidad no tiene huerfanos sin decision escrita: todo RF llega al menos a un CU o queda documentado como pendiente, y todo CU nace al menos de un RF.</a:t>
-            </a:r>
-          </a:p>
-          <a:p>
-            <a:pPr>
-              <a:spcAft>
-                <a:spcPts val="800"/>
-              </a:spcAft>
-            </a:pPr>
-            <a:r>
-              <a:rPr sz="2000" b="0" i="0">
-                <a:solidFill>
-                  <a:srgbClr val="333333"/>
-                </a:solidFill>
-                <a:latin typeface="Calibri"/>
-              </a:rPr>
-              <a:t>–   </a:t>
-            </a:r>
-            <a:r>
-              <a:rPr sz="2000" b="1" i="0">
-                <a:solidFill>
-                  <a:srgbClr val="333333"/>
-                </a:solidFill>
-                <a:latin typeface="Calibri"/>
-              </a:rPr>
-              <a:t>Exito:</a:t>
-            </a:r>
-            <a:r>
-              <a:rPr sz="2000" b="0" i="0">
-                <a:solidFill>
-                  <a:srgbClr val="333333"/>
-                </a:solidFill>
-                <a:latin typeface="Calibri"/>
-              </a:rPr>
-              <a:t> Las dos especificaciones tienen precondicion, postcondicion de exito, postcondicion de fracaso y flujo principal numerado en pares actor-sistema.</a:t>
-            </a:r>
-          </a:p>
-          <a:p>
-            <a:pPr>
-              <a:spcAft>
-                <a:spcPts val="800"/>
-              </a:spcAft>
-            </a:pPr>
-            <a:r>
-              <a:rPr sz="2000" b="0" i="0">
-                <a:solidFill>
-                  <a:srgbClr val="333333"/>
-                </a:solidFill>
-                <a:latin typeface="Calibri"/>
-              </a:rPr>
-              <a:t>–   </a:t>
-            </a:r>
-            <a:r>
-              <a:rPr sz="2000" b="1" i="0">
-                <a:solidFill>
-                  <a:srgbClr val="333333"/>
-                </a:solidFill>
-                <a:latin typeface="Calibri"/>
-              </a:rPr>
-              <a:t>Exito:</a:t>
-            </a:r>
-            <a:r>
-              <a:rPr sz="2000" b="0" i="0">
-                <a:solidFill>
-                  <a:srgbClr val="333333"/>
-                </a:solidFill>
-                <a:latin typeface="Calibri"/>
-              </a:rPr>
-              <a:t> Cada especificacion incluye minimo dos flujos alternos numerados respecto al paso del flujo principal donde se desvian.</a:t>
-            </a:r>
-          </a:p>
-          <a:p>
-            <a:pPr>
-              <a:spcAft>
-                <a:spcPts val="800"/>
-              </a:spcAft>
-            </a:pPr>
-            <a:r>
-              <a:rPr sz="2000" b="0" i="0">
-                <a:solidFill>
-                  <a:srgbClr val="333333"/>
-                </a:solidFill>
-                <a:latin typeface="Calibri"/>
-              </a:rPr>
-              <a:t>–   </a:t>
-            </a:r>
-            <a:r>
-              <a:rPr sz="2000" b="1" i="0">
-                <a:solidFill>
-                  <a:srgbClr val="333333"/>
-                </a:solidFill>
-                <a:latin typeface="Calibri"/>
-              </a:rPr>
-              <a:t>Entrega en la plataforma del curso</a:t>
-            </a:r>
-            <a:r>
-              <a:rPr sz="2000" b="0" i="0">
-                <a:solidFill>
-                  <a:srgbClr val="333333"/>
-                </a:solidFill>
-                <a:latin typeface="Calibri"/>
-              </a:rPr>
-              <a:t> — en la fecha que indique el docente.</a:t>
-            </a:r>
-          </a:p>
-        </p:txBody>
-      </p:sp>
-      <p:sp>
-        <p:nvSpPr>
-          <p:cNvPr id="6" name="TextBox 5"/>
+          <a:bodyPr wrap="square" anchor="ctr"/>
+          <a:lstStyle/>
+          <a:p>
+            <a:pPr algn="ctr"/>
+            <a:r>
+              <a:rPr sz="1600" b="1" i="0">
+                <a:solidFill>
+                  <a:srgbClr val="FFFFFF"/>
+                </a:solidFill>
+                <a:latin typeface="Calibri"/>
+              </a:rPr>
+              <a:t>1</a:t>
+            </a:r>
+          </a:p>
+        </p:txBody>
+      </p:sp>
+      <p:sp>
+        <p:nvSpPr>
+          <p:cNvPr id="8" name="TextBox 7"/>
+          <p:cNvSpPr txBox="1"/>
+          <p:nvPr/>
+        </p:nvSpPr>
+        <p:spPr>
+          <a:xfrm>
+            <a:off x="1188720" y="1325880"/>
+            <a:ext cx="10271455" cy="786384"/>
+          </a:xfrm>
+          <a:prstGeom prst="rect">
+            <a:avLst/>
+          </a:prstGeom>
+          <a:noFill/>
+        </p:spPr>
+        <p:txBody>
+          <a:bodyPr wrap="square" anchor="ctr"/>
+          <a:lstStyle/>
+          <a:p>
+            <a:r>
+              <a:rPr sz="1400" b="1" i="0">
+                <a:solidFill>
+                  <a:srgbClr val="095292"/>
+                </a:solidFill>
+                <a:latin typeface="Calibri"/>
+              </a:rPr>
+              <a:t>En draw.io, dibujar el limite del sistema rotulado VetCare y ubicar afuera los actores como roles (Recepcionista, Veterinario, Administrador y el servicio externo de mensajeria como actor secundario candidato, que hoy todavia no se conecta a ningun caso de uso); ningun actor puede llamarse con nombre propio ni con cargo inventado.</a:t>
+            </a:r>
+          </a:p>
+        </p:txBody>
+      </p:sp>
+      <p:sp>
+        <p:nvSpPr>
+          <p:cNvPr id="9" name="Rounded Rectangle 8"/>
+          <p:cNvSpPr/>
+          <p:nvPr/>
+        </p:nvSpPr>
+        <p:spPr>
+          <a:xfrm>
+            <a:off x="457200" y="2276856"/>
+            <a:ext cx="11277295" cy="950976"/>
+          </a:xfrm>
+          <a:prstGeom prst="roundRect">
+            <a:avLst>
+              <a:gd name="adj" fmla="val 12000"/>
+            </a:avLst>
+          </a:prstGeom>
+          <a:solidFill>
+            <a:srgbClr val="E8F4FA"/>
+          </a:solidFill>
+          <a:ln>
+            <a:noFill/>
+          </a:ln>
+        </p:spPr>
+        <p:style>
+          <a:lnRef idx="1">
+            <a:schemeClr val="accent1"/>
+          </a:lnRef>
+          <a:fillRef idx="3">
+            <a:schemeClr val="accent1"/>
+          </a:fillRef>
+          <a:effectRef idx="2">
+            <a:schemeClr val="accent1"/>
+          </a:effectRef>
+          <a:fontRef idx="minor">
+            <a:schemeClr val="lt1"/>
+          </a:fontRef>
+        </p:style>
+        <p:txBody>
+          <a:bodyPr rtlCol="0" anchor="ctr"/>
+          <a:lstStyle/>
+          <a:p>
+            <a:pPr algn="ctr"/>
+          </a:p>
+        </p:txBody>
+      </p:sp>
+      <p:sp>
+        <p:nvSpPr>
+          <p:cNvPr id="10" name="Rounded Rectangle 9"/>
+          <p:cNvSpPr/>
+          <p:nvPr/>
+        </p:nvSpPr>
+        <p:spPr>
+          <a:xfrm>
+            <a:off x="594360" y="2532888"/>
+            <a:ext cx="438912" cy="438912"/>
+          </a:xfrm>
+          <a:prstGeom prst="roundRect">
+            <a:avLst>
+              <a:gd name="adj" fmla="val 12000"/>
+            </a:avLst>
+          </a:prstGeom>
+          <a:solidFill>
+            <a:srgbClr val="095292"/>
+          </a:solidFill>
+          <a:ln>
+            <a:noFill/>
+          </a:ln>
+        </p:spPr>
+        <p:style>
+          <a:lnRef idx="1">
+            <a:schemeClr val="accent1"/>
+          </a:lnRef>
+          <a:fillRef idx="3">
+            <a:schemeClr val="accent1"/>
+          </a:fillRef>
+          <a:effectRef idx="2">
+            <a:schemeClr val="accent1"/>
+          </a:effectRef>
+          <a:fontRef idx="minor">
+            <a:schemeClr val="lt1"/>
+          </a:fontRef>
+        </p:style>
+        <p:txBody>
+          <a:bodyPr rtlCol="0" anchor="ctr"/>
+          <a:lstStyle/>
+          <a:p>
+            <a:pPr algn="ctr"/>
+          </a:p>
+        </p:txBody>
+      </p:sp>
+      <p:sp>
+        <p:nvSpPr>
+          <p:cNvPr id="11" name="TextBox 10"/>
+          <p:cNvSpPr txBox="1"/>
+          <p:nvPr/>
+        </p:nvSpPr>
+        <p:spPr>
+          <a:xfrm>
+            <a:off x="594360" y="2532888"/>
+            <a:ext cx="438912" cy="438912"/>
+          </a:xfrm>
+          <a:prstGeom prst="rect">
+            <a:avLst/>
+          </a:prstGeom>
+          <a:noFill/>
+        </p:spPr>
+        <p:txBody>
+          <a:bodyPr wrap="square" anchor="ctr"/>
+          <a:lstStyle/>
+          <a:p>
+            <a:pPr algn="ctr"/>
+            <a:r>
+              <a:rPr sz="1600" b="1" i="0">
+                <a:solidFill>
+                  <a:srgbClr val="FFFFFF"/>
+                </a:solidFill>
+                <a:latin typeface="Calibri"/>
+              </a:rPr>
+              <a:t>2</a:t>
+            </a:r>
+          </a:p>
+        </p:txBody>
+      </p:sp>
+      <p:sp>
+        <p:nvSpPr>
+          <p:cNvPr id="12" name="TextBox 11"/>
+          <p:cNvSpPr txBox="1"/>
+          <p:nvPr/>
+        </p:nvSpPr>
+        <p:spPr>
+          <a:xfrm>
+            <a:off x="1188720" y="2368296"/>
+            <a:ext cx="10271455" cy="786384"/>
+          </a:xfrm>
+          <a:prstGeom prst="rect">
+            <a:avLst/>
+          </a:prstGeom>
+          <a:noFill/>
+        </p:spPr>
+        <p:txBody>
+          <a:bodyPr wrap="square" anchor="ctr"/>
+          <a:lstStyle/>
+          <a:p>
+            <a:r>
+              <a:rPr sz="1400" b="1" i="0">
+                <a:solidFill>
+                  <a:srgbClr val="095292"/>
+                </a:solidFill>
+                <a:latin typeface="Calibri"/>
+              </a:rPr>
+              <a:t>Colocar dentro del limite entre seis y ocho casos de uso derivados del catalogo de RF ya construido, todos redactados como verbo en infinitivo mas objeto del dominio, y borrar de inmediato cualquier elipse que se llame Guardar, Validar, Mostrar o Iniciar pantalla.</a:t>
+            </a:r>
+          </a:p>
+        </p:txBody>
+      </p:sp>
+      <p:sp>
+        <p:nvSpPr>
+          <p:cNvPr id="13" name="Rounded Rectangle 12"/>
+          <p:cNvSpPr/>
+          <p:nvPr/>
+        </p:nvSpPr>
+        <p:spPr>
+          <a:xfrm>
+            <a:off x="457200" y="3319272"/>
+            <a:ext cx="11277295" cy="950976"/>
+          </a:xfrm>
+          <a:prstGeom prst="roundRect">
+            <a:avLst>
+              <a:gd name="adj" fmla="val 12000"/>
+            </a:avLst>
+          </a:prstGeom>
+          <a:solidFill>
+            <a:srgbClr val="F2F2F2"/>
+          </a:solidFill>
+          <a:ln>
+            <a:noFill/>
+          </a:ln>
+        </p:spPr>
+        <p:style>
+          <a:lnRef idx="1">
+            <a:schemeClr val="accent1"/>
+          </a:lnRef>
+          <a:fillRef idx="3">
+            <a:schemeClr val="accent1"/>
+          </a:fillRef>
+          <a:effectRef idx="2">
+            <a:schemeClr val="accent1"/>
+          </a:effectRef>
+          <a:fontRef idx="minor">
+            <a:schemeClr val="lt1"/>
+          </a:fontRef>
+        </p:style>
+        <p:txBody>
+          <a:bodyPr rtlCol="0" anchor="ctr"/>
+          <a:lstStyle/>
+          <a:p>
+            <a:pPr algn="ctr"/>
+          </a:p>
+        </p:txBody>
+      </p:sp>
+      <p:sp>
+        <p:nvSpPr>
+          <p:cNvPr id="14" name="Rounded Rectangle 13"/>
+          <p:cNvSpPr/>
+          <p:nvPr/>
+        </p:nvSpPr>
+        <p:spPr>
+          <a:xfrm>
+            <a:off x="594360" y="3575304"/>
+            <a:ext cx="438912" cy="438912"/>
+          </a:xfrm>
+          <a:prstGeom prst="roundRect">
+            <a:avLst>
+              <a:gd name="adj" fmla="val 12000"/>
+            </a:avLst>
+          </a:prstGeom>
+          <a:solidFill>
+            <a:srgbClr val="095292"/>
+          </a:solidFill>
+          <a:ln>
+            <a:noFill/>
+          </a:ln>
+        </p:spPr>
+        <p:style>
+          <a:lnRef idx="1">
+            <a:schemeClr val="accent1"/>
+          </a:lnRef>
+          <a:fillRef idx="3">
+            <a:schemeClr val="accent1"/>
+          </a:fillRef>
+          <a:effectRef idx="2">
+            <a:schemeClr val="accent1"/>
+          </a:effectRef>
+          <a:fontRef idx="minor">
+            <a:schemeClr val="lt1"/>
+          </a:fontRef>
+        </p:style>
+        <p:txBody>
+          <a:bodyPr rtlCol="0" anchor="ctr"/>
+          <a:lstStyle/>
+          <a:p>
+            <a:pPr algn="ctr"/>
+          </a:p>
+        </p:txBody>
+      </p:sp>
+      <p:sp>
+        <p:nvSpPr>
+          <p:cNvPr id="15" name="TextBox 14"/>
+          <p:cNvSpPr txBox="1"/>
+          <p:nvPr/>
+        </p:nvSpPr>
+        <p:spPr>
+          <a:xfrm>
+            <a:off x="594360" y="3575304"/>
+            <a:ext cx="438912" cy="438912"/>
+          </a:xfrm>
+          <a:prstGeom prst="rect">
+            <a:avLst/>
+          </a:prstGeom>
+          <a:noFill/>
+        </p:spPr>
+        <p:txBody>
+          <a:bodyPr wrap="square" anchor="ctr"/>
+          <a:lstStyle/>
+          <a:p>
+            <a:pPr algn="ctr"/>
+            <a:r>
+              <a:rPr sz="1600" b="1" i="0">
+                <a:solidFill>
+                  <a:srgbClr val="FFFFFF"/>
+                </a:solidFill>
+                <a:latin typeface="Calibri"/>
+              </a:rPr>
+              <a:t>3</a:t>
+            </a:r>
+          </a:p>
+        </p:txBody>
+      </p:sp>
+      <p:sp>
+        <p:nvSpPr>
+          <p:cNvPr id="16" name="TextBox 15"/>
+          <p:cNvSpPr txBox="1"/>
+          <p:nvPr/>
+        </p:nvSpPr>
+        <p:spPr>
+          <a:xfrm>
+            <a:off x="1188720" y="3410712"/>
+            <a:ext cx="10271455" cy="786384"/>
+          </a:xfrm>
+          <a:prstGeom prst="rect">
+            <a:avLst/>
+          </a:prstGeom>
+          <a:noFill/>
+        </p:spPr>
+        <p:txBody>
+          <a:bodyPr wrap="square" anchor="ctr"/>
+          <a:lstStyle/>
+          <a:p>
+            <a:r>
+              <a:rPr sz="1400" b="1" i="0">
+                <a:solidFill>
+                  <a:srgbClr val="095292"/>
+                </a:solidFill>
+                <a:latin typeface="Calibri"/>
+              </a:rPr>
+              <a:t>Construir en Google Docs la matriz de trazabilidad RF a CU: cada requisito funcional debe apuntar al menos a un caso de uso y cada caso de uso debe nacer de al menos un requisito; marcar en rojo los huerfanos que aparezcan y anotar por escrito la decision que se tomara con cada uno.</a:t>
+            </a:r>
+          </a:p>
+        </p:txBody>
+      </p:sp>
+      <p:sp>
+        <p:nvSpPr>
+          <p:cNvPr id="17" name="Rounded Rectangle 16"/>
+          <p:cNvSpPr/>
+          <p:nvPr/>
+        </p:nvSpPr>
+        <p:spPr>
+          <a:xfrm>
+            <a:off x="457200" y="4361688"/>
+            <a:ext cx="11277295" cy="950976"/>
+          </a:xfrm>
+          <a:prstGeom prst="roundRect">
+            <a:avLst>
+              <a:gd name="adj" fmla="val 12000"/>
+            </a:avLst>
+          </a:prstGeom>
+          <a:solidFill>
+            <a:srgbClr val="E8F4FA"/>
+          </a:solidFill>
+          <a:ln>
+            <a:noFill/>
+          </a:ln>
+        </p:spPr>
+        <p:style>
+          <a:lnRef idx="1">
+            <a:schemeClr val="accent1"/>
+          </a:lnRef>
+          <a:fillRef idx="3">
+            <a:schemeClr val="accent1"/>
+          </a:fillRef>
+          <a:effectRef idx="2">
+            <a:schemeClr val="accent1"/>
+          </a:effectRef>
+          <a:fontRef idx="minor">
+            <a:schemeClr val="lt1"/>
+          </a:fontRef>
+        </p:style>
+        <p:txBody>
+          <a:bodyPr rtlCol="0" anchor="ctr"/>
+          <a:lstStyle/>
+          <a:p>
+            <a:pPr algn="ctr"/>
+          </a:p>
+        </p:txBody>
+      </p:sp>
+      <p:sp>
+        <p:nvSpPr>
+          <p:cNvPr id="18" name="Rounded Rectangle 17"/>
+          <p:cNvSpPr/>
+          <p:nvPr/>
+        </p:nvSpPr>
+        <p:spPr>
+          <a:xfrm>
+            <a:off x="594360" y="4617720"/>
+            <a:ext cx="438912" cy="438912"/>
+          </a:xfrm>
+          <a:prstGeom prst="roundRect">
+            <a:avLst>
+              <a:gd name="adj" fmla="val 12000"/>
+            </a:avLst>
+          </a:prstGeom>
+          <a:solidFill>
+            <a:srgbClr val="095292"/>
+          </a:solidFill>
+          <a:ln>
+            <a:noFill/>
+          </a:ln>
+        </p:spPr>
+        <p:style>
+          <a:lnRef idx="1">
+            <a:schemeClr val="accent1"/>
+          </a:lnRef>
+          <a:fillRef idx="3">
+            <a:schemeClr val="accent1"/>
+          </a:fillRef>
+          <a:effectRef idx="2">
+            <a:schemeClr val="accent1"/>
+          </a:effectRef>
+          <a:fontRef idx="minor">
+            <a:schemeClr val="lt1"/>
+          </a:fontRef>
+        </p:style>
+        <p:txBody>
+          <a:bodyPr rtlCol="0" anchor="ctr"/>
+          <a:lstStyle/>
+          <a:p>
+            <a:pPr algn="ctr"/>
+          </a:p>
+        </p:txBody>
+      </p:sp>
+      <p:sp>
+        <p:nvSpPr>
+          <p:cNvPr id="19" name="TextBox 18"/>
+          <p:cNvSpPr txBox="1"/>
+          <p:nvPr/>
+        </p:nvSpPr>
+        <p:spPr>
+          <a:xfrm>
+            <a:off x="594360" y="4617720"/>
+            <a:ext cx="438912" cy="438912"/>
+          </a:xfrm>
+          <a:prstGeom prst="rect">
+            <a:avLst/>
+          </a:prstGeom>
+          <a:noFill/>
+        </p:spPr>
+        <p:txBody>
+          <a:bodyPr wrap="square" anchor="ctr"/>
+          <a:lstStyle/>
+          <a:p>
+            <a:pPr algn="ctr"/>
+            <a:r>
+              <a:rPr sz="1600" b="1" i="0">
+                <a:solidFill>
+                  <a:srgbClr val="FFFFFF"/>
+                </a:solidFill>
+                <a:latin typeface="Calibri"/>
+              </a:rPr>
+              <a:t>4</a:t>
+            </a:r>
+          </a:p>
+        </p:txBody>
+      </p:sp>
+      <p:sp>
+        <p:nvSpPr>
+          <p:cNvPr id="20" name="TextBox 19"/>
+          <p:cNvSpPr txBox="1"/>
+          <p:nvPr/>
+        </p:nvSpPr>
+        <p:spPr>
+          <a:xfrm>
+            <a:off x="1188720" y="4453128"/>
+            <a:ext cx="10271455" cy="786384"/>
+          </a:xfrm>
+          <a:prstGeom prst="rect">
+            <a:avLst/>
+          </a:prstGeom>
+          <a:noFill/>
+        </p:spPr>
+        <p:txBody>
+          <a:bodyPr wrap="square" anchor="ctr"/>
+          <a:lstStyle/>
+          <a:p>
+            <a:r>
+              <a:rPr sz="1500" b="1" i="0">
+                <a:solidFill>
+                  <a:srgbClr val="095292"/>
+                </a:solidFill>
+                <a:latin typeface="Calibri"/>
+              </a:rPr>
+              <a:t>Modelar exactamente una relacion include y una relacion extend en el diagrama, y escribir al lado, en una nota de draw.io, una frase que justifique por que una es obligatoria y la otra condicional; si no se puede justificar, se elimina la flecha.</a:t>
+            </a:r>
+          </a:p>
+        </p:txBody>
+      </p:sp>
+      <p:sp>
+        <p:nvSpPr>
+          <p:cNvPr id="21" name="Rounded Rectangle 20"/>
+          <p:cNvSpPr/>
+          <p:nvPr/>
+        </p:nvSpPr>
+        <p:spPr>
+          <a:xfrm>
+            <a:off x="457200" y="5404104"/>
+            <a:ext cx="11277295" cy="950976"/>
+          </a:xfrm>
+          <a:prstGeom prst="roundRect">
+            <a:avLst>
+              <a:gd name="adj" fmla="val 12000"/>
+            </a:avLst>
+          </a:prstGeom>
+          <a:solidFill>
+            <a:srgbClr val="F2F2F2"/>
+          </a:solidFill>
+          <a:ln>
+            <a:noFill/>
+          </a:ln>
+        </p:spPr>
+        <p:style>
+          <a:lnRef idx="1">
+            <a:schemeClr val="accent1"/>
+          </a:lnRef>
+          <a:fillRef idx="3">
+            <a:schemeClr val="accent1"/>
+          </a:fillRef>
+          <a:effectRef idx="2">
+            <a:schemeClr val="accent1"/>
+          </a:effectRef>
+          <a:fontRef idx="minor">
+            <a:schemeClr val="lt1"/>
+          </a:fontRef>
+        </p:style>
+        <p:txBody>
+          <a:bodyPr rtlCol="0" anchor="ctr"/>
+          <a:lstStyle/>
+          <a:p>
+            <a:pPr algn="ctr"/>
+          </a:p>
+        </p:txBody>
+      </p:sp>
+      <p:sp>
+        <p:nvSpPr>
+          <p:cNvPr id="22" name="Rounded Rectangle 21"/>
+          <p:cNvSpPr/>
+          <p:nvPr/>
+        </p:nvSpPr>
+        <p:spPr>
+          <a:xfrm>
+            <a:off x="594360" y="5660136"/>
+            <a:ext cx="438912" cy="438912"/>
+          </a:xfrm>
+          <a:prstGeom prst="roundRect">
+            <a:avLst>
+              <a:gd name="adj" fmla="val 12000"/>
+            </a:avLst>
+          </a:prstGeom>
+          <a:solidFill>
+            <a:srgbClr val="095292"/>
+          </a:solidFill>
+          <a:ln>
+            <a:noFill/>
+          </a:ln>
+        </p:spPr>
+        <p:style>
+          <a:lnRef idx="1">
+            <a:schemeClr val="accent1"/>
+          </a:lnRef>
+          <a:fillRef idx="3">
+            <a:schemeClr val="accent1"/>
+          </a:fillRef>
+          <a:effectRef idx="2">
+            <a:schemeClr val="accent1"/>
+          </a:effectRef>
+          <a:fontRef idx="minor">
+            <a:schemeClr val="lt1"/>
+          </a:fontRef>
+        </p:style>
+        <p:txBody>
+          <a:bodyPr rtlCol="0" anchor="ctr"/>
+          <a:lstStyle/>
+          <a:p>
+            <a:pPr algn="ctr"/>
+          </a:p>
+        </p:txBody>
+      </p:sp>
+      <p:sp>
+        <p:nvSpPr>
+          <p:cNvPr id="23" name="TextBox 22"/>
+          <p:cNvSpPr txBox="1"/>
+          <p:nvPr/>
+        </p:nvSpPr>
+        <p:spPr>
+          <a:xfrm>
+            <a:off x="594360" y="5660136"/>
+            <a:ext cx="438912" cy="438912"/>
+          </a:xfrm>
+          <a:prstGeom prst="rect">
+            <a:avLst/>
+          </a:prstGeom>
+          <a:noFill/>
+        </p:spPr>
+        <p:txBody>
+          <a:bodyPr wrap="square" anchor="ctr"/>
+          <a:lstStyle/>
+          <a:p>
+            <a:pPr algn="ctr"/>
+            <a:r>
+              <a:rPr sz="1600" b="1" i="0">
+                <a:solidFill>
+                  <a:srgbClr val="FFFFFF"/>
+                </a:solidFill>
+                <a:latin typeface="Calibri"/>
+              </a:rPr>
+              <a:t>5</a:t>
+            </a:r>
+          </a:p>
+        </p:txBody>
+      </p:sp>
+      <p:sp>
+        <p:nvSpPr>
+          <p:cNvPr id="24" name="TextBox 23"/>
+          <p:cNvSpPr txBox="1"/>
+          <p:nvPr/>
+        </p:nvSpPr>
+        <p:spPr>
+          <a:xfrm>
+            <a:off x="1188720" y="5495544"/>
+            <a:ext cx="10271455" cy="786384"/>
+          </a:xfrm>
+          <a:prstGeom prst="rect">
+            <a:avLst/>
+          </a:prstGeom>
+          <a:noFill/>
+        </p:spPr>
+        <p:txBody>
+          <a:bodyPr wrap="square" anchor="ctr"/>
+          <a:lstStyle/>
+          <a:p>
+            <a:r>
+              <a:rPr sz="1400" b="1" i="0">
+                <a:solidFill>
+                  <a:srgbClr val="095292"/>
+                </a:solidFill>
+                <a:latin typeface="Calibri"/>
+              </a:rPr>
+              <a:t>Diligenciar la plantilla completa de especificacion para CU-01 Registrar mascota y CU-02 Buscar expediente, con precondiciones, postcondiciones de exito y de fracaso, flujo principal en pares actor-sistema y minimo dos flujos alternos cada uno; exportar todo a PDF y subirlo a la plataforma del curso.</a:t>
+            </a:r>
+          </a:p>
+        </p:txBody>
+      </p:sp>
+      <p:sp>
+        <p:nvSpPr>
+          <p:cNvPr id="25" name="TextBox 24"/>
           <p:cNvSpPr txBox="1"/>
           <p:nvPr/>
         </p:nvSpPr>
@@ -8721,7 +8918,7 @@
                 </a:solidFill>
                 <a:latin typeface="Calibri"/>
               </a:rPr>
-              <a:t>Para el PI esta semana</a:t>
+              <a:t>Antes de entregar — autochequeo</a:t>
             </a:r>
           </a:p>
         </p:txBody>
@@ -8735,7 +8932,7 @@
         <p:spPr>
           <a:xfrm>
             <a:off x="457200" y="1261872"/>
-            <a:ext cx="11277295" cy="1051560"/>
+            <a:ext cx="11277295" cy="566928"/>
           </a:xfrm>
           <a:prstGeom prst="roundRect">
             <a:avLst>
@@ -8743,7 +8940,7 @@
             </a:avLst>
           </a:prstGeom>
           <a:solidFill>
-            <a:srgbClr val="E8F4FA"/>
+            <a:srgbClr val="F2F2F2"/>
           </a:solidFill>
           <a:ln>
             <a:noFill/>
@@ -8779,8 +8976,53 @@
         </p:nvSpPr>
         <p:spPr>
           <a:xfrm>
-            <a:off x="457200" y="1261872"/>
-            <a:ext cx="128016" cy="1051560"/>
+            <a:off x="640080" y="1408175"/>
+            <a:ext cx="274320" cy="274320"/>
+          </a:xfrm>
+          <a:prstGeom prst="rect">
+            <a:avLst/>
+          </a:prstGeom>
+          <a:solidFill>
+            <a:srgbClr val="FFFFFF"/>
+          </a:solidFill>
+          <a:ln>
+            <a:solidFill>
+              <a:srgbClr val="333333"/>
+            </a:solidFill>
+          </a:ln>
+        </p:spPr>
+        <p:style>
+          <a:lnRef idx="1">
+            <a:schemeClr val="accent1"/>
+          </a:lnRef>
+          <a:fillRef idx="3">
+            <a:schemeClr val="accent1"/>
+          </a:fillRef>
+          <a:effectRef idx="2">
+            <a:schemeClr val="accent1"/>
+          </a:effectRef>
+          <a:fontRef idx="minor">
+            <a:schemeClr val="lt1"/>
+          </a:fontRef>
+        </p:style>
+        <p:txBody>
+          <a:bodyPr rtlCol="0" anchor="ctr"/>
+          <a:lstStyle/>
+          <a:p>
+            <a:pPr algn="ctr"/>
+          </a:p>
+        </p:txBody>
+      </p:sp>
+      <p:sp>
+        <p:nvSpPr>
+          <p:cNvPr id="7" name="Rectangle 6"/>
+          <p:cNvSpPr/>
+          <p:nvPr/>
+        </p:nvSpPr>
+        <p:spPr>
+          <a:xfrm>
+            <a:off x="640080" y="1408175"/>
+            <a:ext cx="73152" cy="274320"/>
           </a:xfrm>
           <a:prstGeom prst="rect">
             <a:avLst/>
@@ -8816,14 +9058,14 @@
       </p:sp>
       <p:sp>
         <p:nvSpPr>
-          <p:cNvPr id="7" name="TextBox 6"/>
+          <p:cNvPr id="8" name="TextBox 7"/>
           <p:cNvSpPr txBox="1"/>
           <p:nvPr/>
         </p:nvSpPr>
         <p:spPr>
           <a:xfrm>
-            <a:off x="777240" y="1399031"/>
-            <a:ext cx="10774375" cy="822959"/>
+            <a:off x="1097280" y="1353312"/>
+            <a:ext cx="10362895" cy="402336"/>
           </a:xfrm>
           <a:prstGeom prst="rect">
             <a:avLst/>
@@ -8831,49 +9073,31 @@
           <a:noFill/>
         </p:spPr>
         <p:txBody>
-          <a:bodyPr wrap="square">
-            <a:spAutoFit/>
-          </a:bodyPr>
-          <a:lstStyle/>
-          <a:p>
-            <a:r>
-              <a:rPr sz="1200" b="1" i="0">
-                <a:solidFill>
-                  <a:srgbClr val="269CCB"/>
-                </a:solidFill>
-                <a:latin typeface="Calibri"/>
-              </a:rPr>
-              <a:t>Info</a:t>
-            </a:r>
-          </a:p>
-          <a:p>
-            <a:pPr>
-              <a:spcBef>
-                <a:spcPts val="400"/>
-              </a:spcBef>
-            </a:pPr>
-            <a:r>
-              <a:rPr sz="1400" b="0" i="0">
+          <a:bodyPr wrap="square" anchor="ctr"/>
+          <a:lstStyle/>
+          <a:p>
+            <a:r>
+              <a:rPr sz="1500" b="0" i="0">
                 <a:solidFill>
                   <a:srgbClr val="333333"/>
                 </a:solidFill>
                 <a:latin typeface="Calibri"/>
               </a:rPr>
-              <a:t>Hito: Queda listo el diagrama de casos de uso de VetCare con su limite de sistema y la especificacion textual completa de Registrar mascota y Buscar expediente.</a:t>
-            </a:r>
-          </a:p>
-        </p:txBody>
-      </p:sp>
-      <p:sp>
-        <p:nvSpPr>
-          <p:cNvPr id="8" name="Rounded Rectangle 7"/>
+              <a:t>Si un actor se fuera a almorzar justo despues de ejecutar su caso de uso, quedaria satisfecho o le faltaria algo por hacer?</a:t>
+            </a:r>
+          </a:p>
+        </p:txBody>
+      </p:sp>
+      <p:sp>
+        <p:nvSpPr>
+          <p:cNvPr id="9" name="Rounded Rectangle 8"/>
           <p:cNvSpPr/>
           <p:nvPr/>
         </p:nvSpPr>
         <p:spPr>
           <a:xfrm>
-            <a:off x="457200" y="2478024"/>
-            <a:ext cx="11277295" cy="1051560"/>
+            <a:off x="457200" y="1938528"/>
+            <a:ext cx="11277295" cy="566928"/>
           </a:xfrm>
           <a:prstGeom prst="roundRect">
             <a:avLst>
@@ -8881,7 +9105,7 @@
             </a:avLst>
           </a:prstGeom>
           <a:solidFill>
-            <a:srgbClr val="FFF8E1"/>
+            <a:srgbClr val="F2F2F2"/>
           </a:solidFill>
           <a:ln>
             <a:noFill/>
@@ -8911,23 +9135,25 @@
       </p:sp>
       <p:sp>
         <p:nvSpPr>
-          <p:cNvPr id="9" name="Rectangle 8"/>
+          <p:cNvPr id="10" name="Rectangle 9"/>
           <p:cNvSpPr/>
           <p:nvPr/>
         </p:nvSpPr>
         <p:spPr>
           <a:xfrm>
-            <a:off x="457200" y="2478024"/>
-            <a:ext cx="128016" cy="1051560"/>
+            <a:off x="640080" y="2084832"/>
+            <a:ext cx="274320" cy="274320"/>
           </a:xfrm>
           <a:prstGeom prst="rect">
             <a:avLst/>
           </a:prstGeom>
           <a:solidFill>
-            <a:srgbClr val="FFD000"/>
+            <a:srgbClr val="FFFFFF"/>
           </a:solidFill>
           <a:ln>
-            <a:noFill/>
+            <a:solidFill>
+              <a:srgbClr val="333333"/>
+            </a:solidFill>
           </a:ln>
         </p:spPr>
         <p:style>
@@ -8954,72 +9180,20 @@
       </p:sp>
       <p:sp>
         <p:nvSpPr>
-          <p:cNvPr id="10" name="TextBox 9"/>
-          <p:cNvSpPr txBox="1"/>
-          <p:nvPr/>
-        </p:nvSpPr>
-        <p:spPr>
-          <a:xfrm>
-            <a:off x="777240" y="2615184"/>
-            <a:ext cx="10774375" cy="822959"/>
-          </a:xfrm>
-          <a:prstGeom prst="rect">
-            <a:avLst/>
-          </a:prstGeom>
-          <a:noFill/>
-        </p:spPr>
-        <p:txBody>
-          <a:bodyPr wrap="square">
-            <a:spAutoFit/>
-          </a:bodyPr>
-          <a:lstStyle/>
-          <a:p>
-            <a:r>
-              <a:rPr sz="1200" b="1" i="0">
-                <a:solidFill>
-                  <a:srgbClr val="FFD000"/>
-                </a:solidFill>
-                <a:latin typeface="Calibri"/>
-              </a:rPr>
-              <a:t>Aclaración</a:t>
-            </a:r>
-          </a:p>
-          <a:p>
-            <a:pPr>
-              <a:spcBef>
-                <a:spcPts val="400"/>
-              </a:spcBef>
-            </a:pPr>
-            <a:r>
-              <a:rPr sz="1400" b="0" i="0">
-                <a:solidFill>
-                  <a:srgbClr val="333333"/>
-                </a:solidFill>
-                <a:latin typeface="Calibri"/>
-              </a:rPr>
-              <a:t>Enunciado completo: Clases/Proyecto Integrador/ (VetCare).</a:t>
-            </a:r>
-          </a:p>
-        </p:txBody>
-      </p:sp>
-      <p:sp>
-        <p:nvSpPr>
-          <p:cNvPr id="11" name="Rounded Rectangle 10"/>
+          <p:cNvPr id="11" name="Rectangle 10"/>
           <p:cNvSpPr/>
           <p:nvPr/>
         </p:nvSpPr>
         <p:spPr>
           <a:xfrm>
-            <a:off x="457200" y="3694176"/>
-            <a:ext cx="11277295" cy="1051560"/>
-          </a:xfrm>
-          <a:prstGeom prst="roundRect">
-            <a:avLst>
-              <a:gd name="adj" fmla="val 12000"/>
-            </a:avLst>
+            <a:off x="640080" y="2084832"/>
+            <a:ext cx="73152" cy="274320"/>
+          </a:xfrm>
+          <a:prstGeom prst="rect">
+            <a:avLst/>
           </a:prstGeom>
           <a:solidFill>
-            <a:srgbClr val="FBE4E4"/>
+            <a:srgbClr val="269CCB"/>
           </a:solidFill>
           <a:ln>
             <a:noFill/>
@@ -9049,20 +9223,54 @@
       </p:sp>
       <p:sp>
         <p:nvSpPr>
-          <p:cNvPr id="12" name="Rectangle 11"/>
+          <p:cNvPr id="12" name="TextBox 11"/>
+          <p:cNvSpPr txBox="1"/>
+          <p:nvPr/>
+        </p:nvSpPr>
+        <p:spPr>
+          <a:xfrm>
+            <a:off x="1097280" y="2029968"/>
+            <a:ext cx="10362895" cy="402336"/>
+          </a:xfrm>
+          <a:prstGeom prst="rect">
+            <a:avLst/>
+          </a:prstGeom>
+          <a:noFill/>
+        </p:spPr>
+        <p:txBody>
+          <a:bodyPr wrap="square" anchor="ctr"/>
+          <a:lstStyle/>
+          <a:p>
+            <a:r>
+              <a:rPr sz="1500" b="0" i="0">
+                <a:solidFill>
+                  <a:srgbClr val="333333"/>
+                </a:solidFill>
+                <a:latin typeface="Calibri"/>
+              </a:rPr>
+              <a:t>Su flujo principal describe pasos del negocio o describe clics sobre una interfaz que todavia no existe?</a:t>
+            </a:r>
+          </a:p>
+        </p:txBody>
+      </p:sp>
+      <p:sp>
+        <p:nvSpPr>
+          <p:cNvPr id="13" name="Rounded Rectangle 12"/>
           <p:cNvSpPr/>
           <p:nvPr/>
         </p:nvSpPr>
         <p:spPr>
           <a:xfrm>
-            <a:off x="457200" y="3694176"/>
-            <a:ext cx="128016" cy="1051560"/>
-          </a:xfrm>
-          <a:prstGeom prst="rect">
-            <a:avLst/>
+            <a:off x="457200" y="2615184"/>
+            <a:ext cx="11277295" cy="566928"/>
+          </a:xfrm>
+          <a:prstGeom prst="roundRect">
+            <a:avLst>
+              <a:gd name="adj" fmla="val 12000"/>
+            </a:avLst>
           </a:prstGeom>
           <a:solidFill>
-            <a:srgbClr val="A02030"/>
+            <a:srgbClr val="F2F2F2"/>
           </a:solidFill>
           <a:ln>
             <a:noFill/>
@@ -9092,14 +9300,102 @@
       </p:sp>
       <p:sp>
         <p:nvSpPr>
-          <p:cNvPr id="13" name="TextBox 12"/>
+          <p:cNvPr id="14" name="Rectangle 13"/>
+          <p:cNvSpPr/>
+          <p:nvPr/>
+        </p:nvSpPr>
+        <p:spPr>
+          <a:xfrm>
+            <a:off x="640080" y="2761488"/>
+            <a:ext cx="274320" cy="274320"/>
+          </a:xfrm>
+          <a:prstGeom prst="rect">
+            <a:avLst/>
+          </a:prstGeom>
+          <a:solidFill>
+            <a:srgbClr val="FFFFFF"/>
+          </a:solidFill>
+          <a:ln>
+            <a:solidFill>
+              <a:srgbClr val="333333"/>
+            </a:solidFill>
+          </a:ln>
+        </p:spPr>
+        <p:style>
+          <a:lnRef idx="1">
+            <a:schemeClr val="accent1"/>
+          </a:lnRef>
+          <a:fillRef idx="3">
+            <a:schemeClr val="accent1"/>
+          </a:fillRef>
+          <a:effectRef idx="2">
+            <a:schemeClr val="accent1"/>
+          </a:effectRef>
+          <a:fontRef idx="minor">
+            <a:schemeClr val="lt1"/>
+          </a:fontRef>
+        </p:style>
+        <p:txBody>
+          <a:bodyPr rtlCol="0" anchor="ctr"/>
+          <a:lstStyle/>
+          <a:p>
+            <a:pPr algn="ctr"/>
+          </a:p>
+        </p:txBody>
+      </p:sp>
+      <p:sp>
+        <p:nvSpPr>
+          <p:cNvPr id="15" name="Rectangle 14"/>
+          <p:cNvSpPr/>
+          <p:nvPr/>
+        </p:nvSpPr>
+        <p:spPr>
+          <a:xfrm>
+            <a:off x="640080" y="2761488"/>
+            <a:ext cx="73152" cy="274320"/>
+          </a:xfrm>
+          <a:prstGeom prst="rect">
+            <a:avLst/>
+          </a:prstGeom>
+          <a:solidFill>
+            <a:srgbClr val="269CCB"/>
+          </a:solidFill>
+          <a:ln>
+            <a:noFill/>
+          </a:ln>
+        </p:spPr>
+        <p:style>
+          <a:lnRef idx="1">
+            <a:schemeClr val="accent1"/>
+          </a:lnRef>
+          <a:fillRef idx="3">
+            <a:schemeClr val="accent1"/>
+          </a:fillRef>
+          <a:effectRef idx="2">
+            <a:schemeClr val="accent1"/>
+          </a:effectRef>
+          <a:fontRef idx="minor">
+            <a:schemeClr val="lt1"/>
+          </a:fontRef>
+        </p:style>
+        <p:txBody>
+          <a:bodyPr rtlCol="0" anchor="ctr"/>
+          <a:lstStyle/>
+          <a:p>
+            <a:pPr algn="ctr"/>
+          </a:p>
+        </p:txBody>
+      </p:sp>
+      <p:sp>
+        <p:nvSpPr>
+          <p:cNvPr id="16" name="TextBox 15"/>
           <p:cNvSpPr txBox="1"/>
           <p:nvPr/>
         </p:nvSpPr>
         <p:spPr>
           <a:xfrm>
-            <a:off x="777240" y="3831336"/>
-            <a:ext cx="10774375" cy="822959"/>
+            <a:off x="1097280" y="2706624"/>
+            <a:ext cx="10362895" cy="402336"/>
           </a:xfrm>
           <a:prstGeom prst="rect">
             <a:avLst/>
@@ -9107,42 +9403,24 @@
           <a:noFill/>
         </p:spPr>
         <p:txBody>
-          <a:bodyPr wrap="square">
-            <a:spAutoFit/>
-          </a:bodyPr>
-          <a:lstStyle/>
-          <a:p>
-            <a:r>
-              <a:rPr sz="1200" b="1" i="0">
-                <a:solidFill>
-                  <a:srgbClr val="A02030"/>
-                </a:solidFill>
-                <a:latin typeface="Calibri"/>
-              </a:rPr>
-              <a:t>Atención</a:t>
-            </a:r>
-          </a:p>
-          <a:p>
-            <a:pPr>
-              <a:spcBef>
-                <a:spcPts val="400"/>
-              </a:spcBef>
-            </a:pPr>
-            <a:r>
-              <a:rPr sz="1400" b="0" i="0">
+          <a:bodyPr wrap="square" anchor="ctr"/>
+          <a:lstStyle/>
+          <a:p>
+            <a:r>
+              <a:rPr sz="1500" b="0" i="0">
                 <a:solidFill>
                   <a:srgbClr val="333333"/>
                 </a:solidFill>
                 <a:latin typeface="Calibri"/>
               </a:rPr>
-              <a:t>Entrega del taller, si el docente lo asigna · en la fecha que indique el docente.</a:t>
-            </a:r>
-          </a:p>
-        </p:txBody>
-      </p:sp>
-      <p:sp>
-        <p:nvSpPr>
-          <p:cNvPr id="14" name="TextBox 13"/>
+              <a:t>Que pasa en Huellitas cuando el propietario no esta registrado, cuando la busqueda no devuelve nada y cuando hay dos mascotas con el mismo nombre? Aparece eso escrito en algun flujo alterno?</a:t>
+            </a:r>
+          </a:p>
+        </p:txBody>
+      </p:sp>
+      <p:sp>
+        <p:nvSpPr>
+          <p:cNvPr id="17" name="TextBox 16"/>
           <p:cNvSpPr txBox="1"/>
           <p:nvPr/>
         </p:nvSpPr>
@@ -9184,6 +9462,1009 @@
 </file>
 
 <file path=ppt/slides/slide21.xml><?xml version="1.0" encoding="utf-8"?>
+<p:sld xmlns:a="http://schemas.openxmlformats.org/drawingml/2006/main" xmlns:p="http://schemas.openxmlformats.org/presentationml/2006/main" xmlns:r="http://schemas.openxmlformats.org/officeDocument/2006/relationships">
+  <p:cSld>
+    <p:bg>
+      <p:bgPr>
+        <a:solidFill>
+          <a:srgbClr val="FFFFFF"/>
+        </a:solidFill>
+        <a:effectLst/>
+      </p:bgPr>
+    </p:bg>
+    <p:spTree>
+      <p:nvGrpSpPr>
+        <p:cNvPr id="1" name=""/>
+        <p:cNvGrpSpPr/>
+        <p:nvPr/>
+      </p:nvGrpSpPr>
+      <p:grpSpPr/>
+      <p:sp>
+        <p:nvSpPr>
+          <p:cNvPr id="2" name="Rectangle 1"/>
+          <p:cNvSpPr/>
+          <p:nvPr/>
+        </p:nvSpPr>
+        <p:spPr>
+          <a:xfrm>
+            <a:off x="0" y="0"/>
+            <a:ext cx="12191695" cy="960120"/>
+          </a:xfrm>
+          <a:prstGeom prst="rect">
+            <a:avLst/>
+          </a:prstGeom>
+          <a:solidFill>
+            <a:srgbClr val="095292"/>
+          </a:solidFill>
+          <a:ln>
+            <a:noFill/>
+          </a:ln>
+        </p:spPr>
+        <p:style>
+          <a:lnRef idx="1">
+            <a:schemeClr val="accent1"/>
+          </a:lnRef>
+          <a:fillRef idx="3">
+            <a:schemeClr val="accent1"/>
+          </a:fillRef>
+          <a:effectRef idx="2">
+            <a:schemeClr val="accent1"/>
+          </a:effectRef>
+          <a:fontRef idx="minor">
+            <a:schemeClr val="lt1"/>
+          </a:fontRef>
+        </p:style>
+        <p:txBody>
+          <a:bodyPr rtlCol="0" anchor="ctr"/>
+          <a:lstStyle/>
+          <a:p>
+            <a:pPr algn="ctr"/>
+          </a:p>
+        </p:txBody>
+      </p:sp>
+      <p:sp>
+        <p:nvSpPr>
+          <p:cNvPr id="3" name="Rectangle 2"/>
+          <p:cNvSpPr/>
+          <p:nvPr/>
+        </p:nvSpPr>
+        <p:spPr>
+          <a:xfrm>
+            <a:off x="0" y="960120"/>
+            <a:ext cx="12191695" cy="41148"/>
+          </a:xfrm>
+          <a:prstGeom prst="rect">
+            <a:avLst/>
+          </a:prstGeom>
+          <a:solidFill>
+            <a:srgbClr val="FFD000"/>
+          </a:solidFill>
+          <a:ln>
+            <a:noFill/>
+          </a:ln>
+        </p:spPr>
+        <p:style>
+          <a:lnRef idx="1">
+            <a:schemeClr val="accent1"/>
+          </a:lnRef>
+          <a:fillRef idx="3">
+            <a:schemeClr val="accent1"/>
+          </a:fillRef>
+          <a:effectRef idx="2">
+            <a:schemeClr val="accent1"/>
+          </a:effectRef>
+          <a:fontRef idx="minor">
+            <a:schemeClr val="lt1"/>
+          </a:fontRef>
+        </p:style>
+        <p:txBody>
+          <a:bodyPr rtlCol="0" anchor="ctr"/>
+          <a:lstStyle/>
+          <a:p>
+            <a:pPr algn="ctr"/>
+          </a:p>
+        </p:txBody>
+      </p:sp>
+      <p:sp>
+        <p:nvSpPr>
+          <p:cNvPr id="4" name="TextBox 3"/>
+          <p:cNvSpPr txBox="1"/>
+          <p:nvPr/>
+        </p:nvSpPr>
+        <p:spPr>
+          <a:xfrm>
+            <a:off x="457200" y="164592"/>
+            <a:ext cx="11277295" cy="502920"/>
+          </a:xfrm>
+          <a:prstGeom prst="rect">
+            <a:avLst/>
+          </a:prstGeom>
+          <a:noFill/>
+        </p:spPr>
+        <p:txBody>
+          <a:bodyPr wrap="square">
+            <a:spAutoFit/>
+          </a:bodyPr>
+          <a:lstStyle/>
+          <a:p>
+            <a:r>
+              <a:rPr sz="2600" b="1" i="0">
+                <a:solidFill>
+                  <a:srgbClr val="FFFFFF"/>
+                </a:solidFill>
+                <a:latin typeface="Calibri"/>
+              </a:rPr>
+              <a:t>Criterios de exito / entregable</a:t>
+            </a:r>
+          </a:p>
+        </p:txBody>
+      </p:sp>
+      <p:sp>
+        <p:nvSpPr>
+          <p:cNvPr id="5" name="TextBox 4"/>
+          <p:cNvSpPr txBox="1"/>
+          <p:nvPr/>
+        </p:nvSpPr>
+        <p:spPr>
+          <a:xfrm>
+            <a:off x="457200" y="1170432"/>
+            <a:ext cx="11277295" cy="5230368"/>
+          </a:xfrm>
+          <a:prstGeom prst="rect">
+            <a:avLst/>
+          </a:prstGeom>
+          <a:noFill/>
+        </p:spPr>
+        <p:txBody>
+          <a:bodyPr wrap="square">
+            <a:spAutoFit/>
+          </a:bodyPr>
+          <a:lstStyle/>
+          <a:p>
+            <a:pPr>
+              <a:spcAft>
+                <a:spcPts val="800"/>
+              </a:spcAft>
+            </a:pPr>
+            <a:r>
+              <a:rPr sz="2000" b="0" i="0">
+                <a:solidFill>
+                  <a:srgbClr val="333333"/>
+                </a:solidFill>
+                <a:latin typeface="Calibri"/>
+              </a:rPr>
+              <a:t>–   </a:t>
+            </a:r>
+            <a:r>
+              <a:rPr sz="2000" b="1" i="0">
+                <a:solidFill>
+                  <a:srgbClr val="333333"/>
+                </a:solidFill>
+                <a:latin typeface="Calibri"/>
+              </a:rPr>
+              <a:t>Entregable:</a:t>
+            </a:r>
+            <a:r>
+              <a:rPr sz="2000" b="0" i="0">
+                <a:solidFill>
+                  <a:srgbClr val="333333"/>
+                </a:solidFill>
+                <a:latin typeface="Calibri"/>
+              </a:rPr>
+              <a:t> Un PDF con el diagrama de casos de uso, la matriz de trazabilidad RF a CU y las dos especificaciones textuales completas (precondiciones, postcondiciones, flujo principal y minimo dos flujos alternos cada una), subido a la plataforma del curso.</a:t>
+            </a:r>
+          </a:p>
+          <a:p>
+            <a:pPr>
+              <a:spcAft>
+                <a:spcPts val="800"/>
+              </a:spcAft>
+            </a:pPr>
+            <a:r>
+              <a:rPr sz="2000" b="0" i="0">
+                <a:solidFill>
+                  <a:srgbClr val="333333"/>
+                </a:solidFill>
+                <a:latin typeface="Calibri"/>
+              </a:rPr>
+              <a:t>–   </a:t>
+            </a:r>
+            <a:r>
+              <a:rPr sz="2000" b="1" i="0">
+                <a:solidFill>
+                  <a:srgbClr val="333333"/>
+                </a:solidFill>
+                <a:latin typeface="Calibri"/>
+              </a:rPr>
+              <a:t>Exito:</a:t>
+            </a:r>
+            <a:r>
+              <a:rPr sz="2000" b="0" i="0">
+                <a:solidFill>
+                  <a:srgbClr val="333333"/>
+                </a:solidFill>
+                <a:latin typeface="Calibri"/>
+              </a:rPr>
+              <a:t> El diagrama tiene limite de sistema rotulado, actores como roles y ningun caso de uso con nombre de boton, pantalla u operacion tecnica.</a:t>
+            </a:r>
+          </a:p>
+          <a:p>
+            <a:pPr>
+              <a:spcAft>
+                <a:spcPts val="800"/>
+              </a:spcAft>
+            </a:pPr>
+            <a:r>
+              <a:rPr sz="2000" b="0" i="0">
+                <a:solidFill>
+                  <a:srgbClr val="333333"/>
+                </a:solidFill>
+                <a:latin typeface="Calibri"/>
+              </a:rPr>
+              <a:t>–   </a:t>
+            </a:r>
+            <a:r>
+              <a:rPr sz="2000" b="1" i="0">
+                <a:solidFill>
+                  <a:srgbClr val="333333"/>
+                </a:solidFill>
+                <a:latin typeface="Calibri"/>
+              </a:rPr>
+              <a:t>Exito:</a:t>
+            </a:r>
+            <a:r>
+              <a:rPr sz="2000" b="0" i="0">
+                <a:solidFill>
+                  <a:srgbClr val="333333"/>
+                </a:solidFill>
+                <a:latin typeface="Calibri"/>
+              </a:rPr>
+              <a:t> La matriz de trazabilidad no tiene huerfanos sin decision escrita: todo RF llega al menos a un CU o queda documentado como pendiente, y todo CU nace al menos de un RF.</a:t>
+            </a:r>
+          </a:p>
+          <a:p>
+            <a:pPr>
+              <a:spcAft>
+                <a:spcPts val="800"/>
+              </a:spcAft>
+            </a:pPr>
+            <a:r>
+              <a:rPr sz="2000" b="0" i="0">
+                <a:solidFill>
+                  <a:srgbClr val="333333"/>
+                </a:solidFill>
+                <a:latin typeface="Calibri"/>
+              </a:rPr>
+              <a:t>–   </a:t>
+            </a:r>
+            <a:r>
+              <a:rPr sz="2000" b="1" i="0">
+                <a:solidFill>
+                  <a:srgbClr val="333333"/>
+                </a:solidFill>
+                <a:latin typeface="Calibri"/>
+              </a:rPr>
+              <a:t>Exito:</a:t>
+            </a:r>
+            <a:r>
+              <a:rPr sz="2000" b="0" i="0">
+                <a:solidFill>
+                  <a:srgbClr val="333333"/>
+                </a:solidFill>
+                <a:latin typeface="Calibri"/>
+              </a:rPr>
+              <a:t> Las dos especificaciones tienen precondicion, postcondicion de exito, postcondicion de fracaso y flujo principal numerado en pares actor-sistema.</a:t>
+            </a:r>
+          </a:p>
+          <a:p>
+            <a:pPr>
+              <a:spcAft>
+                <a:spcPts val="800"/>
+              </a:spcAft>
+            </a:pPr>
+            <a:r>
+              <a:rPr sz="2000" b="0" i="0">
+                <a:solidFill>
+                  <a:srgbClr val="333333"/>
+                </a:solidFill>
+                <a:latin typeface="Calibri"/>
+              </a:rPr>
+              <a:t>–   </a:t>
+            </a:r>
+            <a:r>
+              <a:rPr sz="2000" b="1" i="0">
+                <a:solidFill>
+                  <a:srgbClr val="333333"/>
+                </a:solidFill>
+                <a:latin typeface="Calibri"/>
+              </a:rPr>
+              <a:t>Exito:</a:t>
+            </a:r>
+            <a:r>
+              <a:rPr sz="2000" b="0" i="0">
+                <a:solidFill>
+                  <a:srgbClr val="333333"/>
+                </a:solidFill>
+                <a:latin typeface="Calibri"/>
+              </a:rPr>
+              <a:t> Cada especificacion incluye minimo dos flujos alternos numerados respecto al paso del flujo principal donde se desvian.</a:t>
+            </a:r>
+          </a:p>
+          <a:p>
+            <a:pPr>
+              <a:spcAft>
+                <a:spcPts val="800"/>
+              </a:spcAft>
+            </a:pPr>
+            <a:r>
+              <a:rPr sz="2000" b="0" i="0">
+                <a:solidFill>
+                  <a:srgbClr val="333333"/>
+                </a:solidFill>
+                <a:latin typeface="Calibri"/>
+              </a:rPr>
+              <a:t>–   </a:t>
+            </a:r>
+            <a:r>
+              <a:rPr sz="2000" b="1" i="0">
+                <a:solidFill>
+                  <a:srgbClr val="333333"/>
+                </a:solidFill>
+                <a:latin typeface="Calibri"/>
+              </a:rPr>
+              <a:t>Entrega en la plataforma del curso</a:t>
+            </a:r>
+            <a:r>
+              <a:rPr sz="2000" b="0" i="0">
+                <a:solidFill>
+                  <a:srgbClr val="333333"/>
+                </a:solidFill>
+                <a:latin typeface="Calibri"/>
+              </a:rPr>
+              <a:t> — en la fecha que indique el docente.</a:t>
+            </a:r>
+          </a:p>
+        </p:txBody>
+      </p:sp>
+      <p:sp>
+        <p:nvSpPr>
+          <p:cNvPr id="6" name="TextBox 5"/>
+          <p:cNvSpPr txBox="1"/>
+          <p:nvPr/>
+        </p:nvSpPr>
+        <p:spPr>
+          <a:xfrm>
+            <a:off x="11185855" y="6473952"/>
+            <a:ext cx="640080" cy="274320"/>
+          </a:xfrm>
+          <a:prstGeom prst="rect">
+            <a:avLst/>
+          </a:prstGeom>
+          <a:noFill/>
+        </p:spPr>
+        <p:txBody>
+          <a:bodyPr wrap="square">
+            <a:spAutoFit/>
+          </a:bodyPr>
+          <a:lstStyle/>
+          <a:p>
+            <a:pPr algn="r"/>
+            <a:r>
+              <a:rPr sz="1100" b="0" i="0">
+                <a:solidFill>
+                  <a:srgbClr val="666666"/>
+                </a:solidFill>
+                <a:latin typeface="Calibri"/>
+              </a:rPr>
+              <a:t>21</a:t>
+            </a:r>
+          </a:p>
+        </p:txBody>
+      </p:sp>
+    </p:spTree>
+  </p:cSld>
+  <p:clrMapOvr>
+    <a:masterClrMapping/>
+  </p:clrMapOvr>
+</p:sld>
+</file>
+
+<file path=ppt/slides/slide22.xml><?xml version="1.0" encoding="utf-8"?>
+<p:sld xmlns:a="http://schemas.openxmlformats.org/drawingml/2006/main" xmlns:p="http://schemas.openxmlformats.org/presentationml/2006/main" xmlns:r="http://schemas.openxmlformats.org/officeDocument/2006/relationships">
+  <p:cSld>
+    <p:bg>
+      <p:bgPr>
+        <a:solidFill>
+          <a:srgbClr val="FFFFFF"/>
+        </a:solidFill>
+        <a:effectLst/>
+      </p:bgPr>
+    </p:bg>
+    <p:spTree>
+      <p:nvGrpSpPr>
+        <p:cNvPr id="1" name=""/>
+        <p:cNvGrpSpPr/>
+        <p:nvPr/>
+      </p:nvGrpSpPr>
+      <p:grpSpPr/>
+      <p:sp>
+        <p:nvSpPr>
+          <p:cNvPr id="2" name="Rectangle 1"/>
+          <p:cNvSpPr/>
+          <p:nvPr/>
+        </p:nvSpPr>
+        <p:spPr>
+          <a:xfrm>
+            <a:off x="0" y="0"/>
+            <a:ext cx="12191695" cy="960120"/>
+          </a:xfrm>
+          <a:prstGeom prst="rect">
+            <a:avLst/>
+          </a:prstGeom>
+          <a:solidFill>
+            <a:srgbClr val="095292"/>
+          </a:solidFill>
+          <a:ln>
+            <a:noFill/>
+          </a:ln>
+        </p:spPr>
+        <p:style>
+          <a:lnRef idx="1">
+            <a:schemeClr val="accent1"/>
+          </a:lnRef>
+          <a:fillRef idx="3">
+            <a:schemeClr val="accent1"/>
+          </a:fillRef>
+          <a:effectRef idx="2">
+            <a:schemeClr val="accent1"/>
+          </a:effectRef>
+          <a:fontRef idx="minor">
+            <a:schemeClr val="lt1"/>
+          </a:fontRef>
+        </p:style>
+        <p:txBody>
+          <a:bodyPr rtlCol="0" anchor="ctr"/>
+          <a:lstStyle/>
+          <a:p>
+            <a:pPr algn="ctr"/>
+          </a:p>
+        </p:txBody>
+      </p:sp>
+      <p:sp>
+        <p:nvSpPr>
+          <p:cNvPr id="3" name="Rectangle 2"/>
+          <p:cNvSpPr/>
+          <p:nvPr/>
+        </p:nvSpPr>
+        <p:spPr>
+          <a:xfrm>
+            <a:off x="0" y="960120"/>
+            <a:ext cx="12191695" cy="41148"/>
+          </a:xfrm>
+          <a:prstGeom prst="rect">
+            <a:avLst/>
+          </a:prstGeom>
+          <a:solidFill>
+            <a:srgbClr val="FFD000"/>
+          </a:solidFill>
+          <a:ln>
+            <a:noFill/>
+          </a:ln>
+        </p:spPr>
+        <p:style>
+          <a:lnRef idx="1">
+            <a:schemeClr val="accent1"/>
+          </a:lnRef>
+          <a:fillRef idx="3">
+            <a:schemeClr val="accent1"/>
+          </a:fillRef>
+          <a:effectRef idx="2">
+            <a:schemeClr val="accent1"/>
+          </a:effectRef>
+          <a:fontRef idx="minor">
+            <a:schemeClr val="lt1"/>
+          </a:fontRef>
+        </p:style>
+        <p:txBody>
+          <a:bodyPr rtlCol="0" anchor="ctr"/>
+          <a:lstStyle/>
+          <a:p>
+            <a:pPr algn="ctr"/>
+          </a:p>
+        </p:txBody>
+      </p:sp>
+      <p:sp>
+        <p:nvSpPr>
+          <p:cNvPr id="4" name="TextBox 3"/>
+          <p:cNvSpPr txBox="1"/>
+          <p:nvPr/>
+        </p:nvSpPr>
+        <p:spPr>
+          <a:xfrm>
+            <a:off x="457200" y="164592"/>
+            <a:ext cx="11277295" cy="502920"/>
+          </a:xfrm>
+          <a:prstGeom prst="rect">
+            <a:avLst/>
+          </a:prstGeom>
+          <a:noFill/>
+        </p:spPr>
+        <p:txBody>
+          <a:bodyPr wrap="square">
+            <a:spAutoFit/>
+          </a:bodyPr>
+          <a:lstStyle/>
+          <a:p>
+            <a:r>
+              <a:rPr sz="2600" b="1" i="0">
+                <a:solidFill>
+                  <a:srgbClr val="FFFFFF"/>
+                </a:solidFill>
+                <a:latin typeface="Calibri"/>
+              </a:rPr>
+              <a:t>Para el PI esta semana</a:t>
+            </a:r>
+          </a:p>
+        </p:txBody>
+      </p:sp>
+      <p:sp>
+        <p:nvSpPr>
+          <p:cNvPr id="5" name="Rounded Rectangle 4"/>
+          <p:cNvSpPr/>
+          <p:nvPr/>
+        </p:nvSpPr>
+        <p:spPr>
+          <a:xfrm>
+            <a:off x="457200" y="1261872"/>
+            <a:ext cx="11277295" cy="1051560"/>
+          </a:xfrm>
+          <a:prstGeom prst="roundRect">
+            <a:avLst>
+              <a:gd name="adj" fmla="val 12000"/>
+            </a:avLst>
+          </a:prstGeom>
+          <a:solidFill>
+            <a:srgbClr val="E8F4FA"/>
+          </a:solidFill>
+          <a:ln>
+            <a:noFill/>
+          </a:ln>
+        </p:spPr>
+        <p:style>
+          <a:lnRef idx="1">
+            <a:schemeClr val="accent1"/>
+          </a:lnRef>
+          <a:fillRef idx="3">
+            <a:schemeClr val="accent1"/>
+          </a:fillRef>
+          <a:effectRef idx="2">
+            <a:schemeClr val="accent1"/>
+          </a:effectRef>
+          <a:fontRef idx="minor">
+            <a:schemeClr val="lt1"/>
+          </a:fontRef>
+        </p:style>
+        <p:txBody>
+          <a:bodyPr rtlCol="0" anchor="ctr"/>
+          <a:lstStyle/>
+          <a:p>
+            <a:pPr algn="ctr"/>
+          </a:p>
+        </p:txBody>
+      </p:sp>
+      <p:sp>
+        <p:nvSpPr>
+          <p:cNvPr id="6" name="Rectangle 5"/>
+          <p:cNvSpPr/>
+          <p:nvPr/>
+        </p:nvSpPr>
+        <p:spPr>
+          <a:xfrm>
+            <a:off x="457200" y="1261872"/>
+            <a:ext cx="128016" cy="1051560"/>
+          </a:xfrm>
+          <a:prstGeom prst="rect">
+            <a:avLst/>
+          </a:prstGeom>
+          <a:solidFill>
+            <a:srgbClr val="269CCB"/>
+          </a:solidFill>
+          <a:ln>
+            <a:noFill/>
+          </a:ln>
+        </p:spPr>
+        <p:style>
+          <a:lnRef idx="1">
+            <a:schemeClr val="accent1"/>
+          </a:lnRef>
+          <a:fillRef idx="3">
+            <a:schemeClr val="accent1"/>
+          </a:fillRef>
+          <a:effectRef idx="2">
+            <a:schemeClr val="accent1"/>
+          </a:effectRef>
+          <a:fontRef idx="minor">
+            <a:schemeClr val="lt1"/>
+          </a:fontRef>
+        </p:style>
+        <p:txBody>
+          <a:bodyPr rtlCol="0" anchor="ctr"/>
+          <a:lstStyle/>
+          <a:p>
+            <a:pPr algn="ctr"/>
+          </a:p>
+        </p:txBody>
+      </p:sp>
+      <p:sp>
+        <p:nvSpPr>
+          <p:cNvPr id="7" name="TextBox 6"/>
+          <p:cNvSpPr txBox="1"/>
+          <p:nvPr/>
+        </p:nvSpPr>
+        <p:spPr>
+          <a:xfrm>
+            <a:off x="777240" y="1399031"/>
+            <a:ext cx="10774375" cy="822959"/>
+          </a:xfrm>
+          <a:prstGeom prst="rect">
+            <a:avLst/>
+          </a:prstGeom>
+          <a:noFill/>
+        </p:spPr>
+        <p:txBody>
+          <a:bodyPr wrap="square">
+            <a:spAutoFit/>
+          </a:bodyPr>
+          <a:lstStyle/>
+          <a:p>
+            <a:r>
+              <a:rPr sz="1200" b="1" i="0">
+                <a:solidFill>
+                  <a:srgbClr val="269CCB"/>
+                </a:solidFill>
+                <a:latin typeface="Calibri"/>
+              </a:rPr>
+              <a:t>Info</a:t>
+            </a:r>
+          </a:p>
+          <a:p>
+            <a:pPr>
+              <a:spcBef>
+                <a:spcPts val="400"/>
+              </a:spcBef>
+            </a:pPr>
+            <a:r>
+              <a:rPr sz="1400" b="0" i="0">
+                <a:solidFill>
+                  <a:srgbClr val="333333"/>
+                </a:solidFill>
+                <a:latin typeface="Calibri"/>
+              </a:rPr>
+              <a:t>Hito: Queda listo el diagrama de casos de uso de VetCare con su limite de sistema y la especificacion textual completa de Registrar mascota y Buscar expediente.</a:t>
+            </a:r>
+          </a:p>
+        </p:txBody>
+      </p:sp>
+      <p:sp>
+        <p:nvSpPr>
+          <p:cNvPr id="8" name="Rounded Rectangle 7"/>
+          <p:cNvSpPr/>
+          <p:nvPr/>
+        </p:nvSpPr>
+        <p:spPr>
+          <a:xfrm>
+            <a:off x="457200" y="2478024"/>
+            <a:ext cx="11277295" cy="1051560"/>
+          </a:xfrm>
+          <a:prstGeom prst="roundRect">
+            <a:avLst>
+              <a:gd name="adj" fmla="val 12000"/>
+            </a:avLst>
+          </a:prstGeom>
+          <a:solidFill>
+            <a:srgbClr val="FFF8E1"/>
+          </a:solidFill>
+          <a:ln>
+            <a:noFill/>
+          </a:ln>
+        </p:spPr>
+        <p:style>
+          <a:lnRef idx="1">
+            <a:schemeClr val="accent1"/>
+          </a:lnRef>
+          <a:fillRef idx="3">
+            <a:schemeClr val="accent1"/>
+          </a:fillRef>
+          <a:effectRef idx="2">
+            <a:schemeClr val="accent1"/>
+          </a:effectRef>
+          <a:fontRef idx="minor">
+            <a:schemeClr val="lt1"/>
+          </a:fontRef>
+        </p:style>
+        <p:txBody>
+          <a:bodyPr rtlCol="0" anchor="ctr"/>
+          <a:lstStyle/>
+          <a:p>
+            <a:pPr algn="ctr"/>
+          </a:p>
+        </p:txBody>
+      </p:sp>
+      <p:sp>
+        <p:nvSpPr>
+          <p:cNvPr id="9" name="Rectangle 8"/>
+          <p:cNvSpPr/>
+          <p:nvPr/>
+        </p:nvSpPr>
+        <p:spPr>
+          <a:xfrm>
+            <a:off x="457200" y="2478024"/>
+            <a:ext cx="128016" cy="1051560"/>
+          </a:xfrm>
+          <a:prstGeom prst="rect">
+            <a:avLst/>
+          </a:prstGeom>
+          <a:solidFill>
+            <a:srgbClr val="FFD000"/>
+          </a:solidFill>
+          <a:ln>
+            <a:noFill/>
+          </a:ln>
+        </p:spPr>
+        <p:style>
+          <a:lnRef idx="1">
+            <a:schemeClr val="accent1"/>
+          </a:lnRef>
+          <a:fillRef idx="3">
+            <a:schemeClr val="accent1"/>
+          </a:fillRef>
+          <a:effectRef idx="2">
+            <a:schemeClr val="accent1"/>
+          </a:effectRef>
+          <a:fontRef idx="minor">
+            <a:schemeClr val="lt1"/>
+          </a:fontRef>
+        </p:style>
+        <p:txBody>
+          <a:bodyPr rtlCol="0" anchor="ctr"/>
+          <a:lstStyle/>
+          <a:p>
+            <a:pPr algn="ctr"/>
+          </a:p>
+        </p:txBody>
+      </p:sp>
+      <p:sp>
+        <p:nvSpPr>
+          <p:cNvPr id="10" name="TextBox 9"/>
+          <p:cNvSpPr txBox="1"/>
+          <p:nvPr/>
+        </p:nvSpPr>
+        <p:spPr>
+          <a:xfrm>
+            <a:off x="777240" y="2615184"/>
+            <a:ext cx="10774375" cy="822959"/>
+          </a:xfrm>
+          <a:prstGeom prst="rect">
+            <a:avLst/>
+          </a:prstGeom>
+          <a:noFill/>
+        </p:spPr>
+        <p:txBody>
+          <a:bodyPr wrap="square">
+            <a:spAutoFit/>
+          </a:bodyPr>
+          <a:lstStyle/>
+          <a:p>
+            <a:r>
+              <a:rPr sz="1200" b="1" i="0">
+                <a:solidFill>
+                  <a:srgbClr val="FFD000"/>
+                </a:solidFill>
+                <a:latin typeface="Calibri"/>
+              </a:rPr>
+              <a:t>Aclaración</a:t>
+            </a:r>
+          </a:p>
+          <a:p>
+            <a:pPr>
+              <a:spcBef>
+                <a:spcPts val="400"/>
+              </a:spcBef>
+            </a:pPr>
+            <a:r>
+              <a:rPr sz="1400" b="0" i="0">
+                <a:solidFill>
+                  <a:srgbClr val="333333"/>
+                </a:solidFill>
+                <a:latin typeface="Calibri"/>
+              </a:rPr>
+              <a:t>Enunciado completo: Clases/Proyecto Integrador/ (VetCare).</a:t>
+            </a:r>
+          </a:p>
+        </p:txBody>
+      </p:sp>
+      <p:sp>
+        <p:nvSpPr>
+          <p:cNvPr id="11" name="Rounded Rectangle 10"/>
+          <p:cNvSpPr/>
+          <p:nvPr/>
+        </p:nvSpPr>
+        <p:spPr>
+          <a:xfrm>
+            <a:off x="457200" y="3694176"/>
+            <a:ext cx="11277295" cy="1051560"/>
+          </a:xfrm>
+          <a:prstGeom prst="roundRect">
+            <a:avLst>
+              <a:gd name="adj" fmla="val 12000"/>
+            </a:avLst>
+          </a:prstGeom>
+          <a:solidFill>
+            <a:srgbClr val="FBE4E4"/>
+          </a:solidFill>
+          <a:ln>
+            <a:noFill/>
+          </a:ln>
+        </p:spPr>
+        <p:style>
+          <a:lnRef idx="1">
+            <a:schemeClr val="accent1"/>
+          </a:lnRef>
+          <a:fillRef idx="3">
+            <a:schemeClr val="accent1"/>
+          </a:fillRef>
+          <a:effectRef idx="2">
+            <a:schemeClr val="accent1"/>
+          </a:effectRef>
+          <a:fontRef idx="minor">
+            <a:schemeClr val="lt1"/>
+          </a:fontRef>
+        </p:style>
+        <p:txBody>
+          <a:bodyPr rtlCol="0" anchor="ctr"/>
+          <a:lstStyle/>
+          <a:p>
+            <a:pPr algn="ctr"/>
+          </a:p>
+        </p:txBody>
+      </p:sp>
+      <p:sp>
+        <p:nvSpPr>
+          <p:cNvPr id="12" name="Rectangle 11"/>
+          <p:cNvSpPr/>
+          <p:nvPr/>
+        </p:nvSpPr>
+        <p:spPr>
+          <a:xfrm>
+            <a:off x="457200" y="3694176"/>
+            <a:ext cx="128016" cy="1051560"/>
+          </a:xfrm>
+          <a:prstGeom prst="rect">
+            <a:avLst/>
+          </a:prstGeom>
+          <a:solidFill>
+            <a:srgbClr val="A02030"/>
+          </a:solidFill>
+          <a:ln>
+            <a:noFill/>
+          </a:ln>
+        </p:spPr>
+        <p:style>
+          <a:lnRef idx="1">
+            <a:schemeClr val="accent1"/>
+          </a:lnRef>
+          <a:fillRef idx="3">
+            <a:schemeClr val="accent1"/>
+          </a:fillRef>
+          <a:effectRef idx="2">
+            <a:schemeClr val="accent1"/>
+          </a:effectRef>
+          <a:fontRef idx="minor">
+            <a:schemeClr val="lt1"/>
+          </a:fontRef>
+        </p:style>
+        <p:txBody>
+          <a:bodyPr rtlCol="0" anchor="ctr"/>
+          <a:lstStyle/>
+          <a:p>
+            <a:pPr algn="ctr"/>
+          </a:p>
+        </p:txBody>
+      </p:sp>
+      <p:sp>
+        <p:nvSpPr>
+          <p:cNvPr id="13" name="TextBox 12"/>
+          <p:cNvSpPr txBox="1"/>
+          <p:nvPr/>
+        </p:nvSpPr>
+        <p:spPr>
+          <a:xfrm>
+            <a:off x="777240" y="3831336"/>
+            <a:ext cx="10774375" cy="822959"/>
+          </a:xfrm>
+          <a:prstGeom prst="rect">
+            <a:avLst/>
+          </a:prstGeom>
+          <a:noFill/>
+        </p:spPr>
+        <p:txBody>
+          <a:bodyPr wrap="square">
+            <a:spAutoFit/>
+          </a:bodyPr>
+          <a:lstStyle/>
+          <a:p>
+            <a:r>
+              <a:rPr sz="1200" b="1" i="0">
+                <a:solidFill>
+                  <a:srgbClr val="A02030"/>
+                </a:solidFill>
+                <a:latin typeface="Calibri"/>
+              </a:rPr>
+              <a:t>Atención</a:t>
+            </a:r>
+          </a:p>
+          <a:p>
+            <a:pPr>
+              <a:spcBef>
+                <a:spcPts val="400"/>
+              </a:spcBef>
+            </a:pPr>
+            <a:r>
+              <a:rPr sz="1400" b="0" i="0">
+                <a:solidFill>
+                  <a:srgbClr val="333333"/>
+                </a:solidFill>
+                <a:latin typeface="Calibri"/>
+              </a:rPr>
+              <a:t>Entrega del taller, si el docente lo asigna · en la fecha que indique el docente.</a:t>
+            </a:r>
+          </a:p>
+        </p:txBody>
+      </p:sp>
+      <p:sp>
+        <p:nvSpPr>
+          <p:cNvPr id="14" name="TextBox 13"/>
+          <p:cNvSpPr txBox="1"/>
+          <p:nvPr/>
+        </p:nvSpPr>
+        <p:spPr>
+          <a:xfrm>
+            <a:off x="11185855" y="6473952"/>
+            <a:ext cx="640080" cy="274320"/>
+          </a:xfrm>
+          <a:prstGeom prst="rect">
+            <a:avLst/>
+          </a:prstGeom>
+          <a:noFill/>
+        </p:spPr>
+        <p:txBody>
+          <a:bodyPr wrap="square">
+            <a:spAutoFit/>
+          </a:bodyPr>
+          <a:lstStyle/>
+          <a:p>
+            <a:pPr algn="r"/>
+            <a:r>
+              <a:rPr sz="1100" b="0" i="0">
+                <a:solidFill>
+                  <a:srgbClr val="666666"/>
+                </a:solidFill>
+                <a:latin typeface="Calibri"/>
+              </a:rPr>
+              <a:t>22</a:t>
+            </a:r>
+          </a:p>
+        </p:txBody>
+      </p:sp>
+    </p:spTree>
+  </p:cSld>
+  <p:clrMapOvr>
+    <a:masterClrMapping/>
+  </p:clrMapOvr>
+</p:sld>
+</file>
+
+<file path=ppt/slides/slide23.xml><?xml version="1.0" encoding="utf-8"?>
 <p:sld xmlns:a="http://schemas.openxmlformats.org/drawingml/2006/main" xmlns:p="http://schemas.openxmlformats.org/presentationml/2006/main" xmlns:r="http://schemas.openxmlformats.org/officeDocument/2006/relationships">
   <p:cSld>
     <p:bg>

--- a/Seminario de Sistemas/Clases/Clase 9 - Casos de uso/Presentacion.pptx
+++ b/Seminario de Sistemas/Clases/Clase 9 - Casos de uso/Presentacion.pptx
@@ -9,25 +9,18 @@
     <p:sldId id="257" r:id="rId8"/>
     <p:sldId id="258" r:id="rId9"/>
     <p:sldId id="259" r:id="rId10"/>
-    <p:sldId id="260" r:id="rId11"/>
-    <p:sldId id="261" r:id="rId12"/>
-    <p:sldId id="262" r:id="rId13"/>
-    <p:sldId id="263" r:id="rId14"/>
-    <p:sldId id="264" r:id="rId15"/>
-    <p:sldId id="265" r:id="rId16"/>
-    <p:sldId id="266" r:id="rId17"/>
-    <p:sldId id="267" r:id="rId18"/>
-    <p:sldId id="268" r:id="rId19"/>
-    <p:sldId id="269" r:id="rId20"/>
-    <p:sldId id="270" r:id="rId21"/>
-    <p:sldId id="271" r:id="rId22"/>
-    <p:sldId id="272" r:id="rId23"/>
-    <p:sldId id="273" r:id="rId24"/>
-    <p:sldId id="274" r:id="rId25"/>
-    <p:sldId id="275" r:id="rId26"/>
-    <p:sldId id="276" r:id="rId27"/>
-    <p:sldId id="277" r:id="rId28"/>
-    <p:sldId id="278" r:id="rId29"/>
+    <p:sldId id="260" r:id="rId12"/>
+    <p:sldId id="261" r:id="rId13"/>
+    <p:sldId id="262" r:id="rId14"/>
+    <p:sldId id="263" r:id="rId15"/>
+    <p:sldId id="264" r:id="rId16"/>
+    <p:sldId id="265" r:id="rId17"/>
+    <p:sldId id="266" r:id="rId18"/>
+    <p:sldId id="267" r:id="rId19"/>
+    <p:sldId id="268" r:id="rId20"/>
+    <p:sldId id="269" r:id="rId21"/>
+    <p:sldId id="270" r:id="rId22"/>
+    <p:sldId id="271" r:id="rId23"/>
   </p:sldIdLst>
   <p:sldSz cx="12191695" cy="6858000" type="screen4x3"/>
   <p:notesSz cx="6858000" cy="9144000"/>
@@ -127,6 +120,648 @@
     </a:lvl9pPr>
   </p:defaultTextStyle>
 </p:presentation>
+</file>
+
+<file path=ppt/notesMasters/notesMaster1.xml><?xml version="1.0" encoding="utf-8"?>
+<p:notesMaster xmlns:a="http://schemas.openxmlformats.org/drawingml/2006/main" xmlns:p="http://schemas.openxmlformats.org/presentationml/2006/main" xmlns:r="http://schemas.openxmlformats.org/officeDocument/2006/relationships">
+  <p:cSld>
+    <p:bg>
+      <p:bgRef idx="1001">
+        <a:schemeClr val="bg1"/>
+      </p:bgRef>
+    </p:bg>
+    <p:spTree>
+      <p:nvGrpSpPr>
+        <p:cNvPr id="1" name=""/>
+        <p:cNvGrpSpPr/>
+        <p:nvPr/>
+      </p:nvGrpSpPr>
+      <p:grpSpPr>
+        <a:xfrm>
+          <a:off x="0" y="0"/>
+          <a:ext cx="0" cy="0"/>
+          <a:chOff x="0" y="0"/>
+          <a:chExt cx="0" cy="0"/>
+        </a:xfrm>
+      </p:grpSpPr>
+      <p:sp>
+        <p:nvSpPr>
+          <p:cNvPr id="2" name="Header Placeholder 1"/>
+          <p:cNvSpPr>
+            <a:spLocks noGrp="1"/>
+          </p:cNvSpPr>
+          <p:nvPr>
+            <p:ph type="hdr" sz="quarter"/>
+          </p:nvPr>
+        </p:nvSpPr>
+        <p:spPr>
+          <a:xfrm>
+            <a:off x="0" y="0"/>
+            <a:ext cx="2971800" cy="457200"/>
+          </a:xfrm>
+          <a:prstGeom prst="rect">
+            <a:avLst/>
+          </a:prstGeom>
+        </p:spPr>
+        <p:txBody>
+          <a:bodyPr vert="horz" lIns="91440" tIns="45720" rIns="91440" bIns="45720" rtlCol="0"/>
+          <a:lstStyle>
+            <a:lvl1pPr algn="l">
+              <a:defRPr sz="1200"/>
+            </a:lvl1pPr>
+          </a:lstStyle>
+          <a:p>
+            <a:endParaRPr lang="en-US"/>
+          </a:p>
+        </p:txBody>
+      </p:sp>
+      <p:sp>
+        <p:nvSpPr>
+          <p:cNvPr id="3" name="Date Placeholder 2"/>
+          <p:cNvSpPr>
+            <a:spLocks noGrp="1"/>
+          </p:cNvSpPr>
+          <p:nvPr>
+            <p:ph type="dt" idx="1"/>
+          </p:nvPr>
+        </p:nvSpPr>
+        <p:spPr>
+          <a:xfrm>
+            <a:off x="3884613" y="0"/>
+            <a:ext cx="2971800" cy="457200"/>
+          </a:xfrm>
+          <a:prstGeom prst="rect">
+            <a:avLst/>
+          </a:prstGeom>
+        </p:spPr>
+        <p:txBody>
+          <a:bodyPr vert="horz" lIns="91440" tIns="45720" rIns="91440" bIns="45720" rtlCol="0"/>
+          <a:lstStyle>
+            <a:lvl1pPr algn="r">
+              <a:defRPr sz="1200"/>
+            </a:lvl1pPr>
+          </a:lstStyle>
+          <a:p>
+            <a:fld id="{0F89C1C7-3DCD-1040-A9CF-14679D8B5DDD}" type="datetimeFigureOut">
+              <a:rPr lang="en-US" smtClean="0"/>
+              <a:t>10/17/16</a:t>
+            </a:fld>
+            <a:endParaRPr lang="en-US"/>
+          </a:p>
+        </p:txBody>
+      </p:sp>
+      <p:sp>
+        <p:nvSpPr>
+          <p:cNvPr id="4" name="Slide Image Placeholder 3"/>
+          <p:cNvSpPr>
+            <a:spLocks noGrp="1" noRot="1" noChangeAspect="1"/>
+          </p:cNvSpPr>
+          <p:nvPr>
+            <p:ph type="sldImg" idx="2"/>
+          </p:nvPr>
+        </p:nvSpPr>
+        <p:spPr>
+          <a:xfrm>
+            <a:off x="1143000" y="685800"/>
+            <a:ext cx="4572000" cy="3429000"/>
+          </a:xfrm>
+          <a:prstGeom prst="rect">
+            <a:avLst/>
+          </a:prstGeom>
+          <a:noFill/>
+          <a:ln w="12700">
+            <a:solidFill>
+              <a:prstClr val="black"/>
+            </a:solidFill>
+          </a:ln>
+        </p:spPr>
+        <p:txBody>
+          <a:bodyPr vert="horz" lIns="91440" tIns="45720" rIns="91440" bIns="45720" rtlCol="0" anchor="ctr"/>
+          <a:lstStyle/>
+          <a:p>
+            <a:endParaRPr lang="en-US"/>
+          </a:p>
+        </p:txBody>
+      </p:sp>
+      <p:sp>
+        <p:nvSpPr>
+          <p:cNvPr id="5" name="Notes Placeholder 4"/>
+          <p:cNvSpPr>
+            <a:spLocks noGrp="1"/>
+          </p:cNvSpPr>
+          <p:nvPr>
+            <p:ph type="body" sz="quarter" idx="3"/>
+          </p:nvPr>
+        </p:nvSpPr>
+        <p:spPr>
+          <a:xfrm>
+            <a:off x="685800" y="4343400"/>
+            <a:ext cx="5486400" cy="4114800"/>
+          </a:xfrm>
+          <a:prstGeom prst="rect">
+            <a:avLst/>
+          </a:prstGeom>
+        </p:spPr>
+        <p:txBody>
+          <a:bodyPr vert="horz" lIns="91440" tIns="45720" rIns="91440" bIns="45720" rtlCol="0"/>
+          <a:lstStyle/>
+          <a:p>
+            <a:pPr lvl="0"/>
+            <a:r>
+              <a:rPr lang="en-US" smtClean="0"/>
+              <a:t>Click to edit Master text styles</a:t>
+            </a:r>
+          </a:p>
+          <a:p>
+            <a:pPr lvl="1"/>
+            <a:r>
+              <a:rPr lang="en-US" smtClean="0"/>
+              <a:t>Second level</a:t>
+            </a:r>
+          </a:p>
+          <a:p>
+            <a:pPr lvl="2"/>
+            <a:r>
+              <a:rPr lang="en-US" smtClean="0"/>
+              <a:t>Third level</a:t>
+            </a:r>
+          </a:p>
+          <a:p>
+            <a:pPr lvl="3"/>
+            <a:r>
+              <a:rPr lang="en-US" smtClean="0"/>
+              <a:t>Fourth level</a:t>
+            </a:r>
+          </a:p>
+          <a:p>
+            <a:pPr lvl="4"/>
+            <a:r>
+              <a:rPr lang="en-US" smtClean="0"/>
+              <a:t>Fifth level</a:t>
+            </a:r>
+            <a:endParaRPr lang="en-US"/>
+          </a:p>
+        </p:txBody>
+      </p:sp>
+      <p:sp>
+        <p:nvSpPr>
+          <p:cNvPr id="6" name="Footer Placeholder 5"/>
+          <p:cNvSpPr>
+            <a:spLocks noGrp="1"/>
+          </p:cNvSpPr>
+          <p:nvPr>
+            <p:ph type="ftr" sz="quarter" idx="4"/>
+          </p:nvPr>
+        </p:nvSpPr>
+        <p:spPr>
+          <a:xfrm>
+            <a:off x="0" y="8685213"/>
+            <a:ext cx="2971800" cy="457200"/>
+          </a:xfrm>
+          <a:prstGeom prst="rect">
+            <a:avLst/>
+          </a:prstGeom>
+        </p:spPr>
+        <p:txBody>
+          <a:bodyPr vert="horz" lIns="91440" tIns="45720" rIns="91440" bIns="45720" rtlCol="0" anchor="b"/>
+          <a:lstStyle>
+            <a:lvl1pPr algn="l">
+              <a:defRPr sz="1200"/>
+            </a:lvl1pPr>
+          </a:lstStyle>
+          <a:p>
+            <a:endParaRPr lang="en-US"/>
+          </a:p>
+        </p:txBody>
+      </p:sp>
+      <p:sp>
+        <p:nvSpPr>
+          <p:cNvPr id="7" name="Slide Number Placeholder 6"/>
+          <p:cNvSpPr>
+            <a:spLocks noGrp="1"/>
+          </p:cNvSpPr>
+          <p:nvPr>
+            <p:ph type="sldNum" sz="quarter" idx="5"/>
+          </p:nvPr>
+        </p:nvSpPr>
+        <p:spPr>
+          <a:xfrm>
+            <a:off x="3884613" y="8685213"/>
+            <a:ext cx="2971800" cy="457200"/>
+          </a:xfrm>
+          <a:prstGeom prst="rect">
+            <a:avLst/>
+          </a:prstGeom>
+        </p:spPr>
+        <p:txBody>
+          <a:bodyPr vert="horz" lIns="91440" tIns="45720" rIns="91440" bIns="45720" rtlCol="0" anchor="b"/>
+          <a:lstStyle>
+            <a:lvl1pPr algn="r">
+              <a:defRPr sz="1200"/>
+            </a:lvl1pPr>
+          </a:lstStyle>
+          <a:p>
+            <a:fld id="{BB5E49A5-4136-284D-997B-48E1D791AD67}" type="slidenum">
+              <a:rPr lang="en-US" smtClean="0"/>
+              <a:t>‹#›</a:t>
+            </a:fld>
+            <a:endParaRPr lang="en-US"/>
+          </a:p>
+        </p:txBody>
+      </p:sp>
+    </p:spTree>
+    <p:extLst>
+      <p:ext uri="{BB962C8B-B14F-4D97-AF65-F5344CB8AC3E}">
+        <p14:creationId xmlns:p14="http://schemas.microsoft.com/office/powerpoint/2010/main" val="2623252185"/>
+      </p:ext>
+    </p:extLst>
+  </p:cSld>
+  <p:clrMap bg1="lt1" tx1="dk1" bg2="lt2" tx2="dk2" accent1="accent1" accent2="accent2" accent3="accent3" accent4="accent4" accent5="accent5" accent6="accent6" hlink="hlink" folHlink="folHlink"/>
+  <p:notesStyle>
+    <a:lvl1pPr marL="0" algn="l" defTabSz="457200" rtl="0" eaLnBrk="1" latinLnBrk="0" hangingPunct="1">
+      <a:defRPr sz="1200" kern="1200">
+        <a:solidFill>
+          <a:schemeClr val="tx1"/>
+        </a:solidFill>
+        <a:latin typeface="+mn-lt"/>
+        <a:ea typeface="+mn-ea"/>
+        <a:cs typeface="+mn-cs"/>
+      </a:defRPr>
+    </a:lvl1pPr>
+    <a:lvl2pPr marL="457200" algn="l" defTabSz="457200" rtl="0" eaLnBrk="1" latinLnBrk="0" hangingPunct="1">
+      <a:defRPr sz="1200" kern="1200">
+        <a:solidFill>
+          <a:schemeClr val="tx1"/>
+        </a:solidFill>
+        <a:latin typeface="+mn-lt"/>
+        <a:ea typeface="+mn-ea"/>
+        <a:cs typeface="+mn-cs"/>
+      </a:defRPr>
+    </a:lvl2pPr>
+    <a:lvl3pPr marL="914400" algn="l" defTabSz="457200" rtl="0" eaLnBrk="1" latinLnBrk="0" hangingPunct="1">
+      <a:defRPr sz="1200" kern="1200">
+        <a:solidFill>
+          <a:schemeClr val="tx1"/>
+        </a:solidFill>
+        <a:latin typeface="+mn-lt"/>
+        <a:ea typeface="+mn-ea"/>
+        <a:cs typeface="+mn-cs"/>
+      </a:defRPr>
+    </a:lvl3pPr>
+    <a:lvl4pPr marL="1371600" algn="l" defTabSz="457200" rtl="0" eaLnBrk="1" latinLnBrk="0" hangingPunct="1">
+      <a:defRPr sz="1200" kern="1200">
+        <a:solidFill>
+          <a:schemeClr val="tx1"/>
+        </a:solidFill>
+        <a:latin typeface="+mn-lt"/>
+        <a:ea typeface="+mn-ea"/>
+        <a:cs typeface="+mn-cs"/>
+      </a:defRPr>
+    </a:lvl4pPr>
+    <a:lvl5pPr marL="1828800" algn="l" defTabSz="457200" rtl="0" eaLnBrk="1" latinLnBrk="0" hangingPunct="1">
+      <a:defRPr sz="1200" kern="1200">
+        <a:solidFill>
+          <a:schemeClr val="tx1"/>
+        </a:solidFill>
+        <a:latin typeface="+mn-lt"/>
+        <a:ea typeface="+mn-ea"/>
+        <a:cs typeface="+mn-cs"/>
+      </a:defRPr>
+    </a:lvl5pPr>
+    <a:lvl6pPr marL="2286000" algn="l" defTabSz="457200" rtl="0" eaLnBrk="1" latinLnBrk="0" hangingPunct="1">
+      <a:defRPr sz="1200" kern="1200">
+        <a:solidFill>
+          <a:schemeClr val="tx1"/>
+        </a:solidFill>
+        <a:latin typeface="+mn-lt"/>
+        <a:ea typeface="+mn-ea"/>
+        <a:cs typeface="+mn-cs"/>
+      </a:defRPr>
+    </a:lvl6pPr>
+    <a:lvl7pPr marL="2743200" algn="l" defTabSz="457200" rtl="0" eaLnBrk="1" latinLnBrk="0" hangingPunct="1">
+      <a:defRPr sz="1200" kern="1200">
+        <a:solidFill>
+          <a:schemeClr val="tx1"/>
+        </a:solidFill>
+        <a:latin typeface="+mn-lt"/>
+        <a:ea typeface="+mn-ea"/>
+        <a:cs typeface="+mn-cs"/>
+      </a:defRPr>
+    </a:lvl7pPr>
+    <a:lvl8pPr marL="3200400" algn="l" defTabSz="457200" rtl="0" eaLnBrk="1" latinLnBrk="0" hangingPunct="1">
+      <a:defRPr sz="1200" kern="1200">
+        <a:solidFill>
+          <a:schemeClr val="tx1"/>
+        </a:solidFill>
+        <a:latin typeface="+mn-lt"/>
+        <a:ea typeface="+mn-ea"/>
+        <a:cs typeface="+mn-cs"/>
+      </a:defRPr>
+    </a:lvl8pPr>
+    <a:lvl9pPr marL="3657600" algn="l" defTabSz="457200" rtl="0" eaLnBrk="1" latinLnBrk="0" hangingPunct="1">
+      <a:defRPr sz="1200" kern="1200">
+        <a:solidFill>
+          <a:schemeClr val="tx1"/>
+        </a:solidFill>
+        <a:latin typeface="+mn-lt"/>
+        <a:ea typeface="+mn-ea"/>
+        <a:cs typeface="+mn-cs"/>
+      </a:defRPr>
+    </a:lvl9pPr>
+  </p:notesStyle>
+</p:notesMaster>
+</file>
+
+<file path=ppt/notesSlides/notesSlide1.xml><?xml version="1.0" encoding="utf-8"?>
+<p:notes xmlns:a="http://schemas.openxmlformats.org/drawingml/2006/main" xmlns:p="http://schemas.openxmlformats.org/presentationml/2006/main" xmlns:r="http://schemas.openxmlformats.org/officeDocument/2006/relationships">
+  <p:cSld>
+    <p:spTree>
+      <p:nvGrpSpPr>
+        <p:cNvPr id="1" name=""/>
+        <p:cNvGrpSpPr/>
+        <p:nvPr/>
+      </p:nvGrpSpPr>
+      <p:grpSpPr>
+        <a:xfrm>
+          <a:off x="0" y="0"/>
+          <a:ext cx="0" cy="0"/>
+          <a:chOff x="0" y="0"/>
+          <a:chExt cx="0" cy="0"/>
+        </a:xfrm>
+      </p:grpSpPr>
+      <p:sp>
+        <p:nvSpPr>
+          <p:cNvPr id="2" name="Slide Image Placeholder 1"/>
+          <p:cNvSpPr>
+            <a:spLocks noGrp="1"/>
+          </p:cNvSpPr>
+          <p:nvPr>
+            <p:ph type="sldImg" idx="2"/>
+          </p:nvPr>
+        </p:nvSpPr>
+        <p:spPr/>
+      </p:sp>
+      <p:sp>
+        <p:nvSpPr>
+          <p:cNvPr id="3" name="Notes Placeholder 2"/>
+          <p:cNvSpPr>
+            <a:spLocks noGrp="1"/>
+          </p:cNvSpPr>
+          <p:nvPr>
+            <p:ph type="body" idx="3" sz="quarter"/>
+          </p:nvPr>
+        </p:nvSpPr>
+        <p:spPr/>
+        <p:txBody>
+          <a:bodyPr/>
+          <a:lstStyle/>
+          <a:p>
+            <a:r>
+              <a:t>En VetCare, Registrar mascota pasa la prueba, porque la recepcionista de Huellitas termina con la ficha creada y el codigo asignado; en cambio Validar la fecha de nacimiento no la pasa, porque nadie llega a la clinica con el objetivo de validar una fecha.</a:t>
+            </a:r>
+          </a:p>
+          <a:p/>
+          <a:p>
+            <a:r>
+              <a:t>Esa distincion parece un detalle de nombres, pero define el tamaño de todo el modelo: si se confunde, un sistema pequeño como VetCare termina con cuarenta casos de uso inutiles en vez de seis u ocho casos de uso reales.</a:t>
+            </a:r>
+          </a:p>
+        </p:txBody>
+      </p:sp>
+      <p:sp>
+        <p:nvSpPr>
+          <p:cNvPr id="4" name="Slide Number Placeholder 3"/>
+          <p:cNvSpPr>
+            <a:spLocks noGrp="1"/>
+          </p:cNvSpPr>
+          <p:nvPr>
+            <p:ph type="sldNum" idx="5" sz="quarter"/>
+          </p:nvPr>
+        </p:nvSpPr>
+        <p:spPr/>
+      </p:sp>
+    </p:spTree>
+  </p:cSld>
+  <p:clrMapOvr>
+    <a:masterClrMapping/>
+  </p:clrMapOvr>
+</p:notes>
+</file>
+
+<file path=ppt/notesSlides/notesSlide2.xml><?xml version="1.0" encoding="utf-8"?>
+<p:notes xmlns:a="http://schemas.openxmlformats.org/drawingml/2006/main" xmlns:p="http://schemas.openxmlformats.org/presentationml/2006/main" xmlns:r="http://schemas.openxmlformats.org/officeDocument/2006/relationships">
+  <p:cSld>
+    <p:spTree>
+      <p:nvGrpSpPr>
+        <p:cNvPr id="1" name=""/>
+        <p:cNvGrpSpPr/>
+        <p:nvPr/>
+      </p:nvGrpSpPr>
+      <p:grpSpPr>
+        <a:xfrm>
+          <a:off x="0" y="0"/>
+          <a:ext cx="0" cy="0"/>
+          <a:chOff x="0" y="0"/>
+          <a:chExt cx="0" cy="0"/>
+        </a:xfrm>
+      </p:grpSpPr>
+      <p:sp>
+        <p:nvSpPr>
+          <p:cNvPr id="2" name="Slide Image Placeholder 1"/>
+          <p:cNvSpPr>
+            <a:spLocks noGrp="1"/>
+          </p:cNvSpPr>
+          <p:nvPr>
+            <p:ph type="sldImg" idx="2"/>
+          </p:nvPr>
+        </p:nvSpPr>
+        <p:spPr/>
+      </p:sp>
+      <p:sp>
+        <p:nvSpPr>
+          <p:cNvPr id="3" name="Notes Placeholder 2"/>
+          <p:cNvSpPr>
+            <a:spLocks noGrp="1"/>
+          </p:cNvSpPr>
+          <p:nvPr>
+            <p:ph type="body" idx="3" sz="quarter"/>
+          </p:nvPr>
+        </p:nvSpPr>
+        <p:spPr/>
+        <p:txBody>
+          <a:bodyPr/>
+          <a:lstStyle/>
+          <a:p>
+            <a:r>
+              <a:t>Si en VetCare dibujamos adentro del rectangulo un caso de uso llamado Enviar mensaje de WhatsApp, estamos diciendo que nosotros construimos la mensajeria, y eso probablemente sea falso y encarezca el proyecto por escrito.</a:t>
+            </a:r>
+          </a:p>
+        </p:txBody>
+      </p:sp>
+      <p:sp>
+        <p:nvSpPr>
+          <p:cNvPr id="4" name="Slide Number Placeholder 3"/>
+          <p:cNvSpPr>
+            <a:spLocks noGrp="1"/>
+          </p:cNvSpPr>
+          <p:nvPr>
+            <p:ph type="sldNum" idx="5" sz="quarter"/>
+          </p:nvPr>
+        </p:nvSpPr>
+        <p:spPr/>
+      </p:sp>
+    </p:spTree>
+  </p:cSld>
+  <p:clrMapOvr>
+    <a:masterClrMapping/>
+  </p:clrMapOvr>
+</p:notes>
+</file>
+
+<file path=ppt/notesSlides/notesSlide3.xml><?xml version="1.0" encoding="utf-8"?>
+<p:notes xmlns:a="http://schemas.openxmlformats.org/drawingml/2006/main" xmlns:p="http://schemas.openxmlformats.org/presentationml/2006/main" xmlns:r="http://schemas.openxmlformats.org/officeDocument/2006/relationships">
+  <p:cSld>
+    <p:spTree>
+      <p:nvGrpSpPr>
+        <p:cNvPr id="1" name=""/>
+        <p:cNvGrpSpPr/>
+        <p:nvPr/>
+      </p:nvGrpSpPr>
+      <p:grpSpPr>
+        <a:xfrm>
+          <a:off x="0" y="0"/>
+          <a:ext cx="0" cy="0"/>
+          <a:chOff x="0" y="0"/>
+          <a:chExt cx="0" cy="0"/>
+        </a:xfrm>
+      </p:grpSpPr>
+      <p:sp>
+        <p:nvSpPr>
+          <p:cNvPr id="2" name="Slide Image Placeholder 1"/>
+          <p:cNvSpPr>
+            <a:spLocks noGrp="1"/>
+          </p:cNvSpPr>
+          <p:nvPr>
+            <p:ph type="sldImg" idx="2"/>
+          </p:nvPr>
+        </p:nvSpPr>
+        <p:spPr/>
+      </p:sp>
+      <p:sp>
+        <p:nvSpPr>
+          <p:cNvPr id="3" name="Notes Placeholder 2"/>
+          <p:cNvSpPr>
+            <a:spLocks noGrp="1"/>
+          </p:cNvSpPr>
+          <p:nvPr>
+            <p:ph type="body" idx="3" sz="quarter"/>
+          </p:nvPr>
+        </p:nvSpPr>
+        <p:spPr/>
+        <p:txBody>
+          <a:bodyPr/>
+          <a:lstStyle/>
+          <a:p>
+            <a:r>
+              <a:t>Un caso de uso especificado tiene ficha de identificacion (ID, nombre, actor primario, requisitos que cubre, prioridad y frecuencia), precondiciones, postcondiciones, flujo principal y flujos alternos, y las reglas de negocio asociadas.</a:t>
+            </a:r>
+          </a:p>
+        </p:txBody>
+      </p:sp>
+      <p:sp>
+        <p:nvSpPr>
+          <p:cNvPr id="4" name="Slide Number Placeholder 3"/>
+          <p:cNvSpPr>
+            <a:spLocks noGrp="1"/>
+          </p:cNvSpPr>
+          <p:nvPr>
+            <p:ph type="sldNum" idx="5" sz="quarter"/>
+          </p:nvPr>
+        </p:nvSpPr>
+        <p:spPr/>
+      </p:sp>
+    </p:spTree>
+  </p:cSld>
+  <p:clrMapOvr>
+    <a:masterClrMapping/>
+  </p:clrMapOvr>
+</p:notes>
+</file>
+
+<file path=ppt/notesSlides/notesSlide4.xml><?xml version="1.0" encoding="utf-8"?>
+<p:notes xmlns:a="http://schemas.openxmlformats.org/drawingml/2006/main" xmlns:p="http://schemas.openxmlformats.org/presentationml/2006/main" xmlns:r="http://schemas.openxmlformats.org/officeDocument/2006/relationships">
+  <p:cSld>
+    <p:spTree>
+      <p:nvGrpSpPr>
+        <p:cNvPr id="1" name=""/>
+        <p:cNvGrpSpPr/>
+        <p:nvPr/>
+      </p:nvGrpSpPr>
+      <p:grpSpPr>
+        <a:xfrm>
+          <a:off x="0" y="0"/>
+          <a:ext cx="0" cy="0"/>
+          <a:chOff x="0" y="0"/>
+          <a:chExt cx="0" cy="0"/>
+        </a:xfrm>
+      </p:grpSpPr>
+      <p:sp>
+        <p:nvSpPr>
+          <p:cNvPr id="2" name="Slide Image Placeholder 1"/>
+          <p:cNvSpPr>
+            <a:spLocks noGrp="1"/>
+          </p:cNvSpPr>
+          <p:nvPr>
+            <p:ph type="sldImg" idx="2"/>
+          </p:nvPr>
+        </p:nvSpPr>
+        <p:spPr/>
+      </p:sp>
+      <p:sp>
+        <p:nvSpPr>
+          <p:cNvPr id="3" name="Notes Placeholder 2"/>
+          <p:cNvSpPr>
+            <a:spLocks noGrp="1"/>
+          </p:cNvSpPr>
+          <p:nvPr>
+            <p:ph type="body" idx="3" sz="quarter"/>
+          </p:nvPr>
+        </p:nvSpPr>
+        <p:spPr/>
+        <p:txBody>
+          <a:bodyPr/>
+          <a:lstStyle/>
+          <a:p>
+            <a:r>
+              <a:t>Escribirlas asi tiene dos consecuencias practicas enormes.</a:t>
+            </a:r>
+          </a:p>
+          <a:p/>
+          <a:p>
+            <a:r>
+              <a:t>Primero, cada postcondicion se convierte casi automaticamente en un caso de prueba, porque describe algo que se puede ir a comprobar.</a:t>
+            </a:r>
+          </a:p>
+        </p:txBody>
+      </p:sp>
+      <p:sp>
+        <p:nvSpPr>
+          <p:cNvPr id="4" name="Slide Number Placeholder 3"/>
+          <p:cNvSpPr>
+            <a:spLocks noGrp="1"/>
+          </p:cNvSpPr>
+          <p:nvPr>
+            <p:ph type="sldNum" idx="5" sz="quarter"/>
+          </p:nvPr>
+        </p:nvSpPr>
+        <p:spPr/>
+      </p:sp>
+    </p:spTree>
+  </p:cSld>
+  <p:clrMapOvr>
+    <a:masterClrMapping/>
+  </p:clrMapOvr>
+</p:notes>
 </file>
 
 <file path=ppt/slideLayouts/slideLayout1.xml><?xml version="1.0" encoding="utf-8"?>
@@ -6176,13 +6811,13 @@
         <p:spPr>
           <a:xfrm>
             <a:off x="0" y="0"/>
-            <a:ext cx="12191695" cy="1170432"/>
+            <a:ext cx="12191695" cy="164592"/>
           </a:xfrm>
           <a:prstGeom prst="rect">
             <a:avLst/>
           </a:prstGeom>
           <a:solidFill>
-            <a:srgbClr val="095292"/>
+            <a:srgbClr val="269CCB"/>
           </a:solidFill>
           <a:ln>
             <a:noFill/>
@@ -6210,251 +6845,9 @@
           </a:p>
         </p:txBody>
       </p:sp>
-      <p:sp>
-        <p:nvSpPr>
-          <p:cNvPr id="3" name="Rectangle 2"/>
-          <p:cNvSpPr/>
-          <p:nvPr/>
-        </p:nvSpPr>
-        <p:spPr>
-          <a:xfrm>
-            <a:off x="0" y="1170432"/>
-            <a:ext cx="12191695" cy="41148"/>
-          </a:xfrm>
-          <a:prstGeom prst="rect">
-            <a:avLst/>
-          </a:prstGeom>
-          <a:solidFill>
-            <a:srgbClr val="FFD000"/>
-          </a:solidFill>
-          <a:ln>
-            <a:noFill/>
-          </a:ln>
-        </p:spPr>
-        <p:style>
-          <a:lnRef idx="1">
-            <a:schemeClr val="accent1"/>
-          </a:lnRef>
-          <a:fillRef idx="3">
-            <a:schemeClr val="accent1"/>
-          </a:fillRef>
-          <a:effectRef idx="2">
-            <a:schemeClr val="accent1"/>
-          </a:effectRef>
-          <a:fontRef idx="minor">
-            <a:schemeClr val="lt1"/>
-          </a:fontRef>
-        </p:style>
-        <p:txBody>
-          <a:bodyPr rtlCol="0" anchor="ctr"/>
-          <a:lstStyle/>
-          <a:p>
-            <a:pPr algn="ctr"/>
-          </a:p>
-        </p:txBody>
-      </p:sp>
-      <p:sp>
-        <p:nvSpPr>
-          <p:cNvPr id="4" name="TextBox 3"/>
-          <p:cNvSpPr txBox="1"/>
-          <p:nvPr/>
-        </p:nvSpPr>
-        <p:spPr>
-          <a:xfrm>
-            <a:off x="457200" y="164592"/>
-            <a:ext cx="11277295" cy="384048"/>
-          </a:xfrm>
-          <a:prstGeom prst="rect">
-            <a:avLst/>
-          </a:prstGeom>
-          <a:noFill/>
-        </p:spPr>
-        <p:txBody>
-          <a:bodyPr wrap="square">
-            <a:spAutoFit/>
-          </a:bodyPr>
-          <a:lstStyle/>
-          <a:p>
-            <a:r>
-              <a:rPr sz="2600" b="1" i="0">
-                <a:solidFill>
-                  <a:srgbClr val="FFFFFF"/>
-                </a:solidFill>
-                <a:latin typeface="Calibri"/>
-              </a:rPr>
-              <a:t>Herramientas de hoy</a:t>
-            </a:r>
-          </a:p>
-        </p:txBody>
-      </p:sp>
-      <p:sp>
-        <p:nvSpPr>
-          <p:cNvPr id="5" name="TextBox 4"/>
-          <p:cNvSpPr txBox="1"/>
-          <p:nvPr/>
-        </p:nvSpPr>
-        <p:spPr>
-          <a:xfrm>
-            <a:off x="457200" y="566928"/>
-            <a:ext cx="11277295" cy="411480"/>
-          </a:xfrm>
-          <a:prstGeom prst="rect">
-            <a:avLst/>
-          </a:prstGeom>
-          <a:noFill/>
-        </p:spPr>
-        <p:txBody>
-          <a:bodyPr wrap="square">
-            <a:spAutoFit/>
-          </a:bodyPr>
-          <a:lstStyle/>
-          <a:p>
-            <a:r>
-              <a:rPr sz="1400" b="0" i="0">
-                <a:solidFill>
-                  <a:srgbClr val="B8D8EE"/>
-                </a:solidFill>
-                <a:latin typeface="Calibri"/>
-              </a:rPr>
-              <a:t>Gratis · funcionan en el navegador</a:t>
-            </a:r>
-          </a:p>
-        </p:txBody>
-      </p:sp>
-      <p:sp>
-        <p:nvSpPr>
-          <p:cNvPr id="6" name="Rounded Rectangle 5"/>
-          <p:cNvSpPr/>
-          <p:nvPr/>
-        </p:nvSpPr>
-        <p:spPr>
-          <a:xfrm>
-            <a:off x="457200" y="1591056"/>
-            <a:ext cx="3624986" cy="2331720"/>
-          </a:xfrm>
-          <a:prstGeom prst="roundRect">
-            <a:avLst>
-              <a:gd name="adj" fmla="val 12000"/>
-            </a:avLst>
-          </a:prstGeom>
-          <a:solidFill>
-            <a:srgbClr val="F2F2F2"/>
-          </a:solidFill>
-          <a:ln>
-            <a:noFill/>
-          </a:ln>
-        </p:spPr>
-        <p:style>
-          <a:lnRef idx="1">
-            <a:schemeClr val="accent1"/>
-          </a:lnRef>
-          <a:fillRef idx="3">
-            <a:schemeClr val="accent1"/>
-          </a:fillRef>
-          <a:effectRef idx="2">
-            <a:schemeClr val="accent1"/>
-          </a:effectRef>
-          <a:fontRef idx="minor">
-            <a:schemeClr val="lt1"/>
-          </a:fontRef>
-        </p:style>
-        <p:txBody>
-          <a:bodyPr rtlCol="0" anchor="ctr"/>
-          <a:lstStyle/>
-          <a:p>
-            <a:pPr algn="ctr"/>
-          </a:p>
-        </p:txBody>
-      </p:sp>
-      <p:sp>
-        <p:nvSpPr>
-          <p:cNvPr id="7" name="Rectangle 6"/>
-          <p:cNvSpPr/>
-          <p:nvPr/>
-        </p:nvSpPr>
-        <p:spPr>
-          <a:xfrm>
-            <a:off x="457200" y="1591056"/>
-            <a:ext cx="3624986" cy="64008"/>
-          </a:xfrm>
-          <a:prstGeom prst="rect">
-            <a:avLst/>
-          </a:prstGeom>
-          <a:solidFill>
-            <a:srgbClr val="095292"/>
-          </a:solidFill>
-          <a:ln>
-            <a:noFill/>
-          </a:ln>
-        </p:spPr>
-        <p:style>
-          <a:lnRef idx="1">
-            <a:schemeClr val="accent1"/>
-          </a:lnRef>
-          <a:fillRef idx="3">
-            <a:schemeClr val="accent1"/>
-          </a:fillRef>
-          <a:effectRef idx="2">
-            <a:schemeClr val="accent1"/>
-          </a:effectRef>
-          <a:fontRef idx="minor">
-            <a:schemeClr val="lt1"/>
-          </a:fontRef>
-        </p:style>
-        <p:txBody>
-          <a:bodyPr rtlCol="0" anchor="ctr"/>
-          <a:lstStyle/>
-          <a:p>
-            <a:pPr algn="ctr"/>
-          </a:p>
-        </p:txBody>
-      </p:sp>
-      <p:sp>
-        <p:nvSpPr>
-          <p:cNvPr id="8" name="Rectangle 7"/>
-          <p:cNvSpPr/>
-          <p:nvPr/>
-        </p:nvSpPr>
-        <p:spPr>
-          <a:xfrm>
-            <a:off x="457200" y="1655064"/>
-            <a:ext cx="3624986" cy="27432"/>
-          </a:xfrm>
-          <a:prstGeom prst="rect">
-            <a:avLst/>
-          </a:prstGeom>
-          <a:solidFill>
-            <a:srgbClr val="FFD000"/>
-          </a:solidFill>
-          <a:ln>
-            <a:noFill/>
-          </a:ln>
-        </p:spPr>
-        <p:style>
-          <a:lnRef idx="1">
-            <a:schemeClr val="accent1"/>
-          </a:lnRef>
-          <a:fillRef idx="3">
-            <a:schemeClr val="accent1"/>
-          </a:fillRef>
-          <a:effectRef idx="2">
-            <a:schemeClr val="accent1"/>
-          </a:effectRef>
-          <a:fontRef idx="minor">
-            <a:schemeClr val="lt1"/>
-          </a:fontRef>
-        </p:style>
-        <p:txBody>
-          <a:bodyPr rtlCol="0" anchor="ctr"/>
-          <a:lstStyle/>
-          <a:p>
-            <a:pPr algn="ctr"/>
-          </a:p>
-        </p:txBody>
-      </p:sp>
       <p:pic>
         <p:nvPicPr>
-          <p:cNvPr id="9" name="Picture 8" descr="drawio.png"/>
+          <p:cNvPr id="3" name="Picture 2" descr="logo_uniajc_color.png"/>
           <p:cNvPicPr>
             <a:picLocks noChangeAspect="1"/>
           </p:cNvPicPr>
@@ -6468,8 +6861,8 @@
         </p:blipFill>
         <p:spPr>
           <a:xfrm>
-            <a:off x="1643329" y="1847087"/>
-            <a:ext cx="1252728" cy="1252728"/>
+            <a:off x="10271455" y="5998464"/>
+            <a:ext cx="1463040" cy="643233"/>
           </a:xfrm>
           <a:prstGeom prst="rect">
             <a:avLst/>
@@ -6478,14 +6871,14 @@
       </p:pic>
       <p:sp>
         <p:nvSpPr>
-          <p:cNvPr id="10" name="TextBox 9"/>
+          <p:cNvPr id="4" name="TextBox 3"/>
           <p:cNvSpPr txBox="1"/>
           <p:nvPr/>
         </p:nvSpPr>
         <p:spPr>
           <a:xfrm>
-            <a:off x="530352" y="3191256"/>
-            <a:ext cx="3478682" cy="621792"/>
+            <a:off x="457200" y="1737360"/>
+            <a:ext cx="11277295" cy="1097280"/>
           </a:xfrm>
           <a:prstGeom prst="rect">
             <a:avLst/>
@@ -6493,456 +6886,32 @@
           <a:noFill/>
         </p:spPr>
         <p:txBody>
-          <a:bodyPr wrap="square" anchor="t"/>
+          <a:bodyPr wrap="square" anchor="ctr"/>
           <a:lstStyle/>
           <a:p>
             <a:pPr algn="ctr"/>
             <a:r>
-              <a:rPr sz="1300" b="1" i="0">
+              <a:rPr sz="3400" b="1" i="0">
                 <a:solidFill>
                   <a:srgbClr val="095292"/>
                 </a:solidFill>
                 <a:latin typeface="Calibri"/>
               </a:rPr>
-              <a:t>Draw.Io</a:t>
-            </a:r>
-          </a:p>
-          <a:p>
-            <a:pPr algn="ctr">
-              <a:spcBef>
-                <a:spcPts val="200"/>
-              </a:spcBef>
-            </a:pPr>
-            <a:r>
-              <a:rPr sz="1000" b="0" i="0">
-                <a:solidFill>
-                  <a:srgbClr val="666666"/>
-                </a:solidFill>
-                <a:latin typeface="Calibri"/>
-              </a:rPr>
-              <a:t>Diagramas UML y de contexto</a:t>
-            </a:r>
-          </a:p>
-        </p:txBody>
-      </p:sp>
-      <p:sp>
-        <p:nvSpPr>
-          <p:cNvPr id="11" name="Rounded Rectangle 10"/>
-          <p:cNvSpPr/>
-          <p:nvPr/>
-        </p:nvSpPr>
-        <p:spPr>
-          <a:xfrm>
-            <a:off x="4283354" y="1591056"/>
-            <a:ext cx="3624986" cy="2331720"/>
-          </a:xfrm>
-          <a:prstGeom prst="roundRect">
-            <a:avLst>
-              <a:gd name="adj" fmla="val 12000"/>
-            </a:avLst>
-          </a:prstGeom>
-          <a:solidFill>
-            <a:srgbClr val="F2F2F2"/>
-          </a:solidFill>
-          <a:ln>
-            <a:noFill/>
-          </a:ln>
-        </p:spPr>
-        <p:style>
-          <a:lnRef idx="1">
-            <a:schemeClr val="accent1"/>
-          </a:lnRef>
-          <a:fillRef idx="3">
-            <a:schemeClr val="accent1"/>
-          </a:fillRef>
-          <a:effectRef idx="2">
-            <a:schemeClr val="accent1"/>
-          </a:effectRef>
-          <a:fontRef idx="minor">
-            <a:schemeClr val="lt1"/>
-          </a:fontRef>
-        </p:style>
-        <p:txBody>
-          <a:bodyPr rtlCol="0" anchor="ctr"/>
-          <a:lstStyle/>
-          <a:p>
-            <a:pPr algn="ctr"/>
-          </a:p>
-        </p:txBody>
-      </p:sp>
-      <p:sp>
-        <p:nvSpPr>
-          <p:cNvPr id="12" name="Rectangle 11"/>
-          <p:cNvSpPr/>
-          <p:nvPr/>
-        </p:nvSpPr>
-        <p:spPr>
-          <a:xfrm>
-            <a:off x="4283354" y="1591056"/>
-            <a:ext cx="3624986" cy="64008"/>
-          </a:xfrm>
-          <a:prstGeom prst="rect">
-            <a:avLst/>
-          </a:prstGeom>
-          <a:solidFill>
-            <a:srgbClr val="095292"/>
-          </a:solidFill>
-          <a:ln>
-            <a:noFill/>
-          </a:ln>
-        </p:spPr>
-        <p:style>
-          <a:lnRef idx="1">
-            <a:schemeClr val="accent1"/>
-          </a:lnRef>
-          <a:fillRef idx="3">
-            <a:schemeClr val="accent1"/>
-          </a:fillRef>
-          <a:effectRef idx="2">
-            <a:schemeClr val="accent1"/>
-          </a:effectRef>
-          <a:fontRef idx="minor">
-            <a:schemeClr val="lt1"/>
-          </a:fontRef>
-        </p:style>
-        <p:txBody>
-          <a:bodyPr rtlCol="0" anchor="ctr"/>
-          <a:lstStyle/>
-          <a:p>
-            <a:pPr algn="ctr"/>
-          </a:p>
-        </p:txBody>
-      </p:sp>
-      <p:sp>
-        <p:nvSpPr>
-          <p:cNvPr id="13" name="Rectangle 12"/>
-          <p:cNvSpPr/>
-          <p:nvPr/>
-        </p:nvSpPr>
-        <p:spPr>
-          <a:xfrm>
-            <a:off x="4283354" y="1655064"/>
-            <a:ext cx="3624986" cy="27432"/>
-          </a:xfrm>
-          <a:prstGeom prst="rect">
-            <a:avLst/>
-          </a:prstGeom>
-          <a:solidFill>
-            <a:srgbClr val="FFD000"/>
-          </a:solidFill>
-          <a:ln>
-            <a:noFill/>
-          </a:ln>
-        </p:spPr>
-        <p:style>
-          <a:lnRef idx="1">
-            <a:schemeClr val="accent1"/>
-          </a:lnRef>
-          <a:fillRef idx="3">
-            <a:schemeClr val="accent1"/>
-          </a:fillRef>
-          <a:effectRef idx="2">
-            <a:schemeClr val="accent1"/>
-          </a:effectRef>
-          <a:fontRef idx="minor">
-            <a:schemeClr val="lt1"/>
-          </a:fontRef>
-        </p:style>
-        <p:txBody>
-          <a:bodyPr rtlCol="0" anchor="ctr"/>
-          <a:lstStyle/>
-          <a:p>
-            <a:pPr algn="ctr"/>
-          </a:p>
-        </p:txBody>
-      </p:sp>
-      <p:pic>
-        <p:nvPicPr>
-          <p:cNvPr id="14" name="Picture 13" descr="google_docs.png"/>
-          <p:cNvPicPr>
-            <a:picLocks noChangeAspect="1"/>
-          </p:cNvPicPr>
-          <p:nvPr/>
-        </p:nvPicPr>
-        <p:blipFill>
-          <a:blip r:embed="rId3"/>
-          <a:stretch>
-            <a:fillRect/>
-          </a:stretch>
-        </p:blipFill>
-        <p:spPr>
-          <a:xfrm>
-            <a:off x="5469483" y="1847087"/>
-            <a:ext cx="1252728" cy="1252728"/>
-          </a:xfrm>
-          <a:prstGeom prst="rect">
-            <a:avLst/>
-          </a:prstGeom>
-        </p:spPr>
-      </p:pic>
-      <p:sp>
-        <p:nvSpPr>
-          <p:cNvPr id="15" name="TextBox 14"/>
+              <a:t>Clase 9 · Casos de uso</a:t>
+            </a:r>
+          </a:p>
+        </p:txBody>
+      </p:sp>
+      <p:sp>
+        <p:nvSpPr>
+          <p:cNvPr id="5" name="TextBox 4"/>
           <p:cNvSpPr txBox="1"/>
           <p:nvPr/>
         </p:nvSpPr>
         <p:spPr>
           <a:xfrm>
-            <a:off x="4356506" y="3191256"/>
-            <a:ext cx="3478682" cy="621792"/>
-          </a:xfrm>
-          <a:prstGeom prst="rect">
-            <a:avLst/>
-          </a:prstGeom>
-          <a:noFill/>
-        </p:spPr>
-        <p:txBody>
-          <a:bodyPr wrap="square" anchor="t"/>
-          <a:lstStyle/>
-          <a:p>
-            <a:pPr algn="ctr"/>
-            <a:r>
-              <a:rPr sz="1300" b="1" i="0">
-                <a:solidFill>
-                  <a:srgbClr val="095292"/>
-                </a:solidFill>
-                <a:latin typeface="Calibri"/>
-              </a:rPr>
-              <a:t>google docs</a:t>
-            </a:r>
-          </a:p>
-          <a:p>
-            <a:pPr algn="ctr">
-              <a:spcBef>
-                <a:spcPts val="200"/>
-              </a:spcBef>
-            </a:pPr>
-            <a:r>
-              <a:rPr sz="1000" b="0" i="0">
-                <a:solidFill>
-                  <a:srgbClr val="666666"/>
-                </a:solidFill>
-                <a:latin typeface="Calibri"/>
-              </a:rPr>
-              <a:t>Documentos del paquete de diseño</a:t>
-            </a:r>
-          </a:p>
-        </p:txBody>
-      </p:sp>
-      <p:sp>
-        <p:nvSpPr>
-          <p:cNvPr id="16" name="Rounded Rectangle 15"/>
-          <p:cNvSpPr/>
-          <p:nvPr/>
-        </p:nvSpPr>
-        <p:spPr>
-          <a:xfrm>
-            <a:off x="8109508" y="1591056"/>
-            <a:ext cx="3624986" cy="2331720"/>
-          </a:xfrm>
-          <a:prstGeom prst="roundRect">
-            <a:avLst>
-              <a:gd name="adj" fmla="val 12000"/>
-            </a:avLst>
-          </a:prstGeom>
-          <a:solidFill>
-            <a:srgbClr val="F2F2F2"/>
-          </a:solidFill>
-          <a:ln>
-            <a:noFill/>
-          </a:ln>
-        </p:spPr>
-        <p:style>
-          <a:lnRef idx="1">
-            <a:schemeClr val="accent1"/>
-          </a:lnRef>
-          <a:fillRef idx="3">
-            <a:schemeClr val="accent1"/>
-          </a:fillRef>
-          <a:effectRef idx="2">
-            <a:schemeClr val="accent1"/>
-          </a:effectRef>
-          <a:fontRef idx="minor">
-            <a:schemeClr val="lt1"/>
-          </a:fontRef>
-        </p:style>
-        <p:txBody>
-          <a:bodyPr rtlCol="0" anchor="ctr"/>
-          <a:lstStyle/>
-          <a:p>
-            <a:pPr algn="ctr"/>
-          </a:p>
-        </p:txBody>
-      </p:sp>
-      <p:sp>
-        <p:nvSpPr>
-          <p:cNvPr id="17" name="Rectangle 16"/>
-          <p:cNvSpPr/>
-          <p:nvPr/>
-        </p:nvSpPr>
-        <p:spPr>
-          <a:xfrm>
-            <a:off x="8109508" y="1591056"/>
-            <a:ext cx="3624986" cy="64008"/>
-          </a:xfrm>
-          <a:prstGeom prst="rect">
-            <a:avLst/>
-          </a:prstGeom>
-          <a:solidFill>
-            <a:srgbClr val="095292"/>
-          </a:solidFill>
-          <a:ln>
-            <a:noFill/>
-          </a:ln>
-        </p:spPr>
-        <p:style>
-          <a:lnRef idx="1">
-            <a:schemeClr val="accent1"/>
-          </a:lnRef>
-          <a:fillRef idx="3">
-            <a:schemeClr val="accent1"/>
-          </a:fillRef>
-          <a:effectRef idx="2">
-            <a:schemeClr val="accent1"/>
-          </a:effectRef>
-          <a:fontRef idx="minor">
-            <a:schemeClr val="lt1"/>
-          </a:fontRef>
-        </p:style>
-        <p:txBody>
-          <a:bodyPr rtlCol="0" anchor="ctr"/>
-          <a:lstStyle/>
-          <a:p>
-            <a:pPr algn="ctr"/>
-          </a:p>
-        </p:txBody>
-      </p:sp>
-      <p:sp>
-        <p:nvSpPr>
-          <p:cNvPr id="18" name="Rectangle 17"/>
-          <p:cNvSpPr/>
-          <p:nvPr/>
-        </p:nvSpPr>
-        <p:spPr>
-          <a:xfrm>
-            <a:off x="8109508" y="1655064"/>
-            <a:ext cx="3624986" cy="27432"/>
-          </a:xfrm>
-          <a:prstGeom prst="rect">
-            <a:avLst/>
-          </a:prstGeom>
-          <a:solidFill>
-            <a:srgbClr val="FFD000"/>
-          </a:solidFill>
-          <a:ln>
-            <a:noFill/>
-          </a:ln>
-        </p:spPr>
-        <p:style>
-          <a:lnRef idx="1">
-            <a:schemeClr val="accent1"/>
-          </a:lnRef>
-          <a:fillRef idx="3">
-            <a:schemeClr val="accent1"/>
-          </a:fillRef>
-          <a:effectRef idx="2">
-            <a:schemeClr val="accent1"/>
-          </a:effectRef>
-          <a:fontRef idx="minor">
-            <a:schemeClr val="lt1"/>
-          </a:fontRef>
-        </p:style>
-        <p:txBody>
-          <a:bodyPr rtlCol="0" anchor="ctr"/>
-          <a:lstStyle/>
-          <a:p>
-            <a:pPr algn="ctr"/>
-          </a:p>
-        </p:txBody>
-      </p:sp>
-      <p:pic>
-        <p:nvPicPr>
-          <p:cNvPr id="19" name="Picture 18" descr="examlab.png"/>
-          <p:cNvPicPr>
-            <a:picLocks noChangeAspect="1"/>
-          </p:cNvPicPr>
-          <p:nvPr/>
-        </p:nvPicPr>
-        <p:blipFill>
-          <a:blip r:embed="rId4"/>
-          <a:stretch>
-            <a:fillRect/>
-          </a:stretch>
-        </p:blipFill>
-        <p:spPr>
-          <a:xfrm>
-            <a:off x="9295638" y="1847087"/>
-            <a:ext cx="1252728" cy="1252728"/>
-          </a:xfrm>
-          <a:prstGeom prst="rect">
-            <a:avLst/>
-          </a:prstGeom>
-        </p:spPr>
-      </p:pic>
-      <p:sp>
-        <p:nvSpPr>
-          <p:cNvPr id="20" name="TextBox 19"/>
-          <p:cNvSpPr txBox="1"/>
-          <p:nvPr/>
-        </p:nvSpPr>
-        <p:spPr>
-          <a:xfrm>
-            <a:off x="8182660" y="3191256"/>
-            <a:ext cx="3478682" cy="621792"/>
-          </a:xfrm>
-          <a:prstGeom prst="rect">
-            <a:avLst/>
-          </a:prstGeom>
-          <a:noFill/>
-        </p:spPr>
-        <p:txBody>
-          <a:bodyPr wrap="square" anchor="t"/>
-          <a:lstStyle/>
-          <a:p>
-            <a:pPr algn="ctr"/>
-            <a:r>
-              <a:rPr sz="1300" b="1" i="0">
-                <a:solidFill>
-                  <a:srgbClr val="095292"/>
-                </a:solidFill>
-                <a:latin typeface="Calibri"/>
-              </a:rPr>
-              <a:t>la plataforma del curso</a:t>
-            </a:r>
-          </a:p>
-          <a:p>
-            <a:pPr algn="ctr">
-              <a:spcBef>
-                <a:spcPts val="200"/>
-              </a:spcBef>
-            </a:pPr>
-            <a:r>
-              <a:rPr sz="1000" b="0" i="0">
-                <a:solidFill>
-                  <a:srgbClr val="666666"/>
-                </a:solidFill>
-                <a:latin typeface="Calibri"/>
-              </a:rPr>
-              <a:t>Entrega del taller · en la fecha que indique el docente</a:t>
-            </a:r>
-          </a:p>
-        </p:txBody>
-      </p:sp>
-      <p:sp>
-        <p:nvSpPr>
-          <p:cNvPr id="21" name="TextBox 20"/>
-          <p:cNvSpPr txBox="1"/>
-          <p:nvPr/>
-        </p:nvSpPr>
-        <p:spPr>
-          <a:xfrm>
-            <a:off x="11185855" y="6473952"/>
-            <a:ext cx="640080" cy="274320"/>
+            <a:off x="457200" y="3017520"/>
+            <a:ext cx="11277295" cy="1645920"/>
           </a:xfrm>
           <a:prstGeom prst="rect">
             <a:avLst/>
@@ -6955,141 +6924,65 @@
           </a:bodyPr>
           <a:lstStyle/>
           <a:p>
-            <a:pPr algn="r"/>
-            <a:r>
-              <a:rPr sz="1100" b="0" i="0">
-                <a:solidFill>
-                  <a:srgbClr val="666666"/>
-                </a:solidFill>
-                <a:latin typeface="Calibri"/>
-              </a:rPr>
-              <a:t>16</a:t>
-            </a:r>
-          </a:p>
-        </p:txBody>
-      </p:sp>
-    </p:spTree>
-  </p:cSld>
-  <p:clrMapOvr>
-    <a:masterClrMapping/>
-  </p:clrMapOvr>
-</p:sld>
-</file>
-
-<file path=ppt/slides/slide17.xml><?xml version="1.0" encoding="utf-8"?>
-<p:sld xmlns:a="http://schemas.openxmlformats.org/drawingml/2006/main" xmlns:p="http://schemas.openxmlformats.org/presentationml/2006/main" xmlns:r="http://schemas.openxmlformats.org/officeDocument/2006/relationships">
-  <p:cSld>
-    <p:bg>
-      <p:bgPr>
-        <a:solidFill>
-          <a:srgbClr val="FFFFFF"/>
-        </a:solidFill>
-        <a:effectLst/>
-      </p:bgPr>
-    </p:bg>
-    <p:spTree>
-      <p:nvGrpSpPr>
-        <p:cNvPr id="1" name=""/>
-        <p:cNvGrpSpPr/>
-        <p:nvPr/>
-      </p:nvGrpSpPr>
-      <p:grpSpPr/>
-      <p:sp>
-        <p:nvSpPr>
-          <p:cNvPr id="2" name="Rectangle 1"/>
-          <p:cNvSpPr/>
-          <p:nvPr/>
-        </p:nvSpPr>
-        <p:spPr>
-          <a:xfrm>
-            <a:off x="0" y="0"/>
-            <a:ext cx="12191695" cy="960120"/>
-          </a:xfrm>
-          <a:prstGeom prst="rect">
-            <a:avLst/>
-          </a:prstGeom>
-          <a:solidFill>
-            <a:srgbClr val="095292"/>
-          </a:solidFill>
-          <a:ln>
-            <a:noFill/>
-          </a:ln>
-        </p:spPr>
-        <p:style>
-          <a:lnRef idx="1">
-            <a:schemeClr val="accent1"/>
-          </a:lnRef>
-          <a:fillRef idx="3">
-            <a:schemeClr val="accent1"/>
-          </a:fillRef>
-          <a:effectRef idx="2">
-            <a:schemeClr val="accent1"/>
-          </a:effectRef>
-          <a:fontRef idx="minor">
-            <a:schemeClr val="lt1"/>
-          </a:fontRef>
-        </p:style>
-        <p:txBody>
-          <a:bodyPr rtlCol="0" anchor="ctr"/>
-          <a:lstStyle/>
-          <a:p>
-            <a:pPr algn="ctr"/>
-          </a:p>
-        </p:txBody>
-      </p:sp>
-      <p:sp>
-        <p:nvSpPr>
-          <p:cNvPr id="3" name="Rectangle 2"/>
-          <p:cNvSpPr/>
-          <p:nvPr/>
-        </p:nvSpPr>
-        <p:spPr>
-          <a:xfrm>
-            <a:off x="0" y="960120"/>
-            <a:ext cx="12191695" cy="41148"/>
-          </a:xfrm>
-          <a:prstGeom prst="rect">
-            <a:avLst/>
-          </a:prstGeom>
-          <a:solidFill>
-            <a:srgbClr val="FFD000"/>
-          </a:solidFill>
-          <a:ln>
-            <a:noFill/>
-          </a:ln>
-        </p:spPr>
-        <p:style>
-          <a:lnRef idx="1">
-            <a:schemeClr val="accent1"/>
-          </a:lnRef>
-          <a:fillRef idx="3">
-            <a:schemeClr val="accent1"/>
-          </a:fillRef>
-          <a:effectRef idx="2">
-            <a:schemeClr val="accent1"/>
-          </a:effectRef>
-          <a:fontRef idx="minor">
-            <a:schemeClr val="lt1"/>
-          </a:fontRef>
-        </p:style>
-        <p:txBody>
-          <a:bodyPr rtlCol="0" anchor="ctr"/>
-          <a:lstStyle/>
-          <a:p>
-            <a:pPr algn="ctr"/>
-          </a:p>
-        </p:txBody>
-      </p:sp>
-      <p:sp>
-        <p:nvSpPr>
-          <p:cNvPr id="4" name="TextBox 3"/>
+            <a:pPr algn="ctr">
+              <a:spcAft>
+                <a:spcPts val="600"/>
+              </a:spcAft>
+            </a:pPr>
+            <a:r>
+              <a:rPr sz="1600" b="0" i="0">
+                <a:solidFill>
+                  <a:srgbClr val="333333"/>
+                </a:solidFill>
+                <a:latin typeface="Calibri"/>
+              </a:rPr>
+              <a:t>El diagrama se dibuja en cinco minutos; el valor esta en la especificacion</a:t>
+            </a:r>
+          </a:p>
+          <a:p>
+            <a:pPr algn="ctr">
+              <a:spcAft>
+                <a:spcPts val="600"/>
+              </a:spcAft>
+            </a:pPr>
+            <a:r>
+              <a:rPr sz="1600" b="0" i="0">
+                <a:solidFill>
+                  <a:srgbClr val="333333"/>
+                </a:solidFill>
+                <a:latin typeface="Calibri"/>
+              </a:rPr>
+              <a:t>Repasen las laminas de teoria: cada concepto esta completo</a:t>
+            </a:r>
+          </a:p>
+          <a:p>
+            <a:pPr algn="ctr">
+              <a:spcAft>
+                <a:spcPts val="600"/>
+              </a:spcAft>
+            </a:pPr>
+            <a:r>
+              <a:rPr sz="1600" b="0" i="0">
+                <a:solidFill>
+                  <a:srgbClr val="333333"/>
+                </a:solidFill>
+                <a:latin typeface="Calibri"/>
+              </a:rPr>
+              <a:t>Siguiente clase: continuamos con el siguiente tema</a:t>
+            </a:r>
+          </a:p>
+        </p:txBody>
+      </p:sp>
+      <p:sp>
+        <p:nvSpPr>
+          <p:cNvPr id="6" name="TextBox 5"/>
           <p:cNvSpPr txBox="1"/>
           <p:nvPr/>
         </p:nvSpPr>
         <p:spPr>
           <a:xfrm>
-            <a:off x="457200" y="164592"/>
-            <a:ext cx="11277295" cy="502920"/>
+            <a:off x="457200" y="4754880"/>
+            <a:ext cx="11277295" cy="640080"/>
           </a:xfrm>
           <a:prstGeom prst="rect">
             <a:avLst/>
@@ -7102,1346 +6995,15 @@
           </a:bodyPr>
           <a:lstStyle/>
           <a:p>
-            <a:r>
-              <a:rPr sz="2600" b="1" i="0">
-                <a:solidFill>
-                  <a:srgbClr val="FFFFFF"/>
-                </a:solidFill>
-                <a:latin typeface="Calibri"/>
-              </a:rPr>
-              <a:t>Taller PI — por que importa</a:t>
-            </a:r>
-          </a:p>
-        </p:txBody>
-      </p:sp>
-      <p:sp>
-        <p:nvSpPr>
-          <p:cNvPr id="5" name="TextBox 4"/>
-          <p:cNvSpPr txBox="1"/>
-          <p:nvPr/>
-        </p:nvSpPr>
-        <p:spPr>
-          <a:xfrm>
-            <a:off x="457200" y="1170432"/>
-            <a:ext cx="11277295" cy="5230368"/>
-          </a:xfrm>
-          <a:prstGeom prst="rect">
-            <a:avLst/>
-          </a:prstGeom>
-          <a:noFill/>
-        </p:spPr>
-        <p:txBody>
-          <a:bodyPr wrap="square">
-            <a:spAutoFit/>
-          </a:bodyPr>
-          <a:lstStyle/>
-          <a:p>
-            <a:pPr>
-              <a:spcAft>
-                <a:spcPts val="800"/>
-              </a:spcAft>
-            </a:pPr>
-            <a:r>
-              <a:rPr sz="2000" b="0" i="0">
-                <a:solidFill>
-                  <a:srgbClr val="333333"/>
-                </a:solidFill>
-                <a:latin typeface="Calibri"/>
-              </a:rPr>
-              <a:t>–   </a:t>
-            </a:r>
+            <a:pPr algn="ctr"/>
             <a:r>
               <a:rPr sz="2000" b="1" i="0">
                 <a:solidFill>
-                  <a:srgbClr val="333333"/>
-                </a:solidFill>
-                <a:latin typeface="Calibri"/>
-              </a:rPr>
-              <a:t>Por que importa al PI:</a:t>
-            </a:r>
-            <a:r>
-              <a:rPr sz="2000" b="0" i="0">
-                <a:solidFill>
-                  <a:srgbClr val="333333"/>
-                </a:solidFill>
-                <a:latin typeface="Calibri"/>
-              </a:rPr>
-              <a:t> los casos de uso son el puente entre lo que pidio la clinica Huellitas y lo que despues alguien va a programar; sin ellos, el equipo de Programacion II tiene que adivinar el comportamiento del sistema y siempre adivina distinto.</a:t>
-            </a:r>
-          </a:p>
-          <a:p>
-            <a:pPr>
-              <a:spcAft>
-                <a:spcPts val="800"/>
-              </a:spcAft>
-            </a:pPr>
-            <a:r>
-              <a:rPr sz="2000" b="0" i="0">
-                <a:solidFill>
-                  <a:srgbClr val="333333"/>
-                </a:solidFill>
-                <a:latin typeface="Calibri"/>
-              </a:rPr>
-              <a:t>–   El estudiante que solo cursa Seminario cierra el semestre con este paquete de especificaciones como pieza central de su documento de diseño, y por eso hoy se califica la escritura y no el dibujo.</a:t>
-            </a:r>
-          </a:p>
-          <a:p>
-            <a:pPr>
-              <a:spcAft>
-                <a:spcPts val="800"/>
-              </a:spcAft>
-            </a:pPr>
-            <a:r>
-              <a:rPr sz="2000" b="0" i="0">
-                <a:solidFill>
-                  <a:srgbClr val="333333"/>
-                </a:solidFill>
-                <a:latin typeface="Calibri"/>
-              </a:rPr>
-              <a:t>–   Toda especificacion escrita hoy se convierte mañana en un caso de prueba: si una postcondicion no se puede ir a verificar en los datos, esta mal redactada.</a:t>
-            </a:r>
-          </a:p>
-        </p:txBody>
-      </p:sp>
-      <p:sp>
-        <p:nvSpPr>
-          <p:cNvPr id="6" name="TextBox 5"/>
-          <p:cNvSpPr txBox="1"/>
-          <p:nvPr/>
-        </p:nvSpPr>
-        <p:spPr>
-          <a:xfrm>
-            <a:off x="11185855" y="6473952"/>
-            <a:ext cx="640080" cy="274320"/>
-          </a:xfrm>
-          <a:prstGeom prst="rect">
-            <a:avLst/>
-          </a:prstGeom>
-          <a:noFill/>
-        </p:spPr>
-        <p:txBody>
-          <a:bodyPr wrap="square">
-            <a:spAutoFit/>
-          </a:bodyPr>
-          <a:lstStyle/>
-          <a:p>
-            <a:pPr algn="r"/>
-            <a:r>
-              <a:rPr sz="1100" b="0" i="0">
-                <a:solidFill>
-                  <a:srgbClr val="666666"/>
-                </a:solidFill>
-                <a:latin typeface="Calibri"/>
-              </a:rPr>
-              <a:t>17</a:t>
-            </a:r>
-          </a:p>
-        </p:txBody>
-      </p:sp>
-    </p:spTree>
-  </p:cSld>
-  <p:clrMapOvr>
-    <a:masterClrMapping/>
-  </p:clrMapOvr>
-</p:sld>
-</file>
-
-<file path=ppt/slides/slide18.xml><?xml version="1.0" encoding="utf-8"?>
-<p:sld xmlns:a="http://schemas.openxmlformats.org/drawingml/2006/main" xmlns:p="http://schemas.openxmlformats.org/presentationml/2006/main" xmlns:r="http://schemas.openxmlformats.org/officeDocument/2006/relationships">
-  <p:cSld>
-    <p:bg>
-      <p:bgPr>
-        <a:solidFill>
-          <a:srgbClr val="FFFFFF"/>
-        </a:solidFill>
-        <a:effectLst/>
-      </p:bgPr>
-    </p:bg>
-    <p:spTree>
-      <p:nvGrpSpPr>
-        <p:cNvPr id="1" name=""/>
-        <p:cNvGrpSpPr/>
-        <p:nvPr/>
-      </p:nvGrpSpPr>
-      <p:grpSpPr/>
-      <p:sp>
-        <p:nvSpPr>
-          <p:cNvPr id="2" name="Rectangle 1"/>
-          <p:cNvSpPr/>
-          <p:nvPr/>
-        </p:nvSpPr>
-        <p:spPr>
-          <a:xfrm>
-            <a:off x="0" y="0"/>
-            <a:ext cx="12191695" cy="960120"/>
-          </a:xfrm>
-          <a:prstGeom prst="rect">
-            <a:avLst/>
-          </a:prstGeom>
-          <a:solidFill>
-            <a:srgbClr val="095292"/>
-          </a:solidFill>
-          <a:ln>
-            <a:noFill/>
-          </a:ln>
-        </p:spPr>
-        <p:style>
-          <a:lnRef idx="1">
-            <a:schemeClr val="accent1"/>
-          </a:lnRef>
-          <a:fillRef idx="3">
-            <a:schemeClr val="accent1"/>
-          </a:fillRef>
-          <a:effectRef idx="2">
-            <a:schemeClr val="accent1"/>
-          </a:effectRef>
-          <a:fontRef idx="minor">
-            <a:schemeClr val="lt1"/>
-          </a:fontRef>
-        </p:style>
-        <p:txBody>
-          <a:bodyPr rtlCol="0" anchor="ctr"/>
-          <a:lstStyle/>
-          <a:p>
-            <a:pPr algn="ctr"/>
-          </a:p>
-        </p:txBody>
-      </p:sp>
-      <p:sp>
-        <p:nvSpPr>
-          <p:cNvPr id="3" name="Rectangle 2"/>
-          <p:cNvSpPr/>
-          <p:nvPr/>
-        </p:nvSpPr>
-        <p:spPr>
-          <a:xfrm>
-            <a:off x="0" y="960120"/>
-            <a:ext cx="12191695" cy="41148"/>
-          </a:xfrm>
-          <a:prstGeom prst="rect">
-            <a:avLst/>
-          </a:prstGeom>
-          <a:solidFill>
-            <a:srgbClr val="FFD000"/>
-          </a:solidFill>
-          <a:ln>
-            <a:noFill/>
-          </a:ln>
-        </p:spPr>
-        <p:style>
-          <a:lnRef idx="1">
-            <a:schemeClr val="accent1"/>
-          </a:lnRef>
-          <a:fillRef idx="3">
-            <a:schemeClr val="accent1"/>
-          </a:fillRef>
-          <a:effectRef idx="2">
-            <a:schemeClr val="accent1"/>
-          </a:effectRef>
-          <a:fontRef idx="minor">
-            <a:schemeClr val="lt1"/>
-          </a:fontRef>
-        </p:style>
-        <p:txBody>
-          <a:bodyPr rtlCol="0" anchor="ctr"/>
-          <a:lstStyle/>
-          <a:p>
-            <a:pPr algn="ctr"/>
-          </a:p>
-        </p:txBody>
-      </p:sp>
-      <p:sp>
-        <p:nvSpPr>
-          <p:cNvPr id="4" name="TextBox 3"/>
-          <p:cNvSpPr txBox="1"/>
-          <p:nvPr/>
-        </p:nvSpPr>
-        <p:spPr>
-          <a:xfrm>
-            <a:off x="457200" y="164592"/>
-            <a:ext cx="11277295" cy="502920"/>
-          </a:xfrm>
-          <a:prstGeom prst="rect">
-            <a:avLst/>
-          </a:prstGeom>
-          <a:noFill/>
-        </p:spPr>
-        <p:txBody>
-          <a:bodyPr wrap="square">
-            <a:spAutoFit/>
-          </a:bodyPr>
-          <a:lstStyle/>
-          <a:p>
-            <a:r>
-              <a:rPr sz="2600" b="1" i="0">
-                <a:solidFill>
-                  <a:srgbClr val="FFFFFF"/>
-                </a:solidFill>
-                <a:latin typeface="Calibri"/>
-              </a:rPr>
-              <a:t>Taller PI — punto de partida</a:t>
-            </a:r>
-          </a:p>
-        </p:txBody>
-      </p:sp>
-      <p:sp>
-        <p:nvSpPr>
-          <p:cNvPr id="5" name="TextBox 4"/>
-          <p:cNvSpPr txBox="1"/>
-          <p:nvPr/>
-        </p:nvSpPr>
-        <p:spPr>
-          <a:xfrm>
-            <a:off x="457200" y="1170432"/>
-            <a:ext cx="11277295" cy="5230368"/>
-          </a:xfrm>
-          <a:prstGeom prst="rect">
-            <a:avLst/>
-          </a:prstGeom>
-          <a:noFill/>
-        </p:spPr>
-        <p:txBody>
-          <a:bodyPr wrap="square">
-            <a:spAutoFit/>
-          </a:bodyPr>
-          <a:lstStyle/>
-          <a:p>
-            <a:pPr>
-              <a:spcAft>
-                <a:spcPts val="800"/>
-              </a:spcAft>
-            </a:pPr>
-            <a:r>
-              <a:rPr sz="2000" b="0" i="0">
-                <a:solidFill>
-                  <a:srgbClr val="333333"/>
-                </a:solidFill>
-                <a:latin typeface="Calibri"/>
-              </a:rPr>
-              <a:t>–   Ya existe el catalogo de RF y RNF de VetCare, pero esta redactado como lista de deseos y nadie sabe en que orden ocurren las cosas ni que pasa cuando algo sale mal.</a:t>
-            </a:r>
-          </a:p>
-          <a:p>
-            <a:pPr>
-              <a:spcAft>
-                <a:spcPts val="800"/>
-              </a:spcAft>
-            </a:pPr>
-            <a:r>
-              <a:rPr sz="2000" b="0" i="0">
-                <a:solidFill>
-                  <a:srgbClr val="333333"/>
-                </a:solidFill>
-                <a:latin typeface="Calibri"/>
-              </a:rPr>
-              <a:t>–   La recepcionista de Huellitas describe su trabajo con frases sueltas: busco la carpeta, si no aparece le pregunto al veterinario, si el propietario es nuevo lleno una hoja aparte y la engrapo.</a:t>
-            </a:r>
-          </a:p>
-          <a:p>
-            <a:pPr>
-              <a:spcAft>
-                <a:spcPts val="800"/>
-              </a:spcAft>
-            </a:pPr>
-            <a:r>
-              <a:rPr sz="2000" b="0" i="0">
-                <a:solidFill>
-                  <a:srgbClr val="333333"/>
-                </a:solidFill>
-                <a:latin typeface="Calibri"/>
-              </a:rPr>
-              <a:t>–   El equipo tiene draw.io abierto y la tentacion de dibujar veinte monigotes antes de escribir una sola linea de comportamiento.</a:t>
-            </a:r>
-          </a:p>
-        </p:txBody>
-      </p:sp>
-      <p:sp>
-        <p:nvSpPr>
-          <p:cNvPr id="6" name="TextBox 5"/>
-          <p:cNvSpPr txBox="1"/>
-          <p:nvPr/>
-        </p:nvSpPr>
-        <p:spPr>
-          <a:xfrm>
-            <a:off x="11185855" y="6473952"/>
-            <a:ext cx="640080" cy="274320"/>
-          </a:xfrm>
-          <a:prstGeom prst="rect">
-            <a:avLst/>
-          </a:prstGeom>
-          <a:noFill/>
-        </p:spPr>
-        <p:txBody>
-          <a:bodyPr wrap="square">
-            <a:spAutoFit/>
-          </a:bodyPr>
-          <a:lstStyle/>
-          <a:p>
-            <a:pPr algn="r"/>
-            <a:r>
-              <a:rPr sz="1100" b="0" i="0">
-                <a:solidFill>
-                  <a:srgbClr val="666666"/>
-                </a:solidFill>
-                <a:latin typeface="Calibri"/>
-              </a:rPr>
-              <a:t>18</a:t>
-            </a:r>
-          </a:p>
-        </p:txBody>
-      </p:sp>
-    </p:spTree>
-  </p:cSld>
-  <p:clrMapOvr>
-    <a:masterClrMapping/>
-  </p:clrMapOvr>
-</p:sld>
-</file>
-
-<file path=ppt/slides/slide19.xml><?xml version="1.0" encoding="utf-8"?>
-<p:sld xmlns:a="http://schemas.openxmlformats.org/drawingml/2006/main" xmlns:p="http://schemas.openxmlformats.org/presentationml/2006/main" xmlns:r="http://schemas.openxmlformats.org/officeDocument/2006/relationships">
-  <p:cSld>
-    <p:bg>
-      <p:bgPr>
-        <a:solidFill>
-          <a:srgbClr val="FFFFFF"/>
-        </a:solidFill>
-        <a:effectLst/>
-      </p:bgPr>
-    </p:bg>
-    <p:spTree>
-      <p:nvGrpSpPr>
-        <p:cNvPr id="1" name=""/>
-        <p:cNvGrpSpPr/>
-        <p:nvPr/>
-      </p:nvGrpSpPr>
-      <p:grpSpPr/>
-      <p:sp>
-        <p:nvSpPr>
-          <p:cNvPr id="2" name="Rectangle 1"/>
-          <p:cNvSpPr/>
-          <p:nvPr/>
-        </p:nvSpPr>
-        <p:spPr>
-          <a:xfrm>
-            <a:off x="0" y="0"/>
-            <a:ext cx="12191695" cy="960120"/>
-          </a:xfrm>
-          <a:prstGeom prst="rect">
-            <a:avLst/>
-          </a:prstGeom>
-          <a:solidFill>
-            <a:srgbClr val="095292"/>
-          </a:solidFill>
-          <a:ln>
-            <a:noFill/>
-          </a:ln>
-        </p:spPr>
-        <p:style>
-          <a:lnRef idx="1">
-            <a:schemeClr val="accent1"/>
-          </a:lnRef>
-          <a:fillRef idx="3">
-            <a:schemeClr val="accent1"/>
-          </a:fillRef>
-          <a:effectRef idx="2">
-            <a:schemeClr val="accent1"/>
-          </a:effectRef>
-          <a:fontRef idx="minor">
-            <a:schemeClr val="lt1"/>
-          </a:fontRef>
-        </p:style>
-        <p:txBody>
-          <a:bodyPr rtlCol="0" anchor="ctr"/>
-          <a:lstStyle/>
-          <a:p>
-            <a:pPr algn="ctr"/>
-          </a:p>
-        </p:txBody>
-      </p:sp>
-      <p:sp>
-        <p:nvSpPr>
-          <p:cNvPr id="3" name="Rectangle 2"/>
-          <p:cNvSpPr/>
-          <p:nvPr/>
-        </p:nvSpPr>
-        <p:spPr>
-          <a:xfrm>
-            <a:off x="0" y="960120"/>
-            <a:ext cx="12191695" cy="41148"/>
-          </a:xfrm>
-          <a:prstGeom prst="rect">
-            <a:avLst/>
-          </a:prstGeom>
-          <a:solidFill>
-            <a:srgbClr val="FFD000"/>
-          </a:solidFill>
-          <a:ln>
-            <a:noFill/>
-          </a:ln>
-        </p:spPr>
-        <p:style>
-          <a:lnRef idx="1">
-            <a:schemeClr val="accent1"/>
-          </a:lnRef>
-          <a:fillRef idx="3">
-            <a:schemeClr val="accent1"/>
-          </a:fillRef>
-          <a:effectRef idx="2">
-            <a:schemeClr val="accent1"/>
-          </a:effectRef>
-          <a:fontRef idx="minor">
-            <a:schemeClr val="lt1"/>
-          </a:fontRef>
-        </p:style>
-        <p:txBody>
-          <a:bodyPr rtlCol="0" anchor="ctr"/>
-          <a:lstStyle/>
-          <a:p>
-            <a:pPr algn="ctr"/>
-          </a:p>
-        </p:txBody>
-      </p:sp>
-      <p:sp>
-        <p:nvSpPr>
-          <p:cNvPr id="4" name="TextBox 3"/>
-          <p:cNvSpPr txBox="1"/>
-          <p:nvPr/>
-        </p:nvSpPr>
-        <p:spPr>
-          <a:xfrm>
-            <a:off x="457200" y="164592"/>
-            <a:ext cx="11277295" cy="502920"/>
-          </a:xfrm>
-          <a:prstGeom prst="rect">
-            <a:avLst/>
-          </a:prstGeom>
-          <a:noFill/>
-        </p:spPr>
-        <p:txBody>
-          <a:bodyPr wrap="square">
-            <a:spAutoFit/>
-          </a:bodyPr>
-          <a:lstStyle/>
-          <a:p>
-            <a:r>
-              <a:rPr sz="2600" b="1" i="0">
-                <a:solidFill>
-                  <a:srgbClr val="FFFFFF"/>
-                </a:solidFill>
-                <a:latin typeface="Calibri"/>
-              </a:rPr>
-              <a:t>Taller PI — pasos guiados</a:t>
-            </a:r>
-          </a:p>
-        </p:txBody>
-      </p:sp>
-      <p:sp>
-        <p:nvSpPr>
-          <p:cNvPr id="5" name="Rounded Rectangle 4"/>
-          <p:cNvSpPr/>
-          <p:nvPr/>
-        </p:nvSpPr>
-        <p:spPr>
-          <a:xfrm>
-            <a:off x="457200" y="1234440"/>
-            <a:ext cx="11277295" cy="950976"/>
-          </a:xfrm>
-          <a:prstGeom prst="roundRect">
-            <a:avLst>
-              <a:gd name="adj" fmla="val 12000"/>
-            </a:avLst>
-          </a:prstGeom>
-          <a:solidFill>
-            <a:srgbClr val="F2F2F2"/>
-          </a:solidFill>
-          <a:ln>
-            <a:noFill/>
-          </a:ln>
-        </p:spPr>
-        <p:style>
-          <a:lnRef idx="1">
-            <a:schemeClr val="accent1"/>
-          </a:lnRef>
-          <a:fillRef idx="3">
-            <a:schemeClr val="accent1"/>
-          </a:fillRef>
-          <a:effectRef idx="2">
-            <a:schemeClr val="accent1"/>
-          </a:effectRef>
-          <a:fontRef idx="minor">
-            <a:schemeClr val="lt1"/>
-          </a:fontRef>
-        </p:style>
-        <p:txBody>
-          <a:bodyPr rtlCol="0" anchor="ctr"/>
-          <a:lstStyle/>
-          <a:p>
-            <a:pPr algn="ctr"/>
-          </a:p>
-        </p:txBody>
-      </p:sp>
-      <p:sp>
-        <p:nvSpPr>
-          <p:cNvPr id="6" name="Rounded Rectangle 5"/>
-          <p:cNvSpPr/>
-          <p:nvPr/>
-        </p:nvSpPr>
-        <p:spPr>
-          <a:xfrm>
-            <a:off x="594360" y="1490472"/>
-            <a:ext cx="438912" cy="438912"/>
-          </a:xfrm>
-          <a:prstGeom prst="roundRect">
-            <a:avLst>
-              <a:gd name="adj" fmla="val 12000"/>
-            </a:avLst>
-          </a:prstGeom>
-          <a:solidFill>
-            <a:srgbClr val="095292"/>
-          </a:solidFill>
-          <a:ln>
-            <a:noFill/>
-          </a:ln>
-        </p:spPr>
-        <p:style>
-          <a:lnRef idx="1">
-            <a:schemeClr val="accent1"/>
-          </a:lnRef>
-          <a:fillRef idx="3">
-            <a:schemeClr val="accent1"/>
-          </a:fillRef>
-          <a:effectRef idx="2">
-            <a:schemeClr val="accent1"/>
-          </a:effectRef>
-          <a:fontRef idx="minor">
-            <a:schemeClr val="lt1"/>
-          </a:fontRef>
-        </p:style>
-        <p:txBody>
-          <a:bodyPr rtlCol="0" anchor="ctr"/>
-          <a:lstStyle/>
-          <a:p>
-            <a:pPr algn="ctr"/>
-          </a:p>
-        </p:txBody>
-      </p:sp>
-      <p:sp>
-        <p:nvSpPr>
-          <p:cNvPr id="7" name="TextBox 6"/>
-          <p:cNvSpPr txBox="1"/>
-          <p:nvPr/>
-        </p:nvSpPr>
-        <p:spPr>
-          <a:xfrm>
-            <a:off x="594360" y="1490472"/>
-            <a:ext cx="438912" cy="438912"/>
-          </a:xfrm>
-          <a:prstGeom prst="rect">
-            <a:avLst/>
-          </a:prstGeom>
-          <a:noFill/>
-        </p:spPr>
-        <p:txBody>
-          <a:bodyPr wrap="square" anchor="ctr"/>
-          <a:lstStyle/>
-          <a:p>
-            <a:pPr algn="ctr"/>
-            <a:r>
-              <a:rPr sz="1600" b="1" i="0">
-                <a:solidFill>
-                  <a:srgbClr val="FFFFFF"/>
-                </a:solidFill>
-                <a:latin typeface="Calibri"/>
-              </a:rPr>
-              <a:t>1</a:t>
-            </a:r>
-          </a:p>
-        </p:txBody>
-      </p:sp>
-      <p:sp>
-        <p:nvSpPr>
-          <p:cNvPr id="8" name="TextBox 7"/>
-          <p:cNvSpPr txBox="1"/>
-          <p:nvPr/>
-        </p:nvSpPr>
-        <p:spPr>
-          <a:xfrm>
-            <a:off x="1188720" y="1325880"/>
-            <a:ext cx="10271455" cy="786384"/>
-          </a:xfrm>
-          <a:prstGeom prst="rect">
-            <a:avLst/>
-          </a:prstGeom>
-          <a:noFill/>
-        </p:spPr>
-        <p:txBody>
-          <a:bodyPr wrap="square" anchor="ctr"/>
-          <a:lstStyle/>
-          <a:p>
-            <a:r>
-              <a:rPr sz="1400" b="1" i="0">
-                <a:solidFill>
-                  <a:srgbClr val="095292"/>
-                </a:solidFill>
-                <a:latin typeface="Calibri"/>
-              </a:rPr>
-              <a:t>En draw.io, dibujar el limite del sistema rotulado VetCare y ubicar afuera los actores como roles (Recepcionista, Veterinario, Administrador y el servicio externo de mensajeria como actor secundario candidato, que hoy todavia no se conecta a ningun caso de uso); ningun actor puede llamarse con nombre propio ni con cargo inventado.</a:t>
-            </a:r>
-          </a:p>
-        </p:txBody>
-      </p:sp>
-      <p:sp>
-        <p:nvSpPr>
-          <p:cNvPr id="9" name="Rounded Rectangle 8"/>
-          <p:cNvSpPr/>
-          <p:nvPr/>
-        </p:nvSpPr>
-        <p:spPr>
-          <a:xfrm>
-            <a:off x="457200" y="2276856"/>
-            <a:ext cx="11277295" cy="950976"/>
-          </a:xfrm>
-          <a:prstGeom prst="roundRect">
-            <a:avLst>
-              <a:gd name="adj" fmla="val 12000"/>
-            </a:avLst>
-          </a:prstGeom>
-          <a:solidFill>
-            <a:srgbClr val="E8F4FA"/>
-          </a:solidFill>
-          <a:ln>
-            <a:noFill/>
-          </a:ln>
-        </p:spPr>
-        <p:style>
-          <a:lnRef idx="1">
-            <a:schemeClr val="accent1"/>
-          </a:lnRef>
-          <a:fillRef idx="3">
-            <a:schemeClr val="accent1"/>
-          </a:fillRef>
-          <a:effectRef idx="2">
-            <a:schemeClr val="accent1"/>
-          </a:effectRef>
-          <a:fontRef idx="minor">
-            <a:schemeClr val="lt1"/>
-          </a:fontRef>
-        </p:style>
-        <p:txBody>
-          <a:bodyPr rtlCol="0" anchor="ctr"/>
-          <a:lstStyle/>
-          <a:p>
-            <a:pPr algn="ctr"/>
-          </a:p>
-        </p:txBody>
-      </p:sp>
-      <p:sp>
-        <p:nvSpPr>
-          <p:cNvPr id="10" name="Rounded Rectangle 9"/>
-          <p:cNvSpPr/>
-          <p:nvPr/>
-        </p:nvSpPr>
-        <p:spPr>
-          <a:xfrm>
-            <a:off x="594360" y="2532888"/>
-            <a:ext cx="438912" cy="438912"/>
-          </a:xfrm>
-          <a:prstGeom prst="roundRect">
-            <a:avLst>
-              <a:gd name="adj" fmla="val 12000"/>
-            </a:avLst>
-          </a:prstGeom>
-          <a:solidFill>
-            <a:srgbClr val="095292"/>
-          </a:solidFill>
-          <a:ln>
-            <a:noFill/>
-          </a:ln>
-        </p:spPr>
-        <p:style>
-          <a:lnRef idx="1">
-            <a:schemeClr val="accent1"/>
-          </a:lnRef>
-          <a:fillRef idx="3">
-            <a:schemeClr val="accent1"/>
-          </a:fillRef>
-          <a:effectRef idx="2">
-            <a:schemeClr val="accent1"/>
-          </a:effectRef>
-          <a:fontRef idx="minor">
-            <a:schemeClr val="lt1"/>
-          </a:fontRef>
-        </p:style>
-        <p:txBody>
-          <a:bodyPr rtlCol="0" anchor="ctr"/>
-          <a:lstStyle/>
-          <a:p>
-            <a:pPr algn="ctr"/>
-          </a:p>
-        </p:txBody>
-      </p:sp>
-      <p:sp>
-        <p:nvSpPr>
-          <p:cNvPr id="11" name="TextBox 10"/>
-          <p:cNvSpPr txBox="1"/>
-          <p:nvPr/>
-        </p:nvSpPr>
-        <p:spPr>
-          <a:xfrm>
-            <a:off x="594360" y="2532888"/>
-            <a:ext cx="438912" cy="438912"/>
-          </a:xfrm>
-          <a:prstGeom prst="rect">
-            <a:avLst/>
-          </a:prstGeom>
-          <a:noFill/>
-        </p:spPr>
-        <p:txBody>
-          <a:bodyPr wrap="square" anchor="ctr"/>
-          <a:lstStyle/>
-          <a:p>
-            <a:pPr algn="ctr"/>
-            <a:r>
-              <a:rPr sz="1600" b="1" i="0">
-                <a:solidFill>
-                  <a:srgbClr val="FFFFFF"/>
-                </a:solidFill>
-                <a:latin typeface="Calibri"/>
-              </a:rPr>
-              <a:t>2</a:t>
-            </a:r>
-          </a:p>
-        </p:txBody>
-      </p:sp>
-      <p:sp>
-        <p:nvSpPr>
-          <p:cNvPr id="12" name="TextBox 11"/>
-          <p:cNvSpPr txBox="1"/>
-          <p:nvPr/>
-        </p:nvSpPr>
-        <p:spPr>
-          <a:xfrm>
-            <a:off x="1188720" y="2368296"/>
-            <a:ext cx="10271455" cy="786384"/>
-          </a:xfrm>
-          <a:prstGeom prst="rect">
-            <a:avLst/>
-          </a:prstGeom>
-          <a:noFill/>
-        </p:spPr>
-        <p:txBody>
-          <a:bodyPr wrap="square" anchor="ctr"/>
-          <a:lstStyle/>
-          <a:p>
-            <a:r>
-              <a:rPr sz="1400" b="1" i="0">
-                <a:solidFill>
-                  <a:srgbClr val="095292"/>
-                </a:solidFill>
-                <a:latin typeface="Calibri"/>
-              </a:rPr>
-              <a:t>Colocar dentro del limite entre seis y ocho casos de uso derivados del catalogo de RF ya construido, todos redactados como verbo en infinitivo mas objeto del dominio, y borrar de inmediato cualquier elipse que se llame Guardar, Validar, Mostrar o Iniciar pantalla.</a:t>
-            </a:r>
-          </a:p>
-        </p:txBody>
-      </p:sp>
-      <p:sp>
-        <p:nvSpPr>
-          <p:cNvPr id="13" name="Rounded Rectangle 12"/>
-          <p:cNvSpPr/>
-          <p:nvPr/>
-        </p:nvSpPr>
-        <p:spPr>
-          <a:xfrm>
-            <a:off x="457200" y="3319272"/>
-            <a:ext cx="11277295" cy="950976"/>
-          </a:xfrm>
-          <a:prstGeom prst="roundRect">
-            <a:avLst>
-              <a:gd name="adj" fmla="val 12000"/>
-            </a:avLst>
-          </a:prstGeom>
-          <a:solidFill>
-            <a:srgbClr val="F2F2F2"/>
-          </a:solidFill>
-          <a:ln>
-            <a:noFill/>
-          </a:ln>
-        </p:spPr>
-        <p:style>
-          <a:lnRef idx="1">
-            <a:schemeClr val="accent1"/>
-          </a:lnRef>
-          <a:fillRef idx="3">
-            <a:schemeClr val="accent1"/>
-          </a:fillRef>
-          <a:effectRef idx="2">
-            <a:schemeClr val="accent1"/>
-          </a:effectRef>
-          <a:fontRef idx="minor">
-            <a:schemeClr val="lt1"/>
-          </a:fontRef>
-        </p:style>
-        <p:txBody>
-          <a:bodyPr rtlCol="0" anchor="ctr"/>
-          <a:lstStyle/>
-          <a:p>
-            <a:pPr algn="ctr"/>
-          </a:p>
-        </p:txBody>
-      </p:sp>
-      <p:sp>
-        <p:nvSpPr>
-          <p:cNvPr id="14" name="Rounded Rectangle 13"/>
-          <p:cNvSpPr/>
-          <p:nvPr/>
-        </p:nvSpPr>
-        <p:spPr>
-          <a:xfrm>
-            <a:off x="594360" y="3575304"/>
-            <a:ext cx="438912" cy="438912"/>
-          </a:xfrm>
-          <a:prstGeom prst="roundRect">
-            <a:avLst>
-              <a:gd name="adj" fmla="val 12000"/>
-            </a:avLst>
-          </a:prstGeom>
-          <a:solidFill>
-            <a:srgbClr val="095292"/>
-          </a:solidFill>
-          <a:ln>
-            <a:noFill/>
-          </a:ln>
-        </p:spPr>
-        <p:style>
-          <a:lnRef idx="1">
-            <a:schemeClr val="accent1"/>
-          </a:lnRef>
-          <a:fillRef idx="3">
-            <a:schemeClr val="accent1"/>
-          </a:fillRef>
-          <a:effectRef idx="2">
-            <a:schemeClr val="accent1"/>
-          </a:effectRef>
-          <a:fontRef idx="minor">
-            <a:schemeClr val="lt1"/>
-          </a:fontRef>
-        </p:style>
-        <p:txBody>
-          <a:bodyPr rtlCol="0" anchor="ctr"/>
-          <a:lstStyle/>
-          <a:p>
-            <a:pPr algn="ctr"/>
-          </a:p>
-        </p:txBody>
-      </p:sp>
-      <p:sp>
-        <p:nvSpPr>
-          <p:cNvPr id="15" name="TextBox 14"/>
-          <p:cNvSpPr txBox="1"/>
-          <p:nvPr/>
-        </p:nvSpPr>
-        <p:spPr>
-          <a:xfrm>
-            <a:off x="594360" y="3575304"/>
-            <a:ext cx="438912" cy="438912"/>
-          </a:xfrm>
-          <a:prstGeom prst="rect">
-            <a:avLst/>
-          </a:prstGeom>
-          <a:noFill/>
-        </p:spPr>
-        <p:txBody>
-          <a:bodyPr wrap="square" anchor="ctr"/>
-          <a:lstStyle/>
-          <a:p>
-            <a:pPr algn="ctr"/>
-            <a:r>
-              <a:rPr sz="1600" b="1" i="0">
-                <a:solidFill>
-                  <a:srgbClr val="FFFFFF"/>
-                </a:solidFill>
-                <a:latin typeface="Calibri"/>
-              </a:rPr>
-              <a:t>3</a:t>
-            </a:r>
-          </a:p>
-        </p:txBody>
-      </p:sp>
-      <p:sp>
-        <p:nvSpPr>
-          <p:cNvPr id="16" name="TextBox 15"/>
-          <p:cNvSpPr txBox="1"/>
-          <p:nvPr/>
-        </p:nvSpPr>
-        <p:spPr>
-          <a:xfrm>
-            <a:off x="1188720" y="3410712"/>
-            <a:ext cx="10271455" cy="786384"/>
-          </a:xfrm>
-          <a:prstGeom prst="rect">
-            <a:avLst/>
-          </a:prstGeom>
-          <a:noFill/>
-        </p:spPr>
-        <p:txBody>
-          <a:bodyPr wrap="square" anchor="ctr"/>
-          <a:lstStyle/>
-          <a:p>
-            <a:r>
-              <a:rPr sz="1400" b="1" i="0">
-                <a:solidFill>
-                  <a:srgbClr val="095292"/>
-                </a:solidFill>
-                <a:latin typeface="Calibri"/>
-              </a:rPr>
-              <a:t>Construir en Google Docs la matriz de trazabilidad RF a CU: cada requisito funcional debe apuntar al menos a un caso de uso y cada caso de uso debe nacer de al menos un requisito; marcar en rojo los huerfanos que aparezcan y anotar por escrito la decision que se tomara con cada uno.</a:t>
-            </a:r>
-          </a:p>
-        </p:txBody>
-      </p:sp>
-      <p:sp>
-        <p:nvSpPr>
-          <p:cNvPr id="17" name="Rounded Rectangle 16"/>
-          <p:cNvSpPr/>
-          <p:nvPr/>
-        </p:nvSpPr>
-        <p:spPr>
-          <a:xfrm>
-            <a:off x="457200" y="4361688"/>
-            <a:ext cx="11277295" cy="950976"/>
-          </a:xfrm>
-          <a:prstGeom prst="roundRect">
-            <a:avLst>
-              <a:gd name="adj" fmla="val 12000"/>
-            </a:avLst>
-          </a:prstGeom>
-          <a:solidFill>
-            <a:srgbClr val="E8F4FA"/>
-          </a:solidFill>
-          <a:ln>
-            <a:noFill/>
-          </a:ln>
-        </p:spPr>
-        <p:style>
-          <a:lnRef idx="1">
-            <a:schemeClr val="accent1"/>
-          </a:lnRef>
-          <a:fillRef idx="3">
-            <a:schemeClr val="accent1"/>
-          </a:fillRef>
-          <a:effectRef idx="2">
-            <a:schemeClr val="accent1"/>
-          </a:effectRef>
-          <a:fontRef idx="minor">
-            <a:schemeClr val="lt1"/>
-          </a:fontRef>
-        </p:style>
-        <p:txBody>
-          <a:bodyPr rtlCol="0" anchor="ctr"/>
-          <a:lstStyle/>
-          <a:p>
-            <a:pPr algn="ctr"/>
-          </a:p>
-        </p:txBody>
-      </p:sp>
-      <p:sp>
-        <p:nvSpPr>
-          <p:cNvPr id="18" name="Rounded Rectangle 17"/>
-          <p:cNvSpPr/>
-          <p:nvPr/>
-        </p:nvSpPr>
-        <p:spPr>
-          <a:xfrm>
-            <a:off x="594360" y="4617720"/>
-            <a:ext cx="438912" cy="438912"/>
-          </a:xfrm>
-          <a:prstGeom prst="roundRect">
-            <a:avLst>
-              <a:gd name="adj" fmla="val 12000"/>
-            </a:avLst>
-          </a:prstGeom>
-          <a:solidFill>
-            <a:srgbClr val="095292"/>
-          </a:solidFill>
-          <a:ln>
-            <a:noFill/>
-          </a:ln>
-        </p:spPr>
-        <p:style>
-          <a:lnRef idx="1">
-            <a:schemeClr val="accent1"/>
-          </a:lnRef>
-          <a:fillRef idx="3">
-            <a:schemeClr val="accent1"/>
-          </a:fillRef>
-          <a:effectRef idx="2">
-            <a:schemeClr val="accent1"/>
-          </a:effectRef>
-          <a:fontRef idx="minor">
-            <a:schemeClr val="lt1"/>
-          </a:fontRef>
-        </p:style>
-        <p:txBody>
-          <a:bodyPr rtlCol="0" anchor="ctr"/>
-          <a:lstStyle/>
-          <a:p>
-            <a:pPr algn="ctr"/>
-          </a:p>
-        </p:txBody>
-      </p:sp>
-      <p:sp>
-        <p:nvSpPr>
-          <p:cNvPr id="19" name="TextBox 18"/>
-          <p:cNvSpPr txBox="1"/>
-          <p:nvPr/>
-        </p:nvSpPr>
-        <p:spPr>
-          <a:xfrm>
-            <a:off x="594360" y="4617720"/>
-            <a:ext cx="438912" cy="438912"/>
-          </a:xfrm>
-          <a:prstGeom prst="rect">
-            <a:avLst/>
-          </a:prstGeom>
-          <a:noFill/>
-        </p:spPr>
-        <p:txBody>
-          <a:bodyPr wrap="square" anchor="ctr"/>
-          <a:lstStyle/>
-          <a:p>
-            <a:pPr algn="ctr"/>
-            <a:r>
-              <a:rPr sz="1600" b="1" i="0">
-                <a:solidFill>
-                  <a:srgbClr val="FFFFFF"/>
-                </a:solidFill>
-                <a:latin typeface="Calibri"/>
-              </a:rPr>
-              <a:t>4</a:t>
-            </a:r>
-          </a:p>
-        </p:txBody>
-      </p:sp>
-      <p:sp>
-        <p:nvSpPr>
-          <p:cNvPr id="20" name="TextBox 19"/>
-          <p:cNvSpPr txBox="1"/>
-          <p:nvPr/>
-        </p:nvSpPr>
-        <p:spPr>
-          <a:xfrm>
-            <a:off x="1188720" y="4453128"/>
-            <a:ext cx="10271455" cy="786384"/>
-          </a:xfrm>
-          <a:prstGeom prst="rect">
-            <a:avLst/>
-          </a:prstGeom>
-          <a:noFill/>
-        </p:spPr>
-        <p:txBody>
-          <a:bodyPr wrap="square" anchor="ctr"/>
-          <a:lstStyle/>
-          <a:p>
-            <a:r>
-              <a:rPr sz="1500" b="1" i="0">
-                <a:solidFill>
-                  <a:srgbClr val="095292"/>
-                </a:solidFill>
-                <a:latin typeface="Calibri"/>
-              </a:rPr>
-              <a:t>Modelar exactamente una relacion include y una relacion extend en el diagrama, y escribir al lado, en una nota de draw.io, una frase que justifique por que una es obligatoria y la otra condicional; si no se puede justificar, se elimina la flecha.</a:t>
-            </a:r>
-          </a:p>
-        </p:txBody>
-      </p:sp>
-      <p:sp>
-        <p:nvSpPr>
-          <p:cNvPr id="21" name="Rounded Rectangle 20"/>
-          <p:cNvSpPr/>
-          <p:nvPr/>
-        </p:nvSpPr>
-        <p:spPr>
-          <a:xfrm>
-            <a:off x="457200" y="5404104"/>
-            <a:ext cx="11277295" cy="950976"/>
-          </a:xfrm>
-          <a:prstGeom prst="roundRect">
-            <a:avLst>
-              <a:gd name="adj" fmla="val 12000"/>
-            </a:avLst>
-          </a:prstGeom>
-          <a:solidFill>
-            <a:srgbClr val="F2F2F2"/>
-          </a:solidFill>
-          <a:ln>
-            <a:noFill/>
-          </a:ln>
-        </p:spPr>
-        <p:style>
-          <a:lnRef idx="1">
-            <a:schemeClr val="accent1"/>
-          </a:lnRef>
-          <a:fillRef idx="3">
-            <a:schemeClr val="accent1"/>
-          </a:fillRef>
-          <a:effectRef idx="2">
-            <a:schemeClr val="accent1"/>
-          </a:effectRef>
-          <a:fontRef idx="minor">
-            <a:schemeClr val="lt1"/>
-          </a:fontRef>
-        </p:style>
-        <p:txBody>
-          <a:bodyPr rtlCol="0" anchor="ctr"/>
-          <a:lstStyle/>
-          <a:p>
-            <a:pPr algn="ctr"/>
-          </a:p>
-        </p:txBody>
-      </p:sp>
-      <p:sp>
-        <p:nvSpPr>
-          <p:cNvPr id="22" name="Rounded Rectangle 21"/>
-          <p:cNvSpPr/>
-          <p:nvPr/>
-        </p:nvSpPr>
-        <p:spPr>
-          <a:xfrm>
-            <a:off x="594360" y="5660136"/>
-            <a:ext cx="438912" cy="438912"/>
-          </a:xfrm>
-          <a:prstGeom prst="roundRect">
-            <a:avLst>
-              <a:gd name="adj" fmla="val 12000"/>
-            </a:avLst>
-          </a:prstGeom>
-          <a:solidFill>
-            <a:srgbClr val="095292"/>
-          </a:solidFill>
-          <a:ln>
-            <a:noFill/>
-          </a:ln>
-        </p:spPr>
-        <p:style>
-          <a:lnRef idx="1">
-            <a:schemeClr val="accent1"/>
-          </a:lnRef>
-          <a:fillRef idx="3">
-            <a:schemeClr val="accent1"/>
-          </a:fillRef>
-          <a:effectRef idx="2">
-            <a:schemeClr val="accent1"/>
-          </a:effectRef>
-          <a:fontRef idx="minor">
-            <a:schemeClr val="lt1"/>
-          </a:fontRef>
-        </p:style>
-        <p:txBody>
-          <a:bodyPr rtlCol="0" anchor="ctr"/>
-          <a:lstStyle/>
-          <a:p>
-            <a:pPr algn="ctr"/>
-          </a:p>
-        </p:txBody>
-      </p:sp>
-      <p:sp>
-        <p:nvSpPr>
-          <p:cNvPr id="23" name="TextBox 22"/>
-          <p:cNvSpPr txBox="1"/>
-          <p:nvPr/>
-        </p:nvSpPr>
-        <p:spPr>
-          <a:xfrm>
-            <a:off x="594360" y="5660136"/>
-            <a:ext cx="438912" cy="438912"/>
-          </a:xfrm>
-          <a:prstGeom prst="rect">
-            <a:avLst/>
-          </a:prstGeom>
-          <a:noFill/>
-        </p:spPr>
-        <p:txBody>
-          <a:bodyPr wrap="square" anchor="ctr"/>
-          <a:lstStyle/>
-          <a:p>
-            <a:pPr algn="ctr"/>
-            <a:r>
-              <a:rPr sz="1600" b="1" i="0">
-                <a:solidFill>
-                  <a:srgbClr val="FFFFFF"/>
-                </a:solidFill>
-                <a:latin typeface="Calibri"/>
-              </a:rPr>
-              <a:t>5</a:t>
-            </a:r>
-          </a:p>
-        </p:txBody>
-      </p:sp>
-      <p:sp>
-        <p:nvSpPr>
-          <p:cNvPr id="24" name="TextBox 23"/>
-          <p:cNvSpPr txBox="1"/>
-          <p:nvPr/>
-        </p:nvSpPr>
-        <p:spPr>
-          <a:xfrm>
-            <a:off x="1188720" y="5495544"/>
-            <a:ext cx="10271455" cy="786384"/>
-          </a:xfrm>
-          <a:prstGeom prst="rect">
-            <a:avLst/>
-          </a:prstGeom>
-          <a:noFill/>
-        </p:spPr>
-        <p:txBody>
-          <a:bodyPr wrap="square" anchor="ctr"/>
-          <a:lstStyle/>
-          <a:p>
-            <a:r>
-              <a:rPr sz="1400" b="1" i="0">
-                <a:solidFill>
-                  <a:srgbClr val="095292"/>
-                </a:solidFill>
-                <a:latin typeface="Calibri"/>
-              </a:rPr>
-              <a:t>Diligenciar la plantilla completa de especificacion para CU-01 Registrar mascota y CU-02 Buscar expediente, con precondiciones, postcondiciones de exito y de fracaso, flujo principal en pares actor-sistema y minimo dos flujos alternos cada uno; exportar todo a PDF y subirlo a la plataforma del curso.</a:t>
-            </a:r>
-          </a:p>
-        </p:txBody>
-      </p:sp>
-      <p:sp>
-        <p:nvSpPr>
-          <p:cNvPr id="25" name="TextBox 24"/>
-          <p:cNvSpPr txBox="1"/>
-          <p:nvPr/>
-        </p:nvSpPr>
-        <p:spPr>
-          <a:xfrm>
-            <a:off x="11185855" y="6473952"/>
-            <a:ext cx="640080" cy="274320"/>
-          </a:xfrm>
-          <a:prstGeom prst="rect">
-            <a:avLst/>
-          </a:prstGeom>
-          <a:noFill/>
-        </p:spPr>
-        <p:txBody>
-          <a:bodyPr wrap="square">
-            <a:spAutoFit/>
-          </a:bodyPr>
-          <a:lstStyle/>
-          <a:p>
-            <a:pPr algn="r"/>
-            <a:r>
-              <a:rPr sz="1100" b="0" i="0">
-                <a:solidFill>
-                  <a:srgbClr val="666666"/>
-                </a:solidFill>
-                <a:latin typeface="Calibri"/>
-              </a:rPr>
-              <a:t>19</a:t>
+                  <a:srgbClr val="269CCB"/>
+                </a:solidFill>
+                <a:latin typeface="Calibri"/>
+              </a:rPr>
+              <a:t>Teoria al servicio del diseño</a:t>
             </a:r>
           </a:p>
         </p:txBody>
@@ -8587,7 +7149,7 @@
                 </a:solidFill>
                 <a:latin typeface="Calibri"/>
               </a:rPr>
-              <a:t>Encuadre de hoy · Objetivo del PI</a:t>
+              <a:t>Encuadre de hoy</a:t>
             </a:r>
           </a:p>
         </p:txBody>
@@ -8635,7 +7197,7 @@
                 </a:solidFill>
                 <a:latin typeface="Calibri"/>
               </a:rPr>
-              <a:t>Hoy avanzamos VetCare en:</a:t>
+              <a:t>Tema:</a:t>
             </a:r>
             <a:r>
               <a:rPr sz="2000" b="0" i="0">
@@ -8644,7 +7206,7 @@
                 </a:solidFill>
                 <a:latin typeface="Calibri"/>
               </a:rPr>
-              <a:t> Queda listo el diagrama de casos de uso de VetCare con su limite de sistema y la especificacion textual completa de Registrar mascota y Buscar expediente.</a:t>
+              <a:t> Casos de uso</a:t>
             </a:r>
           </a:p>
           <a:p>
@@ -8660,34 +7222,7 @@
                 </a:solidFill>
                 <a:latin typeface="Calibri"/>
               </a:rPr>
-              <a:t>–   Herramienta: </a:t>
-            </a:r>
-            <a:r>
-              <a:rPr sz="2000" b="1" i="0">
-                <a:solidFill>
-                  <a:srgbClr val="333333"/>
-                </a:solidFill>
-                <a:latin typeface="Calibri"/>
-              </a:rPr>
-              <a:t>draw.io · Google Docs</a:t>
-            </a:r>
-            <a:r>
-              <a:rPr sz="2000" b="0" i="0">
-                <a:solidFill>
-                  <a:srgbClr val="333333"/>
-                </a:solidFill>
-                <a:latin typeface="Calibri"/>
-              </a:rPr>
-              <a:t> · Bloque </a:t>
-            </a:r>
-            <a:r>
-              <a:rPr sz="2000" b="1" i="0">
-                <a:solidFill>
-                  <a:srgbClr val="333333"/>
-                </a:solidFill>
-                <a:latin typeface="Calibri"/>
-              </a:rPr>
-              <a:t>120 min</a:t>
+              <a:t>–   El diagrama se dibuja en cinco minutos; el valor esta en la especificacion</a:t>
             </a:r>
           </a:p>
           <a:p>
@@ -8703,7 +7238,7 @@
                 </a:solidFill>
                 <a:latin typeface="Calibri"/>
               </a:rPr>
-              <a:t>–   </a:t>
+              <a:t>–   Herramienta del tema: </a:t>
             </a:r>
             <a:r>
               <a:rPr sz="2000" b="1" i="0">
@@ -8712,7 +7247,7 @@
                 </a:solidFill>
                 <a:latin typeface="Calibri"/>
               </a:rPr>
-              <a:t>Entregable de hoy:</a:t>
+              <a:t>draw.io · Google Docs</a:t>
             </a:r>
             <a:r>
               <a:rPr sz="2000" b="0" i="0">
@@ -8721,7 +7256,16 @@
                 </a:solidFill>
                 <a:latin typeface="Calibri"/>
               </a:rPr>
-              <a:t> Un PDF con el diagrama de casos de uso, la matriz de trazabilidad RF a CU y las dos especificaciones textuales completas (precondiciones, postcondiciones, flujo principal y minimo dos flujos alternos cada una), subido a la plataforma del curso.</a:t>
+              <a:t> · Bloque </a:t>
+            </a:r>
+            <a:r>
+              <a:rPr sz="2000" b="1" i="0">
+                <a:solidFill>
+                  <a:srgbClr val="333333"/>
+                </a:solidFill>
+                <a:latin typeface="Calibri"/>
+              </a:rPr>
+              <a:t>120 min</a:t>
             </a:r>
           </a:p>
           <a:p>
@@ -8737,7 +7281,7 @@
                 </a:solidFill>
                 <a:latin typeface="Calibri"/>
               </a:rPr>
-              <a:t>–   La teoria esta al servicio del producto: al salir, VetCare avanzo.</a:t>
+              <a:t>–   Ejemplo de toda la clase: VetCare, el sistema de la clinica «Huellitas».</a:t>
             </a:r>
           </a:p>
         </p:txBody>
@@ -8773,1917 +7317,6 @@
                 <a:latin typeface="Calibri"/>
               </a:rPr>
               <a:t>2</a:t>
-            </a:r>
-          </a:p>
-        </p:txBody>
-      </p:sp>
-    </p:spTree>
-  </p:cSld>
-  <p:clrMapOvr>
-    <a:masterClrMapping/>
-  </p:clrMapOvr>
-</p:sld>
-</file>
-
-<file path=ppt/slides/slide20.xml><?xml version="1.0" encoding="utf-8"?>
-<p:sld xmlns:a="http://schemas.openxmlformats.org/drawingml/2006/main" xmlns:p="http://schemas.openxmlformats.org/presentationml/2006/main" xmlns:r="http://schemas.openxmlformats.org/officeDocument/2006/relationships">
-  <p:cSld>
-    <p:bg>
-      <p:bgPr>
-        <a:solidFill>
-          <a:srgbClr val="FFFFFF"/>
-        </a:solidFill>
-        <a:effectLst/>
-      </p:bgPr>
-    </p:bg>
-    <p:spTree>
-      <p:nvGrpSpPr>
-        <p:cNvPr id="1" name=""/>
-        <p:cNvGrpSpPr/>
-        <p:nvPr/>
-      </p:nvGrpSpPr>
-      <p:grpSpPr/>
-      <p:sp>
-        <p:nvSpPr>
-          <p:cNvPr id="2" name="Rectangle 1"/>
-          <p:cNvSpPr/>
-          <p:nvPr/>
-        </p:nvSpPr>
-        <p:spPr>
-          <a:xfrm>
-            <a:off x="0" y="0"/>
-            <a:ext cx="12191695" cy="960120"/>
-          </a:xfrm>
-          <a:prstGeom prst="rect">
-            <a:avLst/>
-          </a:prstGeom>
-          <a:solidFill>
-            <a:srgbClr val="095292"/>
-          </a:solidFill>
-          <a:ln>
-            <a:noFill/>
-          </a:ln>
-        </p:spPr>
-        <p:style>
-          <a:lnRef idx="1">
-            <a:schemeClr val="accent1"/>
-          </a:lnRef>
-          <a:fillRef idx="3">
-            <a:schemeClr val="accent1"/>
-          </a:fillRef>
-          <a:effectRef idx="2">
-            <a:schemeClr val="accent1"/>
-          </a:effectRef>
-          <a:fontRef idx="minor">
-            <a:schemeClr val="lt1"/>
-          </a:fontRef>
-        </p:style>
-        <p:txBody>
-          <a:bodyPr rtlCol="0" anchor="ctr"/>
-          <a:lstStyle/>
-          <a:p>
-            <a:pPr algn="ctr"/>
-          </a:p>
-        </p:txBody>
-      </p:sp>
-      <p:sp>
-        <p:nvSpPr>
-          <p:cNvPr id="3" name="Rectangle 2"/>
-          <p:cNvSpPr/>
-          <p:nvPr/>
-        </p:nvSpPr>
-        <p:spPr>
-          <a:xfrm>
-            <a:off x="0" y="960120"/>
-            <a:ext cx="12191695" cy="41148"/>
-          </a:xfrm>
-          <a:prstGeom prst="rect">
-            <a:avLst/>
-          </a:prstGeom>
-          <a:solidFill>
-            <a:srgbClr val="FFD000"/>
-          </a:solidFill>
-          <a:ln>
-            <a:noFill/>
-          </a:ln>
-        </p:spPr>
-        <p:style>
-          <a:lnRef idx="1">
-            <a:schemeClr val="accent1"/>
-          </a:lnRef>
-          <a:fillRef idx="3">
-            <a:schemeClr val="accent1"/>
-          </a:fillRef>
-          <a:effectRef idx="2">
-            <a:schemeClr val="accent1"/>
-          </a:effectRef>
-          <a:fontRef idx="minor">
-            <a:schemeClr val="lt1"/>
-          </a:fontRef>
-        </p:style>
-        <p:txBody>
-          <a:bodyPr rtlCol="0" anchor="ctr"/>
-          <a:lstStyle/>
-          <a:p>
-            <a:pPr algn="ctr"/>
-          </a:p>
-        </p:txBody>
-      </p:sp>
-      <p:sp>
-        <p:nvSpPr>
-          <p:cNvPr id="4" name="TextBox 3"/>
-          <p:cNvSpPr txBox="1"/>
-          <p:nvPr/>
-        </p:nvSpPr>
-        <p:spPr>
-          <a:xfrm>
-            <a:off x="457200" y="164592"/>
-            <a:ext cx="11277295" cy="502920"/>
-          </a:xfrm>
-          <a:prstGeom prst="rect">
-            <a:avLst/>
-          </a:prstGeom>
-          <a:noFill/>
-        </p:spPr>
-        <p:txBody>
-          <a:bodyPr wrap="square">
-            <a:spAutoFit/>
-          </a:bodyPr>
-          <a:lstStyle/>
-          <a:p>
-            <a:r>
-              <a:rPr sz="2600" b="1" i="0">
-                <a:solidFill>
-                  <a:srgbClr val="FFFFFF"/>
-                </a:solidFill>
-                <a:latin typeface="Calibri"/>
-              </a:rPr>
-              <a:t>Antes de entregar — autochequeo</a:t>
-            </a:r>
-          </a:p>
-        </p:txBody>
-      </p:sp>
-      <p:sp>
-        <p:nvSpPr>
-          <p:cNvPr id="5" name="Rounded Rectangle 4"/>
-          <p:cNvSpPr/>
-          <p:nvPr/>
-        </p:nvSpPr>
-        <p:spPr>
-          <a:xfrm>
-            <a:off x="457200" y="1261872"/>
-            <a:ext cx="11277295" cy="566928"/>
-          </a:xfrm>
-          <a:prstGeom prst="roundRect">
-            <a:avLst>
-              <a:gd name="adj" fmla="val 12000"/>
-            </a:avLst>
-          </a:prstGeom>
-          <a:solidFill>
-            <a:srgbClr val="F2F2F2"/>
-          </a:solidFill>
-          <a:ln>
-            <a:noFill/>
-          </a:ln>
-        </p:spPr>
-        <p:style>
-          <a:lnRef idx="1">
-            <a:schemeClr val="accent1"/>
-          </a:lnRef>
-          <a:fillRef idx="3">
-            <a:schemeClr val="accent1"/>
-          </a:fillRef>
-          <a:effectRef idx="2">
-            <a:schemeClr val="accent1"/>
-          </a:effectRef>
-          <a:fontRef idx="minor">
-            <a:schemeClr val="lt1"/>
-          </a:fontRef>
-        </p:style>
-        <p:txBody>
-          <a:bodyPr rtlCol="0" anchor="ctr"/>
-          <a:lstStyle/>
-          <a:p>
-            <a:pPr algn="ctr"/>
-          </a:p>
-        </p:txBody>
-      </p:sp>
-      <p:sp>
-        <p:nvSpPr>
-          <p:cNvPr id="6" name="Rectangle 5"/>
-          <p:cNvSpPr/>
-          <p:nvPr/>
-        </p:nvSpPr>
-        <p:spPr>
-          <a:xfrm>
-            <a:off x="640080" y="1408175"/>
-            <a:ext cx="274320" cy="274320"/>
-          </a:xfrm>
-          <a:prstGeom prst="rect">
-            <a:avLst/>
-          </a:prstGeom>
-          <a:solidFill>
-            <a:srgbClr val="FFFFFF"/>
-          </a:solidFill>
-          <a:ln>
-            <a:solidFill>
-              <a:srgbClr val="333333"/>
-            </a:solidFill>
-          </a:ln>
-        </p:spPr>
-        <p:style>
-          <a:lnRef idx="1">
-            <a:schemeClr val="accent1"/>
-          </a:lnRef>
-          <a:fillRef idx="3">
-            <a:schemeClr val="accent1"/>
-          </a:fillRef>
-          <a:effectRef idx="2">
-            <a:schemeClr val="accent1"/>
-          </a:effectRef>
-          <a:fontRef idx="minor">
-            <a:schemeClr val="lt1"/>
-          </a:fontRef>
-        </p:style>
-        <p:txBody>
-          <a:bodyPr rtlCol="0" anchor="ctr"/>
-          <a:lstStyle/>
-          <a:p>
-            <a:pPr algn="ctr"/>
-          </a:p>
-        </p:txBody>
-      </p:sp>
-      <p:sp>
-        <p:nvSpPr>
-          <p:cNvPr id="7" name="Rectangle 6"/>
-          <p:cNvSpPr/>
-          <p:nvPr/>
-        </p:nvSpPr>
-        <p:spPr>
-          <a:xfrm>
-            <a:off x="640080" y="1408175"/>
-            <a:ext cx="73152" cy="274320"/>
-          </a:xfrm>
-          <a:prstGeom prst="rect">
-            <a:avLst/>
-          </a:prstGeom>
-          <a:solidFill>
-            <a:srgbClr val="269CCB"/>
-          </a:solidFill>
-          <a:ln>
-            <a:noFill/>
-          </a:ln>
-        </p:spPr>
-        <p:style>
-          <a:lnRef idx="1">
-            <a:schemeClr val="accent1"/>
-          </a:lnRef>
-          <a:fillRef idx="3">
-            <a:schemeClr val="accent1"/>
-          </a:fillRef>
-          <a:effectRef idx="2">
-            <a:schemeClr val="accent1"/>
-          </a:effectRef>
-          <a:fontRef idx="minor">
-            <a:schemeClr val="lt1"/>
-          </a:fontRef>
-        </p:style>
-        <p:txBody>
-          <a:bodyPr rtlCol="0" anchor="ctr"/>
-          <a:lstStyle/>
-          <a:p>
-            <a:pPr algn="ctr"/>
-          </a:p>
-        </p:txBody>
-      </p:sp>
-      <p:sp>
-        <p:nvSpPr>
-          <p:cNvPr id="8" name="TextBox 7"/>
-          <p:cNvSpPr txBox="1"/>
-          <p:nvPr/>
-        </p:nvSpPr>
-        <p:spPr>
-          <a:xfrm>
-            <a:off x="1097280" y="1353312"/>
-            <a:ext cx="10362895" cy="402336"/>
-          </a:xfrm>
-          <a:prstGeom prst="rect">
-            <a:avLst/>
-          </a:prstGeom>
-          <a:noFill/>
-        </p:spPr>
-        <p:txBody>
-          <a:bodyPr wrap="square" anchor="ctr"/>
-          <a:lstStyle/>
-          <a:p>
-            <a:r>
-              <a:rPr sz="1500" b="0" i="0">
-                <a:solidFill>
-                  <a:srgbClr val="333333"/>
-                </a:solidFill>
-                <a:latin typeface="Calibri"/>
-              </a:rPr>
-              <a:t>Si un actor se fuera a almorzar justo despues de ejecutar su caso de uso, quedaria satisfecho o le faltaria algo por hacer?</a:t>
-            </a:r>
-          </a:p>
-        </p:txBody>
-      </p:sp>
-      <p:sp>
-        <p:nvSpPr>
-          <p:cNvPr id="9" name="Rounded Rectangle 8"/>
-          <p:cNvSpPr/>
-          <p:nvPr/>
-        </p:nvSpPr>
-        <p:spPr>
-          <a:xfrm>
-            <a:off x="457200" y="1938528"/>
-            <a:ext cx="11277295" cy="566928"/>
-          </a:xfrm>
-          <a:prstGeom prst="roundRect">
-            <a:avLst>
-              <a:gd name="adj" fmla="val 12000"/>
-            </a:avLst>
-          </a:prstGeom>
-          <a:solidFill>
-            <a:srgbClr val="F2F2F2"/>
-          </a:solidFill>
-          <a:ln>
-            <a:noFill/>
-          </a:ln>
-        </p:spPr>
-        <p:style>
-          <a:lnRef idx="1">
-            <a:schemeClr val="accent1"/>
-          </a:lnRef>
-          <a:fillRef idx="3">
-            <a:schemeClr val="accent1"/>
-          </a:fillRef>
-          <a:effectRef idx="2">
-            <a:schemeClr val="accent1"/>
-          </a:effectRef>
-          <a:fontRef idx="minor">
-            <a:schemeClr val="lt1"/>
-          </a:fontRef>
-        </p:style>
-        <p:txBody>
-          <a:bodyPr rtlCol="0" anchor="ctr"/>
-          <a:lstStyle/>
-          <a:p>
-            <a:pPr algn="ctr"/>
-          </a:p>
-        </p:txBody>
-      </p:sp>
-      <p:sp>
-        <p:nvSpPr>
-          <p:cNvPr id="10" name="Rectangle 9"/>
-          <p:cNvSpPr/>
-          <p:nvPr/>
-        </p:nvSpPr>
-        <p:spPr>
-          <a:xfrm>
-            <a:off x="640080" y="2084832"/>
-            <a:ext cx="274320" cy="274320"/>
-          </a:xfrm>
-          <a:prstGeom prst="rect">
-            <a:avLst/>
-          </a:prstGeom>
-          <a:solidFill>
-            <a:srgbClr val="FFFFFF"/>
-          </a:solidFill>
-          <a:ln>
-            <a:solidFill>
-              <a:srgbClr val="333333"/>
-            </a:solidFill>
-          </a:ln>
-        </p:spPr>
-        <p:style>
-          <a:lnRef idx="1">
-            <a:schemeClr val="accent1"/>
-          </a:lnRef>
-          <a:fillRef idx="3">
-            <a:schemeClr val="accent1"/>
-          </a:fillRef>
-          <a:effectRef idx="2">
-            <a:schemeClr val="accent1"/>
-          </a:effectRef>
-          <a:fontRef idx="minor">
-            <a:schemeClr val="lt1"/>
-          </a:fontRef>
-        </p:style>
-        <p:txBody>
-          <a:bodyPr rtlCol="0" anchor="ctr"/>
-          <a:lstStyle/>
-          <a:p>
-            <a:pPr algn="ctr"/>
-          </a:p>
-        </p:txBody>
-      </p:sp>
-      <p:sp>
-        <p:nvSpPr>
-          <p:cNvPr id="11" name="Rectangle 10"/>
-          <p:cNvSpPr/>
-          <p:nvPr/>
-        </p:nvSpPr>
-        <p:spPr>
-          <a:xfrm>
-            <a:off x="640080" y="2084832"/>
-            <a:ext cx="73152" cy="274320"/>
-          </a:xfrm>
-          <a:prstGeom prst="rect">
-            <a:avLst/>
-          </a:prstGeom>
-          <a:solidFill>
-            <a:srgbClr val="269CCB"/>
-          </a:solidFill>
-          <a:ln>
-            <a:noFill/>
-          </a:ln>
-        </p:spPr>
-        <p:style>
-          <a:lnRef idx="1">
-            <a:schemeClr val="accent1"/>
-          </a:lnRef>
-          <a:fillRef idx="3">
-            <a:schemeClr val="accent1"/>
-          </a:fillRef>
-          <a:effectRef idx="2">
-            <a:schemeClr val="accent1"/>
-          </a:effectRef>
-          <a:fontRef idx="minor">
-            <a:schemeClr val="lt1"/>
-          </a:fontRef>
-        </p:style>
-        <p:txBody>
-          <a:bodyPr rtlCol="0" anchor="ctr"/>
-          <a:lstStyle/>
-          <a:p>
-            <a:pPr algn="ctr"/>
-          </a:p>
-        </p:txBody>
-      </p:sp>
-      <p:sp>
-        <p:nvSpPr>
-          <p:cNvPr id="12" name="TextBox 11"/>
-          <p:cNvSpPr txBox="1"/>
-          <p:nvPr/>
-        </p:nvSpPr>
-        <p:spPr>
-          <a:xfrm>
-            <a:off x="1097280" y="2029968"/>
-            <a:ext cx="10362895" cy="402336"/>
-          </a:xfrm>
-          <a:prstGeom prst="rect">
-            <a:avLst/>
-          </a:prstGeom>
-          <a:noFill/>
-        </p:spPr>
-        <p:txBody>
-          <a:bodyPr wrap="square" anchor="ctr"/>
-          <a:lstStyle/>
-          <a:p>
-            <a:r>
-              <a:rPr sz="1500" b="0" i="0">
-                <a:solidFill>
-                  <a:srgbClr val="333333"/>
-                </a:solidFill>
-                <a:latin typeface="Calibri"/>
-              </a:rPr>
-              <a:t>Su flujo principal describe pasos del negocio o describe clics sobre una interfaz que todavia no existe?</a:t>
-            </a:r>
-          </a:p>
-        </p:txBody>
-      </p:sp>
-      <p:sp>
-        <p:nvSpPr>
-          <p:cNvPr id="13" name="Rounded Rectangle 12"/>
-          <p:cNvSpPr/>
-          <p:nvPr/>
-        </p:nvSpPr>
-        <p:spPr>
-          <a:xfrm>
-            <a:off x="457200" y="2615184"/>
-            <a:ext cx="11277295" cy="566928"/>
-          </a:xfrm>
-          <a:prstGeom prst="roundRect">
-            <a:avLst>
-              <a:gd name="adj" fmla="val 12000"/>
-            </a:avLst>
-          </a:prstGeom>
-          <a:solidFill>
-            <a:srgbClr val="F2F2F2"/>
-          </a:solidFill>
-          <a:ln>
-            <a:noFill/>
-          </a:ln>
-        </p:spPr>
-        <p:style>
-          <a:lnRef idx="1">
-            <a:schemeClr val="accent1"/>
-          </a:lnRef>
-          <a:fillRef idx="3">
-            <a:schemeClr val="accent1"/>
-          </a:fillRef>
-          <a:effectRef idx="2">
-            <a:schemeClr val="accent1"/>
-          </a:effectRef>
-          <a:fontRef idx="minor">
-            <a:schemeClr val="lt1"/>
-          </a:fontRef>
-        </p:style>
-        <p:txBody>
-          <a:bodyPr rtlCol="0" anchor="ctr"/>
-          <a:lstStyle/>
-          <a:p>
-            <a:pPr algn="ctr"/>
-          </a:p>
-        </p:txBody>
-      </p:sp>
-      <p:sp>
-        <p:nvSpPr>
-          <p:cNvPr id="14" name="Rectangle 13"/>
-          <p:cNvSpPr/>
-          <p:nvPr/>
-        </p:nvSpPr>
-        <p:spPr>
-          <a:xfrm>
-            <a:off x="640080" y="2761488"/>
-            <a:ext cx="274320" cy="274320"/>
-          </a:xfrm>
-          <a:prstGeom prst="rect">
-            <a:avLst/>
-          </a:prstGeom>
-          <a:solidFill>
-            <a:srgbClr val="FFFFFF"/>
-          </a:solidFill>
-          <a:ln>
-            <a:solidFill>
-              <a:srgbClr val="333333"/>
-            </a:solidFill>
-          </a:ln>
-        </p:spPr>
-        <p:style>
-          <a:lnRef idx="1">
-            <a:schemeClr val="accent1"/>
-          </a:lnRef>
-          <a:fillRef idx="3">
-            <a:schemeClr val="accent1"/>
-          </a:fillRef>
-          <a:effectRef idx="2">
-            <a:schemeClr val="accent1"/>
-          </a:effectRef>
-          <a:fontRef idx="minor">
-            <a:schemeClr val="lt1"/>
-          </a:fontRef>
-        </p:style>
-        <p:txBody>
-          <a:bodyPr rtlCol="0" anchor="ctr"/>
-          <a:lstStyle/>
-          <a:p>
-            <a:pPr algn="ctr"/>
-          </a:p>
-        </p:txBody>
-      </p:sp>
-      <p:sp>
-        <p:nvSpPr>
-          <p:cNvPr id="15" name="Rectangle 14"/>
-          <p:cNvSpPr/>
-          <p:nvPr/>
-        </p:nvSpPr>
-        <p:spPr>
-          <a:xfrm>
-            <a:off x="640080" y="2761488"/>
-            <a:ext cx="73152" cy="274320"/>
-          </a:xfrm>
-          <a:prstGeom prst="rect">
-            <a:avLst/>
-          </a:prstGeom>
-          <a:solidFill>
-            <a:srgbClr val="269CCB"/>
-          </a:solidFill>
-          <a:ln>
-            <a:noFill/>
-          </a:ln>
-        </p:spPr>
-        <p:style>
-          <a:lnRef idx="1">
-            <a:schemeClr val="accent1"/>
-          </a:lnRef>
-          <a:fillRef idx="3">
-            <a:schemeClr val="accent1"/>
-          </a:fillRef>
-          <a:effectRef idx="2">
-            <a:schemeClr val="accent1"/>
-          </a:effectRef>
-          <a:fontRef idx="minor">
-            <a:schemeClr val="lt1"/>
-          </a:fontRef>
-        </p:style>
-        <p:txBody>
-          <a:bodyPr rtlCol="0" anchor="ctr"/>
-          <a:lstStyle/>
-          <a:p>
-            <a:pPr algn="ctr"/>
-          </a:p>
-        </p:txBody>
-      </p:sp>
-      <p:sp>
-        <p:nvSpPr>
-          <p:cNvPr id="16" name="TextBox 15"/>
-          <p:cNvSpPr txBox="1"/>
-          <p:nvPr/>
-        </p:nvSpPr>
-        <p:spPr>
-          <a:xfrm>
-            <a:off x="1097280" y="2706624"/>
-            <a:ext cx="10362895" cy="402336"/>
-          </a:xfrm>
-          <a:prstGeom prst="rect">
-            <a:avLst/>
-          </a:prstGeom>
-          <a:noFill/>
-        </p:spPr>
-        <p:txBody>
-          <a:bodyPr wrap="square" anchor="ctr"/>
-          <a:lstStyle/>
-          <a:p>
-            <a:r>
-              <a:rPr sz="1500" b="0" i="0">
-                <a:solidFill>
-                  <a:srgbClr val="333333"/>
-                </a:solidFill>
-                <a:latin typeface="Calibri"/>
-              </a:rPr>
-              <a:t>Que pasa en Huellitas cuando el propietario no esta registrado, cuando la busqueda no devuelve nada y cuando hay dos mascotas con el mismo nombre? Aparece eso escrito en algun flujo alterno?</a:t>
-            </a:r>
-          </a:p>
-        </p:txBody>
-      </p:sp>
-      <p:sp>
-        <p:nvSpPr>
-          <p:cNvPr id="17" name="TextBox 16"/>
-          <p:cNvSpPr txBox="1"/>
-          <p:nvPr/>
-        </p:nvSpPr>
-        <p:spPr>
-          <a:xfrm>
-            <a:off x="11185855" y="6473952"/>
-            <a:ext cx="640080" cy="274320"/>
-          </a:xfrm>
-          <a:prstGeom prst="rect">
-            <a:avLst/>
-          </a:prstGeom>
-          <a:noFill/>
-        </p:spPr>
-        <p:txBody>
-          <a:bodyPr wrap="square">
-            <a:spAutoFit/>
-          </a:bodyPr>
-          <a:lstStyle/>
-          <a:p>
-            <a:pPr algn="r"/>
-            <a:r>
-              <a:rPr sz="1100" b="0" i="0">
-                <a:solidFill>
-                  <a:srgbClr val="666666"/>
-                </a:solidFill>
-                <a:latin typeface="Calibri"/>
-              </a:rPr>
-              <a:t>20</a:t>
-            </a:r>
-          </a:p>
-        </p:txBody>
-      </p:sp>
-    </p:spTree>
-  </p:cSld>
-  <p:clrMapOvr>
-    <a:masterClrMapping/>
-  </p:clrMapOvr>
-</p:sld>
-</file>
-
-<file path=ppt/slides/slide21.xml><?xml version="1.0" encoding="utf-8"?>
-<p:sld xmlns:a="http://schemas.openxmlformats.org/drawingml/2006/main" xmlns:p="http://schemas.openxmlformats.org/presentationml/2006/main" xmlns:r="http://schemas.openxmlformats.org/officeDocument/2006/relationships">
-  <p:cSld>
-    <p:bg>
-      <p:bgPr>
-        <a:solidFill>
-          <a:srgbClr val="FFFFFF"/>
-        </a:solidFill>
-        <a:effectLst/>
-      </p:bgPr>
-    </p:bg>
-    <p:spTree>
-      <p:nvGrpSpPr>
-        <p:cNvPr id="1" name=""/>
-        <p:cNvGrpSpPr/>
-        <p:nvPr/>
-      </p:nvGrpSpPr>
-      <p:grpSpPr/>
-      <p:sp>
-        <p:nvSpPr>
-          <p:cNvPr id="2" name="Rectangle 1"/>
-          <p:cNvSpPr/>
-          <p:nvPr/>
-        </p:nvSpPr>
-        <p:spPr>
-          <a:xfrm>
-            <a:off x="0" y="0"/>
-            <a:ext cx="12191695" cy="960120"/>
-          </a:xfrm>
-          <a:prstGeom prst="rect">
-            <a:avLst/>
-          </a:prstGeom>
-          <a:solidFill>
-            <a:srgbClr val="095292"/>
-          </a:solidFill>
-          <a:ln>
-            <a:noFill/>
-          </a:ln>
-        </p:spPr>
-        <p:style>
-          <a:lnRef idx="1">
-            <a:schemeClr val="accent1"/>
-          </a:lnRef>
-          <a:fillRef idx="3">
-            <a:schemeClr val="accent1"/>
-          </a:fillRef>
-          <a:effectRef idx="2">
-            <a:schemeClr val="accent1"/>
-          </a:effectRef>
-          <a:fontRef idx="minor">
-            <a:schemeClr val="lt1"/>
-          </a:fontRef>
-        </p:style>
-        <p:txBody>
-          <a:bodyPr rtlCol="0" anchor="ctr"/>
-          <a:lstStyle/>
-          <a:p>
-            <a:pPr algn="ctr"/>
-          </a:p>
-        </p:txBody>
-      </p:sp>
-      <p:sp>
-        <p:nvSpPr>
-          <p:cNvPr id="3" name="Rectangle 2"/>
-          <p:cNvSpPr/>
-          <p:nvPr/>
-        </p:nvSpPr>
-        <p:spPr>
-          <a:xfrm>
-            <a:off x="0" y="960120"/>
-            <a:ext cx="12191695" cy="41148"/>
-          </a:xfrm>
-          <a:prstGeom prst="rect">
-            <a:avLst/>
-          </a:prstGeom>
-          <a:solidFill>
-            <a:srgbClr val="FFD000"/>
-          </a:solidFill>
-          <a:ln>
-            <a:noFill/>
-          </a:ln>
-        </p:spPr>
-        <p:style>
-          <a:lnRef idx="1">
-            <a:schemeClr val="accent1"/>
-          </a:lnRef>
-          <a:fillRef idx="3">
-            <a:schemeClr val="accent1"/>
-          </a:fillRef>
-          <a:effectRef idx="2">
-            <a:schemeClr val="accent1"/>
-          </a:effectRef>
-          <a:fontRef idx="minor">
-            <a:schemeClr val="lt1"/>
-          </a:fontRef>
-        </p:style>
-        <p:txBody>
-          <a:bodyPr rtlCol="0" anchor="ctr"/>
-          <a:lstStyle/>
-          <a:p>
-            <a:pPr algn="ctr"/>
-          </a:p>
-        </p:txBody>
-      </p:sp>
-      <p:sp>
-        <p:nvSpPr>
-          <p:cNvPr id="4" name="TextBox 3"/>
-          <p:cNvSpPr txBox="1"/>
-          <p:nvPr/>
-        </p:nvSpPr>
-        <p:spPr>
-          <a:xfrm>
-            <a:off x="457200" y="164592"/>
-            <a:ext cx="11277295" cy="502920"/>
-          </a:xfrm>
-          <a:prstGeom prst="rect">
-            <a:avLst/>
-          </a:prstGeom>
-          <a:noFill/>
-        </p:spPr>
-        <p:txBody>
-          <a:bodyPr wrap="square">
-            <a:spAutoFit/>
-          </a:bodyPr>
-          <a:lstStyle/>
-          <a:p>
-            <a:r>
-              <a:rPr sz="2600" b="1" i="0">
-                <a:solidFill>
-                  <a:srgbClr val="FFFFFF"/>
-                </a:solidFill>
-                <a:latin typeface="Calibri"/>
-              </a:rPr>
-              <a:t>Criterios de exito / entregable</a:t>
-            </a:r>
-          </a:p>
-        </p:txBody>
-      </p:sp>
-      <p:sp>
-        <p:nvSpPr>
-          <p:cNvPr id="5" name="TextBox 4"/>
-          <p:cNvSpPr txBox="1"/>
-          <p:nvPr/>
-        </p:nvSpPr>
-        <p:spPr>
-          <a:xfrm>
-            <a:off x="457200" y="1170432"/>
-            <a:ext cx="11277295" cy="5230368"/>
-          </a:xfrm>
-          <a:prstGeom prst="rect">
-            <a:avLst/>
-          </a:prstGeom>
-          <a:noFill/>
-        </p:spPr>
-        <p:txBody>
-          <a:bodyPr wrap="square">
-            <a:spAutoFit/>
-          </a:bodyPr>
-          <a:lstStyle/>
-          <a:p>
-            <a:pPr>
-              <a:spcAft>
-                <a:spcPts val="800"/>
-              </a:spcAft>
-            </a:pPr>
-            <a:r>
-              <a:rPr sz="2000" b="0" i="0">
-                <a:solidFill>
-                  <a:srgbClr val="333333"/>
-                </a:solidFill>
-                <a:latin typeface="Calibri"/>
-              </a:rPr>
-              <a:t>–   </a:t>
-            </a:r>
-            <a:r>
-              <a:rPr sz="2000" b="1" i="0">
-                <a:solidFill>
-                  <a:srgbClr val="333333"/>
-                </a:solidFill>
-                <a:latin typeface="Calibri"/>
-              </a:rPr>
-              <a:t>Entregable:</a:t>
-            </a:r>
-            <a:r>
-              <a:rPr sz="2000" b="0" i="0">
-                <a:solidFill>
-                  <a:srgbClr val="333333"/>
-                </a:solidFill>
-                <a:latin typeface="Calibri"/>
-              </a:rPr>
-              <a:t> Un PDF con el diagrama de casos de uso, la matriz de trazabilidad RF a CU y las dos especificaciones textuales completas (precondiciones, postcondiciones, flujo principal y minimo dos flujos alternos cada una), subido a la plataforma del curso.</a:t>
-            </a:r>
-          </a:p>
-          <a:p>
-            <a:pPr>
-              <a:spcAft>
-                <a:spcPts val="800"/>
-              </a:spcAft>
-            </a:pPr>
-            <a:r>
-              <a:rPr sz="2000" b="0" i="0">
-                <a:solidFill>
-                  <a:srgbClr val="333333"/>
-                </a:solidFill>
-                <a:latin typeface="Calibri"/>
-              </a:rPr>
-              <a:t>–   </a:t>
-            </a:r>
-            <a:r>
-              <a:rPr sz="2000" b="1" i="0">
-                <a:solidFill>
-                  <a:srgbClr val="333333"/>
-                </a:solidFill>
-                <a:latin typeface="Calibri"/>
-              </a:rPr>
-              <a:t>Exito:</a:t>
-            </a:r>
-            <a:r>
-              <a:rPr sz="2000" b="0" i="0">
-                <a:solidFill>
-                  <a:srgbClr val="333333"/>
-                </a:solidFill>
-                <a:latin typeface="Calibri"/>
-              </a:rPr>
-              <a:t> El diagrama tiene limite de sistema rotulado, actores como roles y ningun caso de uso con nombre de boton, pantalla u operacion tecnica.</a:t>
-            </a:r>
-          </a:p>
-          <a:p>
-            <a:pPr>
-              <a:spcAft>
-                <a:spcPts val="800"/>
-              </a:spcAft>
-            </a:pPr>
-            <a:r>
-              <a:rPr sz="2000" b="0" i="0">
-                <a:solidFill>
-                  <a:srgbClr val="333333"/>
-                </a:solidFill>
-                <a:latin typeface="Calibri"/>
-              </a:rPr>
-              <a:t>–   </a:t>
-            </a:r>
-            <a:r>
-              <a:rPr sz="2000" b="1" i="0">
-                <a:solidFill>
-                  <a:srgbClr val="333333"/>
-                </a:solidFill>
-                <a:latin typeface="Calibri"/>
-              </a:rPr>
-              <a:t>Exito:</a:t>
-            </a:r>
-            <a:r>
-              <a:rPr sz="2000" b="0" i="0">
-                <a:solidFill>
-                  <a:srgbClr val="333333"/>
-                </a:solidFill>
-                <a:latin typeface="Calibri"/>
-              </a:rPr>
-              <a:t> La matriz de trazabilidad no tiene huerfanos sin decision escrita: todo RF llega al menos a un CU o queda documentado como pendiente, y todo CU nace al menos de un RF.</a:t>
-            </a:r>
-          </a:p>
-          <a:p>
-            <a:pPr>
-              <a:spcAft>
-                <a:spcPts val="800"/>
-              </a:spcAft>
-            </a:pPr>
-            <a:r>
-              <a:rPr sz="2000" b="0" i="0">
-                <a:solidFill>
-                  <a:srgbClr val="333333"/>
-                </a:solidFill>
-                <a:latin typeface="Calibri"/>
-              </a:rPr>
-              <a:t>–   </a:t>
-            </a:r>
-            <a:r>
-              <a:rPr sz="2000" b="1" i="0">
-                <a:solidFill>
-                  <a:srgbClr val="333333"/>
-                </a:solidFill>
-                <a:latin typeface="Calibri"/>
-              </a:rPr>
-              <a:t>Exito:</a:t>
-            </a:r>
-            <a:r>
-              <a:rPr sz="2000" b="0" i="0">
-                <a:solidFill>
-                  <a:srgbClr val="333333"/>
-                </a:solidFill>
-                <a:latin typeface="Calibri"/>
-              </a:rPr>
-              <a:t> Las dos especificaciones tienen precondicion, postcondicion de exito, postcondicion de fracaso y flujo principal numerado en pares actor-sistema.</a:t>
-            </a:r>
-          </a:p>
-          <a:p>
-            <a:pPr>
-              <a:spcAft>
-                <a:spcPts val="800"/>
-              </a:spcAft>
-            </a:pPr>
-            <a:r>
-              <a:rPr sz="2000" b="0" i="0">
-                <a:solidFill>
-                  <a:srgbClr val="333333"/>
-                </a:solidFill>
-                <a:latin typeface="Calibri"/>
-              </a:rPr>
-              <a:t>–   </a:t>
-            </a:r>
-            <a:r>
-              <a:rPr sz="2000" b="1" i="0">
-                <a:solidFill>
-                  <a:srgbClr val="333333"/>
-                </a:solidFill>
-                <a:latin typeface="Calibri"/>
-              </a:rPr>
-              <a:t>Exito:</a:t>
-            </a:r>
-            <a:r>
-              <a:rPr sz="2000" b="0" i="0">
-                <a:solidFill>
-                  <a:srgbClr val="333333"/>
-                </a:solidFill>
-                <a:latin typeface="Calibri"/>
-              </a:rPr>
-              <a:t> Cada especificacion incluye minimo dos flujos alternos numerados respecto al paso del flujo principal donde se desvian.</a:t>
-            </a:r>
-          </a:p>
-          <a:p>
-            <a:pPr>
-              <a:spcAft>
-                <a:spcPts val="800"/>
-              </a:spcAft>
-            </a:pPr>
-            <a:r>
-              <a:rPr sz="2000" b="0" i="0">
-                <a:solidFill>
-                  <a:srgbClr val="333333"/>
-                </a:solidFill>
-                <a:latin typeface="Calibri"/>
-              </a:rPr>
-              <a:t>–   </a:t>
-            </a:r>
-            <a:r>
-              <a:rPr sz="2000" b="1" i="0">
-                <a:solidFill>
-                  <a:srgbClr val="333333"/>
-                </a:solidFill>
-                <a:latin typeface="Calibri"/>
-              </a:rPr>
-              <a:t>Entrega en la plataforma del curso</a:t>
-            </a:r>
-            <a:r>
-              <a:rPr sz="2000" b="0" i="0">
-                <a:solidFill>
-                  <a:srgbClr val="333333"/>
-                </a:solidFill>
-                <a:latin typeface="Calibri"/>
-              </a:rPr>
-              <a:t> — en la fecha que indique el docente.</a:t>
-            </a:r>
-          </a:p>
-        </p:txBody>
-      </p:sp>
-      <p:sp>
-        <p:nvSpPr>
-          <p:cNvPr id="6" name="TextBox 5"/>
-          <p:cNvSpPr txBox="1"/>
-          <p:nvPr/>
-        </p:nvSpPr>
-        <p:spPr>
-          <a:xfrm>
-            <a:off x="11185855" y="6473952"/>
-            <a:ext cx="640080" cy="274320"/>
-          </a:xfrm>
-          <a:prstGeom prst="rect">
-            <a:avLst/>
-          </a:prstGeom>
-          <a:noFill/>
-        </p:spPr>
-        <p:txBody>
-          <a:bodyPr wrap="square">
-            <a:spAutoFit/>
-          </a:bodyPr>
-          <a:lstStyle/>
-          <a:p>
-            <a:pPr algn="r"/>
-            <a:r>
-              <a:rPr sz="1100" b="0" i="0">
-                <a:solidFill>
-                  <a:srgbClr val="666666"/>
-                </a:solidFill>
-                <a:latin typeface="Calibri"/>
-              </a:rPr>
-              <a:t>21</a:t>
-            </a:r>
-          </a:p>
-        </p:txBody>
-      </p:sp>
-    </p:spTree>
-  </p:cSld>
-  <p:clrMapOvr>
-    <a:masterClrMapping/>
-  </p:clrMapOvr>
-</p:sld>
-</file>
-
-<file path=ppt/slides/slide22.xml><?xml version="1.0" encoding="utf-8"?>
-<p:sld xmlns:a="http://schemas.openxmlformats.org/drawingml/2006/main" xmlns:p="http://schemas.openxmlformats.org/presentationml/2006/main" xmlns:r="http://schemas.openxmlformats.org/officeDocument/2006/relationships">
-  <p:cSld>
-    <p:bg>
-      <p:bgPr>
-        <a:solidFill>
-          <a:srgbClr val="FFFFFF"/>
-        </a:solidFill>
-        <a:effectLst/>
-      </p:bgPr>
-    </p:bg>
-    <p:spTree>
-      <p:nvGrpSpPr>
-        <p:cNvPr id="1" name=""/>
-        <p:cNvGrpSpPr/>
-        <p:nvPr/>
-      </p:nvGrpSpPr>
-      <p:grpSpPr/>
-      <p:sp>
-        <p:nvSpPr>
-          <p:cNvPr id="2" name="Rectangle 1"/>
-          <p:cNvSpPr/>
-          <p:nvPr/>
-        </p:nvSpPr>
-        <p:spPr>
-          <a:xfrm>
-            <a:off x="0" y="0"/>
-            <a:ext cx="12191695" cy="960120"/>
-          </a:xfrm>
-          <a:prstGeom prst="rect">
-            <a:avLst/>
-          </a:prstGeom>
-          <a:solidFill>
-            <a:srgbClr val="095292"/>
-          </a:solidFill>
-          <a:ln>
-            <a:noFill/>
-          </a:ln>
-        </p:spPr>
-        <p:style>
-          <a:lnRef idx="1">
-            <a:schemeClr val="accent1"/>
-          </a:lnRef>
-          <a:fillRef idx="3">
-            <a:schemeClr val="accent1"/>
-          </a:fillRef>
-          <a:effectRef idx="2">
-            <a:schemeClr val="accent1"/>
-          </a:effectRef>
-          <a:fontRef idx="minor">
-            <a:schemeClr val="lt1"/>
-          </a:fontRef>
-        </p:style>
-        <p:txBody>
-          <a:bodyPr rtlCol="0" anchor="ctr"/>
-          <a:lstStyle/>
-          <a:p>
-            <a:pPr algn="ctr"/>
-          </a:p>
-        </p:txBody>
-      </p:sp>
-      <p:sp>
-        <p:nvSpPr>
-          <p:cNvPr id="3" name="Rectangle 2"/>
-          <p:cNvSpPr/>
-          <p:nvPr/>
-        </p:nvSpPr>
-        <p:spPr>
-          <a:xfrm>
-            <a:off x="0" y="960120"/>
-            <a:ext cx="12191695" cy="41148"/>
-          </a:xfrm>
-          <a:prstGeom prst="rect">
-            <a:avLst/>
-          </a:prstGeom>
-          <a:solidFill>
-            <a:srgbClr val="FFD000"/>
-          </a:solidFill>
-          <a:ln>
-            <a:noFill/>
-          </a:ln>
-        </p:spPr>
-        <p:style>
-          <a:lnRef idx="1">
-            <a:schemeClr val="accent1"/>
-          </a:lnRef>
-          <a:fillRef idx="3">
-            <a:schemeClr val="accent1"/>
-          </a:fillRef>
-          <a:effectRef idx="2">
-            <a:schemeClr val="accent1"/>
-          </a:effectRef>
-          <a:fontRef idx="minor">
-            <a:schemeClr val="lt1"/>
-          </a:fontRef>
-        </p:style>
-        <p:txBody>
-          <a:bodyPr rtlCol="0" anchor="ctr"/>
-          <a:lstStyle/>
-          <a:p>
-            <a:pPr algn="ctr"/>
-          </a:p>
-        </p:txBody>
-      </p:sp>
-      <p:sp>
-        <p:nvSpPr>
-          <p:cNvPr id="4" name="TextBox 3"/>
-          <p:cNvSpPr txBox="1"/>
-          <p:nvPr/>
-        </p:nvSpPr>
-        <p:spPr>
-          <a:xfrm>
-            <a:off x="457200" y="164592"/>
-            <a:ext cx="11277295" cy="502920"/>
-          </a:xfrm>
-          <a:prstGeom prst="rect">
-            <a:avLst/>
-          </a:prstGeom>
-          <a:noFill/>
-        </p:spPr>
-        <p:txBody>
-          <a:bodyPr wrap="square">
-            <a:spAutoFit/>
-          </a:bodyPr>
-          <a:lstStyle/>
-          <a:p>
-            <a:r>
-              <a:rPr sz="2600" b="1" i="0">
-                <a:solidFill>
-                  <a:srgbClr val="FFFFFF"/>
-                </a:solidFill>
-                <a:latin typeface="Calibri"/>
-              </a:rPr>
-              <a:t>Para el PI esta semana</a:t>
-            </a:r>
-          </a:p>
-        </p:txBody>
-      </p:sp>
-      <p:sp>
-        <p:nvSpPr>
-          <p:cNvPr id="5" name="Rounded Rectangle 4"/>
-          <p:cNvSpPr/>
-          <p:nvPr/>
-        </p:nvSpPr>
-        <p:spPr>
-          <a:xfrm>
-            <a:off x="457200" y="1261872"/>
-            <a:ext cx="11277295" cy="1051560"/>
-          </a:xfrm>
-          <a:prstGeom prst="roundRect">
-            <a:avLst>
-              <a:gd name="adj" fmla="val 12000"/>
-            </a:avLst>
-          </a:prstGeom>
-          <a:solidFill>
-            <a:srgbClr val="E8F4FA"/>
-          </a:solidFill>
-          <a:ln>
-            <a:noFill/>
-          </a:ln>
-        </p:spPr>
-        <p:style>
-          <a:lnRef idx="1">
-            <a:schemeClr val="accent1"/>
-          </a:lnRef>
-          <a:fillRef idx="3">
-            <a:schemeClr val="accent1"/>
-          </a:fillRef>
-          <a:effectRef idx="2">
-            <a:schemeClr val="accent1"/>
-          </a:effectRef>
-          <a:fontRef idx="minor">
-            <a:schemeClr val="lt1"/>
-          </a:fontRef>
-        </p:style>
-        <p:txBody>
-          <a:bodyPr rtlCol="0" anchor="ctr"/>
-          <a:lstStyle/>
-          <a:p>
-            <a:pPr algn="ctr"/>
-          </a:p>
-        </p:txBody>
-      </p:sp>
-      <p:sp>
-        <p:nvSpPr>
-          <p:cNvPr id="6" name="Rectangle 5"/>
-          <p:cNvSpPr/>
-          <p:nvPr/>
-        </p:nvSpPr>
-        <p:spPr>
-          <a:xfrm>
-            <a:off x="457200" y="1261872"/>
-            <a:ext cx="128016" cy="1051560"/>
-          </a:xfrm>
-          <a:prstGeom prst="rect">
-            <a:avLst/>
-          </a:prstGeom>
-          <a:solidFill>
-            <a:srgbClr val="269CCB"/>
-          </a:solidFill>
-          <a:ln>
-            <a:noFill/>
-          </a:ln>
-        </p:spPr>
-        <p:style>
-          <a:lnRef idx="1">
-            <a:schemeClr val="accent1"/>
-          </a:lnRef>
-          <a:fillRef idx="3">
-            <a:schemeClr val="accent1"/>
-          </a:fillRef>
-          <a:effectRef idx="2">
-            <a:schemeClr val="accent1"/>
-          </a:effectRef>
-          <a:fontRef idx="minor">
-            <a:schemeClr val="lt1"/>
-          </a:fontRef>
-        </p:style>
-        <p:txBody>
-          <a:bodyPr rtlCol="0" anchor="ctr"/>
-          <a:lstStyle/>
-          <a:p>
-            <a:pPr algn="ctr"/>
-          </a:p>
-        </p:txBody>
-      </p:sp>
-      <p:sp>
-        <p:nvSpPr>
-          <p:cNvPr id="7" name="TextBox 6"/>
-          <p:cNvSpPr txBox="1"/>
-          <p:nvPr/>
-        </p:nvSpPr>
-        <p:spPr>
-          <a:xfrm>
-            <a:off x="777240" y="1399031"/>
-            <a:ext cx="10774375" cy="822959"/>
-          </a:xfrm>
-          <a:prstGeom prst="rect">
-            <a:avLst/>
-          </a:prstGeom>
-          <a:noFill/>
-        </p:spPr>
-        <p:txBody>
-          <a:bodyPr wrap="square">
-            <a:spAutoFit/>
-          </a:bodyPr>
-          <a:lstStyle/>
-          <a:p>
-            <a:r>
-              <a:rPr sz="1200" b="1" i="0">
-                <a:solidFill>
-                  <a:srgbClr val="269CCB"/>
-                </a:solidFill>
-                <a:latin typeface="Calibri"/>
-              </a:rPr>
-              <a:t>Info</a:t>
-            </a:r>
-          </a:p>
-          <a:p>
-            <a:pPr>
-              <a:spcBef>
-                <a:spcPts val="400"/>
-              </a:spcBef>
-            </a:pPr>
-            <a:r>
-              <a:rPr sz="1400" b="0" i="0">
-                <a:solidFill>
-                  <a:srgbClr val="333333"/>
-                </a:solidFill>
-                <a:latin typeface="Calibri"/>
-              </a:rPr>
-              <a:t>Hito: Queda listo el diagrama de casos de uso de VetCare con su limite de sistema y la especificacion textual completa de Registrar mascota y Buscar expediente.</a:t>
-            </a:r>
-          </a:p>
-        </p:txBody>
-      </p:sp>
-      <p:sp>
-        <p:nvSpPr>
-          <p:cNvPr id="8" name="Rounded Rectangle 7"/>
-          <p:cNvSpPr/>
-          <p:nvPr/>
-        </p:nvSpPr>
-        <p:spPr>
-          <a:xfrm>
-            <a:off x="457200" y="2478024"/>
-            <a:ext cx="11277295" cy="1051560"/>
-          </a:xfrm>
-          <a:prstGeom prst="roundRect">
-            <a:avLst>
-              <a:gd name="adj" fmla="val 12000"/>
-            </a:avLst>
-          </a:prstGeom>
-          <a:solidFill>
-            <a:srgbClr val="FFF8E1"/>
-          </a:solidFill>
-          <a:ln>
-            <a:noFill/>
-          </a:ln>
-        </p:spPr>
-        <p:style>
-          <a:lnRef idx="1">
-            <a:schemeClr val="accent1"/>
-          </a:lnRef>
-          <a:fillRef idx="3">
-            <a:schemeClr val="accent1"/>
-          </a:fillRef>
-          <a:effectRef idx="2">
-            <a:schemeClr val="accent1"/>
-          </a:effectRef>
-          <a:fontRef idx="minor">
-            <a:schemeClr val="lt1"/>
-          </a:fontRef>
-        </p:style>
-        <p:txBody>
-          <a:bodyPr rtlCol="0" anchor="ctr"/>
-          <a:lstStyle/>
-          <a:p>
-            <a:pPr algn="ctr"/>
-          </a:p>
-        </p:txBody>
-      </p:sp>
-      <p:sp>
-        <p:nvSpPr>
-          <p:cNvPr id="9" name="Rectangle 8"/>
-          <p:cNvSpPr/>
-          <p:nvPr/>
-        </p:nvSpPr>
-        <p:spPr>
-          <a:xfrm>
-            <a:off x="457200" y="2478024"/>
-            <a:ext cx="128016" cy="1051560"/>
-          </a:xfrm>
-          <a:prstGeom prst="rect">
-            <a:avLst/>
-          </a:prstGeom>
-          <a:solidFill>
-            <a:srgbClr val="FFD000"/>
-          </a:solidFill>
-          <a:ln>
-            <a:noFill/>
-          </a:ln>
-        </p:spPr>
-        <p:style>
-          <a:lnRef idx="1">
-            <a:schemeClr val="accent1"/>
-          </a:lnRef>
-          <a:fillRef idx="3">
-            <a:schemeClr val="accent1"/>
-          </a:fillRef>
-          <a:effectRef idx="2">
-            <a:schemeClr val="accent1"/>
-          </a:effectRef>
-          <a:fontRef idx="minor">
-            <a:schemeClr val="lt1"/>
-          </a:fontRef>
-        </p:style>
-        <p:txBody>
-          <a:bodyPr rtlCol="0" anchor="ctr"/>
-          <a:lstStyle/>
-          <a:p>
-            <a:pPr algn="ctr"/>
-          </a:p>
-        </p:txBody>
-      </p:sp>
-      <p:sp>
-        <p:nvSpPr>
-          <p:cNvPr id="10" name="TextBox 9"/>
-          <p:cNvSpPr txBox="1"/>
-          <p:nvPr/>
-        </p:nvSpPr>
-        <p:spPr>
-          <a:xfrm>
-            <a:off x="777240" y="2615184"/>
-            <a:ext cx="10774375" cy="822959"/>
-          </a:xfrm>
-          <a:prstGeom prst="rect">
-            <a:avLst/>
-          </a:prstGeom>
-          <a:noFill/>
-        </p:spPr>
-        <p:txBody>
-          <a:bodyPr wrap="square">
-            <a:spAutoFit/>
-          </a:bodyPr>
-          <a:lstStyle/>
-          <a:p>
-            <a:r>
-              <a:rPr sz="1200" b="1" i="0">
-                <a:solidFill>
-                  <a:srgbClr val="FFD000"/>
-                </a:solidFill>
-                <a:latin typeface="Calibri"/>
-              </a:rPr>
-              <a:t>Aclaración</a:t>
-            </a:r>
-          </a:p>
-          <a:p>
-            <a:pPr>
-              <a:spcBef>
-                <a:spcPts val="400"/>
-              </a:spcBef>
-            </a:pPr>
-            <a:r>
-              <a:rPr sz="1400" b="0" i="0">
-                <a:solidFill>
-                  <a:srgbClr val="333333"/>
-                </a:solidFill>
-                <a:latin typeface="Calibri"/>
-              </a:rPr>
-              <a:t>Enunciado completo: Clases/Proyecto Integrador/ (VetCare).</a:t>
-            </a:r>
-          </a:p>
-        </p:txBody>
-      </p:sp>
-      <p:sp>
-        <p:nvSpPr>
-          <p:cNvPr id="11" name="Rounded Rectangle 10"/>
-          <p:cNvSpPr/>
-          <p:nvPr/>
-        </p:nvSpPr>
-        <p:spPr>
-          <a:xfrm>
-            <a:off x="457200" y="3694176"/>
-            <a:ext cx="11277295" cy="1051560"/>
-          </a:xfrm>
-          <a:prstGeom prst="roundRect">
-            <a:avLst>
-              <a:gd name="adj" fmla="val 12000"/>
-            </a:avLst>
-          </a:prstGeom>
-          <a:solidFill>
-            <a:srgbClr val="FBE4E4"/>
-          </a:solidFill>
-          <a:ln>
-            <a:noFill/>
-          </a:ln>
-        </p:spPr>
-        <p:style>
-          <a:lnRef idx="1">
-            <a:schemeClr val="accent1"/>
-          </a:lnRef>
-          <a:fillRef idx="3">
-            <a:schemeClr val="accent1"/>
-          </a:fillRef>
-          <a:effectRef idx="2">
-            <a:schemeClr val="accent1"/>
-          </a:effectRef>
-          <a:fontRef idx="minor">
-            <a:schemeClr val="lt1"/>
-          </a:fontRef>
-        </p:style>
-        <p:txBody>
-          <a:bodyPr rtlCol="0" anchor="ctr"/>
-          <a:lstStyle/>
-          <a:p>
-            <a:pPr algn="ctr"/>
-          </a:p>
-        </p:txBody>
-      </p:sp>
-      <p:sp>
-        <p:nvSpPr>
-          <p:cNvPr id="12" name="Rectangle 11"/>
-          <p:cNvSpPr/>
-          <p:nvPr/>
-        </p:nvSpPr>
-        <p:spPr>
-          <a:xfrm>
-            <a:off x="457200" y="3694176"/>
-            <a:ext cx="128016" cy="1051560"/>
-          </a:xfrm>
-          <a:prstGeom prst="rect">
-            <a:avLst/>
-          </a:prstGeom>
-          <a:solidFill>
-            <a:srgbClr val="A02030"/>
-          </a:solidFill>
-          <a:ln>
-            <a:noFill/>
-          </a:ln>
-        </p:spPr>
-        <p:style>
-          <a:lnRef idx="1">
-            <a:schemeClr val="accent1"/>
-          </a:lnRef>
-          <a:fillRef idx="3">
-            <a:schemeClr val="accent1"/>
-          </a:fillRef>
-          <a:effectRef idx="2">
-            <a:schemeClr val="accent1"/>
-          </a:effectRef>
-          <a:fontRef idx="minor">
-            <a:schemeClr val="lt1"/>
-          </a:fontRef>
-        </p:style>
-        <p:txBody>
-          <a:bodyPr rtlCol="0" anchor="ctr"/>
-          <a:lstStyle/>
-          <a:p>
-            <a:pPr algn="ctr"/>
-          </a:p>
-        </p:txBody>
-      </p:sp>
-      <p:sp>
-        <p:nvSpPr>
-          <p:cNvPr id="13" name="TextBox 12"/>
-          <p:cNvSpPr txBox="1"/>
-          <p:nvPr/>
-        </p:nvSpPr>
-        <p:spPr>
-          <a:xfrm>
-            <a:off x="777240" y="3831336"/>
-            <a:ext cx="10774375" cy="822959"/>
-          </a:xfrm>
-          <a:prstGeom prst="rect">
-            <a:avLst/>
-          </a:prstGeom>
-          <a:noFill/>
-        </p:spPr>
-        <p:txBody>
-          <a:bodyPr wrap="square">
-            <a:spAutoFit/>
-          </a:bodyPr>
-          <a:lstStyle/>
-          <a:p>
-            <a:r>
-              <a:rPr sz="1200" b="1" i="0">
-                <a:solidFill>
-                  <a:srgbClr val="A02030"/>
-                </a:solidFill>
-                <a:latin typeface="Calibri"/>
-              </a:rPr>
-              <a:t>Atención</a:t>
-            </a:r>
-          </a:p>
-          <a:p>
-            <a:pPr>
-              <a:spcBef>
-                <a:spcPts val="400"/>
-              </a:spcBef>
-            </a:pPr>
-            <a:r>
-              <a:rPr sz="1400" b="0" i="0">
-                <a:solidFill>
-                  <a:srgbClr val="333333"/>
-                </a:solidFill>
-                <a:latin typeface="Calibri"/>
-              </a:rPr>
-              <a:t>Entrega del taller, si el docente lo asigna · en la fecha que indique el docente.</a:t>
-            </a:r>
-          </a:p>
-        </p:txBody>
-      </p:sp>
-      <p:sp>
-        <p:nvSpPr>
-          <p:cNvPr id="14" name="TextBox 13"/>
-          <p:cNvSpPr txBox="1"/>
-          <p:nvPr/>
-        </p:nvSpPr>
-        <p:spPr>
-          <a:xfrm>
-            <a:off x="11185855" y="6473952"/>
-            <a:ext cx="640080" cy="274320"/>
-          </a:xfrm>
-          <a:prstGeom prst="rect">
-            <a:avLst/>
-          </a:prstGeom>
-          <a:noFill/>
-        </p:spPr>
-        <p:txBody>
-          <a:bodyPr wrap="square">
-            <a:spAutoFit/>
-          </a:bodyPr>
-          <a:lstStyle/>
-          <a:p>
-            <a:pPr algn="r"/>
-            <a:r>
-              <a:rPr sz="1100" b="0" i="0">
-                <a:solidFill>
-                  <a:srgbClr val="666666"/>
-                </a:solidFill>
-                <a:latin typeface="Calibri"/>
-              </a:rPr>
-              <a:t>22</a:t>
-            </a:r>
-          </a:p>
-        </p:txBody>
-      </p:sp>
-    </p:spTree>
-  </p:cSld>
-  <p:clrMapOvr>
-    <a:masterClrMapping/>
-  </p:clrMapOvr>
-</p:sld>
-</file>
-
-<file path=ppt/slides/slide23.xml><?xml version="1.0" encoding="utf-8"?>
-<p:sld xmlns:a="http://schemas.openxmlformats.org/drawingml/2006/main" xmlns:p="http://schemas.openxmlformats.org/presentationml/2006/main" xmlns:r="http://schemas.openxmlformats.org/officeDocument/2006/relationships">
-  <p:cSld>
-    <p:bg>
-      <p:bgPr>
-        <a:solidFill>
-          <a:srgbClr val="FFFFFF"/>
-        </a:solidFill>
-        <a:effectLst/>
-      </p:bgPr>
-    </p:bg>
-    <p:spTree>
-      <p:nvGrpSpPr>
-        <p:cNvPr id="1" name=""/>
-        <p:cNvGrpSpPr/>
-        <p:nvPr/>
-      </p:nvGrpSpPr>
-      <p:grpSpPr/>
-      <p:sp>
-        <p:nvSpPr>
-          <p:cNvPr id="2" name="Rectangle 1"/>
-          <p:cNvSpPr/>
-          <p:nvPr/>
-        </p:nvSpPr>
-        <p:spPr>
-          <a:xfrm>
-            <a:off x="0" y="0"/>
-            <a:ext cx="12191695" cy="164592"/>
-          </a:xfrm>
-          <a:prstGeom prst="rect">
-            <a:avLst/>
-          </a:prstGeom>
-          <a:solidFill>
-            <a:srgbClr val="269CCB"/>
-          </a:solidFill>
-          <a:ln>
-            <a:noFill/>
-          </a:ln>
-        </p:spPr>
-        <p:style>
-          <a:lnRef idx="1">
-            <a:schemeClr val="accent1"/>
-          </a:lnRef>
-          <a:fillRef idx="3">
-            <a:schemeClr val="accent1"/>
-          </a:fillRef>
-          <a:effectRef idx="2">
-            <a:schemeClr val="accent1"/>
-          </a:effectRef>
-          <a:fontRef idx="minor">
-            <a:schemeClr val="lt1"/>
-          </a:fontRef>
-        </p:style>
-        <p:txBody>
-          <a:bodyPr rtlCol="0" anchor="ctr"/>
-          <a:lstStyle/>
-          <a:p>
-            <a:pPr algn="ctr"/>
-          </a:p>
-        </p:txBody>
-      </p:sp>
-      <p:pic>
-        <p:nvPicPr>
-          <p:cNvPr id="3" name="Picture 2" descr="logo_uniajc_color.png"/>
-          <p:cNvPicPr>
-            <a:picLocks noChangeAspect="1"/>
-          </p:cNvPicPr>
-          <p:nvPr/>
-        </p:nvPicPr>
-        <p:blipFill>
-          <a:blip r:embed="rId2"/>
-          <a:stretch>
-            <a:fillRect/>
-          </a:stretch>
-        </p:blipFill>
-        <p:spPr>
-          <a:xfrm>
-            <a:off x="10271455" y="5998464"/>
-            <a:ext cx="1463040" cy="643233"/>
-          </a:xfrm>
-          <a:prstGeom prst="rect">
-            <a:avLst/>
-          </a:prstGeom>
-        </p:spPr>
-      </p:pic>
-      <p:sp>
-        <p:nvSpPr>
-          <p:cNvPr id="4" name="TextBox 3"/>
-          <p:cNvSpPr txBox="1"/>
-          <p:nvPr/>
-        </p:nvSpPr>
-        <p:spPr>
-          <a:xfrm>
-            <a:off x="457200" y="1737360"/>
-            <a:ext cx="11277295" cy="1097280"/>
-          </a:xfrm>
-          <a:prstGeom prst="rect">
-            <a:avLst/>
-          </a:prstGeom>
-          <a:noFill/>
-        </p:spPr>
-        <p:txBody>
-          <a:bodyPr wrap="square" anchor="ctr"/>
-          <a:lstStyle/>
-          <a:p>
-            <a:pPr algn="ctr"/>
-            <a:r>
-              <a:rPr sz="3400" b="1" i="0">
-                <a:solidFill>
-                  <a:srgbClr val="095292"/>
-                </a:solidFill>
-                <a:latin typeface="Calibri"/>
-              </a:rPr>
-              <a:t>Clase 9 · VetCare avanza</a:t>
-            </a:r>
-          </a:p>
-        </p:txBody>
-      </p:sp>
-      <p:sp>
-        <p:nvSpPr>
-          <p:cNvPr id="5" name="TextBox 4"/>
-          <p:cNvSpPr txBox="1"/>
-          <p:nvPr/>
-        </p:nvSpPr>
-        <p:spPr>
-          <a:xfrm>
-            <a:off x="457200" y="3017520"/>
-            <a:ext cx="11277295" cy="1645920"/>
-          </a:xfrm>
-          <a:prstGeom prst="rect">
-            <a:avLst/>
-          </a:prstGeom>
-          <a:noFill/>
-        </p:spPr>
-        <p:txBody>
-          <a:bodyPr wrap="square">
-            <a:spAutoFit/>
-          </a:bodyPr>
-          <a:lstStyle/>
-          <a:p>
-            <a:pPr algn="ctr">
-              <a:spcAft>
-                <a:spcPts val="600"/>
-              </a:spcAft>
-            </a:pPr>
-            <a:r>
-              <a:rPr sz="1600" b="0" i="0">
-                <a:solidFill>
-                  <a:srgbClr val="333333"/>
-                </a:solidFill>
-                <a:latin typeface="Calibri"/>
-              </a:rPr>
-              <a:t>Queda listo el diagrama de casos de uso de VetCare con su limite de sistema y la especificacion textual completa de Registrar mascota y Buscar expediente.</a:t>
-            </a:r>
-          </a:p>
-          <a:p>
-            <a:pPr algn="ctr">
-              <a:spcAft>
-                <a:spcPts val="600"/>
-              </a:spcAft>
-            </a:pPr>
-            <a:r>
-              <a:rPr sz="1600" b="0" i="0">
-                <a:solidFill>
-                  <a:srgbClr val="333333"/>
-                </a:solidFill>
-                <a:latin typeface="Calibri"/>
-              </a:rPr>
-              <a:t>Entregable: Un PDF con el diagrama de casos de uso, la matriz de trazabilidad RF a CU y las dos especificaciones textuales completas (precondiciones, postcondiciones, flujo principal y minimo dos flujos alternos cada una), subido a la plataforma del curso.</a:t>
-            </a:r>
-          </a:p>
-          <a:p>
-            <a:pPr algn="ctr">
-              <a:spcAft>
-                <a:spcPts val="600"/>
-              </a:spcAft>
-            </a:pPr>
-            <a:r>
-              <a:rPr sz="1600" b="0" i="0">
-                <a:solidFill>
-                  <a:srgbClr val="333333"/>
-                </a:solidFill>
-                <a:latin typeface="Calibri"/>
-              </a:rPr>
-              <a:t>Siguiente clase: continuamos el hilo del PI</a:t>
-            </a:r>
-          </a:p>
-        </p:txBody>
-      </p:sp>
-      <p:sp>
-        <p:nvSpPr>
-          <p:cNvPr id="6" name="TextBox 5"/>
-          <p:cNvSpPr txBox="1"/>
-          <p:nvPr/>
-        </p:nvSpPr>
-        <p:spPr>
-          <a:xfrm>
-            <a:off x="457200" y="4754880"/>
-            <a:ext cx="11277295" cy="640080"/>
-          </a:xfrm>
-          <a:prstGeom prst="rect">
-            <a:avLst/>
-          </a:prstGeom>
-          <a:noFill/>
-        </p:spPr>
-        <p:txBody>
-          <a:bodyPr wrap="square">
-            <a:spAutoFit/>
-          </a:bodyPr>
-          <a:lstStyle/>
-          <a:p>
-            <a:pPr algn="ctr"/>
-            <a:r>
-              <a:rPr sz="2000" b="1" i="0">
-                <a:solidFill>
-                  <a:srgbClr val="269CCB"/>
-                </a:solidFill>
-                <a:latin typeface="Calibri"/>
-              </a:rPr>
-              <a:t>Teoria al servicio del proyecto</a:t>
             </a:r>
           </a:p>
         </p:txBody>
@@ -10987,7 +7620,7 @@
                 </a:solidFill>
                 <a:latin typeface="Calibri"/>
               </a:rPr>
-              <a:t>Encuadre y repaso del avance</a:t>
+              <a:t>Encuadre y repaso</a:t>
             </a:r>
           </a:p>
         </p:txBody>
@@ -11332,7 +7965,7 @@
                 </a:solidFill>
                 <a:latin typeface="Calibri"/>
               </a:rPr>
-              <a:t>Taller guiado = avance del PI</a:t>
+              <a:t>Practica (opcional, guia en la carpeta)</a:t>
             </a:r>
           </a:p>
         </p:txBody>
@@ -11447,7 +8080,7 @@
                 </a:solidFill>
                 <a:latin typeface="Calibri"/>
               </a:rPr>
-              <a:t>Criterios de exito y cierre</a:t>
+              <a:t>Sintesis y cierre</a:t>
             </a:r>
           </a:p>
         </p:txBody>
@@ -13458,4 +10091,324 @@
   </a:objectDefaults>
   <a:extraClrSchemeLst/>
 </a:theme>
+</file>
+
+<file path=ppt/theme/theme2.xml><?xml version="1.0" encoding="utf-8"?>
+<a:theme xmlns:a="http://schemas.openxmlformats.org/drawingml/2006/main" name="Office Theme">
+  <a:themeElements>
+    <a:clrScheme name="Office">
+      <a:dk1>
+        <a:sysClr val="windowText" lastClr="000000"/>
+      </a:dk1>
+      <a:lt1>
+        <a:sysClr val="window" lastClr="FFFFFF"/>
+      </a:lt1>
+      <a:dk2>
+        <a:srgbClr val="1F497D"/>
+      </a:dk2>
+      <a:lt2>
+        <a:srgbClr val="EEECE1"/>
+      </a:lt2>
+      <a:accent1>
+        <a:srgbClr val="4F81BD"/>
+      </a:accent1>
+      <a:accent2>
+        <a:srgbClr val="C0504D"/>
+      </a:accent2>
+      <a:accent3>
+        <a:srgbClr val="9BBB59"/>
+      </a:accent3>
+      <a:accent4>
+        <a:srgbClr val="8064A2"/>
+      </a:accent4>
+      <a:accent5>
+        <a:srgbClr val="4BACC6"/>
+      </a:accent5>
+      <a:accent6>
+        <a:srgbClr val="F79646"/>
+      </a:accent6>
+      <a:hlink>
+        <a:srgbClr val="0000FF"/>
+      </a:hlink>
+      <a:folHlink>
+        <a:srgbClr val="800080"/>
+      </a:folHlink>
+    </a:clrScheme>
+    <a:fontScheme name="Office">
+      <a:majorFont>
+        <a:latin typeface="Calibri"/>
+        <a:ea typeface=""/>
+        <a:cs typeface=""/>
+        <a:font script="Jpan" typeface="ＭＳ Ｐゴシック"/>
+        <a:font script="Hang" typeface="맑은 고딕"/>
+        <a:font script="Hans" typeface="宋体"/>
+        <a:font script="Hant" typeface="新細明體"/>
+        <a:font script="Arab" typeface="Times New Roman"/>
+        <a:font script="Hebr" typeface="Times New Roman"/>
+        <a:font script="Thai" typeface="Angsana New"/>
+        <a:font script="Ethi" typeface="Nyala"/>
+        <a:font script="Beng" typeface="Vrinda"/>
+        <a:font script="Gujr" typeface="Shruti"/>
+        <a:font script="Khmr" typeface="MoolBoran"/>
+        <a:font script="Knda" typeface="Tunga"/>
+        <a:font script="Guru" typeface="Raavi"/>
+        <a:font script="Cans" typeface="Euphemia"/>
+        <a:font script="Cher" typeface="Plantagenet Cherokee"/>
+        <a:font script="Yiii" typeface="Microsoft Yi Baiti"/>
+        <a:font script="Tibt" typeface="Microsoft Himalaya"/>
+        <a:font script="Thaa" typeface="MV Boli"/>
+        <a:font script="Deva" typeface="Mangal"/>
+        <a:font script="Telu" typeface="Gautami"/>
+        <a:font script="Taml" typeface="Latha"/>
+        <a:font script="Syrc" typeface="Estrangelo Edessa"/>
+        <a:font script="Orya" typeface="Kalinga"/>
+        <a:font script="Mlym" typeface="Kartika"/>
+        <a:font script="Laoo" typeface="DokChampa"/>
+        <a:font script="Sinh" typeface="Iskoola Pota"/>
+        <a:font script="Mong" typeface="Mongolian Baiti"/>
+        <a:font script="Viet" typeface="Times New Roman"/>
+        <a:font script="Uigh" typeface="Microsoft Uighur"/>
+        <a:font script="Geor" typeface="Sylfaen"/>
+      </a:majorFont>
+      <a:minorFont>
+        <a:latin typeface="Calibri"/>
+        <a:ea typeface=""/>
+        <a:cs typeface=""/>
+        <a:font script="Jpan" typeface="ＭＳ Ｐゴシック"/>
+        <a:font script="Hang" typeface="맑은 고딕"/>
+        <a:font script="Hans" typeface="宋体"/>
+        <a:font script="Hant" typeface="新細明體"/>
+        <a:font script="Arab" typeface="Arial"/>
+        <a:font script="Hebr" typeface="Arial"/>
+        <a:font script="Thai" typeface="Cordia New"/>
+        <a:font script="Ethi" typeface="Nyala"/>
+        <a:font script="Beng" typeface="Vrinda"/>
+        <a:font script="Gujr" typeface="Shruti"/>
+        <a:font script="Khmr" typeface="DaunPenh"/>
+        <a:font script="Knda" typeface="Tunga"/>
+        <a:font script="Guru" typeface="Raavi"/>
+        <a:font script="Cans" typeface="Euphemia"/>
+        <a:font script="Cher" typeface="Plantagenet Cherokee"/>
+        <a:font script="Yiii" typeface="Microsoft Yi Baiti"/>
+        <a:font script="Tibt" typeface="Microsoft Himalaya"/>
+        <a:font script="Thaa" typeface="MV Boli"/>
+        <a:font script="Deva" typeface="Mangal"/>
+        <a:font script="Telu" typeface="Gautami"/>
+        <a:font script="Taml" typeface="Latha"/>
+        <a:font script="Syrc" typeface="Estrangelo Edessa"/>
+        <a:font script="Orya" typeface="Kalinga"/>
+        <a:font script="Mlym" typeface="Kartika"/>
+        <a:font script="Laoo" typeface="DokChampa"/>
+        <a:font script="Sinh" typeface="Iskoola Pota"/>
+        <a:font script="Mong" typeface="Mongolian Baiti"/>
+        <a:font script="Viet" typeface="Arial"/>
+        <a:font script="Uigh" typeface="Microsoft Uighur"/>
+        <a:font script="Geor" typeface="Sylfaen"/>
+      </a:minorFont>
+    </a:fontScheme>
+    <a:fmtScheme name="Office">
+      <a:fillStyleLst>
+        <a:solidFill>
+          <a:schemeClr val="phClr"/>
+        </a:solidFill>
+        <a:gradFill rotWithShape="1">
+          <a:gsLst>
+            <a:gs pos="0">
+              <a:schemeClr val="phClr">
+                <a:tint val="50000"/>
+                <a:satMod val="300000"/>
+              </a:schemeClr>
+            </a:gs>
+            <a:gs pos="35000">
+              <a:schemeClr val="phClr">
+                <a:tint val="37000"/>
+                <a:satMod val="300000"/>
+              </a:schemeClr>
+            </a:gs>
+            <a:gs pos="100000">
+              <a:schemeClr val="phClr">
+                <a:tint val="15000"/>
+                <a:satMod val="350000"/>
+              </a:schemeClr>
+            </a:gs>
+          </a:gsLst>
+          <a:lin ang="16200000" scaled="1"/>
+        </a:gradFill>
+        <a:gradFill rotWithShape="1">
+          <a:gsLst>
+            <a:gs pos="0">
+              <a:schemeClr val="phClr">
+                <a:tint val="100000"/>
+                <a:shade val="100000"/>
+                <a:satMod val="130000"/>
+              </a:schemeClr>
+            </a:gs>
+            <a:gs pos="100000">
+              <a:schemeClr val="phClr">
+                <a:tint val="50000"/>
+                <a:shade val="100000"/>
+                <a:satMod val="350000"/>
+              </a:schemeClr>
+            </a:gs>
+          </a:gsLst>
+          <a:lin ang="16200000" scaled="0"/>
+        </a:gradFill>
+      </a:fillStyleLst>
+      <a:lnStyleLst>
+        <a:ln w="9525" cap="flat" cmpd="sng" algn="ctr">
+          <a:solidFill>
+            <a:schemeClr val="phClr">
+              <a:shade val="95000"/>
+              <a:satMod val="105000"/>
+            </a:schemeClr>
+          </a:solidFill>
+          <a:prstDash val="solid"/>
+        </a:ln>
+        <a:ln w="25400" cap="flat" cmpd="sng" algn="ctr">
+          <a:solidFill>
+            <a:schemeClr val="phClr"/>
+          </a:solidFill>
+          <a:prstDash val="solid"/>
+        </a:ln>
+        <a:ln w="38100" cap="flat" cmpd="sng" algn="ctr">
+          <a:solidFill>
+            <a:schemeClr val="phClr"/>
+          </a:solidFill>
+          <a:prstDash val="solid"/>
+        </a:ln>
+      </a:lnStyleLst>
+      <a:effectStyleLst>
+        <a:effectStyle>
+          <a:effectLst>
+            <a:outerShdw blurRad="40000" dist="20000" dir="5400000" rotWithShape="0">
+              <a:srgbClr val="000000">
+                <a:alpha val="38000"/>
+              </a:srgbClr>
+            </a:outerShdw>
+          </a:effectLst>
+        </a:effectStyle>
+        <a:effectStyle>
+          <a:effectLst>
+            <a:outerShdw blurRad="40000" dist="23000" dir="5400000" rotWithShape="0">
+              <a:srgbClr val="000000">
+                <a:alpha val="35000"/>
+              </a:srgbClr>
+            </a:outerShdw>
+          </a:effectLst>
+        </a:effectStyle>
+        <a:effectStyle>
+          <a:effectLst>
+            <a:outerShdw blurRad="40000" dist="23000" dir="5400000" rotWithShape="0">
+              <a:srgbClr val="000000">
+                <a:alpha val="35000"/>
+              </a:srgbClr>
+            </a:outerShdw>
+          </a:effectLst>
+          <a:scene3d>
+            <a:camera prst="orthographicFront">
+              <a:rot lat="0" lon="0" rev="0"/>
+            </a:camera>
+            <a:lightRig rig="threePt" dir="t">
+              <a:rot lat="0" lon="0" rev="1200000"/>
+            </a:lightRig>
+          </a:scene3d>
+          <a:sp3d>
+            <a:bevelT w="63500" h="25400"/>
+          </a:sp3d>
+        </a:effectStyle>
+      </a:effectStyleLst>
+      <a:bgFillStyleLst>
+        <a:solidFill>
+          <a:schemeClr val="phClr"/>
+        </a:solidFill>
+        <a:gradFill rotWithShape="1">
+          <a:gsLst>
+            <a:gs pos="0">
+              <a:schemeClr val="phClr">
+                <a:tint val="40000"/>
+                <a:satMod val="350000"/>
+              </a:schemeClr>
+            </a:gs>
+            <a:gs pos="40000">
+              <a:schemeClr val="phClr">
+                <a:tint val="45000"/>
+                <a:shade val="99000"/>
+                <a:satMod val="350000"/>
+              </a:schemeClr>
+            </a:gs>
+            <a:gs pos="100000">
+              <a:schemeClr val="phClr">
+                <a:shade val="20000"/>
+                <a:satMod val="255000"/>
+              </a:schemeClr>
+            </a:gs>
+          </a:gsLst>
+          <a:path path="circle">
+            <a:fillToRect l="50000" t="-80000" r="50000" b="180000"/>
+          </a:path>
+        </a:gradFill>
+        <a:gradFill rotWithShape="1">
+          <a:gsLst>
+            <a:gs pos="0">
+              <a:schemeClr val="phClr">
+                <a:tint val="80000"/>
+                <a:satMod val="300000"/>
+              </a:schemeClr>
+            </a:gs>
+            <a:gs pos="100000">
+              <a:schemeClr val="phClr">
+                <a:shade val="30000"/>
+                <a:satMod val="200000"/>
+              </a:schemeClr>
+            </a:gs>
+          </a:gsLst>
+          <a:path path="circle">
+            <a:fillToRect l="50000" t="50000" r="50000" b="50000"/>
+          </a:path>
+        </a:gradFill>
+      </a:bgFillStyleLst>
+    </a:fmtScheme>
+  </a:themeElements>
+  <a:objectDefaults>
+    <a:spDef>
+      <a:spPr/>
+      <a:bodyPr/>
+      <a:lstStyle/>
+      <a:style>
+        <a:lnRef idx="1">
+          <a:schemeClr val="accent1"/>
+        </a:lnRef>
+        <a:fillRef idx="3">
+          <a:schemeClr val="accent1"/>
+        </a:fillRef>
+        <a:effectRef idx="2">
+          <a:schemeClr val="accent1"/>
+        </a:effectRef>
+        <a:fontRef idx="minor">
+          <a:schemeClr val="lt1"/>
+        </a:fontRef>
+      </a:style>
+    </a:spDef>
+    <a:lnDef>
+      <a:spPr/>
+      <a:bodyPr/>
+      <a:lstStyle/>
+      <a:style>
+        <a:lnRef idx="2">
+          <a:schemeClr val="accent1"/>
+        </a:lnRef>
+        <a:fillRef idx="0">
+          <a:schemeClr val="accent1"/>
+        </a:fillRef>
+        <a:effectRef idx="1">
+          <a:schemeClr val="accent1"/>
+        </a:effectRef>
+        <a:fontRef idx="minor">
+          <a:schemeClr val="tx1"/>
+        </a:fontRef>
+      </a:style>
+    </a:lnDef>
+  </a:objectDefaults>
+  <a:extraClrSchemeLst/>
+</a:theme>
 </file>
--- a/Seminario de Sistemas/Clases/Clase 9 - Casos de uso/Presentacion.pptx
+++ b/Seminario de Sistemas/Clases/Clase 9 - Casos de uso/Presentacion.pptx
@@ -517,13 +517,13 @@
           <a:lstStyle/>
           <a:p>
             <a:r>
-              <a:t>En VetCare, Registrar mascota pasa la prueba, porque la recepcionista de Huellitas termina con la ficha creada y el codigo asignado; en cambio Validar la fecha de nacimiento no la pasa, porque nadie llega a la clinica con el objetivo de validar una fecha.</a:t>
+              <a:t>En el sistema de la clinica, Registrar mascota pasa la prueba, porque la recepcionista de la clinica termina con la ficha creada y el codigo asignado; en cambio Validar la fecha de nacimiento no la pasa, porque nadie llega a la clinica con el objetivo de validar una fecha.</a:t>
             </a:r>
           </a:p>
           <a:p/>
           <a:p>
             <a:r>
-              <a:t>Esa distincion parece un detalle de nombres, pero define el tamaño de todo el modelo: si se confunde, un sistema pequeño como VetCare termina con cuarenta casos de uso inutiles en vez de seis u ocho casos de uso reales.</a:t>
+              <a:t>Esa distincion parece un detalle de nombres, pero define el tamaño de todo el modelo: si se confunde, un sistema pequeño como el sistema de la clinica termina con cuarenta casos de uso inutiles en vez de seis u ocho casos de uso reales.</a:t>
             </a:r>
           </a:p>
         </p:txBody>
@@ -593,7 +593,7 @@
           <a:lstStyle/>
           <a:p>
             <a:r>
-              <a:t>Si en VetCare dibujamos adentro del rectangulo un caso de uso llamado Enviar mensaje de WhatsApp, estamos diciendo que nosotros construimos la mensajeria, y eso probablemente sea falso y encarezca el proyecto por escrito.</a:t>
+              <a:t>Si en el sistema de la clinica dibujamos adentro del rectangulo un caso de uso llamado Enviar mensaje de WhatsApp, estamos diciendo que nosotros construimos la mensajeria, y eso probablemente sea falso y encarezca el proyecto por escrito.</a:t>
             </a:r>
           </a:p>
         </p:txBody>
@@ -4350,7 +4350,7 @@
                 </a:solidFill>
                 <a:latin typeface="Calibri"/>
               </a:rPr>
-              <a:t>–   La postcondicion describe el estado en que queda el sistema cuando el caso termina, y debe ser verificable mirando los datos: en VetCare la postcondicion de exito de Registrar mascota es que existe una ficha con codigo unico asociada a un propietario y que quedo bitacora de quien la creo y cuando; la postcondicion de fracaso es que no queda ningun registro a medias.</a:t>
+              <a:t>–   La postcondicion describe el estado en que queda el sistema cuando el caso termina, y debe ser verificable mirando los datos: en el sistema de la clinica la postcondicion de exito de Registrar mascota es que existe una ficha con codigo unico asociada a un propietario y que quedo bitacora de quien la creo y cuando; la postcondicion de fracaso es que no queda ningun registro a medias.</a:t>
             </a:r>
           </a:p>
         </p:txBody>
@@ -4990,7 +4990,7 @@
                 </a:solidFill>
                 <a:latin typeface="Calibri"/>
               </a:rPr>
-              <a:t>  subgraph sistema[VetCare]</a:t>
+              <a:t>  subgraph sistema[Sistema de la clinica]</a:t>
             </a:r>
           </a:p>
           <a:p>
@@ -6736,7 +6736,7 @@
                 </a:solidFill>
                 <a:latin typeface="Calibri"/>
               </a:rPr>
-              <a:t>–   Mismo dominio VetCare — no otro ejemplo. Aqui se diseña, no se programa.</a:t>
+              <a:t>–   Mismo dominio: la clinica veterinaria — no otro ejemplo. Aqui se diseña, no se programa.</a:t>
             </a:r>
           </a:p>
         </p:txBody>
@@ -7281,7 +7281,7 @@
                 </a:solidFill>
                 <a:latin typeface="Calibri"/>
               </a:rPr>
-              <a:t>–   Ejemplo de toda la clase: VetCare, el sistema de la clinica «Huellitas».</a:t>
+              <a:t>–   Ejemplo de toda la clase: el sistema de una clinica veterinaria.</a:t>
             </a:r>
           </a:p>
         </p:txBody>
@@ -7850,7 +7850,7 @@
                 </a:solidFill>
                 <a:latin typeface="Calibri"/>
               </a:rPr>
-              <a:t>Demo en vivo sobre VetCare</a:t>
+              <a:t>Demo en vivo sobre la clinica</a:t>
             </a:r>
           </a:p>
         </p:txBody>
@@ -8637,7 +8637,7 @@
                 </a:solidFill>
                 <a:latin typeface="Calibri"/>
               </a:rPr>
-              <a:t>–   Doña Marta, la recepcionista de Huellitas, no es un actor: el actor es Recepcionista, y si mañana la reemplazan el modelo no cambia.</a:t>
+              <a:t>–   Doña Marta, la recepcionista de la clinica, no es un actor: el actor es Recepcionista, y si mañana la reemplazan el modelo no cambia.</a:t>
             </a:r>
           </a:p>
           <a:p>
@@ -8669,7 +8669,7 @@
                 </a:solidFill>
                 <a:latin typeface="Calibri"/>
               </a:rPr>
-              <a:t>–   Ademas existen actores que no son humanos: un sistema externo que enviaria los recordatorios por mensajeria seria un actor secundario de VetCare, porque participaria en el caso de uso pero no es quien lo inicia.</a:t>
+              <a:t>–   Ademas existen actores que no son humanos: un sistema externo que enviaria los recordatorios por mensajeria seria un actor secundario del sistema de la clinica, porque participaria en el caso de uso pero no es quien lo inicia.</a:t>
             </a:r>
           </a:p>
           <a:p>
@@ -8921,7 +8921,7 @@
                 </a:solidFill>
                 <a:latin typeface="Calibri"/>
               </a:rPr>
-              <a:t>–   Include significa que el caso base siempre ejecuta el caso incluido, y se usa cuando un comportamiento se repite en varios casos y vale la pena escribirlo una sola vez: en VetCare</a:t>
+              <a:t>–   Include significa que el caso base siempre ejecuta el caso incluido, y se usa cuando un comportamiento se repite en varios casos y vale la pena escribirlo una sola vez: en el sistema de la clinica</a:t>
             </a:r>
           </a:p>
           <a:p>
@@ -8969,7 +8969,7 @@
                 </a:solidFill>
                 <a:latin typeface="Calibri"/>
               </a:rPr>
-              <a:t>–   En VetCare, CU-02 Buscar expediente puede extenderse con CU-06 Exportar expediente a PDF, que ocurre unicamente cuando el veterinario lo pide.</a:t>
+              <a:t>–   En el sistema de la clinica, CU-02 Buscar expediente puede extenderse con CU-06 Exportar expediente a PDF, que ocurre unicamente cuando el veterinario lo pide.</a:t>
             </a:r>
           </a:p>
         </p:txBody>
@@ -9725,7 +9725,7 @@
                 </a:solidFill>
                 <a:latin typeface="Calibri"/>
               </a:rPr>
-              <a:t>–   Ese numerito es lo que permite que el compañero de Programacion II sepa exactamente en que punto del comportamiento hay que preguntar algo, y es tambien la razon por la cual la clinica Huellitas deja de perder tiempo buscando historiales.</a:t>
+              <a:t>–   Ese numerito es lo que permite que el compañero de Programacion II sepa exactamente en que punto del comportamiento hay que preguntar algo, y es tambien la razon por la cual la clinica deja de perder tiempo buscando historiales.</a:t>
             </a:r>
           </a:p>
         </p:txBody>

--- a/Seminario de Sistemas/Clases/Clase 9 - Casos de uso/Presentacion.pptx
+++ b/Seminario de Sistemas/Clases/Clase 9 - Casos de uso/Presentacion.pptx
@@ -517,13 +517,13 @@
           <a:lstStyle/>
           <a:p>
             <a:r>
-              <a:t>En el sistema de la clinica, Registrar mascota pasa la prueba, porque la recepcionista de la clinica termina con la ficha creada y el codigo asignado; en cambio Validar la fecha de nacimiento no la pasa, porque nadie llega a la clinica con el objetivo de validar una fecha.</a:t>
+              <a:t>En la clinica, Registrar mascota pasa la prueba, porque la recepcionista de la clinica termina con la ficha creada y el codigo asignado; en cambio Validar la fecha de nacimiento no la pasa, porque nadie llega a la clinica con el objetivo de validar una fecha.</a:t>
             </a:r>
           </a:p>
           <a:p/>
           <a:p>
             <a:r>
-              <a:t>Esa distincion parece un detalle de nombres, pero define el tamaño de todo el modelo: si se confunde, un sistema pequeño como el sistema de la clinica termina con cuarenta casos de uso inutiles en vez de seis u ocho casos de uso reales.</a:t>
+              <a:t>Esa distincion parece un detalle de nombres, pero define el tamaño de todo el modelo: si se confunde, un sistema pequeño como el sistema termina con cuarenta casos de uso inutiles en vez de seis u ocho casos de uso reales.</a:t>
             </a:r>
           </a:p>
         </p:txBody>
@@ -593,7 +593,7 @@
           <a:lstStyle/>
           <a:p>
             <a:r>
-              <a:t>Si en el sistema de la clinica dibujamos adentro del rectangulo un caso de uso llamado Enviar mensaje de WhatsApp, estamos diciendo que nosotros construimos la mensajeria, y eso probablemente sea falso y encarezca el proyecto por escrito.</a:t>
+              <a:t>Si en la clinica dibujamos adentro del rectangulo un caso de uso llamado Enviar mensaje de WhatsApp, estamos diciendo que nosotros construimos la mensajeria, y eso probablemente sea falso y encarezca el proyecto por escrito.</a:t>
             </a:r>
           </a:p>
         </p:txBody>
@@ -4350,7 +4350,7 @@
                 </a:solidFill>
                 <a:latin typeface="Calibri"/>
               </a:rPr>
-              <a:t>–   La postcondicion describe el estado en que queda el sistema cuando el caso termina, y debe ser verificable mirando los datos: en el sistema de la clinica la postcondicion de exito de Registrar mascota es que existe una ficha con codigo unico asociada a un propietario y que quedo bitacora de quien la creo y cuando; la postcondicion de fracaso es que no queda ningun registro a medias.</a:t>
+              <a:t>–   La postcondicion describe el estado en que queda el sistema cuando el caso termina, y debe ser verificable mirando los datos: en la clinica la postcondicion de exito de Registrar mascota es que existe una ficha con codigo unico asociada a un propietario y que quedo bitacora de quien la creo y cuando; la postcondicion de fracaso es que no queda ningun registro a medias.</a:t>
             </a:r>
           </a:p>
         </p:txBody>
@@ -6720,7 +6720,7 @@
                 </a:solidFill>
                 <a:latin typeface="Calibri"/>
               </a:rPr>
-              <a:t> El docente proyecta como un caso de uso mal escrito (Dar clic en guardar) se transforma en uno correcto (Registrar mascota) y luego llena en vivo, delante del grupo, la plantilla de especificacion de Buscar expediente.</a:t>
+              <a:t> Se proyecta como un caso de uso mal escrito (Dar clic en guardar) se transforma en uno correcto (Registrar mascota) y luego llena en vivo, delante del grupo, la plantilla de especificacion de Buscar expediente.</a:t>
             </a:r>
           </a:p>
           <a:p>
@@ -8669,7 +8669,7 @@
                 </a:solidFill>
                 <a:latin typeface="Calibri"/>
               </a:rPr>
-              <a:t>–   Ademas existen actores que no son humanos: un sistema externo que enviaria los recordatorios por mensajeria seria un actor secundario del sistema de la clinica, porque participaria en el caso de uso pero no es quien lo inicia.</a:t>
+              <a:t>–   Ademas existen actores que no son humanos: un sistema externo que enviaria los recordatorios por mensajeria seria un actor secundario del sistema, porque participaria en el caso de uso pero no es quien lo inicia.</a:t>
             </a:r>
           </a:p>
           <a:p>
@@ -8921,7 +8921,7 @@
                 </a:solidFill>
                 <a:latin typeface="Calibri"/>
               </a:rPr>
-              <a:t>–   Include significa que el caso base siempre ejecuta el caso incluido, y se usa cuando un comportamiento se repite en varios casos y vale la pena escribirlo una sola vez: en el sistema de la clinica</a:t>
+              <a:t>–   Include significa que el caso base siempre ejecuta el caso incluido, y se usa cuando un comportamiento se repite en varios casos y vale la pena escribirlo una sola vez: en la clinica</a:t>
             </a:r>
           </a:p>
           <a:p>
@@ -8969,7 +8969,7 @@
                 </a:solidFill>
                 <a:latin typeface="Calibri"/>
               </a:rPr>
-              <a:t>–   En el sistema de la clinica, CU-02 Buscar expediente puede extenderse con CU-06 Exportar expediente a PDF, que ocurre unicamente cuando el veterinario lo pide.</a:t>
+              <a:t>–   En la clinica, CU-02 Buscar expediente puede extenderse con CU-06 Exportar expediente a PDF, que ocurre unicamente cuando el veterinario lo pide.</a:t>
             </a:r>
           </a:p>
         </p:txBody>

--- a/Seminario de Sistemas/Clases/Clase 9 - Casos de uso/Presentacion.pptx
+++ b/Seminario de Sistemas/Clases/Clase 9 - Casos de uso/Presentacion.pptx
@@ -1029,94 +1029,6 @@
           <a:p>
             <a:r>
               <a:t>Primero, cada postcondicion se convierte casi automaticamente en un caso de prueba, porque describe algo que se puede ir a comprobar.</a:t>
-            </a:r>
-          </a:p>
-        </p:txBody>
-      </p:sp>
-      <p:sp>
-        <p:nvSpPr>
-          <p:cNvPr id="4" name="Slide Number Placeholder 3"/>
-          <p:cNvSpPr>
-            <a:spLocks noGrp="1"/>
-          </p:cNvSpPr>
-          <p:nvPr>
-            <p:ph type="sldNum" idx="5" sz="quarter"/>
-          </p:nvPr>
-        </p:nvSpPr>
-        <p:spPr/>
-      </p:sp>
-    </p:spTree>
-  </p:cSld>
-  <p:clrMapOvr>
-    <a:masterClrMapping/>
-  </p:clrMapOvr>
-</p:notes>
-</file>
-
-<file path=ppt/notesSlides/notesSlide6.xml><?xml version="1.0" encoding="utf-8"?>
-<p:notes xmlns:a="http://schemas.openxmlformats.org/drawingml/2006/main" xmlns:p="http://schemas.openxmlformats.org/presentationml/2006/main" xmlns:r="http://schemas.openxmlformats.org/officeDocument/2006/relationships">
-  <p:cSld>
-    <p:spTree>
-      <p:nvGrpSpPr>
-        <p:cNvPr id="1" name=""/>
-        <p:cNvGrpSpPr/>
-        <p:nvPr/>
-      </p:nvGrpSpPr>
-      <p:grpSpPr>
-        <a:xfrm>
-          <a:off x="0" y="0"/>
-          <a:ext cx="0" cy="0"/>
-          <a:chOff x="0" y="0"/>
-          <a:chExt cx="0" cy="0"/>
-        </a:xfrm>
-      </p:grpSpPr>
-      <p:sp>
-        <p:nvSpPr>
-          <p:cNvPr id="2" name="Slide Image Placeholder 1"/>
-          <p:cNvSpPr>
-            <a:spLocks noGrp="1"/>
-          </p:cNvSpPr>
-          <p:nvPr>
-            <p:ph type="sldImg" idx="2"/>
-          </p:nvPr>
-        </p:nvSpPr>
-        <p:spPr/>
-      </p:sp>
-      <p:sp>
-        <p:nvSpPr>
-          <p:cNvPr id="3" name="Notes Placeholder 2"/>
-          <p:cNvSpPr>
-            <a:spLocks noGrp="1"/>
-          </p:cNvSpPr>
-          <p:nvPr>
-            <p:ph type="body" idx="3" sz="quarter"/>
-          </p:nvPr>
-        </p:nvSpPr>
-        <p:spPr/>
-        <p:txBody>
-          <a:bodyPr/>
-          <a:lstStyle/>
-          <a:p>
-            <a:r>
-              <a:t>TEXTO COMPLETO DE LA LÁMINA (se proyecta resumido):</a:t>
-            </a:r>
-          </a:p>
-          <a:p/>
-          <a:p>
-            <a:r>
-              <a:t>Herramienta: draw.io · Google Docs</a:t>
-            </a:r>
-          </a:p>
-          <a:p/>
-          <a:p>
-            <a:r>
-              <a:t>Demo: Se proyecta como un caso de uso mal escrito (Dar clic en guardar) se transforma en uno correcto (Registrar mascota) y luego llena en vivo, delante del grupo, la plantilla de especificacion de Buscar expediente.</a:t>
-            </a:r>
-          </a:p>
-          <a:p/>
-          <a:p>
-            <a:r>
-              <a:t>Mismo dominio: la clinica veterinaria — no otro ejemplo. Aqui se diseña, no se programa.</a:t>
             </a:r>
           </a:p>
         </p:txBody>
@@ -8643,83 +8555,14 @@
       </p:sp>
       <p:sp>
         <p:nvSpPr>
-          <p:cNvPr id="5" name="Rounded Rectangle 4"/>
-          <p:cNvSpPr/>
+          <p:cNvPr id="5" name="TextBox 4"/>
+          <p:cNvSpPr txBox="1"/>
           <p:nvPr/>
         </p:nvSpPr>
         <p:spPr>
           <a:xfrm>
-            <a:off x="5797149" y="1573813"/>
-            <a:ext cx="6010497" cy="4057845"/>
-          </a:xfrm>
-          <a:prstGeom prst="roundRect">
-            <a:avLst>
-              <a:gd name="adj" fmla="val 4000"/>
-            </a:avLst>
-          </a:prstGeom>
-          <a:solidFill>
-            <a:srgbClr val="E8EEF4"/>
-          </a:solidFill>
-          <a:ln>
-            <a:noFill/>
-          </a:ln>
-        </p:spPr>
-        <p:style>
-          <a:lnRef idx="1">
-            <a:schemeClr val="accent1"/>
-          </a:lnRef>
-          <a:fillRef idx="3">
-            <a:schemeClr val="accent1"/>
-          </a:fillRef>
-          <a:effectRef idx="2">
-            <a:schemeClr val="accent1"/>
-          </a:effectRef>
-          <a:fontRef idx="minor">
-            <a:schemeClr val="lt1"/>
-          </a:fontRef>
-        </p:style>
-        <p:txBody>
-          <a:bodyPr rtlCol="0" anchor="ctr"/>
-          <a:lstStyle/>
-          <a:p>
-            <a:pPr algn="ctr"/>
-          </a:p>
-        </p:txBody>
-      </p:sp>
-      <p:pic>
-        <p:nvPicPr>
-          <p:cNvPr id="6" name="Picture 5" descr="laptop-code-live-demo.jpg"/>
-          <p:cNvPicPr>
-            <a:picLocks noChangeAspect="1"/>
-          </p:cNvPicPr>
-          <p:nvPr/>
-        </p:nvPicPr>
-        <p:blipFill>
-          <a:blip r:embed="rId2"/>
-          <a:stretch>
-            <a:fillRect/>
-          </a:stretch>
-        </p:blipFill>
-        <p:spPr>
-          <a:xfrm>
-            <a:off x="5870301" y="1646965"/>
-            <a:ext cx="5864193" cy="3911541"/>
-          </a:xfrm>
-          <a:prstGeom prst="rect">
-            <a:avLst/>
-          </a:prstGeom>
-        </p:spPr>
-      </p:pic>
-      <p:sp>
-        <p:nvSpPr>
-          <p:cNvPr id="7" name="TextBox 6"/>
-          <p:cNvSpPr txBox="1"/>
-          <p:nvPr/>
-        </p:nvSpPr>
-        <p:spPr>
-          <a:xfrm>
-            <a:off x="5870301" y="5961888"/>
-            <a:ext cx="5864193" cy="320040"/>
+            <a:off x="457200" y="1170432"/>
+            <a:ext cx="11277295" cy="5230368"/>
           </a:xfrm>
           <a:prstGeom prst="rect">
             <a:avLst/>
@@ -8732,41 +8575,6 @@
           </a:bodyPr>
           <a:lstStyle/>
           <a:p>
-            <a:pPr algn="ctr"/>
-            <a:r>
-              <a:rPr sz="1100" b="0" i="1">
-                <a:solidFill>
-                  <a:srgbClr val="666666"/>
-                </a:solidFill>
-                <a:latin typeface="Calibri"/>
-              </a:rPr>
-              <a:t>Foto: olia danilevich · Pexels</a:t>
-            </a:r>
-          </a:p>
-        </p:txBody>
-      </p:sp>
-      <p:sp>
-        <p:nvSpPr>
-          <p:cNvPr id="8" name="TextBox 7"/>
-          <p:cNvSpPr txBox="1"/>
-          <p:nvPr/>
-        </p:nvSpPr>
-        <p:spPr>
-          <a:xfrm>
-            <a:off x="457200" y="1353312"/>
-            <a:ext cx="5093061" cy="5047488"/>
-          </a:xfrm>
-          <a:prstGeom prst="rect">
-            <a:avLst/>
-          </a:prstGeom>
-          <a:noFill/>
-        </p:spPr>
-        <p:txBody>
-          <a:bodyPr wrap="square">
-            <a:spAutoFit/>
-          </a:bodyPr>
-          <a:lstStyle/>
-          <a:p>
             <a:pPr>
               <a:spcAft>
                 <a:spcPts val="800"/>
@@ -8824,6 +8632,15 @@
               </a:rPr>
               <a:t>Demo:</a:t>
             </a:r>
+            <a:r>
+              <a:rPr sz="2000" b="0" i="0">
+                <a:solidFill>
+                  <a:srgbClr val="333333"/>
+                </a:solidFill>
+                <a:latin typeface="Calibri"/>
+              </a:rPr>
+              <a:t> Se proyecta como un caso de uso mal escrito (Dar clic en guardar) se transforma en uno correcto (Registrar mascota) y luego llena en vivo, delante del grupo, la plantilla de especificacion de Buscar expediente.</a:t>
+            </a:r>
           </a:p>
           <a:p>
             <a:pPr>
@@ -8845,7 +8662,7 @@
       </p:sp>
       <p:sp>
         <p:nvSpPr>
-          <p:cNvPr id="9" name="TextBox 8"/>
+          <p:cNvPr id="6" name="TextBox 5"/>
           <p:cNvSpPr txBox="1"/>
           <p:nvPr/>
         </p:nvSpPr>
@@ -9258,83 +9075,14 @@
       </p:sp>
       <p:sp>
         <p:nvSpPr>
-          <p:cNvPr id="5" name="Rounded Rectangle 4"/>
-          <p:cNvSpPr/>
+          <p:cNvPr id="5" name="TextBox 4"/>
+          <p:cNvSpPr txBox="1"/>
           <p:nvPr/>
         </p:nvSpPr>
         <p:spPr>
           <a:xfrm>
-            <a:off x="5797149" y="1573813"/>
-            <a:ext cx="6010497" cy="4057845"/>
-          </a:xfrm>
-          <a:prstGeom prst="roundRect">
-            <a:avLst>
-              <a:gd name="adj" fmla="val 4000"/>
-            </a:avLst>
-          </a:prstGeom>
-          <a:solidFill>
-            <a:srgbClr val="E8EEF4"/>
-          </a:solidFill>
-          <a:ln>
-            <a:noFill/>
-          </a:ln>
-        </p:spPr>
-        <p:style>
-          <a:lnRef idx="1">
-            <a:schemeClr val="accent1"/>
-          </a:lnRef>
-          <a:fillRef idx="3">
-            <a:schemeClr val="accent1"/>
-          </a:fillRef>
-          <a:effectRef idx="2">
-            <a:schemeClr val="accent1"/>
-          </a:effectRef>
-          <a:fontRef idx="minor">
-            <a:schemeClr val="lt1"/>
-          </a:fontRef>
-        </p:style>
-        <p:txBody>
-          <a:bodyPr rtlCol="0" anchor="ctr"/>
-          <a:lstStyle/>
-          <a:p>
-            <a:pPr algn="ctr"/>
-          </a:p>
-        </p:txBody>
-      </p:sp>
-      <p:pic>
-        <p:nvPicPr>
-          <p:cNvPr id="6" name="Picture 5" descr="notebook-planning-desk-coffee.jpg"/>
-          <p:cNvPicPr>
-            <a:picLocks noChangeAspect="1"/>
-          </p:cNvPicPr>
-          <p:nvPr/>
-        </p:nvPicPr>
-        <p:blipFill>
-          <a:blip r:embed="rId2"/>
-          <a:stretch>
-            <a:fillRect/>
-          </a:stretch>
-        </p:blipFill>
-        <p:spPr>
-          <a:xfrm>
-            <a:off x="5870301" y="1646965"/>
-            <a:ext cx="5864193" cy="3911541"/>
-          </a:xfrm>
-          <a:prstGeom prst="rect">
-            <a:avLst/>
-          </a:prstGeom>
-        </p:spPr>
-      </p:pic>
-      <p:sp>
-        <p:nvSpPr>
-          <p:cNvPr id="7" name="TextBox 6"/>
-          <p:cNvSpPr txBox="1"/>
-          <p:nvPr/>
-        </p:nvSpPr>
-        <p:spPr>
-          <a:xfrm>
-            <a:off x="5870301" y="5961888"/>
-            <a:ext cx="5864193" cy="320040"/>
+            <a:off x="457200" y="1170432"/>
+            <a:ext cx="11277295" cy="5230368"/>
           </a:xfrm>
           <a:prstGeom prst="rect">
             <a:avLst/>
@@ -9347,41 +9095,6 @@
           </a:bodyPr>
           <a:lstStyle/>
           <a:p>
-            <a:pPr algn="ctr"/>
-            <a:r>
-              <a:rPr sz="1100" b="0" i="1">
-                <a:solidFill>
-                  <a:srgbClr val="666666"/>
-                </a:solidFill>
-                <a:latin typeface="Calibri"/>
-              </a:rPr>
-              <a:t>Foto: Cup of  Couple · Pexels</a:t>
-            </a:r>
-          </a:p>
-        </p:txBody>
-      </p:sp>
-      <p:sp>
-        <p:nvSpPr>
-          <p:cNvPr id="8" name="TextBox 7"/>
-          <p:cNvSpPr txBox="1"/>
-          <p:nvPr/>
-        </p:nvSpPr>
-        <p:spPr>
-          <a:xfrm>
-            <a:off x="457200" y="1353312"/>
-            <a:ext cx="5093061" cy="5047488"/>
-          </a:xfrm>
-          <a:prstGeom prst="rect">
-            <a:avLst/>
-          </a:prstGeom>
-          <a:noFill/>
-        </p:spPr>
-        <p:txBody>
-          <a:bodyPr wrap="square">
-            <a:spAutoFit/>
-          </a:bodyPr>
-          <a:lstStyle/>
-          <a:p>
             <a:pPr>
               <a:spcAft>
                 <a:spcPts val="800"/>
@@ -9494,7 +9207,7 @@
       </p:sp>
       <p:sp>
         <p:nvSpPr>
-          <p:cNvPr id="9" name="TextBox 8"/>
+          <p:cNvPr id="6" name="TextBox 5"/>
           <p:cNvSpPr txBox="1"/>
           <p:nvPr/>
         </p:nvSpPr>

--- a/Seminario de Sistemas/Clases/Clase 9 - Casos de uso/Presentacion.pptx
+++ b/Seminario de Sistemas/Clases/Clase 9 - Casos de uso/Presentacion.pptx
@@ -1029,6 +1029,94 @@
           <a:p>
             <a:r>
               <a:t>Primero, cada postcondicion se convierte casi automaticamente en un caso de prueba, porque describe algo que se puede ir a comprobar.</a:t>
+            </a:r>
+          </a:p>
+        </p:txBody>
+      </p:sp>
+      <p:sp>
+        <p:nvSpPr>
+          <p:cNvPr id="4" name="Slide Number Placeholder 3"/>
+          <p:cNvSpPr>
+            <a:spLocks noGrp="1"/>
+          </p:cNvSpPr>
+          <p:nvPr>
+            <p:ph type="sldNum" idx="5" sz="quarter"/>
+          </p:nvPr>
+        </p:nvSpPr>
+        <p:spPr/>
+      </p:sp>
+    </p:spTree>
+  </p:cSld>
+  <p:clrMapOvr>
+    <a:masterClrMapping/>
+  </p:clrMapOvr>
+</p:notes>
+</file>
+
+<file path=ppt/notesSlides/notesSlide6.xml><?xml version="1.0" encoding="utf-8"?>
+<p:notes xmlns:a="http://schemas.openxmlformats.org/drawingml/2006/main" xmlns:p="http://schemas.openxmlformats.org/presentationml/2006/main" xmlns:r="http://schemas.openxmlformats.org/officeDocument/2006/relationships">
+  <p:cSld>
+    <p:spTree>
+      <p:nvGrpSpPr>
+        <p:cNvPr id="1" name=""/>
+        <p:cNvGrpSpPr/>
+        <p:nvPr/>
+      </p:nvGrpSpPr>
+      <p:grpSpPr>
+        <a:xfrm>
+          <a:off x="0" y="0"/>
+          <a:ext cx="0" cy="0"/>
+          <a:chOff x="0" y="0"/>
+          <a:chExt cx="0" cy="0"/>
+        </a:xfrm>
+      </p:grpSpPr>
+      <p:sp>
+        <p:nvSpPr>
+          <p:cNvPr id="2" name="Slide Image Placeholder 1"/>
+          <p:cNvSpPr>
+            <a:spLocks noGrp="1"/>
+          </p:cNvSpPr>
+          <p:nvPr>
+            <p:ph type="sldImg" idx="2"/>
+          </p:nvPr>
+        </p:nvSpPr>
+        <p:spPr/>
+      </p:sp>
+      <p:sp>
+        <p:nvSpPr>
+          <p:cNvPr id="3" name="Notes Placeholder 2"/>
+          <p:cNvSpPr>
+            <a:spLocks noGrp="1"/>
+          </p:cNvSpPr>
+          <p:nvPr>
+            <p:ph type="body" idx="3" sz="quarter"/>
+          </p:nvPr>
+        </p:nvSpPr>
+        <p:spPr/>
+        <p:txBody>
+          <a:bodyPr/>
+          <a:lstStyle/>
+          <a:p>
+            <a:r>
+              <a:t>TEXTO COMPLETO DE LA LÁMINA (se proyecta resumido):</a:t>
+            </a:r>
+          </a:p>
+          <a:p/>
+          <a:p>
+            <a:r>
+              <a:t>Herramienta: draw.io · Google Docs</a:t>
+            </a:r>
+          </a:p>
+          <a:p/>
+          <a:p>
+            <a:r>
+              <a:t>Demo: Se proyecta como un caso de uso mal escrito (Dar clic en guardar) se transforma en uno correcto (Registrar mascota) y luego llena en vivo, delante del grupo, la plantilla de especificacion de Buscar expediente.</a:t>
+            </a:r>
+          </a:p>
+          <a:p/>
+          <a:p>
+            <a:r>
+              <a:t>Mismo dominio: la clinica veterinaria — no otro ejemplo. Aqui se diseña, no se programa.</a:t>
             </a:r>
           </a:p>
         </p:txBody>
@@ -8555,14 +8643,83 @@
       </p:sp>
       <p:sp>
         <p:nvSpPr>
-          <p:cNvPr id="5" name="TextBox 4"/>
+          <p:cNvPr id="5" name="Rounded Rectangle 4"/>
+          <p:cNvSpPr/>
+          <p:nvPr/>
+        </p:nvSpPr>
+        <p:spPr>
+          <a:xfrm>
+            <a:off x="5797149" y="1343926"/>
+            <a:ext cx="6010497" cy="4837658"/>
+          </a:xfrm>
+          <a:prstGeom prst="roundRect">
+            <a:avLst>
+              <a:gd name="adj" fmla="val 4000"/>
+            </a:avLst>
+          </a:prstGeom>
+          <a:solidFill>
+            <a:srgbClr val="E8EEF4"/>
+          </a:solidFill>
+          <a:ln>
+            <a:noFill/>
+          </a:ln>
+        </p:spPr>
+        <p:style>
+          <a:lnRef idx="1">
+            <a:schemeClr val="accent1"/>
+          </a:lnRef>
+          <a:fillRef idx="3">
+            <a:schemeClr val="accent1"/>
+          </a:fillRef>
+          <a:effectRef idx="2">
+            <a:schemeClr val="accent1"/>
+          </a:effectRef>
+          <a:fontRef idx="minor">
+            <a:schemeClr val="lt1"/>
+          </a:fontRef>
+        </p:style>
+        <p:txBody>
+          <a:bodyPr rtlCol="0" anchor="ctr"/>
+          <a:lstStyle/>
+          <a:p>
+            <a:pPr algn="ctr"/>
+          </a:p>
+        </p:txBody>
+      </p:sp>
+      <p:pic>
+        <p:nvPicPr>
+          <p:cNvPr id="6" name="Picture 5" descr="ilus-demo-paso1.png"/>
+          <p:cNvPicPr>
+            <a:picLocks noChangeAspect="1"/>
+          </p:cNvPicPr>
+          <p:nvPr/>
+        </p:nvPicPr>
+        <p:blipFill>
+          <a:blip r:embed="rId2"/>
+          <a:stretch>
+            <a:fillRect/>
+          </a:stretch>
+        </p:blipFill>
+        <p:spPr>
+          <a:xfrm>
+            <a:off x="5870301" y="1417078"/>
+            <a:ext cx="5864193" cy="4691354"/>
+          </a:xfrm>
+          <a:prstGeom prst="rect">
+            <a:avLst/>
+          </a:prstGeom>
+        </p:spPr>
+      </p:pic>
+      <p:sp>
+        <p:nvSpPr>
+          <p:cNvPr id="7" name="TextBox 6"/>
           <p:cNvSpPr txBox="1"/>
           <p:nvPr/>
         </p:nvSpPr>
         <p:spPr>
           <a:xfrm>
-            <a:off x="457200" y="1170432"/>
-            <a:ext cx="11277295" cy="5230368"/>
+            <a:off x="457200" y="1353312"/>
+            <a:ext cx="5093061" cy="5047488"/>
           </a:xfrm>
           <a:prstGeom prst="rect">
             <a:avLst/>
@@ -8639,7 +8796,7 @@
                 </a:solidFill>
                 <a:latin typeface="Calibri"/>
               </a:rPr>
-              <a:t> Se proyecta como un caso de uso mal escrito (Dar clic en guardar) se transforma en uno correcto (Registrar mascota) y luego llena en vivo, delante del grupo, la plantilla de especificacion de Buscar expediente.</a:t>
+              <a:t> Se proyecta como un caso de uso mal escrito (Dar clic en guardar) se transforma en uno correcto (Registrar mascota) y luego llena en vivo…</a:t>
             </a:r>
           </a:p>
           <a:p>
@@ -8662,7 +8819,7 @@
       </p:sp>
       <p:sp>
         <p:nvSpPr>
-          <p:cNvPr id="6" name="TextBox 5"/>
+          <p:cNvPr id="8" name="TextBox 7"/>
           <p:cNvSpPr txBox="1"/>
           <p:nvPr/>
         </p:nvSpPr>

--- a/Seminario de Sistemas/Clases/Clase 9 - Casos de uso/Presentacion.pptx
+++ b/Seminario de Sistemas/Clases/Clase 9 - Casos de uso/Presentacion.pptx
@@ -4654,7 +4654,7 @@
         <p:spPr>
           <a:xfrm>
             <a:off x="457200" y="1261872"/>
-            <a:ext cx="11277295" cy="4760699"/>
+            <a:ext cx="11277295" cy="3659991"/>
           </a:xfrm>
           <a:prstGeom prst="roundRect">
             <a:avLst>
@@ -4904,7 +4904,7 @@
         <p:spPr>
           <a:xfrm>
             <a:off x="1188720" y="1719072"/>
-            <a:ext cx="10271455" cy="4166339"/>
+            <a:ext cx="10271455" cy="3065631"/>
           </a:xfrm>
           <a:prstGeom prst="rect">
             <a:avLst/>
@@ -4919,11 +4919,11 @@
           <a:p>
             <a:pPr>
               <a:spcAft>
-                <a:spcPts val="321"/>
+                <a:spcPts val="235"/>
               </a:spcAft>
             </a:pPr>
             <a:r>
-              <a:rPr sz="1500" i="0" b="0">
+              <a:rPr sz="1100" i="0" b="0">
                 <a:solidFill>
                   <a:srgbClr val="D4D4D4"/>
                 </a:solidFill>
@@ -4932,7 +4932,7 @@
               <a:t>CU</a:t>
             </a:r>
             <a:r>
-              <a:rPr sz="1500" i="0" b="0">
+              <a:rPr sz="1100" i="0" b="0">
                 <a:solidFill>
                   <a:srgbClr val="D4D4D4"/>
                 </a:solidFill>
@@ -4941,7 +4941,7 @@
               <a:t>-</a:t>
             </a:r>
             <a:r>
-              <a:rPr sz="1500" i="0" b="0">
+              <a:rPr sz="1100" i="0" b="0">
                 <a:solidFill>
                   <a:srgbClr val="B5CEA8"/>
                 </a:solidFill>
@@ -4950,7 +4950,7 @@
               <a:t>02</a:t>
             </a:r>
             <a:r>
-              <a:rPr sz="1500" i="0" b="0">
+              <a:rPr sz="1100" i="0" b="0">
                 <a:solidFill>
                   <a:srgbClr val="D4D4D4"/>
                 </a:solidFill>
@@ -4959,7 +4959,7 @@
               <a:t>  </a:t>
             </a:r>
             <a:r>
-              <a:rPr sz="1500" i="0" b="0">
+              <a:rPr sz="1100" i="0" b="0">
                 <a:solidFill>
                   <a:srgbClr val="D4D4D4"/>
                 </a:solidFill>
@@ -4968,16 +4968,16 @@
               <a:t>Buscar</a:t>
             </a:r>
             <a:r>
-              <a:rPr sz="1500" i="0" b="0">
-                <a:solidFill>
-                  <a:srgbClr val="D4D4D4"/>
-                </a:solidFill>
-                <a:latin typeface="Consolas"/>
-              </a:rPr>
-              <a:t> </a:t>
-            </a:r>
-            <a:r>
-              <a:rPr sz="1500" i="0" b="0">
+              <a:rPr sz="1100" i="0" b="0">
+                <a:solidFill>
+                  <a:srgbClr val="D4D4D4"/>
+                </a:solidFill>
+                <a:latin typeface="Consolas"/>
+              </a:rPr>
+              <a:t> </a:t>
+            </a:r>
+            <a:r>
+              <a:rPr sz="1100" i="0" b="0">
                 <a:solidFill>
                   <a:srgbClr val="D4D4D4"/>
                 </a:solidFill>
@@ -4989,11 +4989,11 @@
           <a:p>
             <a:pPr>
               <a:spcAft>
-                <a:spcPts val="321"/>
+                <a:spcPts val="235"/>
               </a:spcAft>
             </a:pPr>
             <a:r>
-              <a:rPr sz="1500" i="0" b="0">
+              <a:rPr sz="1100" i="0" b="0">
                 <a:solidFill>
                   <a:srgbClr val="D4D4D4"/>
                 </a:solidFill>
@@ -5002,16 +5002,16 @@
               <a:t>Actor</a:t>
             </a:r>
             <a:r>
-              <a:rPr sz="1500" i="0" b="0">
-                <a:solidFill>
-                  <a:srgbClr val="D4D4D4"/>
-                </a:solidFill>
-                <a:latin typeface="Consolas"/>
-              </a:rPr>
-              <a:t> </a:t>
-            </a:r>
-            <a:r>
-              <a:rPr sz="1500" i="0" b="0">
+              <a:rPr sz="1100" i="0" b="0">
+                <a:solidFill>
+                  <a:srgbClr val="D4D4D4"/>
+                </a:solidFill>
+                <a:latin typeface="Consolas"/>
+              </a:rPr>
+              <a:t> </a:t>
+            </a:r>
+            <a:r>
+              <a:rPr sz="1100" i="0" b="0">
                 <a:solidFill>
                   <a:srgbClr val="D4D4D4"/>
                 </a:solidFill>
@@ -5020,7 +5020,7 @@
               <a:t>primario</a:t>
             </a:r>
             <a:r>
-              <a:rPr sz="1500" i="0" b="0">
+              <a:rPr sz="1100" i="0" b="0">
                 <a:solidFill>
                   <a:srgbClr val="D4D4D4"/>
                 </a:solidFill>
@@ -5029,7 +5029,7 @@
               <a:t>: </a:t>
             </a:r>
             <a:r>
-              <a:rPr sz="1500" i="0" b="0">
+              <a:rPr sz="1100" i="0" b="0">
                 <a:solidFill>
                   <a:srgbClr val="D4D4D4"/>
                 </a:solidFill>
@@ -5038,7 +5038,7 @@
               <a:t>Veterinario</a:t>
             </a:r>
             <a:r>
-              <a:rPr sz="1500" i="0" b="0">
+              <a:rPr sz="1100" i="0" b="0">
                 <a:solidFill>
                   <a:srgbClr val="D4D4D4"/>
                 </a:solidFill>
@@ -5047,7 +5047,7 @@
               <a:t>  |  </a:t>
             </a:r>
             <a:r>
-              <a:rPr sz="1500" i="0" b="0">
+              <a:rPr sz="1100" i="0" b="0">
                 <a:solidFill>
                   <a:srgbClr val="D4D4D4"/>
                 </a:solidFill>
@@ -5056,7 +5056,7 @@
               <a:t>Prioridad</a:t>
             </a:r>
             <a:r>
-              <a:rPr sz="1500" i="0" b="0">
+              <a:rPr sz="1100" i="0" b="0">
                 <a:solidFill>
                   <a:srgbClr val="D4D4D4"/>
                 </a:solidFill>
@@ -5065,7 +5065,7 @@
               <a:t>: </a:t>
             </a:r>
             <a:r>
-              <a:rPr sz="1500" i="0" b="0">
+              <a:rPr sz="1100" i="0" b="0">
                 <a:solidFill>
                   <a:srgbClr val="D4D4D4"/>
                 </a:solidFill>
@@ -5074,7 +5074,7 @@
               <a:t>Alta</a:t>
             </a:r>
             <a:r>
-              <a:rPr sz="1500" i="0" b="0">
+              <a:rPr sz="1100" i="0" b="0">
                 <a:solidFill>
                   <a:srgbClr val="D4D4D4"/>
                 </a:solidFill>
@@ -5083,7 +5083,7 @@
               <a:t>  |  </a:t>
             </a:r>
             <a:r>
-              <a:rPr sz="1500" i="0" b="0">
+              <a:rPr sz="1100" i="0" b="0">
                 <a:solidFill>
                   <a:srgbClr val="D4D4D4"/>
                 </a:solidFill>
@@ -5092,7 +5092,7 @@
               <a:t>Cubre</a:t>
             </a:r>
             <a:r>
-              <a:rPr sz="1500" i="0" b="0">
+              <a:rPr sz="1100" i="0" b="0">
                 <a:solidFill>
                   <a:srgbClr val="D4D4D4"/>
                 </a:solidFill>
@@ -5101,7 +5101,7 @@
               <a:t>: </a:t>
             </a:r>
             <a:r>
-              <a:rPr sz="1500" i="0" b="0">
+              <a:rPr sz="1100" i="0" b="0">
                 <a:solidFill>
                   <a:srgbClr val="D4D4D4"/>
                 </a:solidFill>
@@ -5110,7 +5110,7 @@
               <a:t>RF</a:t>
             </a:r>
             <a:r>
-              <a:rPr sz="1500" i="0" b="0">
+              <a:rPr sz="1100" i="0" b="0">
                 <a:solidFill>
                   <a:srgbClr val="D4D4D4"/>
                 </a:solidFill>
@@ -5119,7 +5119,7 @@
               <a:t>-</a:t>
             </a:r>
             <a:r>
-              <a:rPr sz="1500" i="0" b="0">
+              <a:rPr sz="1100" i="0" b="0">
                 <a:solidFill>
                   <a:srgbClr val="B5CEA8"/>
                 </a:solidFill>
@@ -5128,7 +5128,7 @@
               <a:t>05</a:t>
             </a:r>
             <a:r>
-              <a:rPr sz="1500" i="0" b="0">
+              <a:rPr sz="1100" i="0" b="0">
                 <a:solidFill>
                   <a:srgbClr val="D4D4D4"/>
                 </a:solidFill>
@@ -5137,7 +5137,7 @@
               <a:t>, </a:t>
             </a:r>
             <a:r>
-              <a:rPr sz="1500" i="0" b="0">
+              <a:rPr sz="1100" i="0" b="0">
                 <a:solidFill>
                   <a:srgbClr val="D4D4D4"/>
                 </a:solidFill>
@@ -5146,7 +5146,7 @@
               <a:t>RNF</a:t>
             </a:r>
             <a:r>
-              <a:rPr sz="1500" i="0" b="0">
+              <a:rPr sz="1100" i="0" b="0">
                 <a:solidFill>
                   <a:srgbClr val="D4D4D4"/>
                 </a:solidFill>
@@ -5155,7 +5155,7 @@
               <a:t>-</a:t>
             </a:r>
             <a:r>
-              <a:rPr sz="1500" i="0" b="0">
+              <a:rPr sz="1100" i="0" b="0">
                 <a:solidFill>
                   <a:srgbClr val="B5CEA8"/>
                 </a:solidFill>
@@ -5167,11 +5167,11 @@
           <a:p>
             <a:pPr>
               <a:spcAft>
-                <a:spcPts val="321"/>
+                <a:spcPts val="235"/>
               </a:spcAft>
             </a:pPr>
             <a:r>
-              <a:rPr sz="1500" i="0" b="0">
+              <a:rPr sz="1100" i="0" b="0">
                 <a:solidFill>
                   <a:srgbClr val="D4D4D4"/>
                 </a:solidFill>
@@ -5180,7 +5180,7 @@
               <a:t>Precondicion</a:t>
             </a:r>
             <a:r>
-              <a:rPr sz="1500" i="0" b="0">
+              <a:rPr sz="1100" i="0" b="0">
                 <a:solidFill>
                   <a:srgbClr val="D4D4D4"/>
                 </a:solidFill>
@@ -5189,7 +5189,7 @@
               <a:t>: </a:t>
             </a:r>
             <a:r>
-              <a:rPr sz="1500" i="0" b="0">
+              <a:rPr sz="1100" i="0" b="0">
                 <a:solidFill>
                   <a:srgbClr val="D4D4D4"/>
                 </a:solidFill>
@@ -5198,16 +5198,16 @@
               <a:t>el</a:t>
             </a:r>
             <a:r>
-              <a:rPr sz="1500" i="0" b="0">
-                <a:solidFill>
-                  <a:srgbClr val="D4D4D4"/>
-                </a:solidFill>
-                <a:latin typeface="Consolas"/>
-              </a:rPr>
-              <a:t> </a:t>
-            </a:r>
-            <a:r>
-              <a:rPr sz="1500" i="0" b="0">
+              <a:rPr sz="1100" i="0" b="0">
+                <a:solidFill>
+                  <a:srgbClr val="D4D4D4"/>
+                </a:solidFill>
+                <a:latin typeface="Consolas"/>
+              </a:rPr>
+              <a:t> </a:t>
+            </a:r>
+            <a:r>
+              <a:rPr sz="1100" i="0" b="0">
                 <a:solidFill>
                   <a:srgbClr val="D4D4D4"/>
                 </a:solidFill>
@@ -5216,16 +5216,16 @@
               <a:t>veterinario</a:t>
             </a:r>
             <a:r>
-              <a:rPr sz="1500" i="0" b="0">
-                <a:solidFill>
-                  <a:srgbClr val="D4D4D4"/>
-                </a:solidFill>
-                <a:latin typeface="Consolas"/>
-              </a:rPr>
-              <a:t> </a:t>
-            </a:r>
-            <a:r>
-              <a:rPr sz="1500" i="0" b="0">
+              <a:rPr sz="1100" i="0" b="0">
+                <a:solidFill>
+                  <a:srgbClr val="D4D4D4"/>
+                </a:solidFill>
+                <a:latin typeface="Consolas"/>
+              </a:rPr>
+              <a:t> </a:t>
+            </a:r>
+            <a:r>
+              <a:rPr sz="1100" i="0" b="0">
                 <a:solidFill>
                   <a:srgbClr val="D4D4D4"/>
                 </a:solidFill>
@@ -5234,16 +5234,16 @@
               <a:t>esta</a:t>
             </a:r>
             <a:r>
-              <a:rPr sz="1500" i="0" b="0">
-                <a:solidFill>
-                  <a:srgbClr val="D4D4D4"/>
-                </a:solidFill>
-                <a:latin typeface="Consolas"/>
-              </a:rPr>
-              <a:t> </a:t>
-            </a:r>
-            <a:r>
-              <a:rPr sz="1500" i="0" b="0">
+              <a:rPr sz="1100" i="0" b="0">
+                <a:solidFill>
+                  <a:srgbClr val="D4D4D4"/>
+                </a:solidFill>
+                <a:latin typeface="Consolas"/>
+              </a:rPr>
+              <a:t> </a:t>
+            </a:r>
+            <a:r>
+              <a:rPr sz="1100" i="0" b="0">
                 <a:solidFill>
                   <a:srgbClr val="D4D4D4"/>
                 </a:solidFill>
@@ -5252,16 +5252,16 @@
               <a:t>autenticado</a:t>
             </a:r>
             <a:r>
-              <a:rPr sz="1500" i="0" b="0">
-                <a:solidFill>
-                  <a:srgbClr val="D4D4D4"/>
-                </a:solidFill>
-                <a:latin typeface="Consolas"/>
-              </a:rPr>
-              <a:t> </a:t>
-            </a:r>
-            <a:r>
-              <a:rPr sz="1500" i="0" b="0">
+              <a:rPr sz="1100" i="0" b="0">
+                <a:solidFill>
+                  <a:srgbClr val="D4D4D4"/>
+                </a:solidFill>
+                <a:latin typeface="Consolas"/>
+              </a:rPr>
+              <a:t> </a:t>
+            </a:r>
+            <a:r>
+              <a:rPr sz="1100" i="0" b="0">
                 <a:solidFill>
                   <a:srgbClr val="D4D4D4"/>
                 </a:solidFill>
@@ -5270,16 +5270,16 @@
               <a:t>y</a:t>
             </a:r>
             <a:r>
-              <a:rPr sz="1500" i="0" b="0">
-                <a:solidFill>
-                  <a:srgbClr val="D4D4D4"/>
-                </a:solidFill>
-                <a:latin typeface="Consolas"/>
-              </a:rPr>
-              <a:t> </a:t>
-            </a:r>
-            <a:r>
-              <a:rPr sz="1500" i="0" b="0">
+              <a:rPr sz="1100" i="0" b="0">
+                <a:solidFill>
+                  <a:srgbClr val="D4D4D4"/>
+                </a:solidFill>
+                <a:latin typeface="Consolas"/>
+              </a:rPr>
+              <a:t> </a:t>
+            </a:r>
+            <a:r>
+              <a:rPr sz="1100" i="0" b="0">
                 <a:solidFill>
                   <a:srgbClr val="D4D4D4"/>
                 </a:solidFill>
@@ -5288,16 +5288,16 @@
               <a:t>la</a:t>
             </a:r>
             <a:r>
-              <a:rPr sz="1500" i="0" b="0">
-                <a:solidFill>
-                  <a:srgbClr val="D4D4D4"/>
-                </a:solidFill>
-                <a:latin typeface="Consolas"/>
-              </a:rPr>
-              <a:t> </a:t>
-            </a:r>
-            <a:r>
-              <a:rPr sz="1500" i="0" b="0">
+              <a:rPr sz="1100" i="0" b="0">
+                <a:solidFill>
+                  <a:srgbClr val="D4D4D4"/>
+                </a:solidFill>
+                <a:latin typeface="Consolas"/>
+              </a:rPr>
+              <a:t> </a:t>
+            </a:r>
+            <a:r>
+              <a:rPr sz="1100" i="0" b="0">
                 <a:solidFill>
                   <a:srgbClr val="D4D4D4"/>
                 </a:solidFill>
@@ -5306,16 +5306,16 @@
               <a:t>mascota</a:t>
             </a:r>
             <a:r>
-              <a:rPr sz="1500" i="0" b="0">
-                <a:solidFill>
-                  <a:srgbClr val="D4D4D4"/>
-                </a:solidFill>
-                <a:latin typeface="Consolas"/>
-              </a:rPr>
-              <a:t> </a:t>
-            </a:r>
-            <a:r>
-              <a:rPr sz="1500" i="0" b="0">
+              <a:rPr sz="1100" i="0" b="0">
+                <a:solidFill>
+                  <a:srgbClr val="D4D4D4"/>
+                </a:solidFill>
+                <a:latin typeface="Consolas"/>
+              </a:rPr>
+              <a:t> </a:t>
+            </a:r>
+            <a:r>
+              <a:rPr sz="1100" i="0" b="0">
                 <a:solidFill>
                   <a:srgbClr val="D4D4D4"/>
                 </a:solidFill>
@@ -5324,16 +5324,16 @@
               <a:t>existe</a:t>
             </a:r>
             <a:r>
-              <a:rPr sz="1500" i="0" b="0">
-                <a:solidFill>
-                  <a:srgbClr val="D4D4D4"/>
-                </a:solidFill>
-                <a:latin typeface="Consolas"/>
-              </a:rPr>
-              <a:t> </a:t>
-            </a:r>
-            <a:r>
-              <a:rPr sz="1500" i="0" b="0">
+              <a:rPr sz="1100" i="0" b="0">
+                <a:solidFill>
+                  <a:srgbClr val="D4D4D4"/>
+                </a:solidFill>
+                <a:latin typeface="Consolas"/>
+              </a:rPr>
+              <a:t> </a:t>
+            </a:r>
+            <a:r>
+              <a:rPr sz="1100" i="0" b="0">
                 <a:solidFill>
                   <a:srgbClr val="D4D4D4"/>
                 </a:solidFill>
@@ -5342,16 +5342,16 @@
               <a:t>en</a:t>
             </a:r>
             <a:r>
-              <a:rPr sz="1500" i="0" b="0">
-                <a:solidFill>
-                  <a:srgbClr val="D4D4D4"/>
-                </a:solidFill>
-                <a:latin typeface="Consolas"/>
-              </a:rPr>
-              <a:t> </a:t>
-            </a:r>
-            <a:r>
-              <a:rPr sz="1500" i="0" b="0">
+              <a:rPr sz="1100" i="0" b="0">
+                <a:solidFill>
+                  <a:srgbClr val="D4D4D4"/>
+                </a:solidFill>
+                <a:latin typeface="Consolas"/>
+              </a:rPr>
+              <a:t> </a:t>
+            </a:r>
+            <a:r>
+              <a:rPr sz="1100" i="0" b="0">
                 <a:solidFill>
                   <a:srgbClr val="D4D4D4"/>
                 </a:solidFill>
@@ -5360,16 +5360,16 @@
               <a:t>el</a:t>
             </a:r>
             <a:r>
-              <a:rPr sz="1500" i="0" b="0">
-                <a:solidFill>
-                  <a:srgbClr val="D4D4D4"/>
-                </a:solidFill>
-                <a:latin typeface="Consolas"/>
-              </a:rPr>
-              <a:t> </a:t>
-            </a:r>
-            <a:r>
-              <a:rPr sz="1500" i="0" b="0">
+              <a:rPr sz="1100" i="0" b="0">
+                <a:solidFill>
+                  <a:srgbClr val="D4D4D4"/>
+                </a:solidFill>
+                <a:latin typeface="Consolas"/>
+              </a:rPr>
+              <a:t> </a:t>
+            </a:r>
+            <a:r>
+              <a:rPr sz="1100" i="0" b="0">
                 <a:solidFill>
                   <a:srgbClr val="D4D4D4"/>
                 </a:solidFill>
@@ -5378,7 +5378,7 @@
               <a:t>sistema</a:t>
             </a:r>
             <a:r>
-              <a:rPr sz="1500" i="0" b="0">
+              <a:rPr sz="1100" i="0" b="0">
                 <a:solidFill>
                   <a:srgbClr val="D4D4D4"/>
                 </a:solidFill>
@@ -5390,11 +5390,11 @@
           <a:p>
             <a:pPr>
               <a:spcAft>
-                <a:spcPts val="321"/>
+                <a:spcPts val="235"/>
               </a:spcAft>
             </a:pPr>
             <a:r>
-              <a:rPr sz="1500" i="0" b="0">
+              <a:rPr sz="1100" i="0" b="0">
                 <a:solidFill>
                   <a:srgbClr val="DCDCAA"/>
                 </a:solidFill>
@@ -5403,7 +5403,7 @@
               <a:t>Postcondicion</a:t>
             </a:r>
             <a:r>
-              <a:rPr sz="1500" i="0" b="0">
+              <a:rPr sz="1100" i="0" b="0">
                 <a:solidFill>
                   <a:srgbClr val="D4D4D4"/>
                 </a:solidFill>
@@ -5412,7 +5412,7 @@
               <a:t> (</a:t>
             </a:r>
             <a:r>
-              <a:rPr sz="1500" i="0" b="0">
+              <a:rPr sz="1100" i="0" b="0">
                 <a:solidFill>
                   <a:srgbClr val="D4D4D4"/>
                 </a:solidFill>
@@ -5421,7 +5421,7 @@
               <a:t>exito</a:t>
             </a:r>
             <a:r>
-              <a:rPr sz="1500" i="0" b="0">
+              <a:rPr sz="1100" i="0" b="0">
                 <a:solidFill>
                   <a:srgbClr val="D4D4D4"/>
                 </a:solidFill>
@@ -5430,7 +5430,7 @@
               <a:t>): </a:t>
             </a:r>
             <a:r>
-              <a:rPr sz="1500" i="0" b="0">
+              <a:rPr sz="1100" i="0" b="0">
                 <a:solidFill>
                   <a:srgbClr val="D4D4D4"/>
                 </a:solidFill>
@@ -5439,16 +5439,16 @@
               <a:t>el</a:t>
             </a:r>
             <a:r>
-              <a:rPr sz="1500" i="0" b="0">
-                <a:solidFill>
-                  <a:srgbClr val="D4D4D4"/>
-                </a:solidFill>
-                <a:latin typeface="Consolas"/>
-              </a:rPr>
-              <a:t> </a:t>
-            </a:r>
-            <a:r>
-              <a:rPr sz="1500" i="0" b="0">
+              <a:rPr sz="1100" i="0" b="0">
+                <a:solidFill>
+                  <a:srgbClr val="D4D4D4"/>
+                </a:solidFill>
+                <a:latin typeface="Consolas"/>
+              </a:rPr>
+              <a:t> </a:t>
+            </a:r>
+            <a:r>
+              <a:rPr sz="1100" i="0" b="0">
                 <a:solidFill>
                   <a:srgbClr val="D4D4D4"/>
                 </a:solidFill>
@@ -5457,16 +5457,16 @@
               <a:t>expediente</a:t>
             </a:r>
             <a:r>
-              <a:rPr sz="1500" i="0" b="0">
-                <a:solidFill>
-                  <a:srgbClr val="D4D4D4"/>
-                </a:solidFill>
-                <a:latin typeface="Consolas"/>
-              </a:rPr>
-              <a:t> </a:t>
-            </a:r>
-            <a:r>
-              <a:rPr sz="1500" i="0" b="0">
+              <a:rPr sz="1100" i="0" b="0">
+                <a:solidFill>
+                  <a:srgbClr val="D4D4D4"/>
+                </a:solidFill>
+                <a:latin typeface="Consolas"/>
+              </a:rPr>
+              <a:t> </a:t>
+            </a:r>
+            <a:r>
+              <a:rPr sz="1100" i="0" b="0">
                 <a:solidFill>
                   <a:srgbClr val="D4D4D4"/>
                 </a:solidFill>
@@ -5475,16 +5475,16 @@
               <a:t>queda</a:t>
             </a:r>
             <a:r>
-              <a:rPr sz="1500" i="0" b="0">
-                <a:solidFill>
-                  <a:srgbClr val="D4D4D4"/>
-                </a:solidFill>
-                <a:latin typeface="Consolas"/>
-              </a:rPr>
-              <a:t> </a:t>
-            </a:r>
-            <a:r>
-              <a:rPr sz="1500" i="0" b="0">
+              <a:rPr sz="1100" i="0" b="0">
+                <a:solidFill>
+                  <a:srgbClr val="D4D4D4"/>
+                </a:solidFill>
+                <a:latin typeface="Consolas"/>
+              </a:rPr>
+              <a:t> </a:t>
+            </a:r>
+            <a:r>
+              <a:rPr sz="1100" i="0" b="0">
                 <a:solidFill>
                   <a:srgbClr val="D4D4D4"/>
                 </a:solidFill>
@@ -5493,16 +5493,16 @@
               <a:t>desplegado</a:t>
             </a:r>
             <a:r>
-              <a:rPr sz="1500" i="0" b="0">
-                <a:solidFill>
-                  <a:srgbClr val="D4D4D4"/>
-                </a:solidFill>
-                <a:latin typeface="Consolas"/>
-              </a:rPr>
-              <a:t> </a:t>
-            </a:r>
-            <a:r>
-              <a:rPr sz="1500" i="0" b="0">
+              <a:rPr sz="1100" i="0" b="0">
+                <a:solidFill>
+                  <a:srgbClr val="D4D4D4"/>
+                </a:solidFill>
+                <a:latin typeface="Consolas"/>
+              </a:rPr>
+              <a:t> </a:t>
+            </a:r>
+            <a:r>
+              <a:rPr sz="1100" i="0" b="0">
                 <a:solidFill>
                   <a:srgbClr val="D4D4D4"/>
                 </a:solidFill>
@@ -5511,16 +5511,16 @@
               <a:t>y</a:t>
             </a:r>
             <a:r>
-              <a:rPr sz="1500" i="0" b="0">
-                <a:solidFill>
-                  <a:srgbClr val="D4D4D4"/>
-                </a:solidFill>
-                <a:latin typeface="Consolas"/>
-              </a:rPr>
-              <a:t> </a:t>
-            </a:r>
-            <a:r>
-              <a:rPr sz="1500" i="0" b="0">
+              <a:rPr sz="1100" i="0" b="0">
+                <a:solidFill>
+                  <a:srgbClr val="D4D4D4"/>
+                </a:solidFill>
+                <a:latin typeface="Consolas"/>
+              </a:rPr>
+              <a:t> </a:t>
+            </a:r>
+            <a:r>
+              <a:rPr sz="1100" i="0" b="0">
                 <a:solidFill>
                   <a:srgbClr val="D4D4D4"/>
                 </a:solidFill>
@@ -5529,16 +5529,16 @@
               <a:t>la</a:t>
             </a:r>
             <a:r>
-              <a:rPr sz="1500" i="0" b="0">
-                <a:solidFill>
-                  <a:srgbClr val="D4D4D4"/>
-                </a:solidFill>
-                <a:latin typeface="Consolas"/>
-              </a:rPr>
-              <a:t> </a:t>
-            </a:r>
-            <a:r>
-              <a:rPr sz="1500" i="0" b="0">
+              <a:rPr sz="1100" i="0" b="0">
+                <a:solidFill>
+                  <a:srgbClr val="D4D4D4"/>
+                </a:solidFill>
+                <a:latin typeface="Consolas"/>
+              </a:rPr>
+              <a:t> </a:t>
+            </a:r>
+            <a:r>
+              <a:rPr sz="1100" i="0" b="0">
                 <a:solidFill>
                   <a:srgbClr val="D4D4D4"/>
                 </a:solidFill>
@@ -5547,16 +5547,16 @@
               <a:t>consulta</a:t>
             </a:r>
             <a:r>
-              <a:rPr sz="1500" i="0" b="0">
-                <a:solidFill>
-                  <a:srgbClr val="D4D4D4"/>
-                </a:solidFill>
-                <a:latin typeface="Consolas"/>
-              </a:rPr>
-              <a:t> </a:t>
-            </a:r>
-            <a:r>
-              <a:rPr sz="1500" i="0" b="0">
+              <a:rPr sz="1100" i="0" b="0">
+                <a:solidFill>
+                  <a:srgbClr val="D4D4D4"/>
+                </a:solidFill>
+                <a:latin typeface="Consolas"/>
+              </a:rPr>
+              <a:t> </a:t>
+            </a:r>
+            <a:r>
+              <a:rPr sz="1100" i="0" b="0">
                 <a:solidFill>
                   <a:srgbClr val="D4D4D4"/>
                 </a:solidFill>
@@ -5565,16 +5565,16 @@
               <a:t>queda</a:t>
             </a:r>
             <a:r>
-              <a:rPr sz="1500" i="0" b="0">
-                <a:solidFill>
-                  <a:srgbClr val="D4D4D4"/>
-                </a:solidFill>
-                <a:latin typeface="Consolas"/>
-              </a:rPr>
-              <a:t> </a:t>
-            </a:r>
-            <a:r>
-              <a:rPr sz="1500" i="0" b="0">
+              <a:rPr sz="1100" i="0" b="0">
+                <a:solidFill>
+                  <a:srgbClr val="D4D4D4"/>
+                </a:solidFill>
+                <a:latin typeface="Consolas"/>
+              </a:rPr>
+              <a:t> </a:t>
+            </a:r>
+            <a:r>
+              <a:rPr sz="1100" i="0" b="0">
                 <a:solidFill>
                   <a:srgbClr val="D4D4D4"/>
                 </a:solidFill>
@@ -5583,16 +5583,16 @@
               <a:t>en</a:t>
             </a:r>
             <a:r>
-              <a:rPr sz="1500" i="0" b="0">
-                <a:solidFill>
-                  <a:srgbClr val="D4D4D4"/>
-                </a:solidFill>
-                <a:latin typeface="Consolas"/>
-              </a:rPr>
-              <a:t> </a:t>
-            </a:r>
-            <a:r>
-              <a:rPr sz="1500" i="0" b="0">
+              <a:rPr sz="1100" i="0" b="0">
+                <a:solidFill>
+                  <a:srgbClr val="D4D4D4"/>
+                </a:solidFill>
+                <a:latin typeface="Consolas"/>
+              </a:rPr>
+              <a:t> </a:t>
+            </a:r>
+            <a:r>
+              <a:rPr sz="1100" i="0" b="0">
                 <a:solidFill>
                   <a:srgbClr val="D4D4D4"/>
                 </a:solidFill>
@@ -5601,7 +5601,7 @@
               <a:t>bitacora</a:t>
             </a:r>
             <a:r>
-              <a:rPr sz="1500" i="0" b="0">
+              <a:rPr sz="1100" i="0" b="0">
                 <a:solidFill>
                   <a:srgbClr val="D4D4D4"/>
                 </a:solidFill>
@@ -5610,7 +5610,7 @@
               <a:t>; </a:t>
             </a:r>
             <a:r>
-              <a:rPr sz="1500" i="0" b="0">
+              <a:rPr sz="1100" i="0" b="0">
                 <a:solidFill>
                   <a:srgbClr val="D4D4D4"/>
                 </a:solidFill>
@@ -5619,16 +5619,16 @@
               <a:t>no</a:t>
             </a:r>
             <a:r>
-              <a:rPr sz="1500" i="0" b="0">
-                <a:solidFill>
-                  <a:srgbClr val="D4D4D4"/>
-                </a:solidFill>
-                <a:latin typeface="Consolas"/>
-              </a:rPr>
-              <a:t> </a:t>
-            </a:r>
-            <a:r>
-              <a:rPr sz="1500" i="0" b="0">
+              <a:rPr sz="1100" i="0" b="0">
+                <a:solidFill>
+                  <a:srgbClr val="D4D4D4"/>
+                </a:solidFill>
+                <a:latin typeface="Consolas"/>
+              </a:rPr>
+              <a:t> </a:t>
+            </a:r>
+            <a:r>
+              <a:rPr sz="1100" i="0" b="0">
                 <a:solidFill>
                   <a:srgbClr val="D4D4D4"/>
                 </a:solidFill>
@@ -5637,16 +5637,16 @@
               <a:t>se</a:t>
             </a:r>
             <a:r>
-              <a:rPr sz="1500" i="0" b="0">
-                <a:solidFill>
-                  <a:srgbClr val="D4D4D4"/>
-                </a:solidFill>
-                <a:latin typeface="Consolas"/>
-              </a:rPr>
-              <a:t> </a:t>
-            </a:r>
-            <a:r>
-              <a:rPr sz="1500" i="0" b="0">
+              <a:rPr sz="1100" i="0" b="0">
+                <a:solidFill>
+                  <a:srgbClr val="D4D4D4"/>
+                </a:solidFill>
+                <a:latin typeface="Consolas"/>
+              </a:rPr>
+              <a:t> </a:t>
+            </a:r>
+            <a:r>
+              <a:rPr sz="1100" i="0" b="0">
                 <a:solidFill>
                   <a:srgbClr val="D4D4D4"/>
                 </a:solidFill>
@@ -5655,16 +5655,16 @@
               <a:t>modifica</a:t>
             </a:r>
             <a:r>
-              <a:rPr sz="1500" i="0" b="0">
-                <a:solidFill>
-                  <a:srgbClr val="D4D4D4"/>
-                </a:solidFill>
-                <a:latin typeface="Consolas"/>
-              </a:rPr>
-              <a:t> </a:t>
-            </a:r>
-            <a:r>
-              <a:rPr sz="1500" i="0" b="0">
+              <a:rPr sz="1100" i="0" b="0">
+                <a:solidFill>
+                  <a:srgbClr val="D4D4D4"/>
+                </a:solidFill>
+                <a:latin typeface="Consolas"/>
+              </a:rPr>
+              <a:t> </a:t>
+            </a:r>
+            <a:r>
+              <a:rPr sz="1100" i="0" b="0">
                 <a:solidFill>
                   <a:srgbClr val="D4D4D4"/>
                 </a:solidFill>
@@ -5673,16 +5673,16 @@
               <a:t>ningun</a:t>
             </a:r>
             <a:r>
-              <a:rPr sz="1500" i="0" b="0">
-                <a:solidFill>
-                  <a:srgbClr val="D4D4D4"/>
-                </a:solidFill>
-                <a:latin typeface="Consolas"/>
-              </a:rPr>
-              <a:t> </a:t>
-            </a:r>
-            <a:r>
-              <a:rPr sz="1500" i="0" b="0">
+              <a:rPr sz="1100" i="0" b="0">
+                <a:solidFill>
+                  <a:srgbClr val="D4D4D4"/>
+                </a:solidFill>
+                <a:latin typeface="Consolas"/>
+              </a:rPr>
+              <a:t> </a:t>
+            </a:r>
+            <a:r>
+              <a:rPr sz="1100" i="0" b="0">
                 <a:solidFill>
                   <a:srgbClr val="D4D4D4"/>
                 </a:solidFill>
@@ -5691,16 +5691,16 @@
               <a:t>dato</a:t>
             </a:r>
             <a:r>
-              <a:rPr sz="1500" i="0" b="0">
-                <a:solidFill>
-                  <a:srgbClr val="D4D4D4"/>
-                </a:solidFill>
-                <a:latin typeface="Consolas"/>
-              </a:rPr>
-              <a:t> </a:t>
-            </a:r>
-            <a:r>
-              <a:rPr sz="1500" i="0" b="0">
+              <a:rPr sz="1100" i="0" b="0">
+                <a:solidFill>
+                  <a:srgbClr val="D4D4D4"/>
+                </a:solidFill>
+                <a:latin typeface="Consolas"/>
+              </a:rPr>
+              <a:t> </a:t>
+            </a:r>
+            <a:r>
+              <a:rPr sz="1100" i="0" b="0">
                 <a:solidFill>
                   <a:srgbClr val="D4D4D4"/>
                 </a:solidFill>
@@ -5709,7 +5709,7 @@
               <a:t>clinico</a:t>
             </a:r>
             <a:r>
-              <a:rPr sz="1500" i="0" b="0">
+              <a:rPr sz="1100" i="0" b="0">
                 <a:solidFill>
                   <a:srgbClr val="D4D4D4"/>
                 </a:solidFill>
@@ -5721,11 +5721,11 @@
           <a:p>
             <a:pPr>
               <a:spcAft>
-                <a:spcPts val="321"/>
+                <a:spcPts val="235"/>
               </a:spcAft>
             </a:pPr>
             <a:r>
-              <a:rPr sz="1500" i="0" b="0">
+              <a:rPr sz="1100" i="0" b="0">
                 <a:solidFill>
                   <a:srgbClr val="D4D4D4"/>
                 </a:solidFill>
@@ -5734,16 +5734,16 @@
               <a:t>Flujo</a:t>
             </a:r>
             <a:r>
-              <a:rPr sz="1500" i="0" b="0">
-                <a:solidFill>
-                  <a:srgbClr val="D4D4D4"/>
-                </a:solidFill>
-                <a:latin typeface="Consolas"/>
-              </a:rPr>
-              <a:t> </a:t>
-            </a:r>
-            <a:r>
-              <a:rPr sz="1500" i="0" b="0">
+              <a:rPr sz="1100" i="0" b="0">
+                <a:solidFill>
+                  <a:srgbClr val="D4D4D4"/>
+                </a:solidFill>
+                <a:latin typeface="Consolas"/>
+              </a:rPr>
+              <a:t> </a:t>
+            </a:r>
+            <a:r>
+              <a:rPr sz="1100" i="0" b="0">
                 <a:solidFill>
                   <a:srgbClr val="D4D4D4"/>
                 </a:solidFill>
@@ -5752,7 +5752,7 @@
               <a:t>principal</a:t>
             </a:r>
             <a:r>
-              <a:rPr sz="1500" i="0" b="0">
+              <a:rPr sz="1100" i="0" b="0">
                 <a:solidFill>
                   <a:srgbClr val="D4D4D4"/>
                 </a:solidFill>
@@ -5764,11 +5764,11 @@
           <a:p>
             <a:pPr>
               <a:spcAft>
-                <a:spcPts val="321"/>
+                <a:spcPts val="235"/>
               </a:spcAft>
             </a:pPr>
             <a:r>
-              <a:rPr sz="1500" i="0" b="0">
+              <a:rPr sz="1100" i="0" b="0">
                 <a:solidFill>
                   <a:srgbClr val="D4D4D4"/>
                 </a:solidFill>
@@ -5777,7 +5777,7 @@
               <a:t>  </a:t>
             </a:r>
             <a:r>
-              <a:rPr sz="1500" i="0" b="0">
+              <a:rPr sz="1100" i="0" b="0">
                 <a:solidFill>
                   <a:srgbClr val="B5CEA8"/>
                 </a:solidFill>
@@ -5786,7 +5786,7 @@
               <a:t>1</a:t>
             </a:r>
             <a:r>
-              <a:rPr sz="1500" i="0" b="0">
+              <a:rPr sz="1100" i="0" b="0">
                 <a:solidFill>
                   <a:srgbClr val="D4D4D4"/>
                 </a:solidFill>
@@ -5795,7 +5795,7 @@
               <a:t>. </a:t>
             </a:r>
             <a:r>
-              <a:rPr sz="1500" i="0" b="0">
+              <a:rPr sz="1100" i="0" b="0">
                 <a:solidFill>
                   <a:srgbClr val="D4D4D4"/>
                 </a:solidFill>
@@ -5804,16 +5804,16 @@
               <a:t>El</a:t>
             </a:r>
             <a:r>
-              <a:rPr sz="1500" i="0" b="0">
-                <a:solidFill>
-                  <a:srgbClr val="D4D4D4"/>
-                </a:solidFill>
-                <a:latin typeface="Consolas"/>
-              </a:rPr>
-              <a:t> </a:t>
-            </a:r>
-            <a:r>
-              <a:rPr sz="1500" i="0" b="0">
+              <a:rPr sz="1100" i="0" b="0">
+                <a:solidFill>
+                  <a:srgbClr val="D4D4D4"/>
+                </a:solidFill>
+                <a:latin typeface="Consolas"/>
+              </a:rPr>
+              <a:t> </a:t>
+            </a:r>
+            <a:r>
+              <a:rPr sz="1100" i="0" b="0">
                 <a:solidFill>
                   <a:srgbClr val="D4D4D4"/>
                 </a:solidFill>
@@ -5822,16 +5822,16 @@
               <a:t>veterinario</a:t>
             </a:r>
             <a:r>
-              <a:rPr sz="1500" i="0" b="0">
-                <a:solidFill>
-                  <a:srgbClr val="D4D4D4"/>
-                </a:solidFill>
-                <a:latin typeface="Consolas"/>
-              </a:rPr>
-              <a:t> </a:t>
-            </a:r>
-            <a:r>
-              <a:rPr sz="1500" i="0" b="0">
+              <a:rPr sz="1100" i="0" b="0">
+                <a:solidFill>
+                  <a:srgbClr val="D4D4D4"/>
+                </a:solidFill>
+                <a:latin typeface="Consolas"/>
+              </a:rPr>
+              <a:t> </a:t>
+            </a:r>
+            <a:r>
+              <a:rPr sz="1100" i="0" b="0">
                 <a:solidFill>
                   <a:srgbClr val="D4D4D4"/>
                 </a:solidFill>
@@ -5840,16 +5840,16 @@
               <a:t>digita</a:t>
             </a:r>
             <a:r>
-              <a:rPr sz="1500" i="0" b="0">
-                <a:solidFill>
-                  <a:srgbClr val="D4D4D4"/>
-                </a:solidFill>
-                <a:latin typeface="Consolas"/>
-              </a:rPr>
-              <a:t> </a:t>
-            </a:r>
-            <a:r>
-              <a:rPr sz="1500" i="0" b="0">
+              <a:rPr sz="1100" i="0" b="0">
+                <a:solidFill>
+                  <a:srgbClr val="D4D4D4"/>
+                </a:solidFill>
+                <a:latin typeface="Consolas"/>
+              </a:rPr>
+              <a:t> </a:t>
+            </a:r>
+            <a:r>
+              <a:rPr sz="1100" i="0" b="0">
                 <a:solidFill>
                   <a:srgbClr val="D4D4D4"/>
                 </a:solidFill>
@@ -5858,7 +5858,7 @@
               <a:t>codigo</a:t>
             </a:r>
             <a:r>
-              <a:rPr sz="1500" i="0" b="0">
+              <a:rPr sz="1100" i="0" b="0">
                 <a:solidFill>
                   <a:srgbClr val="D4D4D4"/>
                 </a:solidFill>
@@ -5867,7 +5867,7 @@
               <a:t>, </a:t>
             </a:r>
             <a:r>
-              <a:rPr sz="1500" i="0" b="0">
+              <a:rPr sz="1100" i="0" b="0">
                 <a:solidFill>
                   <a:srgbClr val="D4D4D4"/>
                 </a:solidFill>
@@ -5876,16 +5876,16 @@
               <a:t>nombre</a:t>
             </a:r>
             <a:r>
-              <a:rPr sz="1500" i="0" b="0">
-                <a:solidFill>
-                  <a:srgbClr val="D4D4D4"/>
-                </a:solidFill>
-                <a:latin typeface="Consolas"/>
-              </a:rPr>
-              <a:t> </a:t>
-            </a:r>
-            <a:r>
-              <a:rPr sz="1500" i="0" b="0">
+              <a:rPr sz="1100" i="0" b="0">
+                <a:solidFill>
+                  <a:srgbClr val="D4D4D4"/>
+                </a:solidFill>
+                <a:latin typeface="Consolas"/>
+              </a:rPr>
+              <a:t> </a:t>
+            </a:r>
+            <a:r>
+              <a:rPr sz="1100" i="0" b="0">
                 <a:solidFill>
                   <a:srgbClr val="D4D4D4"/>
                 </a:solidFill>
@@ -5894,16 +5894,16 @@
               <a:t>de</a:t>
             </a:r>
             <a:r>
-              <a:rPr sz="1500" i="0" b="0">
-                <a:solidFill>
-                  <a:srgbClr val="D4D4D4"/>
-                </a:solidFill>
-                <a:latin typeface="Consolas"/>
-              </a:rPr>
-              <a:t> </a:t>
-            </a:r>
-            <a:r>
-              <a:rPr sz="1500" i="0" b="0">
+              <a:rPr sz="1100" i="0" b="0">
+                <a:solidFill>
+                  <a:srgbClr val="D4D4D4"/>
+                </a:solidFill>
+                <a:latin typeface="Consolas"/>
+              </a:rPr>
+              <a:t> </a:t>
+            </a:r>
+            <a:r>
+              <a:rPr sz="1100" i="0" b="0">
                 <a:solidFill>
                   <a:srgbClr val="D4D4D4"/>
                 </a:solidFill>
@@ -5912,16 +5912,16 @@
               <a:t>mascota</a:t>
             </a:r>
             <a:r>
-              <a:rPr sz="1500" i="0" b="0">
-                <a:solidFill>
-                  <a:srgbClr val="D4D4D4"/>
-                </a:solidFill>
-                <a:latin typeface="Consolas"/>
-              </a:rPr>
-              <a:t> </a:t>
-            </a:r>
-            <a:r>
-              <a:rPr sz="1500" i="0" b="0">
+              <a:rPr sz="1100" i="0" b="0">
+                <a:solidFill>
+                  <a:srgbClr val="D4D4D4"/>
+                </a:solidFill>
+                <a:latin typeface="Consolas"/>
+              </a:rPr>
+              <a:t> </a:t>
+            </a:r>
+            <a:r>
+              <a:rPr sz="1100" i="0" b="0">
                 <a:solidFill>
                   <a:srgbClr val="D4D4D4"/>
                 </a:solidFill>
@@ -5930,16 +5930,16 @@
               <a:t>o</a:t>
             </a:r>
             <a:r>
-              <a:rPr sz="1500" i="0" b="0">
-                <a:solidFill>
-                  <a:srgbClr val="D4D4D4"/>
-                </a:solidFill>
-                <a:latin typeface="Consolas"/>
-              </a:rPr>
-              <a:t> </a:t>
-            </a:r>
-            <a:r>
-              <a:rPr sz="1500" i="0" b="0">
+              <a:rPr sz="1100" i="0" b="0">
+                <a:solidFill>
+                  <a:srgbClr val="D4D4D4"/>
+                </a:solidFill>
+                <a:latin typeface="Consolas"/>
+              </a:rPr>
+              <a:t> </a:t>
+            </a:r>
+            <a:r>
+              <a:rPr sz="1100" i="0" b="0">
                 <a:solidFill>
                   <a:srgbClr val="D4D4D4"/>
                 </a:solidFill>
@@ -5948,16 +5948,16 @@
               <a:t>documento</a:t>
             </a:r>
             <a:r>
-              <a:rPr sz="1500" i="0" b="0">
-                <a:solidFill>
-                  <a:srgbClr val="D4D4D4"/>
-                </a:solidFill>
-                <a:latin typeface="Consolas"/>
-              </a:rPr>
-              <a:t> </a:t>
-            </a:r>
-            <a:r>
-              <a:rPr sz="1500" i="0" b="0">
+              <a:rPr sz="1100" i="0" b="0">
+                <a:solidFill>
+                  <a:srgbClr val="D4D4D4"/>
+                </a:solidFill>
+                <a:latin typeface="Consolas"/>
+              </a:rPr>
+              <a:t> </a:t>
+            </a:r>
+            <a:r>
+              <a:rPr sz="1100" i="0" b="0">
                 <a:solidFill>
                   <a:srgbClr val="D4D4D4"/>
                 </a:solidFill>
@@ -5966,16 +5966,16 @@
               <a:t>del</a:t>
             </a:r>
             <a:r>
-              <a:rPr sz="1500" i="0" b="0">
-                <a:solidFill>
-                  <a:srgbClr val="D4D4D4"/>
-                </a:solidFill>
-                <a:latin typeface="Consolas"/>
-              </a:rPr>
-              <a:t> </a:t>
-            </a:r>
-            <a:r>
-              <a:rPr sz="1500" i="0" b="0">
+              <a:rPr sz="1100" i="0" b="0">
+                <a:solidFill>
+                  <a:srgbClr val="D4D4D4"/>
+                </a:solidFill>
+                <a:latin typeface="Consolas"/>
+              </a:rPr>
+              <a:t> </a:t>
+            </a:r>
+            <a:r>
+              <a:rPr sz="1100" i="0" b="0">
                 <a:solidFill>
                   <a:srgbClr val="D4D4D4"/>
                 </a:solidFill>
@@ -5984,7 +5984,7 @@
               <a:t>propietario</a:t>
             </a:r>
             <a:r>
-              <a:rPr sz="1500" i="0" b="0">
+              <a:rPr sz="1100" i="0" b="0">
                 <a:solidFill>
                   <a:srgbClr val="D4D4D4"/>
                 </a:solidFill>
@@ -5996,11 +5996,11 @@
           <a:p>
             <a:pPr>
               <a:spcAft>
-                <a:spcPts val="321"/>
+                <a:spcPts val="235"/>
               </a:spcAft>
             </a:pPr>
             <a:r>
-              <a:rPr sz="1500" i="0" b="0">
+              <a:rPr sz="1100" i="0" b="0">
                 <a:solidFill>
                   <a:srgbClr val="D4D4D4"/>
                 </a:solidFill>
@@ -6009,7 +6009,7 @@
               <a:t>  </a:t>
             </a:r>
             <a:r>
-              <a:rPr sz="1500" i="0" b="0">
+              <a:rPr sz="1100" i="0" b="0">
                 <a:solidFill>
                   <a:srgbClr val="B5CEA8"/>
                 </a:solidFill>
@@ -6018,7 +6018,7 @@
               <a:t>2</a:t>
             </a:r>
             <a:r>
-              <a:rPr sz="1500" i="0" b="0">
+              <a:rPr sz="1100" i="0" b="0">
                 <a:solidFill>
                   <a:srgbClr val="D4D4D4"/>
                 </a:solidFill>
@@ -6027,7 +6027,7 @@
               <a:t>. </a:t>
             </a:r>
             <a:r>
-              <a:rPr sz="1500" i="0" b="0">
+              <a:rPr sz="1100" i="0" b="0">
                 <a:solidFill>
                   <a:srgbClr val="D4D4D4"/>
                 </a:solidFill>
@@ -6036,16 +6036,16 @@
               <a:t>El</a:t>
             </a:r>
             <a:r>
-              <a:rPr sz="1500" i="0" b="0">
-                <a:solidFill>
-                  <a:srgbClr val="D4D4D4"/>
-                </a:solidFill>
-                <a:latin typeface="Consolas"/>
-              </a:rPr>
-              <a:t> </a:t>
-            </a:r>
-            <a:r>
-              <a:rPr sz="1500" i="0" b="0">
+              <a:rPr sz="1100" i="0" b="0">
+                <a:solidFill>
+                  <a:srgbClr val="D4D4D4"/>
+                </a:solidFill>
+                <a:latin typeface="Consolas"/>
+              </a:rPr>
+              <a:t> </a:t>
+            </a:r>
+            <a:r>
+              <a:rPr sz="1100" i="0" b="0">
                 <a:solidFill>
                   <a:srgbClr val="D4D4D4"/>
                 </a:solidFill>
@@ -6054,16 +6054,16 @@
               <a:t>sistema</a:t>
             </a:r>
             <a:r>
-              <a:rPr sz="1500" i="0" b="0">
-                <a:solidFill>
-                  <a:srgbClr val="D4D4D4"/>
-                </a:solidFill>
-                <a:latin typeface="Consolas"/>
-              </a:rPr>
-              <a:t> </a:t>
-            </a:r>
-            <a:r>
-              <a:rPr sz="1500" i="0" b="0">
+              <a:rPr sz="1100" i="0" b="0">
+                <a:solidFill>
+                  <a:srgbClr val="D4D4D4"/>
+                </a:solidFill>
+                <a:latin typeface="Consolas"/>
+              </a:rPr>
+              <a:t> </a:t>
+            </a:r>
+            <a:r>
+              <a:rPr sz="1100" i="0" b="0">
                 <a:solidFill>
                   <a:srgbClr val="D4D4D4"/>
                 </a:solidFill>
@@ -6072,16 +6072,16 @@
               <a:t>devuelve</a:t>
             </a:r>
             <a:r>
-              <a:rPr sz="1500" i="0" b="0">
-                <a:solidFill>
-                  <a:srgbClr val="D4D4D4"/>
-                </a:solidFill>
-                <a:latin typeface="Consolas"/>
-              </a:rPr>
-              <a:t> </a:t>
-            </a:r>
-            <a:r>
-              <a:rPr sz="1500" i="0" b="0">
+              <a:rPr sz="1100" i="0" b="0">
+                <a:solidFill>
+                  <a:srgbClr val="D4D4D4"/>
+                </a:solidFill>
+                <a:latin typeface="Consolas"/>
+              </a:rPr>
+              <a:t> </a:t>
+            </a:r>
+            <a:r>
+              <a:rPr sz="1100" i="0" b="0">
                 <a:solidFill>
                   <a:srgbClr val="D4D4D4"/>
                 </a:solidFill>
@@ -6090,16 +6090,16 @@
               <a:t>la</a:t>
             </a:r>
             <a:r>
-              <a:rPr sz="1500" i="0" b="0">
-                <a:solidFill>
-                  <a:srgbClr val="D4D4D4"/>
-                </a:solidFill>
-                <a:latin typeface="Consolas"/>
-              </a:rPr>
-              <a:t> </a:t>
-            </a:r>
-            <a:r>
-              <a:rPr sz="1500" i="0" b="0">
+              <a:rPr sz="1100" i="0" b="0">
+                <a:solidFill>
+                  <a:srgbClr val="D4D4D4"/>
+                </a:solidFill>
+                <a:latin typeface="Consolas"/>
+              </a:rPr>
+              <a:t> </a:t>
+            </a:r>
+            <a:r>
+              <a:rPr sz="1100" i="0" b="0">
                 <a:solidFill>
                   <a:srgbClr val="D4D4D4"/>
                 </a:solidFill>
@@ -6108,16 +6108,16 @@
               <a:t>lista</a:t>
             </a:r>
             <a:r>
-              <a:rPr sz="1500" i="0" b="0">
-                <a:solidFill>
-                  <a:srgbClr val="D4D4D4"/>
-                </a:solidFill>
-                <a:latin typeface="Consolas"/>
-              </a:rPr>
-              <a:t> </a:t>
-            </a:r>
-            <a:r>
-              <a:rPr sz="1500" i="0" b="0">
+              <a:rPr sz="1100" i="0" b="0">
+                <a:solidFill>
+                  <a:srgbClr val="D4D4D4"/>
+                </a:solidFill>
+                <a:latin typeface="Consolas"/>
+              </a:rPr>
+              <a:t> </a:t>
+            </a:r>
+            <a:r>
+              <a:rPr sz="1100" i="0" b="0">
                 <a:solidFill>
                   <a:srgbClr val="D4D4D4"/>
                 </a:solidFill>
@@ -6126,16 +6126,16 @@
               <a:t>de</a:t>
             </a:r>
             <a:r>
-              <a:rPr sz="1500" i="0" b="0">
-                <a:solidFill>
-                  <a:srgbClr val="D4D4D4"/>
-                </a:solidFill>
-                <a:latin typeface="Consolas"/>
-              </a:rPr>
-              <a:t> </a:t>
-            </a:r>
-            <a:r>
-              <a:rPr sz="1500" i="0" b="0">
+              <a:rPr sz="1100" i="0" b="0">
+                <a:solidFill>
+                  <a:srgbClr val="D4D4D4"/>
+                </a:solidFill>
+                <a:latin typeface="Consolas"/>
+              </a:rPr>
+              <a:t> </a:t>
+            </a:r>
+            <a:r>
+              <a:rPr sz="1100" i="0" b="0">
                 <a:solidFill>
                   <a:srgbClr val="D4D4D4"/>
                 </a:solidFill>
@@ -6144,16 +6144,16 @@
               <a:t>coincidencias</a:t>
             </a:r>
             <a:r>
-              <a:rPr sz="1500" i="0" b="0">
-                <a:solidFill>
-                  <a:srgbClr val="D4D4D4"/>
-                </a:solidFill>
-                <a:latin typeface="Consolas"/>
-              </a:rPr>
-              <a:t> </a:t>
-            </a:r>
-            <a:r>
-              <a:rPr sz="1500" i="0" b="0">
+              <a:rPr sz="1100" i="0" b="0">
+                <a:solidFill>
+                  <a:srgbClr val="D4D4D4"/>
+                </a:solidFill>
+                <a:latin typeface="Consolas"/>
+              </a:rPr>
+              <a:t> </a:t>
+            </a:r>
+            <a:r>
+              <a:rPr sz="1100" i="0" b="0">
                 <a:solidFill>
                   <a:srgbClr val="D4D4D4"/>
                 </a:solidFill>
@@ -6162,16 +6162,16 @@
               <a:t>en</a:t>
             </a:r>
             <a:r>
-              <a:rPr sz="1500" i="0" b="0">
-                <a:solidFill>
-                  <a:srgbClr val="D4D4D4"/>
-                </a:solidFill>
-                <a:latin typeface="Consolas"/>
-              </a:rPr>
-              <a:t> </a:t>
-            </a:r>
-            <a:r>
-              <a:rPr sz="1500" i="0" b="0">
+              <a:rPr sz="1100" i="0" b="0">
+                <a:solidFill>
+                  <a:srgbClr val="D4D4D4"/>
+                </a:solidFill>
+                <a:latin typeface="Consolas"/>
+              </a:rPr>
+              <a:t> </a:t>
+            </a:r>
+            <a:r>
+              <a:rPr sz="1100" i="0" b="0">
                 <a:solidFill>
                   <a:srgbClr val="D4D4D4"/>
                 </a:solidFill>
@@ -6180,16 +6180,16 @@
               <a:t>menos</a:t>
             </a:r>
             <a:r>
-              <a:rPr sz="1500" i="0" b="0">
-                <a:solidFill>
-                  <a:srgbClr val="D4D4D4"/>
-                </a:solidFill>
-                <a:latin typeface="Consolas"/>
-              </a:rPr>
-              <a:t> </a:t>
-            </a:r>
-            <a:r>
-              <a:rPr sz="1500" i="0" b="0">
+              <a:rPr sz="1100" i="0" b="0">
+                <a:solidFill>
+                  <a:srgbClr val="D4D4D4"/>
+                </a:solidFill>
+                <a:latin typeface="Consolas"/>
+              </a:rPr>
+              <a:t> </a:t>
+            </a:r>
+            <a:r>
+              <a:rPr sz="1100" i="0" b="0">
                 <a:solidFill>
                   <a:srgbClr val="D4D4D4"/>
                 </a:solidFill>
@@ -6198,16 +6198,16 @@
               <a:t>de</a:t>
             </a:r>
             <a:r>
-              <a:rPr sz="1500" i="0" b="0">
-                <a:solidFill>
-                  <a:srgbClr val="D4D4D4"/>
-                </a:solidFill>
-                <a:latin typeface="Consolas"/>
-              </a:rPr>
-              <a:t> </a:t>
-            </a:r>
-            <a:r>
-              <a:rPr sz="1500" i="0" b="0">
+              <a:rPr sz="1100" i="0" b="0">
+                <a:solidFill>
+                  <a:srgbClr val="D4D4D4"/>
+                </a:solidFill>
+                <a:latin typeface="Consolas"/>
+              </a:rPr>
+              <a:t> </a:t>
+            </a:r>
+            <a:r>
+              <a:rPr sz="1100" i="0" b="0">
                 <a:solidFill>
                   <a:srgbClr val="B5CEA8"/>
                 </a:solidFill>
@@ -6216,16 +6216,16 @@
               <a:t>3</a:t>
             </a:r>
             <a:r>
-              <a:rPr sz="1500" i="0" b="0">
-                <a:solidFill>
-                  <a:srgbClr val="D4D4D4"/>
-                </a:solidFill>
-                <a:latin typeface="Consolas"/>
-              </a:rPr>
-              <a:t> </a:t>
-            </a:r>
-            <a:r>
-              <a:rPr sz="1500" i="0" b="0">
+              <a:rPr sz="1100" i="0" b="0">
+                <a:solidFill>
+                  <a:srgbClr val="D4D4D4"/>
+                </a:solidFill>
+                <a:latin typeface="Consolas"/>
+              </a:rPr>
+              <a:t> </a:t>
+            </a:r>
+            <a:r>
+              <a:rPr sz="1100" i="0" b="0">
                 <a:solidFill>
                   <a:srgbClr val="DCDCAA"/>
                 </a:solidFill>
@@ -6234,7 +6234,7 @@
               <a:t>segundos</a:t>
             </a:r>
             <a:r>
-              <a:rPr sz="1500" i="0" b="0">
+              <a:rPr sz="1100" i="0" b="0">
                 <a:solidFill>
                   <a:srgbClr val="D4D4D4"/>
                 </a:solidFill>
@@ -6243,7 +6243,7 @@
               <a:t> (</a:t>
             </a:r>
             <a:r>
-              <a:rPr sz="1500" i="0" b="0">
+              <a:rPr sz="1100" i="0" b="0">
                 <a:solidFill>
                   <a:srgbClr val="D4D4D4"/>
                 </a:solidFill>
@@ -6252,7 +6252,7 @@
               <a:t>RNF</a:t>
             </a:r>
             <a:r>
-              <a:rPr sz="1500" i="0" b="0">
+              <a:rPr sz="1100" i="0" b="0">
                 <a:solidFill>
                   <a:srgbClr val="D4D4D4"/>
                 </a:solidFill>
@@ -6261,7 +6261,7 @@
               <a:t>-</a:t>
             </a:r>
             <a:r>
-              <a:rPr sz="1500" i="0" b="0">
+              <a:rPr sz="1100" i="0" b="0">
                 <a:solidFill>
                   <a:srgbClr val="B5CEA8"/>
                 </a:solidFill>
@@ -6270,7 +6270,7 @@
               <a:t>02</a:t>
             </a:r>
             <a:r>
-              <a:rPr sz="1500" i="0" b="0">
+              <a:rPr sz="1100" i="0" b="0">
                 <a:solidFill>
                   <a:srgbClr val="D4D4D4"/>
                 </a:solidFill>
@@ -6282,11 +6282,11 @@
           <a:p>
             <a:pPr>
               <a:spcAft>
-                <a:spcPts val="321"/>
+                <a:spcPts val="235"/>
               </a:spcAft>
             </a:pPr>
             <a:r>
-              <a:rPr sz="1500" i="0" b="0">
+              <a:rPr sz="1100" i="0" b="0">
                 <a:solidFill>
                   <a:srgbClr val="D4D4D4"/>
                 </a:solidFill>
@@ -6295,7 +6295,7 @@
               <a:t>  </a:t>
             </a:r>
             <a:r>
-              <a:rPr sz="1500" i="0" b="0">
+              <a:rPr sz="1100" i="0" b="0">
                 <a:solidFill>
                   <a:srgbClr val="B5CEA8"/>
                 </a:solidFill>
@@ -6304,7 +6304,7 @@
               <a:t>3</a:t>
             </a:r>
             <a:r>
-              <a:rPr sz="1500" i="0" b="0">
+              <a:rPr sz="1100" i="0" b="0">
                 <a:solidFill>
                   <a:srgbClr val="D4D4D4"/>
                 </a:solidFill>
@@ -6313,7 +6313,7 @@
               <a:t>. </a:t>
             </a:r>
             <a:r>
-              <a:rPr sz="1500" i="0" b="0">
+              <a:rPr sz="1100" i="0" b="0">
                 <a:solidFill>
                   <a:srgbClr val="D4D4D4"/>
                 </a:solidFill>
@@ -6322,16 +6322,16 @@
               <a:t>El</a:t>
             </a:r>
             <a:r>
-              <a:rPr sz="1500" i="0" b="0">
-                <a:solidFill>
-                  <a:srgbClr val="D4D4D4"/>
-                </a:solidFill>
-                <a:latin typeface="Consolas"/>
-              </a:rPr>
-              <a:t> </a:t>
-            </a:r>
-            <a:r>
-              <a:rPr sz="1500" i="0" b="0">
+              <a:rPr sz="1100" i="0" b="0">
+                <a:solidFill>
+                  <a:srgbClr val="D4D4D4"/>
+                </a:solidFill>
+                <a:latin typeface="Consolas"/>
+              </a:rPr>
+              <a:t> </a:t>
+            </a:r>
+            <a:r>
+              <a:rPr sz="1100" i="0" b="0">
                 <a:solidFill>
                   <a:srgbClr val="D4D4D4"/>
                 </a:solidFill>
@@ -6340,16 +6340,16 @@
               <a:t>veterinario</a:t>
             </a:r>
             <a:r>
-              <a:rPr sz="1500" i="0" b="0">
-                <a:solidFill>
-                  <a:srgbClr val="D4D4D4"/>
-                </a:solidFill>
-                <a:latin typeface="Consolas"/>
-              </a:rPr>
-              <a:t> </a:t>
-            </a:r>
-            <a:r>
-              <a:rPr sz="1500" i="0" b="0">
+              <a:rPr sz="1100" i="0" b="0">
+                <a:solidFill>
+                  <a:srgbClr val="D4D4D4"/>
+                </a:solidFill>
+                <a:latin typeface="Consolas"/>
+              </a:rPr>
+              <a:t> </a:t>
+            </a:r>
+            <a:r>
+              <a:rPr sz="1100" i="0" b="0">
                 <a:solidFill>
                   <a:srgbClr val="D4D4D4"/>
                 </a:solidFill>
@@ -6358,16 +6358,16 @@
               <a:t>selecciona</a:t>
             </a:r>
             <a:r>
-              <a:rPr sz="1500" i="0" b="0">
-                <a:solidFill>
-                  <a:srgbClr val="D4D4D4"/>
-                </a:solidFill>
-                <a:latin typeface="Consolas"/>
-              </a:rPr>
-              <a:t> </a:t>
-            </a:r>
-            <a:r>
-              <a:rPr sz="1500" i="0" b="0">
+              <a:rPr sz="1100" i="0" b="0">
+                <a:solidFill>
+                  <a:srgbClr val="D4D4D4"/>
+                </a:solidFill>
+                <a:latin typeface="Consolas"/>
+              </a:rPr>
+              <a:t> </a:t>
+            </a:r>
+            <a:r>
+              <a:rPr sz="1100" i="0" b="0">
                 <a:solidFill>
                   <a:srgbClr val="D4D4D4"/>
                 </a:solidFill>
@@ -6376,16 +6376,16 @@
               <a:t>una</a:t>
             </a:r>
             <a:r>
-              <a:rPr sz="1500" i="0" b="0">
-                <a:solidFill>
-                  <a:srgbClr val="D4D4D4"/>
-                </a:solidFill>
-                <a:latin typeface="Consolas"/>
-              </a:rPr>
-              <a:t> </a:t>
-            </a:r>
-            <a:r>
-              <a:rPr sz="1500" i="0" b="0">
+              <a:rPr sz="1100" i="0" b="0">
+                <a:solidFill>
+                  <a:srgbClr val="D4D4D4"/>
+                </a:solidFill>
+                <a:latin typeface="Consolas"/>
+              </a:rPr>
+              <a:t> </a:t>
+            </a:r>
+            <a:r>
+              <a:rPr sz="1100" i="0" b="0">
                 <a:solidFill>
                   <a:srgbClr val="D4D4D4"/>
                 </a:solidFill>
@@ -6394,16 +6394,16 @@
               <a:t>mascota</a:t>
             </a:r>
             <a:r>
-              <a:rPr sz="1500" i="0" b="0">
-                <a:solidFill>
-                  <a:srgbClr val="D4D4D4"/>
-                </a:solidFill>
-                <a:latin typeface="Consolas"/>
-              </a:rPr>
-              <a:t> </a:t>
-            </a:r>
-            <a:r>
-              <a:rPr sz="1500" i="0" b="0">
+              <a:rPr sz="1100" i="0" b="0">
+                <a:solidFill>
+                  <a:srgbClr val="D4D4D4"/>
+                </a:solidFill>
+                <a:latin typeface="Consolas"/>
+              </a:rPr>
+              <a:t> </a:t>
+            </a:r>
+            <a:r>
+              <a:rPr sz="1100" i="0" b="0">
                 <a:solidFill>
                   <a:srgbClr val="D4D4D4"/>
                 </a:solidFill>
@@ -6412,16 +6412,16 @@
               <a:t>de</a:t>
             </a:r>
             <a:r>
-              <a:rPr sz="1500" i="0" b="0">
-                <a:solidFill>
-                  <a:srgbClr val="D4D4D4"/>
-                </a:solidFill>
-                <a:latin typeface="Consolas"/>
-              </a:rPr>
-              <a:t> </a:t>
-            </a:r>
-            <a:r>
-              <a:rPr sz="1500" i="0" b="0">
+              <a:rPr sz="1100" i="0" b="0">
+                <a:solidFill>
+                  <a:srgbClr val="D4D4D4"/>
+                </a:solidFill>
+                <a:latin typeface="Consolas"/>
+              </a:rPr>
+              <a:t> </a:t>
+            </a:r>
+            <a:r>
+              <a:rPr sz="1100" i="0" b="0">
                 <a:solidFill>
                   <a:srgbClr val="D4D4D4"/>
                 </a:solidFill>
@@ -6430,16 +6430,16 @@
               <a:t>la</a:t>
             </a:r>
             <a:r>
-              <a:rPr sz="1500" i="0" b="0">
-                <a:solidFill>
-                  <a:srgbClr val="D4D4D4"/>
-                </a:solidFill>
-                <a:latin typeface="Consolas"/>
-              </a:rPr>
-              <a:t> </a:t>
-            </a:r>
-            <a:r>
-              <a:rPr sz="1500" i="0" b="0">
+              <a:rPr sz="1100" i="0" b="0">
+                <a:solidFill>
+                  <a:srgbClr val="D4D4D4"/>
+                </a:solidFill>
+                <a:latin typeface="Consolas"/>
+              </a:rPr>
+              <a:t> </a:t>
+            </a:r>
+            <a:r>
+              <a:rPr sz="1100" i="0" b="0">
                 <a:solidFill>
                   <a:srgbClr val="D4D4D4"/>
                 </a:solidFill>
@@ -6448,7 +6448,7 @@
               <a:t>lista</a:t>
             </a:r>
             <a:r>
-              <a:rPr sz="1500" i="0" b="0">
+              <a:rPr sz="1100" i="0" b="0">
                 <a:solidFill>
                   <a:srgbClr val="D4D4D4"/>
                 </a:solidFill>
@@ -6460,11 +6460,11 @@
           <a:p>
             <a:pPr>
               <a:spcAft>
-                <a:spcPts val="321"/>
+                <a:spcPts val="235"/>
               </a:spcAft>
             </a:pPr>
             <a:r>
-              <a:rPr sz="1500" i="0" b="0">
+              <a:rPr sz="1100" i="0" b="0">
                 <a:solidFill>
                   <a:srgbClr val="D4D4D4"/>
                 </a:solidFill>
@@ -6473,7 +6473,7 @@
               <a:t>  </a:t>
             </a:r>
             <a:r>
-              <a:rPr sz="1500" i="0" b="0">
+              <a:rPr sz="1100" i="0" b="0">
                 <a:solidFill>
                   <a:srgbClr val="B5CEA8"/>
                 </a:solidFill>
@@ -6482,7 +6482,7 @@
               <a:t>4</a:t>
             </a:r>
             <a:r>
-              <a:rPr sz="1500" i="0" b="0">
+              <a:rPr sz="1100" i="0" b="0">
                 <a:solidFill>
                   <a:srgbClr val="D4D4D4"/>
                 </a:solidFill>
@@ -6491,7 +6491,7 @@
               <a:t>. </a:t>
             </a:r>
             <a:r>
-              <a:rPr sz="1500" i="0" b="0">
+              <a:rPr sz="1100" i="0" b="0">
                 <a:solidFill>
                   <a:srgbClr val="D4D4D4"/>
                 </a:solidFill>
@@ -6500,16 +6500,16 @@
               <a:t>El</a:t>
             </a:r>
             <a:r>
-              <a:rPr sz="1500" i="0" b="0">
-                <a:solidFill>
-                  <a:srgbClr val="D4D4D4"/>
-                </a:solidFill>
-                <a:latin typeface="Consolas"/>
-              </a:rPr>
-              <a:t> </a:t>
-            </a:r>
-            <a:r>
-              <a:rPr sz="1500" i="0" b="0">
+              <a:rPr sz="1100" i="0" b="0">
+                <a:solidFill>
+                  <a:srgbClr val="D4D4D4"/>
+                </a:solidFill>
+                <a:latin typeface="Consolas"/>
+              </a:rPr>
+              <a:t> </a:t>
+            </a:r>
+            <a:r>
+              <a:rPr sz="1100" i="0" b="0">
                 <a:solidFill>
                   <a:srgbClr val="D4D4D4"/>
                 </a:solidFill>
@@ -6518,16 +6518,16 @@
               <a:t>sistema</a:t>
             </a:r>
             <a:r>
-              <a:rPr sz="1500" i="0" b="0">
-                <a:solidFill>
-                  <a:srgbClr val="D4D4D4"/>
-                </a:solidFill>
-                <a:latin typeface="Consolas"/>
-              </a:rPr>
-              <a:t> </a:t>
-            </a:r>
-            <a:r>
-              <a:rPr sz="1500" i="0" b="0">
+              <a:rPr sz="1100" i="0" b="0">
+                <a:solidFill>
+                  <a:srgbClr val="D4D4D4"/>
+                </a:solidFill>
+                <a:latin typeface="Consolas"/>
+              </a:rPr>
+              <a:t> </a:t>
+            </a:r>
+            <a:r>
+              <a:rPr sz="1100" i="0" b="0">
                 <a:solidFill>
                   <a:srgbClr val="D4D4D4"/>
                 </a:solidFill>
@@ -6536,16 +6536,16 @@
               <a:t>muestra</a:t>
             </a:r>
             <a:r>
-              <a:rPr sz="1500" i="0" b="0">
-                <a:solidFill>
-                  <a:srgbClr val="D4D4D4"/>
-                </a:solidFill>
-                <a:latin typeface="Consolas"/>
-              </a:rPr>
-              <a:t> </a:t>
-            </a:r>
-            <a:r>
-              <a:rPr sz="1500" i="0" b="0">
+              <a:rPr sz="1100" i="0" b="0">
+                <a:solidFill>
+                  <a:srgbClr val="D4D4D4"/>
+                </a:solidFill>
+                <a:latin typeface="Consolas"/>
+              </a:rPr>
+              <a:t> </a:t>
+            </a:r>
+            <a:r>
+              <a:rPr sz="1100" i="0" b="0">
                 <a:solidFill>
                   <a:srgbClr val="D4D4D4"/>
                 </a:solidFill>
@@ -6554,7 +6554,7 @@
               <a:t>ficha</a:t>
             </a:r>
             <a:r>
-              <a:rPr sz="1500" i="0" b="0">
+              <a:rPr sz="1100" i="0" b="0">
                 <a:solidFill>
                   <a:srgbClr val="D4D4D4"/>
                 </a:solidFill>
@@ -6563,7 +6563,7 @@
               <a:t>, </a:t>
             </a:r>
             <a:r>
-              <a:rPr sz="1500" i="0" b="0">
+              <a:rPr sz="1100" i="0" b="0">
                 <a:solidFill>
                   <a:srgbClr val="D4D4D4"/>
                 </a:solidFill>
@@ -6572,16 +6572,16 @@
               <a:t>historial</a:t>
             </a:r>
             <a:r>
-              <a:rPr sz="1500" i="0" b="0">
-                <a:solidFill>
-                  <a:srgbClr val="D4D4D4"/>
-                </a:solidFill>
-                <a:latin typeface="Consolas"/>
-              </a:rPr>
-              <a:t> </a:t>
-            </a:r>
-            <a:r>
-              <a:rPr sz="1500" i="0" b="0">
+              <a:rPr sz="1100" i="0" b="0">
+                <a:solidFill>
+                  <a:srgbClr val="D4D4D4"/>
+                </a:solidFill>
+                <a:latin typeface="Consolas"/>
+              </a:rPr>
+              <a:t> </a:t>
+            </a:r>
+            <a:r>
+              <a:rPr sz="1100" i="0" b="0">
                 <a:solidFill>
                   <a:srgbClr val="D4D4D4"/>
                 </a:solidFill>
@@ -6590,16 +6590,16 @@
               <a:t>de</a:t>
             </a:r>
             <a:r>
-              <a:rPr sz="1500" i="0" b="0">
-                <a:solidFill>
-                  <a:srgbClr val="D4D4D4"/>
-                </a:solidFill>
-                <a:latin typeface="Consolas"/>
-              </a:rPr>
-              <a:t> </a:t>
-            </a:r>
-            <a:r>
-              <a:rPr sz="1500" i="0" b="0">
+              <a:rPr sz="1100" i="0" b="0">
+                <a:solidFill>
+                  <a:srgbClr val="D4D4D4"/>
+                </a:solidFill>
+                <a:latin typeface="Consolas"/>
+              </a:rPr>
+              <a:t> </a:t>
+            </a:r>
+            <a:r>
+              <a:rPr sz="1100" i="0" b="0">
                 <a:solidFill>
                   <a:srgbClr val="D4D4D4"/>
                 </a:solidFill>
@@ -6608,16 +6608,16 @@
               <a:t>consultas</a:t>
             </a:r>
             <a:r>
-              <a:rPr sz="1500" i="0" b="0">
-                <a:solidFill>
-                  <a:srgbClr val="D4D4D4"/>
-                </a:solidFill>
-                <a:latin typeface="Consolas"/>
-              </a:rPr>
-              <a:t> </a:t>
-            </a:r>
-            <a:r>
-              <a:rPr sz="1500" i="0" b="0">
+              <a:rPr sz="1100" i="0" b="0">
+                <a:solidFill>
+                  <a:srgbClr val="D4D4D4"/>
+                </a:solidFill>
+                <a:latin typeface="Consolas"/>
+              </a:rPr>
+              <a:t> </a:t>
+            </a:r>
+            <a:r>
+              <a:rPr sz="1100" i="0" b="0">
                 <a:solidFill>
                   <a:srgbClr val="D4D4D4"/>
                 </a:solidFill>
@@ -6626,16 +6626,16 @@
               <a:t>y</a:t>
             </a:r>
             <a:r>
-              <a:rPr sz="1500" i="0" b="0">
-                <a:solidFill>
-                  <a:srgbClr val="D4D4D4"/>
-                </a:solidFill>
-                <a:latin typeface="Consolas"/>
-              </a:rPr>
-              <a:t> </a:t>
-            </a:r>
-            <a:r>
-              <a:rPr sz="1500" i="0" b="0">
+              <a:rPr sz="1100" i="0" b="0">
+                <a:solidFill>
+                  <a:srgbClr val="D4D4D4"/>
+                </a:solidFill>
+                <a:latin typeface="Consolas"/>
+              </a:rPr>
+              <a:t> </a:t>
+            </a:r>
+            <a:r>
+              <a:rPr sz="1100" i="0" b="0">
                 <a:solidFill>
                   <a:srgbClr val="D4D4D4"/>
                 </a:solidFill>
@@ -6644,16 +6644,16 @@
               <a:t>vacunas</a:t>
             </a:r>
             <a:r>
-              <a:rPr sz="1500" i="0" b="0">
-                <a:solidFill>
-                  <a:srgbClr val="D4D4D4"/>
-                </a:solidFill>
-                <a:latin typeface="Consolas"/>
-              </a:rPr>
-              <a:t> </a:t>
-            </a:r>
-            <a:r>
-              <a:rPr sz="1500" i="0" b="0">
+              <a:rPr sz="1100" i="0" b="0">
+                <a:solidFill>
+                  <a:srgbClr val="D4D4D4"/>
+                </a:solidFill>
+                <a:latin typeface="Consolas"/>
+              </a:rPr>
+              <a:t> </a:t>
+            </a:r>
+            <a:r>
+              <a:rPr sz="1100" i="0" b="0">
                 <a:solidFill>
                   <a:srgbClr val="D4D4D4"/>
                 </a:solidFill>
@@ -6662,16 +6662,16 @@
               <a:t>en</a:t>
             </a:r>
             <a:r>
-              <a:rPr sz="1500" i="0" b="0">
-                <a:solidFill>
-                  <a:srgbClr val="D4D4D4"/>
-                </a:solidFill>
-                <a:latin typeface="Consolas"/>
-              </a:rPr>
-              <a:t> </a:t>
-            </a:r>
-            <a:r>
-              <a:rPr sz="1500" i="0" b="0">
+              <a:rPr sz="1100" i="0" b="0">
+                <a:solidFill>
+                  <a:srgbClr val="D4D4D4"/>
+                </a:solidFill>
+                <a:latin typeface="Consolas"/>
+              </a:rPr>
+              <a:t> </a:t>
+            </a:r>
+            <a:r>
+              <a:rPr sz="1100" i="0" b="0">
                 <a:solidFill>
                   <a:srgbClr val="D4D4D4"/>
                 </a:solidFill>
@@ -6680,16 +6680,16 @@
               <a:t>orden</a:t>
             </a:r>
             <a:r>
-              <a:rPr sz="1500" i="0" b="0">
-                <a:solidFill>
-                  <a:srgbClr val="D4D4D4"/>
-                </a:solidFill>
-                <a:latin typeface="Consolas"/>
-              </a:rPr>
-              <a:t> </a:t>
-            </a:r>
-            <a:r>
-              <a:rPr sz="1500" i="0" b="0">
+              <a:rPr sz="1100" i="0" b="0">
+                <a:solidFill>
+                  <a:srgbClr val="D4D4D4"/>
+                </a:solidFill>
+                <a:latin typeface="Consolas"/>
+              </a:rPr>
+              <a:t> </a:t>
+            </a:r>
+            <a:r>
+              <a:rPr sz="1100" i="0" b="0">
                 <a:solidFill>
                   <a:srgbClr val="D4D4D4"/>
                 </a:solidFill>
@@ -6698,7 +6698,7 @@
               <a:t>cronologico</a:t>
             </a:r>
             <a:r>
-              <a:rPr sz="1500" i="0" b="0">
+              <a:rPr sz="1100" i="0" b="0">
                 <a:solidFill>
                   <a:srgbClr val="D4D4D4"/>
                 </a:solidFill>
@@ -6710,11 +6710,11 @@
           <a:p>
             <a:pPr>
               <a:spcAft>
-                <a:spcPts val="321"/>
+                <a:spcPts val="235"/>
               </a:spcAft>
             </a:pPr>
             <a:r>
-              <a:rPr sz="1500" i="0" b="0">
+              <a:rPr sz="1100" i="0" b="0">
                 <a:solidFill>
                   <a:srgbClr val="D4D4D4"/>
                 </a:solidFill>
@@ -6723,16 +6723,16 @@
               <a:t>Flujos</a:t>
             </a:r>
             <a:r>
-              <a:rPr sz="1500" i="0" b="0">
-                <a:solidFill>
-                  <a:srgbClr val="D4D4D4"/>
-                </a:solidFill>
-                <a:latin typeface="Consolas"/>
-              </a:rPr>
-              <a:t> </a:t>
-            </a:r>
-            <a:r>
-              <a:rPr sz="1500" i="0" b="0">
+              <a:rPr sz="1100" i="0" b="0">
+                <a:solidFill>
+                  <a:srgbClr val="D4D4D4"/>
+                </a:solidFill>
+                <a:latin typeface="Consolas"/>
+              </a:rPr>
+              <a:t> </a:t>
+            </a:r>
+            <a:r>
+              <a:rPr sz="1100" i="0" b="0">
                 <a:solidFill>
                   <a:srgbClr val="D4D4D4"/>
                 </a:solidFill>
@@ -6741,7 +6741,7 @@
               <a:t>alternos</a:t>
             </a:r>
             <a:r>
-              <a:rPr sz="1500" i="0" b="0">
+              <a:rPr sz="1100" i="0" b="0">
                 <a:solidFill>
                   <a:srgbClr val="D4D4D4"/>
                 </a:solidFill>
@@ -6753,11 +6753,11 @@
           <a:p>
             <a:pPr>
               <a:spcAft>
-                <a:spcPts val="321"/>
+                <a:spcPts val="235"/>
               </a:spcAft>
             </a:pPr>
             <a:r>
-              <a:rPr sz="1500" i="0" b="0">
+              <a:rPr sz="1100" i="0" b="0">
                 <a:solidFill>
                   <a:srgbClr val="D4D4D4"/>
                 </a:solidFill>
@@ -6766,7 +6766,7 @@
               <a:t>  2</a:t>
             </a:r>
             <a:r>
-              <a:rPr sz="1500" i="0" b="0">
+              <a:rPr sz="1100" i="0" b="0">
                 <a:solidFill>
                   <a:srgbClr val="D4D4D4"/>
                 </a:solidFill>
@@ -6775,7 +6775,7 @@
               <a:t>a</a:t>
             </a:r>
             <a:r>
-              <a:rPr sz="1500" i="0" b="0">
+              <a:rPr sz="1100" i="0" b="0">
                 <a:solidFill>
                   <a:srgbClr val="D4D4D4"/>
                 </a:solidFill>
@@ -6784,7 +6784,7 @@
               <a:t>. </a:t>
             </a:r>
             <a:r>
-              <a:rPr sz="1500" i="0" b="0">
+              <a:rPr sz="1100" i="0" b="0">
                 <a:solidFill>
                   <a:srgbClr val="D4D4D4"/>
                 </a:solidFill>
@@ -6793,16 +6793,16 @@
               <a:t>Sin</a:t>
             </a:r>
             <a:r>
-              <a:rPr sz="1500" i="0" b="0">
-                <a:solidFill>
-                  <a:srgbClr val="D4D4D4"/>
-                </a:solidFill>
-                <a:latin typeface="Consolas"/>
-              </a:rPr>
-              <a:t> </a:t>
-            </a:r>
-            <a:r>
-              <a:rPr sz="1500" i="0" b="0">
+              <a:rPr sz="1100" i="0" b="0">
+                <a:solidFill>
+                  <a:srgbClr val="D4D4D4"/>
+                </a:solidFill>
+                <a:latin typeface="Consolas"/>
+              </a:rPr>
+              <a:t> </a:t>
+            </a:r>
+            <a:r>
+              <a:rPr sz="1100" i="0" b="0">
                 <a:solidFill>
                   <a:srgbClr val="D4D4D4"/>
                 </a:solidFill>
@@ -6811,7 +6811,7 @@
               <a:t>coincidencias</a:t>
             </a:r>
             <a:r>
-              <a:rPr sz="1500" i="0" b="0">
+              <a:rPr sz="1100" i="0" b="0">
                 <a:solidFill>
                   <a:srgbClr val="D4D4D4"/>
                 </a:solidFill>
@@ -6820,7 +6820,7 @@
               <a:t>: </a:t>
             </a:r>
             <a:r>
-              <a:rPr sz="1500" i="0" b="0">
+              <a:rPr sz="1100" i="0" b="0">
                 <a:solidFill>
                   <a:srgbClr val="D4D4D4"/>
                 </a:solidFill>
@@ -6829,16 +6829,16 @@
               <a:t>el</a:t>
             </a:r>
             <a:r>
-              <a:rPr sz="1500" i="0" b="0">
-                <a:solidFill>
-                  <a:srgbClr val="D4D4D4"/>
-                </a:solidFill>
-                <a:latin typeface="Consolas"/>
-              </a:rPr>
-              <a:t> </a:t>
-            </a:r>
-            <a:r>
-              <a:rPr sz="1500" i="0" b="0">
+              <a:rPr sz="1100" i="0" b="0">
+                <a:solidFill>
+                  <a:srgbClr val="D4D4D4"/>
+                </a:solidFill>
+                <a:latin typeface="Consolas"/>
+              </a:rPr>
+              <a:t> </a:t>
+            </a:r>
+            <a:r>
+              <a:rPr sz="1100" i="0" b="0">
                 <a:solidFill>
                   <a:srgbClr val="D4D4D4"/>
                 </a:solidFill>
@@ -6847,16 +6847,16 @@
               <a:t>sistema</a:t>
             </a:r>
             <a:r>
-              <a:rPr sz="1500" i="0" b="0">
-                <a:solidFill>
-                  <a:srgbClr val="D4D4D4"/>
-                </a:solidFill>
-                <a:latin typeface="Consolas"/>
-              </a:rPr>
-              <a:t> </a:t>
-            </a:r>
-            <a:r>
-              <a:rPr sz="1500" i="0" b="0">
+              <a:rPr sz="1100" i="0" b="0">
+                <a:solidFill>
+                  <a:srgbClr val="D4D4D4"/>
+                </a:solidFill>
+                <a:latin typeface="Consolas"/>
+              </a:rPr>
+              <a:t> </a:t>
+            </a:r>
+            <a:r>
+              <a:rPr sz="1100" i="0" b="0">
                 <a:solidFill>
                   <a:srgbClr val="D4D4D4"/>
                 </a:solidFill>
@@ -6865,16 +6865,16 @@
               <a:t>informa</a:t>
             </a:r>
             <a:r>
-              <a:rPr sz="1500" i="0" b="0">
-                <a:solidFill>
-                  <a:srgbClr val="D4D4D4"/>
-                </a:solidFill>
-                <a:latin typeface="Consolas"/>
-              </a:rPr>
-              <a:t> </a:t>
-            </a:r>
-            <a:r>
-              <a:rPr sz="1500" i="0" b="0">
+              <a:rPr sz="1100" i="0" b="0">
+                <a:solidFill>
+                  <a:srgbClr val="D4D4D4"/>
+                </a:solidFill>
+                <a:latin typeface="Consolas"/>
+              </a:rPr>
+              <a:t> </a:t>
+            </a:r>
+            <a:r>
+              <a:rPr sz="1100" i="0" b="0">
                 <a:solidFill>
                   <a:srgbClr val="D4D4D4"/>
                 </a:solidFill>
@@ -6883,16 +6883,16 @@
               <a:t>y</a:t>
             </a:r>
             <a:r>
-              <a:rPr sz="1500" i="0" b="0">
-                <a:solidFill>
-                  <a:srgbClr val="D4D4D4"/>
-                </a:solidFill>
-                <a:latin typeface="Consolas"/>
-              </a:rPr>
-              <a:t> </a:t>
-            </a:r>
-            <a:r>
-              <a:rPr sz="1500" i="0" b="0">
+              <a:rPr sz="1100" i="0" b="0">
+                <a:solidFill>
+                  <a:srgbClr val="D4D4D4"/>
+                </a:solidFill>
+                <a:latin typeface="Consolas"/>
+              </a:rPr>
+              <a:t> </a:t>
+            </a:r>
+            <a:r>
+              <a:rPr sz="1100" i="0" b="0">
                 <a:solidFill>
                   <a:srgbClr val="D4D4D4"/>
                 </a:solidFill>
@@ -6901,16 +6901,16 @@
               <a:t>ofrece</a:t>
             </a:r>
             <a:r>
-              <a:rPr sz="1500" i="0" b="0">
-                <a:solidFill>
-                  <a:srgbClr val="D4D4D4"/>
-                </a:solidFill>
-                <a:latin typeface="Consolas"/>
-              </a:rPr>
-              <a:t> </a:t>
-            </a:r>
-            <a:r>
-              <a:rPr sz="1500" i="0" b="0">
+              <a:rPr sz="1100" i="0" b="0">
+                <a:solidFill>
+                  <a:srgbClr val="D4D4D4"/>
+                </a:solidFill>
+                <a:latin typeface="Consolas"/>
+              </a:rPr>
+              <a:t> </a:t>
+            </a:r>
+            <a:r>
+              <a:rPr sz="1100" i="0" b="0">
                 <a:solidFill>
                   <a:srgbClr val="D4D4D4"/>
                 </a:solidFill>
@@ -6919,16 +6919,16 @@
               <a:t>registrar</a:t>
             </a:r>
             <a:r>
-              <a:rPr sz="1500" i="0" b="0">
-                <a:solidFill>
-                  <a:srgbClr val="D4D4D4"/>
-                </a:solidFill>
-                <a:latin typeface="Consolas"/>
-              </a:rPr>
-              <a:t> </a:t>
-            </a:r>
-            <a:r>
-              <a:rPr sz="1500" i="0" b="0">
+              <a:rPr sz="1100" i="0" b="0">
+                <a:solidFill>
+                  <a:srgbClr val="D4D4D4"/>
+                </a:solidFill>
+                <a:latin typeface="Consolas"/>
+              </a:rPr>
+              <a:t> </a:t>
+            </a:r>
+            <a:r>
+              <a:rPr sz="1100" i="0" b="0">
                 <a:solidFill>
                   <a:srgbClr val="D4D4D4"/>
                 </a:solidFill>
@@ -6937,16 +6937,16 @@
               <a:t>la</a:t>
             </a:r>
             <a:r>
-              <a:rPr sz="1500" i="0" b="0">
-                <a:solidFill>
-                  <a:srgbClr val="D4D4D4"/>
-                </a:solidFill>
-                <a:latin typeface="Consolas"/>
-              </a:rPr>
-              <a:t> </a:t>
-            </a:r>
-            <a:r>
-              <a:rPr sz="1500" i="0" b="0">
+              <a:rPr sz="1100" i="0" b="0">
+                <a:solidFill>
+                  <a:srgbClr val="D4D4D4"/>
+                </a:solidFill>
+                <a:latin typeface="Consolas"/>
+              </a:rPr>
+              <a:t> </a:t>
+            </a:r>
+            <a:r>
+              <a:rPr sz="1100" i="0" b="0">
                 <a:solidFill>
                   <a:srgbClr val="DCDCAA"/>
                 </a:solidFill>
@@ -6955,7 +6955,7 @@
               <a:t>mascota</a:t>
             </a:r>
             <a:r>
-              <a:rPr sz="1500" i="0" b="0">
+              <a:rPr sz="1100" i="0" b="0">
                 <a:solidFill>
                   <a:srgbClr val="D4D4D4"/>
                 </a:solidFill>
@@ -6964,7 +6964,7 @@
               <a:t> (</a:t>
             </a:r>
             <a:r>
-              <a:rPr sz="1500" i="0" b="0">
+              <a:rPr sz="1100" i="0" b="0">
                 <a:solidFill>
                   <a:srgbClr val="D4D4D4"/>
                 </a:solidFill>
@@ -6973,16 +6973,16 @@
               <a:t>pasa</a:t>
             </a:r>
             <a:r>
-              <a:rPr sz="1500" i="0" b="0">
-                <a:solidFill>
-                  <a:srgbClr val="D4D4D4"/>
-                </a:solidFill>
-                <a:latin typeface="Consolas"/>
-              </a:rPr>
-              <a:t> </a:t>
-            </a:r>
-            <a:r>
-              <a:rPr sz="1500" i="0" b="0">
+              <a:rPr sz="1100" i="0" b="0">
+                <a:solidFill>
+                  <a:srgbClr val="D4D4D4"/>
+                </a:solidFill>
+                <a:latin typeface="Consolas"/>
+              </a:rPr>
+              <a:t> </a:t>
+            </a:r>
+            <a:r>
+              <a:rPr sz="1100" i="0" b="0">
                 <a:solidFill>
                   <a:srgbClr val="D4D4D4"/>
                 </a:solidFill>
@@ -6991,16 +6991,16 @@
               <a:t>a</a:t>
             </a:r>
             <a:r>
-              <a:rPr sz="1500" i="0" b="0">
-                <a:solidFill>
-                  <a:srgbClr val="D4D4D4"/>
-                </a:solidFill>
-                <a:latin typeface="Consolas"/>
-              </a:rPr>
-              <a:t> </a:t>
-            </a:r>
-            <a:r>
-              <a:rPr sz="1500" i="0" b="0">
+              <a:rPr sz="1100" i="0" b="0">
+                <a:solidFill>
+                  <a:srgbClr val="D4D4D4"/>
+                </a:solidFill>
+                <a:latin typeface="Consolas"/>
+              </a:rPr>
+              <a:t> </a:t>
+            </a:r>
+            <a:r>
+              <a:rPr sz="1100" i="0" b="0">
                 <a:solidFill>
                   <a:srgbClr val="D4D4D4"/>
                 </a:solidFill>
@@ -7009,7 +7009,7 @@
               <a:t>CU</a:t>
             </a:r>
             <a:r>
-              <a:rPr sz="1500" i="0" b="0">
+              <a:rPr sz="1100" i="0" b="0">
                 <a:solidFill>
                   <a:srgbClr val="D4D4D4"/>
                 </a:solidFill>
@@ -7018,7 +7018,7 @@
               <a:t>-</a:t>
             </a:r>
             <a:r>
-              <a:rPr sz="1500" i="0" b="0">
+              <a:rPr sz="1100" i="0" b="0">
                 <a:solidFill>
                   <a:srgbClr val="B5CEA8"/>
                 </a:solidFill>
@@ -7027,7 +7027,7 @@
               <a:t>01</a:t>
             </a:r>
             <a:r>
-              <a:rPr sz="1500" i="0" b="0">
+              <a:rPr sz="1100" i="0" b="0">
                 <a:solidFill>
                   <a:srgbClr val="D4D4D4"/>
                 </a:solidFill>
@@ -7039,11 +7039,11 @@
           <a:p>
             <a:pPr>
               <a:spcAft>
-                <a:spcPts val="321"/>
+                <a:spcPts val="235"/>
               </a:spcAft>
             </a:pPr>
             <a:r>
-              <a:rPr sz="1500" i="0" b="0">
+              <a:rPr sz="1100" i="0" b="0">
                 <a:solidFill>
                   <a:srgbClr val="D4D4D4"/>
                 </a:solidFill>
@@ -7052,7 +7052,7 @@
               <a:t>  2</a:t>
             </a:r>
             <a:r>
-              <a:rPr sz="1500" i="0" b="0">
+              <a:rPr sz="1100" i="0" b="0">
                 <a:solidFill>
                   <a:srgbClr val="D4D4D4"/>
                 </a:solidFill>
@@ -7061,7 +7061,7 @@
               <a:t>b</a:t>
             </a:r>
             <a:r>
-              <a:rPr sz="1500" i="0" b="0">
+              <a:rPr sz="1100" i="0" b="0">
                 <a:solidFill>
                   <a:srgbClr val="D4D4D4"/>
                 </a:solidFill>
@@ -7070,7 +7070,7 @@
               <a:t>. </a:t>
             </a:r>
             <a:r>
-              <a:rPr sz="1500" i="0" b="0">
+              <a:rPr sz="1100" i="0" b="0">
                 <a:solidFill>
                   <a:srgbClr val="D4D4D4"/>
                 </a:solidFill>
@@ -7079,16 +7079,16 @@
               <a:t>Mas</a:t>
             </a:r>
             <a:r>
-              <a:rPr sz="1500" i="0" b="0">
-                <a:solidFill>
-                  <a:srgbClr val="D4D4D4"/>
-                </a:solidFill>
-                <a:latin typeface="Consolas"/>
-              </a:rPr>
-              <a:t> </a:t>
-            </a:r>
-            <a:r>
-              <a:rPr sz="1500" i="0" b="0">
+              <a:rPr sz="1100" i="0" b="0">
+                <a:solidFill>
+                  <a:srgbClr val="D4D4D4"/>
+                </a:solidFill>
+                <a:latin typeface="Consolas"/>
+              </a:rPr>
+              <a:t> </a:t>
+            </a:r>
+            <a:r>
+              <a:rPr sz="1100" i="0" b="0">
                 <a:solidFill>
                   <a:srgbClr val="D4D4D4"/>
                 </a:solidFill>
@@ -7097,16 +7097,16 @@
               <a:t>de</a:t>
             </a:r>
             <a:r>
-              <a:rPr sz="1500" i="0" b="0">
-                <a:solidFill>
-                  <a:srgbClr val="D4D4D4"/>
-                </a:solidFill>
-                <a:latin typeface="Consolas"/>
-              </a:rPr>
-              <a:t> </a:t>
-            </a:r>
-            <a:r>
-              <a:rPr sz="1500" i="0" b="0">
+              <a:rPr sz="1100" i="0" b="0">
+                <a:solidFill>
+                  <a:srgbClr val="D4D4D4"/>
+                </a:solidFill>
+                <a:latin typeface="Consolas"/>
+              </a:rPr>
+              <a:t> </a:t>
+            </a:r>
+            <a:r>
+              <a:rPr sz="1100" i="0" b="0">
                 <a:solidFill>
                   <a:srgbClr val="B5CEA8"/>
                 </a:solidFill>
@@ -7115,16 +7115,16 @@
               <a:t>50</a:t>
             </a:r>
             <a:r>
-              <a:rPr sz="1500" i="0" b="0">
-                <a:solidFill>
-                  <a:srgbClr val="D4D4D4"/>
-                </a:solidFill>
-                <a:latin typeface="Consolas"/>
-              </a:rPr>
-              <a:t> </a:t>
-            </a:r>
-            <a:r>
-              <a:rPr sz="1500" i="0" b="0">
+              <a:rPr sz="1100" i="0" b="0">
+                <a:solidFill>
+                  <a:srgbClr val="D4D4D4"/>
+                </a:solidFill>
+                <a:latin typeface="Consolas"/>
+              </a:rPr>
+              <a:t> </a:t>
+            </a:r>
+            <a:r>
+              <a:rPr sz="1100" i="0" b="0">
                 <a:solidFill>
                   <a:srgbClr val="D4D4D4"/>
                 </a:solidFill>
@@ -7133,7 +7133,7 @@
               <a:t>coincidencias</a:t>
             </a:r>
             <a:r>
-              <a:rPr sz="1500" i="0" b="0">
+              <a:rPr sz="1100" i="0" b="0">
                 <a:solidFill>
                   <a:srgbClr val="D4D4D4"/>
                 </a:solidFill>
@@ -7142,7 +7142,7 @@
               <a:t>: </a:t>
             </a:r>
             <a:r>
-              <a:rPr sz="1500" i="0" b="0">
+              <a:rPr sz="1100" i="0" b="0">
                 <a:solidFill>
                   <a:srgbClr val="D4D4D4"/>
                 </a:solidFill>
@@ -7151,16 +7151,16 @@
               <a:t>el</a:t>
             </a:r>
             <a:r>
-              <a:rPr sz="1500" i="0" b="0">
-                <a:solidFill>
-                  <a:srgbClr val="D4D4D4"/>
-                </a:solidFill>
-                <a:latin typeface="Consolas"/>
-              </a:rPr>
-              <a:t> </a:t>
-            </a:r>
-            <a:r>
-              <a:rPr sz="1500" i="0" b="0">
+              <a:rPr sz="1100" i="0" b="0">
+                <a:solidFill>
+                  <a:srgbClr val="D4D4D4"/>
+                </a:solidFill>
+                <a:latin typeface="Consolas"/>
+              </a:rPr>
+              <a:t> </a:t>
+            </a:r>
+            <a:r>
+              <a:rPr sz="1100" i="0" b="0">
                 <a:solidFill>
                   <a:srgbClr val="D4D4D4"/>
                 </a:solidFill>
@@ -7169,16 +7169,16 @@
               <a:t>sistema</a:t>
             </a:r>
             <a:r>
-              <a:rPr sz="1500" i="0" b="0">
-                <a:solidFill>
-                  <a:srgbClr val="D4D4D4"/>
-                </a:solidFill>
-                <a:latin typeface="Consolas"/>
-              </a:rPr>
-              <a:t> </a:t>
-            </a:r>
-            <a:r>
-              <a:rPr sz="1500" i="0" b="0">
+              <a:rPr sz="1100" i="0" b="0">
+                <a:solidFill>
+                  <a:srgbClr val="D4D4D4"/>
+                </a:solidFill>
+                <a:latin typeface="Consolas"/>
+              </a:rPr>
+              <a:t> </a:t>
+            </a:r>
+            <a:r>
+              <a:rPr sz="1100" i="0" b="0">
                 <a:solidFill>
                   <a:srgbClr val="D4D4D4"/>
                 </a:solidFill>
@@ -7187,16 +7187,16 @@
               <a:t>pagina</a:t>
             </a:r>
             <a:r>
-              <a:rPr sz="1500" i="0" b="0">
-                <a:solidFill>
-                  <a:srgbClr val="D4D4D4"/>
-                </a:solidFill>
-                <a:latin typeface="Consolas"/>
-              </a:rPr>
-              <a:t> </a:t>
-            </a:r>
-            <a:r>
-              <a:rPr sz="1500" i="0" b="0">
+              <a:rPr sz="1100" i="0" b="0">
+                <a:solidFill>
+                  <a:srgbClr val="D4D4D4"/>
+                </a:solidFill>
+                <a:latin typeface="Consolas"/>
+              </a:rPr>
+              <a:t> </a:t>
+            </a:r>
+            <a:r>
+              <a:rPr sz="1100" i="0" b="0">
                 <a:solidFill>
                   <a:srgbClr val="D4D4D4"/>
                 </a:solidFill>
@@ -7205,16 +7205,16 @@
               <a:t>el</a:t>
             </a:r>
             <a:r>
-              <a:rPr sz="1500" i="0" b="0">
-                <a:solidFill>
-                  <a:srgbClr val="D4D4D4"/>
-                </a:solidFill>
-                <a:latin typeface="Consolas"/>
-              </a:rPr>
-              <a:t> </a:t>
-            </a:r>
-            <a:r>
-              <a:rPr sz="1500" i="0" b="0">
+              <a:rPr sz="1100" i="0" b="0">
+                <a:solidFill>
+                  <a:srgbClr val="D4D4D4"/>
+                </a:solidFill>
+                <a:latin typeface="Consolas"/>
+              </a:rPr>
+              <a:t> </a:t>
+            </a:r>
+            <a:r>
+              <a:rPr sz="1100" i="0" b="0">
                 <a:solidFill>
                   <a:srgbClr val="D4D4D4"/>
                 </a:solidFill>
@@ -7223,16 +7223,16 @@
               <a:t>resultado</a:t>
             </a:r>
             <a:r>
-              <a:rPr sz="1500" i="0" b="0">
-                <a:solidFill>
-                  <a:srgbClr val="D4D4D4"/>
-                </a:solidFill>
-                <a:latin typeface="Consolas"/>
-              </a:rPr>
-              <a:t> </a:t>
-            </a:r>
-            <a:r>
-              <a:rPr sz="1500" i="0" b="0">
+              <a:rPr sz="1100" i="0" b="0">
+                <a:solidFill>
+                  <a:srgbClr val="D4D4D4"/>
+                </a:solidFill>
+                <a:latin typeface="Consolas"/>
+              </a:rPr>
+              <a:t> </a:t>
+            </a:r>
+            <a:r>
+              <a:rPr sz="1100" i="0" b="0">
                 <a:solidFill>
                   <a:srgbClr val="D4D4D4"/>
                 </a:solidFill>
@@ -7241,16 +7241,16 @@
               <a:t>y</a:t>
             </a:r>
             <a:r>
-              <a:rPr sz="1500" i="0" b="0">
-                <a:solidFill>
-                  <a:srgbClr val="D4D4D4"/>
-                </a:solidFill>
-                <a:latin typeface="Consolas"/>
-              </a:rPr>
-              <a:t> </a:t>
-            </a:r>
-            <a:r>
-              <a:rPr sz="1500" i="0" b="0">
+              <a:rPr sz="1100" i="0" b="0">
+                <a:solidFill>
+                  <a:srgbClr val="D4D4D4"/>
+                </a:solidFill>
+                <a:latin typeface="Consolas"/>
+              </a:rPr>
+              <a:t> </a:t>
+            </a:r>
+            <a:r>
+              <a:rPr sz="1100" i="0" b="0">
                 <a:solidFill>
                   <a:srgbClr val="D4D4D4"/>
                 </a:solidFill>
@@ -7259,16 +7259,16 @@
               <a:t>sugiere</a:t>
             </a:r>
             <a:r>
-              <a:rPr sz="1500" i="0" b="0">
-                <a:solidFill>
-                  <a:srgbClr val="D4D4D4"/>
-                </a:solidFill>
-                <a:latin typeface="Consolas"/>
-              </a:rPr>
-              <a:t> </a:t>
-            </a:r>
-            <a:r>
-              <a:rPr sz="1500" i="0" b="0">
+              <a:rPr sz="1100" i="0" b="0">
+                <a:solidFill>
+                  <a:srgbClr val="D4D4D4"/>
+                </a:solidFill>
+                <a:latin typeface="Consolas"/>
+              </a:rPr>
+              <a:t> </a:t>
+            </a:r>
+            <a:r>
+              <a:rPr sz="1100" i="0" b="0">
                 <a:solidFill>
                   <a:srgbClr val="D4D4D4"/>
                 </a:solidFill>
@@ -7277,16 +7277,16 @@
               <a:t>afinar</a:t>
             </a:r>
             <a:r>
-              <a:rPr sz="1500" i="0" b="0">
-                <a:solidFill>
-                  <a:srgbClr val="D4D4D4"/>
-                </a:solidFill>
-                <a:latin typeface="Consolas"/>
-              </a:rPr>
-              <a:t> </a:t>
-            </a:r>
-            <a:r>
-              <a:rPr sz="1500" i="0" b="0">
+              <a:rPr sz="1100" i="0" b="0">
+                <a:solidFill>
+                  <a:srgbClr val="D4D4D4"/>
+                </a:solidFill>
+                <a:latin typeface="Consolas"/>
+              </a:rPr>
+              <a:t> </a:t>
+            </a:r>
+            <a:r>
+              <a:rPr sz="1100" i="0" b="0">
                 <a:solidFill>
                   <a:srgbClr val="D4D4D4"/>
                 </a:solidFill>
@@ -7295,16 +7295,16 @@
               <a:t>el</a:t>
             </a:r>
             <a:r>
-              <a:rPr sz="1500" i="0" b="0">
-                <a:solidFill>
-                  <a:srgbClr val="D4D4D4"/>
-                </a:solidFill>
-                <a:latin typeface="Consolas"/>
-              </a:rPr>
-              <a:t> </a:t>
-            </a:r>
-            <a:r>
-              <a:rPr sz="1500" i="0" b="0">
+              <a:rPr sz="1100" i="0" b="0">
+                <a:solidFill>
+                  <a:srgbClr val="D4D4D4"/>
+                </a:solidFill>
+                <a:latin typeface="Consolas"/>
+              </a:rPr>
+              <a:t> </a:t>
+            </a:r>
+            <a:r>
+              <a:rPr sz="1100" i="0" b="0">
                 <a:solidFill>
                   <a:srgbClr val="D4D4D4"/>
                 </a:solidFill>
@@ -7313,7 +7313,7 @@
               <a:t>filtro</a:t>
             </a:r>
             <a:r>
-              <a:rPr sz="1500" i="0" b="0">
+              <a:rPr sz="1100" i="0" b="0">
                 <a:solidFill>
                   <a:srgbClr val="D4D4D4"/>
                 </a:solidFill>
@@ -7325,11 +7325,11 @@
           <a:p>
             <a:pPr>
               <a:spcAft>
-                <a:spcPts val="321"/>
+                <a:spcPts val="235"/>
               </a:spcAft>
             </a:pPr>
             <a:r>
-              <a:rPr sz="1500" i="0" b="0">
+              <a:rPr sz="1100" i="0" b="0">
                 <a:solidFill>
                   <a:srgbClr val="D4D4D4"/>
                 </a:solidFill>
@@ -7338,7 +7338,7 @@
               <a:t>  4</a:t>
             </a:r>
             <a:r>
-              <a:rPr sz="1500" i="0" b="0">
+              <a:rPr sz="1100" i="0" b="0">
                 <a:solidFill>
                   <a:srgbClr val="D4D4D4"/>
                 </a:solidFill>
@@ -7347,7 +7347,7 @@
               <a:t>a</a:t>
             </a:r>
             <a:r>
-              <a:rPr sz="1500" i="0" b="0">
+              <a:rPr sz="1100" i="0" b="0">
                 <a:solidFill>
                   <a:srgbClr val="D4D4D4"/>
                 </a:solidFill>
@@ -7356,7 +7356,7 @@
               <a:t>. </a:t>
             </a:r>
             <a:r>
-              <a:rPr sz="1500" i="0" b="0">
+              <a:rPr sz="1100" i="0" b="0">
                 <a:solidFill>
                   <a:srgbClr val="D4D4D4"/>
                 </a:solidFill>
@@ -7365,16 +7365,16 @@
               <a:t>La</a:t>
             </a:r>
             <a:r>
-              <a:rPr sz="1500" i="0" b="0">
-                <a:solidFill>
-                  <a:srgbClr val="D4D4D4"/>
-                </a:solidFill>
-                <a:latin typeface="Consolas"/>
-              </a:rPr>
-              <a:t> </a:t>
-            </a:r>
-            <a:r>
-              <a:rPr sz="1500" i="0" b="0">
+              <a:rPr sz="1100" i="0" b="0">
+                <a:solidFill>
+                  <a:srgbClr val="D4D4D4"/>
+                </a:solidFill>
+                <a:latin typeface="Consolas"/>
+              </a:rPr>
+              <a:t> </a:t>
+            </a:r>
+            <a:r>
+              <a:rPr sz="1100" i="0" b="0">
                 <a:solidFill>
                   <a:srgbClr val="D4D4D4"/>
                 </a:solidFill>
@@ -7383,16 +7383,16 @@
               <a:t>mascota</a:t>
             </a:r>
             <a:r>
-              <a:rPr sz="1500" i="0" b="0">
-                <a:solidFill>
-                  <a:srgbClr val="D4D4D4"/>
-                </a:solidFill>
-                <a:latin typeface="Consolas"/>
-              </a:rPr>
-              <a:t> </a:t>
-            </a:r>
-            <a:r>
-              <a:rPr sz="1500" i="0" b="0">
+              <a:rPr sz="1100" i="0" b="0">
+                <a:solidFill>
+                  <a:srgbClr val="D4D4D4"/>
+                </a:solidFill>
+                <a:latin typeface="Consolas"/>
+              </a:rPr>
+              <a:t> </a:t>
+            </a:r>
+            <a:r>
+              <a:rPr sz="1100" i="0" b="0">
                 <a:solidFill>
                   <a:srgbClr val="D4D4D4"/>
                 </a:solidFill>
@@ -7401,16 +7401,16 @@
               <a:t>esta</a:t>
             </a:r>
             <a:r>
-              <a:rPr sz="1500" i="0" b="0">
-                <a:solidFill>
-                  <a:srgbClr val="D4D4D4"/>
-                </a:solidFill>
-                <a:latin typeface="Consolas"/>
-              </a:rPr>
-              <a:t> </a:t>
-            </a:r>
-            <a:r>
-              <a:rPr sz="1500" i="0" b="0">
+              <a:rPr sz="1100" i="0" b="0">
+                <a:solidFill>
+                  <a:srgbClr val="D4D4D4"/>
+                </a:solidFill>
+                <a:latin typeface="Consolas"/>
+              </a:rPr>
+              <a:t> </a:t>
+            </a:r>
+            <a:r>
+              <a:rPr sz="1100" i="0" b="0">
                 <a:solidFill>
                   <a:srgbClr val="D4D4D4"/>
                 </a:solidFill>
@@ -7419,7 +7419,7 @@
               <a:t>inactiva</a:t>
             </a:r>
             <a:r>
-              <a:rPr sz="1500" i="0" b="0">
+              <a:rPr sz="1100" i="0" b="0">
                 <a:solidFill>
                   <a:srgbClr val="D4D4D4"/>
                 </a:solidFill>
@@ -7428,7 +7428,7 @@
               <a:t>: </a:t>
             </a:r>
             <a:r>
-              <a:rPr sz="1500" i="0" b="0">
+              <a:rPr sz="1100" i="0" b="0">
                 <a:solidFill>
                   <a:srgbClr val="D4D4D4"/>
                 </a:solidFill>
@@ -7437,16 +7437,16 @@
               <a:t>el</a:t>
             </a:r>
             <a:r>
-              <a:rPr sz="1500" i="0" b="0">
-                <a:solidFill>
-                  <a:srgbClr val="D4D4D4"/>
-                </a:solidFill>
-                <a:latin typeface="Consolas"/>
-              </a:rPr>
-              <a:t> </a:t>
-            </a:r>
-            <a:r>
-              <a:rPr sz="1500" i="0" b="0">
+              <a:rPr sz="1100" i="0" b="0">
+                <a:solidFill>
+                  <a:srgbClr val="D4D4D4"/>
+                </a:solidFill>
+                <a:latin typeface="Consolas"/>
+              </a:rPr>
+              <a:t> </a:t>
+            </a:r>
+            <a:r>
+              <a:rPr sz="1100" i="0" b="0">
                 <a:solidFill>
                   <a:srgbClr val="D4D4D4"/>
                 </a:solidFill>
@@ -7455,16 +7455,16 @@
               <a:t>sistema</a:t>
             </a:r>
             <a:r>
-              <a:rPr sz="1500" i="0" b="0">
-                <a:solidFill>
-                  <a:srgbClr val="D4D4D4"/>
-                </a:solidFill>
-                <a:latin typeface="Consolas"/>
-              </a:rPr>
-              <a:t> </a:t>
-            </a:r>
-            <a:r>
-              <a:rPr sz="1500" i="0" b="0">
+              <a:rPr sz="1100" i="0" b="0">
+                <a:solidFill>
+                  <a:srgbClr val="D4D4D4"/>
+                </a:solidFill>
+                <a:latin typeface="Consolas"/>
+              </a:rPr>
+              <a:t> </a:t>
+            </a:r>
+            <a:r>
+              <a:rPr sz="1100" i="0" b="0">
                 <a:solidFill>
                   <a:srgbClr val="D4D4D4"/>
                 </a:solidFill>
@@ -7473,16 +7473,16 @@
               <a:t>muestra</a:t>
             </a:r>
             <a:r>
-              <a:rPr sz="1500" i="0" b="0">
-                <a:solidFill>
-                  <a:srgbClr val="D4D4D4"/>
-                </a:solidFill>
-                <a:latin typeface="Consolas"/>
-              </a:rPr>
-              <a:t> </a:t>
-            </a:r>
-            <a:r>
-              <a:rPr sz="1500" i="0" b="0">
+              <a:rPr sz="1100" i="0" b="0">
+                <a:solidFill>
+                  <a:srgbClr val="D4D4D4"/>
+                </a:solidFill>
+                <a:latin typeface="Consolas"/>
+              </a:rPr>
+              <a:t> </a:t>
+            </a:r>
+            <a:r>
+              <a:rPr sz="1100" i="0" b="0">
                 <a:solidFill>
                   <a:srgbClr val="D4D4D4"/>
                 </a:solidFill>
@@ -7491,16 +7491,16 @@
               <a:t>el</a:t>
             </a:r>
             <a:r>
-              <a:rPr sz="1500" i="0" b="0">
-                <a:solidFill>
-                  <a:srgbClr val="D4D4D4"/>
-                </a:solidFill>
-                <a:latin typeface="Consolas"/>
-              </a:rPr>
-              <a:t> </a:t>
-            </a:r>
-            <a:r>
-              <a:rPr sz="1500" i="0" b="0">
+              <a:rPr sz="1100" i="0" b="0">
+                <a:solidFill>
+                  <a:srgbClr val="D4D4D4"/>
+                </a:solidFill>
+                <a:latin typeface="Consolas"/>
+              </a:rPr>
+              <a:t> </a:t>
+            </a:r>
+            <a:r>
+              <a:rPr sz="1100" i="0" b="0">
                 <a:solidFill>
                   <a:srgbClr val="D4D4D4"/>
                 </a:solidFill>
@@ -7509,16 +7509,16 @@
               <a:t>expediente</a:t>
             </a:r>
             <a:r>
-              <a:rPr sz="1500" i="0" b="0">
-                <a:solidFill>
-                  <a:srgbClr val="D4D4D4"/>
-                </a:solidFill>
-                <a:latin typeface="Consolas"/>
-              </a:rPr>
-              <a:t> </a:t>
-            </a:r>
-            <a:r>
-              <a:rPr sz="1500" i="0" b="0">
+              <a:rPr sz="1100" i="0" b="0">
+                <a:solidFill>
+                  <a:srgbClr val="D4D4D4"/>
+                </a:solidFill>
+                <a:latin typeface="Consolas"/>
+              </a:rPr>
+              <a:t> </a:t>
+            </a:r>
+            <a:r>
+              <a:rPr sz="1100" i="0" b="0">
                 <a:solidFill>
                   <a:srgbClr val="D4D4D4"/>
                 </a:solidFill>
@@ -7527,16 +7527,16 @@
               <a:t>en</a:t>
             </a:r>
             <a:r>
-              <a:rPr sz="1500" i="0" b="0">
-                <a:solidFill>
-                  <a:srgbClr val="D4D4D4"/>
-                </a:solidFill>
-                <a:latin typeface="Consolas"/>
-              </a:rPr>
-              <a:t> </a:t>
-            </a:r>
-            <a:r>
-              <a:rPr sz="1500" i="0" b="0">
+              <a:rPr sz="1100" i="0" b="0">
+                <a:solidFill>
+                  <a:srgbClr val="D4D4D4"/>
+                </a:solidFill>
+                <a:latin typeface="Consolas"/>
+              </a:rPr>
+              <a:t> </a:t>
+            </a:r>
+            <a:r>
+              <a:rPr sz="1100" i="0" b="0">
                 <a:solidFill>
                   <a:srgbClr val="D4D4D4"/>
                 </a:solidFill>
@@ -7545,16 +7545,16 @@
               <a:t>modo</a:t>
             </a:r>
             <a:r>
-              <a:rPr sz="1500" i="0" b="0">
-                <a:solidFill>
-                  <a:srgbClr val="D4D4D4"/>
-                </a:solidFill>
-                <a:latin typeface="Consolas"/>
-              </a:rPr>
-              <a:t> </a:t>
-            </a:r>
-            <a:r>
-              <a:rPr sz="1500" i="0" b="0">
+              <a:rPr sz="1100" i="0" b="0">
+                <a:solidFill>
+                  <a:srgbClr val="D4D4D4"/>
+                </a:solidFill>
+                <a:latin typeface="Consolas"/>
+              </a:rPr>
+              <a:t> </a:t>
+            </a:r>
+            <a:r>
+              <a:rPr sz="1100" i="0" b="0">
                 <a:solidFill>
                   <a:srgbClr val="D4D4D4"/>
                 </a:solidFill>
@@ -7563,16 +7563,16 @@
               <a:t>solo</a:t>
             </a:r>
             <a:r>
-              <a:rPr sz="1500" i="0" b="0">
-                <a:solidFill>
-                  <a:srgbClr val="D4D4D4"/>
-                </a:solidFill>
-                <a:latin typeface="Consolas"/>
-              </a:rPr>
-              <a:t> </a:t>
-            </a:r>
-            <a:r>
-              <a:rPr sz="1500" i="0" b="0">
+              <a:rPr sz="1100" i="0" b="0">
+                <a:solidFill>
+                  <a:srgbClr val="D4D4D4"/>
+                </a:solidFill>
+                <a:latin typeface="Consolas"/>
+              </a:rPr>
+              <a:t> </a:t>
+            </a:r>
+            <a:r>
+              <a:rPr sz="1100" i="0" b="0">
                 <a:solidFill>
                   <a:srgbClr val="D4D4D4"/>
                 </a:solidFill>
@@ -7581,7 +7581,7 @@
               <a:t>lectura</a:t>
             </a:r>
             <a:r>
-              <a:rPr sz="1500" i="0" b="0">
+              <a:rPr sz="1100" i="0" b="0">
                 <a:solidFill>
                   <a:srgbClr val="D4D4D4"/>
                 </a:solidFill>
@@ -7593,11 +7593,11 @@
           <a:p>
             <a:pPr>
               <a:spcAft>
-                <a:spcPts val="321"/>
+                <a:spcPts val="235"/>
               </a:spcAft>
             </a:pPr>
             <a:r>
-              <a:rPr sz="1500" i="0" b="0">
+              <a:rPr sz="1100" i="0" b="0">
                 <a:solidFill>
                   <a:srgbClr val="D4D4D4"/>
                 </a:solidFill>
@@ -7606,16 +7606,16 @@
               <a:t>Punto</a:t>
             </a:r>
             <a:r>
-              <a:rPr sz="1500" i="0" b="0">
-                <a:solidFill>
-                  <a:srgbClr val="D4D4D4"/>
-                </a:solidFill>
-                <a:latin typeface="Consolas"/>
-              </a:rPr>
-              <a:t> </a:t>
-            </a:r>
-            <a:r>
-              <a:rPr sz="1500" i="0" b="0">
+              <a:rPr sz="1100" i="0" b="0">
+                <a:solidFill>
+                  <a:srgbClr val="D4D4D4"/>
+                </a:solidFill>
+                <a:latin typeface="Consolas"/>
+              </a:rPr>
+              <a:t> </a:t>
+            </a:r>
+            <a:r>
+              <a:rPr sz="1100" i="0" b="0">
                 <a:solidFill>
                   <a:srgbClr val="D4D4D4"/>
                 </a:solidFill>
@@ -7624,16 +7624,16 @@
               <a:t>de</a:t>
             </a:r>
             <a:r>
-              <a:rPr sz="1500" i="0" b="0">
-                <a:solidFill>
-                  <a:srgbClr val="D4D4D4"/>
-                </a:solidFill>
-                <a:latin typeface="Consolas"/>
-              </a:rPr>
-              <a:t> </a:t>
-            </a:r>
-            <a:r>
-              <a:rPr sz="1500" i="0" b="0">
+              <a:rPr sz="1100" i="0" b="0">
+                <a:solidFill>
+                  <a:srgbClr val="D4D4D4"/>
+                </a:solidFill>
+                <a:latin typeface="Consolas"/>
+              </a:rPr>
+              <a:t> </a:t>
+            </a:r>
+            <a:r>
+              <a:rPr sz="1100" i="0" b="0">
                 <a:solidFill>
                   <a:srgbClr val="D4D4D4"/>
                 </a:solidFill>
@@ -7642,7 +7642,7 @@
               <a:t>extension</a:t>
             </a:r>
             <a:r>
-              <a:rPr sz="1500" i="0" b="0">
+              <a:rPr sz="1100" i="0" b="0">
                 <a:solidFill>
                   <a:srgbClr val="D4D4D4"/>
                 </a:solidFill>
@@ -7651,7 +7651,7 @@
               <a:t>: </a:t>
             </a:r>
             <a:r>
-              <a:rPr sz="1500" i="0" b="0">
+              <a:rPr sz="1100" i="0" b="0">
                 <a:solidFill>
                   <a:srgbClr val="D4D4D4"/>
                 </a:solidFill>
@@ -7660,16 +7660,16 @@
               <a:t>despues</a:t>
             </a:r>
             <a:r>
-              <a:rPr sz="1500" i="0" b="0">
-                <a:solidFill>
-                  <a:srgbClr val="D4D4D4"/>
-                </a:solidFill>
-                <a:latin typeface="Consolas"/>
-              </a:rPr>
-              <a:t> </a:t>
-            </a:r>
-            <a:r>
-              <a:rPr sz="1500" i="0" b="0">
+              <a:rPr sz="1100" i="0" b="0">
+                <a:solidFill>
+                  <a:srgbClr val="D4D4D4"/>
+                </a:solidFill>
+                <a:latin typeface="Consolas"/>
+              </a:rPr>
+              <a:t> </a:t>
+            </a:r>
+            <a:r>
+              <a:rPr sz="1100" i="0" b="0">
                 <a:solidFill>
                   <a:srgbClr val="D4D4D4"/>
                 </a:solidFill>
@@ -7678,16 +7678,16 @@
               <a:t>del</a:t>
             </a:r>
             <a:r>
-              <a:rPr sz="1500" i="0" b="0">
-                <a:solidFill>
-                  <a:srgbClr val="D4D4D4"/>
-                </a:solidFill>
-                <a:latin typeface="Consolas"/>
-              </a:rPr>
-              <a:t> </a:t>
-            </a:r>
-            <a:r>
-              <a:rPr sz="1500" i="0" b="0">
+              <a:rPr sz="1100" i="0" b="0">
+                <a:solidFill>
+                  <a:srgbClr val="D4D4D4"/>
+                </a:solidFill>
+                <a:latin typeface="Consolas"/>
+              </a:rPr>
+              <a:t> </a:t>
+            </a:r>
+            <a:r>
+              <a:rPr sz="1100" i="0" b="0">
                 <a:solidFill>
                   <a:srgbClr val="D4D4D4"/>
                 </a:solidFill>
@@ -7696,16 +7696,16 @@
               <a:t>paso</a:t>
             </a:r>
             <a:r>
-              <a:rPr sz="1500" i="0" b="0">
-                <a:solidFill>
-                  <a:srgbClr val="D4D4D4"/>
-                </a:solidFill>
-                <a:latin typeface="Consolas"/>
-              </a:rPr>
-              <a:t> </a:t>
-            </a:r>
-            <a:r>
-              <a:rPr sz="1500" i="0" b="0">
+              <a:rPr sz="1100" i="0" b="0">
+                <a:solidFill>
+                  <a:srgbClr val="D4D4D4"/>
+                </a:solidFill>
+                <a:latin typeface="Consolas"/>
+              </a:rPr>
+              <a:t> </a:t>
+            </a:r>
+            <a:r>
+              <a:rPr sz="1100" i="0" b="0">
                 <a:solidFill>
                   <a:srgbClr val="B5CEA8"/>
                 </a:solidFill>
@@ -7714,16 +7714,16 @@
               <a:t>4</a:t>
             </a:r>
             <a:r>
-              <a:rPr sz="1500" i="0" b="0">
-                <a:solidFill>
-                  <a:srgbClr val="D4D4D4"/>
-                </a:solidFill>
-                <a:latin typeface="Consolas"/>
-              </a:rPr>
-              <a:t> </a:t>
-            </a:r>
-            <a:r>
-              <a:rPr sz="1500" i="0" b="0">
+              <a:rPr sz="1100" i="0" b="0">
+                <a:solidFill>
+                  <a:srgbClr val="D4D4D4"/>
+                </a:solidFill>
+                <a:latin typeface="Consolas"/>
+              </a:rPr>
+              <a:t> </a:t>
+            </a:r>
+            <a:r>
+              <a:rPr sz="1100" i="0" b="0">
                 <a:solidFill>
                   <a:srgbClr val="D4D4D4"/>
                 </a:solidFill>
@@ -7732,16 +7732,16 @@
               <a:t>puede</a:t>
             </a:r>
             <a:r>
-              <a:rPr sz="1500" i="0" b="0">
-                <a:solidFill>
-                  <a:srgbClr val="D4D4D4"/>
-                </a:solidFill>
-                <a:latin typeface="Consolas"/>
-              </a:rPr>
-              <a:t> </a:t>
-            </a:r>
-            <a:r>
-              <a:rPr sz="1500" i="0" b="0">
+              <a:rPr sz="1100" i="0" b="0">
+                <a:solidFill>
+                  <a:srgbClr val="D4D4D4"/>
+                </a:solidFill>
+                <a:latin typeface="Consolas"/>
+              </a:rPr>
+              <a:t> </a:t>
+            </a:r>
+            <a:r>
+              <a:rPr sz="1100" i="0" b="0">
                 <a:solidFill>
                   <a:srgbClr val="D4D4D4"/>
                 </a:solidFill>
@@ -7750,16 +7750,16 @@
               <a:t>ejecutarse</a:t>
             </a:r>
             <a:r>
-              <a:rPr sz="1500" i="0" b="0">
-                <a:solidFill>
-                  <a:srgbClr val="D4D4D4"/>
-                </a:solidFill>
-                <a:latin typeface="Consolas"/>
-              </a:rPr>
-              <a:t> </a:t>
-            </a:r>
-            <a:r>
-              <a:rPr sz="1500" i="0" b="0">
+              <a:rPr sz="1100" i="0" b="0">
+                <a:solidFill>
+                  <a:srgbClr val="D4D4D4"/>
+                </a:solidFill>
+                <a:latin typeface="Consolas"/>
+              </a:rPr>
+              <a:t> </a:t>
+            </a:r>
+            <a:r>
+              <a:rPr sz="1100" i="0" b="0">
                 <a:solidFill>
                   <a:srgbClr val="D4D4D4"/>
                 </a:solidFill>
@@ -7768,7 +7768,7 @@
               <a:t>CU</a:t>
             </a:r>
             <a:r>
-              <a:rPr sz="1500" i="0" b="0">
+              <a:rPr sz="1100" i="0" b="0">
                 <a:solidFill>
                   <a:srgbClr val="D4D4D4"/>
                 </a:solidFill>
@@ -7777,7 +7777,7 @@
               <a:t>-</a:t>
             </a:r>
             <a:r>
-              <a:rPr sz="1500" i="0" b="0">
+              <a:rPr sz="1100" i="0" b="0">
                 <a:solidFill>
                   <a:srgbClr val="B5CEA8"/>
                 </a:solidFill>
@@ -7786,16 +7786,16 @@
               <a:t>06</a:t>
             </a:r>
             <a:r>
-              <a:rPr sz="1500" i="0" b="0">
-                <a:solidFill>
-                  <a:srgbClr val="D4D4D4"/>
-                </a:solidFill>
-                <a:latin typeface="Consolas"/>
-              </a:rPr>
-              <a:t> </a:t>
-            </a:r>
-            <a:r>
-              <a:rPr sz="1500" i="0" b="0">
+              <a:rPr sz="1100" i="0" b="0">
+                <a:solidFill>
+                  <a:srgbClr val="D4D4D4"/>
+                </a:solidFill>
+                <a:latin typeface="Consolas"/>
+              </a:rPr>
+              <a:t> </a:t>
+            </a:r>
+            <a:r>
+              <a:rPr sz="1100" i="0" b="0">
                 <a:solidFill>
                   <a:srgbClr val="D4D4D4"/>
                 </a:solidFill>
@@ -7804,16 +7804,16 @@
               <a:t>Exportar</a:t>
             </a:r>
             <a:r>
-              <a:rPr sz="1500" i="0" b="0">
-                <a:solidFill>
-                  <a:srgbClr val="D4D4D4"/>
-                </a:solidFill>
-                <a:latin typeface="Consolas"/>
-              </a:rPr>
-              <a:t> </a:t>
-            </a:r>
-            <a:r>
-              <a:rPr sz="1500" i="0" b="0">
+              <a:rPr sz="1100" i="0" b="0">
+                <a:solidFill>
+                  <a:srgbClr val="D4D4D4"/>
+                </a:solidFill>
+                <a:latin typeface="Consolas"/>
+              </a:rPr>
+              <a:t> </a:t>
+            </a:r>
+            <a:r>
+              <a:rPr sz="1100" i="0" b="0">
                 <a:solidFill>
                   <a:srgbClr val="D4D4D4"/>
                 </a:solidFill>
@@ -7822,16 +7822,16 @@
               <a:t>expediente</a:t>
             </a:r>
             <a:r>
-              <a:rPr sz="1500" i="0" b="0">
-                <a:solidFill>
-                  <a:srgbClr val="D4D4D4"/>
-                </a:solidFill>
-                <a:latin typeface="Consolas"/>
-              </a:rPr>
-              <a:t> </a:t>
-            </a:r>
-            <a:r>
-              <a:rPr sz="1500" i="0" b="0">
+              <a:rPr sz="1100" i="0" b="0">
+                <a:solidFill>
+                  <a:srgbClr val="D4D4D4"/>
+                </a:solidFill>
+                <a:latin typeface="Consolas"/>
+              </a:rPr>
+              <a:t> </a:t>
+            </a:r>
+            <a:r>
+              <a:rPr sz="1100" i="0" b="0">
                 <a:solidFill>
                   <a:srgbClr val="D4D4D4"/>
                 </a:solidFill>
@@ -7840,16 +7840,16 @@
               <a:t>a</a:t>
             </a:r>
             <a:r>
-              <a:rPr sz="1500" i="0" b="0">
-                <a:solidFill>
-                  <a:srgbClr val="D4D4D4"/>
-                </a:solidFill>
-                <a:latin typeface="Consolas"/>
-              </a:rPr>
-              <a:t> </a:t>
-            </a:r>
-            <a:r>
-              <a:rPr sz="1500" i="0" b="0">
+              <a:rPr sz="1100" i="0" b="0">
+                <a:solidFill>
+                  <a:srgbClr val="D4D4D4"/>
+                </a:solidFill>
+                <a:latin typeface="Consolas"/>
+              </a:rPr>
+              <a:t> </a:t>
+            </a:r>
+            <a:r>
+              <a:rPr sz="1100" i="0" b="0">
                 <a:solidFill>
                   <a:srgbClr val="D4D4D4"/>
                 </a:solidFill>
@@ -7858,7 +7858,7 @@
               <a:t>PDF</a:t>
             </a:r>
             <a:r>
-              <a:rPr sz="1500" i="0" b="0">
+              <a:rPr sz="1100" i="0" b="0">
                 <a:solidFill>
                   <a:srgbClr val="D4D4D4"/>
                 </a:solidFill>
@@ -12072,7 +12072,7 @@
         <p:spPr>
           <a:xfrm>
             <a:off x="457200" y="1261872"/>
-            <a:ext cx="11277295" cy="5052625"/>
+            <a:ext cx="6991923" cy="4798799"/>
           </a:xfrm>
           <a:prstGeom prst="roundRect">
             <a:avLst>
@@ -12117,7 +12117,7 @@
         <p:spPr>
           <a:xfrm>
             <a:off x="457200" y="1261872"/>
-            <a:ext cx="11277295" cy="365760"/>
+            <a:ext cx="6991923" cy="365760"/>
           </a:xfrm>
           <a:prstGeom prst="rect">
             <a:avLst/>
@@ -12289,7 +12289,7 @@
         <p:spPr>
           <a:xfrm>
             <a:off x="1371600" y="1298448"/>
-            <a:ext cx="10180015" cy="292608"/>
+            <a:ext cx="5894643" cy="292608"/>
           </a:xfrm>
           <a:prstGeom prst="rect">
             <a:avLst/>
@@ -12322,7 +12322,7 @@
         <p:spPr>
           <a:xfrm>
             <a:off x="685800" y="1719072"/>
-            <a:ext cx="502920" cy="4458265"/>
+            <a:ext cx="502920" cy="4204439"/>
           </a:xfrm>
           <a:prstGeom prst="rect">
             <a:avLst/>
@@ -12337,11 +12337,11 @@
           <a:p>
             <a:pPr algn="r">
               <a:spcAft>
-                <a:spcPts val="278"/>
+                <a:spcPts val="321"/>
               </a:spcAft>
             </a:pPr>
             <a:r>
-              <a:rPr sz="1300" i="0" b="0">
+              <a:rPr sz="1500" i="0" b="0">
                 <a:solidFill>
                   <a:srgbClr val="858585"/>
                 </a:solidFill>
@@ -12353,11 +12353,11 @@
           <a:p>
             <a:pPr algn="r">
               <a:spcAft>
-                <a:spcPts val="278"/>
+                <a:spcPts val="321"/>
               </a:spcAft>
             </a:pPr>
             <a:r>
-              <a:rPr sz="1300" i="0" b="0">
+              <a:rPr sz="1500" i="0" b="0">
                 <a:solidFill>
                   <a:srgbClr val="858585"/>
                 </a:solidFill>
@@ -12369,11 +12369,11 @@
           <a:p>
             <a:pPr algn="r">
               <a:spcAft>
-                <a:spcPts val="278"/>
+                <a:spcPts val="321"/>
               </a:spcAft>
             </a:pPr>
             <a:r>
-              <a:rPr sz="1300" i="0" b="0">
+              <a:rPr sz="1500" i="0" b="0">
                 <a:solidFill>
                   <a:srgbClr val="858585"/>
                 </a:solidFill>
@@ -12385,11 +12385,11 @@
           <a:p>
             <a:pPr algn="r">
               <a:spcAft>
-                <a:spcPts val="278"/>
+                <a:spcPts val="321"/>
               </a:spcAft>
             </a:pPr>
             <a:r>
-              <a:rPr sz="1300" i="0" b="0">
+              <a:rPr sz="1500" i="0" b="0">
                 <a:solidFill>
                   <a:srgbClr val="858585"/>
                 </a:solidFill>
@@ -12401,11 +12401,11 @@
           <a:p>
             <a:pPr algn="r">
               <a:spcAft>
-                <a:spcPts val="278"/>
+                <a:spcPts val="321"/>
               </a:spcAft>
             </a:pPr>
             <a:r>
-              <a:rPr sz="1300" i="0" b="0">
+              <a:rPr sz="1500" i="0" b="0">
                 <a:solidFill>
                   <a:srgbClr val="858585"/>
                 </a:solidFill>
@@ -12417,11 +12417,11 @@
           <a:p>
             <a:pPr algn="r">
               <a:spcAft>
-                <a:spcPts val="278"/>
+                <a:spcPts val="321"/>
               </a:spcAft>
             </a:pPr>
             <a:r>
-              <a:rPr sz="1300" i="0" b="0">
+              <a:rPr sz="1500" i="0" b="0">
                 <a:solidFill>
                   <a:srgbClr val="858585"/>
                 </a:solidFill>
@@ -12433,11 +12433,11 @@
           <a:p>
             <a:pPr algn="r">
               <a:spcAft>
-                <a:spcPts val="278"/>
+                <a:spcPts val="321"/>
               </a:spcAft>
             </a:pPr>
             <a:r>
-              <a:rPr sz="1300" i="0" b="0">
+              <a:rPr sz="1500" i="0" b="0">
                 <a:solidFill>
                   <a:srgbClr val="858585"/>
                 </a:solidFill>
@@ -12449,11 +12449,11 @@
           <a:p>
             <a:pPr algn="r">
               <a:spcAft>
-                <a:spcPts val="278"/>
+                <a:spcPts val="321"/>
               </a:spcAft>
             </a:pPr>
             <a:r>
-              <a:rPr sz="1300" i="0" b="0">
+              <a:rPr sz="1500" i="0" b="0">
                 <a:solidFill>
                   <a:srgbClr val="858585"/>
                 </a:solidFill>
@@ -12465,11 +12465,11 @@
           <a:p>
             <a:pPr algn="r">
               <a:spcAft>
-                <a:spcPts val="278"/>
+                <a:spcPts val="321"/>
               </a:spcAft>
             </a:pPr>
             <a:r>
-              <a:rPr sz="1300" i="0" b="0">
+              <a:rPr sz="1500" i="0" b="0">
                 <a:solidFill>
                   <a:srgbClr val="858585"/>
                 </a:solidFill>
@@ -12481,11 +12481,11 @@
           <a:p>
             <a:pPr algn="r">
               <a:spcAft>
-                <a:spcPts val="278"/>
+                <a:spcPts val="321"/>
               </a:spcAft>
             </a:pPr>
             <a:r>
-              <a:rPr sz="1300" i="0" b="0">
+              <a:rPr sz="1500" i="0" b="0">
                 <a:solidFill>
                   <a:srgbClr val="858585"/>
                 </a:solidFill>
@@ -12497,11 +12497,11 @@
           <a:p>
             <a:pPr algn="r">
               <a:spcAft>
-                <a:spcPts val="278"/>
+                <a:spcPts val="321"/>
               </a:spcAft>
             </a:pPr>
             <a:r>
-              <a:rPr sz="1300" i="0" b="0">
+              <a:rPr sz="1500" i="0" b="0">
                 <a:solidFill>
                   <a:srgbClr val="858585"/>
                 </a:solidFill>
@@ -12513,11 +12513,11 @@
           <a:p>
             <a:pPr algn="r">
               <a:spcAft>
-                <a:spcPts val="278"/>
+                <a:spcPts val="321"/>
               </a:spcAft>
             </a:pPr>
             <a:r>
-              <a:rPr sz="1300" i="0" b="0">
+              <a:rPr sz="1500" i="0" b="0">
                 <a:solidFill>
                   <a:srgbClr val="858585"/>
                 </a:solidFill>
@@ -12529,11 +12529,11 @@
           <a:p>
             <a:pPr algn="r">
               <a:spcAft>
-                <a:spcPts val="278"/>
+                <a:spcPts val="321"/>
               </a:spcAft>
             </a:pPr>
             <a:r>
-              <a:rPr sz="1300" i="0" b="0">
+              <a:rPr sz="1500" i="0" b="0">
                 <a:solidFill>
                   <a:srgbClr val="858585"/>
                 </a:solidFill>
@@ -12545,11 +12545,11 @@
           <a:p>
             <a:pPr algn="r">
               <a:spcAft>
-                <a:spcPts val="278"/>
+                <a:spcPts val="321"/>
               </a:spcAft>
             </a:pPr>
             <a:r>
-              <a:rPr sz="1300" i="0" b="0">
+              <a:rPr sz="1500" i="0" b="0">
                 <a:solidFill>
                   <a:srgbClr val="858585"/>
                 </a:solidFill>
@@ -12561,65 +12561,17 @@
           <a:p>
             <a:pPr algn="r">
               <a:spcAft>
-                <a:spcPts val="278"/>
+                <a:spcPts val="321"/>
               </a:spcAft>
             </a:pPr>
             <a:r>
-              <a:rPr sz="1300" i="0" b="0">
+              <a:rPr sz="1500" i="0" b="0">
                 <a:solidFill>
                   <a:srgbClr val="858585"/>
                 </a:solidFill>
                 <a:latin typeface="Consolas"/>
               </a:rPr>
               <a:t>15</a:t>
-            </a:r>
-          </a:p>
-          <a:p>
-            <a:pPr algn="r">
-              <a:spcAft>
-                <a:spcPts val="278"/>
-              </a:spcAft>
-            </a:pPr>
-            <a:r>
-              <a:rPr sz="1300" i="0" b="0">
-                <a:solidFill>
-                  <a:srgbClr val="858585"/>
-                </a:solidFill>
-                <a:latin typeface="Consolas"/>
-              </a:rPr>
-              <a:t>16</a:t>
-            </a:r>
-          </a:p>
-          <a:p>
-            <a:pPr algn="r">
-              <a:spcAft>
-                <a:spcPts val="278"/>
-              </a:spcAft>
-            </a:pPr>
-            <a:r>
-              <a:rPr sz="1300" i="0" b="0">
-                <a:solidFill>
-                  <a:srgbClr val="858585"/>
-                </a:solidFill>
-                <a:latin typeface="Consolas"/>
-              </a:rPr>
-              <a:t>17</a:t>
-            </a:r>
-          </a:p>
-          <a:p>
-            <a:pPr algn="r">
-              <a:spcAft>
-                <a:spcPts val="278"/>
-              </a:spcAft>
-            </a:pPr>
-            <a:r>
-              <a:rPr sz="1300" i="0" b="0">
-                <a:solidFill>
-                  <a:srgbClr val="858585"/>
-                </a:solidFill>
-                <a:latin typeface="Consolas"/>
-              </a:rPr>
-              <a:t>18</a:t>
             </a:r>
           </a:p>
         </p:txBody>
@@ -12633,7 +12585,7 @@
         <p:spPr>
           <a:xfrm>
             <a:off x="1188720" y="1719072"/>
-            <a:ext cx="10271455" cy="4458265"/>
+            <a:ext cx="5986083" cy="4204439"/>
           </a:xfrm>
           <a:prstGeom prst="rect">
             <a:avLst/>
@@ -12648,11 +12600,11 @@
           <a:p>
             <a:pPr>
               <a:spcAft>
-                <a:spcPts val="278"/>
+                <a:spcPts val="321"/>
               </a:spcAft>
             </a:pPr>
             <a:r>
-              <a:rPr sz="1300" i="0" b="0">
+              <a:rPr sz="1500" i="0" b="0">
                 <a:solidFill>
                   <a:srgbClr val="D4D4D4"/>
                 </a:solidFill>
@@ -12661,16 +12613,16 @@
               <a:t>flowchart</a:t>
             </a:r>
             <a:r>
-              <a:rPr sz="1300" i="0" b="0">
-                <a:solidFill>
-                  <a:srgbClr val="D4D4D4"/>
-                </a:solidFill>
-                <a:latin typeface="Consolas"/>
-              </a:rPr>
-              <a:t> </a:t>
-            </a:r>
-            <a:r>
-              <a:rPr sz="1300" i="0" b="0">
+              <a:rPr sz="1500" i="0" b="0">
+                <a:solidFill>
+                  <a:srgbClr val="D4D4D4"/>
+                </a:solidFill>
+                <a:latin typeface="Consolas"/>
+              </a:rPr>
+              <a:t> </a:t>
+            </a:r>
+            <a:r>
+              <a:rPr sz="1500" i="0" b="0">
                 <a:solidFill>
                   <a:srgbClr val="D4D4D4"/>
                 </a:solidFill>
@@ -12682,11 +12634,11 @@
           <a:p>
             <a:pPr>
               <a:spcAft>
-                <a:spcPts val="278"/>
+                <a:spcPts val="321"/>
               </a:spcAft>
             </a:pPr>
             <a:r>
-              <a:rPr sz="1300" i="0" b="0">
+              <a:rPr sz="1500" i="0" b="0">
                 <a:solidFill>
                   <a:srgbClr val="D4D4D4"/>
                 </a:solidFill>
@@ -12695,7 +12647,7 @@
               <a:t>  </a:t>
             </a:r>
             <a:r>
-              <a:rPr sz="1300" i="0" b="0">
+              <a:rPr sz="1500" i="0" b="0">
                 <a:solidFill>
                   <a:srgbClr val="DCDCAA"/>
                 </a:solidFill>
@@ -12704,7 +12656,7 @@
               <a:t>rec</a:t>
             </a:r>
             <a:r>
-              <a:rPr sz="1300" i="0" b="0">
+              <a:rPr sz="1500" i="0" b="0">
                 <a:solidFill>
                   <a:srgbClr val="D4D4D4"/>
                 </a:solidFill>
@@ -12713,7 +12665,7 @@
               <a:t>([</a:t>
             </a:r>
             <a:r>
-              <a:rPr sz="1300" i="0" b="0">
+              <a:rPr sz="1500" i="0" b="0">
                 <a:solidFill>
                   <a:srgbClr val="D4D4D4"/>
                 </a:solidFill>
@@ -12722,7 +12674,7 @@
               <a:t>Recepcionista</a:t>
             </a:r>
             <a:r>
-              <a:rPr sz="1300" i="0" b="0">
+              <a:rPr sz="1500" i="0" b="0">
                 <a:solidFill>
                   <a:srgbClr val="D4D4D4"/>
                 </a:solidFill>
@@ -12734,11 +12686,11 @@
           <a:p>
             <a:pPr>
               <a:spcAft>
-                <a:spcPts val="278"/>
+                <a:spcPts val="321"/>
               </a:spcAft>
             </a:pPr>
             <a:r>
-              <a:rPr sz="1300" i="0" b="0">
+              <a:rPr sz="1500" i="0" b="0">
                 <a:solidFill>
                   <a:srgbClr val="D4D4D4"/>
                 </a:solidFill>
@@ -12747,7 +12699,7 @@
               <a:t>  </a:t>
             </a:r>
             <a:r>
-              <a:rPr sz="1300" i="0" b="0">
+              <a:rPr sz="1500" i="0" b="0">
                 <a:solidFill>
                   <a:srgbClr val="DCDCAA"/>
                 </a:solidFill>
@@ -12756,7 +12708,7 @@
               <a:t>vet</a:t>
             </a:r>
             <a:r>
-              <a:rPr sz="1300" i="0" b="0">
+              <a:rPr sz="1500" i="0" b="0">
                 <a:solidFill>
                   <a:srgbClr val="D4D4D4"/>
                 </a:solidFill>
@@ -12765,7 +12717,7 @@
               <a:t>([</a:t>
             </a:r>
             <a:r>
-              <a:rPr sz="1300" i="0" b="0">
+              <a:rPr sz="1500" i="0" b="0">
                 <a:solidFill>
                   <a:srgbClr val="D4D4D4"/>
                 </a:solidFill>
@@ -12774,7 +12726,7 @@
               <a:t>Veterinario</a:t>
             </a:r>
             <a:r>
-              <a:rPr sz="1300" i="0" b="0">
+              <a:rPr sz="1500" i="0" b="0">
                 <a:solidFill>
                   <a:srgbClr val="D4D4D4"/>
                 </a:solidFill>
@@ -12786,11 +12738,11 @@
           <a:p>
             <a:pPr>
               <a:spcAft>
-                <a:spcPts val="278"/>
+                <a:spcPts val="321"/>
               </a:spcAft>
             </a:pPr>
             <a:r>
-              <a:rPr sz="1300" i="0" b="0">
+              <a:rPr sz="1500" i="0" b="0">
                 <a:solidFill>
                   <a:srgbClr val="D4D4D4"/>
                 </a:solidFill>
@@ -12802,11 +12754,11 @@
           <a:p>
             <a:pPr>
               <a:spcAft>
-                <a:spcPts val="278"/>
+                <a:spcPts val="321"/>
               </a:spcAft>
             </a:pPr>
             <a:r>
-              <a:rPr sz="1300" i="0" b="0">
+              <a:rPr sz="1500" i="0" b="0">
                 <a:solidFill>
                   <a:srgbClr val="D4D4D4"/>
                 </a:solidFill>
@@ -12815,7 +12767,7 @@
               <a:t>  </a:t>
             </a:r>
             <a:r>
-              <a:rPr sz="1300" i="0" b="0">
+              <a:rPr sz="1500" i="0" b="0">
                 <a:solidFill>
                   <a:srgbClr val="D4D4D4"/>
                 </a:solidFill>
@@ -12824,16 +12776,16 @@
               <a:t>subgraph</a:t>
             </a:r>
             <a:r>
-              <a:rPr sz="1300" i="0" b="0">
-                <a:solidFill>
-                  <a:srgbClr val="D4D4D4"/>
-                </a:solidFill>
-                <a:latin typeface="Consolas"/>
-              </a:rPr>
-              <a:t> </a:t>
-            </a:r>
-            <a:r>
-              <a:rPr sz="1300" i="0" b="0">
+              <a:rPr sz="1500" i="0" b="0">
+                <a:solidFill>
+                  <a:srgbClr val="D4D4D4"/>
+                </a:solidFill>
+                <a:latin typeface="Consolas"/>
+              </a:rPr>
+              <a:t> </a:t>
+            </a:r>
+            <a:r>
+              <a:rPr sz="1500" i="0" b="0">
                 <a:solidFill>
                   <a:srgbClr val="D4D4D4"/>
                 </a:solidFill>
@@ -12842,7 +12794,7 @@
               <a:t>sistema</a:t>
             </a:r>
             <a:r>
-              <a:rPr sz="1300" i="0" b="0">
+              <a:rPr sz="1500" i="0" b="0">
                 <a:solidFill>
                   <a:srgbClr val="D4D4D4"/>
                 </a:solidFill>
@@ -12851,7 +12803,7 @@
               <a:t>[</a:t>
             </a:r>
             <a:r>
-              <a:rPr sz="1300" i="0" b="0">
+              <a:rPr sz="1500" i="0" b="0">
                 <a:solidFill>
                   <a:srgbClr val="D4D4D4"/>
                 </a:solidFill>
@@ -12860,16 +12812,16 @@
               <a:t>Sistema</a:t>
             </a:r>
             <a:r>
-              <a:rPr sz="1300" i="0" b="0">
-                <a:solidFill>
-                  <a:srgbClr val="D4D4D4"/>
-                </a:solidFill>
-                <a:latin typeface="Consolas"/>
-              </a:rPr>
-              <a:t> </a:t>
-            </a:r>
-            <a:r>
-              <a:rPr sz="1300" i="0" b="0">
+              <a:rPr sz="1500" i="0" b="0">
+                <a:solidFill>
+                  <a:srgbClr val="D4D4D4"/>
+                </a:solidFill>
+                <a:latin typeface="Consolas"/>
+              </a:rPr>
+              <a:t> </a:t>
+            </a:r>
+            <a:r>
+              <a:rPr sz="1500" i="0" b="0">
                 <a:solidFill>
                   <a:srgbClr val="D4D4D4"/>
                 </a:solidFill>
@@ -12878,16 +12830,16 @@
               <a:t>de</a:t>
             </a:r>
             <a:r>
-              <a:rPr sz="1300" i="0" b="0">
-                <a:solidFill>
-                  <a:srgbClr val="D4D4D4"/>
-                </a:solidFill>
-                <a:latin typeface="Consolas"/>
-              </a:rPr>
-              <a:t> </a:t>
-            </a:r>
-            <a:r>
-              <a:rPr sz="1300" i="0" b="0">
+              <a:rPr sz="1500" i="0" b="0">
+                <a:solidFill>
+                  <a:srgbClr val="D4D4D4"/>
+                </a:solidFill>
+                <a:latin typeface="Consolas"/>
+              </a:rPr>
+              <a:t> </a:t>
+            </a:r>
+            <a:r>
+              <a:rPr sz="1500" i="0" b="0">
                 <a:solidFill>
                   <a:srgbClr val="D4D4D4"/>
                 </a:solidFill>
@@ -12896,16 +12848,16 @@
               <a:t>la</a:t>
             </a:r>
             <a:r>
-              <a:rPr sz="1300" i="0" b="0">
-                <a:solidFill>
-                  <a:srgbClr val="D4D4D4"/>
-                </a:solidFill>
-                <a:latin typeface="Consolas"/>
-              </a:rPr>
-              <a:t> </a:t>
-            </a:r>
-            <a:r>
-              <a:rPr sz="1300" i="0" b="0">
+              <a:rPr sz="1500" i="0" b="0">
+                <a:solidFill>
+                  <a:srgbClr val="D4D4D4"/>
+                </a:solidFill>
+                <a:latin typeface="Consolas"/>
+              </a:rPr>
+              <a:t> </a:t>
+            </a:r>
+            <a:r>
+              <a:rPr sz="1500" i="0" b="0">
                 <a:solidFill>
                   <a:srgbClr val="D4D4D4"/>
                 </a:solidFill>
@@ -12914,7 +12866,7 @@
               <a:t>clinica</a:t>
             </a:r>
             <a:r>
-              <a:rPr sz="1300" i="0" b="0">
+              <a:rPr sz="1500" i="0" b="0">
                 <a:solidFill>
                   <a:srgbClr val="D4D4D4"/>
                 </a:solidFill>
@@ -12926,11 +12878,11 @@
           <a:p>
             <a:pPr>
               <a:spcAft>
-                <a:spcPts val="278"/>
+                <a:spcPts val="321"/>
               </a:spcAft>
             </a:pPr>
             <a:r>
-              <a:rPr sz="1300" i="0" b="0">
+              <a:rPr sz="1500" i="0" b="0">
                 <a:solidFill>
                   <a:srgbClr val="D4D4D4"/>
                 </a:solidFill>
@@ -12939,7 +12891,7 @@
               <a:t>    </a:t>
             </a:r>
             <a:r>
-              <a:rPr sz="1300" i="0" b="0">
+              <a:rPr sz="1500" i="0" b="0">
                 <a:solidFill>
                   <a:srgbClr val="DCDCAA"/>
                 </a:solidFill>
@@ -12948,7 +12900,7 @@
               <a:t>cu1</a:t>
             </a:r>
             <a:r>
-              <a:rPr sz="1300" i="0" b="0">
+              <a:rPr sz="1500" i="0" b="0">
                 <a:solidFill>
                   <a:srgbClr val="D4D4D4"/>
                 </a:solidFill>
@@ -12957,7 +12909,7 @@
               <a:t>((</a:t>
             </a:r>
             <a:r>
-              <a:rPr sz="1300" i="0" b="0">
+              <a:rPr sz="1500" i="0" b="0">
                 <a:solidFill>
                   <a:srgbClr val="D4D4D4"/>
                 </a:solidFill>
@@ -12966,7 +12918,7 @@
               <a:t>CU</a:t>
             </a:r>
             <a:r>
-              <a:rPr sz="1300" i="0" b="0">
+              <a:rPr sz="1500" i="0" b="0">
                 <a:solidFill>
                   <a:srgbClr val="D4D4D4"/>
                 </a:solidFill>
@@ -12975,7 +12927,7 @@
               <a:t>-</a:t>
             </a:r>
             <a:r>
-              <a:rPr sz="1300" i="0" b="0">
+              <a:rPr sz="1500" i="0" b="0">
                 <a:solidFill>
                   <a:srgbClr val="B5CEA8"/>
                 </a:solidFill>
@@ -12984,7 +12936,7 @@
               <a:t>01</a:t>
             </a:r>
             <a:r>
-              <a:rPr sz="1300" i="0" b="0">
+              <a:rPr sz="1500" i="0" b="0">
                 <a:solidFill>
                   <a:srgbClr val="D4D4D4"/>
                 </a:solidFill>
@@ -12993,7 +12945,7 @@
               <a:t>&lt;</a:t>
             </a:r>
             <a:r>
-              <a:rPr sz="1300" i="0" b="0">
+              <a:rPr sz="1500" i="0" b="0">
                 <a:solidFill>
                   <a:srgbClr val="D4D4D4"/>
                 </a:solidFill>
@@ -13002,7 +12954,7 @@
               <a:t>br</a:t>
             </a:r>
             <a:r>
-              <a:rPr sz="1300" i="0" b="0">
+              <a:rPr sz="1500" i="0" b="0">
                 <a:solidFill>
                   <a:srgbClr val="D4D4D4"/>
                 </a:solidFill>
@@ -13011,7 +12963,7 @@
               <a:t>/&gt;</a:t>
             </a:r>
             <a:r>
-              <a:rPr sz="1300" i="0" b="0">
+              <a:rPr sz="1500" i="0" b="0">
                 <a:solidFill>
                   <a:srgbClr val="D4D4D4"/>
                 </a:solidFill>
@@ -13020,16 +12972,16 @@
               <a:t>Registrar</a:t>
             </a:r>
             <a:r>
-              <a:rPr sz="1300" i="0" b="0">
-                <a:solidFill>
-                  <a:srgbClr val="D4D4D4"/>
-                </a:solidFill>
-                <a:latin typeface="Consolas"/>
-              </a:rPr>
-              <a:t> </a:t>
-            </a:r>
-            <a:r>
-              <a:rPr sz="1300" i="0" b="0">
+              <a:rPr sz="1500" i="0" b="0">
+                <a:solidFill>
+                  <a:srgbClr val="D4D4D4"/>
+                </a:solidFill>
+                <a:latin typeface="Consolas"/>
+              </a:rPr>
+              <a:t> </a:t>
+            </a:r>
+            <a:r>
+              <a:rPr sz="1500" i="0" b="0">
                 <a:solidFill>
                   <a:srgbClr val="D4D4D4"/>
                 </a:solidFill>
@@ -13038,7 +12990,7 @@
               <a:t>mascota</a:t>
             </a:r>
             <a:r>
-              <a:rPr sz="1300" i="0" b="0">
+              <a:rPr sz="1500" i="0" b="0">
                 <a:solidFill>
                   <a:srgbClr val="D4D4D4"/>
                 </a:solidFill>
@@ -13050,11 +13002,11 @@
           <a:p>
             <a:pPr>
               <a:spcAft>
-                <a:spcPts val="278"/>
+                <a:spcPts val="321"/>
               </a:spcAft>
             </a:pPr>
             <a:r>
-              <a:rPr sz="1300" i="0" b="0">
+              <a:rPr sz="1500" i="0" b="0">
                 <a:solidFill>
                   <a:srgbClr val="D4D4D4"/>
                 </a:solidFill>
@@ -13063,7 +13015,7 @@
               <a:t>    </a:t>
             </a:r>
             <a:r>
-              <a:rPr sz="1300" i="0" b="0">
+              <a:rPr sz="1500" i="0" b="0">
                 <a:solidFill>
                   <a:srgbClr val="DCDCAA"/>
                 </a:solidFill>
@@ -13072,7 +13024,7 @@
               <a:t>cu2</a:t>
             </a:r>
             <a:r>
-              <a:rPr sz="1300" i="0" b="0">
+              <a:rPr sz="1500" i="0" b="0">
                 <a:solidFill>
                   <a:srgbClr val="D4D4D4"/>
                 </a:solidFill>
@@ -13081,7 +13033,7 @@
               <a:t>((</a:t>
             </a:r>
             <a:r>
-              <a:rPr sz="1300" i="0" b="0">
+              <a:rPr sz="1500" i="0" b="0">
                 <a:solidFill>
                   <a:srgbClr val="D4D4D4"/>
                 </a:solidFill>
@@ -13090,7 +13042,7 @@
               <a:t>CU</a:t>
             </a:r>
             <a:r>
-              <a:rPr sz="1300" i="0" b="0">
+              <a:rPr sz="1500" i="0" b="0">
                 <a:solidFill>
                   <a:srgbClr val="D4D4D4"/>
                 </a:solidFill>
@@ -13099,7 +13051,7 @@
               <a:t>-</a:t>
             </a:r>
             <a:r>
-              <a:rPr sz="1300" i="0" b="0">
+              <a:rPr sz="1500" i="0" b="0">
                 <a:solidFill>
                   <a:srgbClr val="B5CEA8"/>
                 </a:solidFill>
@@ -13108,7 +13060,7 @@
               <a:t>02</a:t>
             </a:r>
             <a:r>
-              <a:rPr sz="1300" i="0" b="0">
+              <a:rPr sz="1500" i="0" b="0">
                 <a:solidFill>
                   <a:srgbClr val="D4D4D4"/>
                 </a:solidFill>
@@ -13117,7 +13069,7 @@
               <a:t>&lt;</a:t>
             </a:r>
             <a:r>
-              <a:rPr sz="1300" i="0" b="0">
+              <a:rPr sz="1500" i="0" b="0">
                 <a:solidFill>
                   <a:srgbClr val="D4D4D4"/>
                 </a:solidFill>
@@ -13126,7 +13078,7 @@
               <a:t>br</a:t>
             </a:r>
             <a:r>
-              <a:rPr sz="1300" i="0" b="0">
+              <a:rPr sz="1500" i="0" b="0">
                 <a:solidFill>
                   <a:srgbClr val="D4D4D4"/>
                 </a:solidFill>
@@ -13135,7 +13087,7 @@
               <a:t>/&gt;</a:t>
             </a:r>
             <a:r>
-              <a:rPr sz="1300" i="0" b="0">
+              <a:rPr sz="1500" i="0" b="0">
                 <a:solidFill>
                   <a:srgbClr val="D4D4D4"/>
                 </a:solidFill>
@@ -13144,16 +13096,16 @@
               <a:t>Buscar</a:t>
             </a:r>
             <a:r>
-              <a:rPr sz="1300" i="0" b="0">
-                <a:solidFill>
-                  <a:srgbClr val="D4D4D4"/>
-                </a:solidFill>
-                <a:latin typeface="Consolas"/>
-              </a:rPr>
-              <a:t> </a:t>
-            </a:r>
-            <a:r>
-              <a:rPr sz="1300" i="0" b="0">
+              <a:rPr sz="1500" i="0" b="0">
+                <a:solidFill>
+                  <a:srgbClr val="D4D4D4"/>
+                </a:solidFill>
+                <a:latin typeface="Consolas"/>
+              </a:rPr>
+              <a:t> </a:t>
+            </a:r>
+            <a:r>
+              <a:rPr sz="1500" i="0" b="0">
                 <a:solidFill>
                   <a:srgbClr val="D4D4D4"/>
                 </a:solidFill>
@@ -13162,7 +13114,7 @@
               <a:t>expediente</a:t>
             </a:r>
             <a:r>
-              <a:rPr sz="1300" i="0" b="0">
+              <a:rPr sz="1500" i="0" b="0">
                 <a:solidFill>
                   <a:srgbClr val="D4D4D4"/>
                 </a:solidFill>
@@ -13174,11 +13126,11 @@
           <a:p>
             <a:pPr>
               <a:spcAft>
-                <a:spcPts val="278"/>
+                <a:spcPts val="321"/>
               </a:spcAft>
             </a:pPr>
             <a:r>
-              <a:rPr sz="1300" i="0" b="0">
+              <a:rPr sz="1500" i="0" b="0">
                 <a:solidFill>
                   <a:srgbClr val="D4D4D4"/>
                 </a:solidFill>
@@ -13187,7 +13139,7 @@
               <a:t>    </a:t>
             </a:r>
             <a:r>
-              <a:rPr sz="1300" i="0" b="0">
+              <a:rPr sz="1500" i="0" b="0">
                 <a:solidFill>
                   <a:srgbClr val="DCDCAA"/>
                 </a:solidFill>
@@ -13196,7 +13148,7 @@
               <a:t>cu3</a:t>
             </a:r>
             <a:r>
-              <a:rPr sz="1300" i="0" b="0">
+              <a:rPr sz="1500" i="0" b="0">
                 <a:solidFill>
                   <a:srgbClr val="D4D4D4"/>
                 </a:solidFill>
@@ -13205,7 +13157,7 @@
               <a:t>((</a:t>
             </a:r>
             <a:r>
-              <a:rPr sz="1300" i="0" b="0">
+              <a:rPr sz="1500" i="0" b="0">
                 <a:solidFill>
                   <a:srgbClr val="D4D4D4"/>
                 </a:solidFill>
@@ -13214,7 +13166,7 @@
               <a:t>CU</a:t>
             </a:r>
             <a:r>
-              <a:rPr sz="1300" i="0" b="0">
+              <a:rPr sz="1500" i="0" b="0">
                 <a:solidFill>
                   <a:srgbClr val="D4D4D4"/>
                 </a:solidFill>
@@ -13223,7 +13175,7 @@
               <a:t>-</a:t>
             </a:r>
             <a:r>
-              <a:rPr sz="1300" i="0" b="0">
+              <a:rPr sz="1500" i="0" b="0">
                 <a:solidFill>
                   <a:srgbClr val="B5CEA8"/>
                 </a:solidFill>
@@ -13232,7 +13184,7 @@
               <a:t>04</a:t>
             </a:r>
             <a:r>
-              <a:rPr sz="1300" i="0" b="0">
+              <a:rPr sz="1500" i="0" b="0">
                 <a:solidFill>
                   <a:srgbClr val="D4D4D4"/>
                 </a:solidFill>
@@ -13241,7 +13193,7 @@
               <a:t>&lt;</a:t>
             </a:r>
             <a:r>
-              <a:rPr sz="1300" i="0" b="0">
+              <a:rPr sz="1500" i="0" b="0">
                 <a:solidFill>
                   <a:srgbClr val="D4D4D4"/>
                 </a:solidFill>
@@ -13250,7 +13202,7 @@
               <a:t>br</a:t>
             </a:r>
             <a:r>
-              <a:rPr sz="1300" i="0" b="0">
+              <a:rPr sz="1500" i="0" b="0">
                 <a:solidFill>
                   <a:srgbClr val="D4D4D4"/>
                 </a:solidFill>
@@ -13259,7 +13211,7 @@
               <a:t>/&gt;</a:t>
             </a:r>
             <a:r>
-              <a:rPr sz="1300" i="0" b="0">
+              <a:rPr sz="1500" i="0" b="0">
                 <a:solidFill>
                   <a:srgbClr val="D4D4D4"/>
                 </a:solidFill>
@@ -13268,16 +13220,16 @@
               <a:t>Agendar</a:t>
             </a:r>
             <a:r>
-              <a:rPr sz="1300" i="0" b="0">
-                <a:solidFill>
-                  <a:srgbClr val="D4D4D4"/>
-                </a:solidFill>
-                <a:latin typeface="Consolas"/>
-              </a:rPr>
-              <a:t> </a:t>
-            </a:r>
-            <a:r>
-              <a:rPr sz="1300" i="0" b="0">
+              <a:rPr sz="1500" i="0" b="0">
+                <a:solidFill>
+                  <a:srgbClr val="D4D4D4"/>
+                </a:solidFill>
+                <a:latin typeface="Consolas"/>
+              </a:rPr>
+              <a:t> </a:t>
+            </a:r>
+            <a:r>
+              <a:rPr sz="1500" i="0" b="0">
                 <a:solidFill>
                   <a:srgbClr val="D4D4D4"/>
                 </a:solidFill>
@@ -13286,7 +13238,7 @@
               <a:t>cita</a:t>
             </a:r>
             <a:r>
-              <a:rPr sz="1300" i="0" b="0">
+              <a:rPr sz="1500" i="0" b="0">
                 <a:solidFill>
                   <a:srgbClr val="D4D4D4"/>
                 </a:solidFill>
@@ -13298,11 +13250,11 @@
           <a:p>
             <a:pPr>
               <a:spcAft>
-                <a:spcPts val="278"/>
+                <a:spcPts val="321"/>
               </a:spcAft>
             </a:pPr>
             <a:r>
-              <a:rPr sz="1300" i="0" b="0">
+              <a:rPr sz="1500" i="0" b="0">
                 <a:solidFill>
                   <a:srgbClr val="D4D4D4"/>
                 </a:solidFill>
@@ -13311,7 +13263,7 @@
               <a:t>    </a:t>
             </a:r>
             <a:r>
-              <a:rPr sz="1300" i="0" b="0">
+              <a:rPr sz="1500" i="0" b="0">
                 <a:solidFill>
                   <a:srgbClr val="DCDCAA"/>
                 </a:solidFill>
@@ -13320,7 +13272,7 @@
               <a:t>cu4</a:t>
             </a:r>
             <a:r>
-              <a:rPr sz="1300" i="0" b="0">
+              <a:rPr sz="1500" i="0" b="0">
                 <a:solidFill>
                   <a:srgbClr val="D4D4D4"/>
                 </a:solidFill>
@@ -13329,7 +13281,7 @@
               <a:t>((</a:t>
             </a:r>
             <a:r>
-              <a:rPr sz="1300" i="0" b="0">
+              <a:rPr sz="1500" i="0" b="0">
                 <a:solidFill>
                   <a:srgbClr val="D4D4D4"/>
                 </a:solidFill>
@@ -13338,7 +13290,7 @@
               <a:t>Validar</a:t>
             </a:r>
             <a:r>
-              <a:rPr sz="1300" i="0" b="0">
+              <a:rPr sz="1500" i="0" b="0">
                 <a:solidFill>
                   <a:srgbClr val="D4D4D4"/>
                 </a:solidFill>
@@ -13347,7 +13299,7 @@
               <a:t>&lt;</a:t>
             </a:r>
             <a:r>
-              <a:rPr sz="1300" i="0" b="0">
+              <a:rPr sz="1500" i="0" b="0">
                 <a:solidFill>
                   <a:srgbClr val="D4D4D4"/>
                 </a:solidFill>
@@ -13356,7 +13308,7 @@
               <a:t>br</a:t>
             </a:r>
             <a:r>
-              <a:rPr sz="1300" i="0" b="0">
+              <a:rPr sz="1500" i="0" b="0">
                 <a:solidFill>
                   <a:srgbClr val="D4D4D4"/>
                 </a:solidFill>
@@ -13365,7 +13317,7 @@
               <a:t>/&gt;</a:t>
             </a:r>
             <a:r>
-              <a:rPr sz="1300" i="0" b="0">
+              <a:rPr sz="1500" i="0" b="0">
                 <a:solidFill>
                   <a:srgbClr val="D4D4D4"/>
                 </a:solidFill>
@@ -13374,7 +13326,7 @@
               <a:t>disponibilidad</a:t>
             </a:r>
             <a:r>
-              <a:rPr sz="1300" i="0" b="0">
+              <a:rPr sz="1500" i="0" b="0">
                 <a:solidFill>
                   <a:srgbClr val="D4D4D4"/>
                 </a:solidFill>
@@ -13386,11 +13338,11 @@
           <a:p>
             <a:pPr>
               <a:spcAft>
-                <a:spcPts val="278"/>
+                <a:spcPts val="321"/>
               </a:spcAft>
             </a:pPr>
             <a:r>
-              <a:rPr sz="1300" i="0" b="0">
+              <a:rPr sz="1500" i="0" b="0">
                 <a:solidFill>
                   <a:srgbClr val="D4D4D4"/>
                 </a:solidFill>
@@ -13399,7 +13351,7 @@
               <a:t>  </a:t>
             </a:r>
             <a:r>
-              <a:rPr sz="1300" i="0" b="0">
+              <a:rPr sz="1500" i="0" b="0">
                 <a:solidFill>
                   <a:srgbClr val="D4D4D4"/>
                 </a:solidFill>
@@ -13411,11 +13363,11 @@
           <a:p>
             <a:pPr>
               <a:spcAft>
-                <a:spcPts val="278"/>
+                <a:spcPts val="321"/>
               </a:spcAft>
             </a:pPr>
             <a:r>
-              <a:rPr sz="1300" i="0" b="0">
+              <a:rPr sz="1500" i="0" b="0">
                 <a:solidFill>
                   <a:srgbClr val="D4D4D4"/>
                 </a:solidFill>
@@ -13427,11 +13379,11 @@
           <a:p>
             <a:pPr>
               <a:spcAft>
-                <a:spcPts val="278"/>
+                <a:spcPts val="321"/>
               </a:spcAft>
             </a:pPr>
             <a:r>
-              <a:rPr sz="1300" i="0" b="0">
+              <a:rPr sz="1500" i="0" b="0">
                 <a:solidFill>
                   <a:srgbClr val="D4D4D4"/>
                 </a:solidFill>
@@ -13440,7 +13392,7 @@
               <a:t>  </a:t>
             </a:r>
             <a:r>
-              <a:rPr sz="1300" i="0" b="0">
+              <a:rPr sz="1500" i="0" b="0">
                 <a:solidFill>
                   <a:srgbClr val="D4D4D4"/>
                 </a:solidFill>
@@ -13449,7 +13401,7 @@
               <a:t>rec</a:t>
             </a:r>
             <a:r>
-              <a:rPr sz="1300" i="0" b="0">
+              <a:rPr sz="1500" i="0" b="0">
                 <a:solidFill>
                   <a:srgbClr val="D4D4D4"/>
                 </a:solidFill>
@@ -13458,7 +13410,7 @@
               <a:t> --&gt; </a:t>
             </a:r>
             <a:r>
-              <a:rPr sz="1300" i="0" b="0">
+              <a:rPr sz="1500" i="0" b="0">
                 <a:solidFill>
                   <a:srgbClr val="D4D4D4"/>
                 </a:solidFill>
@@ -13470,11 +13422,11 @@
           <a:p>
             <a:pPr>
               <a:spcAft>
-                <a:spcPts val="278"/>
+                <a:spcPts val="321"/>
               </a:spcAft>
             </a:pPr>
             <a:r>
-              <a:rPr sz="1300" i="0" b="0">
+              <a:rPr sz="1500" i="0" b="0">
                 <a:solidFill>
                   <a:srgbClr val="D4D4D4"/>
                 </a:solidFill>
@@ -13483,7 +13435,7 @@
               <a:t>  </a:t>
             </a:r>
             <a:r>
-              <a:rPr sz="1300" i="0" b="0">
+              <a:rPr sz="1500" i="0" b="0">
                 <a:solidFill>
                   <a:srgbClr val="D4D4D4"/>
                 </a:solidFill>
@@ -13492,7 +13444,7 @@
               <a:t>rec</a:t>
             </a:r>
             <a:r>
-              <a:rPr sz="1300" i="0" b="0">
+              <a:rPr sz="1500" i="0" b="0">
                 <a:solidFill>
                   <a:srgbClr val="D4D4D4"/>
                 </a:solidFill>
@@ -13501,7 +13453,7 @@
               <a:t> --&gt; </a:t>
             </a:r>
             <a:r>
-              <a:rPr sz="1300" i="0" b="0">
+              <a:rPr sz="1500" i="0" b="0">
                 <a:solidFill>
                   <a:srgbClr val="D4D4D4"/>
                 </a:solidFill>
@@ -13513,11 +13465,11 @@
           <a:p>
             <a:pPr>
               <a:spcAft>
-                <a:spcPts val="278"/>
+                <a:spcPts val="321"/>
               </a:spcAft>
             </a:pPr>
             <a:r>
-              <a:rPr sz="1300" i="0" b="0">
+              <a:rPr sz="1500" i="0" b="0">
                 <a:solidFill>
                   <a:srgbClr val="D4D4D4"/>
                 </a:solidFill>
@@ -13526,7 +13478,7 @@
               <a:t>  </a:t>
             </a:r>
             <a:r>
-              <a:rPr sz="1300" i="0" b="0">
+              <a:rPr sz="1500" i="0" b="0">
                 <a:solidFill>
                   <a:srgbClr val="D4D4D4"/>
                 </a:solidFill>
@@ -13535,7 +13487,7 @@
               <a:t>vet</a:t>
             </a:r>
             <a:r>
-              <a:rPr sz="1300" i="0" b="0">
+              <a:rPr sz="1500" i="0" b="0">
                 <a:solidFill>
                   <a:srgbClr val="D4D4D4"/>
                 </a:solidFill>
@@ -13544,7 +13496,7 @@
               <a:t> --&gt; </a:t>
             </a:r>
             <a:r>
-              <a:rPr sz="1300" i="0" b="0">
+              <a:rPr sz="1500" i="0" b="0">
                 <a:solidFill>
                   <a:srgbClr val="D4D4D4"/>
                 </a:solidFill>
@@ -13556,11 +13508,11 @@
           <a:p>
             <a:pPr>
               <a:spcAft>
-                <a:spcPts val="278"/>
+                <a:spcPts val="321"/>
               </a:spcAft>
             </a:pPr>
             <a:r>
-              <a:rPr sz="1300" i="0" b="0">
+              <a:rPr sz="1500" i="0" b="0">
                 <a:solidFill>
                   <a:srgbClr val="D4D4D4"/>
                 </a:solidFill>
@@ -13569,7 +13521,7 @@
               <a:t>  </a:t>
             </a:r>
             <a:r>
-              <a:rPr sz="1300" i="0" b="0">
+              <a:rPr sz="1500" i="0" b="0">
                 <a:solidFill>
                   <a:srgbClr val="D4D4D4"/>
                 </a:solidFill>
@@ -13578,7 +13530,7 @@
               <a:t>cu3</a:t>
             </a:r>
             <a:r>
-              <a:rPr sz="1300" i="0" b="0">
+              <a:rPr sz="1500" i="0" b="0">
                 <a:solidFill>
                   <a:srgbClr val="D4D4D4"/>
                 </a:solidFill>
@@ -13587,7 +13539,7 @@
               <a:t> -.</a:t>
             </a:r>
             <a:r>
-              <a:rPr sz="1300" i="0" b="0">
+              <a:rPr sz="1500" i="0" b="0">
                 <a:solidFill>
                   <a:srgbClr val="D4D4D4"/>
                 </a:solidFill>
@@ -13596,7 +13548,7 @@
               <a:t>include</a:t>
             </a:r>
             <a:r>
-              <a:rPr sz="1300" i="0" b="0">
+              <a:rPr sz="1500" i="0" b="0">
                 <a:solidFill>
                   <a:srgbClr val="D4D4D4"/>
                 </a:solidFill>
@@ -13605,7 +13557,7 @@
               <a:t>.-&gt; </a:t>
             </a:r>
             <a:r>
-              <a:rPr sz="1300" i="0" b="0">
+              <a:rPr sz="1500" i="0" b="0">
                 <a:solidFill>
                   <a:srgbClr val="D4D4D4"/>
                 </a:solidFill>
@@ -13614,59 +13566,150 @@
               <a:t>cu4</a:t>
             </a:r>
           </a:p>
-          <a:p>
-            <a:pPr>
-              <a:spcAft>
-                <a:spcPts val="278"/>
-              </a:spcAft>
-            </a:pPr>
-            <a:r>
-              <a:rPr sz="1300" i="0" b="0">
-                <a:solidFill>
-                  <a:srgbClr val="D4D4D4"/>
-                </a:solidFill>
-                <a:latin typeface="Consolas"/>
-              </a:rPr>
-              <a:t/>
-            </a:r>
-          </a:p>
-          <a:p>
-            <a:pPr>
-              <a:spcAft>
-                <a:spcPts val="278"/>
-              </a:spcAft>
-            </a:pPr>
-            <a:r>
-              <a:rPr sz="1300" i="1" b="0">
-                <a:solidFill>
-                  <a:srgbClr val="6A9955"/>
-                </a:solidFill>
-                <a:latin typeface="Consolas"/>
-              </a:rPr>
-              <a:t>%% include: el caso base SIEMPRE lo ejecuta (agendar siempre valida).</a:t>
-            </a:r>
-          </a:p>
-          <a:p>
-            <a:pPr>
-              <a:spcAft>
-                <a:spcPts val="278"/>
-              </a:spcAft>
-            </a:pPr>
-            <a:r>
-              <a:rPr sz="1300" i="1" b="0">
-                <a:solidFill>
-                  <a:srgbClr val="6A9955"/>
-                </a:solidFill>
-                <a:latin typeface="Consolas"/>
-              </a:rPr>
-              <a:t>%% extend:  solo si se cumple una condicion (buscar expediente + exportar a PDF).</a:t>
-            </a:r>
-          </a:p>
-        </p:txBody>
-      </p:sp>
-      <p:sp>
-        <p:nvSpPr>
-          <p:cNvPr id="13" name="TextBox 12"/>
+        </p:txBody>
+      </p:sp>
+      <p:sp>
+        <p:nvSpPr>
+          <p:cNvPr id="13" name="Rounded Rectangle 12"/>
+          <p:cNvSpPr/>
+          <p:nvPr/>
+        </p:nvSpPr>
+        <p:spPr>
+          <a:xfrm>
+            <a:off x="7668579" y="1261872"/>
+            <a:ext cx="4120780" cy="3318569"/>
+          </a:xfrm>
+          <a:prstGeom prst="roundRect">
+            <a:avLst>
+              <a:gd name="adj" fmla="val 4000"/>
+            </a:avLst>
+          </a:prstGeom>
+          <a:solidFill>
+            <a:srgbClr val="E8EEF4"/>
+          </a:solidFill>
+          <a:ln>
+            <a:noFill/>
+          </a:ln>
+        </p:spPr>
+        <p:style>
+          <a:lnRef idx="1">
+            <a:schemeClr val="accent1"/>
+          </a:lnRef>
+          <a:fillRef idx="3">
+            <a:schemeClr val="accent1"/>
+          </a:fillRef>
+          <a:effectRef idx="2">
+            <a:schemeClr val="accent1"/>
+          </a:effectRef>
+          <a:fontRef idx="minor">
+            <a:schemeClr val="lt1"/>
+          </a:fontRef>
+        </p:style>
+        <p:txBody>
+          <a:bodyPr rtlCol="0" anchor="ctr"/>
+          <a:lstStyle/>
+          <a:p>
+            <a:pPr algn="ctr"/>
+          </a:p>
+        </p:txBody>
+      </p:sp>
+      <p:pic>
+        <p:nvPicPr>
+          <p:cNvPr id="14" name="Picture 13" descr="dg-casos-uso-paso1.png"/>
+          <p:cNvPicPr>
+            <a:picLocks noChangeAspect="1"/>
+          </p:cNvPicPr>
+          <p:nvPr/>
+        </p:nvPicPr>
+        <p:blipFill>
+          <a:blip r:embed="rId2"/>
+          <a:stretch>
+            <a:fillRect/>
+          </a:stretch>
+        </p:blipFill>
+        <p:spPr>
+          <a:xfrm>
+            <a:off x="7723443" y="1316736"/>
+            <a:ext cx="4011052" cy="3208841"/>
+          </a:xfrm>
+          <a:prstGeom prst="rect">
+            <a:avLst/>
+          </a:prstGeom>
+        </p:spPr>
+      </p:pic>
+      <p:sp>
+        <p:nvSpPr>
+          <p:cNvPr id="15" name="TextBox 14"/>
+          <p:cNvSpPr txBox="1"/>
+          <p:nvPr/>
+        </p:nvSpPr>
+        <p:spPr>
+          <a:xfrm>
+            <a:off x="7723443" y="4580441"/>
+            <a:ext cx="4011052" cy="320040"/>
+          </a:xfrm>
+          <a:prstGeom prst="rect">
+            <a:avLst/>
+          </a:prstGeom>
+          <a:noFill/>
+        </p:spPr>
+        <p:txBody>
+          <a:bodyPr wrap="square">
+            <a:spAutoFit/>
+          </a:bodyPr>
+          <a:lstStyle/>
+          <a:p>
+            <a:pPr algn="ctr"/>
+            <a:r>
+              <a:rPr sz="1200" b="0" i="1">
+                <a:solidFill>
+                  <a:srgbClr val="666666"/>
+                </a:solidFill>
+                <a:latin typeface="Calibri"/>
+              </a:rPr>
+              <a:t>Lo que dibuja este código</a:t>
+            </a:r>
+          </a:p>
+        </p:txBody>
+      </p:sp>
+      <p:sp>
+        <p:nvSpPr>
+          <p:cNvPr id="16" name="TextBox 15"/>
+          <p:cNvSpPr txBox="1"/>
+          <p:nvPr/>
+        </p:nvSpPr>
+        <p:spPr>
+          <a:xfrm>
+            <a:off x="457200" y="6035040"/>
+            <a:ext cx="11277295" cy="365760"/>
+          </a:xfrm>
+          <a:prstGeom prst="rect">
+            <a:avLst/>
+          </a:prstGeom>
+          <a:noFill/>
+        </p:spPr>
+        <p:txBody>
+          <a:bodyPr wrap="square">
+            <a:spAutoFit/>
+          </a:bodyPr>
+          <a:lstStyle/>
+          <a:p>
+            <a:pPr algn="ctr"/>
+            <a:r>
+              <a:rPr sz="1300" b="0" i="1">
+                <a:solidFill>
+                  <a:srgbClr val="666666"/>
+                </a:solidFill>
+                <a:latin typeface="Calibri"/>
+              </a:rPr>
+              <a:t>include: el caso base siempre lo ejecuta (agendar siempre valida). extend: solo si se cumple una condicion.</a:t>
+            </a:r>
+          </a:p>
+        </p:txBody>
+      </p:sp>
+      <p:sp>
+        <p:nvSpPr>
+          <p:cNvPr id="17" name="TextBox 16"/>
           <p:cNvSpPr txBox="1"/>
           <p:nvPr/>
         </p:nvSpPr>

--- a/Seminario de Sistemas/Clases/Clase 9 - Casos de uso/Presentacion.pptx
+++ b/Seminario de Sistemas/Clases/Clase 9 - Casos de uso/Presentacion.pptx
@@ -644,7 +644,7 @@
           <a:p/>
           <a:p>
             <a:r>
-              <a:t>Una misma persona puede encarnar dos actores, por ejemplo el veterinario dueño de la clinica que a veces atiende y a veces revisa las metricas: alli actua como Veterinario y como Administrador, y por eso aparecen dos monigotes.</a:t>
+              <a:t>Una misma persona puede encarnar dos actores, por ejemplo el veterinario dueño de la clinica que a veces atiende y a veces revisa las metricas: alli actua como Veterinario y como Administrador, y por eso aparecen dos figuras de actor.</a:t>
             </a:r>
           </a:p>
           <a:p/>
